--- a/ChaosProbe_Presentation.pptx
+++ b/ChaosProbe_Presentation.pptx
@@ -12480,7 +12480,7 @@
               </a:defRPr>
             </a:pPr>
             <a:r>
-              <a:t>• Antagonistic: high — heavy pods on</a:t>
+              <a:t>• Adversarial: high — heavy pods on</a:t>
             </a:r>
             <a:br/>
             <a:r>
@@ -12950,7 +12950,7 @@
               </a:defRPr>
             </a:pPr>
             <a:r>
-              <a:t>Antagonistic</a:t>
+              <a:t>Adversarial</a:t>
             </a:r>
           </a:p>
         </p:txBody>
@@ -13653,8 +13653,8 @@
         </p:nvSpPr>
         <p:spPr>
           <a:xfrm>
-            <a:off x="457200" y="4389120"/>
-            <a:ext cx="11064240" cy="1188720"/>
+            <a:off x="457200" y="4251960"/>
+            <a:ext cx="11064240" cy="1417320"/>
           </a:xfrm>
           <a:prstGeom prst="roundRect">
             <a:avLst/>
@@ -13698,7 +13698,7 @@
         </p:nvSpPr>
         <p:spPr>
           <a:xfrm>
-            <a:off x="640080" y="4389120"/>
+            <a:off x="640080" y="4251960"/>
             <a:ext cx="10698480" cy="320040"/>
           </a:xfrm>
           <a:prstGeom prst="rect">
@@ -13713,7 +13713,7 @@
           <a:lstStyle/>
           <a:p>
             <a:pPr algn="l">
-              <a:defRPr sz="1800" b="1">
+              <a:defRPr sz="1600" b="1">
                 <a:solidFill>
                   <a:srgbClr val="F39C12"/>
                 </a:solidFill>
@@ -13734,8 +13734,8 @@
         </p:nvSpPr>
         <p:spPr>
           <a:xfrm>
-            <a:off x="640080" y="4754880"/>
-            <a:ext cx="4937760" cy="731520"/>
+            <a:off x="640080" y="4572000"/>
+            <a:ext cx="5120640" cy="1051560"/>
           </a:xfrm>
           <a:prstGeom prst="rect">
             <a:avLst/>
@@ -13755,7 +13755,7 @@
               <a:spcAft>
                 <a:spcPts val="200"/>
               </a:spcAft>
-              <a:defRPr sz="1200">
+              <a:defRPr sz="1100">
                 <a:solidFill>
                   <a:srgbClr val="BDBDBD"/>
                 </a:solidFill>
@@ -13778,7 +13778,7 @@
               <a:spcAft>
                 <a:spcPts val="200"/>
               </a:spcAft>
-              <a:defRPr sz="1200">
+              <a:defRPr sz="1100">
                 <a:solidFill>
                   <a:srgbClr val="BDBDBD"/>
                 </a:solidFill>
@@ -13797,7 +13797,7 @@
               <a:spcAft>
                 <a:spcPts val="200"/>
               </a:spcAft>
-              <a:defRPr sz="1200">
+              <a:defRPr sz="1100">
                 <a:solidFill>
                   <a:srgbClr val="BDBDBD"/>
                 </a:solidFill>
@@ -13818,8 +13818,8 @@
         </p:nvSpPr>
         <p:spPr>
           <a:xfrm>
-            <a:off x="6217920" y="4754880"/>
-            <a:ext cx="4937760" cy="731520"/>
+            <a:off x="6126480" y="4572000"/>
+            <a:ext cx="5212080" cy="1051560"/>
           </a:xfrm>
           <a:prstGeom prst="rect">
             <a:avLst/>
@@ -13839,7 +13839,7 @@
               <a:spcAft>
                 <a:spcPts val="200"/>
               </a:spcAft>
-              <a:defRPr sz="1200">
+              <a:defRPr sz="1100">
                 <a:solidFill>
                   <a:srgbClr val="BDBDBD"/>
                 </a:solidFill>
@@ -13858,7 +13858,7 @@
               <a:spcAft>
                 <a:spcPts val="200"/>
               </a:spcAft>
-              <a:defRPr sz="1200">
+              <a:defRPr sz="1100">
                 <a:solidFill>
                   <a:srgbClr val="BDBDBD"/>
                 </a:solidFill>
@@ -13877,7 +13877,7 @@
               <a:spcAft>
                 <a:spcPts val="200"/>
               </a:spcAft>
-              <a:defRPr sz="1200">
+              <a:defRPr sz="1100">
                 <a:solidFill>
                   <a:srgbClr val="BDBDBD"/>
                 </a:solidFill>
@@ -13898,8 +13898,8 @@
         </p:nvSpPr>
         <p:spPr>
           <a:xfrm>
-            <a:off x="457200" y="5760720"/>
-            <a:ext cx="11064240" cy="914400"/>
+            <a:off x="457200" y="5806440"/>
+            <a:ext cx="11064240" cy="960120"/>
           </a:xfrm>
           <a:prstGeom prst="roundRect">
             <a:avLst/>
@@ -13943,7 +13943,7 @@
         </p:nvSpPr>
         <p:spPr>
           <a:xfrm>
-            <a:off x="640080" y="5760720"/>
+            <a:off x="640080" y="5806440"/>
             <a:ext cx="10698480" cy="274320"/>
           </a:xfrm>
           <a:prstGeom prst="rect">
@@ -13958,7 +13958,7 @@
           <a:lstStyle/>
           <a:p>
             <a:pPr algn="l">
-              <a:defRPr sz="1800" b="1">
+              <a:defRPr sz="1400" b="1">
                 <a:solidFill>
                   <a:srgbClr val="0096D6"/>
                 </a:solidFill>
@@ -13980,7 +13980,7 @@
         <p:spPr>
           <a:xfrm>
             <a:off x="640080" y="6080760"/>
-            <a:ext cx="10698480" cy="548640"/>
+            <a:ext cx="10698480" cy="640080"/>
           </a:xfrm>
           <a:prstGeom prst="rect">
             <a:avLst/>
@@ -13994,7 +13994,7 @@
           <a:lstStyle/>
           <a:p>
             <a:pPr algn="l">
-              <a:defRPr sz="1400" b="0">
+              <a:defRPr sz="1100" b="0">
                 <a:solidFill>
                   <a:srgbClr val="FFFFFF"/>
                 </a:solidFill>
@@ -16403,8 +16403,8 @@
         </p:nvSpPr>
         <p:spPr>
           <a:xfrm>
-            <a:off x="457200" y="1371600"/>
-            <a:ext cx="3474720" cy="2286000"/>
+            <a:off x="228600" y="1371600"/>
+            <a:ext cx="2788920" cy="2377440"/>
           </a:xfrm>
           <a:prstGeom prst="roundRect">
             <a:avLst/>
@@ -16448,8 +16448,8 @@
         </p:nvSpPr>
         <p:spPr>
           <a:xfrm>
-            <a:off x="548640" y="1417320"/>
-            <a:ext cx="3291840" cy="320040"/>
+            <a:off x="301752" y="1417320"/>
+            <a:ext cx="2642615" cy="292608"/>
           </a:xfrm>
           <a:prstGeom prst="rect">
             <a:avLst/>
@@ -16463,7 +16463,7 @@
           <a:lstStyle/>
           <a:p>
             <a:pPr algn="l">
-              <a:defRPr sz="1600" b="1">
+              <a:defRPr sz="1300" b="1">
                 <a:solidFill>
                   <a:srgbClr val="7F8C8D"/>
                 </a:solidFill>
@@ -16484,8 +16484,8 @@
         </p:nvSpPr>
         <p:spPr>
           <a:xfrm>
-            <a:off x="548640" y="1737360"/>
-            <a:ext cx="1828800" cy="822960"/>
+            <a:off x="301752" y="1737360"/>
+            <a:ext cx="1325880" cy="1097280"/>
           </a:xfrm>
           <a:prstGeom prst="rect">
             <a:avLst/>
@@ -16499,7 +16499,7 @@
           <a:lstStyle/>
           <a:p>
             <a:pPr algn="l">
-              <a:defRPr sz="1100" b="0">
+              <a:defRPr sz="800" b="0">
                 <a:solidFill>
                   <a:srgbClr val="BDBDBD"/>
                 </a:solidFill>
@@ -16507,15 +16507,15 @@
               </a:defRPr>
             </a:pPr>
             <a:r>
-              <a:t>Default scheduler</a:t>
+              <a:t>Null-injection control</a:t>
             </a:r>
             <a:br/>
             <a:r>
-              <a:t>Trivial fault (1% CPU, 1s)</a:t>
+              <a:t>Default scheduler + trivial fault</a:t>
             </a:r>
             <a:br/>
             <a:r>
-              <a:t>Control group — no real disruption</a:t>
+              <a:t>(1% CPU, 1s) — validates methodology</a:t>
             </a:r>
           </a:p>
         </p:txBody>
@@ -16528,8 +16528,8 @@
         </p:nvSpPr>
         <p:spPr>
           <a:xfrm>
-            <a:off x="2651760" y="2286000"/>
-            <a:ext cx="228600" cy="228600"/>
+            <a:off x="1956816" y="2011679"/>
+            <a:ext cx="164592" cy="164592"/>
           </a:xfrm>
           <a:prstGeom prst="roundRect">
             <a:avLst/>
@@ -16571,8 +16571,8 @@
         </p:nvSpPr>
         <p:spPr>
           <a:xfrm>
-            <a:off x="3291840" y="2286000"/>
-            <a:ext cx="228600" cy="228600"/>
+            <a:off x="2500884" y="2011679"/>
+            <a:ext cx="164592" cy="164592"/>
           </a:xfrm>
           <a:prstGeom prst="roundRect">
             <a:avLst/>
@@ -16614,8 +16614,8 @@
         </p:nvSpPr>
         <p:spPr>
           <a:xfrm>
-            <a:off x="2651760" y="2651760"/>
-            <a:ext cx="228600" cy="228600"/>
+            <a:off x="1956816" y="2286000"/>
+            <a:ext cx="164592" cy="164592"/>
           </a:xfrm>
           <a:prstGeom prst="roundRect">
             <a:avLst/>
@@ -16657,8 +16657,8 @@
         </p:nvSpPr>
         <p:spPr>
           <a:xfrm>
-            <a:off x="3291840" y="2651760"/>
-            <a:ext cx="228600" cy="228600"/>
+            <a:off x="2500884" y="2286000"/>
+            <a:ext cx="164592" cy="164592"/>
           </a:xfrm>
           <a:prstGeom prst="roundRect">
             <a:avLst/>
@@ -16700,8 +16700,8 @@
         </p:nvSpPr>
         <p:spPr>
           <a:xfrm>
-            <a:off x="548640" y="3063240"/>
-            <a:ext cx="3291840" cy="228600"/>
+            <a:off x="301752" y="2880360"/>
+            <a:ext cx="2642615" cy="201168"/>
           </a:xfrm>
           <a:prstGeom prst="rect">
             <a:avLst/>
@@ -16715,7 +16715,7 @@
           <a:lstStyle/>
           <a:p>
             <a:pPr algn="l">
-              <a:defRPr sz="1100" b="1">
+              <a:defRPr sz="900" b="1">
                 <a:solidFill>
                   <a:srgbClr val="2ECC71"/>
                 </a:solidFill>
@@ -16723,7 +16723,7 @@
               </a:defRPr>
             </a:pPr>
             <a:r>
-              <a:t>Contention: None</a:t>
+              <a:t>Contention: None (control)</a:t>
             </a:r>
           </a:p>
         </p:txBody>
@@ -16736,8 +16736,8 @@
         </p:nvSpPr>
         <p:spPr>
           <a:xfrm>
-            <a:off x="548640" y="3291840"/>
-            <a:ext cx="3291840" cy="274320"/>
+            <a:off x="301752" y="3108960"/>
+            <a:ext cx="2642615" cy="201168"/>
           </a:xfrm>
           <a:prstGeom prst="rect">
             <a:avLst/>
@@ -16751,7 +16751,7 @@
           <a:lstStyle/>
           <a:p>
             <a:pPr algn="l">
-              <a:defRPr sz="1000" b="0">
+              <a:defRPr sz="800" b="0">
                 <a:solidFill>
                   <a:srgbClr val="9090A0"/>
                 </a:solidFill>
@@ -16766,14 +16766,50 @@
       </p:sp>
       <p:sp>
         <p:nvSpPr>
-          <p:cNvPr id="13" name="Rounded Rectangle 12"/>
+          <p:cNvPr id="13" name="TextBox 12"/>
+          <p:cNvSpPr txBox="1"/>
+          <p:nvPr/>
+        </p:nvSpPr>
+        <p:spPr>
+          <a:xfrm>
+            <a:off x="301752" y="3383280"/>
+            <a:ext cx="2642615" cy="292608"/>
+          </a:xfrm>
+          <a:prstGeom prst="rect">
+            <a:avLst/>
+          </a:prstGeom>
+          <a:noFill/>
+        </p:spPr>
+        <p:txBody>
+          <a:bodyPr wrap="square">
+            <a:spAutoFit/>
+          </a:bodyPr>
+          <a:lstStyle/>
+          <a:p>
+            <a:pPr algn="l">
+              <a:defRPr sz="700" b="0">
+                <a:solidFill>
+                  <a:srgbClr val="0096D6"/>
+                </a:solidFill>
+                <a:latin typeface="Calibri"/>
+              </a:defRPr>
+            </a:pPr>
+            <a:r>
+              <a:t>Basiri et al., IEEE SW 2016</a:t>
+            </a:r>
+          </a:p>
+        </p:txBody>
+      </p:sp>
+      <p:sp>
+        <p:nvSpPr>
+          <p:cNvPr id="14" name="Rounded Rectangle 13"/>
           <p:cNvSpPr/>
           <p:nvPr/>
         </p:nvSpPr>
         <p:spPr>
           <a:xfrm>
-            <a:off x="4297680" y="1371600"/>
-            <a:ext cx="3474720" cy="2286000"/>
+            <a:off x="3200400" y="1371600"/>
+            <a:ext cx="2788920" cy="2377440"/>
           </a:xfrm>
           <a:prstGeom prst="roundRect">
             <a:avLst/>
@@ -16811,14 +16847,14 @@
       </p:sp>
       <p:sp>
         <p:nvSpPr>
-          <p:cNvPr id="14" name="TextBox 13"/>
+          <p:cNvPr id="15" name="TextBox 14"/>
           <p:cNvSpPr txBox="1"/>
           <p:nvPr/>
         </p:nvSpPr>
         <p:spPr>
           <a:xfrm>
-            <a:off x="4389120" y="1417320"/>
-            <a:ext cx="3291840" cy="320040"/>
+            <a:off x="3273552" y="1417320"/>
+            <a:ext cx="2642615" cy="292608"/>
           </a:xfrm>
           <a:prstGeom prst="rect">
             <a:avLst/>
@@ -16832,7 +16868,7 @@
           <a:lstStyle/>
           <a:p>
             <a:pPr algn="l">
-              <a:defRPr sz="1600" b="1">
+              <a:defRPr sz="1300" b="1">
                 <a:solidFill>
                   <a:srgbClr val="3498DB"/>
                 </a:solidFill>
@@ -16847,14 +16883,14 @@
       </p:sp>
       <p:sp>
         <p:nvSpPr>
-          <p:cNvPr id="15" name="TextBox 14"/>
+          <p:cNvPr id="16" name="TextBox 15"/>
           <p:cNvSpPr txBox="1"/>
           <p:nvPr/>
         </p:nvSpPr>
         <p:spPr>
           <a:xfrm>
-            <a:off x="4389120" y="1737360"/>
-            <a:ext cx="1828800" cy="822960"/>
+            <a:off x="3273552" y="1737360"/>
+            <a:ext cx="1325880" cy="1097280"/>
           </a:xfrm>
           <a:prstGeom prst="rect">
             <a:avLst/>
@@ -16868,7 +16904,7 @@
           <a:lstStyle/>
           <a:p>
             <a:pPr algn="l">
-              <a:defRPr sz="1100" b="0">
+              <a:defRPr sz="800" b="0">
                 <a:solidFill>
                   <a:srgbClr val="BDBDBD"/>
                 </a:solidFill>
@@ -16884,21 +16920,21 @@
             </a:r>
             <a:br/>
             <a:r>
-              <a:t>No placement mutation</a:t>
-            </a:r>
-          </a:p>
-        </p:txBody>
-      </p:sp>
-      <p:sp>
-        <p:nvSpPr>
-          <p:cNvPr id="16" name="Rounded Rectangle 15"/>
+              <a:t>Scheduler-determined placement</a:t>
+            </a:r>
+          </a:p>
+        </p:txBody>
+      </p:sp>
+      <p:sp>
+        <p:nvSpPr>
+          <p:cNvPr id="17" name="Rounded Rectangle 16"/>
           <p:cNvSpPr/>
           <p:nvPr/>
         </p:nvSpPr>
         <p:spPr>
           <a:xfrm>
-            <a:off x="6492240" y="2286000"/>
-            <a:ext cx="228600" cy="228600"/>
+            <a:off x="4928616" y="2011679"/>
+            <a:ext cx="164592" cy="164592"/>
           </a:xfrm>
           <a:prstGeom prst="roundRect">
             <a:avLst/>
@@ -16934,14 +16970,14 @@
       </p:sp>
       <p:sp>
         <p:nvSpPr>
-          <p:cNvPr id="17" name="Rounded Rectangle 16"/>
+          <p:cNvPr id="18" name="Rounded Rectangle 17"/>
           <p:cNvSpPr/>
           <p:nvPr/>
         </p:nvSpPr>
         <p:spPr>
           <a:xfrm>
-            <a:off x="7132320" y="2286000"/>
-            <a:ext cx="228600" cy="228600"/>
+            <a:off x="5472683" y="2011679"/>
+            <a:ext cx="164592" cy="164592"/>
           </a:xfrm>
           <a:prstGeom prst="roundRect">
             <a:avLst/>
@@ -16977,14 +17013,14 @@
       </p:sp>
       <p:sp>
         <p:nvSpPr>
-          <p:cNvPr id="18" name="Rounded Rectangle 17"/>
+          <p:cNvPr id="19" name="Rounded Rectangle 18"/>
           <p:cNvSpPr/>
           <p:nvPr/>
         </p:nvSpPr>
         <p:spPr>
           <a:xfrm>
-            <a:off x="6492240" y="2651760"/>
-            <a:ext cx="228600" cy="228600"/>
+            <a:off x="4928616" y="2286000"/>
+            <a:ext cx="164592" cy="164592"/>
           </a:xfrm>
           <a:prstGeom prst="roundRect">
             <a:avLst/>
@@ -17020,14 +17056,14 @@
       </p:sp>
       <p:sp>
         <p:nvSpPr>
-          <p:cNvPr id="19" name="Rounded Rectangle 18"/>
+          <p:cNvPr id="20" name="Rounded Rectangle 19"/>
           <p:cNvSpPr/>
           <p:nvPr/>
         </p:nvSpPr>
         <p:spPr>
           <a:xfrm>
-            <a:off x="7132320" y="2651760"/>
-            <a:ext cx="228600" cy="228600"/>
+            <a:off x="5472683" y="2286000"/>
+            <a:ext cx="164592" cy="164592"/>
           </a:xfrm>
           <a:prstGeom prst="roundRect">
             <a:avLst/>
@@ -17063,14 +17099,14 @@
       </p:sp>
       <p:sp>
         <p:nvSpPr>
-          <p:cNvPr id="20" name="TextBox 19"/>
+          <p:cNvPr id="21" name="TextBox 20"/>
           <p:cNvSpPr txBox="1"/>
           <p:nvPr/>
         </p:nvSpPr>
         <p:spPr>
           <a:xfrm>
-            <a:off x="4389120" y="3063240"/>
-            <a:ext cx="3291840" cy="228600"/>
+            <a:off x="3273552" y="2880360"/>
+            <a:ext cx="2642615" cy="201168"/>
           </a:xfrm>
           <a:prstGeom prst="rect">
             <a:avLst/>
@@ -17084,29 +17120,29 @@
           <a:lstStyle/>
           <a:p>
             <a:pPr algn="l">
-              <a:defRPr sz="1100" b="1">
-                <a:solidFill>
-                  <a:srgbClr val="2ECC71"/>
-                </a:solidFill>
-                <a:latin typeface="Calibri"/>
-              </a:defRPr>
-            </a:pPr>
-            <a:r>
-              <a:t>Contention: Low</a:t>
-            </a:r>
-          </a:p>
-        </p:txBody>
-      </p:sp>
-      <p:sp>
-        <p:nvSpPr>
-          <p:cNvPr id="21" name="TextBox 20"/>
+              <a:defRPr sz="900" b="1">
+                <a:solidFill>
+                  <a:srgbClr val="F39C12"/>
+                </a:solidFill>
+                <a:latin typeface="Calibri"/>
+              </a:defRPr>
+            </a:pPr>
+            <a:r>
+              <a:t>Contention: Scheduler-set</a:t>
+            </a:r>
+          </a:p>
+        </p:txBody>
+      </p:sp>
+      <p:sp>
+        <p:nvSpPr>
+          <p:cNvPr id="22" name="TextBox 21"/>
           <p:cNvSpPr txBox="1"/>
           <p:nvPr/>
         </p:nvSpPr>
         <p:spPr>
           <a:xfrm>
-            <a:off x="4389120" y="3291840"/>
-            <a:ext cx="3291840" cy="274320"/>
+            <a:off x="3273552" y="3108960"/>
+            <a:ext cx="2642615" cy="201168"/>
           </a:xfrm>
           <a:prstGeom prst="rect">
             <a:avLst/>
@@ -17120,7 +17156,7 @@
           <a:lstStyle/>
           <a:p>
             <a:pPr algn="l">
-              <a:defRPr sz="1000" b="0">
+              <a:defRPr sz="800" b="0">
                 <a:solidFill>
                   <a:srgbClr val="9090A0"/>
                 </a:solidFill>
@@ -17128,21 +17164,57 @@
               </a:defRPr>
             </a:pPr>
             <a:r>
-              <a:t>Scheduler-determined placement</a:t>
-            </a:r>
-          </a:p>
-        </p:txBody>
-      </p:sp>
-      <p:sp>
-        <p:nvSpPr>
-          <p:cNvPr id="22" name="Rounded Rectangle 21"/>
+              <a:t>Placement null hypothesis</a:t>
+            </a:r>
+          </a:p>
+        </p:txBody>
+      </p:sp>
+      <p:sp>
+        <p:nvSpPr>
+          <p:cNvPr id="23" name="TextBox 22"/>
+          <p:cNvSpPr txBox="1"/>
+          <p:nvPr/>
+        </p:nvSpPr>
+        <p:spPr>
+          <a:xfrm>
+            <a:off x="3273552" y="3383280"/>
+            <a:ext cx="2642615" cy="292608"/>
+          </a:xfrm>
+          <a:prstGeom prst="rect">
+            <a:avLst/>
+          </a:prstGeom>
+          <a:noFill/>
+        </p:spPr>
+        <p:txBody>
+          <a:bodyPr wrap="square">
+            <a:spAutoFit/>
+          </a:bodyPr>
+          <a:lstStyle/>
+          <a:p>
+            <a:pPr algn="l">
+              <a:defRPr sz="700" b="0">
+                <a:solidFill>
+                  <a:srgbClr val="0096D6"/>
+                </a:solidFill>
+                <a:latin typeface="Calibri"/>
+              </a:defRPr>
+            </a:pPr>
+            <a:r>
+              <a:t>Burns et al., ACM Queue 2016</a:t>
+            </a:r>
+          </a:p>
+        </p:txBody>
+      </p:sp>
+      <p:sp>
+        <p:nvSpPr>
+          <p:cNvPr id="24" name="Rounded Rectangle 23"/>
           <p:cNvSpPr/>
           <p:nvPr/>
         </p:nvSpPr>
         <p:spPr>
           <a:xfrm>
-            <a:off x="8138160" y="1371600"/>
-            <a:ext cx="3474720" cy="2286000"/>
+            <a:off x="6172200" y="1371600"/>
+            <a:ext cx="2788920" cy="2377440"/>
           </a:xfrm>
           <a:prstGeom prst="roundRect">
             <a:avLst/>
@@ -17180,14 +17252,14 @@
       </p:sp>
       <p:sp>
         <p:nvSpPr>
-          <p:cNvPr id="23" name="TextBox 22"/>
+          <p:cNvPr id="25" name="TextBox 24"/>
           <p:cNvSpPr txBox="1"/>
           <p:nvPr/>
         </p:nvSpPr>
         <p:spPr>
           <a:xfrm>
-            <a:off x="8229600" y="1417320"/>
-            <a:ext cx="3291840" cy="320040"/>
+            <a:off x="6245352" y="1417320"/>
+            <a:ext cx="2642615" cy="292608"/>
           </a:xfrm>
           <a:prstGeom prst="rect">
             <a:avLst/>
@@ -17201,7 +17273,7 @@
           <a:lstStyle/>
           <a:p>
             <a:pPr algn="l">
-              <a:defRPr sz="1600" b="1">
+              <a:defRPr sz="1300" b="1">
                 <a:solidFill>
                   <a:srgbClr val="E74C3C"/>
                 </a:solidFill>
@@ -17216,14 +17288,14 @@
       </p:sp>
       <p:sp>
         <p:nvSpPr>
-          <p:cNvPr id="24" name="TextBox 23"/>
+          <p:cNvPr id="26" name="TextBox 25"/>
           <p:cNvSpPr txBox="1"/>
           <p:nvPr/>
         </p:nvSpPr>
         <p:spPr>
           <a:xfrm>
-            <a:off x="8229600" y="1737360"/>
-            <a:ext cx="1828800" cy="822960"/>
+            <a:off x="6245352" y="1737360"/>
+            <a:ext cx="1325880" cy="1097280"/>
           </a:xfrm>
           <a:prstGeom prst="rect">
             <a:avLst/>
@@ -17237,7 +17309,7 @@
           <a:lstStyle/>
           <a:p>
             <a:pPr algn="l">
-              <a:defRPr sz="1100" b="0">
+              <a:defRPr sz="800" b="0">
                 <a:solidFill>
                   <a:srgbClr val="BDBDBD"/>
                 </a:solidFill>
@@ -17245,29 +17317,29 @@
               </a:defRPr>
             </a:pPr>
             <a:r>
-              <a:t>ALL pods pinned to single node</a:t>
+              <a:t>All pods pinned to a single node</a:t>
             </a:r>
             <a:br/>
             <a:r>
-              <a:t>Max resource contention</a:t>
+              <a:t>via podAffinity</a:t>
             </a:r>
             <a:br/>
             <a:r>
-              <a:t>Worst-case scenario</a:t>
-            </a:r>
-          </a:p>
-        </p:txBody>
-      </p:sp>
-      <p:sp>
-        <p:nvSpPr>
-          <p:cNvPr id="25" name="Rounded Rectangle 24"/>
+              <a:t>Maximal co-location</a:t>
+            </a:r>
+          </a:p>
+        </p:txBody>
+      </p:sp>
+      <p:sp>
+        <p:nvSpPr>
+          <p:cNvPr id="27" name="Rounded Rectangle 26"/>
           <p:cNvSpPr/>
           <p:nvPr/>
         </p:nvSpPr>
         <p:spPr>
           <a:xfrm>
-            <a:off x="10332720" y="2286000"/>
-            <a:ext cx="228600" cy="228600"/>
+            <a:off x="7900416" y="2011679"/>
+            <a:ext cx="164592" cy="164592"/>
           </a:xfrm>
           <a:prstGeom prst="roundRect">
             <a:avLst/>
@@ -17303,14 +17375,14 @@
       </p:sp>
       <p:sp>
         <p:nvSpPr>
-          <p:cNvPr id="26" name="Rounded Rectangle 25"/>
+          <p:cNvPr id="28" name="Rounded Rectangle 27"/>
           <p:cNvSpPr/>
           <p:nvPr/>
         </p:nvSpPr>
         <p:spPr>
           <a:xfrm>
-            <a:off x="10561320" y="2423160"/>
-            <a:ext cx="228600" cy="228600"/>
+            <a:off x="8094726" y="2114550"/>
+            <a:ext cx="164592" cy="164592"/>
           </a:xfrm>
           <a:prstGeom prst="roundRect">
             <a:avLst/>
@@ -17346,14 +17418,14 @@
       </p:sp>
       <p:sp>
         <p:nvSpPr>
-          <p:cNvPr id="27" name="Rounded Rectangle 26"/>
+          <p:cNvPr id="29" name="Rounded Rectangle 28"/>
           <p:cNvSpPr/>
           <p:nvPr/>
         </p:nvSpPr>
         <p:spPr>
           <a:xfrm>
-            <a:off x="10332720" y="2560320"/>
-            <a:ext cx="228600" cy="228600"/>
+            <a:off x="7900416" y="2217420"/>
+            <a:ext cx="164592" cy="164592"/>
           </a:xfrm>
           <a:prstGeom prst="roundRect">
             <a:avLst/>
@@ -17389,14 +17461,14 @@
       </p:sp>
       <p:sp>
         <p:nvSpPr>
-          <p:cNvPr id="28" name="Rounded Rectangle 27"/>
+          <p:cNvPr id="30" name="Rounded Rectangle 29"/>
           <p:cNvSpPr/>
           <p:nvPr/>
         </p:nvSpPr>
         <p:spPr>
           <a:xfrm>
-            <a:off x="10561320" y="2697479"/>
-            <a:ext cx="228600" cy="228600"/>
+            <a:off x="8094726" y="2320289"/>
+            <a:ext cx="164592" cy="164592"/>
           </a:xfrm>
           <a:prstGeom prst="roundRect">
             <a:avLst/>
@@ -17432,14 +17504,14 @@
       </p:sp>
       <p:sp>
         <p:nvSpPr>
-          <p:cNvPr id="29" name="TextBox 28"/>
+          <p:cNvPr id="31" name="TextBox 30"/>
           <p:cNvSpPr txBox="1"/>
           <p:nvPr/>
         </p:nvSpPr>
         <p:spPr>
           <a:xfrm>
-            <a:off x="8229600" y="3063240"/>
-            <a:ext cx="3291840" cy="228600"/>
+            <a:off x="6245352" y="2880360"/>
+            <a:ext cx="2642615" cy="201168"/>
           </a:xfrm>
           <a:prstGeom prst="rect">
             <a:avLst/>
@@ -17453,7 +17525,7 @@
           <a:lstStyle/>
           <a:p>
             <a:pPr algn="l">
-              <a:defRPr sz="1100" b="1">
+              <a:defRPr sz="900" b="1">
                 <a:solidFill>
                   <a:srgbClr val="E74C3C"/>
                 </a:solidFill>
@@ -17468,14 +17540,14 @@
       </p:sp>
       <p:sp>
         <p:nvSpPr>
-          <p:cNvPr id="30" name="TextBox 29"/>
+          <p:cNvPr id="32" name="TextBox 31"/>
           <p:cNvSpPr txBox="1"/>
           <p:nvPr/>
         </p:nvSpPr>
         <p:spPr>
           <a:xfrm>
-            <a:off x="8229600" y="3291840"/>
-            <a:ext cx="3291840" cy="274320"/>
+            <a:off x="6245352" y="3108960"/>
+            <a:ext cx="2642615" cy="201168"/>
           </a:xfrm>
           <a:prstGeom prst="rect">
             <a:avLst/>
@@ -17489,7 +17561,7 @@
           <a:lstStyle/>
           <a:p>
             <a:pPr algn="l">
-              <a:defRPr sz="1000" b="0">
+              <a:defRPr sz="800" b="0">
                 <a:solidFill>
                   <a:srgbClr val="9090A0"/>
                 </a:solidFill>
@@ -17504,14 +17576,50 @@
       </p:sp>
       <p:sp>
         <p:nvSpPr>
-          <p:cNvPr id="31" name="Rounded Rectangle 30"/>
+          <p:cNvPr id="33" name="TextBox 32"/>
+          <p:cNvSpPr txBox="1"/>
+          <p:nvPr/>
+        </p:nvSpPr>
+        <p:spPr>
+          <a:xfrm>
+            <a:off x="6245352" y="3383280"/>
+            <a:ext cx="2642615" cy="292608"/>
+          </a:xfrm>
+          <a:prstGeom prst="rect">
+            <a:avLst/>
+          </a:prstGeom>
+          <a:noFill/>
+        </p:spPr>
+        <p:txBody>
+          <a:bodyPr wrap="square">
+            <a:spAutoFit/>
+          </a:bodyPr>
+          <a:lstStyle/>
+          <a:p>
+            <a:pPr algn="l">
+              <a:defRPr sz="700" b="0">
+                <a:solidFill>
+                  <a:srgbClr val="0096D6"/>
+                </a:solidFill>
+                <a:latin typeface="Calibri"/>
+              </a:defRPr>
+            </a:pPr>
+            <a:r>
+              <a:t>Mars 2011; Delimitrou 2014</a:t>
+            </a:r>
+          </a:p>
+        </p:txBody>
+      </p:sp>
+      <p:sp>
+        <p:nvSpPr>
+          <p:cNvPr id="34" name="Rounded Rectangle 33"/>
           <p:cNvSpPr/>
           <p:nvPr/>
         </p:nvSpPr>
         <p:spPr>
           <a:xfrm>
-            <a:off x="457200" y="4023360"/>
-            <a:ext cx="3474720" cy="2286000"/>
+            <a:off x="9144000" y="1371600"/>
+            <a:ext cx="2788920" cy="2377440"/>
           </a:xfrm>
           <a:prstGeom prst="roundRect">
             <a:avLst/>
@@ -17549,14 +17657,14 @@
       </p:sp>
       <p:sp>
         <p:nvSpPr>
-          <p:cNvPr id="32" name="TextBox 31"/>
+          <p:cNvPr id="35" name="TextBox 34"/>
           <p:cNvSpPr txBox="1"/>
           <p:nvPr/>
         </p:nvSpPr>
         <p:spPr>
           <a:xfrm>
-            <a:off x="548640" y="4069080"/>
-            <a:ext cx="3291840" cy="320040"/>
+            <a:off x="9217152" y="1417320"/>
+            <a:ext cx="2642615" cy="292608"/>
           </a:xfrm>
           <a:prstGeom prst="rect">
             <a:avLst/>
@@ -17570,7 +17678,7 @@
           <a:lstStyle/>
           <a:p>
             <a:pPr algn="l">
-              <a:defRPr sz="1600" b="1">
+              <a:defRPr sz="1300" b="1">
                 <a:solidFill>
                   <a:srgbClr val="2ECC71"/>
                 </a:solidFill>
@@ -17585,14 +17693,14 @@
       </p:sp>
       <p:sp>
         <p:nvSpPr>
-          <p:cNvPr id="33" name="TextBox 32"/>
+          <p:cNvPr id="36" name="TextBox 35"/>
           <p:cNvSpPr txBox="1"/>
           <p:nvPr/>
         </p:nvSpPr>
         <p:spPr>
           <a:xfrm>
-            <a:off x="548640" y="4389120"/>
-            <a:ext cx="1828800" cy="822960"/>
+            <a:off x="9217152" y="1737360"/>
+            <a:ext cx="1325880" cy="1097280"/>
           </a:xfrm>
           <a:prstGeom prst="rect">
             <a:avLst/>
@@ -17606,7 +17714,7 @@
           <a:lstStyle/>
           <a:p>
             <a:pPr algn="l">
-              <a:defRPr sz="1100" b="0">
+              <a:defRPr sz="800" b="0">
                 <a:solidFill>
                   <a:srgbClr val="BDBDBD"/>
                 </a:solidFill>
@@ -17614,11 +17722,11 @@
               </a:defRPr>
             </a:pPr>
             <a:r>
-              <a:t>Round-robin distribution</a:t>
+              <a:t>Even distribution across workers</a:t>
             </a:r>
             <a:br/>
             <a:r>
-              <a:t>across all worker nodes</a:t>
+              <a:t>via topologySpreadConstraints</a:t>
             </a:r>
             <a:br/>
             <a:r>
@@ -17629,14 +17737,14 @@
       </p:sp>
       <p:sp>
         <p:nvSpPr>
-          <p:cNvPr id="34" name="Rounded Rectangle 33"/>
+          <p:cNvPr id="37" name="Rounded Rectangle 36"/>
           <p:cNvSpPr/>
           <p:nvPr/>
         </p:nvSpPr>
         <p:spPr>
           <a:xfrm>
-            <a:off x="2468880" y="5120640"/>
-            <a:ext cx="228600" cy="228600"/>
+            <a:off x="10716768" y="2148839"/>
+            <a:ext cx="164592" cy="164592"/>
           </a:xfrm>
           <a:prstGeom prst="roundRect">
             <a:avLst/>
@@ -17672,14 +17780,14 @@
       </p:sp>
       <p:sp>
         <p:nvSpPr>
-          <p:cNvPr id="35" name="Rounded Rectangle 34"/>
+          <p:cNvPr id="38" name="Rounded Rectangle 37"/>
           <p:cNvSpPr/>
           <p:nvPr/>
         </p:nvSpPr>
         <p:spPr>
           <a:xfrm>
-            <a:off x="2834640" y="5120640"/>
-            <a:ext cx="228600" cy="228600"/>
+            <a:off x="11027664" y="2148839"/>
+            <a:ext cx="164592" cy="164592"/>
           </a:xfrm>
           <a:prstGeom prst="roundRect">
             <a:avLst/>
@@ -17715,14 +17823,14 @@
       </p:sp>
       <p:sp>
         <p:nvSpPr>
-          <p:cNvPr id="36" name="Rounded Rectangle 35"/>
+          <p:cNvPr id="39" name="Rounded Rectangle 38"/>
           <p:cNvSpPr/>
           <p:nvPr/>
         </p:nvSpPr>
         <p:spPr>
           <a:xfrm>
-            <a:off x="3200400" y="5120640"/>
-            <a:ext cx="228600" cy="228600"/>
+            <a:off x="11338560" y="2148839"/>
+            <a:ext cx="164592" cy="164592"/>
           </a:xfrm>
           <a:prstGeom prst="roundRect">
             <a:avLst/>
@@ -17758,14 +17866,14 @@
       </p:sp>
       <p:sp>
         <p:nvSpPr>
-          <p:cNvPr id="37" name="Rounded Rectangle 36"/>
+          <p:cNvPr id="40" name="Rounded Rectangle 39"/>
           <p:cNvSpPr/>
           <p:nvPr/>
         </p:nvSpPr>
         <p:spPr>
           <a:xfrm>
-            <a:off x="3566160" y="5120640"/>
-            <a:ext cx="228600" cy="228600"/>
+            <a:off x="11649456" y="2148839"/>
+            <a:ext cx="164592" cy="164592"/>
           </a:xfrm>
           <a:prstGeom prst="roundRect">
             <a:avLst/>
@@ -17801,14 +17909,14 @@
       </p:sp>
       <p:sp>
         <p:nvSpPr>
-          <p:cNvPr id="38" name="TextBox 37"/>
+          <p:cNvPr id="41" name="TextBox 40"/>
           <p:cNvSpPr txBox="1"/>
           <p:nvPr/>
         </p:nvSpPr>
         <p:spPr>
           <a:xfrm>
-            <a:off x="548640" y="5715000"/>
-            <a:ext cx="3291840" cy="228600"/>
+            <a:off x="9217152" y="2880360"/>
+            <a:ext cx="2642615" cy="201168"/>
           </a:xfrm>
           <a:prstGeom prst="rect">
             <a:avLst/>
@@ -17822,7 +17930,7 @@
           <a:lstStyle/>
           <a:p>
             <a:pPr algn="l">
-              <a:defRPr sz="1100" b="1">
+              <a:defRPr sz="900" b="1">
                 <a:solidFill>
                   <a:srgbClr val="2ECC71"/>
                 </a:solidFill>
@@ -17837,14 +17945,14 @@
       </p:sp>
       <p:sp>
         <p:nvSpPr>
-          <p:cNvPr id="39" name="TextBox 38"/>
+          <p:cNvPr id="42" name="TextBox 41"/>
           <p:cNvSpPr txBox="1"/>
           <p:nvPr/>
         </p:nvSpPr>
         <p:spPr>
           <a:xfrm>
-            <a:off x="548640" y="5943600"/>
-            <a:ext cx="3291840" cy="274320"/>
+            <a:off x="9217152" y="3108960"/>
+            <a:ext cx="2642615" cy="201168"/>
           </a:xfrm>
           <a:prstGeom prst="rect">
             <a:avLst/>
@@ -17858,7 +17966,7 @@
           <a:lstStyle/>
           <a:p>
             <a:pPr algn="l">
-              <a:defRPr sz="1000" b="0">
+              <a:defRPr sz="800" b="0">
                 <a:solidFill>
                   <a:srgbClr val="9090A0"/>
                 </a:solidFill>
@@ -17866,21 +17974,57 @@
               </a:defRPr>
             </a:pPr>
             <a:r>
-              <a:t>Expected: best resilience</a:t>
-            </a:r>
-          </a:p>
-        </p:txBody>
-      </p:sp>
-      <p:sp>
-        <p:nvSpPr>
-          <p:cNvPr id="40" name="Rounded Rectangle 39"/>
+              <a:t>Expected: best isolation</a:t>
+            </a:r>
+          </a:p>
+        </p:txBody>
+      </p:sp>
+      <p:sp>
+        <p:nvSpPr>
+          <p:cNvPr id="43" name="TextBox 42"/>
+          <p:cNvSpPr txBox="1"/>
+          <p:nvPr/>
+        </p:nvSpPr>
+        <p:spPr>
+          <a:xfrm>
+            <a:off x="9217152" y="3383280"/>
+            <a:ext cx="2642615" cy="292608"/>
+          </a:xfrm>
+          <a:prstGeom prst="rect">
+            <a:avLst/>
+          </a:prstGeom>
+          <a:noFill/>
+        </p:spPr>
+        <p:txBody>
+          <a:bodyPr wrap="square">
+            <a:spAutoFit/>
+          </a:bodyPr>
+          <a:lstStyle/>
+          <a:p>
+            <a:pPr algn="l">
+              <a:defRPr sz="700" b="0">
+                <a:solidFill>
+                  <a:srgbClr val="0096D6"/>
+                </a:solidFill>
+                <a:latin typeface="Calibri"/>
+              </a:defRPr>
+            </a:pPr>
+            <a:r>
+              <a:t>Medea (Garefalakis 2018)</a:t>
+            </a:r>
+          </a:p>
+        </p:txBody>
+      </p:sp>
+      <p:sp>
+        <p:nvSpPr>
+          <p:cNvPr id="44" name="Rounded Rectangle 43"/>
           <p:cNvSpPr/>
           <p:nvPr/>
         </p:nvSpPr>
         <p:spPr>
           <a:xfrm>
-            <a:off x="4297680" y="4023360"/>
-            <a:ext cx="3474720" cy="2286000"/>
+            <a:off x="228600" y="4023360"/>
+            <a:ext cx="2788920" cy="2377440"/>
           </a:xfrm>
           <a:prstGeom prst="roundRect">
             <a:avLst/>
@@ -17918,14 +18062,14 @@
       </p:sp>
       <p:sp>
         <p:nvSpPr>
-          <p:cNvPr id="41" name="TextBox 40"/>
+          <p:cNvPr id="45" name="TextBox 44"/>
           <p:cNvSpPr txBox="1"/>
           <p:nvPr/>
         </p:nvSpPr>
         <p:spPr>
           <a:xfrm>
-            <a:off x="4389120" y="4069080"/>
-            <a:ext cx="3291840" cy="320040"/>
+            <a:off x="301752" y="4069080"/>
+            <a:ext cx="2642615" cy="292608"/>
           </a:xfrm>
           <a:prstGeom prst="rect">
             <a:avLst/>
@@ -17939,7 +18083,7 @@
           <a:lstStyle/>
           <a:p>
             <a:pPr algn="l">
-              <a:defRPr sz="1600" b="1">
+              <a:defRPr sz="1300" b="1">
                 <a:solidFill>
                   <a:srgbClr val="F39C12"/>
                 </a:solidFill>
@@ -17954,14 +18098,14 @@
       </p:sp>
       <p:sp>
         <p:nvSpPr>
-          <p:cNvPr id="42" name="TextBox 41"/>
+          <p:cNvPr id="46" name="TextBox 45"/>
           <p:cNvSpPr txBox="1"/>
           <p:nvPr/>
         </p:nvSpPr>
         <p:spPr>
           <a:xfrm>
-            <a:off x="4389120" y="4389120"/>
-            <a:ext cx="1828800" cy="822960"/>
+            <a:off x="301752" y="4389120"/>
+            <a:ext cx="1325880" cy="1097280"/>
           </a:xfrm>
           <a:prstGeom prst="rect">
             <a:avLst/>
@@ -17975,7 +18119,7 @@
           <a:lstStyle/>
           <a:p>
             <a:pPr algn="l">
-              <a:defRPr sz="1100" b="0">
+              <a:defRPr sz="800" b="0">
                 <a:solidFill>
                   <a:srgbClr val="BDBDBD"/>
                 </a:solidFill>
@@ -17983,29 +18127,29 @@
               </a:defRPr>
             </a:pPr>
             <a:r>
-              <a:t>Random assignment per pod</a:t>
+              <a:t>Seeded random assignment</a:t>
             </a:r>
             <a:br/>
             <a:r>
-              <a:t>Reproducible via seed</a:t>
+              <a:t>Reproducible null baseline</a:t>
             </a:r>
             <a:br/>
             <a:r>
-              <a:t>Unpredictable contention</a:t>
-            </a:r>
-          </a:p>
-        </p:txBody>
-      </p:sp>
-      <p:sp>
-        <p:nvSpPr>
-          <p:cNvPr id="43" name="Rounded Rectangle 42"/>
+              <a:t>for topology effects</a:t>
+            </a:r>
+          </a:p>
+        </p:txBody>
+      </p:sp>
+      <p:sp>
+        <p:nvSpPr>
+          <p:cNvPr id="47" name="Rounded Rectangle 46"/>
           <p:cNvSpPr/>
           <p:nvPr/>
         </p:nvSpPr>
         <p:spPr>
           <a:xfrm>
-            <a:off x="6400800" y="4937760"/>
-            <a:ext cx="228600" cy="228600"/>
+            <a:off x="1879092" y="4663440"/>
+            <a:ext cx="164592" cy="164592"/>
           </a:xfrm>
           <a:prstGeom prst="roundRect">
             <a:avLst/>
@@ -18041,14 +18185,14 @@
       </p:sp>
       <p:sp>
         <p:nvSpPr>
-          <p:cNvPr id="44" name="Rounded Rectangle 43"/>
+          <p:cNvPr id="48" name="Rounded Rectangle 47"/>
           <p:cNvSpPr/>
           <p:nvPr/>
         </p:nvSpPr>
         <p:spPr>
           <a:xfrm>
-            <a:off x="7040880" y="5303520"/>
-            <a:ext cx="228600" cy="228600"/>
+            <a:off x="2423160" y="4937760"/>
+            <a:ext cx="164592" cy="164592"/>
           </a:xfrm>
           <a:prstGeom prst="roundRect">
             <a:avLst/>
@@ -18084,14 +18228,14 @@
       </p:sp>
       <p:sp>
         <p:nvSpPr>
-          <p:cNvPr id="45" name="Rounded Rectangle 44"/>
+          <p:cNvPr id="49" name="Rounded Rectangle 48"/>
           <p:cNvSpPr/>
           <p:nvPr/>
         </p:nvSpPr>
         <p:spPr>
           <a:xfrm>
-            <a:off x="6400800" y="5303520"/>
-            <a:ext cx="228600" cy="228600"/>
+            <a:off x="1879092" y="4937760"/>
+            <a:ext cx="164592" cy="164592"/>
           </a:xfrm>
           <a:prstGeom prst="roundRect">
             <a:avLst/>
@@ -18127,14 +18271,14 @@
       </p:sp>
       <p:sp>
         <p:nvSpPr>
-          <p:cNvPr id="46" name="Rounded Rectangle 45"/>
+          <p:cNvPr id="50" name="Rounded Rectangle 49"/>
           <p:cNvSpPr/>
           <p:nvPr/>
         </p:nvSpPr>
         <p:spPr>
           <a:xfrm>
-            <a:off x="7040880" y="4937760"/>
-            <a:ext cx="228600" cy="228600"/>
+            <a:off x="2423160" y="4663440"/>
+            <a:ext cx="164592" cy="164592"/>
           </a:xfrm>
           <a:prstGeom prst="roundRect">
             <a:avLst/>
@@ -18170,14 +18314,14 @@
       </p:sp>
       <p:sp>
         <p:nvSpPr>
-          <p:cNvPr id="47" name="TextBox 46"/>
+          <p:cNvPr id="51" name="TextBox 50"/>
           <p:cNvSpPr txBox="1"/>
           <p:nvPr/>
         </p:nvSpPr>
         <p:spPr>
           <a:xfrm>
-            <a:off x="4389120" y="5715000"/>
-            <a:ext cx="3291840" cy="228600"/>
+            <a:off x="301752" y="5532120"/>
+            <a:ext cx="2642615" cy="201168"/>
           </a:xfrm>
           <a:prstGeom prst="rect">
             <a:avLst/>
@@ -18191,7 +18335,7 @@
           <a:lstStyle/>
           <a:p>
             <a:pPr algn="l">
-              <a:defRPr sz="1100" b="1">
+              <a:defRPr sz="900" b="1">
                 <a:solidFill>
                   <a:srgbClr val="F39C12"/>
                 </a:solidFill>
@@ -18206,14 +18350,14 @@
       </p:sp>
       <p:sp>
         <p:nvSpPr>
-          <p:cNvPr id="48" name="TextBox 47"/>
+          <p:cNvPr id="52" name="TextBox 51"/>
           <p:cNvSpPr txBox="1"/>
           <p:nvPr/>
         </p:nvSpPr>
         <p:spPr>
           <a:xfrm>
-            <a:off x="4389120" y="5943600"/>
-            <a:ext cx="3291840" cy="274320"/>
+            <a:off x="301752" y="5760720"/>
+            <a:ext cx="2642615" cy="201168"/>
           </a:xfrm>
           <a:prstGeom prst="rect">
             <a:avLst/>
@@ -18227,7 +18371,7 @@
           <a:lstStyle/>
           <a:p>
             <a:pPr algn="l">
-              <a:defRPr sz="1000" b="0">
+              <a:defRPr sz="800" b="0">
                 <a:solidFill>
                   <a:srgbClr val="9090A0"/>
                 </a:solidFill>
@@ -18235,21 +18379,57 @@
               </a:defRPr>
             </a:pPr>
             <a:r>
-              <a:t>Seed-based reproducibility</a:t>
-            </a:r>
-          </a:p>
-        </p:txBody>
-      </p:sp>
-      <p:sp>
-        <p:nvSpPr>
-          <p:cNvPr id="49" name="Rounded Rectangle 48"/>
+              <a:t>Seeded; reproducible</a:t>
+            </a:r>
+          </a:p>
+        </p:txBody>
+      </p:sp>
+      <p:sp>
+        <p:nvSpPr>
+          <p:cNvPr id="53" name="TextBox 52"/>
+          <p:cNvSpPr txBox="1"/>
+          <p:nvPr/>
+        </p:nvSpPr>
+        <p:spPr>
+          <a:xfrm>
+            <a:off x="301752" y="6035040"/>
+            <a:ext cx="2642615" cy="292608"/>
+          </a:xfrm>
+          <a:prstGeom prst="rect">
+            <a:avLst/>
+          </a:prstGeom>
+          <a:noFill/>
+        </p:spPr>
+        <p:txBody>
+          <a:bodyPr wrap="square">
+            <a:spAutoFit/>
+          </a:bodyPr>
+          <a:lstStyle/>
+          <a:p>
+            <a:pPr algn="l">
+              <a:defRPr sz="700" b="0">
+                <a:solidFill>
+                  <a:srgbClr val="0096D6"/>
+                </a:solidFill>
+                <a:latin typeface="Calibri"/>
+              </a:defRPr>
+            </a:pPr>
+            <a:r>
+              <a:t>Sparrow (Ousterhout SOSP 2013)</a:t>
+            </a:r>
+          </a:p>
+        </p:txBody>
+      </p:sp>
+      <p:sp>
+        <p:nvSpPr>
+          <p:cNvPr id="54" name="Rounded Rectangle 53"/>
           <p:cNvSpPr/>
           <p:nvPr/>
         </p:nvSpPr>
         <p:spPr>
           <a:xfrm>
-            <a:off x="8138160" y="4023360"/>
-            <a:ext cx="3474720" cy="2286000"/>
+            <a:off x="3200400" y="4023360"/>
+            <a:ext cx="2788920" cy="2377440"/>
           </a:xfrm>
           <a:prstGeom prst="roundRect">
             <a:avLst/>
@@ -18287,14 +18467,14 @@
       </p:sp>
       <p:sp>
         <p:nvSpPr>
-          <p:cNvPr id="50" name="TextBox 49"/>
+          <p:cNvPr id="55" name="TextBox 54"/>
           <p:cNvSpPr txBox="1"/>
           <p:nvPr/>
         </p:nvSpPr>
         <p:spPr>
           <a:xfrm>
-            <a:off x="8229600" y="4069080"/>
-            <a:ext cx="3291840" cy="320040"/>
+            <a:off x="3273552" y="4069080"/>
+            <a:ext cx="2642615" cy="292608"/>
           </a:xfrm>
           <a:prstGeom prst="rect">
             <a:avLst/>
@@ -18308,7 +18488,7 @@
           <a:lstStyle/>
           <a:p>
             <a:pPr algn="l">
-              <a:defRPr sz="1600" b="1">
+              <a:defRPr sz="1300" b="1">
                 <a:solidFill>
                   <a:srgbClr val="9B59B6"/>
                 </a:solidFill>
@@ -18316,21 +18496,21 @@
               </a:defRPr>
             </a:pPr>
             <a:r>
-              <a:t>Antagonistic</a:t>
-            </a:r>
-          </a:p>
-        </p:txBody>
-      </p:sp>
-      <p:sp>
-        <p:nvSpPr>
-          <p:cNvPr id="51" name="TextBox 50"/>
+              <a:t>Adversarial</a:t>
+            </a:r>
+          </a:p>
+        </p:txBody>
+      </p:sp>
+      <p:sp>
+        <p:nvSpPr>
+          <p:cNvPr id="56" name="TextBox 55"/>
           <p:cNvSpPr txBox="1"/>
           <p:nvPr/>
         </p:nvSpPr>
         <p:spPr>
           <a:xfrm>
-            <a:off x="8229600" y="4389120"/>
-            <a:ext cx="1828800" cy="822960"/>
+            <a:off x="3273552" y="4389120"/>
+            <a:ext cx="1325880" cy="1097280"/>
           </a:xfrm>
           <a:prstGeom prst="rect">
             <a:avLst/>
@@ -18344,7 +18524,7 @@
           <a:lstStyle/>
           <a:p>
             <a:pPr algn="l">
-              <a:defRPr sz="1100" b="0">
+              <a:defRPr sz="800" b="0">
                 <a:solidFill>
                   <a:srgbClr val="BDBDBD"/>
                 </a:solidFill>
@@ -18352,7 +18532,7 @@
               </a:defRPr>
             </a:pPr>
             <a:r>
-              <a:t>Heavy pods → 1 node</a:t>
+              <a:t>Heavy pods → single node (worst-fit)</a:t>
             </a:r>
             <a:br/>
             <a:r>
@@ -18367,14 +18547,14 @@
       </p:sp>
       <p:sp>
         <p:nvSpPr>
-          <p:cNvPr id="52" name="Rounded Rectangle 51"/>
+          <p:cNvPr id="57" name="Rounded Rectangle 56"/>
           <p:cNvSpPr/>
           <p:nvPr/>
         </p:nvSpPr>
         <p:spPr>
           <a:xfrm>
-            <a:off x="10241280" y="4937760"/>
-            <a:ext cx="228600" cy="228600"/>
+            <a:off x="4850892" y="4663440"/>
+            <a:ext cx="164592" cy="164592"/>
           </a:xfrm>
           <a:prstGeom prst="roundRect">
             <a:avLst/>
@@ -18410,14 +18590,14 @@
       </p:sp>
       <p:sp>
         <p:nvSpPr>
-          <p:cNvPr id="53" name="Rounded Rectangle 52"/>
+          <p:cNvPr id="58" name="Rounded Rectangle 57"/>
           <p:cNvSpPr/>
           <p:nvPr/>
         </p:nvSpPr>
         <p:spPr>
           <a:xfrm>
-            <a:off x="10469880" y="5074920"/>
-            <a:ext cx="228600" cy="228600"/>
+            <a:off x="5045202" y="4766310"/>
+            <a:ext cx="164592" cy="164592"/>
           </a:xfrm>
           <a:prstGeom prst="roundRect">
             <a:avLst/>
@@ -18453,14 +18633,14 @@
       </p:sp>
       <p:sp>
         <p:nvSpPr>
-          <p:cNvPr id="54" name="Rounded Rectangle 53"/>
+          <p:cNvPr id="59" name="Rounded Rectangle 58"/>
           <p:cNvSpPr/>
           <p:nvPr/>
         </p:nvSpPr>
         <p:spPr>
           <a:xfrm>
-            <a:off x="10881360" y="5120640"/>
-            <a:ext cx="228600" cy="228600"/>
+            <a:off x="5394959" y="4800600"/>
+            <a:ext cx="164592" cy="164592"/>
           </a:xfrm>
           <a:prstGeom prst="roundRect">
             <a:avLst/>
@@ -18496,14 +18676,14 @@
       </p:sp>
       <p:sp>
         <p:nvSpPr>
-          <p:cNvPr id="55" name="Rounded Rectangle 54"/>
+          <p:cNvPr id="60" name="Rounded Rectangle 59"/>
           <p:cNvSpPr/>
           <p:nvPr/>
         </p:nvSpPr>
         <p:spPr>
           <a:xfrm>
-            <a:off x="11155680" y="5303520"/>
-            <a:ext cx="228600" cy="228600"/>
+            <a:off x="5628131" y="4937760"/>
+            <a:ext cx="164592" cy="164592"/>
           </a:xfrm>
           <a:prstGeom prst="roundRect">
             <a:avLst/>
@@ -18539,14 +18719,14 @@
       </p:sp>
       <p:sp>
         <p:nvSpPr>
-          <p:cNvPr id="56" name="TextBox 55"/>
+          <p:cNvPr id="61" name="TextBox 60"/>
           <p:cNvSpPr txBox="1"/>
           <p:nvPr/>
         </p:nvSpPr>
         <p:spPr>
           <a:xfrm>
-            <a:off x="8229600" y="5715000"/>
-            <a:ext cx="3291840" cy="228600"/>
+            <a:off x="3273552" y="5532120"/>
+            <a:ext cx="2642615" cy="201168"/>
           </a:xfrm>
           <a:prstGeom prst="rect">
             <a:avLst/>
@@ -18560,7 +18740,7 @@
           <a:lstStyle/>
           <a:p>
             <a:pPr algn="l">
-              <a:defRPr sz="1100" b="1">
+              <a:defRPr sz="900" b="1">
                 <a:solidFill>
                   <a:srgbClr val="E74C3C"/>
                 </a:solidFill>
@@ -18568,21 +18748,21 @@
               </a:defRPr>
             </a:pPr>
             <a:r>
-              <a:t>Contention: High</a:t>
-            </a:r>
-          </a:p>
-        </p:txBody>
-      </p:sp>
-      <p:sp>
-        <p:nvSpPr>
-          <p:cNvPr id="57" name="TextBox 56"/>
+              <a:t>Contention: High (asymmetric)</a:t>
+            </a:r>
+          </a:p>
+        </p:txBody>
+      </p:sp>
+      <p:sp>
+        <p:nvSpPr>
+          <p:cNvPr id="62" name="TextBox 61"/>
           <p:cNvSpPr txBox="1"/>
           <p:nvPr/>
         </p:nvSpPr>
         <p:spPr>
           <a:xfrm>
-            <a:off x="8229600" y="5943600"/>
-            <a:ext cx="3291840" cy="274320"/>
+            <a:off x="3273552" y="5760720"/>
+            <a:ext cx="2642615" cy="201168"/>
           </a:xfrm>
           <a:prstGeom prst="rect">
             <a:avLst/>
@@ -18596,7 +18776,7 @@
           <a:lstStyle/>
           <a:p>
             <a:pPr algn="l">
-              <a:defRPr sz="1000" b="0">
+              <a:defRPr sz="800" b="0">
                 <a:solidFill>
                   <a:srgbClr val="9090A0"/>
                 </a:solidFill>
@@ -18604,7 +18784,853 @@
               </a:defRPr>
             </a:pPr>
             <a:r>
-              <a:t>Resource-weighted placement</a:t>
+              <a:t>Resource-weighted hotspot</a:t>
+            </a:r>
+          </a:p>
+        </p:txBody>
+      </p:sp>
+      <p:sp>
+        <p:nvSpPr>
+          <p:cNvPr id="63" name="TextBox 62"/>
+          <p:cNvSpPr txBox="1"/>
+          <p:nvPr/>
+        </p:nvSpPr>
+        <p:spPr>
+          <a:xfrm>
+            <a:off x="3273552" y="6035040"/>
+            <a:ext cx="2642615" cy="292608"/>
+          </a:xfrm>
+          <a:prstGeom prst="rect">
+            <a:avLst/>
+          </a:prstGeom>
+          <a:noFill/>
+        </p:spPr>
+        <p:txBody>
+          <a:bodyPr wrap="square">
+            <a:spAutoFit/>
+          </a:bodyPr>
+          <a:lstStyle/>
+          <a:p>
+            <a:pPr algn="l">
+              <a:defRPr sz="700" b="0">
+                <a:solidFill>
+                  <a:srgbClr val="0096D6"/>
+                </a:solidFill>
+                <a:latin typeface="Calibri"/>
+              </a:defRPr>
+            </a:pPr>
+            <a:r>
+              <a:t>Worst-fit; Cortez 2017</a:t>
+            </a:r>
+          </a:p>
+        </p:txBody>
+      </p:sp>
+      <p:sp>
+        <p:nvSpPr>
+          <p:cNvPr id="64" name="Rounded Rectangle 63"/>
+          <p:cNvSpPr/>
+          <p:nvPr/>
+        </p:nvSpPr>
+        <p:spPr>
+          <a:xfrm>
+            <a:off x="6172200" y="4023360"/>
+            <a:ext cx="2788920" cy="2377440"/>
+          </a:xfrm>
+          <a:prstGeom prst="roundRect">
+            <a:avLst/>
+          </a:prstGeom>
+          <a:solidFill>
+            <a:srgbClr val="121222"/>
+          </a:solidFill>
+          <a:ln w="25400">
+            <a:solidFill>
+              <a:srgbClr val="2ECC71"/>
+            </a:solidFill>
+          </a:ln>
+        </p:spPr>
+        <p:style>
+          <a:lnRef idx="1">
+            <a:schemeClr val="accent1"/>
+          </a:lnRef>
+          <a:fillRef idx="3">
+            <a:schemeClr val="accent1"/>
+          </a:fillRef>
+          <a:effectRef idx="2">
+            <a:schemeClr val="accent1"/>
+          </a:effectRef>
+          <a:fontRef idx="minor">
+            <a:schemeClr val="lt1"/>
+          </a:fontRef>
+        </p:style>
+        <p:txBody>
+          <a:bodyPr rtlCol="0" anchor="ctr"/>
+          <a:lstStyle/>
+          <a:p>
+            <a:pPr algn="ctr"/>
+          </a:p>
+        </p:txBody>
+      </p:sp>
+      <p:sp>
+        <p:nvSpPr>
+          <p:cNvPr id="65" name="TextBox 64"/>
+          <p:cNvSpPr txBox="1"/>
+          <p:nvPr/>
+        </p:nvSpPr>
+        <p:spPr>
+          <a:xfrm>
+            <a:off x="6245352" y="4069080"/>
+            <a:ext cx="2642615" cy="292608"/>
+          </a:xfrm>
+          <a:prstGeom prst="rect">
+            <a:avLst/>
+          </a:prstGeom>
+          <a:noFill/>
+        </p:spPr>
+        <p:txBody>
+          <a:bodyPr wrap="square">
+            <a:spAutoFit/>
+          </a:bodyPr>
+          <a:lstStyle/>
+          <a:p>
+            <a:pPr algn="l">
+              <a:defRPr sz="1300" b="1">
+                <a:solidFill>
+                  <a:srgbClr val="2ECC71"/>
+                </a:solidFill>
+                <a:latin typeface="Calibri"/>
+              </a:defRPr>
+            </a:pPr>
+            <a:r>
+              <a:t>Best-fit</a:t>
+            </a:r>
+          </a:p>
+        </p:txBody>
+      </p:sp>
+      <p:sp>
+        <p:nvSpPr>
+          <p:cNvPr id="66" name="TextBox 65"/>
+          <p:cNvSpPr txBox="1"/>
+          <p:nvPr/>
+        </p:nvSpPr>
+        <p:spPr>
+          <a:xfrm>
+            <a:off x="6245352" y="4389120"/>
+            <a:ext cx="1325880" cy="1097280"/>
+          </a:xfrm>
+          <a:prstGeom prst="rect">
+            <a:avLst/>
+          </a:prstGeom>
+          <a:noFill/>
+        </p:spPr>
+        <p:txBody>
+          <a:bodyPr wrap="square">
+            <a:spAutoFit/>
+          </a:bodyPr>
+          <a:lstStyle/>
+          <a:p>
+            <a:pPr algn="l">
+              <a:defRPr sz="800" b="0">
+                <a:solidFill>
+                  <a:srgbClr val="BDBDBD"/>
+                </a:solidFill>
+                <a:latin typeface="Calibri"/>
+              </a:defRPr>
+            </a:pPr>
+            <a:r>
+              <a:t>Pack into fewest nodes</a:t>
+            </a:r>
+            <a:br/>
+            <a:r>
+              <a:t>(bin-packing decreasing)</a:t>
+            </a:r>
+            <a:br/>
+            <a:r>
+              <a:t>Borg-style resource scoring</a:t>
+            </a:r>
+          </a:p>
+        </p:txBody>
+      </p:sp>
+      <p:sp>
+        <p:nvSpPr>
+          <p:cNvPr id="67" name="Rounded Rectangle 66"/>
+          <p:cNvSpPr/>
+          <p:nvPr/>
+        </p:nvSpPr>
+        <p:spPr>
+          <a:xfrm>
+            <a:off x="7822692" y="4663440"/>
+            <a:ext cx="164592" cy="164592"/>
+          </a:xfrm>
+          <a:prstGeom prst="roundRect">
+            <a:avLst/>
+          </a:prstGeom>
+          <a:solidFill>
+            <a:srgbClr val="2ECC71"/>
+          </a:solidFill>
+          <a:ln>
+            <a:noFill/>
+          </a:ln>
+        </p:spPr>
+        <p:style>
+          <a:lnRef idx="1">
+            <a:schemeClr val="accent1"/>
+          </a:lnRef>
+          <a:fillRef idx="3">
+            <a:schemeClr val="accent1"/>
+          </a:fillRef>
+          <a:effectRef idx="2">
+            <a:schemeClr val="accent1"/>
+          </a:effectRef>
+          <a:fontRef idx="minor">
+            <a:schemeClr val="lt1"/>
+          </a:fontRef>
+        </p:style>
+        <p:txBody>
+          <a:bodyPr rtlCol="0" anchor="ctr"/>
+          <a:lstStyle/>
+          <a:p>
+            <a:pPr algn="ctr"/>
+          </a:p>
+        </p:txBody>
+      </p:sp>
+      <p:sp>
+        <p:nvSpPr>
+          <p:cNvPr id="68" name="Rounded Rectangle 67"/>
+          <p:cNvSpPr/>
+          <p:nvPr/>
+        </p:nvSpPr>
+        <p:spPr>
+          <a:xfrm>
+            <a:off x="8017002" y="4766310"/>
+            <a:ext cx="164592" cy="164592"/>
+          </a:xfrm>
+          <a:prstGeom prst="roundRect">
+            <a:avLst/>
+          </a:prstGeom>
+          <a:solidFill>
+            <a:srgbClr val="2ECC71"/>
+          </a:solidFill>
+          <a:ln>
+            <a:noFill/>
+          </a:ln>
+        </p:spPr>
+        <p:style>
+          <a:lnRef idx="1">
+            <a:schemeClr val="accent1"/>
+          </a:lnRef>
+          <a:fillRef idx="3">
+            <a:schemeClr val="accent1"/>
+          </a:fillRef>
+          <a:effectRef idx="2">
+            <a:schemeClr val="accent1"/>
+          </a:effectRef>
+          <a:fontRef idx="minor">
+            <a:schemeClr val="lt1"/>
+          </a:fontRef>
+        </p:style>
+        <p:txBody>
+          <a:bodyPr rtlCol="0" anchor="ctr"/>
+          <a:lstStyle/>
+          <a:p>
+            <a:pPr algn="ctr"/>
+          </a:p>
+        </p:txBody>
+      </p:sp>
+      <p:sp>
+        <p:nvSpPr>
+          <p:cNvPr id="69" name="Rounded Rectangle 68"/>
+          <p:cNvSpPr/>
+          <p:nvPr/>
+        </p:nvSpPr>
+        <p:spPr>
+          <a:xfrm>
+            <a:off x="7900416" y="4903470"/>
+            <a:ext cx="164592" cy="164592"/>
+          </a:xfrm>
+          <a:prstGeom prst="roundRect">
+            <a:avLst/>
+          </a:prstGeom>
+          <a:solidFill>
+            <a:srgbClr val="2ECC71"/>
+          </a:solidFill>
+          <a:ln>
+            <a:noFill/>
+          </a:ln>
+        </p:spPr>
+        <p:style>
+          <a:lnRef idx="1">
+            <a:schemeClr val="accent1"/>
+          </a:lnRef>
+          <a:fillRef idx="3">
+            <a:schemeClr val="accent1"/>
+          </a:fillRef>
+          <a:effectRef idx="2">
+            <a:schemeClr val="accent1"/>
+          </a:effectRef>
+          <a:fontRef idx="minor">
+            <a:schemeClr val="lt1"/>
+          </a:fontRef>
+        </p:style>
+        <p:txBody>
+          <a:bodyPr rtlCol="0" anchor="ctr"/>
+          <a:lstStyle/>
+          <a:p>
+            <a:pPr algn="ctr"/>
+          </a:p>
+        </p:txBody>
+      </p:sp>
+      <p:sp>
+        <p:nvSpPr>
+          <p:cNvPr id="70" name="Rounded Rectangle 69"/>
+          <p:cNvSpPr/>
+          <p:nvPr/>
+        </p:nvSpPr>
+        <p:spPr>
+          <a:xfrm>
+            <a:off x="8561070" y="4800600"/>
+            <a:ext cx="164592" cy="164592"/>
+          </a:xfrm>
+          <a:prstGeom prst="roundRect">
+            <a:avLst/>
+          </a:prstGeom>
+          <a:solidFill>
+            <a:srgbClr val="2ECC71"/>
+          </a:solidFill>
+          <a:ln>
+            <a:noFill/>
+          </a:ln>
+        </p:spPr>
+        <p:style>
+          <a:lnRef idx="1">
+            <a:schemeClr val="accent1"/>
+          </a:lnRef>
+          <a:fillRef idx="3">
+            <a:schemeClr val="accent1"/>
+          </a:fillRef>
+          <a:effectRef idx="2">
+            <a:schemeClr val="accent1"/>
+          </a:effectRef>
+          <a:fontRef idx="minor">
+            <a:schemeClr val="lt1"/>
+          </a:fontRef>
+        </p:style>
+        <p:txBody>
+          <a:bodyPr rtlCol="0" anchor="ctr"/>
+          <a:lstStyle/>
+          <a:p>
+            <a:pPr algn="ctr"/>
+          </a:p>
+        </p:txBody>
+      </p:sp>
+      <p:sp>
+        <p:nvSpPr>
+          <p:cNvPr id="71" name="TextBox 70"/>
+          <p:cNvSpPr txBox="1"/>
+          <p:nvPr/>
+        </p:nvSpPr>
+        <p:spPr>
+          <a:xfrm>
+            <a:off x="6245352" y="5532120"/>
+            <a:ext cx="2642615" cy="201168"/>
+          </a:xfrm>
+          <a:prstGeom prst="rect">
+            <a:avLst/>
+          </a:prstGeom>
+          <a:noFill/>
+        </p:spPr>
+        <p:txBody>
+          <a:bodyPr wrap="square">
+            <a:spAutoFit/>
+          </a:bodyPr>
+          <a:lstStyle/>
+          <a:p>
+            <a:pPr algn="l">
+              <a:defRPr sz="900" b="1">
+                <a:solidFill>
+                  <a:srgbClr val="F39C12"/>
+                </a:solidFill>
+                <a:latin typeface="Calibri"/>
+              </a:defRPr>
+            </a:pPr>
+            <a:r>
+              <a:t>Contention: Moderate (packed)</a:t>
+            </a:r>
+          </a:p>
+        </p:txBody>
+      </p:sp>
+      <p:sp>
+        <p:nvSpPr>
+          <p:cNvPr id="72" name="TextBox 71"/>
+          <p:cNvSpPr txBox="1"/>
+          <p:nvPr/>
+        </p:nvSpPr>
+        <p:spPr>
+          <a:xfrm>
+            <a:off x="6245352" y="5760720"/>
+            <a:ext cx="2642615" cy="201168"/>
+          </a:xfrm>
+          <a:prstGeom prst="rect">
+            <a:avLst/>
+          </a:prstGeom>
+          <a:noFill/>
+        </p:spPr>
+        <p:txBody>
+          <a:bodyPr wrap="square">
+            <a:spAutoFit/>
+          </a:bodyPr>
+          <a:lstStyle/>
+          <a:p>
+            <a:pPr algn="l">
+              <a:defRPr sz="800" b="0">
+                <a:solidFill>
+                  <a:srgbClr val="9090A0"/>
+                </a:solidFill>
+                <a:latin typeface="Calibri"/>
+              </a:defRPr>
+            </a:pPr>
+            <a:r>
+              <a:t>Minimizes nodes used</a:t>
+            </a:r>
+          </a:p>
+        </p:txBody>
+      </p:sp>
+      <p:sp>
+        <p:nvSpPr>
+          <p:cNvPr id="73" name="TextBox 72"/>
+          <p:cNvSpPr txBox="1"/>
+          <p:nvPr/>
+        </p:nvSpPr>
+        <p:spPr>
+          <a:xfrm>
+            <a:off x="6245352" y="6035040"/>
+            <a:ext cx="2642615" cy="292608"/>
+          </a:xfrm>
+          <a:prstGeom prst="rect">
+            <a:avLst/>
+          </a:prstGeom>
+          <a:noFill/>
+        </p:spPr>
+        <p:txBody>
+          <a:bodyPr wrap="square">
+            <a:spAutoFit/>
+          </a:bodyPr>
+          <a:lstStyle/>
+          <a:p>
+            <a:pPr algn="l">
+              <a:defRPr sz="700" b="0">
+                <a:solidFill>
+                  <a:srgbClr val="0096D6"/>
+                </a:solidFill>
+                <a:latin typeface="Calibri"/>
+              </a:defRPr>
+            </a:pPr>
+            <a:r>
+              <a:t>Borg (Verma 2015; Burns 2016)</a:t>
+            </a:r>
+          </a:p>
+        </p:txBody>
+      </p:sp>
+      <p:sp>
+        <p:nvSpPr>
+          <p:cNvPr id="74" name="Rounded Rectangle 73"/>
+          <p:cNvSpPr/>
+          <p:nvPr/>
+        </p:nvSpPr>
+        <p:spPr>
+          <a:xfrm>
+            <a:off x="9144000" y="4023360"/>
+            <a:ext cx="2788920" cy="2377440"/>
+          </a:xfrm>
+          <a:prstGeom prst="roundRect">
+            <a:avLst/>
+          </a:prstGeom>
+          <a:solidFill>
+            <a:srgbClr val="121222"/>
+          </a:solidFill>
+          <a:ln w="25400">
+            <a:solidFill>
+              <a:srgbClr val="0096D6"/>
+            </a:solidFill>
+          </a:ln>
+        </p:spPr>
+        <p:style>
+          <a:lnRef idx="1">
+            <a:schemeClr val="accent1"/>
+          </a:lnRef>
+          <a:fillRef idx="3">
+            <a:schemeClr val="accent1"/>
+          </a:fillRef>
+          <a:effectRef idx="2">
+            <a:schemeClr val="accent1"/>
+          </a:effectRef>
+          <a:fontRef idx="minor">
+            <a:schemeClr val="lt1"/>
+          </a:fontRef>
+        </p:style>
+        <p:txBody>
+          <a:bodyPr rtlCol="0" anchor="ctr"/>
+          <a:lstStyle/>
+          <a:p>
+            <a:pPr algn="ctr"/>
+          </a:p>
+        </p:txBody>
+      </p:sp>
+      <p:sp>
+        <p:nvSpPr>
+          <p:cNvPr id="75" name="TextBox 74"/>
+          <p:cNvSpPr txBox="1"/>
+          <p:nvPr/>
+        </p:nvSpPr>
+        <p:spPr>
+          <a:xfrm>
+            <a:off x="9217152" y="4069080"/>
+            <a:ext cx="2642615" cy="292608"/>
+          </a:xfrm>
+          <a:prstGeom prst="rect">
+            <a:avLst/>
+          </a:prstGeom>
+          <a:noFill/>
+        </p:spPr>
+        <p:txBody>
+          <a:bodyPr wrap="square">
+            <a:spAutoFit/>
+          </a:bodyPr>
+          <a:lstStyle/>
+          <a:p>
+            <a:pPr algn="l">
+              <a:defRPr sz="1300" b="1">
+                <a:solidFill>
+                  <a:srgbClr val="0096D6"/>
+                </a:solidFill>
+                <a:latin typeface="Calibri"/>
+              </a:defRPr>
+            </a:pPr>
+            <a:r>
+              <a:t>Dependency-aware</a:t>
+            </a:r>
+          </a:p>
+        </p:txBody>
+      </p:sp>
+      <p:sp>
+        <p:nvSpPr>
+          <p:cNvPr id="76" name="TextBox 75"/>
+          <p:cNvSpPr txBox="1"/>
+          <p:nvPr/>
+        </p:nvSpPr>
+        <p:spPr>
+          <a:xfrm>
+            <a:off x="9217152" y="4389120"/>
+            <a:ext cx="1325880" cy="1097280"/>
+          </a:xfrm>
+          <a:prstGeom prst="rect">
+            <a:avLst/>
+          </a:prstGeom>
+          <a:noFill/>
+        </p:spPr>
+        <p:txBody>
+          <a:bodyPr wrap="square">
+            <a:spAutoFit/>
+          </a:bodyPr>
+          <a:lstStyle/>
+          <a:p>
+            <a:pPr algn="l">
+              <a:defRPr sz="800" b="0">
+                <a:solidFill>
+                  <a:srgbClr val="BDBDBD"/>
+                </a:solidFill>
+                <a:latin typeface="Calibri"/>
+              </a:defRPr>
+            </a:pPr>
+            <a:r>
+              <a:t>Co-locate communicating services</a:t>
+            </a:r>
+            <a:br/>
+            <a:r>
+              <a:t>via service-graph partitioning</a:t>
+            </a:r>
+            <a:br/>
+            <a:r>
+              <a:t>(BFS from frontend root)</a:t>
+            </a:r>
+          </a:p>
+        </p:txBody>
+      </p:sp>
+      <p:sp>
+        <p:nvSpPr>
+          <p:cNvPr id="77" name="Rounded Rectangle 76"/>
+          <p:cNvSpPr/>
+          <p:nvPr/>
+        </p:nvSpPr>
+        <p:spPr>
+          <a:xfrm>
+            <a:off x="10794492" y="4697730"/>
+            <a:ext cx="164592" cy="164592"/>
+          </a:xfrm>
+          <a:prstGeom prst="roundRect">
+            <a:avLst/>
+          </a:prstGeom>
+          <a:solidFill>
+            <a:srgbClr val="0096D6"/>
+          </a:solidFill>
+          <a:ln>
+            <a:noFill/>
+          </a:ln>
+        </p:spPr>
+        <p:style>
+          <a:lnRef idx="1">
+            <a:schemeClr val="accent1"/>
+          </a:lnRef>
+          <a:fillRef idx="3">
+            <a:schemeClr val="accent1"/>
+          </a:fillRef>
+          <a:effectRef idx="2">
+            <a:schemeClr val="accent1"/>
+          </a:effectRef>
+          <a:fontRef idx="minor">
+            <a:schemeClr val="lt1"/>
+          </a:fontRef>
+        </p:style>
+        <p:txBody>
+          <a:bodyPr rtlCol="0" anchor="ctr"/>
+          <a:lstStyle/>
+          <a:p>
+            <a:pPr algn="ctr"/>
+          </a:p>
+        </p:txBody>
+      </p:sp>
+      <p:sp>
+        <p:nvSpPr>
+          <p:cNvPr id="78" name="Rounded Rectangle 77"/>
+          <p:cNvSpPr/>
+          <p:nvPr/>
+        </p:nvSpPr>
+        <p:spPr>
+          <a:xfrm>
+            <a:off x="10988802" y="4800600"/>
+            <a:ext cx="164592" cy="164592"/>
+          </a:xfrm>
+          <a:prstGeom prst="roundRect">
+            <a:avLst/>
+          </a:prstGeom>
+          <a:solidFill>
+            <a:srgbClr val="0096D6"/>
+          </a:solidFill>
+          <a:ln>
+            <a:noFill/>
+          </a:ln>
+        </p:spPr>
+        <p:style>
+          <a:lnRef idx="1">
+            <a:schemeClr val="accent1"/>
+          </a:lnRef>
+          <a:fillRef idx="3">
+            <a:schemeClr val="accent1"/>
+          </a:fillRef>
+          <a:effectRef idx="2">
+            <a:schemeClr val="accent1"/>
+          </a:effectRef>
+          <a:fontRef idx="minor">
+            <a:schemeClr val="lt1"/>
+          </a:fontRef>
+        </p:style>
+        <p:txBody>
+          <a:bodyPr rtlCol="0" anchor="ctr"/>
+          <a:lstStyle/>
+          <a:p>
+            <a:pPr algn="ctr"/>
+          </a:p>
+        </p:txBody>
+      </p:sp>
+      <p:sp>
+        <p:nvSpPr>
+          <p:cNvPr id="79" name="Rounded Rectangle 78"/>
+          <p:cNvSpPr/>
+          <p:nvPr/>
+        </p:nvSpPr>
+        <p:spPr>
+          <a:xfrm>
+            <a:off x="11416284" y="4732020"/>
+            <a:ext cx="164592" cy="164592"/>
+          </a:xfrm>
+          <a:prstGeom prst="roundRect">
+            <a:avLst/>
+          </a:prstGeom>
+          <a:solidFill>
+            <a:srgbClr val="0096D6"/>
+          </a:solidFill>
+          <a:ln>
+            <a:noFill/>
+          </a:ln>
+        </p:spPr>
+        <p:style>
+          <a:lnRef idx="1">
+            <a:schemeClr val="accent1"/>
+          </a:lnRef>
+          <a:fillRef idx="3">
+            <a:schemeClr val="accent1"/>
+          </a:fillRef>
+          <a:effectRef idx="2">
+            <a:schemeClr val="accent1"/>
+          </a:effectRef>
+          <a:fontRef idx="minor">
+            <a:schemeClr val="lt1"/>
+          </a:fontRef>
+        </p:style>
+        <p:txBody>
+          <a:bodyPr rtlCol="0" anchor="ctr"/>
+          <a:lstStyle/>
+          <a:p>
+            <a:pPr algn="ctr"/>
+          </a:p>
+        </p:txBody>
+      </p:sp>
+      <p:sp>
+        <p:nvSpPr>
+          <p:cNvPr id="80" name="Rounded Rectangle 79"/>
+          <p:cNvSpPr/>
+          <p:nvPr/>
+        </p:nvSpPr>
+        <p:spPr>
+          <a:xfrm>
+            <a:off x="11571732" y="4903470"/>
+            <a:ext cx="164592" cy="164592"/>
+          </a:xfrm>
+          <a:prstGeom prst="roundRect">
+            <a:avLst/>
+          </a:prstGeom>
+          <a:solidFill>
+            <a:srgbClr val="0096D6"/>
+          </a:solidFill>
+          <a:ln>
+            <a:noFill/>
+          </a:ln>
+        </p:spPr>
+        <p:style>
+          <a:lnRef idx="1">
+            <a:schemeClr val="accent1"/>
+          </a:lnRef>
+          <a:fillRef idx="3">
+            <a:schemeClr val="accent1"/>
+          </a:fillRef>
+          <a:effectRef idx="2">
+            <a:schemeClr val="accent1"/>
+          </a:effectRef>
+          <a:fontRef idx="minor">
+            <a:schemeClr val="lt1"/>
+          </a:fontRef>
+        </p:style>
+        <p:txBody>
+          <a:bodyPr rtlCol="0" anchor="ctr"/>
+          <a:lstStyle/>
+          <a:p>
+            <a:pPr algn="ctr"/>
+          </a:p>
+        </p:txBody>
+      </p:sp>
+      <p:sp>
+        <p:nvSpPr>
+          <p:cNvPr id="81" name="TextBox 80"/>
+          <p:cNvSpPr txBox="1"/>
+          <p:nvPr/>
+        </p:nvSpPr>
+        <p:spPr>
+          <a:xfrm>
+            <a:off x="9217152" y="5532120"/>
+            <a:ext cx="2642615" cy="201168"/>
+          </a:xfrm>
+          <a:prstGeom prst="rect">
+            <a:avLst/>
+          </a:prstGeom>
+          <a:noFill/>
+        </p:spPr>
+        <p:txBody>
+          <a:bodyPr wrap="square">
+            <a:spAutoFit/>
+          </a:bodyPr>
+          <a:lstStyle/>
+          <a:p>
+            <a:pPr algn="l">
+              <a:defRPr sz="900" b="1">
+                <a:solidFill>
+                  <a:srgbClr val="F39C12"/>
+                </a:solidFill>
+                <a:latin typeface="Calibri"/>
+              </a:defRPr>
+            </a:pPr>
+            <a:r>
+              <a:t>Contention: Moderate (grouped)</a:t>
+            </a:r>
+          </a:p>
+        </p:txBody>
+      </p:sp>
+      <p:sp>
+        <p:nvSpPr>
+          <p:cNvPr id="82" name="TextBox 81"/>
+          <p:cNvSpPr txBox="1"/>
+          <p:nvPr/>
+        </p:nvSpPr>
+        <p:spPr>
+          <a:xfrm>
+            <a:off x="9217152" y="5760720"/>
+            <a:ext cx="2642615" cy="201168"/>
+          </a:xfrm>
+          <a:prstGeom prst="rect">
+            <a:avLst/>
+          </a:prstGeom>
+          <a:noFill/>
+        </p:spPr>
+        <p:txBody>
+          <a:bodyPr wrap="square">
+            <a:spAutoFit/>
+          </a:bodyPr>
+          <a:lstStyle/>
+          <a:p>
+            <a:pPr algn="l">
+              <a:defRPr sz="800" b="0">
+                <a:solidFill>
+                  <a:srgbClr val="9090A0"/>
+                </a:solidFill>
+                <a:latin typeface="Calibri"/>
+              </a:defRPr>
+            </a:pPr>
+            <a:r>
+              <a:t>Preserves service-graph edges</a:t>
+            </a:r>
+          </a:p>
+        </p:txBody>
+      </p:sp>
+      <p:sp>
+        <p:nvSpPr>
+          <p:cNvPr id="83" name="TextBox 82"/>
+          <p:cNvSpPr txBox="1"/>
+          <p:nvPr/>
+        </p:nvSpPr>
+        <p:spPr>
+          <a:xfrm>
+            <a:off x="9217152" y="6035040"/>
+            <a:ext cx="2642615" cy="292608"/>
+          </a:xfrm>
+          <a:prstGeom prst="rect">
+            <a:avLst/>
+          </a:prstGeom>
+          <a:noFill/>
+        </p:spPr>
+        <p:txBody>
+          <a:bodyPr wrap="square">
+            <a:spAutoFit/>
+          </a:bodyPr>
+          <a:lstStyle/>
+          <a:p>
+            <a:pPr algn="l">
+              <a:defRPr sz="700" b="0">
+                <a:solidFill>
+                  <a:srgbClr val="0096D6"/>
+                </a:solidFill>
+                <a:latin typeface="Calibri"/>
+              </a:defRPr>
+            </a:pPr>
+            <a:r>
+              <a:t>DeathStarBench (Gan ASPLOS 2019)</a:t>
             </a:r>
           </a:p>
         </p:txBody>
@@ -21163,7 +22189,7 @@
               </a:defRPr>
             </a:pPr>
             <a:r>
-              <a:t>Random and antagonistic strategies use seeded PRNGs. Same seed = same placement = comparable results across experiment runs.</a:t>
+              <a:t>Random and adversarial strategies use seeded PRNGs. Same seed = same placement = comparable results across experiment runs.</a:t>
             </a:r>
           </a:p>
         </p:txBody>

--- a/ChaosProbe_Presentation.pptx
+++ b/ChaosProbe_Presentation.pptx
@@ -4536,75 +4536,30 @@
           </a:p>
         </p:txBody>
       </p:sp>
-      <p:sp>
-        <p:nvSpPr>
-          <p:cNvPr id="4" name="Rounded Rectangle 3"/>
-          <p:cNvSpPr/>
-          <p:nvPr/>
-        </p:nvSpPr>
+      <p:pic>
+        <p:nvPicPr>
+          <p:cNvPr id="4" name="Picture 3" descr="strategy_comparison_heatmap.png"/>
+          <p:cNvPicPr>
+            <a:picLocks noChangeAspect="1"/>
+          </p:cNvPicPr>
+          <p:nvPr/>
+        </p:nvPicPr>
+        <p:blipFill>
+          <a:blip r:embed="rId2"/>
+          <a:stretch>
+            <a:fillRect/>
+          </a:stretch>
+        </p:blipFill>
         <p:spPr>
           <a:xfrm>
             <a:off x="274320" y="1280160"/>
             <a:ext cx="5943600" cy="3200400"/>
           </a:xfrm>
-          <a:prstGeom prst="roundRect">
-            <a:avLst/>
-          </a:prstGeom>
-          <a:solidFill>
-            <a:srgbClr val="121222"/>
-          </a:solidFill>
-          <a:ln w="12700">
-            <a:solidFill>
-              <a:srgbClr val="9090A0"/>
-            </a:solidFill>
-          </a:ln>
-        </p:spPr>
-        <p:style>
-          <a:lnRef idx="1">
-            <a:schemeClr val="accent1"/>
-          </a:lnRef>
-          <a:fillRef idx="3">
-            <a:schemeClr val="accent1"/>
-          </a:fillRef>
-          <a:effectRef idx="2">
-            <a:schemeClr val="accent1"/>
-          </a:effectRef>
-          <a:fontRef idx="minor">
-            <a:schemeClr val="lt1"/>
-          </a:fontRef>
-        </p:style>
-        <p:txBody>
-          <a:bodyPr rtlCol="0" anchor="ctr" wrap="square" lIns="50800" rIns="50800" tIns="25400" bIns="25400"/>
-          <a:lstStyle/>
-          <a:p>
-            <a:pPr algn="ctr">
-              <a:defRPr sz="1100" b="0">
-                <a:solidFill>
-                  <a:srgbClr val="9090A0"/>
-                </a:solidFill>
-                <a:latin typeface="Calibri"/>
-              </a:defRPr>
-            </a:pPr>
-            <a:r>
-              <a:t>[Strategy Comparison Heatmap]</a:t>
-            </a:r>
-            <a:br/>
-            <a:br/>
-            <a:r>
-              <a:t>All thesis dimensions normalised to 0-1.</a:t>
-            </a:r>
-            <a:br/>
-            <a:r>
-              <a:t>Green = better, Red = worse.</a:t>
-            </a:r>
-            <a:br/>
-            <a:br/>
-            <a:r>
-              <a:t>Generated by: chaosprobe visualize</a:t>
-            </a:r>
-          </a:p>
-        </p:txBody>
-      </p:sp>
+          <a:prstGeom prst="rect">
+            <a:avLst/>
+          </a:prstGeom>
+        </p:spPr>
+      </p:pic>
       <p:sp>
         <p:nvSpPr>
           <p:cNvPr id="5" name="TextBox 4"/>

--- a/ChaosProbe_Presentation.pptx
+++ b/ChaosProbe_Presentation.pptx
@@ -16914,7 +16914,7 @@
                           </a:solidFill>
                           <a:latin typeface="Calibri"/>
                         </a:rPr>
-                        <a:t>6 httpProbes</a:t>
+                        <a:t>7 httpProbes + 5 cmdProbes</a:t>
                       </a:r>
                     </a:p>
                   </a:txBody>
@@ -21175,7 +21175,7 @@
         </p:nvGraphicFramePr>
         <p:xfrm>
           <a:off x="7498079" y="2560320"/>
-          <a:ext cx="4389120" cy="2194556"/>
+          <a:ext cx="4389120" cy="1920240"/>
         </p:xfrm>
         <a:graphic>
           <a:graphicData uri="http://schemas.openxmlformats.org/drawingml/2006/table">
@@ -21188,7 +21188,7 @@
                 <a:gridCol w="1463040"/>
                 <a:gridCol w="1463040"/>
               </a:tblGrid>
-              <a:tr h="313508">
+              <a:tr h="240030">
                 <a:tc>
                   <a:txBody>
                     <a:bodyPr wrap="square"/>
@@ -21259,7 +21259,7 @@
                   </a:tcPr>
                 </a:tc>
               </a:tr>
-              <a:tr h="313508">
+              <a:tr h="240030">
                 <a:tc>
                   <a:txBody>
                     <a:bodyPr wrap="square"/>
@@ -21330,7 +21330,7 @@
                   </a:tcPr>
                 </a:tc>
               </a:tr>
-              <a:tr h="313508">
+              <a:tr h="240030">
                 <a:tc>
                   <a:txBody>
                     <a:bodyPr wrap="square"/>
@@ -21401,7 +21401,7 @@
                   </a:tcPr>
                 </a:tc>
               </a:tr>
-              <a:tr h="313508">
+              <a:tr h="240030">
                 <a:tc>
                   <a:txBody>
                     <a:bodyPr wrap="square"/>
@@ -21472,7 +21472,78 @@
                   </a:tcPr>
                 </a:tc>
               </a:tr>
-              <a:tr h="313508">
+              <a:tr h="240030">
+                <a:tc>
+                  <a:txBody>
+                    <a:bodyPr wrap="square"/>
+                    <a:lstStyle/>
+                    <a:p>
+                      <a:pPr algn="l"/>
+                      <a:r>
+                        <a:rPr sz="900" b="0">
+                          <a:solidFill>
+                            <a:srgbClr val="FFFFFF"/>
+                          </a:solidFill>
+                          <a:latin typeface="Calibri"/>
+                        </a:rPr>
+                        <a:t>frontend-product-moderate</a:t>
+                      </a:r>
+                    </a:p>
+                  </a:txBody>
+                  <a:tcPr marL="76200" marR="76200" marT="38100" marB="38100">
+                    <a:solidFill>
+                      <a:srgbClr val="2A2A3E"/>
+                    </a:solidFill>
+                  </a:tcPr>
+                </a:tc>
+                <a:tc>
+                  <a:txBody>
+                    <a:bodyPr wrap="square"/>
+                    <a:lstStyle/>
+                    <a:p>
+                      <a:pPr algn="l"/>
+                      <a:r>
+                        <a:rPr sz="900" b="0">
+                          <a:solidFill>
+                            <a:srgbClr val="FFFFFF"/>
+                          </a:solidFill>
+                          <a:latin typeface="Calibri"/>
+                        </a:rPr>
+                        <a:t>Continuous (3s)</a:t>
+                      </a:r>
+                    </a:p>
+                  </a:txBody>
+                  <a:tcPr marL="76200" marR="76200" marT="38100" marB="38100">
+                    <a:solidFill>
+                      <a:srgbClr val="2A2A3E"/>
+                    </a:solidFill>
+                  </a:tcPr>
+                </a:tc>
+                <a:tc>
+                  <a:txBody>
+                    <a:bodyPr wrap="square"/>
+                    <a:lstStyle/>
+                    <a:p>
+                      <a:pPr algn="l"/>
+                      <a:r>
+                        <a:rPr sz="900" b="0">
+                          <a:solidFill>
+                            <a:srgbClr val="FFFFFF"/>
+                          </a:solidFill>
+                          <a:latin typeface="Calibri"/>
+                        </a:rPr>
+                        <a:t>3s, 2 retries</a:t>
+                      </a:r>
+                    </a:p>
+                  </a:txBody>
+                  <a:tcPr marL="76200" marR="76200" marT="38100" marB="38100">
+                    <a:solidFill>
+                      <a:srgbClr val="2A2A3E"/>
+                    </a:solidFill>
+                  </a:tcPr>
+                </a:tc>
+              </a:tr>
+              <a:tr h="240030">
                 <a:tc>
                   <a:txBody>
                     <a:bodyPr wrap="square"/>
@@ -21532,7 +21603,7 @@
                           </a:solidFill>
                           <a:latin typeface="Calibri"/>
                         </a:rPr>
-                        <a:t>5s, 2 retries</a:t>
+                        <a:t>5s, 3 retries</a:t>
                       </a:r>
                     </a:p>
                   </a:txBody>
@@ -21543,7 +21614,7 @@
                   </a:tcPr>
                 </a:tc>
               </a:tr>
-              <a:tr h="313508">
+              <a:tr h="240030">
                 <a:tc>
                   <a:txBody>
                     <a:bodyPr wrap="square"/>
@@ -21557,7 +21628,7 @@
                           </a:solidFill>
                           <a:latin typeface="Calibri"/>
                         </a:rPr>
-                        <a:t>frontend-homepage-edge</a:t>
+                        <a:t>frontend-homepage-loose</a:t>
                       </a:r>
                     </a:p>
                   </a:txBody>
@@ -21580,7 +21651,7 @@
                           </a:solidFill>
                           <a:latin typeface="Calibri"/>
                         </a:rPr>
-                        <a:t>Edge (5s)</a:t>
+                        <a:t>Continuous (4s)</a:t>
                       </a:r>
                     </a:p>
                   </a:txBody>
@@ -21603,7 +21674,7 @@
                           </a:solidFill>
                           <a:latin typeface="Calibri"/>
                         </a:rPr>
-                        <a:t>15s, 5 retries</a:t>
+                        <a:t>5s, 3 retries</a:t>
                       </a:r>
                     </a:p>
                   </a:txBody>
@@ -21614,7 +21685,7 @@
                   </a:tcPr>
                 </a:tc>
               </a:tr>
-              <a:tr h="313508">
+              <a:tr h="240030">
                 <a:tc>
                   <a:txBody>
                     <a:bodyPr wrap="square"/>
@@ -21674,7 +21745,7 @@
                           </a:solidFill>
                           <a:latin typeface="Calibri"/>
                         </a:rPr>
-                        <a:t>5s, 2 retries</a:t>
+                        <a:t>5s, 3 retries</a:t>
                       </a:r>
                     </a:p>
                   </a:txBody>
@@ -21697,8 +21768,8 @@
         </p:nvSpPr>
         <p:spPr>
           <a:xfrm>
-            <a:off x="457200" y="5029200"/>
-            <a:ext cx="10972800" cy="274320"/>
+            <a:off x="7498079" y="4526280"/>
+            <a:ext cx="4389120" cy="365760"/>
           </a:xfrm>
           <a:prstGeom prst="rect">
             <a:avLst/>
@@ -21712,6 +21783,46 @@
           <a:lstStyle/>
           <a:p>
             <a:pPr algn="l">
+              <a:defRPr sz="900" b="0">
+                <a:solidFill>
+                  <a:srgbClr val="BDBDBD"/>
+                </a:solidFill>
+                <a:latin typeface="Calibri"/>
+              </a:defRPr>
+            </a:pPr>
+            <a:r>
+              <a:t>+ 5 Rust cmdProbes: check-redis, check-http-latency,</a:t>
+            </a:r>
+            <a:br/>
+            <a:r>
+              <a:t>  check-dns-latency, check-tcp-connect, check-cart-flow</a:t>
+            </a:r>
+          </a:p>
+        </p:txBody>
+      </p:sp>
+      <p:sp>
+        <p:nvSpPr>
+          <p:cNvPr id="13" name="TextBox 12"/>
+          <p:cNvSpPr txBox="1"/>
+          <p:nvPr/>
+        </p:nvSpPr>
+        <p:spPr>
+          <a:xfrm>
+            <a:off x="457200" y="5029200"/>
+            <a:ext cx="10972800" cy="274320"/>
+          </a:xfrm>
+          <a:prstGeom prst="rect">
+            <a:avLst/>
+          </a:prstGeom>
+          <a:noFill/>
+        </p:spPr>
+        <p:txBody>
+          <a:bodyPr wrap="square">
+            <a:spAutoFit/>
+          </a:bodyPr>
+          <a:lstStyle/>
+          <a:p>
+            <a:pPr algn="l">
               <a:defRPr sz="1600" b="1">
                 <a:solidFill>
                   <a:srgbClr val="0096D6"/>
@@ -21727,7 +21838,7 @@
       </p:sp>
       <p:sp>
         <p:nvSpPr>
-          <p:cNvPr id="13" name="Rounded Rectangle 12"/>
+          <p:cNvPr id="14" name="Rounded Rectangle 13"/>
           <p:cNvSpPr/>
           <p:nvPr/>
         </p:nvSpPr>
@@ -21772,7 +21883,7 @@
       </p:sp>
       <p:sp>
         <p:nvSpPr>
-          <p:cNvPr id="14" name="TextBox 13"/>
+          <p:cNvPr id="15" name="TextBox 14"/>
           <p:cNvSpPr txBox="1"/>
           <p:nvPr/>
         </p:nvSpPr>
@@ -21808,7 +21919,7 @@
       </p:sp>
       <p:sp>
         <p:nvSpPr>
-          <p:cNvPr id="15" name="Rounded Rectangle 14"/>
+          <p:cNvPr id="16" name="Rounded Rectangle 15"/>
           <p:cNvSpPr/>
           <p:nvPr/>
         </p:nvSpPr>
@@ -21861,7 +21972,7 @@
       </p:sp>
       <p:sp>
         <p:nvSpPr>
-          <p:cNvPr id="16" name="Rounded Rectangle 15"/>
+          <p:cNvPr id="17" name="Rounded Rectangle 16"/>
           <p:cNvSpPr/>
           <p:nvPr/>
         </p:nvSpPr>
@@ -21914,7 +22025,7 @@
       </p:sp>
       <p:sp>
         <p:nvSpPr>
-          <p:cNvPr id="17" name="Rounded Rectangle 16"/>
+          <p:cNvPr id="18" name="Rounded Rectangle 17"/>
           <p:cNvSpPr/>
           <p:nvPr/>
         </p:nvSpPr>
@@ -21967,7 +22078,7 @@
       </p:sp>
       <p:sp>
         <p:nvSpPr>
-          <p:cNvPr id="18" name="Rounded Rectangle 17"/>
+          <p:cNvPr id="19" name="Rounded Rectangle 18"/>
           <p:cNvSpPr/>
           <p:nvPr/>
         </p:nvSpPr>
@@ -22020,7 +22131,7 @@
       </p:sp>
       <p:sp>
         <p:nvSpPr>
-          <p:cNvPr id="19" name="Rounded Rectangle 18"/>
+          <p:cNvPr id="20" name="Rounded Rectangle 19"/>
           <p:cNvSpPr/>
           <p:nvPr/>
         </p:nvSpPr>
@@ -22073,7 +22184,7 @@
       </p:sp>
       <p:sp>
         <p:nvSpPr>
-          <p:cNvPr id="20" name="Rounded Rectangle 19"/>
+          <p:cNvPr id="21" name="Rounded Rectangle 20"/>
           <p:cNvSpPr/>
           <p:nvPr/>
         </p:nvSpPr>
@@ -22126,7 +22237,7 @@
       </p:sp>
       <p:sp>
         <p:nvSpPr>
-          <p:cNvPr id="21" name="Rounded Rectangle 20"/>
+          <p:cNvPr id="22" name="Rounded Rectangle 21"/>
           <p:cNvSpPr/>
           <p:nvPr/>
         </p:nvSpPr>
@@ -22179,7 +22290,7 @@
       </p:sp>
       <p:sp>
         <p:nvSpPr>
-          <p:cNvPr id="22" name="TextBox 21"/>
+          <p:cNvPr id="23" name="TextBox 22"/>
           <p:cNvSpPr txBox="1"/>
           <p:nvPr/>
         </p:nvSpPr>
@@ -22215,7 +22326,7 @@
       </p:sp>
       <p:sp>
         <p:nvSpPr>
-          <p:cNvPr id="23" name="TextBox 22"/>
+          <p:cNvPr id="24" name="TextBox 23"/>
           <p:cNvSpPr txBox="1"/>
           <p:nvPr/>
         </p:nvSpPr>
@@ -22276,7 +22387,7 @@
       </p:sp>
       <p:sp>
         <p:nvSpPr>
-          <p:cNvPr id="24" name="TextBox 23"/>
+          <p:cNvPr id="25" name="TextBox 24"/>
           <p:cNvSpPr txBox="1"/>
           <p:nvPr/>
         </p:nvSpPr>
@@ -22311,7 +22422,7 @@
               </a:defRPr>
             </a:pPr>
             <a:r>
-              <a:t>• Strict → Moderate → Edge: layered sensitivity</a:t>
+              <a:t>• Strict → Moderate-tight → Moderate-loose: layered sensitivity</a:t>
             </a:r>
           </a:p>
           <a:p>

--- a/ChaosProbe_Presentation.pptx
+++ b/ChaosProbe_Presentation.pptx
@@ -4761,11 +4761,11 @@
               </a:defRPr>
             </a:pPr>
             <a:r>
-              <a:t>Colocate: lowest scores, longest recovery,</a:t>
+              <a:t>Inverted: colocate scored 83.0 (best non-baseline,</a:t>
             </a:r>
             <a:br/>
             <a:r>
-              <a:t>highest latency &amp; CPU throttling.</a:t>
+              <a:t>stddev 0); spread scored 52.3 (among the worst).</a:t>
             </a:r>
           </a:p>
         </p:txBody>
@@ -4818,7 +4818,7 @@
               </a:defRPr>
             </a:pPr>
             <a:r>
-              <a:t>Supported</a:t>
+              <a:t>Refuted</a:t>
             </a:r>
           </a:p>
         </p:txBody>
@@ -4838,7 +4838,7 @@
             <a:avLst/>
           </a:prstGeom>
           <a:solidFill>
-            <a:srgbClr val="2ECC71"/>
+            <a:srgbClr val="E74C3C"/>
           </a:solidFill>
           <a:ln>
             <a:noFill/>
@@ -4895,7 +4895,7 @@
           </a:solidFill>
           <a:ln w="25400">
             <a:solidFill>
-              <a:srgbClr val="2ECC71"/>
+              <a:srgbClr val="E74C3C"/>
             </a:solidFill>
           </a:ln>
         </p:spPr>
@@ -4946,7 +4946,7 @@
             <a:pPr algn="l">
               <a:defRPr sz="1200" b="1">
                 <a:solidFill>
-                  <a:srgbClr val="2ECC71"/>
+                  <a:srgbClr val="E74C3C"/>
                 </a:solidFill>
                 <a:latin typeface="Calibri"/>
               </a:defRPr>
@@ -4988,11 +4988,11 @@
               </a:defRPr>
             </a:pPr>
             <a:r>
-              <a:t>Spread: best non-baseline scores, minimal</a:t>
+              <a:t>Inverted: spread had highest during-chaos latency</a:t>
             </a:r>
             <a:br/>
             <a:r>
-              <a:t>latency increase, fastest recovery.</a:t>
+              <a:t>(229ms vs colocate 99ms) and widest probe failure set.</a:t>
             </a:r>
           </a:p>
         </p:txBody>
@@ -5012,7 +5012,7 @@
             <a:avLst/>
           </a:prstGeom>
           <a:solidFill>
-            <a:srgbClr val="2ECC71"/>
+            <a:srgbClr val="E74C3C"/>
           </a:solidFill>
           <a:ln>
             <a:noFill/>
@@ -5045,7 +5045,7 @@
               </a:defRPr>
             </a:pPr>
             <a:r>
-              <a:t>Supported</a:t>
+              <a:t>Refuted</a:t>
             </a:r>
           </a:p>
         </p:txBody>
@@ -5065,7 +5065,7 @@
             <a:avLst/>
           </a:prstGeom>
           <a:solidFill>
-            <a:srgbClr val="7F8C8D"/>
+            <a:srgbClr val="E74C3C"/>
           </a:solidFill>
           <a:ln>
             <a:noFill/>
@@ -5122,7 +5122,7 @@
           </a:solidFill>
           <a:ln w="25400">
             <a:solidFill>
-              <a:srgbClr val="7F8C8D"/>
+              <a:srgbClr val="E74C3C"/>
             </a:solidFill>
           </a:ln>
         </p:spPr>
@@ -5173,13 +5173,13 @@
             <a:pPr algn="l">
               <a:defRPr sz="1200" b="1">
                 <a:solidFill>
-                  <a:srgbClr val="7F8C8D"/>
-                </a:solidFill>
-                <a:latin typeface="Calibri"/>
-              </a:defRPr>
-            </a:pPr>
-            <a:r>
-              <a:t>Baseline = 100% (valid method)</a:t>
+                  <a:srgbClr val="E74C3C"/>
+                </a:solidFill>
+                <a:latin typeface="Calibri"/>
+              </a:defRPr>
+            </a:pPr>
+            <a:r>
+              <a:t>Recovery time predicts score</a:t>
             </a:r>
           </a:p>
         </p:txBody>
@@ -5215,11 +5215,11 @@
               </a:defRPr>
             </a:pPr>
             <a:r>
-              <a:t>Trivial fault → 100% score, 0 recovery</a:t>
+              <a:t>Refuted: dep-aware fastest (1229ms) but score 69;</a:t>
             </a:r>
             <a:br/>
             <a:r>
-              <a:t>cycles — confirms measurement validity.</a:t>
+              <a:t>colocate slower (1333ms) but score 83. No correlation.</a:t>
             </a:r>
           </a:p>
         </p:txBody>
@@ -5239,7 +5239,7 @@
             <a:avLst/>
           </a:prstGeom>
           <a:solidFill>
-            <a:srgbClr val="7F8C8D"/>
+            <a:srgbClr val="E74C3C"/>
           </a:solidFill>
           <a:ln>
             <a:noFill/>
@@ -5272,7 +5272,7 @@
               </a:defRPr>
             </a:pPr>
             <a:r>
-              <a:t>Supported</a:t>
+              <a:t>Refuted</a:t>
             </a:r>
           </a:p>
         </p:txBody>
@@ -5332,7 +5332,7 @@
           </a:solidFill>
           <a:ln w="12700">
             <a:solidFill>
-              <a:srgbClr val="F39C12"/>
+              <a:srgbClr val="E74C3C"/>
             </a:solidFill>
           </a:ln>
         </p:spPr>
@@ -5383,13 +5383,13 @@
             <a:pPr algn="l">
               <a:defRPr sz="1300" b="1">
                 <a:solidFill>
-                  <a:srgbClr val="F39C12"/>
-                </a:solidFill>
-                <a:latin typeface="Calibri"/>
-              </a:defRPr>
-            </a:pPr>
-            <a:r>
-              <a:t>Placement Matters</a:t>
+                  <a:srgbClr val="E74C3C"/>
+                </a:solidFill>
+                <a:latin typeface="Calibri"/>
+              </a:defRPr>
+            </a:pPr>
+            <a:r>
+              <a:t>Churn ≠ Contention</a:t>
             </a:r>
           </a:p>
         </p:txBody>
@@ -5417,7 +5417,7 @@
           <a:lstStyle/>
           <a:p>
             <a:pPr algn="l">
-              <a:defRPr sz="1100" b="0">
+              <a:defRPr sz="1000" b="0">
                 <a:solidFill>
                   <a:srgbClr val="BDBDBD"/>
                 </a:solidFill>
@@ -5425,7 +5425,7 @@
               </a:defRPr>
             </a:pPr>
             <a:r>
-              <a:t>Topology is not just a resource concern — it directly determines fault blast radius and recovery characteristics.</a:t>
+              <a:t>Literature assumes faults create resource contention. Pod-delete creates rescheduling churn — a different mechanism with opposite placement implications.</a:t>
             </a:r>
           </a:p>
         </p:txBody>
@@ -5506,7 +5506,7 @@
               </a:defRPr>
             </a:pPr>
             <a:r>
-              <a:t>Scheduler Is Not Enough</a:t>
+              <a:t>Locality &gt; Recovery Speed</a:t>
             </a:r>
           </a:p>
         </p:txBody>
@@ -5534,7 +5534,7 @@
           <a:lstStyle/>
           <a:p>
             <a:pPr algn="l">
-              <a:defRPr sz="1100" b="0">
+              <a:defRPr sz="1000" b="0">
                 <a:solidFill>
                   <a:srgbClr val="BDBDBD"/>
                 </a:solidFill>
@@ -5542,7 +5542,7 @@
               </a:defRPr>
             </a:pPr>
             <a:r>
-              <a:t>Default K8s scheduling provides some isolation but is not optimized for resilience — intentional placement is needed.</a:t>
+              <a:t>Recovery times cluster in 1.2–1.6s for all strategies, yet scores span 52–83. What matters is whether probe paths stay node-local during the kill cycle — not how fast the replacement pod becomes ready.</a:t>
             </a:r>
           </a:p>
         </p:txBody>
@@ -5623,7 +5623,7 @@
               </a:defRPr>
             </a:pPr>
             <a:r>
-              <a:t>Multi-Dimensional Impact</a:t>
+              <a:t>Cross-Node = Failure Surface</a:t>
             </a:r>
           </a:p>
         </p:txBody>
@@ -5651,7 +5651,7 @@
           <a:lstStyle/>
           <a:p>
             <a:pPr algn="l">
-              <a:defRPr sz="1100" b="0">
+              <a:defRPr sz="1000" b="0">
                 <a:solidFill>
                   <a:srgbClr val="BDBDBD"/>
                 </a:solidFill>
@@ -5659,7 +5659,7 @@
               </a:defRPr>
             </a:pPr>
             <a:r>
-              <a:t>Placement affects all measured dimensions: recovery, latency, resources, and throughput — not just a single metric.</a:t>
+              <a:t>Spread maximises cross-node traffic, which is exactly what pod-delete churn disrupts — every cross-node hop becomes a failure surface during the kill cycle.</a:t>
             </a:r>
           </a:p>
         </p:txBody>
@@ -6782,11 +6782,11 @@
               </a:defRPr>
             </a:pPr>
             <a:r>
-              <a:t>• Placement topology has a measurable and</a:t>
+              <a:t>• All three literature-derived hypotheses</a:t>
             </a:r>
             <a:br/>
             <a:r>
-              <a:t>  significant impact on chaos resilience</a:t>
+              <a:t>  REFUTED — colocate 83 &gt; spread 52</a:t>
             </a:r>
           </a:p>
           <a:p>
@@ -6805,11 +6805,11 @@
               </a:defRPr>
             </a:pPr>
             <a:r>
-              <a:t>• Colocate: consistently worst — highest latency,</a:t>
+              <a:t>• Mechanism: pod-delete is churn-based,</a:t>
             </a:r>
             <a:br/>
             <a:r>
-              <a:t>  longest recovery, most contention</a:t>
+              <a:t>  not contention-based — locality wins</a:t>
             </a:r>
           </a:p>
           <a:p>
@@ -6828,11 +6828,11 @@
               </a:defRPr>
             </a:pPr>
             <a:r>
-              <a:t>• Spread: consistently best fault isolation —</a:t>
+              <a:t>• Recovery time does not predict score —</a:t>
             </a:r>
             <a:br/>
             <a:r>
-              <a:t>  minimal degradation across all metrics</a:t>
+              <a:t>  what matters is in-flight cross-node hops</a:t>
             </a:r>
           </a:p>
           <a:p>
@@ -6851,11 +6851,11 @@
               </a:defRPr>
             </a:pPr>
             <a:r>
-              <a:t>• All three hypotheses supported by</a:t>
+              <a:t>• Methodology control held: baseline = 100,</a:t>
             </a:r>
             <a:br/>
             <a:r>
-              <a:t>  experimental evidence</a:t>
+              <a:t>  stddev 0 — refutations are real, not noise</a:t>
             </a:r>
           </a:p>
         </p:txBody>
@@ -6978,11 +6978,11 @@
               </a:defRPr>
             </a:pPr>
             <a:r>
-              <a:t>• Multi-fault injection — concurrent faults</a:t>
+              <a:t>• Test contention-based faults (pod-cpu-hog,</a:t>
             </a:r>
             <a:br/>
             <a:r>
-              <a:t>  for complex failure scenarios</a:t>
+              <a:t>  memory-hog) — predict ordering flips back</a:t>
             </a:r>
           </a:p>
           <a:p>
@@ -7001,7 +7001,11 @@
               </a:defRPr>
             </a:pPr>
             <a:r>
-              <a:t>• Larger cluster scale — 20+ nodes, 100+ services</a:t>
+              <a:t>• Multi-replica services — does locality still win</a:t>
+            </a:r>
+            <a:br/>
+            <a:r>
+              <a:t>  when restart can happen on a peer pod?</a:t>
             </a:r>
           </a:p>
           <a:p>
@@ -7020,7 +7024,7 @@
               </a:defRPr>
             </a:pPr>
             <a:r>
-              <a:t>• ML-based anomaly detection on collected dataset</a:t>
+              <a:t>• Larger cluster + production-like traffic patterns</a:t>
             </a:r>
           </a:p>
         </p:txBody>
@@ -7062,7 +7066,11 @@
               </a:defRPr>
             </a:pPr>
             <a:r>
-              <a:t>• Custom placement policies — RL-based scheduling</a:t>
+              <a:t>• Per-fault-class placement guidance — choose strategy</a:t>
+            </a:r>
+            <a:br/>
+            <a:r>
+              <a:t>  by expected fault type, not by general 'best practice'</a:t>
             </a:r>
           </a:p>
           <a:p>
@@ -7081,7 +7089,7 @@
               </a:defRPr>
             </a:pPr>
             <a:r>
-              <a:t>• Production-like traffic patterns &amp; workloads</a:t>
+              <a:t>• ML-based anomaly detection on collected dataset</a:t>
             </a:r>
           </a:p>
           <a:p>
@@ -7100,7 +7108,7 @@
               </a:defRPr>
             </a:pPr>
             <a:r>
-              <a:t>• Integration with GitOps for automated remediation</a:t>
+              <a:t>• Per-fault-class extensions to Borg / Medea schedulers</a:t>
             </a:r>
           </a:p>
         </p:txBody>
@@ -7181,7 +7189,7 @@
               </a:defRPr>
             </a:pPr>
             <a:r>
-              <a:t>Pod placement topology has a measurable and significant impact on microservice resilience under chaos injection. Topology-aware scheduling is essential for building resilient cloud-native systems.</a:t>
+              <a:t>Placement-vs-resilience intuition from the literature is fault-class-specific. Under churn-based faults (pod-delete), co-location wins because it minimises cross-node disruption during the kill cycle.</a:t>
             </a:r>
           </a:p>
         </p:txBody>
@@ -7467,7 +7475,7 @@
           </a:solidFill>
           <a:ln w="12700">
             <a:solidFill>
-              <a:srgbClr val="E74C3C"/>
+              <a:srgbClr val="2ECC71"/>
             </a:solidFill>
           </a:ln>
         </p:spPr>
@@ -7518,13 +7526,13 @@
             <a:pPr algn="ctr">
               <a:defRPr sz="2400" b="1">
                 <a:solidFill>
-                  <a:srgbClr val="E74C3C"/>
-                </a:solidFill>
-                <a:latin typeface="Calibri"/>
-              </a:defRPr>
-            </a:pPr>
-            <a:r>
-              <a:t>2</a:t>
+                  <a:srgbClr val="2ECC71"/>
+                </a:solidFill>
+                <a:latin typeface="Calibri"/>
+              </a:defRPr>
+            </a:pPr>
+            <a:r>
+              <a:t>4</a:t>
             </a:r>
           </a:p>
         </p:txBody>
@@ -7560,11 +7568,11 @@
               </a:defRPr>
             </a:pPr>
             <a:r>
-              <a:t>Fault</a:t>
+              <a:t>Metric</a:t>
             </a:r>
             <a:br/>
             <a:r>
-              <a:t>Types</a:t>
+              <a:t>Dimensions</a:t>
             </a:r>
           </a:p>
         </p:txBody>
@@ -7588,7 +7596,7 @@
           </a:solidFill>
           <a:ln w="12700">
             <a:solidFill>
-              <a:srgbClr val="2ECC71"/>
+              <a:srgbClr val="E74C3C"/>
             </a:solidFill>
           </a:ln>
         </p:spPr>
@@ -7639,13 +7647,13 @@
             <a:pPr algn="ctr">
               <a:defRPr sz="2400" b="1">
                 <a:solidFill>
-                  <a:srgbClr val="2ECC71"/>
-                </a:solidFill>
-                <a:latin typeface="Calibri"/>
-              </a:defRPr>
-            </a:pPr>
-            <a:r>
-              <a:t>4</a:t>
+                  <a:srgbClr val="E74C3C"/>
+                </a:solidFill>
+                <a:latin typeface="Calibri"/>
+              </a:defRPr>
+            </a:pPr>
+            <a:r>
+              <a:t>3/3</a:t>
             </a:r>
           </a:p>
         </p:txBody>
@@ -7681,11 +7689,11 @@
               </a:defRPr>
             </a:pPr>
             <a:r>
-              <a:t>Metric</a:t>
+              <a:t>Hypotheses</a:t>
             </a:r>
             <a:br/>
             <a:r>
-              <a:t>Dimensions</a:t>
+              <a:t>Refuted</a:t>
             </a:r>
           </a:p>
         </p:txBody>
@@ -7709,7 +7717,7 @@
           </a:solidFill>
           <a:ln w="12700">
             <a:solidFill>
-              <a:srgbClr val="2ECC71"/>
+              <a:srgbClr val="0096D6"/>
             </a:solidFill>
           </a:ln>
         </p:spPr>
@@ -7760,13 +7768,13 @@
             <a:pPr algn="ctr">
               <a:defRPr sz="2400" b="1">
                 <a:solidFill>
-                  <a:srgbClr val="2ECC71"/>
-                </a:solidFill>
-                <a:latin typeface="Calibri"/>
-              </a:defRPr>
-            </a:pPr>
-            <a:r>
-              <a:t>3/3</a:t>
+                  <a:srgbClr val="0096D6"/>
+                </a:solidFill>
+                <a:latin typeface="Calibri"/>
+              </a:defRPr>
+            </a:pPr>
+            <a:r>
+              <a:t>1</a:t>
             </a:r>
           </a:p>
         </p:txBody>
@@ -7802,11 +7810,11 @@
               </a:defRPr>
             </a:pPr>
             <a:r>
-              <a:t>Hypotheses</a:t>
+              <a:t>Unified</a:t>
             </a:r>
             <a:br/>
             <a:r>
-              <a:t>Supported</a:t>
+              <a:t>Mechanism</a:t>
             </a:r>
           </a:p>
         </p:txBody>
@@ -9704,7 +9712,7 @@
             <a:avLst/>
           </a:prstGeom>
           <a:solidFill>
-            <a:srgbClr val="7F8C8D"/>
+            <a:srgbClr val="F39C12"/>
           </a:solidFill>
           <a:ln>
             <a:noFill/>
@@ -9761,7 +9769,7 @@
           </a:solidFill>
           <a:ln w="25400">
             <a:solidFill>
-              <a:srgbClr val="7F8C8D"/>
+              <a:srgbClr val="F39C12"/>
             </a:solidFill>
           </a:ln>
         </p:spPr>
@@ -9812,13 +9820,13 @@
             <a:pPr algn="l">
               <a:defRPr sz="1500" b="1">
                 <a:solidFill>
-                  <a:srgbClr val="7F8C8D"/>
-                </a:solidFill>
-                <a:latin typeface="Calibri"/>
-              </a:defRPr>
-            </a:pPr>
-            <a:r>
-              <a:t>Baseline validates methodology</a:t>
+                  <a:srgbClr val="F39C12"/>
+                </a:solidFill>
+                <a:latin typeface="Calibri"/>
+              </a:defRPr>
+            </a:pPr>
+            <a:r>
+              <a:t>Recovery time predicts resilience</a:t>
             </a:r>
           </a:p>
         </p:txBody>
@@ -9854,7 +9862,7 @@
               </a:defRPr>
             </a:pPr>
             <a:r>
-              <a:t>A trivial fault (1% CPU, 1 second) with default scheduling should produce 100% resilience — any degradation indicates pre-existing instability.</a:t>
+              <a:t>Faster pod recovery yields higher resilience scores — shorter unavailability windows mean fewer probe checks fall inside the fault window (Dean–Barroso 2013).</a:t>
             </a:r>
           </a:p>
         </p:txBody>
@@ -15758,7 +15766,7 @@
               </a:defRPr>
             </a:pPr>
             <a:r>
-              <a:t>12 microservices, polyglot (Go, C#, Python, Java, Node.js)</a:t>
+              <a:t>11 services (10 polyglot microservices + Redis)</a:t>
             </a:r>
             <a:br/>
             <a:r>
@@ -16565,7 +16573,7 @@
               </a:defRPr>
             </a:pPr>
             <a:r>
-              <a:t>Fault Injection Experiments</a:t>
+              <a:t>Placement-Matrix Fault Injection</a:t>
             </a:r>
           </a:p>
         </p:txBody>
@@ -16630,7 +16638,7 @@
                           </a:solidFill>
                           <a:latin typeface="Calibri"/>
                         </a:rPr>
-                        <a:t>pod-delete (availability)</a:t>
+                        <a:t>Matrix fault (pod-delete)</a:t>
                       </a:r>
                     </a:p>
                   </a:txBody>
@@ -16653,7 +16661,7 @@
                           </a:solidFill>
                           <a:latin typeface="Calibri"/>
                         </a:rPr>
-                        <a:t>pod-cpu-hog (contention)</a:t>
+                        <a:t>Baseline (trivial pod-cpu-hog)</a:t>
                       </a:r>
                     </a:p>
                   </a:txBody>
@@ -16724,7 +16732,7 @@
                           </a:solidFill>
                           <a:latin typeface="Calibri"/>
                         </a:rPr>
-                        <a:t>currencyservice</a:t>
+                        <a:t>productcatalogservice</a:t>
                       </a:r>
                     </a:p>
                   </a:txBody>
@@ -16772,7 +16780,7 @@
                           </a:solidFill>
                           <a:latin typeface="Calibri"/>
                         </a:rPr>
-                        <a:t>120s (5s interval)</a:t>
+                        <a:t>120s (CHAOS_INTERVAL=15s)</a:t>
                       </a:r>
                     </a:p>
                   </a:txBody>
@@ -16795,7 +16803,7 @@
                           </a:solidFill>
                           <a:latin typeface="Calibri"/>
                         </a:rPr>
-                        <a:t>60s</a:t>
+                        <a:t>1s</a:t>
                       </a:r>
                     </a:p>
                   </a:txBody>
@@ -16866,7 +16874,7 @@
                           </a:solidFill>
                           <a:latin typeface="Calibri"/>
                         </a:rPr>
-                        <a:t>1 core, 100% load</a:t>
+                        <a:t>CPU_LOAD=1%, 1 core</a:t>
                       </a:r>
                     </a:p>
                   </a:txBody>
@@ -16937,7 +16945,7 @@
                           </a:solidFill>
                           <a:latin typeface="Calibri"/>
                         </a:rPr>
-                        <a:t>1 httpProbe</a:t>
+                        <a:t>Same probe set (control)</a:t>
                       </a:r>
                     </a:p>
                   </a:txBody>
@@ -17028,7 +17036,7 @@
               </a:defRPr>
             </a:pPr>
             <a:r>
-              <a:t>Baseline (Control Group)</a:t>
+              <a:t>Baseline — Methodology Control</a:t>
             </a:r>
           </a:p>
         </p:txBody>
@@ -17056,7 +17064,7 @@
           <a:lstStyle/>
           <a:p>
             <a:pPr algn="l">
-              <a:defRPr sz="1100" b="0">
+              <a:defRPr sz="1000" b="0">
                 <a:solidFill>
                   <a:srgbClr val="BDBDBD"/>
                 </a:solidFill>
@@ -17064,11 +17072,15 @@
               </a:defRPr>
             </a:pPr>
             <a:r>
-              <a:t>Swaps pod-delete → pod-cpu-hog with DURATION=1s, CPU_LOAD=1%</a:t>
+              <a:t>Swaps pod-delete → trivial pod-cpu-hog (DURATION=1s, CPU_LOAD=1%).</a:t>
             </a:r>
             <a:br/>
             <a:r>
-              <a:t>All probes execute identically — expected result: 100% score, 0 recovery cycles</a:t>
+              <a:t>Validates probes &amp; scoring: expected 100%, 0 recovery cycles — any drift</a:t>
+            </a:r>
+            <a:br/>
+            <a:r>
+              <a:t>indicates pre-existing instability rather than placement effects.</a:t>
             </a:r>
           </a:p>
         </p:txBody>
@@ -20296,7 +20308,7 @@
               </a:defRPr>
             </a:pPr>
             <a:r>
-              <a:t>PreChaos — steady state (30s)</a:t>
+              <a:t>PreChaos — steady state (60s)</a:t>
             </a:r>
           </a:p>
         </p:txBody>
@@ -20402,7 +20414,7 @@
               </a:defRPr>
             </a:pPr>
             <a:r>
-              <a:t>PostChaos — recovery observation</a:t>
+              <a:t>PostChaos — recovery sampling (60s)</a:t>
             </a:r>
           </a:p>
         </p:txBody>
@@ -20738,7 +20750,7 @@
                           </a:solidFill>
                           <a:latin typeface="Calibri"/>
                         </a:rPr>
-                        <a:t>~2s</a:t>
+                        <a:t>3.5s</a:t>
                       </a:r>
                     </a:p>
                   </a:txBody>
@@ -20832,7 +20844,7 @@
                           </a:solidFill>
                           <a:latin typeface="Calibri"/>
                         </a:rPr>
-                        <a:t>~10s</a:t>
+                        <a:t>10s</a:t>
                       </a:r>
                     </a:p>
                   </a:txBody>
@@ -20926,7 +20938,7 @@
                           </a:solidFill>
                           <a:latin typeface="Calibri"/>
                         </a:rPr>
-                        <a:t>~10s</a:t>
+                        <a:t>10s</a:t>
                       </a:r>
                     </a:p>
                   </a:txBody>
@@ -21020,7 +21032,7 @@
                           </a:solidFill>
                           <a:latin typeface="Calibri"/>
                         </a:rPr>
-                        <a:t>~5s</a:t>
+                        <a:t>5s</a:t>
                       </a:r>
                     </a:p>
                   </a:txBody>
@@ -21114,7 +21126,7 @@
                           </a:solidFill>
                           <a:latin typeface="Calibri"/>
                         </a:rPr>
-                        <a:t>~10s</a:t>
+                        <a:t>10s</a:t>
                       </a:r>
                     </a:p>
                   </a:txBody>
@@ -21225,7 +21237,7 @@
                           </a:solidFill>
                           <a:latin typeface="Calibri"/>
                         </a:rPr>
-                        <a:t>Mode</a:t>
+                        <a:t>Mode (interval)</a:t>
                       </a:r>
                     </a:p>
                   </a:txBody>
@@ -21248,7 +21260,7 @@
                           </a:solidFill>
                           <a:latin typeface="Calibri"/>
                         </a:rPr>
-                        <a:t>Timeout</a:t>
+                        <a:t>Timeout / retries</a:t>
                       </a:r>
                     </a:p>
                   </a:txBody>
@@ -21438,7 +21450,7 @@
                           </a:solidFill>
                           <a:latin typeface="Calibri"/>
                         </a:rPr>
-                        <a:t>Continuous (3s)</a:t>
+                        <a:t>Continuous (5s)</a:t>
                       </a:r>
                     </a:p>
                   </a:txBody>
@@ -21461,7 +21473,7 @@
                           </a:solidFill>
                           <a:latin typeface="Calibri"/>
                         </a:rPr>
-                        <a:t>3s, 2 retries</a:t>
+                        <a:t>3s, 4 retries</a:t>
                       </a:r>
                     </a:p>
                   </a:txBody>
@@ -21509,7 +21521,7 @@
                           </a:solidFill>
                           <a:latin typeface="Calibri"/>
                         </a:rPr>
-                        <a:t>Continuous (3s)</a:t>
+                        <a:t>Continuous (5s)</a:t>
                       </a:r>
                     </a:p>
                   </a:txBody>
@@ -21532,7 +21544,7 @@
                           </a:solidFill>
                           <a:latin typeface="Calibri"/>
                         </a:rPr>
-                        <a:t>3s, 2 retries</a:t>
+                        <a:t>3s, 4 retries</a:t>
                       </a:r>
                     </a:p>
                   </a:txBody>
@@ -21580,7 +21592,7 @@
                           </a:solidFill>
                           <a:latin typeface="Calibri"/>
                         </a:rPr>
-                        <a:t>Continuous (4s)</a:t>
+                        <a:t>Continuous (6s)</a:t>
                       </a:r>
                     </a:p>
                   </a:txBody>
@@ -21603,7 +21615,7 @@
                           </a:solidFill>
                           <a:latin typeface="Calibri"/>
                         </a:rPr>
-                        <a:t>5s, 3 retries</a:t>
+                        <a:t>5s, 4 retries</a:t>
                       </a:r>
                     </a:p>
                   </a:txBody>
@@ -21651,7 +21663,7 @@
                           </a:solidFill>
                           <a:latin typeface="Calibri"/>
                         </a:rPr>
-                        <a:t>Continuous (4s)</a:t>
+                        <a:t>Continuous (6s)</a:t>
                       </a:r>
                     </a:p>
                   </a:txBody>
@@ -21674,7 +21686,7 @@
                           </a:solidFill>
                           <a:latin typeface="Calibri"/>
                         </a:rPr>
-                        <a:t>5s, 3 retries</a:t>
+                        <a:t>5s, 4 retries</a:t>
                       </a:r>
                     </a:p>
                   </a:txBody>
@@ -22422,7 +22434,7 @@
               </a:defRPr>
             </a:pPr>
             <a:r>
-              <a:t>• Strict → Moderate-tight → Moderate-loose: layered sensitivity</a:t>
+              <a:t>• 4 sensitivity tiers (strict → moderate-tight → moderate-loose → control)</a:t>
             </a:r>
           </a:p>
           <a:p>
@@ -22441,7 +22453,7 @@
               </a:defRPr>
             </a:pPr>
             <a:r>
-              <a:t>• Control probes (healthz, cart): detect node-level contention</a:t>
+              <a:t>• Healthz control probe detects node-level contention even when chaos is local</a:t>
             </a:r>
           </a:p>
         </p:txBody>
@@ -22693,11 +22705,11 @@
               </a:defRPr>
             </a:pPr>
             <a:r>
-              <a:t>• Baseline: 100% score as expected —</a:t>
+              <a:t>• Baseline: 100.0% (stddev 0) —</a:t>
             </a:r>
             <a:br/>
             <a:r>
-              <a:t>  validates experimental methodology</a:t>
+              <a:t>  methodology control holds</a:t>
             </a:r>
           </a:p>
           <a:p>
@@ -22716,11 +22728,11 @@
               </a:defRPr>
             </a:pPr>
             <a:r>
-              <a:t>• Colocate: consistently lowest scores —</a:t>
+              <a:t>• Colocate: 83.0% (stddev 0) — BEST</a:t>
             </a:r>
             <a:br/>
             <a:r>
-              <a:t>  maximum contention degrades all probes</a:t>
+              <a:t>  non-baseline; stable across iterations</a:t>
             </a:r>
           </a:p>
           <a:p>
@@ -22739,11 +22751,11 @@
               </a:defRPr>
             </a:pPr>
             <a:r>
-              <a:t>• Spread: highest scores among non-baseline</a:t>
+              <a:t>• best-fit / adversarial / dep-aware:</a:t>
             </a:r>
             <a:br/>
             <a:r>
-              <a:t>  — fault isolation limits blast radius</a:t>
+              <a:t>  ~69% (stddev 24–31)</a:t>
             </a:r>
           </a:p>
           <a:p>
@@ -22762,11 +22774,11 @@
               </a:defRPr>
             </a:pPr>
             <a:r>
-              <a:t>• Default: moderate — K8s scheduler provides</a:t>
+              <a:t>• Spread: 52.3% — among the WORST</a:t>
             </a:r>
             <a:br/>
             <a:r>
-              <a:t>  partial but unintentional isolation</a:t>
+              <a:t>  non-baseline strategies</a:t>
             </a:r>
           </a:p>
           <a:p>
@@ -22785,11 +22797,34 @@
               </a:defRPr>
             </a:pPr>
             <a:r>
-              <a:t>• Random &amp; Adversarial: variable —</a:t>
+              <a:t>• Default / random: ~50% — broadest</a:t>
             </a:r>
             <a:br/>
             <a:r>
-              <a:t>  depends on resource-hotspot placement</a:t>
+              <a:t>  probe-failure footprint</a:t>
+            </a:r>
+          </a:p>
+          <a:p>
+            <a:pPr>
+              <a:spcBef>
+                <a:spcPts val="200"/>
+              </a:spcBef>
+              <a:spcAft>
+                <a:spcPts val="200"/>
+              </a:spcAft>
+              <a:defRPr sz="1100">
+                <a:solidFill>
+                  <a:srgbClr val="BDBDBD"/>
+                </a:solidFill>
+                <a:latin typeface="Calibri"/>
+              </a:defRPr>
+            </a:pPr>
+            <a:r>
+              <a:t>• Ordering inverts the literature</a:t>
+            </a:r>
+            <a:br/>
+            <a:r>
+              <a:t>  intuition encoded in H1 + H2</a:t>
             </a:r>
           </a:p>
         </p:txBody>
@@ -22813,7 +22848,7 @@
           </a:solidFill>
           <a:ln w="25400">
             <a:solidFill>
-              <a:srgbClr val="2ECC71"/>
+              <a:srgbClr val="F39C12"/>
             </a:solidFill>
           </a:ln>
         </p:spPr>
@@ -22864,7 +22899,7 @@
             <a:pPr algn="l">
               <a:defRPr sz="1400" b="1">
                 <a:solidFill>
-                  <a:srgbClr val="2ECC71"/>
+                  <a:srgbClr val="F39C12"/>
                 </a:solidFill>
                 <a:latin typeface="Calibri"/>
               </a:defRPr>
@@ -22884,7 +22919,7 @@
         <p:spPr>
           <a:xfrm>
             <a:off x="640080" y="5989320"/>
-            <a:ext cx="3383280" cy="548640"/>
+            <a:ext cx="3657600" cy="548640"/>
           </a:xfrm>
           <a:prstGeom prst="rect">
             <a:avLst/>
@@ -22898,7 +22933,7 @@
           <a:lstStyle/>
           <a:p>
             <a:pPr algn="l">
-              <a:defRPr sz="1300" b="1">
+              <a:defRPr sz="1200" b="1">
                 <a:solidFill>
                   <a:srgbClr val="E74C3C"/>
                 </a:solidFill>
@@ -22906,7 +22941,7 @@
               </a:defRPr>
             </a:pPr>
             <a:r>
-              <a:t>H1 (colocate = worst): Supported</a:t>
+              <a:t>H1 (colocate = worst): REFUTED</a:t>
             </a:r>
           </a:p>
         </p:txBody>
@@ -22919,8 +22954,8 @@
         </p:nvSpPr>
         <p:spPr>
           <a:xfrm>
-            <a:off x="4206240" y="5989320"/>
-            <a:ext cx="3383280" cy="548640"/>
+            <a:off x="4389120" y="5989320"/>
+            <a:ext cx="3657600" cy="548640"/>
           </a:xfrm>
           <a:prstGeom prst="rect">
             <a:avLst/>
@@ -22934,15 +22969,15 @@
           <a:lstStyle/>
           <a:p>
             <a:pPr algn="l">
-              <a:defRPr sz="1300" b="1">
-                <a:solidFill>
-                  <a:srgbClr val="2ECC71"/>
-                </a:solidFill>
-                <a:latin typeface="Calibri"/>
-              </a:defRPr>
-            </a:pPr>
-            <a:r>
-              <a:t>H2 (spread = best isolation): Supported</a:t>
+              <a:defRPr sz="1200" b="1">
+                <a:solidFill>
+                  <a:srgbClr val="E74C3C"/>
+                </a:solidFill>
+                <a:latin typeface="Calibri"/>
+              </a:defRPr>
+            </a:pPr>
+            <a:r>
+              <a:t>H2 (spread = best): REFUTED</a:t>
             </a:r>
           </a:p>
         </p:txBody>
@@ -22955,7 +22990,7 @@
         </p:nvSpPr>
         <p:spPr>
           <a:xfrm>
-            <a:off x="7772400" y="5989320"/>
+            <a:off x="8138160" y="5989320"/>
             <a:ext cx="3657600" cy="548640"/>
           </a:xfrm>
           <a:prstGeom prst="rect">
@@ -22970,15 +23005,15 @@
           <a:lstStyle/>
           <a:p>
             <a:pPr algn="l">
-              <a:defRPr sz="1300" b="1">
-                <a:solidFill>
-                  <a:srgbClr val="7F8C8D"/>
-                </a:solidFill>
-                <a:latin typeface="Calibri"/>
-              </a:defRPr>
-            </a:pPr>
-            <a:r>
-              <a:t>H3 (baseline = 100%): Supported</a:t>
+              <a:defRPr sz="1200" b="1">
+                <a:solidFill>
+                  <a:srgbClr val="E74C3C"/>
+                </a:solidFill>
+                <a:latin typeface="Calibri"/>
+              </a:defRPr>
+            </a:pPr>
+            <a:r>
+              <a:t>H3 (recovery → score): REFUTED</a:t>
             </a:r>
           </a:p>
         </p:txBody>

--- a/ChaosProbe_Presentation.pptx
+++ b/ChaosProbe_Presentation.pptx
@@ -4761,11 +4761,15 @@
               </a:defRPr>
             </a:pPr>
             <a:r>
-              <a:t>Inverted: colocate scored 83.0 (best non-baseline,</a:t>
+              <a:t>Refuted: colocate tied for top non-baseline</a:t>
             </a:r>
             <a:br/>
             <a:r>
-              <a:t>stddev 0); spread scored 52.3 (among the worst).</a:t>
+              <a:t>score (83.0, stddev 0) with random, adversarial,</a:t>
+            </a:r>
+            <a:br/>
+            <a:r>
+              <a:t>dep-aware — the containment cluster.</a:t>
             </a:r>
           </a:p>
         </p:txBody>
@@ -4988,11 +4992,15 @@
               </a:defRPr>
             </a:pPr>
             <a:r>
-              <a:t>Inverted: spread had highest during-chaos latency</a:t>
+              <a:t>Refuted: spread sits in the leakage cluster</a:t>
             </a:r>
             <a:br/>
             <a:r>
-              <a:t>(229ms vs colocate 99ms) and widest probe failure set.</a:t>
+              <a:t>(66.3, stddev 29), not the containment cluster.</a:t>
+            </a:r>
+            <a:br/>
+            <a:r>
+              <a:t>Default (49.7) is worst, not colocate.</a:t>
             </a:r>
           </a:p>
         </p:txBody>
@@ -5215,11 +5223,15 @@
               </a:defRPr>
             </a:pPr>
             <a:r>
-              <a:t>Refuted: dep-aware fastest (1229ms) but score 69;</a:t>
+              <a:t>Refuted: random has fastest recovery (1120ms)</a:t>
             </a:r>
             <a:br/>
             <a:r>
-              <a:t>colocate slower (1333ms) but score 83. No correlation.</a:t>
+              <a:t>+ top score; spread slowest (1617ms) + leakage.</a:t>
+            </a:r>
+            <a:br/>
+            <a:r>
+              <a:t>Recovery and score uncorrelated.</a:t>
             </a:r>
           </a:p>
         </p:txBody>
@@ -5389,7 +5401,7 @@
               </a:defRPr>
             </a:pPr>
             <a:r>
-              <a:t>Churn ≠ Contention</a:t>
+              <a:t>Bimodal, not monotonic</a:t>
             </a:r>
           </a:p>
         </p:txBody>
@@ -5425,7 +5437,7 @@
               </a:defRPr>
             </a:pPr>
             <a:r>
-              <a:t>Literature assumes faults create resource contention. Pod-delete creates rescheduling churn — a different mechanism with opposite placement implications.</a:t>
+              <a:t>Strategies cluster into containment (83) and leakage (50–66) — not a density gradient. The literature's monotonic spread-better/colocate-worse model does not fit the data.</a:t>
             </a:r>
           </a:p>
         </p:txBody>
@@ -5506,7 +5518,7 @@
               </a:defRPr>
             </a:pPr>
             <a:r>
-              <a:t>Locality &gt; Recovery Speed</a:t>
+              <a:t>Containment is the predictor</a:t>
             </a:r>
           </a:p>
         </p:txBody>
@@ -5542,7 +5554,7 @@
               </a:defRPr>
             </a:pPr>
             <a:r>
-              <a:t>Recovery times cluster in 1.2–1.6s for all strategies, yet scores span 52–83. What matters is whether probe paths stay node-local during the kill cycle — not how fast the replacement pod becomes ready.</a:t>
+              <a:t>What separates the two clusters is whether the chaos target's network path stays inside the placement domain. When it does, only the directly-targeted probes fail. When it doesn't, collateral damage leaks.</a:t>
             </a:r>
           </a:p>
         </p:txBody>
@@ -5623,7 +5635,7 @@
               </a:defRPr>
             </a:pPr>
             <a:r>
-              <a:t>Cross-Node = Failure Surface</a:t>
+              <a:t>Churn-driven, not contention</a:t>
             </a:r>
           </a:p>
         </p:txBody>
@@ -5659,7 +5671,7 @@
               </a:defRPr>
             </a:pPr>
             <a:r>
-              <a:t>Spread maximises cross-node traffic, which is exactly what pod-delete churn disrupts — every cross-node hop becomes a failure surface during the kill cycle.</a:t>
+              <a:t>Pod-delete creates kube-proxy / conntrack / CoreDNS reconvergence — the K8s SLO directly tracks this. Cross-node hops exposed to the kill cycle become failure surfaces; same-domain paths do not.</a:t>
             </a:r>
           </a:p>
         </p:txBody>
@@ -6978,11 +6990,11 @@
               </a:defRPr>
             </a:pPr>
             <a:r>
-              <a:t>• Test contention-based faults (pod-cpu-hog,</a:t>
+              <a:t>• Multi-replica services — does locality still win</a:t>
             </a:r>
             <a:br/>
             <a:r>
-              <a:t>  memory-hog) — predict ordering flips back</a:t>
+              <a:t>  when restart can happen on a peer pod?</a:t>
             </a:r>
           </a:p>
           <a:p>
@@ -7001,11 +7013,11 @@
               </a:defRPr>
             </a:pPr>
             <a:r>
-              <a:t>• Multi-replica services — does locality still win</a:t>
+              <a:t>• Larger cluster (20+ nodes), production-like traffic</a:t>
             </a:r>
             <a:br/>
             <a:r>
-              <a:t>  when restart can happen on a peer pod?</a:t>
+              <a:t>  &amp; service-mesh instrumentation (Istio/Linkerd)</a:t>
             </a:r>
           </a:p>
           <a:p>
@@ -7024,7 +7036,7 @@
               </a:defRPr>
             </a:pPr>
             <a:r>
-              <a:t>• Larger cluster + production-like traffic patterns</a:t>
+              <a:t>• Memory- and network-fault classes beyond CPU</a:t>
             </a:r>
           </a:p>
         </p:txBody>
@@ -7090,6 +7102,10 @@
             </a:pPr>
             <a:r>
               <a:t>• ML-based anomaly detection on collected dataset</a:t>
+            </a:r>
+            <a:br/>
+            <a:r>
+              <a:t>  (the Neo4j store is already structured for it)</a:t>
             </a:r>
           </a:p>
           <a:p>
@@ -16573,7 +16589,7 @@
               </a:defRPr>
             </a:pPr>
             <a:r>
-              <a:t>Placement-Matrix Fault Injection</a:t>
+              <a:t>Multi-Fault Placement Matrix</a:t>
             </a:r>
           </a:p>
         </p:txBody>
@@ -16638,7 +16654,7 @@
                           </a:solidFill>
                           <a:latin typeface="Calibri"/>
                         </a:rPr>
-                        <a:t>Matrix fault (pod-delete)</a:t>
+                        <a:t>Churn (pod-delete)</a:t>
                       </a:r>
                     </a:p>
                   </a:txBody>
@@ -16661,7 +16677,7 @@
                           </a:solidFill>
                           <a:latin typeface="Calibri"/>
                         </a:rPr>
-                        <a:t>Baseline (trivial pod-cpu-hog)</a:t>
+                        <a:t>Contention (pod-cpu-hog)</a:t>
                       </a:r>
                     </a:p>
                   </a:txBody>
@@ -16803,78 +16819,7 @@
                           </a:solidFill>
                           <a:latin typeface="Calibri"/>
                         </a:rPr>
-                        <a:t>1s</a:t>
-                      </a:r>
-                    </a:p>
-                  </a:txBody>
-                  <a:tcPr marL="76200" marR="76200" marT="38100" marB="38100">
-                    <a:solidFill>
-                      <a:srgbClr val="2A2A3E"/>
-                    </a:solidFill>
-                  </a:tcPr>
-                </a:tc>
-              </a:tr>
-              <a:tr h="292608">
-                <a:tc>
-                  <a:txBody>
-                    <a:bodyPr wrap="square"/>
-                    <a:lstStyle/>
-                    <a:p>
-                      <a:pPr algn="l"/>
-                      <a:r>
-                        <a:rPr sz="900" b="0">
-                          <a:solidFill>
-                            <a:srgbClr val="FFFFFF"/>
-                          </a:solidFill>
-                          <a:latin typeface="Calibri"/>
-                        </a:rPr>
-                        <a:t>Parameters</a:t>
-                      </a:r>
-                    </a:p>
-                  </a:txBody>
-                  <a:tcPr marL="76200" marR="76200" marT="38100" marB="38100">
-                    <a:solidFill>
-                      <a:srgbClr val="2A2A3E"/>
-                    </a:solidFill>
-                  </a:tcPr>
-                </a:tc>
-                <a:tc>
-                  <a:txBody>
-                    <a:bodyPr wrap="square"/>
-                    <a:lstStyle/>
-                    <a:p>
-                      <a:pPr algn="l"/>
-                      <a:r>
-                        <a:rPr sz="900" b="0">
-                          <a:solidFill>
-                            <a:srgbClr val="FFFFFF"/>
-                          </a:solidFill>
-                          <a:latin typeface="Calibri"/>
-                        </a:rPr>
-                        <a:t>FORCE=true, 100% pods</a:t>
-                      </a:r>
-                    </a:p>
-                  </a:txBody>
-                  <a:tcPr marL="76200" marR="76200" marT="38100" marB="38100">
-                    <a:solidFill>
-                      <a:srgbClr val="2A2A3E"/>
-                    </a:solidFill>
-                  </a:tcPr>
-                </a:tc>
-                <a:tc>
-                  <a:txBody>
-                    <a:bodyPr wrap="square"/>
-                    <a:lstStyle/>
-                    <a:p>
-                      <a:pPr algn="l"/>
-                      <a:r>
-                        <a:rPr sz="900" b="0">
-                          <a:solidFill>
-                            <a:srgbClr val="FFFFFF"/>
-                          </a:solidFill>
-                          <a:latin typeface="Calibri"/>
-                        </a:rPr>
-                        <a:t>CPU_LOAD=1%, 1 core</a:t>
+                        <a:t>120s (1 core, 100% load)</a:t>
                       </a:r>
                     </a:p>
                   </a:txBody>
@@ -16945,7 +16890,78 @@
                           </a:solidFill>
                           <a:latin typeface="Calibri"/>
                         </a:rPr>
-                        <a:t>Same probe set (control)</a:t>
+                        <a:t>Same probe set</a:t>
+                      </a:r>
+                    </a:p>
+                  </a:txBody>
+                  <a:tcPr marL="76200" marR="76200" marT="38100" marB="38100">
+                    <a:solidFill>
+                      <a:srgbClr val="2A2A3E"/>
+                    </a:solidFill>
+                  </a:tcPr>
+                </a:tc>
+              </a:tr>
+              <a:tr h="292608">
+                <a:tc>
+                  <a:txBody>
+                    <a:bodyPr wrap="square"/>
+                    <a:lstStyle/>
+                    <a:p>
+                      <a:pPr algn="l"/>
+                      <a:r>
+                        <a:rPr sz="900" b="0">
+                          <a:solidFill>
+                            <a:srgbClr val="FFFFFF"/>
+                          </a:solidFill>
+                          <a:latin typeface="Calibri"/>
+                        </a:rPr>
+                        <a:t>Role</a:t>
+                      </a:r>
+                    </a:p>
+                  </a:txBody>
+                  <a:tcPr marL="76200" marR="76200" marT="38100" marB="38100">
+                    <a:solidFill>
+                      <a:srgbClr val="2A2A3E"/>
+                    </a:solidFill>
+                  </a:tcPr>
+                </a:tc>
+                <a:tc>
+                  <a:txBody>
+                    <a:bodyPr wrap="square"/>
+                    <a:lstStyle/>
+                    <a:p>
+                      <a:pPr algn="l"/>
+                      <a:r>
+                        <a:rPr sz="900" b="0">
+                          <a:solidFill>
+                            <a:srgbClr val="FFFFFF"/>
+                          </a:solidFill>
+                          <a:latin typeface="Calibri"/>
+                        </a:rPr>
+                        <a:t>Tests churn-class story</a:t>
+                      </a:r>
+                    </a:p>
+                  </a:txBody>
+                  <a:tcPr marL="76200" marR="76200" marT="38100" marB="38100">
+                    <a:solidFill>
+                      <a:srgbClr val="2A2A3E"/>
+                    </a:solidFill>
+                  </a:tcPr>
+                </a:tc>
+                <a:tc>
+                  <a:txBody>
+                    <a:bodyPr wrap="square"/>
+                    <a:lstStyle/>
+                    <a:p>
+                      <a:pPr algn="l"/>
+                      <a:r>
+                        <a:rPr sz="900" b="0">
+                          <a:solidFill>
+                            <a:srgbClr val="FFFFFF"/>
+                          </a:solidFill>
+                          <a:latin typeface="Calibri"/>
+                        </a:rPr>
+                        <a:t>Tests if literature returns</a:t>
                       </a:r>
                     </a:p>
                   </a:txBody>
@@ -20465,7 +20481,7 @@
         </p:nvGraphicFramePr>
         <p:xfrm>
           <a:off x="274320" y="2560320"/>
-          <a:ext cx="6858000" cy="2194556"/>
+          <a:ext cx="6858000" cy="2194560"/>
         </p:xfrm>
         <a:graphic>
           <a:graphicData uri="http://schemas.openxmlformats.org/drawingml/2006/table">
@@ -20479,7 +20495,7 @@
                 <a:gridCol w="1714500"/>
                 <a:gridCol w="1714500"/>
               </a:tblGrid>
-              <a:tr h="313508">
+              <a:tr h="274320">
                 <a:tc>
                   <a:txBody>
                     <a:bodyPr wrap="square"/>
@@ -20487,7 +20503,7 @@
                     <a:p>
                       <a:pPr algn="l"/>
                       <a:r>
-                        <a:rPr sz="1000" b="1">
+                        <a:rPr sz="900" b="1">
                           <a:solidFill>
                             <a:srgbClr val="FFFFFF"/>
                           </a:solidFill>
@@ -20510,7 +20526,7 @@
                     <a:p>
                       <a:pPr algn="l"/>
                       <a:r>
-                        <a:rPr sz="1000" b="1">
+                        <a:rPr sz="900" b="1">
                           <a:solidFill>
                             <a:srgbClr val="FFFFFF"/>
                           </a:solidFill>
@@ -20533,7 +20549,7 @@
                     <a:p>
                       <a:pPr algn="l"/>
                       <a:r>
-                        <a:rPr sz="1000" b="1">
+                        <a:rPr sz="900" b="1">
                           <a:solidFill>
                             <a:srgbClr val="FFFFFF"/>
                           </a:solidFill>
@@ -20556,7 +20572,7 @@
                     <a:p>
                       <a:pPr algn="l"/>
                       <a:r>
-                        <a:rPr sz="1000" b="1">
+                        <a:rPr sz="900" b="1">
                           <a:solidFill>
                             <a:srgbClr val="FFFFFF"/>
                           </a:solidFill>
@@ -20573,7 +20589,7 @@
                   </a:tcPr>
                 </a:tc>
               </a:tr>
-              <a:tr h="313508">
+              <a:tr h="274320">
                 <a:tc>
                   <a:txBody>
                     <a:bodyPr wrap="square"/>
@@ -20581,7 +20597,7 @@
                     <a:p>
                       <a:pPr algn="l"/>
                       <a:r>
-                        <a:rPr sz="1000" b="0">
+                        <a:rPr sz="900" b="0">
                           <a:solidFill>
                             <a:srgbClr val="FFFFFF"/>
                           </a:solidFill>
@@ -20604,13 +20620,13 @@
                     <a:p>
                       <a:pPr algn="l"/>
                       <a:r>
-                        <a:rPr sz="1000" b="0">
+                        <a:rPr sz="900" b="0">
                           <a:solidFill>
                             <a:srgbClr val="FFFFFF"/>
                           </a:solidFill>
                           <a:latin typeface="Calibri"/>
                         </a:rPr>
-                        <a:t>Pod deletion → scheduled → ready (ms)</a:t>
+                        <a:t>deletion→scheduled (d2s) + scheduled→ready (s2r) split</a:t>
                       </a:r>
                     </a:p>
                   </a:txBody>
@@ -20627,7 +20643,7 @@
                     <a:p>
                       <a:pPr algn="l"/>
                       <a:r>
-                        <a:rPr sz="1000" b="0">
+                        <a:rPr sz="900" b="0">
                           <a:solidFill>
                             <a:srgbClr val="FFFFFF"/>
                           </a:solidFill>
@@ -20650,7 +20666,7 @@
                     <a:p>
                       <a:pPr algn="l"/>
                       <a:r>
-                        <a:rPr sz="1000" b="0">
+                        <a:rPr sz="900" b="0">
                           <a:solidFill>
                             <a:srgbClr val="FFFFFF"/>
                           </a:solidFill>
@@ -20667,7 +20683,7 @@
                   </a:tcPr>
                 </a:tc>
               </a:tr>
-              <a:tr h="313508">
+              <a:tr h="274320">
                 <a:tc>
                   <a:txBody>
                     <a:bodyPr wrap="square"/>
@@ -20675,7 +20691,7 @@
                     <a:p>
                       <a:pPr algn="l"/>
                       <a:r>
-                        <a:rPr sz="1000" b="0">
+                        <a:rPr sz="900" b="0">
                           <a:solidFill>
                             <a:srgbClr val="FFFFFF"/>
                           </a:solidFill>
@@ -20698,13 +20714,13 @@
                     <a:p>
                       <a:pPr algn="l"/>
                       <a:r>
-                        <a:rPr sz="1000" b="0">
+                        <a:rPr sz="900" b="0">
                           <a:solidFill>
                             <a:srgbClr val="FFFFFF"/>
                           </a:solidFill>
                           <a:latin typeface="Calibri"/>
                         </a:rPr>
-                        <a:t>HTTP route latency + error rates</a:t>
+                        <a:t>HTTP route latency + error rates + per-pod stddev</a:t>
                       </a:r>
                     </a:p>
                   </a:txBody>
@@ -20721,7 +20737,7 @@
                     <a:p>
                       <a:pPr algn="l"/>
                       <a:r>
-                        <a:rPr sz="1000" b="0">
+                        <a:rPr sz="900" b="0">
                           <a:solidFill>
                             <a:srgbClr val="FFFFFF"/>
                           </a:solidFill>
@@ -20744,7 +20760,7 @@
                     <a:p>
                       <a:pPr algn="l"/>
                       <a:r>
-                        <a:rPr sz="1000" b="0">
+                        <a:rPr sz="900" b="0">
                           <a:solidFill>
                             <a:srgbClr val="FFFFFF"/>
                           </a:solidFill>
@@ -20761,7 +20777,7 @@
                   </a:tcPr>
                 </a:tc>
               </a:tr>
-              <a:tr h="313508">
+              <a:tr h="274320">
                 <a:tc>
                   <a:txBody>
                     <a:bodyPr wrap="square"/>
@@ -20769,7 +20785,7 @@
                     <a:p>
                       <a:pPr algn="l"/>
                       <a:r>
-                        <a:rPr sz="1000" b="0">
+                        <a:rPr sz="900" b="0">
                           <a:solidFill>
                             <a:srgbClr val="FFFFFF"/>
                           </a:solidFill>
@@ -20792,7 +20808,7 @@
                     <a:p>
                       <a:pPr algn="l"/>
                       <a:r>
-                        <a:rPr sz="1000" b="0">
+                        <a:rPr sz="900" b="0">
                           <a:solidFill>
                             <a:srgbClr val="FFFFFF"/>
                           </a:solidFill>
@@ -20815,7 +20831,7 @@
                     <a:p>
                       <a:pPr algn="l"/>
                       <a:r>
-                        <a:rPr sz="1000" b="0">
+                        <a:rPr sz="900" b="0">
                           <a:solidFill>
                             <a:srgbClr val="FFFFFF"/>
                           </a:solidFill>
@@ -20838,7 +20854,7 @@
                     <a:p>
                       <a:pPr algn="l"/>
                       <a:r>
-                        <a:rPr sz="1000" b="0">
+                        <a:rPr sz="900" b="0">
                           <a:solidFill>
                             <a:srgbClr val="FFFFFF"/>
                           </a:solidFill>
@@ -20855,7 +20871,7 @@
                   </a:tcPr>
                 </a:tc>
               </a:tr>
-              <a:tr h="313508">
+              <a:tr h="274320">
                 <a:tc>
                   <a:txBody>
                     <a:bodyPr wrap="square"/>
@@ -20863,7 +20879,7 @@
                     <a:p>
                       <a:pPr algn="l"/>
                       <a:r>
-                        <a:rPr sz="1000" b="0">
+                        <a:rPr sz="900" b="0">
                           <a:solidFill>
                             <a:srgbClr val="FFFFFF"/>
                           </a:solidFill>
@@ -20886,7 +20902,7 @@
                     <a:p>
                       <a:pPr algn="l"/>
                       <a:r>
-                        <a:rPr sz="1000" b="0">
+                        <a:rPr sz="900" b="0">
                           <a:solidFill>
                             <a:srgbClr val="FFFFFF"/>
                           </a:solidFill>
@@ -20909,7 +20925,7 @@
                     <a:p>
                       <a:pPr algn="l"/>
                       <a:r>
-                        <a:rPr sz="1000" b="0">
+                        <a:rPr sz="900" b="0">
                           <a:solidFill>
                             <a:srgbClr val="FFFFFF"/>
                           </a:solidFill>
@@ -20932,7 +20948,7 @@
                     <a:p>
                       <a:pPr algn="l"/>
                       <a:r>
-                        <a:rPr sz="1000" b="0">
+                        <a:rPr sz="900" b="0">
                           <a:solidFill>
                             <a:srgbClr val="FFFFFF"/>
                           </a:solidFill>
@@ -20949,7 +20965,7 @@
                   </a:tcPr>
                 </a:tc>
               </a:tr>
-              <a:tr h="313508">
+              <a:tr h="274320">
                 <a:tc>
                   <a:txBody>
                     <a:bodyPr wrap="square"/>
@@ -20957,7 +20973,7 @@
                     <a:p>
                       <a:pPr algn="l"/>
                       <a:r>
-                        <a:rPr sz="1000" b="0">
+                        <a:rPr sz="900" b="0">
                           <a:solidFill>
                             <a:srgbClr val="FFFFFF"/>
                           </a:solidFill>
@@ -20980,13 +20996,13 @@
                     <a:p>
                       <a:pPr algn="l"/>
                       <a:r>
-                        <a:rPr sz="1000" b="0">
+                        <a:rPr sz="900" b="0">
                           <a:solidFill>
                             <a:srgbClr val="FFFFFF"/>
                           </a:solidFill>
                           <a:latin typeface="Calibri"/>
                         </a:rPr>
-                        <a:t>Node/pod CPU (millicores) + memory</a:t>
+                        <a:t>Node/pod CPU (millicores) + memory (used-nodes only)</a:t>
                       </a:r>
                     </a:p>
                   </a:txBody>
@@ -21003,7 +21019,7 @@
                     <a:p>
                       <a:pPr algn="l"/>
                       <a:r>
-                        <a:rPr sz="1000" b="0">
+                        <a:rPr sz="900" b="0">
                           <a:solidFill>
                             <a:srgbClr val="FFFFFF"/>
                           </a:solidFill>
@@ -21026,7 +21042,7 @@
                     <a:p>
                       <a:pPr algn="l"/>
                       <a:r>
-                        <a:rPr sz="1000" b="0">
+                        <a:rPr sz="900" b="0">
                           <a:solidFill>
                             <a:srgbClr val="FFFFFF"/>
                           </a:solidFill>
@@ -21043,7 +21059,7 @@
                   </a:tcPr>
                 </a:tc>
               </a:tr>
-              <a:tr h="313508">
+              <a:tr h="274320">
                 <a:tc>
                   <a:txBody>
                     <a:bodyPr wrap="square"/>
@@ -21051,13 +21067,13 @@
                     <a:p>
                       <a:pPr algn="l"/>
                       <a:r>
-                        <a:rPr sz="1000" b="0">
+                        <a:rPr sz="900" b="0">
                           <a:solidFill>
                             <a:srgbClr val="FFFFFF"/>
                           </a:solidFill>
                           <a:latin typeface="Calibri"/>
                         </a:rPr>
-                        <a:t>PrometheusProber</a:t>
+                        <a:t>PrometheusProber (app)</a:t>
                       </a:r>
                     </a:p>
                   </a:txBody>
@@ -21074,7 +21090,7 @@
                     <a:p>
                       <a:pPr algn="l"/>
                       <a:r>
-                        <a:rPr sz="1000" b="0">
+                        <a:rPr sz="900" b="0">
                           <a:solidFill>
                             <a:srgbClr val="FFFFFF"/>
                           </a:solidFill>
@@ -21097,7 +21113,7 @@
                     <a:p>
                       <a:pPr algn="l"/>
                       <a:r>
-                        <a:rPr sz="1000" b="0">
+                        <a:rPr sz="900" b="0">
                           <a:solidFill>
                             <a:srgbClr val="FFFFFF"/>
                           </a:solidFill>
@@ -21120,7 +21136,101 @@
                     <a:p>
                       <a:pPr algn="l"/>
                       <a:r>
-                        <a:rPr sz="1000" b="0">
+                        <a:rPr sz="900" b="0">
+                          <a:solidFill>
+                            <a:srgbClr val="FFFFFF"/>
+                          </a:solidFill>
+                          <a:latin typeface="Calibri"/>
+                        </a:rPr>
+                        <a:t>10s</a:t>
+                      </a:r>
+                    </a:p>
+                  </a:txBody>
+                  <a:tcPr marL="76200" marR="76200" marT="38100" marB="38100">
+                    <a:solidFill>
+                      <a:srgbClr val="2A2A3E"/>
+                    </a:solidFill>
+                  </a:tcPr>
+                </a:tc>
+              </a:tr>
+              <a:tr h="274320">
+                <a:tc>
+                  <a:txBody>
+                    <a:bodyPr wrap="square"/>
+                    <a:lstStyle/>
+                    <a:p>
+                      <a:pPr algn="l"/>
+                      <a:r>
+                        <a:rPr sz="900" b="0">
+                          <a:solidFill>
+                            <a:srgbClr val="FFFFFF"/>
+                          </a:solidFill>
+                          <a:latin typeface="Calibri"/>
+                        </a:rPr>
+                        <a:t>PrometheusProber (churn)</a:t>
+                      </a:r>
+                    </a:p>
+                  </a:txBody>
+                  <a:tcPr marL="76200" marR="76200" marT="38100" marB="38100">
+                    <a:solidFill>
+                      <a:srgbClr val="2A2A3E"/>
+                    </a:solidFill>
+                  </a:tcPr>
+                </a:tc>
+                <a:tc>
+                  <a:txBody>
+                    <a:bodyPr wrap="square"/>
+                    <a:lstStyle/>
+                    <a:p>
+                      <a:pPr algn="l"/>
+                      <a:r>
+                        <a:rPr sz="900" b="0">
+                          <a:solidFill>
+                            <a:srgbClr val="FFFFFF"/>
+                          </a:solidFill>
+                          <a:latin typeface="Calibri"/>
+                        </a:rPr>
+                        <a:t>kube-proxy SLO p99, CoreDNS p99, conntrack, TCP retrans</a:t>
+                      </a:r>
+                    </a:p>
+                  </a:txBody>
+                  <a:tcPr marL="76200" marR="76200" marT="38100" marB="38100">
+                    <a:solidFill>
+                      <a:srgbClr val="2A2A3E"/>
+                    </a:solidFill>
+                  </a:tcPr>
+                </a:tc>
+                <a:tc>
+                  <a:txBody>
+                    <a:bodyPr wrap="square"/>
+                    <a:lstStyle/>
+                    <a:p>
+                      <a:pPr algn="l"/>
+                      <a:r>
+                        <a:rPr sz="900" b="0">
+                          <a:solidFill>
+                            <a:srgbClr val="FFFFFF"/>
+                          </a:solidFill>
+                          <a:latin typeface="Calibri"/>
+                        </a:rPr>
+                        <a:t>PromQL — SIG-Scalability metrics</a:t>
+                      </a:r>
+                    </a:p>
+                  </a:txBody>
+                  <a:tcPr marL="76200" marR="76200" marT="38100" marB="38100">
+                    <a:solidFill>
+                      <a:srgbClr val="2A2A3E"/>
+                    </a:solidFill>
+                  </a:tcPr>
+                </a:tc>
+                <a:tc>
+                  <a:txBody>
+                    <a:bodyPr wrap="square"/>
+                    <a:lstStyle/>
+                    <a:p>
+                      <a:pPr algn="l"/>
+                      <a:r>
+                        <a:rPr sz="900" b="0">
                           <a:solidFill>
                             <a:srgbClr val="FFFFFF"/>
                           </a:solidFill>
@@ -21916,7 +22026,7 @@
           <a:lstStyle/>
           <a:p>
             <a:pPr algn="l">
-              <a:defRPr sz="1300" b="1">
+              <a:defRPr sz="1100" b="1">
                 <a:solidFill>
                   <a:srgbClr val="FFFFFF"/>
                 </a:solidFill>
@@ -21924,7 +22034,7 @@
               </a:defRPr>
             </a:pPr>
             <a:r>
-              <a:t>score = Σ(probeSuccess%) / N    verdict = PASS iff all probes pass</a:t>
+              <a:t>mean = Σ(probeSuccess%)/N · also report p25, harmonic mean, 95% bootstrap CI</a:t>
             </a:r>
           </a:p>
         </p:txBody>
@@ -22365,7 +22475,7 @@
               <a:spcAft>
                 <a:spcPts val="200"/>
               </a:spcAft>
-              <a:defRPr sz="1100">
+              <a:defRPr sz="1000">
                 <a:solidFill>
                   <a:srgbClr val="BDBDBD"/>
                 </a:solidFill>
@@ -22373,7 +22483,7 @@
               </a:defRPr>
             </a:pPr>
             <a:r>
-              <a:t>• 5 probers extend ContinuousProberBase; RecoveryWatcher uses K8s Watch API</a:t>
+              <a:t>• Bootstrap 95% CI on the mean + Holm-Bonferroni-adjusted pairwise Mann-Whitney U</a:t>
             </a:r>
           </a:p>
           <a:p>
@@ -22384,7 +22494,7 @@
               <a:spcAft>
                 <a:spcPts val="200"/>
               </a:spcAft>
-              <a:defRPr sz="1100">
+              <a:defRPr sz="1000">
                 <a:solidFill>
                   <a:srgbClr val="BDBDBD"/>
                 </a:solidFill>
@@ -22392,7 +22502,7 @@
               </a:defRPr>
             </a:pPr>
             <a:r>
-              <a:t>• Phase-aware: measurements tagged PreChaos / DuringChaos / PostChaos</a:t>
+              <a:t>• Recovery time split: scheduler-stall (d2s) vs container start-up (s2r)</a:t>
             </a:r>
           </a:p>
         </p:txBody>
@@ -22426,7 +22536,7 @@
               <a:spcAft>
                 <a:spcPts val="200"/>
               </a:spcAft>
-              <a:defRPr sz="1100">
+              <a:defRPr sz="1000">
                 <a:solidFill>
                   <a:srgbClr val="BDBDBD"/>
                 </a:solidFill>
@@ -22434,7 +22544,7 @@
               </a:defRPr>
             </a:pPr>
             <a:r>
-              <a:t>• 4 sensitivity tiers (strict → moderate-tight → moderate-loose → control)</a:t>
+              <a:t>• kube-proxy SLO + CoreDNS p99 + conntrack measured directly (SIG-Scalability)</a:t>
             </a:r>
           </a:p>
           <a:p>
@@ -22445,7 +22555,7 @@
               <a:spcAft>
                 <a:spcPts val="200"/>
               </a:spcAft>
-              <a:defRPr sz="1100">
+              <a:defRPr sz="1000">
                 <a:solidFill>
                   <a:srgbClr val="BDBDBD"/>
                 </a:solidFill>
@@ -22453,7 +22563,7 @@
               </a:defRPr>
             </a:pPr>
             <a:r>
-              <a:t>• Healthz control probe detects node-level contention even when chaos is local</a:t>
+              <a:t>• Heterogeneity confound: score vs host-node RAM scatter (Threats-to-Validity)</a:t>
             </a:r>
           </a:p>
         </p:txBody>
@@ -22697,7 +22807,7 @@
               <a:spcAft>
                 <a:spcPts val="200"/>
               </a:spcAft>
-              <a:defRPr sz="1100">
+              <a:defRPr sz="1000">
                 <a:solidFill>
                   <a:srgbClr val="BDBDBD"/>
                 </a:solidFill>
@@ -22720,7 +22830,7 @@
               <a:spcAft>
                 <a:spcPts val="200"/>
               </a:spcAft>
-              <a:defRPr sz="1100">
+              <a:defRPr sz="1000">
                 <a:solidFill>
                   <a:srgbClr val="BDBDBD"/>
                 </a:solidFill>
@@ -22728,11 +22838,19 @@
               </a:defRPr>
             </a:pPr>
             <a:r>
-              <a:t>• Colocate: 83.0% (stddev 0) — BEST</a:t>
+              <a:t>• CONTAINMENT cluster (83.0, stddev 0):</a:t>
             </a:r>
             <a:br/>
             <a:r>
-              <a:t>  non-baseline; stable across iterations</a:t>
+              <a:t>  colocate, random, dep-aware, adversarial.</a:t>
+            </a:r>
+            <a:br/>
+            <a:r>
+              <a:t>  Only the 2 strict probes (directly</a:t>
+            </a:r>
+            <a:br/>
+            <a:r>
+              <a:t>  targeted) fail; everything else passes</a:t>
             </a:r>
           </a:p>
           <a:p>
@@ -22743,7 +22861,7 @@
               <a:spcAft>
                 <a:spcPts val="200"/>
               </a:spcAft>
-              <a:defRPr sz="1100">
+              <a:defRPr sz="1000">
                 <a:solidFill>
                   <a:srgbClr val="BDBDBD"/>
                 </a:solidFill>
@@ -22751,11 +22869,15 @@
               </a:defRPr>
             </a:pPr>
             <a:r>
-              <a:t>• best-fit / adversarial / dep-aware:</a:t>
+              <a:t>• PARTIAL LEAKAGE (66.3, stddev 29):</a:t>
             </a:r>
             <a:br/>
             <a:r>
-              <a:t>  ~69% (stddev 24–31)</a:t>
+              <a:t>  spread, best-fit — moderate/loose/cmd</a:t>
+            </a:r>
+            <a:br/>
+            <a:r>
+              <a:t>  probes fail in ~1/3 of iterations</a:t>
             </a:r>
           </a:p>
           <a:p>
@@ -22766,7 +22888,7 @@
               <a:spcAft>
                 <a:spcPts val="200"/>
               </a:spcAft>
-              <a:defRPr sz="1100">
+              <a:defRPr sz="1000">
                 <a:solidFill>
                   <a:srgbClr val="BDBDBD"/>
                 </a:solidFill>
@@ -22774,11 +22896,11 @@
               </a:defRPr>
             </a:pPr>
             <a:r>
-              <a:t>• Spread: 52.3% — among the WORST</a:t>
+              <a:t>• FULL LEAKAGE (49.7, stddev 29):</a:t>
             </a:r>
             <a:br/>
             <a:r>
-              <a:t>  non-baseline strategies</a:t>
+              <a:t>  default — collateral damage routine</a:t>
             </a:r>
           </a:p>
           <a:p>
@@ -22789,7 +22911,7 @@
               <a:spcAft>
                 <a:spcPts val="200"/>
               </a:spcAft>
-              <a:defRPr sz="1100">
+              <a:defRPr sz="1000">
                 <a:solidFill>
                   <a:srgbClr val="BDBDBD"/>
                 </a:solidFill>
@@ -22797,34 +22919,11 @@
               </a:defRPr>
             </a:pPr>
             <a:r>
-              <a:t>• Default / random: ~50% — broadest</a:t>
+              <a:t>• Bifurcation, not monotonic density;</a:t>
             </a:r>
             <a:br/>
             <a:r>
-              <a:t>  probe-failure footprint</a:t>
-            </a:r>
-          </a:p>
-          <a:p>
-            <a:pPr>
-              <a:spcBef>
-                <a:spcPts val="200"/>
-              </a:spcBef>
-              <a:spcAft>
-                <a:spcPts val="200"/>
-              </a:spcAft>
-              <a:defRPr sz="1100">
-                <a:solidFill>
-                  <a:srgbClr val="BDBDBD"/>
-                </a:solidFill>
-                <a:latin typeface="Calibri"/>
-              </a:defRPr>
-            </a:pPr>
-            <a:r>
-              <a:t>• Ordering inverts the literature</a:t>
-            </a:r>
-            <a:br/>
-            <a:r>
-              <a:t>  intuition encoded in H1 + H2</a:t>
+              <a:t>  contradicts both H1 and H2</a:t>
             </a:r>
           </a:p>
         </p:txBody>
@@ -23014,6 +23113,42 @@
             </a:pPr>
             <a:r>
               <a:t>H3 (recovery → score): REFUTED</a:t>
+            </a:r>
+          </a:p>
+        </p:txBody>
+      </p:sp>
+      <p:sp>
+        <p:nvSpPr>
+          <p:cNvPr id="13" name="TextBox 12"/>
+          <p:cNvSpPr txBox="1"/>
+          <p:nvPr/>
+        </p:nvSpPr>
+        <p:spPr>
+          <a:xfrm>
+            <a:off x="640080" y="6355080"/>
+            <a:ext cx="10881360" cy="274320"/>
+          </a:xfrm>
+          <a:prstGeom prst="rect">
+            <a:avLst/>
+          </a:prstGeom>
+          <a:noFill/>
+        </p:spPr>
+        <p:txBody>
+          <a:bodyPr wrap="square">
+            <a:spAutoFit/>
+          </a:bodyPr>
+          <a:lstStyle/>
+          <a:p>
+            <a:pPr algn="l">
+              <a:defRPr sz="1000" b="0">
+                <a:solidFill>
+                  <a:srgbClr val="BDBDBD"/>
+                </a:solidFill>
+                <a:latin typeface="Calibri"/>
+              </a:defRPr>
+            </a:pPr>
+            <a:r>
+              <a:t>Random has the fastest recovery (1120ms) and is tied for the best score; spread has the slowest recovery (1617ms) and sits in the leakage cluster.</a:t>
             </a:r>
           </a:p>
         </p:txBody>

--- a/ChaosProbe_Presentation.pptx
+++ b/ChaosProbe_Presentation.pptx
@@ -3406,30 +3406,75 @@
           </a:p>
         </p:txBody>
       </p:sp>
-      <p:pic>
-        <p:nvPicPr>
-          <p:cNvPr id="4" name="Picture 3" descr="recovery_times.png"/>
-          <p:cNvPicPr>
-            <a:picLocks noChangeAspect="1"/>
-          </p:cNvPicPr>
-          <p:nvPr/>
-        </p:nvPicPr>
-        <p:blipFill>
-          <a:blip r:embed="rId2"/>
-          <a:stretch>
-            <a:fillRect/>
-          </a:stretch>
-        </p:blipFill>
+      <p:sp>
+        <p:nvSpPr>
+          <p:cNvPr id="4" name="Rounded Rectangle 3"/>
+          <p:cNvSpPr/>
+          <p:nvPr/>
+        </p:nvSpPr>
         <p:spPr>
           <a:xfrm>
             <a:off x="274320" y="1280160"/>
             <a:ext cx="5669280" cy="3200400"/>
           </a:xfrm>
-          <a:prstGeom prst="rect">
-            <a:avLst/>
-          </a:prstGeom>
-        </p:spPr>
-      </p:pic>
+          <a:prstGeom prst="roundRect">
+            <a:avLst/>
+          </a:prstGeom>
+          <a:solidFill>
+            <a:srgbClr val="121222"/>
+          </a:solidFill>
+          <a:ln w="12700">
+            <a:solidFill>
+              <a:srgbClr val="9090A0"/>
+            </a:solidFill>
+          </a:ln>
+        </p:spPr>
+        <p:style>
+          <a:lnRef idx="1">
+            <a:schemeClr val="accent1"/>
+          </a:lnRef>
+          <a:fillRef idx="3">
+            <a:schemeClr val="accent1"/>
+          </a:fillRef>
+          <a:effectRef idx="2">
+            <a:schemeClr val="accent1"/>
+          </a:effectRef>
+          <a:fontRef idx="minor">
+            <a:schemeClr val="lt1"/>
+          </a:fontRef>
+        </p:style>
+        <p:txBody>
+          <a:bodyPr rtlCol="0" anchor="ctr" wrap="square" lIns="50800" rIns="50800" tIns="25400" bIns="25400"/>
+          <a:lstStyle/>
+          <a:p>
+            <a:pPr algn="ctr">
+              <a:defRPr sz="1100" b="0">
+                <a:solidFill>
+                  <a:srgbClr val="9090A0"/>
+                </a:solidFill>
+                <a:latin typeface="Calibri"/>
+              </a:defRPr>
+            </a:pPr>
+            <a:r>
+              <a:t>[Recovery Times by Strategy]</a:t>
+            </a:r>
+            <a:br/>
+            <a:br/>
+            <a:r>
+              <a:t>Box plot: pod deletion → ready (ms)</a:t>
+            </a:r>
+            <a:br/>
+            <a:r>
+              <a:t>per placement strategy.</a:t>
+            </a:r>
+            <a:br/>
+            <a:br/>
+            <a:r>
+              <a:t>Generated by: chaosprobe visualize</a:t>
+            </a:r>
+          </a:p>
+        </p:txBody>
+      </p:sp>
       <p:sp>
         <p:nvSpPr>
           <p:cNvPr id="5" name="TextBox 4"/>
@@ -3466,30 +3511,75 @@
           </a:p>
         </p:txBody>
       </p:sp>
-      <p:pic>
-        <p:nvPicPr>
-          <p:cNvPr id="6" name="Picture 5" descr="latency_degradation.png"/>
-          <p:cNvPicPr>
-            <a:picLocks noChangeAspect="1"/>
-          </p:cNvPicPr>
-          <p:nvPr/>
-        </p:nvPicPr>
-        <p:blipFill>
-          <a:blip r:embed="rId3"/>
-          <a:stretch>
-            <a:fillRect/>
-          </a:stretch>
-        </p:blipFill>
+      <p:sp>
+        <p:nvSpPr>
+          <p:cNvPr id="6" name="Rounded Rectangle 5"/>
+          <p:cNvSpPr/>
+          <p:nvPr/>
+        </p:nvSpPr>
         <p:spPr>
           <a:xfrm>
             <a:off x="6217920" y="1280160"/>
             <a:ext cx="5669280" cy="3200400"/>
           </a:xfrm>
-          <a:prstGeom prst="rect">
-            <a:avLst/>
-          </a:prstGeom>
-        </p:spPr>
-      </p:pic>
+          <a:prstGeom prst="roundRect">
+            <a:avLst/>
+          </a:prstGeom>
+          <a:solidFill>
+            <a:srgbClr val="121222"/>
+          </a:solidFill>
+          <a:ln w="12700">
+            <a:solidFill>
+              <a:srgbClr val="9090A0"/>
+            </a:solidFill>
+          </a:ln>
+        </p:spPr>
+        <p:style>
+          <a:lnRef idx="1">
+            <a:schemeClr val="accent1"/>
+          </a:lnRef>
+          <a:fillRef idx="3">
+            <a:schemeClr val="accent1"/>
+          </a:fillRef>
+          <a:effectRef idx="2">
+            <a:schemeClr val="accent1"/>
+          </a:effectRef>
+          <a:fontRef idx="minor">
+            <a:schemeClr val="lt1"/>
+          </a:fontRef>
+        </p:style>
+        <p:txBody>
+          <a:bodyPr rtlCol="0" anchor="ctr" wrap="square" lIns="50800" rIns="50800" tIns="25400" bIns="25400"/>
+          <a:lstStyle/>
+          <a:p>
+            <a:pPr algn="ctr">
+              <a:defRPr sz="1100" b="0">
+                <a:solidFill>
+                  <a:srgbClr val="9090A0"/>
+                </a:solidFill>
+                <a:latin typeface="Calibri"/>
+              </a:defRPr>
+            </a:pPr>
+            <a:r>
+              <a:t>[Latency Degradation: Pre vs During Chaos]</a:t>
+            </a:r>
+            <a:br/>
+            <a:br/>
+            <a:r>
+              <a:t>Grouped bar chart: HTTP route latency</a:t>
+            </a:r>
+            <a:br/>
+            <a:r>
+              <a:t>pre-chaos vs during-chaos per strategy.</a:t>
+            </a:r>
+            <a:br/>
+            <a:br/>
+            <a:r>
+              <a:t>Generated by: chaosprobe visualize</a:t>
+            </a:r>
+          </a:p>
+        </p:txBody>
+      </p:sp>
       <p:sp>
         <p:nvSpPr>
           <p:cNvPr id="7" name="TextBox 6"/>
@@ -3973,30 +4063,75 @@
           </a:p>
         </p:txBody>
       </p:sp>
-      <p:pic>
-        <p:nvPicPr>
-          <p:cNvPr id="4" name="Picture 3" descr="resource_utilization.png"/>
-          <p:cNvPicPr>
-            <a:picLocks noChangeAspect="1"/>
-          </p:cNvPicPr>
-          <p:nvPr/>
-        </p:nvPicPr>
-        <p:blipFill>
-          <a:blip r:embed="rId2"/>
-          <a:stretch>
-            <a:fillRect/>
-          </a:stretch>
-        </p:blipFill>
+      <p:sp>
+        <p:nvSpPr>
+          <p:cNvPr id="4" name="Rounded Rectangle 3"/>
+          <p:cNvSpPr/>
+          <p:nvPr/>
+        </p:nvSpPr>
         <p:spPr>
           <a:xfrm>
             <a:off x="274320" y="1280160"/>
             <a:ext cx="5669280" cy="3200400"/>
           </a:xfrm>
-          <a:prstGeom prst="rect">
-            <a:avLst/>
-          </a:prstGeom>
-        </p:spPr>
-      </p:pic>
+          <a:prstGeom prst="roundRect">
+            <a:avLst/>
+          </a:prstGeom>
+          <a:solidFill>
+            <a:srgbClr val="121222"/>
+          </a:solidFill>
+          <a:ln w="12700">
+            <a:solidFill>
+              <a:srgbClr val="9090A0"/>
+            </a:solidFill>
+          </a:ln>
+        </p:spPr>
+        <p:style>
+          <a:lnRef idx="1">
+            <a:schemeClr val="accent1"/>
+          </a:lnRef>
+          <a:fillRef idx="3">
+            <a:schemeClr val="accent1"/>
+          </a:fillRef>
+          <a:effectRef idx="2">
+            <a:schemeClr val="accent1"/>
+          </a:effectRef>
+          <a:fontRef idx="minor">
+            <a:schemeClr val="lt1"/>
+          </a:fontRef>
+        </p:style>
+        <p:txBody>
+          <a:bodyPr rtlCol="0" anchor="ctr" wrap="square" lIns="50800" rIns="50800" tIns="25400" bIns="25400"/>
+          <a:lstStyle/>
+          <a:p>
+            <a:pPr algn="ctr">
+              <a:defRPr sz="1100" b="0">
+                <a:solidFill>
+                  <a:srgbClr val="9090A0"/>
+                </a:solidFill>
+                <a:latin typeface="Calibri"/>
+              </a:defRPr>
+            </a:pPr>
+            <a:r>
+              <a:t>[Resource Utilization (CPU/Memory)]</a:t>
+            </a:r>
+            <a:br/>
+            <a:br/>
+            <a:r>
+              <a:t>Per-strategy CPU and memory utilization</a:t>
+            </a:r>
+            <a:br/>
+            <a:r>
+              <a:t>across experiment phases.</a:t>
+            </a:r>
+            <a:br/>
+            <a:br/>
+            <a:r>
+              <a:t>Generated by: chaosprobe visualize</a:t>
+            </a:r>
+          </a:p>
+        </p:txBody>
+      </p:sp>
       <p:sp>
         <p:nvSpPr>
           <p:cNvPr id="5" name="TextBox 4"/>
@@ -4033,30 +4168,75 @@
           </a:p>
         </p:txBody>
       </p:sp>
-      <p:pic>
-        <p:nvPicPr>
-          <p:cNvPr id="6" name="Picture 5" descr="throughput_by_strategy.png"/>
-          <p:cNvPicPr>
-            <a:picLocks noChangeAspect="1"/>
-          </p:cNvPicPr>
-          <p:nvPr/>
-        </p:nvPicPr>
-        <p:blipFill>
-          <a:blip r:embed="rId3"/>
-          <a:stretch>
-            <a:fillRect/>
-          </a:stretch>
-        </p:blipFill>
+      <p:sp>
+        <p:nvSpPr>
+          <p:cNvPr id="6" name="Rounded Rectangle 5"/>
+          <p:cNvSpPr/>
+          <p:nvPr/>
+        </p:nvSpPr>
         <p:spPr>
           <a:xfrm>
             <a:off x="6217920" y="1280160"/>
             <a:ext cx="5669280" cy="3200400"/>
           </a:xfrm>
-          <a:prstGeom prst="rect">
-            <a:avLst/>
-          </a:prstGeom>
-        </p:spPr>
-      </p:pic>
+          <a:prstGeom prst="roundRect">
+            <a:avLst/>
+          </a:prstGeom>
+          <a:solidFill>
+            <a:srgbClr val="121222"/>
+          </a:solidFill>
+          <a:ln w="12700">
+            <a:solidFill>
+              <a:srgbClr val="9090A0"/>
+            </a:solidFill>
+          </a:ln>
+        </p:spPr>
+        <p:style>
+          <a:lnRef idx="1">
+            <a:schemeClr val="accent1"/>
+          </a:lnRef>
+          <a:fillRef idx="3">
+            <a:schemeClr val="accent1"/>
+          </a:fillRef>
+          <a:effectRef idx="2">
+            <a:schemeClr val="accent1"/>
+          </a:effectRef>
+          <a:fontRef idx="minor">
+            <a:schemeClr val="lt1"/>
+          </a:fontRef>
+        </p:style>
+        <p:txBody>
+          <a:bodyPr rtlCol="0" anchor="ctr" wrap="square" lIns="50800" rIns="50800" tIns="25400" bIns="25400"/>
+          <a:lstStyle/>
+          <a:p>
+            <a:pPr algn="ctr">
+              <a:defRPr sz="1100" b="0">
+                <a:solidFill>
+                  <a:srgbClr val="9090A0"/>
+                </a:solidFill>
+                <a:latin typeface="Calibri"/>
+              </a:defRPr>
+            </a:pPr>
+            <a:r>
+              <a:t>[I/O Throughput by Strategy]</a:t>
+            </a:r>
+            <a:br/>
+            <a:br/>
+            <a:r>
+              <a:t>Redis ops/s and disk R/W bytes/s</a:t>
+            </a:r>
+            <a:br/>
+            <a:r>
+              <a:t>per placement strategy.</a:t>
+            </a:r>
+            <a:br/>
+            <a:br/>
+            <a:r>
+              <a:t>Generated by: chaosprobe visualize</a:t>
+            </a:r>
+          </a:p>
+        </p:txBody>
+      </p:sp>
       <p:sp>
         <p:nvSpPr>
           <p:cNvPr id="7" name="TextBox 6"/>
@@ -4536,30 +4716,75 @@
           </a:p>
         </p:txBody>
       </p:sp>
-      <p:pic>
-        <p:nvPicPr>
-          <p:cNvPr id="4" name="Picture 3" descr="strategy_comparison_heatmap.png"/>
-          <p:cNvPicPr>
-            <a:picLocks noChangeAspect="1"/>
-          </p:cNvPicPr>
-          <p:nvPr/>
-        </p:nvPicPr>
-        <p:blipFill>
-          <a:blip r:embed="rId2"/>
-          <a:stretch>
-            <a:fillRect/>
-          </a:stretch>
-        </p:blipFill>
+      <p:sp>
+        <p:nvSpPr>
+          <p:cNvPr id="4" name="Rounded Rectangle 3"/>
+          <p:cNvSpPr/>
+          <p:nvPr/>
+        </p:nvSpPr>
         <p:spPr>
           <a:xfrm>
             <a:off x="274320" y="1280160"/>
             <a:ext cx="5943600" cy="3200400"/>
           </a:xfrm>
-          <a:prstGeom prst="rect">
-            <a:avLst/>
-          </a:prstGeom>
-        </p:spPr>
-      </p:pic>
+          <a:prstGeom prst="roundRect">
+            <a:avLst/>
+          </a:prstGeom>
+          <a:solidFill>
+            <a:srgbClr val="121222"/>
+          </a:solidFill>
+          <a:ln w="12700">
+            <a:solidFill>
+              <a:srgbClr val="9090A0"/>
+            </a:solidFill>
+          </a:ln>
+        </p:spPr>
+        <p:style>
+          <a:lnRef idx="1">
+            <a:schemeClr val="accent1"/>
+          </a:lnRef>
+          <a:fillRef idx="3">
+            <a:schemeClr val="accent1"/>
+          </a:fillRef>
+          <a:effectRef idx="2">
+            <a:schemeClr val="accent1"/>
+          </a:effectRef>
+          <a:fontRef idx="minor">
+            <a:schemeClr val="lt1"/>
+          </a:fontRef>
+        </p:style>
+        <p:txBody>
+          <a:bodyPr rtlCol="0" anchor="ctr" wrap="square" lIns="50800" rIns="50800" tIns="25400" bIns="25400"/>
+          <a:lstStyle/>
+          <a:p>
+            <a:pPr algn="ctr">
+              <a:defRPr sz="1100" b="0">
+                <a:solidFill>
+                  <a:srgbClr val="9090A0"/>
+                </a:solidFill>
+                <a:latin typeface="Calibri"/>
+              </a:defRPr>
+            </a:pPr>
+            <a:r>
+              <a:t>[Strategy Comparison Heatmap]</a:t>
+            </a:r>
+            <a:br/>
+            <a:br/>
+            <a:r>
+              <a:t>All thesis dimensions normalised to 0-1.</a:t>
+            </a:r>
+            <a:br/>
+            <a:r>
+              <a:t>Green = better, Red = worse.</a:t>
+            </a:r>
+            <a:br/>
+            <a:br/>
+            <a:r>
+              <a:t>Generated by: chaosprobe visualize</a:t>
+            </a:r>
+          </a:p>
+        </p:txBody>
+      </p:sp>
       <p:sp>
         <p:nvSpPr>
           <p:cNvPr id="5" name="TextBox 4"/>
@@ -6204,7 +6429,7 @@
         <p:spPr>
           <a:xfrm>
             <a:off x="6492240" y="2240280"/>
-            <a:ext cx="5120640" cy="914400"/>
+            <a:ext cx="5120640" cy="777240"/>
           </a:xfrm>
           <a:prstGeom prst="rect">
             <a:avLst/>
@@ -6226,7 +6451,7 @@
               </a:defRPr>
             </a:pPr>
             <a:r>
-              <a:t>5-node cluster (1 control plane + 4 workers, 10 vCPU, 14 GiB). Larger clusters with more nodes and resources may show different placement effects.</a:t>
+              <a:t>5-node cluster (1 control plane + 4 uniform 4-GiB workers, 10 vCPU, 18 GiB). Larger clusters may show different placement effects.</a:t>
             </a:r>
           </a:p>
         </p:txBody>
@@ -6239,7 +6464,7 @@
         </p:nvSpPr>
         <p:spPr>
           <a:xfrm>
-            <a:off x="6492240" y="3383280"/>
+            <a:off x="6492240" y="3108960"/>
             <a:ext cx="5120640" cy="274320"/>
           </a:xfrm>
           <a:prstGeom prst="rect">
@@ -6275,8 +6500,8 @@
         </p:nvSpPr>
         <p:spPr>
           <a:xfrm>
-            <a:off x="6492240" y="3703320"/>
-            <a:ext cx="5120640" cy="914400"/>
+            <a:off x="6492240" y="3429000"/>
+            <a:ext cx="5120640" cy="777240"/>
           </a:xfrm>
           <a:prstGeom prst="rect">
             <a:avLst/>
@@ -6298,7 +6523,7 @@
               </a:defRPr>
             </a:pPr>
             <a:r>
-              <a:t>Only pod-delete and pod-cpu-hog tested. Network partitions, disk faults, and memory pressure faults may reveal different strategy rankings.</a:t>
+              <a:t>Only pod-delete and pod-cpu-hog tested. Network partitions, disk faults, and memory pressure may reveal different strategy rankings.</a:t>
             </a:r>
           </a:p>
         </p:txBody>
@@ -6311,7 +6536,7 @@
         </p:nvSpPr>
         <p:spPr>
           <a:xfrm>
-            <a:off x="6492240" y="4846320"/>
+            <a:off x="6492240" y="4297680"/>
             <a:ext cx="5120640" cy="274320"/>
           </a:xfrm>
           <a:prstGeom prst="rect">
@@ -6347,8 +6572,8 @@
         </p:nvSpPr>
         <p:spPr>
           <a:xfrm>
-            <a:off x="6492240" y="5166360"/>
-            <a:ext cx="5120640" cy="914400"/>
+            <a:off x="6492240" y="4617720"/>
+            <a:ext cx="5120640" cy="777240"/>
           </a:xfrm>
           <a:prstGeom prst="rect">
             <a:avLst/>
@@ -6371,6 +6596,78 @@
             </a:pPr>
             <a:r>
               <a:t>Steady-state load (50 users, 10/s). Bursty, ramping, or production-like traffic patterns may affect results differently.</a:t>
+            </a:r>
+          </a:p>
+        </p:txBody>
+      </p:sp>
+      <p:sp>
+        <p:nvSpPr>
+          <p:cNvPr id="20" name="TextBox 19"/>
+          <p:cNvSpPr txBox="1"/>
+          <p:nvPr/>
+        </p:nvSpPr>
+        <p:spPr>
+          <a:xfrm>
+            <a:off x="6492240" y="5486400"/>
+            <a:ext cx="5120640" cy="274320"/>
+          </a:xfrm>
+          <a:prstGeom prst="rect">
+            <a:avLst/>
+          </a:prstGeom>
+          <a:noFill/>
+        </p:spPr>
+        <p:txBody>
+          <a:bodyPr wrap="square">
+            <a:spAutoFit/>
+          </a:bodyPr>
+          <a:lstStyle/>
+          <a:p>
+            <a:pPr algn="l">
+              <a:defRPr sz="1300" b="1">
+                <a:solidFill>
+                  <a:srgbClr val="FFFFFF"/>
+                </a:solidFill>
+                <a:latin typeface="Calibri"/>
+              </a:defRPr>
+            </a:pPr>
+            <a:r>
+              <a:t>Metric portability</a:t>
+            </a:r>
+          </a:p>
+        </p:txBody>
+      </p:sp>
+      <p:sp>
+        <p:nvSpPr>
+          <p:cNvPr id="21" name="TextBox 20"/>
+          <p:cNvSpPr txBox="1"/>
+          <p:nvPr/>
+        </p:nvSpPr>
+        <p:spPr>
+          <a:xfrm>
+            <a:off x="6492240" y="5806440"/>
+            <a:ext cx="5120640" cy="777240"/>
+          </a:xfrm>
+          <a:prstGeom prst="rect">
+            <a:avLst/>
+          </a:prstGeom>
+          <a:noFill/>
+        </p:spPr>
+        <p:txBody>
+          <a:bodyPr wrap="square">
+            <a:spAutoFit/>
+          </a:bodyPr>
+          <a:lstStyle/>
+          <a:p>
+            <a:pPr algn="l">
+              <a:defRPr sz="1100" b="0">
+                <a:solidFill>
+                  <a:srgbClr val="BDBDBD"/>
+                </a:solidFill>
+                <a:latin typeface="Calibri"/>
+              </a:defRPr>
+            </a:pPr>
+            <a:r>
+              <a:t>PSI requires cgroup-v2, Felix requires Calico, etcd_debugging_* is K8s-version-fragile. metricAvailability surfaces which metrics were collected per run.</a:t>
             </a:r>
           </a:p>
         </p:txBody>
@@ -9224,8 +9521,8 @@
         </p:nvSpPr>
         <p:spPr>
           <a:xfrm>
-            <a:off x="548640" y="1371600"/>
-            <a:ext cx="11064240" cy="1188720"/>
+            <a:off x="548640" y="1188720"/>
+            <a:ext cx="11064240" cy="777240"/>
           </a:xfrm>
           <a:prstGeom prst="roundRect">
             <a:avLst/>
@@ -9269,8 +9566,8 @@
         </p:nvSpPr>
         <p:spPr>
           <a:xfrm>
-            <a:off x="731520" y="1417320"/>
-            <a:ext cx="10698480" cy="320040"/>
+            <a:off x="731520" y="1280160"/>
+            <a:ext cx="10698480" cy="594360"/>
           </a:xfrm>
           <a:prstGeom prst="rect">
             <a:avLst/>
@@ -9283,16 +9580,16 @@
           </a:bodyPr>
           <a:lstStyle/>
           <a:p>
-            <a:pPr algn="l">
-              <a:defRPr sz="1400" b="1">
-                <a:solidFill>
-                  <a:srgbClr val="0096D6"/>
-                </a:solidFill>
-                <a:latin typeface="Calibri"/>
-              </a:defRPr>
-            </a:pPr>
-            <a:r>
-              <a:t>Research Question</a:t>
+            <a:pPr algn="ctr">
+              <a:defRPr sz="1600" b="1">
+                <a:solidFill>
+                  <a:srgbClr val="FFFFFF"/>
+                </a:solidFill>
+                <a:latin typeface="Calibri"/>
+              </a:defRPr>
+            </a:pPr>
+            <a:r>
+              <a:t>How do multi-dimensional metrics decompose chaos response across pod-placement strategies in Kubernetes?</a:t>
             </a:r>
           </a:p>
         </p:txBody>
@@ -9305,8 +9602,8 @@
         </p:nvSpPr>
         <p:spPr>
           <a:xfrm>
-            <a:off x="731520" y="1828800"/>
-            <a:ext cx="10698480" cy="548640"/>
+            <a:off x="182880" y="2057400"/>
+            <a:ext cx="4572000" cy="228600"/>
           </a:xfrm>
           <a:prstGeom prst="rect">
             <a:avLst/>
@@ -9319,20 +9616,16 @@
           </a:bodyPr>
           <a:lstStyle/>
           <a:p>
-            <a:pPr algn="ctr">
-              <a:defRPr sz="2200" b="1">
-                <a:solidFill>
-                  <a:srgbClr val="FFFFFF"/>
-                </a:solidFill>
-                <a:latin typeface="Calibri"/>
-              </a:defRPr>
-            </a:pPr>
-            <a:r>
-              <a:t>How does pod placement topology affect microservice resilience</a:t>
-            </a:r>
-            <a:br/>
-            <a:r>
-              <a:t>under fault injection in Kubernetes?</a:t>
+            <a:pPr algn="l">
+              <a:defRPr sz="1100" b="1">
+                <a:solidFill>
+                  <a:srgbClr val="0096D6"/>
+                </a:solidFill>
+                <a:latin typeface="Calibri"/>
+              </a:defRPr>
+            </a:pPr>
+            <a:r>
+              <a:t>Instrument design</a:t>
             </a:r>
           </a:p>
         </p:txBody>
@@ -9345,8 +9638,8 @@
         </p:nvSpPr>
         <p:spPr>
           <a:xfrm>
-            <a:off x="548640" y="2834640"/>
-            <a:ext cx="10972800" cy="320040"/>
+            <a:off x="7178040" y="2057400"/>
+            <a:ext cx="4572000" cy="228600"/>
           </a:xfrm>
           <a:prstGeom prst="rect">
             <a:avLst/>
@@ -9360,38 +9653,112 @@
           <a:lstStyle/>
           <a:p>
             <a:pPr algn="l">
-              <a:defRPr sz="1800" b="1">
-                <a:solidFill>
-                  <a:srgbClr val="2ECC71"/>
-                </a:solidFill>
-                <a:latin typeface="Calibri"/>
-              </a:defRPr>
-            </a:pPr>
-            <a:r>
-              <a:t>Hypotheses</a:t>
-            </a:r>
-          </a:p>
-        </p:txBody>
-      </p:sp>
-      <p:sp>
-        <p:nvSpPr>
-          <p:cNvPr id="8" name="Rounded Rectangle 7"/>
+              <a:defRPr sz="1100" b="1">
+                <a:solidFill>
+                  <a:srgbClr val="F39C12"/>
+                </a:solidFill>
+                <a:latin typeface="Calibri"/>
+              </a:defRPr>
+            </a:pPr>
+            <a:r>
+              <a:t>Baseline &amp; tail</a:t>
+            </a:r>
+          </a:p>
+        </p:txBody>
+      </p:sp>
+      <p:sp>
+        <p:nvSpPr>
+          <p:cNvPr id="8" name="TextBox 7"/>
+          <p:cNvSpPr txBox="1"/>
+          <p:nvPr/>
+        </p:nvSpPr>
+        <p:spPr>
+          <a:xfrm>
+            <a:off x="182880" y="4206240"/>
+            <a:ext cx="4572000" cy="228600"/>
+          </a:xfrm>
+          <a:prstGeom prst="rect">
+            <a:avLst/>
+          </a:prstGeom>
+          <a:noFill/>
+        </p:spPr>
+        <p:txBody>
+          <a:bodyPr wrap="square">
+            <a:spAutoFit/>
+          </a:bodyPr>
+          <a:lstStyle/>
+          <a:p>
+            <a:pPr algn="l">
+              <a:defRPr sz="1100" b="1">
+                <a:solidFill>
+                  <a:srgbClr val="E74C3C"/>
+                </a:solidFill>
+                <a:latin typeface="Calibri"/>
+              </a:defRPr>
+            </a:pPr>
+            <a:r>
+              <a:t>Mechanism</a:t>
+            </a:r>
+          </a:p>
+        </p:txBody>
+      </p:sp>
+      <p:sp>
+        <p:nvSpPr>
+          <p:cNvPr id="9" name="TextBox 8"/>
+          <p:cNvSpPr txBox="1"/>
+          <p:nvPr/>
+        </p:nvSpPr>
+        <p:spPr>
+          <a:xfrm>
+            <a:off x="7178040" y="4206240"/>
+            <a:ext cx="4572000" cy="228600"/>
+          </a:xfrm>
+          <a:prstGeom prst="rect">
+            <a:avLst/>
+          </a:prstGeom>
+          <a:noFill/>
+        </p:spPr>
+        <p:txBody>
+          <a:bodyPr wrap="square">
+            <a:spAutoFit/>
+          </a:bodyPr>
+          <a:lstStyle/>
+          <a:p>
+            <a:pPr algn="l">
+              <a:defRPr sz="1100" b="1">
+                <a:solidFill>
+                  <a:srgbClr val="9B59B6"/>
+                </a:solidFill>
+                <a:latin typeface="Calibri"/>
+              </a:defRPr>
+            </a:pPr>
+            <a:r>
+              <a:t>Recovery dynamics</a:t>
+            </a:r>
+          </a:p>
+        </p:txBody>
+      </p:sp>
+      <p:sp>
+        <p:nvSpPr>
+          <p:cNvPr id="10" name="Rounded Rectangle 9"/>
           <p:cNvSpPr/>
           <p:nvPr/>
         </p:nvSpPr>
         <p:spPr>
           <a:xfrm>
-            <a:off x="548640" y="3291840"/>
-            <a:ext cx="914400" cy="822960"/>
+            <a:off x="182880" y="2331720"/>
+            <a:ext cx="2331720" cy="1874519"/>
           </a:xfrm>
           <a:prstGeom prst="roundRect">
             <a:avLst/>
           </a:prstGeom>
           <a:solidFill>
-            <a:srgbClr val="E74C3C"/>
+            <a:srgbClr val="121222"/>
           </a:solidFill>
-          <a:ln>
-            <a:noFill/>
+          <a:ln w="25400">
+            <a:solidFill>
+              <a:srgbClr val="0096D6"/>
+            </a:solidFill>
           </a:ln>
         </p:spPr>
         <p:style>
@@ -9409,11 +9776,54 @@
           </a:fontRef>
         </p:style>
         <p:txBody>
+          <a:bodyPr rtlCol="0" anchor="ctr"/>
+          <a:lstStyle/>
+          <a:p>
+            <a:pPr algn="ctr"/>
+          </a:p>
+        </p:txBody>
+      </p:sp>
+      <p:sp>
+        <p:nvSpPr>
+          <p:cNvPr id="11" name="Rounded Rectangle 10"/>
+          <p:cNvSpPr/>
+          <p:nvPr/>
+        </p:nvSpPr>
+        <p:spPr>
+          <a:xfrm>
+            <a:off x="182880" y="2331720"/>
+            <a:ext cx="2331720" cy="320040"/>
+          </a:xfrm>
+          <a:prstGeom prst="roundRect">
+            <a:avLst/>
+          </a:prstGeom>
+          <a:solidFill>
+            <a:srgbClr val="0096D6"/>
+          </a:solidFill>
+          <a:ln>
+            <a:noFill/>
+          </a:ln>
+        </p:spPr>
+        <p:style>
+          <a:lnRef idx="1">
+            <a:schemeClr val="accent1"/>
+          </a:lnRef>
+          <a:fillRef idx="3">
+            <a:schemeClr val="accent1"/>
+          </a:fillRef>
+          <a:effectRef idx="2">
+            <a:schemeClr val="accent1"/>
+          </a:effectRef>
+          <a:fontRef idx="minor">
+            <a:schemeClr val="lt1"/>
+          </a:fontRef>
+        </p:style>
+        <p:txBody>
           <a:bodyPr rtlCol="0" anchor="ctr" wrap="square" lIns="50800" rIns="50800" tIns="25400" bIns="25400"/>
           <a:lstStyle/>
           <a:p>
             <a:pPr algn="ctr">
-              <a:defRPr sz="1800" b="1">
+              <a:defRPr sz="1300" b="1">
                 <a:solidFill>
                   <a:srgbClr val="FFFFFF"/>
                 </a:solidFill>
@@ -9428,14 +9838,766 @@
       </p:sp>
       <p:sp>
         <p:nvSpPr>
-          <p:cNvPr id="9" name="Rounded Rectangle 8"/>
+          <p:cNvPr id="12" name="TextBox 11"/>
+          <p:cNvSpPr txBox="1"/>
+          <p:nvPr/>
+        </p:nvSpPr>
+        <p:spPr>
+          <a:xfrm>
+            <a:off x="274320" y="2697479"/>
+            <a:ext cx="2148839" cy="365760"/>
+          </a:xfrm>
+          <a:prstGeom prst="rect">
+            <a:avLst/>
+          </a:prstGeom>
+          <a:noFill/>
+        </p:spPr>
+        <p:txBody>
+          <a:bodyPr wrap="square">
+            <a:spAutoFit/>
+          </a:bodyPr>
+          <a:lstStyle/>
+          <a:p>
+            <a:pPr algn="l">
+              <a:defRPr sz="1100" b="1">
+                <a:solidFill>
+                  <a:srgbClr val="0096D6"/>
+                </a:solidFill>
+                <a:latin typeface="Calibri"/>
+              </a:defRPr>
+            </a:pPr>
+            <a:r>
+              <a:t>Metrics carry disjoint info</a:t>
+            </a:r>
+          </a:p>
+        </p:txBody>
+      </p:sp>
+      <p:sp>
+        <p:nvSpPr>
+          <p:cNvPr id="13" name="TextBox 12"/>
+          <p:cNvSpPr txBox="1"/>
+          <p:nvPr/>
+        </p:nvSpPr>
+        <p:spPr>
+          <a:xfrm>
+            <a:off x="274320" y="3108960"/>
+            <a:ext cx="2148839" cy="1005839"/>
+          </a:xfrm>
+          <a:prstGeom prst="rect">
+            <a:avLst/>
+          </a:prstGeom>
+          <a:noFill/>
+        </p:spPr>
+        <p:txBody>
+          <a:bodyPr wrap="square">
+            <a:spAutoFit/>
+          </a:bodyPr>
+          <a:lstStyle/>
+          <a:p>
+            <a:pPr algn="l">
+              <a:defRPr sz="900" b="0">
+                <a:solidFill>
+                  <a:srgbClr val="BDBDBD"/>
+                </a:solidFill>
+                <a:latin typeface="Calibri"/>
+              </a:defRPr>
+            </a:pPr>
+            <a:r>
+              <a:t>No single metric captures full chaos response. Best-fit and spread tie on aggregate (66.3) but diverge on recovery (1452 vs 1617 ms) and latency (100 vs 150 ms during chaos).</a:t>
+            </a:r>
+          </a:p>
+        </p:txBody>
+      </p:sp>
+      <p:sp>
+        <p:nvSpPr>
+          <p:cNvPr id="14" name="Rounded Rectangle 13"/>
           <p:cNvSpPr/>
           <p:nvPr/>
         </p:nvSpPr>
         <p:spPr>
           <a:xfrm>
-            <a:off x="1645920" y="3291840"/>
-            <a:ext cx="9966960" cy="822960"/>
+            <a:off x="2560320" y="2331720"/>
+            <a:ext cx="2331720" cy="1874519"/>
+          </a:xfrm>
+          <a:prstGeom prst="roundRect">
+            <a:avLst/>
+          </a:prstGeom>
+          <a:solidFill>
+            <a:srgbClr val="121222"/>
+          </a:solidFill>
+          <a:ln w="25400">
+            <a:solidFill>
+              <a:srgbClr val="0096D6"/>
+            </a:solidFill>
+          </a:ln>
+        </p:spPr>
+        <p:style>
+          <a:lnRef idx="1">
+            <a:schemeClr val="accent1"/>
+          </a:lnRef>
+          <a:fillRef idx="3">
+            <a:schemeClr val="accent1"/>
+          </a:fillRef>
+          <a:effectRef idx="2">
+            <a:schemeClr val="accent1"/>
+          </a:effectRef>
+          <a:fontRef idx="minor">
+            <a:schemeClr val="lt1"/>
+          </a:fontRef>
+        </p:style>
+        <p:txBody>
+          <a:bodyPr rtlCol="0" anchor="ctr"/>
+          <a:lstStyle/>
+          <a:p>
+            <a:pPr algn="ctr"/>
+          </a:p>
+        </p:txBody>
+      </p:sp>
+      <p:sp>
+        <p:nvSpPr>
+          <p:cNvPr id="15" name="Rounded Rectangle 14"/>
+          <p:cNvSpPr/>
+          <p:nvPr/>
+        </p:nvSpPr>
+        <p:spPr>
+          <a:xfrm>
+            <a:off x="2560320" y="2331720"/>
+            <a:ext cx="2331720" cy="320040"/>
+          </a:xfrm>
+          <a:prstGeom prst="roundRect">
+            <a:avLst/>
+          </a:prstGeom>
+          <a:solidFill>
+            <a:srgbClr val="0096D6"/>
+          </a:solidFill>
+          <a:ln>
+            <a:noFill/>
+          </a:ln>
+        </p:spPr>
+        <p:style>
+          <a:lnRef idx="1">
+            <a:schemeClr val="accent1"/>
+          </a:lnRef>
+          <a:fillRef idx="3">
+            <a:schemeClr val="accent1"/>
+          </a:fillRef>
+          <a:effectRef idx="2">
+            <a:schemeClr val="accent1"/>
+          </a:effectRef>
+          <a:fontRef idx="minor">
+            <a:schemeClr val="lt1"/>
+          </a:fontRef>
+        </p:style>
+        <p:txBody>
+          <a:bodyPr rtlCol="0" anchor="ctr" wrap="square" lIns="50800" rIns="50800" tIns="25400" bIns="25400"/>
+          <a:lstStyle/>
+          <a:p>
+            <a:pPr algn="ctr">
+              <a:defRPr sz="1300" b="1">
+                <a:solidFill>
+                  <a:srgbClr val="FFFFFF"/>
+                </a:solidFill>
+                <a:latin typeface="Calibri"/>
+              </a:defRPr>
+            </a:pPr>
+            <a:r>
+              <a:t>H2</a:t>
+            </a:r>
+          </a:p>
+        </p:txBody>
+      </p:sp>
+      <p:sp>
+        <p:nvSpPr>
+          <p:cNvPr id="16" name="TextBox 15"/>
+          <p:cNvSpPr txBox="1"/>
+          <p:nvPr/>
+        </p:nvSpPr>
+        <p:spPr>
+          <a:xfrm>
+            <a:off x="2651760" y="2697479"/>
+            <a:ext cx="2148839" cy="365760"/>
+          </a:xfrm>
+          <a:prstGeom prst="rect">
+            <a:avLst/>
+          </a:prstGeom>
+          <a:noFill/>
+        </p:spPr>
+        <p:txBody>
+          <a:bodyPr wrap="square">
+            <a:spAutoFit/>
+          </a:bodyPr>
+          <a:lstStyle/>
+          <a:p>
+            <a:pPr algn="l">
+              <a:defRPr sz="1100" b="1">
+                <a:solidFill>
+                  <a:srgbClr val="0096D6"/>
+                </a:solidFill>
+                <a:latin typeface="Calibri"/>
+              </a:defRPr>
+            </a:pPr>
+            <a:r>
+              <a:t>Phase decomposition is necessary</a:t>
+            </a:r>
+          </a:p>
+        </p:txBody>
+      </p:sp>
+      <p:sp>
+        <p:nvSpPr>
+          <p:cNvPr id="17" name="TextBox 16"/>
+          <p:cNvSpPr txBox="1"/>
+          <p:nvPr/>
+        </p:nvSpPr>
+        <p:spPr>
+          <a:xfrm>
+            <a:off x="2651760" y="3108960"/>
+            <a:ext cx="2148839" cy="1005839"/>
+          </a:xfrm>
+          <a:prstGeom prst="rect">
+            <a:avLst/>
+          </a:prstGeom>
+          <a:noFill/>
+        </p:spPr>
+        <p:txBody>
+          <a:bodyPr wrap="square">
+            <a:spAutoFit/>
+          </a:bodyPr>
+          <a:lstStyle/>
+          <a:p>
+            <a:pPr algn="l">
+              <a:defRPr sz="900" b="0">
+                <a:solidFill>
+                  <a:srgbClr val="BDBDBD"/>
+                </a:solidFill>
+                <a:latin typeface="Calibri"/>
+              </a:defRPr>
+            </a:pPr>
+            <a:r>
+              <a:t>Pre-chaos baselines vary by placement (spread 231 ms vs colocate 78 ms on /). During-chaos absolutes are uninterpretable without phase-aware normalisation.</a:t>
+            </a:r>
+          </a:p>
+        </p:txBody>
+      </p:sp>
+      <p:sp>
+        <p:nvSpPr>
+          <p:cNvPr id="18" name="Rounded Rectangle 17"/>
+          <p:cNvSpPr/>
+          <p:nvPr/>
+        </p:nvSpPr>
+        <p:spPr>
+          <a:xfrm>
+            <a:off x="4937759" y="2331720"/>
+            <a:ext cx="2331720" cy="1874519"/>
+          </a:xfrm>
+          <a:prstGeom prst="roundRect">
+            <a:avLst/>
+          </a:prstGeom>
+          <a:solidFill>
+            <a:srgbClr val="121222"/>
+          </a:solidFill>
+          <a:ln w="25400">
+            <a:solidFill>
+              <a:srgbClr val="0096D6"/>
+            </a:solidFill>
+          </a:ln>
+        </p:spPr>
+        <p:style>
+          <a:lnRef idx="1">
+            <a:schemeClr val="accent1"/>
+          </a:lnRef>
+          <a:fillRef idx="3">
+            <a:schemeClr val="accent1"/>
+          </a:fillRef>
+          <a:effectRef idx="2">
+            <a:schemeClr val="accent1"/>
+          </a:effectRef>
+          <a:fontRef idx="minor">
+            <a:schemeClr val="lt1"/>
+          </a:fontRef>
+        </p:style>
+        <p:txBody>
+          <a:bodyPr rtlCol="0" anchor="ctr"/>
+          <a:lstStyle/>
+          <a:p>
+            <a:pPr algn="ctr"/>
+          </a:p>
+        </p:txBody>
+      </p:sp>
+      <p:sp>
+        <p:nvSpPr>
+          <p:cNvPr id="19" name="Rounded Rectangle 18"/>
+          <p:cNvSpPr/>
+          <p:nvPr/>
+        </p:nvSpPr>
+        <p:spPr>
+          <a:xfrm>
+            <a:off x="4937759" y="2331720"/>
+            <a:ext cx="2331720" cy="320040"/>
+          </a:xfrm>
+          <a:prstGeom prst="roundRect">
+            <a:avLst/>
+          </a:prstGeom>
+          <a:solidFill>
+            <a:srgbClr val="0096D6"/>
+          </a:solidFill>
+          <a:ln>
+            <a:noFill/>
+          </a:ln>
+        </p:spPr>
+        <p:style>
+          <a:lnRef idx="1">
+            <a:schemeClr val="accent1"/>
+          </a:lnRef>
+          <a:fillRef idx="3">
+            <a:schemeClr val="accent1"/>
+          </a:fillRef>
+          <a:effectRef idx="2">
+            <a:schemeClr val="accent1"/>
+          </a:effectRef>
+          <a:fontRef idx="minor">
+            <a:schemeClr val="lt1"/>
+          </a:fontRef>
+        </p:style>
+        <p:txBody>
+          <a:bodyPr rtlCol="0" anchor="ctr" wrap="square" lIns="50800" rIns="50800" tIns="25400" bIns="25400"/>
+          <a:lstStyle/>
+          <a:p>
+            <a:pPr algn="ctr">
+              <a:defRPr sz="1300" b="1">
+                <a:solidFill>
+                  <a:srgbClr val="FFFFFF"/>
+                </a:solidFill>
+                <a:latin typeface="Calibri"/>
+              </a:defRPr>
+            </a:pPr>
+            <a:r>
+              <a:t>H3</a:t>
+            </a:r>
+          </a:p>
+        </p:txBody>
+      </p:sp>
+      <p:sp>
+        <p:nvSpPr>
+          <p:cNvPr id="20" name="TextBox 19"/>
+          <p:cNvSpPr txBox="1"/>
+          <p:nvPr/>
+        </p:nvSpPr>
+        <p:spPr>
+          <a:xfrm>
+            <a:off x="5029199" y="2697479"/>
+            <a:ext cx="2148839" cy="365760"/>
+          </a:xfrm>
+          <a:prstGeom prst="rect">
+            <a:avLst/>
+          </a:prstGeom>
+          <a:noFill/>
+        </p:spPr>
+        <p:txBody>
+          <a:bodyPr wrap="square">
+            <a:spAutoFit/>
+          </a:bodyPr>
+          <a:lstStyle/>
+          <a:p>
+            <a:pPr algn="l">
+              <a:defRPr sz="1100" b="1">
+                <a:solidFill>
+                  <a:srgbClr val="0096D6"/>
+                </a:solidFill>
+                <a:latin typeface="Calibri"/>
+              </a:defRPr>
+            </a:pPr>
+            <a:r>
+              <a:t>Per-pod granularity reveals heterogeneity</a:t>
+            </a:r>
+          </a:p>
+        </p:txBody>
+      </p:sp>
+      <p:sp>
+        <p:nvSpPr>
+          <p:cNvPr id="21" name="TextBox 20"/>
+          <p:cNvSpPr txBox="1"/>
+          <p:nvPr/>
+        </p:nvSpPr>
+        <p:spPr>
+          <a:xfrm>
+            <a:off x="5029199" y="3108960"/>
+            <a:ext cx="2148839" cy="1005839"/>
+          </a:xfrm>
+          <a:prstGeom prst="rect">
+            <a:avLst/>
+          </a:prstGeom>
+          <a:noFill/>
+        </p:spPr>
+        <p:txBody>
+          <a:bodyPr wrap="square">
+            <a:spAutoFit/>
+          </a:bodyPr>
+          <a:lstStyle/>
+          <a:p>
+            <a:pPr algn="l">
+              <a:defRPr sz="900" b="0">
+                <a:solidFill>
+                  <a:srgbClr val="BDBDBD"/>
+                </a:solidFill>
+                <a:latin typeface="Calibri"/>
+              </a:defRPr>
+            </a:pPr>
+            <a:r>
+              <a:t>Cross-pod stddev within a single service is non-zero and placement-dependent. Aggregate cluster metrics miss it; per-pod LatencyProber sampling exposes it.</a:t>
+            </a:r>
+          </a:p>
+        </p:txBody>
+      </p:sp>
+      <p:sp>
+        <p:nvSpPr>
+          <p:cNvPr id="22" name="Rounded Rectangle 21"/>
+          <p:cNvSpPr/>
+          <p:nvPr/>
+        </p:nvSpPr>
+        <p:spPr>
+          <a:xfrm>
+            <a:off x="7315199" y="2331720"/>
+            <a:ext cx="2331720" cy="1874519"/>
+          </a:xfrm>
+          <a:prstGeom prst="roundRect">
+            <a:avLst/>
+          </a:prstGeom>
+          <a:solidFill>
+            <a:srgbClr val="121222"/>
+          </a:solidFill>
+          <a:ln w="25400">
+            <a:solidFill>
+              <a:srgbClr val="F39C12"/>
+            </a:solidFill>
+          </a:ln>
+        </p:spPr>
+        <p:style>
+          <a:lnRef idx="1">
+            <a:schemeClr val="accent1"/>
+          </a:lnRef>
+          <a:fillRef idx="3">
+            <a:schemeClr val="accent1"/>
+          </a:fillRef>
+          <a:effectRef idx="2">
+            <a:schemeClr val="accent1"/>
+          </a:effectRef>
+          <a:fontRef idx="minor">
+            <a:schemeClr val="lt1"/>
+          </a:fontRef>
+        </p:style>
+        <p:txBody>
+          <a:bodyPr rtlCol="0" anchor="ctr"/>
+          <a:lstStyle/>
+          <a:p>
+            <a:pPr algn="ctr"/>
+          </a:p>
+        </p:txBody>
+      </p:sp>
+      <p:sp>
+        <p:nvSpPr>
+          <p:cNvPr id="23" name="Rounded Rectangle 22"/>
+          <p:cNvSpPr/>
+          <p:nvPr/>
+        </p:nvSpPr>
+        <p:spPr>
+          <a:xfrm>
+            <a:off x="7315199" y="2331720"/>
+            <a:ext cx="2331720" cy="320040"/>
+          </a:xfrm>
+          <a:prstGeom prst="roundRect">
+            <a:avLst/>
+          </a:prstGeom>
+          <a:solidFill>
+            <a:srgbClr val="F39C12"/>
+          </a:solidFill>
+          <a:ln>
+            <a:noFill/>
+          </a:ln>
+        </p:spPr>
+        <p:style>
+          <a:lnRef idx="1">
+            <a:schemeClr val="accent1"/>
+          </a:lnRef>
+          <a:fillRef idx="3">
+            <a:schemeClr val="accent1"/>
+          </a:fillRef>
+          <a:effectRef idx="2">
+            <a:schemeClr val="accent1"/>
+          </a:effectRef>
+          <a:fontRef idx="minor">
+            <a:schemeClr val="lt1"/>
+          </a:fontRef>
+        </p:style>
+        <p:txBody>
+          <a:bodyPr rtlCol="0" anchor="ctr" wrap="square" lIns="50800" rIns="50800" tIns="25400" bIns="25400"/>
+          <a:lstStyle/>
+          <a:p>
+            <a:pPr algn="ctr">
+              <a:defRPr sz="1300" b="1">
+                <a:solidFill>
+                  <a:srgbClr val="FFFFFF"/>
+                </a:solidFill>
+                <a:latin typeface="Calibri"/>
+              </a:defRPr>
+            </a:pPr>
+            <a:r>
+              <a:t>H4</a:t>
+            </a:r>
+          </a:p>
+        </p:txBody>
+      </p:sp>
+      <p:sp>
+        <p:nvSpPr>
+          <p:cNvPr id="24" name="TextBox 23"/>
+          <p:cNvSpPr txBox="1"/>
+          <p:nvPr/>
+        </p:nvSpPr>
+        <p:spPr>
+          <a:xfrm>
+            <a:off x="7406640" y="2697479"/>
+            <a:ext cx="2148839" cy="365760"/>
+          </a:xfrm>
+          <a:prstGeom prst="rect">
+            <a:avLst/>
+          </a:prstGeom>
+          <a:noFill/>
+        </p:spPr>
+        <p:txBody>
+          <a:bodyPr wrap="square">
+            <a:spAutoFit/>
+          </a:bodyPr>
+          <a:lstStyle/>
+          <a:p>
+            <a:pPr algn="l">
+              <a:defRPr sz="1100" b="1">
+                <a:solidFill>
+                  <a:srgbClr val="F39C12"/>
+                </a:solidFill>
+                <a:latin typeface="Calibri"/>
+              </a:defRPr>
+            </a:pPr>
+            <a:r>
+              <a:t>Baseline predicts resilience</a:t>
+            </a:r>
+          </a:p>
+        </p:txBody>
+      </p:sp>
+      <p:sp>
+        <p:nvSpPr>
+          <p:cNvPr id="25" name="TextBox 24"/>
+          <p:cNvSpPr txBox="1"/>
+          <p:nvPr/>
+        </p:nvSpPr>
+        <p:spPr>
+          <a:xfrm>
+            <a:off x="7406640" y="3108960"/>
+            <a:ext cx="2148839" cy="1005839"/>
+          </a:xfrm>
+          <a:prstGeom prst="rect">
+            <a:avLst/>
+          </a:prstGeom>
+          <a:noFill/>
+        </p:spPr>
+        <p:txBody>
+          <a:bodyPr wrap="square">
+            <a:spAutoFit/>
+          </a:bodyPr>
+          <a:lstStyle/>
+          <a:p>
+            <a:pPr algn="l">
+              <a:defRPr sz="900" b="0">
+                <a:solidFill>
+                  <a:srgbClr val="BDBDBD"/>
+                </a:solidFill>
+                <a:latin typeface="Calibri"/>
+              </a:defRPr>
+            </a:pPr>
+            <a:r>
+              <a:t>Strategies with lower pre-chaos latency variance score higher under chaos. The resting-state fingerprint predicts the failure response before any fault is injected.</a:t>
+            </a:r>
+          </a:p>
+        </p:txBody>
+      </p:sp>
+      <p:sp>
+        <p:nvSpPr>
+          <p:cNvPr id="26" name="Rounded Rectangle 25"/>
+          <p:cNvSpPr/>
+          <p:nvPr/>
+        </p:nvSpPr>
+        <p:spPr>
+          <a:xfrm>
+            <a:off x="9692639" y="2331720"/>
+            <a:ext cx="2331720" cy="1874519"/>
+          </a:xfrm>
+          <a:prstGeom prst="roundRect">
+            <a:avLst/>
+          </a:prstGeom>
+          <a:solidFill>
+            <a:srgbClr val="121222"/>
+          </a:solidFill>
+          <a:ln w="25400">
+            <a:solidFill>
+              <a:srgbClr val="F39C12"/>
+            </a:solidFill>
+          </a:ln>
+        </p:spPr>
+        <p:style>
+          <a:lnRef idx="1">
+            <a:schemeClr val="accent1"/>
+          </a:lnRef>
+          <a:fillRef idx="3">
+            <a:schemeClr val="accent1"/>
+          </a:fillRef>
+          <a:effectRef idx="2">
+            <a:schemeClr val="accent1"/>
+          </a:effectRef>
+          <a:fontRef idx="minor">
+            <a:schemeClr val="lt1"/>
+          </a:fontRef>
+        </p:style>
+        <p:txBody>
+          <a:bodyPr rtlCol="0" anchor="ctr"/>
+          <a:lstStyle/>
+          <a:p>
+            <a:pPr algn="ctr"/>
+          </a:p>
+        </p:txBody>
+      </p:sp>
+      <p:sp>
+        <p:nvSpPr>
+          <p:cNvPr id="27" name="Rounded Rectangle 26"/>
+          <p:cNvSpPr/>
+          <p:nvPr/>
+        </p:nvSpPr>
+        <p:spPr>
+          <a:xfrm>
+            <a:off x="9692639" y="2331720"/>
+            <a:ext cx="2331720" cy="320040"/>
+          </a:xfrm>
+          <a:prstGeom prst="roundRect">
+            <a:avLst/>
+          </a:prstGeom>
+          <a:solidFill>
+            <a:srgbClr val="F39C12"/>
+          </a:solidFill>
+          <a:ln>
+            <a:noFill/>
+          </a:ln>
+        </p:spPr>
+        <p:style>
+          <a:lnRef idx="1">
+            <a:schemeClr val="accent1"/>
+          </a:lnRef>
+          <a:fillRef idx="3">
+            <a:schemeClr val="accent1"/>
+          </a:fillRef>
+          <a:effectRef idx="2">
+            <a:schemeClr val="accent1"/>
+          </a:effectRef>
+          <a:fontRef idx="minor">
+            <a:schemeClr val="lt1"/>
+          </a:fontRef>
+        </p:style>
+        <p:txBody>
+          <a:bodyPr rtlCol="0" anchor="ctr" wrap="square" lIns="50800" rIns="50800" tIns="25400" bIns="25400"/>
+          <a:lstStyle/>
+          <a:p>
+            <a:pPr algn="ctr">
+              <a:defRPr sz="1300" b="1">
+                <a:solidFill>
+                  <a:srgbClr val="FFFFFF"/>
+                </a:solidFill>
+                <a:latin typeface="Calibri"/>
+              </a:defRPr>
+            </a:pPr>
+            <a:r>
+              <a:t>H5</a:t>
+            </a:r>
+          </a:p>
+        </p:txBody>
+      </p:sp>
+      <p:sp>
+        <p:nvSpPr>
+          <p:cNvPr id="28" name="TextBox 27"/>
+          <p:cNvSpPr txBox="1"/>
+          <p:nvPr/>
+        </p:nvSpPr>
+        <p:spPr>
+          <a:xfrm>
+            <a:off x="9784079" y="2697479"/>
+            <a:ext cx="2148839" cy="365760"/>
+          </a:xfrm>
+          <a:prstGeom prst="rect">
+            <a:avLst/>
+          </a:prstGeom>
+          <a:noFill/>
+        </p:spPr>
+        <p:txBody>
+          <a:bodyPr wrap="square">
+            <a:spAutoFit/>
+          </a:bodyPr>
+          <a:lstStyle/>
+          <a:p>
+            <a:pPr algn="l">
+              <a:defRPr sz="1100" b="1">
+                <a:solidFill>
+                  <a:srgbClr val="F39C12"/>
+                </a:solidFill>
+                <a:latin typeface="Calibri"/>
+              </a:defRPr>
+            </a:pPr>
+            <a:r>
+              <a:t>Mean masks tail</a:t>
+            </a:r>
+          </a:p>
+        </p:txBody>
+      </p:sp>
+      <p:sp>
+        <p:nvSpPr>
+          <p:cNvPr id="29" name="TextBox 28"/>
+          <p:cNvSpPr txBox="1"/>
+          <p:nvPr/>
+        </p:nvSpPr>
+        <p:spPr>
+          <a:xfrm>
+            <a:off x="9784079" y="3108960"/>
+            <a:ext cx="2148839" cy="1005839"/>
+          </a:xfrm>
+          <a:prstGeom prst="rect">
+            <a:avLst/>
+          </a:prstGeom>
+          <a:noFill/>
+        </p:spPr>
+        <p:txBody>
+          <a:bodyPr wrap="square">
+            <a:spAutoFit/>
+          </a:bodyPr>
+          <a:lstStyle/>
+          <a:p>
+            <a:pPr algn="l">
+              <a:defRPr sz="900" b="0">
+                <a:solidFill>
+                  <a:srgbClr val="BDBDBD"/>
+                </a:solidFill>
+                <a:latin typeface="Calibri"/>
+              </a:defRPr>
+            </a:pPr>
+            <a:r>
+              <a:t>p95 latency ranking across strategies differs from mean ranking. Tail percentiles concentrate placement effects (Dean &amp; Barroso, CACM 2013).</a:t>
+            </a:r>
+          </a:p>
+        </p:txBody>
+      </p:sp>
+      <p:sp>
+        <p:nvSpPr>
+          <p:cNvPr id="30" name="Rounded Rectangle 29"/>
+          <p:cNvSpPr/>
+          <p:nvPr/>
+        </p:nvSpPr>
+        <p:spPr>
+          <a:xfrm>
+            <a:off x="182880" y="4480560"/>
+            <a:ext cx="2331720" cy="1874519"/>
           </a:xfrm>
           <a:prstGeom prst="roundRect">
             <a:avLst/>
@@ -9473,462 +10635,14 @@
       </p:sp>
       <p:sp>
         <p:nvSpPr>
-          <p:cNvPr id="10" name="TextBox 9"/>
-          <p:cNvSpPr txBox="1"/>
-          <p:nvPr/>
-        </p:nvSpPr>
-        <p:spPr>
-          <a:xfrm>
-            <a:off x="1828800" y="3310128"/>
-            <a:ext cx="9601200" cy="274320"/>
-          </a:xfrm>
-          <a:prstGeom prst="rect">
-            <a:avLst/>
-          </a:prstGeom>
-          <a:noFill/>
-        </p:spPr>
-        <p:txBody>
-          <a:bodyPr wrap="square">
-            <a:spAutoFit/>
-          </a:bodyPr>
-          <a:lstStyle/>
-          <a:p>
-            <a:pPr algn="l">
-              <a:defRPr sz="1500" b="1">
-                <a:solidFill>
-                  <a:srgbClr val="E74C3C"/>
-                </a:solidFill>
-                <a:latin typeface="Calibri"/>
-              </a:defRPr>
-            </a:pPr>
-            <a:r>
-              <a:t>Maximum contention degrades resilience</a:t>
-            </a:r>
-          </a:p>
-        </p:txBody>
-      </p:sp>
-      <p:sp>
-        <p:nvSpPr>
-          <p:cNvPr id="11" name="TextBox 10"/>
-          <p:cNvSpPr txBox="1"/>
-          <p:nvPr/>
-        </p:nvSpPr>
-        <p:spPr>
-          <a:xfrm>
-            <a:off x="1828800" y="3639312"/>
-            <a:ext cx="9601200" cy="457200"/>
-          </a:xfrm>
-          <a:prstGeom prst="rect">
-            <a:avLst/>
-          </a:prstGeom>
-          <a:noFill/>
-        </p:spPr>
-        <p:txBody>
-          <a:bodyPr wrap="square">
-            <a:spAutoFit/>
-          </a:bodyPr>
-          <a:lstStyle/>
-          <a:p>
-            <a:pPr algn="l">
-              <a:defRPr sz="1200" b="0">
-                <a:solidFill>
-                  <a:srgbClr val="BDBDBD"/>
-                </a:solidFill>
-                <a:latin typeface="Calibri"/>
-              </a:defRPr>
-            </a:pPr>
-            <a:r>
-              <a:t>Colocating all pods on a single node maximizes resource contention (CPU, memory, disk, network) and produces the worst resilience scores.</a:t>
-            </a:r>
-          </a:p>
-        </p:txBody>
-      </p:sp>
-      <p:sp>
-        <p:nvSpPr>
-          <p:cNvPr id="12" name="Rounded Rectangle 11"/>
+          <p:cNvPr id="31" name="Rounded Rectangle 30"/>
           <p:cNvSpPr/>
           <p:nvPr/>
         </p:nvSpPr>
         <p:spPr>
           <a:xfrm>
-            <a:off x="548640" y="4480560"/>
-            <a:ext cx="914400" cy="822960"/>
-          </a:xfrm>
-          <a:prstGeom prst="roundRect">
-            <a:avLst/>
-          </a:prstGeom>
-          <a:solidFill>
-            <a:srgbClr val="2ECC71"/>
-          </a:solidFill>
-          <a:ln>
-            <a:noFill/>
-          </a:ln>
-        </p:spPr>
-        <p:style>
-          <a:lnRef idx="1">
-            <a:schemeClr val="accent1"/>
-          </a:lnRef>
-          <a:fillRef idx="3">
-            <a:schemeClr val="accent1"/>
-          </a:fillRef>
-          <a:effectRef idx="2">
-            <a:schemeClr val="accent1"/>
-          </a:effectRef>
-          <a:fontRef idx="minor">
-            <a:schemeClr val="lt1"/>
-          </a:fontRef>
-        </p:style>
-        <p:txBody>
-          <a:bodyPr rtlCol="0" anchor="ctr" wrap="square" lIns="50800" rIns="50800" tIns="25400" bIns="25400"/>
-          <a:lstStyle/>
-          <a:p>
-            <a:pPr algn="ctr">
-              <a:defRPr sz="1800" b="1">
-                <a:solidFill>
-                  <a:srgbClr val="FFFFFF"/>
-                </a:solidFill>
-                <a:latin typeface="Calibri"/>
-              </a:defRPr>
-            </a:pPr>
-            <a:r>
-              <a:t>H2</a:t>
-            </a:r>
-          </a:p>
-        </p:txBody>
-      </p:sp>
-      <p:sp>
-        <p:nvSpPr>
-          <p:cNvPr id="13" name="Rounded Rectangle 12"/>
-          <p:cNvSpPr/>
-          <p:nvPr/>
-        </p:nvSpPr>
-        <p:spPr>
-          <a:xfrm>
-            <a:off x="1645920" y="4480560"/>
-            <a:ext cx="9966960" cy="822960"/>
-          </a:xfrm>
-          <a:prstGeom prst="roundRect">
-            <a:avLst/>
-          </a:prstGeom>
-          <a:solidFill>
-            <a:srgbClr val="121222"/>
-          </a:solidFill>
-          <a:ln w="25400">
-            <a:solidFill>
-              <a:srgbClr val="2ECC71"/>
-            </a:solidFill>
-          </a:ln>
-        </p:spPr>
-        <p:style>
-          <a:lnRef idx="1">
-            <a:schemeClr val="accent1"/>
-          </a:lnRef>
-          <a:fillRef idx="3">
-            <a:schemeClr val="accent1"/>
-          </a:fillRef>
-          <a:effectRef idx="2">
-            <a:schemeClr val="accent1"/>
-          </a:effectRef>
-          <a:fontRef idx="minor">
-            <a:schemeClr val="lt1"/>
-          </a:fontRef>
-        </p:style>
-        <p:txBody>
-          <a:bodyPr rtlCol="0" anchor="ctr"/>
-          <a:lstStyle/>
-          <a:p>
-            <a:pPr algn="ctr"/>
-          </a:p>
-        </p:txBody>
-      </p:sp>
-      <p:sp>
-        <p:nvSpPr>
-          <p:cNvPr id="14" name="TextBox 13"/>
-          <p:cNvSpPr txBox="1"/>
-          <p:nvPr/>
-        </p:nvSpPr>
-        <p:spPr>
-          <a:xfrm>
-            <a:off x="1828800" y="4498848"/>
-            <a:ext cx="9601200" cy="274320"/>
-          </a:xfrm>
-          <a:prstGeom prst="rect">
-            <a:avLst/>
-          </a:prstGeom>
-          <a:noFill/>
-        </p:spPr>
-        <p:txBody>
-          <a:bodyPr wrap="square">
-            <a:spAutoFit/>
-          </a:bodyPr>
-          <a:lstStyle/>
-          <a:p>
-            <a:pPr algn="l">
-              <a:defRPr sz="1500" b="1">
-                <a:solidFill>
-                  <a:srgbClr val="2ECC71"/>
-                </a:solidFill>
-                <a:latin typeface="Calibri"/>
-              </a:defRPr>
-            </a:pPr>
-            <a:r>
-              <a:t>Spreading improves fault isolation</a:t>
-            </a:r>
-          </a:p>
-        </p:txBody>
-      </p:sp>
-      <p:sp>
-        <p:nvSpPr>
-          <p:cNvPr id="15" name="TextBox 14"/>
-          <p:cNvSpPr txBox="1"/>
-          <p:nvPr/>
-        </p:nvSpPr>
-        <p:spPr>
-          <a:xfrm>
-            <a:off x="1828800" y="4828032"/>
-            <a:ext cx="9601200" cy="457200"/>
-          </a:xfrm>
-          <a:prstGeom prst="rect">
-            <a:avLst/>
-          </a:prstGeom>
-          <a:noFill/>
-        </p:spPr>
-        <p:txBody>
-          <a:bodyPr wrap="square">
-            <a:spAutoFit/>
-          </a:bodyPr>
-          <a:lstStyle/>
-          <a:p>
-            <a:pPr algn="l">
-              <a:defRPr sz="1200" b="0">
-                <a:solidFill>
-                  <a:srgbClr val="BDBDBD"/>
-                </a:solidFill>
-                <a:latin typeface="Calibri"/>
-              </a:defRPr>
-            </a:pPr>
-            <a:r>
-              <a:t>Distributing pods evenly across nodes minimizes per-node contention and limits fault blast radius, yielding the best resilience scores.</a:t>
-            </a:r>
-          </a:p>
-        </p:txBody>
-      </p:sp>
-      <p:sp>
-        <p:nvSpPr>
-          <p:cNvPr id="16" name="Rounded Rectangle 15"/>
-          <p:cNvSpPr/>
-          <p:nvPr/>
-        </p:nvSpPr>
-        <p:spPr>
-          <a:xfrm>
-            <a:off x="548640" y="5669280"/>
-            <a:ext cx="914400" cy="822960"/>
-          </a:xfrm>
-          <a:prstGeom prst="roundRect">
-            <a:avLst/>
-          </a:prstGeom>
-          <a:solidFill>
-            <a:srgbClr val="F39C12"/>
-          </a:solidFill>
-          <a:ln>
-            <a:noFill/>
-          </a:ln>
-        </p:spPr>
-        <p:style>
-          <a:lnRef idx="1">
-            <a:schemeClr val="accent1"/>
-          </a:lnRef>
-          <a:fillRef idx="3">
-            <a:schemeClr val="accent1"/>
-          </a:fillRef>
-          <a:effectRef idx="2">
-            <a:schemeClr val="accent1"/>
-          </a:effectRef>
-          <a:fontRef idx="minor">
-            <a:schemeClr val="lt1"/>
-          </a:fontRef>
-        </p:style>
-        <p:txBody>
-          <a:bodyPr rtlCol="0" anchor="ctr" wrap="square" lIns="50800" rIns="50800" tIns="25400" bIns="25400"/>
-          <a:lstStyle/>
-          <a:p>
-            <a:pPr algn="ctr">
-              <a:defRPr sz="1800" b="1">
-                <a:solidFill>
-                  <a:srgbClr val="FFFFFF"/>
-                </a:solidFill>
-                <a:latin typeface="Calibri"/>
-              </a:defRPr>
-            </a:pPr>
-            <a:r>
-              <a:t>H3</a:t>
-            </a:r>
-          </a:p>
-        </p:txBody>
-      </p:sp>
-      <p:sp>
-        <p:nvSpPr>
-          <p:cNvPr id="17" name="Rounded Rectangle 16"/>
-          <p:cNvSpPr/>
-          <p:nvPr/>
-        </p:nvSpPr>
-        <p:spPr>
-          <a:xfrm>
-            <a:off x="1645920" y="5669280"/>
-            <a:ext cx="9966960" cy="822960"/>
-          </a:xfrm>
-          <a:prstGeom prst="roundRect">
-            <a:avLst/>
-          </a:prstGeom>
-          <a:solidFill>
-            <a:srgbClr val="121222"/>
-          </a:solidFill>
-          <a:ln w="25400">
-            <a:solidFill>
-              <a:srgbClr val="F39C12"/>
-            </a:solidFill>
-          </a:ln>
-        </p:spPr>
-        <p:style>
-          <a:lnRef idx="1">
-            <a:schemeClr val="accent1"/>
-          </a:lnRef>
-          <a:fillRef idx="3">
-            <a:schemeClr val="accent1"/>
-          </a:fillRef>
-          <a:effectRef idx="2">
-            <a:schemeClr val="accent1"/>
-          </a:effectRef>
-          <a:fontRef idx="minor">
-            <a:schemeClr val="lt1"/>
-          </a:fontRef>
-        </p:style>
-        <p:txBody>
-          <a:bodyPr rtlCol="0" anchor="ctr"/>
-          <a:lstStyle/>
-          <a:p>
-            <a:pPr algn="ctr"/>
-          </a:p>
-        </p:txBody>
-      </p:sp>
-      <p:sp>
-        <p:nvSpPr>
-          <p:cNvPr id="18" name="TextBox 17"/>
-          <p:cNvSpPr txBox="1"/>
-          <p:nvPr/>
-        </p:nvSpPr>
-        <p:spPr>
-          <a:xfrm>
-            <a:off x="1828800" y="5687568"/>
-            <a:ext cx="9601200" cy="274320"/>
-          </a:xfrm>
-          <a:prstGeom prst="rect">
-            <a:avLst/>
-          </a:prstGeom>
-          <a:noFill/>
-        </p:spPr>
-        <p:txBody>
-          <a:bodyPr wrap="square">
-            <a:spAutoFit/>
-          </a:bodyPr>
-          <a:lstStyle/>
-          <a:p>
-            <a:pPr algn="l">
-              <a:defRPr sz="1500" b="1">
-                <a:solidFill>
-                  <a:srgbClr val="F39C12"/>
-                </a:solidFill>
-                <a:latin typeface="Calibri"/>
-              </a:defRPr>
-            </a:pPr>
-            <a:r>
-              <a:t>Recovery time predicts resilience</a:t>
-            </a:r>
-          </a:p>
-        </p:txBody>
-      </p:sp>
-      <p:sp>
-        <p:nvSpPr>
-          <p:cNvPr id="19" name="TextBox 18"/>
-          <p:cNvSpPr txBox="1"/>
-          <p:nvPr/>
-        </p:nvSpPr>
-        <p:spPr>
-          <a:xfrm>
-            <a:off x="1828800" y="6016752"/>
-            <a:ext cx="9601200" cy="457200"/>
-          </a:xfrm>
-          <a:prstGeom prst="rect">
-            <a:avLst/>
-          </a:prstGeom>
-          <a:noFill/>
-        </p:spPr>
-        <p:txBody>
-          <a:bodyPr wrap="square">
-            <a:spAutoFit/>
-          </a:bodyPr>
-          <a:lstStyle/>
-          <a:p>
-            <a:pPr algn="l">
-              <a:defRPr sz="1200" b="0">
-                <a:solidFill>
-                  <a:srgbClr val="BDBDBD"/>
-                </a:solidFill>
-                <a:latin typeface="Calibri"/>
-              </a:defRPr>
-            </a:pPr>
-            <a:r>
-              <a:t>Faster pod recovery yields higher resilience scores — shorter unavailability windows mean fewer probe checks fall inside the fault window (Dean–Barroso 2013).</a:t>
-            </a:r>
-          </a:p>
-        </p:txBody>
-      </p:sp>
-      <p:sp>
-        <p:nvSpPr>
-          <p:cNvPr id="20" name="TextBox 19"/>
-          <p:cNvSpPr txBox="1"/>
-          <p:nvPr/>
-        </p:nvSpPr>
-        <p:spPr>
-          <a:xfrm>
-            <a:off x="548640" y="6400800"/>
-            <a:ext cx="10972800" cy="274320"/>
-          </a:xfrm>
-          <a:prstGeom prst="rect">
-            <a:avLst/>
-          </a:prstGeom>
-          <a:noFill/>
-        </p:spPr>
-        <p:txBody>
-          <a:bodyPr wrap="square">
-            <a:spAutoFit/>
-          </a:bodyPr>
-          <a:lstStyle/>
-          <a:p>
-            <a:pPr algn="l">
-              <a:defRPr sz="1200" b="1">
-                <a:solidFill>
-                  <a:srgbClr val="9090A0"/>
-                </a:solidFill>
-                <a:latin typeface="Calibri"/>
-              </a:defRPr>
-            </a:pPr>
-            <a:r>
-              <a:t>Measured Dimensions:</a:t>
-            </a:r>
-          </a:p>
-        </p:txBody>
-      </p:sp>
-      <p:sp>
-        <p:nvSpPr>
-          <p:cNvPr id="21" name="Rounded Rectangle 20"/>
-          <p:cNvSpPr/>
-          <p:nvPr/>
-        </p:nvSpPr>
-        <p:spPr>
-          <a:xfrm>
-            <a:off x="2743200" y="6355080"/>
-            <a:ext cx="1920240" cy="320040"/>
+            <a:off x="182880" y="4480560"/>
+            <a:ext cx="2331720" cy="320040"/>
           </a:xfrm>
           <a:prstGeom prst="roundRect">
             <a:avLst/>
@@ -9959,38 +10673,112 @@
           <a:lstStyle/>
           <a:p>
             <a:pPr algn="ctr">
+              <a:defRPr sz="1300" b="1">
+                <a:solidFill>
+                  <a:srgbClr val="FFFFFF"/>
+                </a:solidFill>
+                <a:latin typeface="Calibri"/>
+              </a:defRPr>
+            </a:pPr>
+            <a:r>
+              <a:t>H6</a:t>
+            </a:r>
+          </a:p>
+        </p:txBody>
+      </p:sp>
+      <p:sp>
+        <p:nvSpPr>
+          <p:cNvPr id="32" name="TextBox 31"/>
+          <p:cNvSpPr txBox="1"/>
+          <p:nvPr/>
+        </p:nvSpPr>
+        <p:spPr>
+          <a:xfrm>
+            <a:off x="274320" y="4846320"/>
+            <a:ext cx="2148839" cy="365760"/>
+          </a:xfrm>
+          <a:prstGeom prst="rect">
+            <a:avLst/>
+          </a:prstGeom>
+          <a:noFill/>
+        </p:spPr>
+        <p:txBody>
+          <a:bodyPr wrap="square">
+            <a:spAutoFit/>
+          </a:bodyPr>
+          <a:lstStyle/>
+          <a:p>
+            <a:pPr algn="l">
               <a:defRPr sz="1100" b="1">
                 <a:solidFill>
-                  <a:srgbClr val="FFFFFF"/>
-                </a:solidFill>
-                <a:latin typeface="Calibri"/>
-              </a:defRPr>
-            </a:pPr>
-            <a:r>
-              <a:t>Recovery Time</a:t>
-            </a:r>
-          </a:p>
-        </p:txBody>
-      </p:sp>
-      <p:sp>
-        <p:nvSpPr>
-          <p:cNvPr id="22" name="Rounded Rectangle 21"/>
+                  <a:srgbClr val="E74C3C"/>
+                </a:solidFill>
+                <a:latin typeface="Calibri"/>
+              </a:defRPr>
+            </a:pPr>
+            <a:r>
+              <a:t>Cross-pod variance → leakage</a:t>
+            </a:r>
+          </a:p>
+        </p:txBody>
+      </p:sp>
+      <p:sp>
+        <p:nvSpPr>
+          <p:cNvPr id="33" name="TextBox 32"/>
+          <p:cNvSpPr txBox="1"/>
+          <p:nvPr/>
+        </p:nvSpPr>
+        <p:spPr>
+          <a:xfrm>
+            <a:off x="274320" y="5257800"/>
+            <a:ext cx="2148839" cy="1005839"/>
+          </a:xfrm>
+          <a:prstGeom prst="rect">
+            <a:avLst/>
+          </a:prstGeom>
+          <a:noFill/>
+        </p:spPr>
+        <p:txBody>
+          <a:bodyPr wrap="square">
+            <a:spAutoFit/>
+          </a:bodyPr>
+          <a:lstStyle/>
+          <a:p>
+            <a:pPr algn="l">
+              <a:defRPr sz="900" b="0">
+                <a:solidFill>
+                  <a:srgbClr val="BDBDBD"/>
+                </a:solidFill>
+                <a:latin typeface="Calibri"/>
+              </a:defRPr>
+            </a:pPr>
+            <a:r>
+              <a:t>Pre-chaos cross-node stddev predicts whether a strategy lands in the containment cluster (3-17% conntrack drop) or the leakage cluster (30-49% drop).</a:t>
+            </a:r>
+          </a:p>
+        </p:txBody>
+      </p:sp>
+      <p:sp>
+        <p:nvSpPr>
+          <p:cNvPr id="34" name="Rounded Rectangle 33"/>
           <p:cNvSpPr/>
           <p:nvPr/>
         </p:nvSpPr>
         <p:spPr>
           <a:xfrm>
-            <a:off x="4846320" y="6355080"/>
-            <a:ext cx="1920240" cy="320040"/>
+            <a:off x="2560320" y="4480560"/>
+            <a:ext cx="2331720" cy="1874519"/>
           </a:xfrm>
           <a:prstGeom prst="roundRect">
             <a:avLst/>
           </a:prstGeom>
           <a:solidFill>
-            <a:srgbClr val="2ECC71"/>
+            <a:srgbClr val="121222"/>
           </a:solidFill>
-          <a:ln>
-            <a:noFill/>
+          <a:ln w="25400">
+            <a:solidFill>
+              <a:srgbClr val="E74C3C"/>
+            </a:solidFill>
           </a:ln>
         </p:spPr>
         <p:style>
@@ -10008,39 +10796,29 @@
           </a:fontRef>
         </p:style>
         <p:txBody>
-          <a:bodyPr rtlCol="0" anchor="ctr" wrap="square" lIns="50800" rIns="50800" tIns="25400" bIns="25400"/>
-          <a:lstStyle/>
-          <a:p>
-            <a:pPr algn="ctr">
-              <a:defRPr sz="1100" b="1">
-                <a:solidFill>
-                  <a:srgbClr val="FFFFFF"/>
-                </a:solidFill>
-                <a:latin typeface="Calibri"/>
-              </a:defRPr>
-            </a:pPr>
-            <a:r>
-              <a:t>Inter-Service Latency</a:t>
-            </a:r>
-          </a:p>
-        </p:txBody>
-      </p:sp>
-      <p:sp>
-        <p:nvSpPr>
-          <p:cNvPr id="23" name="Rounded Rectangle 22"/>
+          <a:bodyPr rtlCol="0" anchor="ctr"/>
+          <a:lstStyle/>
+          <a:p>
+            <a:pPr algn="ctr"/>
+          </a:p>
+        </p:txBody>
+      </p:sp>
+      <p:sp>
+        <p:nvSpPr>
+          <p:cNvPr id="35" name="Rounded Rectangle 34"/>
           <p:cNvSpPr/>
           <p:nvPr/>
         </p:nvSpPr>
         <p:spPr>
           <a:xfrm>
-            <a:off x="6949440" y="6355080"/>
-            <a:ext cx="1920240" cy="320040"/>
+            <a:off x="2560320" y="4480560"/>
+            <a:ext cx="2331720" cy="320040"/>
           </a:xfrm>
           <a:prstGeom prst="roundRect">
             <a:avLst/>
           </a:prstGeom>
           <a:solidFill>
-            <a:srgbClr val="1ABC9C"/>
+            <a:srgbClr val="E74C3C"/>
           </a:solidFill>
           <a:ln>
             <a:noFill/>
@@ -10065,38 +10843,112 @@
           <a:lstStyle/>
           <a:p>
             <a:pPr algn="ctr">
+              <a:defRPr sz="1300" b="1">
+                <a:solidFill>
+                  <a:srgbClr val="FFFFFF"/>
+                </a:solidFill>
+                <a:latin typeface="Calibri"/>
+              </a:defRPr>
+            </a:pPr>
+            <a:r>
+              <a:t>H7</a:t>
+            </a:r>
+          </a:p>
+        </p:txBody>
+      </p:sp>
+      <p:sp>
+        <p:nvSpPr>
+          <p:cNvPr id="36" name="TextBox 35"/>
+          <p:cNvSpPr txBox="1"/>
+          <p:nvPr/>
+        </p:nvSpPr>
+        <p:spPr>
+          <a:xfrm>
+            <a:off x="2651760" y="4846320"/>
+            <a:ext cx="2148839" cy="365760"/>
+          </a:xfrm>
+          <a:prstGeom prst="rect">
+            <a:avLst/>
+          </a:prstGeom>
+          <a:noFill/>
+        </p:spPr>
+        <p:txBody>
+          <a:bodyPr wrap="square">
+            <a:spAutoFit/>
+          </a:bodyPr>
+          <a:lstStyle/>
+          <a:p>
+            <a:pPr algn="l">
               <a:defRPr sz="1100" b="1">
                 <a:solidFill>
-                  <a:srgbClr val="FFFFFF"/>
-                </a:solidFill>
-                <a:latin typeface="Calibri"/>
-              </a:defRPr>
-            </a:pPr>
-            <a:r>
-              <a:t>Resource Utilization</a:t>
-            </a:r>
-          </a:p>
-        </p:txBody>
-      </p:sp>
-      <p:sp>
-        <p:nvSpPr>
-          <p:cNvPr id="24" name="Rounded Rectangle 23"/>
+                  <a:srgbClr val="E74C3C"/>
+                </a:solidFill>
+                <a:latin typeface="Calibri"/>
+              </a:defRPr>
+            </a:pPr>
+            <a:r>
+              <a:t>CPU throttling refutes contention model</a:t>
+            </a:r>
+          </a:p>
+        </p:txBody>
+      </p:sp>
+      <p:sp>
+        <p:nvSpPr>
+          <p:cNvPr id="37" name="TextBox 36"/>
+          <p:cNvSpPr txBox="1"/>
+          <p:nvPr/>
+        </p:nvSpPr>
+        <p:spPr>
+          <a:xfrm>
+            <a:off x="2651760" y="5257800"/>
+            <a:ext cx="2148839" cy="1005839"/>
+          </a:xfrm>
+          <a:prstGeom prst="rect">
+            <a:avLst/>
+          </a:prstGeom>
+          <a:noFill/>
+        </p:spPr>
+        <p:txBody>
+          <a:bodyPr wrap="square">
+            <a:spAutoFit/>
+          </a:bodyPr>
+          <a:lstStyle/>
+          <a:p>
+            <a:pPr algn="l">
+              <a:defRPr sz="900" b="0">
+                <a:solidFill>
+                  <a:srgbClr val="BDBDBD"/>
+                </a:solidFill>
+                <a:latin typeface="Calibri"/>
+              </a:defRPr>
+            </a:pPr>
+            <a:r>
+              <a:t>Under pod-delete, colocate throttles less (0.89) than spread (1.52) — opposite of Bubble-Up's contention prediction. Mars 2011 doesn't fit churn-based faults.</a:t>
+            </a:r>
+          </a:p>
+        </p:txBody>
+      </p:sp>
+      <p:sp>
+        <p:nvSpPr>
+          <p:cNvPr id="38" name="Rounded Rectangle 37"/>
           <p:cNvSpPr/>
           <p:nvPr/>
         </p:nvSpPr>
         <p:spPr>
           <a:xfrm>
-            <a:off x="9052559" y="6355080"/>
-            <a:ext cx="1920240" cy="320040"/>
+            <a:off x="4937759" y="4480560"/>
+            <a:ext cx="2331720" cy="1874519"/>
           </a:xfrm>
           <a:prstGeom prst="roundRect">
             <a:avLst/>
           </a:prstGeom>
           <a:solidFill>
-            <a:srgbClr val="F39C12"/>
+            <a:srgbClr val="121222"/>
           </a:solidFill>
-          <a:ln>
-            <a:noFill/>
+          <a:ln w="25400">
+            <a:solidFill>
+              <a:srgbClr val="E74C3C"/>
+            </a:solidFill>
           </a:ln>
         </p:spPr>
         <p:style>
@@ -10114,19 +10966,510 @@
           </a:fontRef>
         </p:style>
         <p:txBody>
+          <a:bodyPr rtlCol="0" anchor="ctr"/>
+          <a:lstStyle/>
+          <a:p>
+            <a:pPr algn="ctr"/>
+          </a:p>
+        </p:txBody>
+      </p:sp>
+      <p:sp>
+        <p:nvSpPr>
+          <p:cNvPr id="39" name="Rounded Rectangle 38"/>
+          <p:cNvSpPr/>
+          <p:nvPr/>
+        </p:nvSpPr>
+        <p:spPr>
+          <a:xfrm>
+            <a:off x="4937759" y="4480560"/>
+            <a:ext cx="2331720" cy="320040"/>
+          </a:xfrm>
+          <a:prstGeom prst="roundRect">
+            <a:avLst/>
+          </a:prstGeom>
+          <a:solidFill>
+            <a:srgbClr val="E74C3C"/>
+          </a:solidFill>
+          <a:ln>
+            <a:noFill/>
+          </a:ln>
+        </p:spPr>
+        <p:style>
+          <a:lnRef idx="1">
+            <a:schemeClr val="accent1"/>
+          </a:lnRef>
+          <a:fillRef idx="3">
+            <a:schemeClr val="accent1"/>
+          </a:fillRef>
+          <a:effectRef idx="2">
+            <a:schemeClr val="accent1"/>
+          </a:effectRef>
+          <a:fontRef idx="minor">
+            <a:schemeClr val="lt1"/>
+          </a:fontRef>
+        </p:style>
+        <p:txBody>
           <a:bodyPr rtlCol="0" anchor="ctr" wrap="square" lIns="50800" rIns="50800" tIns="25400" bIns="25400"/>
           <a:lstStyle/>
           <a:p>
             <a:pPr algn="ctr">
+              <a:defRPr sz="1300" b="1">
+                <a:solidFill>
+                  <a:srgbClr val="FFFFFF"/>
+                </a:solidFill>
+                <a:latin typeface="Calibri"/>
+              </a:defRPr>
+            </a:pPr>
+            <a:r>
+              <a:t>H8</a:t>
+            </a:r>
+          </a:p>
+        </p:txBody>
+      </p:sp>
+      <p:sp>
+        <p:nvSpPr>
+          <p:cNvPr id="40" name="TextBox 39"/>
+          <p:cNvSpPr txBox="1"/>
+          <p:nvPr/>
+        </p:nvSpPr>
+        <p:spPr>
+          <a:xfrm>
+            <a:off x="5029199" y="4846320"/>
+            <a:ext cx="2148839" cy="365760"/>
+          </a:xfrm>
+          <a:prstGeom prst="rect">
+            <a:avLst/>
+          </a:prstGeom>
+          <a:noFill/>
+        </p:spPr>
+        <p:txBody>
+          <a:bodyPr wrap="square">
+            <a:spAutoFit/>
+          </a:bodyPr>
+          <a:lstStyle/>
+          <a:p>
+            <a:pPr algn="l">
               <a:defRPr sz="1100" b="1">
                 <a:solidFill>
+                  <a:srgbClr val="E74C3C"/>
+                </a:solidFill>
+                <a:latin typeface="Calibri"/>
+              </a:defRPr>
+            </a:pPr>
+            <a:r>
+              <a:t>SLO + conntrack signals leakage</a:t>
+            </a:r>
+          </a:p>
+        </p:txBody>
+      </p:sp>
+      <p:sp>
+        <p:nvSpPr>
+          <p:cNvPr id="41" name="TextBox 40"/>
+          <p:cNvSpPr txBox="1"/>
+          <p:nvPr/>
+        </p:nvSpPr>
+        <p:spPr>
+          <a:xfrm>
+            <a:off x="5029199" y="5257800"/>
+            <a:ext cx="2148839" cy="1005839"/>
+          </a:xfrm>
+          <a:prstGeom prst="rect">
+            <a:avLst/>
+          </a:prstGeom>
+          <a:noFill/>
+        </p:spPr>
+        <p:txBody>
+          <a:bodyPr wrap="square">
+            <a:spAutoFit/>
+          </a:bodyPr>
+          <a:lstStyle/>
+          <a:p>
+            <a:pPr algn="l">
+              <a:defRPr sz="900" b="0">
+                <a:solidFill>
+                  <a:srgbClr val="BDBDBD"/>
+                </a:solidFill>
+                <a:latin typeface="Calibri"/>
+              </a:defRPr>
+            </a:pPr>
+            <a:r>
+              <a:t>Conntrack flushing during chaos correlates with leakage: spread 49%, dep-aware 3%. The K8s Network Programming Latency SLO measures the churn mechanism directly.</a:t>
+            </a:r>
+          </a:p>
+        </p:txBody>
+      </p:sp>
+      <p:sp>
+        <p:nvSpPr>
+          <p:cNvPr id="42" name="Rounded Rectangle 41"/>
+          <p:cNvSpPr/>
+          <p:nvPr/>
+        </p:nvSpPr>
+        <p:spPr>
+          <a:xfrm>
+            <a:off x="7315199" y="4480560"/>
+            <a:ext cx="2331720" cy="1874519"/>
+          </a:xfrm>
+          <a:prstGeom prst="roundRect">
+            <a:avLst/>
+          </a:prstGeom>
+          <a:solidFill>
+            <a:srgbClr val="121222"/>
+          </a:solidFill>
+          <a:ln w="25400">
+            <a:solidFill>
+              <a:srgbClr val="9B59B6"/>
+            </a:solidFill>
+          </a:ln>
+        </p:spPr>
+        <p:style>
+          <a:lnRef idx="1">
+            <a:schemeClr val="accent1"/>
+          </a:lnRef>
+          <a:fillRef idx="3">
+            <a:schemeClr val="accent1"/>
+          </a:fillRef>
+          <a:effectRef idx="2">
+            <a:schemeClr val="accent1"/>
+          </a:effectRef>
+          <a:fontRef idx="minor">
+            <a:schemeClr val="lt1"/>
+          </a:fontRef>
+        </p:style>
+        <p:txBody>
+          <a:bodyPr rtlCol="0" anchor="ctr"/>
+          <a:lstStyle/>
+          <a:p>
+            <a:pPr algn="ctr"/>
+          </a:p>
+        </p:txBody>
+      </p:sp>
+      <p:sp>
+        <p:nvSpPr>
+          <p:cNvPr id="43" name="Rounded Rectangle 42"/>
+          <p:cNvSpPr/>
+          <p:nvPr/>
+        </p:nvSpPr>
+        <p:spPr>
+          <a:xfrm>
+            <a:off x="7315199" y="4480560"/>
+            <a:ext cx="2331720" cy="320040"/>
+          </a:xfrm>
+          <a:prstGeom prst="roundRect">
+            <a:avLst/>
+          </a:prstGeom>
+          <a:solidFill>
+            <a:srgbClr val="9B59B6"/>
+          </a:solidFill>
+          <a:ln>
+            <a:noFill/>
+          </a:ln>
+        </p:spPr>
+        <p:style>
+          <a:lnRef idx="1">
+            <a:schemeClr val="accent1"/>
+          </a:lnRef>
+          <a:fillRef idx="3">
+            <a:schemeClr val="accent1"/>
+          </a:fillRef>
+          <a:effectRef idx="2">
+            <a:schemeClr val="accent1"/>
+          </a:effectRef>
+          <a:fontRef idx="minor">
+            <a:schemeClr val="lt1"/>
+          </a:fontRef>
+        </p:style>
+        <p:txBody>
+          <a:bodyPr rtlCol="0" anchor="ctr" wrap="square" lIns="50800" rIns="50800" tIns="25400" bIns="25400"/>
+          <a:lstStyle/>
+          <a:p>
+            <a:pPr algn="ctr">
+              <a:defRPr sz="1300" b="1">
+                <a:solidFill>
                   <a:srgbClr val="FFFFFF"/>
                 </a:solidFill>
                 <a:latin typeface="Calibri"/>
               </a:defRPr>
             </a:pPr>
             <a:r>
-              <a:t>I/O Throughput</a:t>
+              <a:t>H9</a:t>
+            </a:r>
+          </a:p>
+        </p:txBody>
+      </p:sp>
+      <p:sp>
+        <p:nvSpPr>
+          <p:cNvPr id="44" name="TextBox 43"/>
+          <p:cNvSpPr txBox="1"/>
+          <p:nvPr/>
+        </p:nvSpPr>
+        <p:spPr>
+          <a:xfrm>
+            <a:off x="7406640" y="4846320"/>
+            <a:ext cx="2148839" cy="365760"/>
+          </a:xfrm>
+          <a:prstGeom prst="rect">
+            <a:avLst/>
+          </a:prstGeom>
+          <a:noFill/>
+        </p:spPr>
+        <p:txBody>
+          <a:bodyPr wrap="square">
+            <a:spAutoFit/>
+          </a:bodyPr>
+          <a:lstStyle/>
+          <a:p>
+            <a:pPr algn="l">
+              <a:defRPr sz="1100" b="1">
+                <a:solidFill>
+                  <a:srgbClr val="9B59B6"/>
+                </a:solidFill>
+                <a:latin typeface="Calibri"/>
+              </a:defRPr>
+            </a:pPr>
+            <a:r>
+              <a:t>Scheduling latency dominates recovery</a:t>
+            </a:r>
+          </a:p>
+        </p:txBody>
+      </p:sp>
+      <p:sp>
+        <p:nvSpPr>
+          <p:cNvPr id="45" name="TextBox 44"/>
+          <p:cNvSpPr txBox="1"/>
+          <p:nvPr/>
+        </p:nvSpPr>
+        <p:spPr>
+          <a:xfrm>
+            <a:off x="7406640" y="5257800"/>
+            <a:ext cx="2148839" cy="1005839"/>
+          </a:xfrm>
+          <a:prstGeom prst="rect">
+            <a:avLst/>
+          </a:prstGeom>
+          <a:noFill/>
+        </p:spPr>
+        <p:txBody>
+          <a:bodyPr wrap="square">
+            <a:spAutoFit/>
+          </a:bodyPr>
+          <a:lstStyle/>
+          <a:p>
+            <a:pPr algn="l">
+              <a:defRPr sz="900" b="0">
+                <a:solidFill>
+                  <a:srgbClr val="BDBDBD"/>
+                </a:solidFill>
+                <a:latin typeface="Calibri"/>
+              </a:defRPr>
+            </a:pPr>
+            <a:r>
+              <a:t>Recovery time = (deletion→scheduled) + (scheduled→ready). Placement affects only the first term; the second is application-bound and ~constant across strategies.</a:t>
+            </a:r>
+          </a:p>
+        </p:txBody>
+      </p:sp>
+      <p:sp>
+        <p:nvSpPr>
+          <p:cNvPr id="46" name="Rounded Rectangle 45"/>
+          <p:cNvSpPr/>
+          <p:nvPr/>
+        </p:nvSpPr>
+        <p:spPr>
+          <a:xfrm>
+            <a:off x="9692639" y="4480560"/>
+            <a:ext cx="2331720" cy="1874519"/>
+          </a:xfrm>
+          <a:prstGeom prst="roundRect">
+            <a:avLst/>
+          </a:prstGeom>
+          <a:solidFill>
+            <a:srgbClr val="121222"/>
+          </a:solidFill>
+          <a:ln w="25400">
+            <a:solidFill>
+              <a:srgbClr val="9B59B6"/>
+            </a:solidFill>
+          </a:ln>
+        </p:spPr>
+        <p:style>
+          <a:lnRef idx="1">
+            <a:schemeClr val="accent1"/>
+          </a:lnRef>
+          <a:fillRef idx="3">
+            <a:schemeClr val="accent1"/>
+          </a:fillRef>
+          <a:effectRef idx="2">
+            <a:schemeClr val="accent1"/>
+          </a:effectRef>
+          <a:fontRef idx="minor">
+            <a:schemeClr val="lt1"/>
+          </a:fontRef>
+        </p:style>
+        <p:txBody>
+          <a:bodyPr rtlCol="0" anchor="ctr"/>
+          <a:lstStyle/>
+          <a:p>
+            <a:pPr algn="ctr"/>
+          </a:p>
+        </p:txBody>
+      </p:sp>
+      <p:sp>
+        <p:nvSpPr>
+          <p:cNvPr id="47" name="Rounded Rectangle 46"/>
+          <p:cNvSpPr/>
+          <p:nvPr/>
+        </p:nvSpPr>
+        <p:spPr>
+          <a:xfrm>
+            <a:off x="9692639" y="4480560"/>
+            <a:ext cx="2331720" cy="320040"/>
+          </a:xfrm>
+          <a:prstGeom prst="roundRect">
+            <a:avLst/>
+          </a:prstGeom>
+          <a:solidFill>
+            <a:srgbClr val="9B59B6"/>
+          </a:solidFill>
+          <a:ln>
+            <a:noFill/>
+          </a:ln>
+        </p:spPr>
+        <p:style>
+          <a:lnRef idx="1">
+            <a:schemeClr val="accent1"/>
+          </a:lnRef>
+          <a:fillRef idx="3">
+            <a:schemeClr val="accent1"/>
+          </a:fillRef>
+          <a:effectRef idx="2">
+            <a:schemeClr val="accent1"/>
+          </a:effectRef>
+          <a:fontRef idx="minor">
+            <a:schemeClr val="lt1"/>
+          </a:fontRef>
+        </p:style>
+        <p:txBody>
+          <a:bodyPr rtlCol="0" anchor="ctr" wrap="square" lIns="50800" rIns="50800" tIns="25400" bIns="25400"/>
+          <a:lstStyle/>
+          <a:p>
+            <a:pPr algn="ctr">
+              <a:defRPr sz="1300" b="1">
+                <a:solidFill>
+                  <a:srgbClr val="FFFFFF"/>
+                </a:solidFill>
+                <a:latin typeface="Calibri"/>
+              </a:defRPr>
+            </a:pPr>
+            <a:r>
+              <a:t>H10</a:t>
+            </a:r>
+          </a:p>
+        </p:txBody>
+      </p:sp>
+      <p:sp>
+        <p:nvSpPr>
+          <p:cNvPr id="48" name="TextBox 47"/>
+          <p:cNvSpPr txBox="1"/>
+          <p:nvPr/>
+        </p:nvSpPr>
+        <p:spPr>
+          <a:xfrm>
+            <a:off x="9784079" y="4846320"/>
+            <a:ext cx="2148839" cy="365760"/>
+          </a:xfrm>
+          <a:prstGeom prst="rect">
+            <a:avLst/>
+          </a:prstGeom>
+          <a:noFill/>
+        </p:spPr>
+        <p:txBody>
+          <a:bodyPr wrap="square">
+            <a:spAutoFit/>
+          </a:bodyPr>
+          <a:lstStyle/>
+          <a:p>
+            <a:pPr algn="l">
+              <a:defRPr sz="1100" b="1">
+                <a:solidFill>
+                  <a:srgbClr val="9B59B6"/>
+                </a:solidFill>
+                <a:latin typeface="Calibri"/>
+              </a:defRPr>
+            </a:pPr>
+            <a:r>
+              <a:t>Post-chaos asymmetry as fingerprint</a:t>
+            </a:r>
+          </a:p>
+        </p:txBody>
+      </p:sp>
+      <p:sp>
+        <p:nvSpPr>
+          <p:cNvPr id="49" name="TextBox 48"/>
+          <p:cNvSpPr txBox="1"/>
+          <p:nvPr/>
+        </p:nvSpPr>
+        <p:spPr>
+          <a:xfrm>
+            <a:off x="9784079" y="5257800"/>
+            <a:ext cx="2148839" cy="1005839"/>
+          </a:xfrm>
+          <a:prstGeom prst="rect">
+            <a:avLst/>
+          </a:prstGeom>
+          <a:noFill/>
+        </p:spPr>
+        <p:txBody>
+          <a:bodyPr wrap="square">
+            <a:spAutoFit/>
+          </a:bodyPr>
+          <a:lstStyle/>
+          <a:p>
+            <a:pPr algn="l">
+              <a:defRPr sz="900" b="0">
+                <a:solidFill>
+                  <a:srgbClr val="BDBDBD"/>
+                </a:solidFill>
+                <a:latin typeface="Calibri"/>
+              </a:defRPr>
+            </a:pPr>
+            <a:r>
+              <a:t>Post-chaos metrics overshoot, undershoot, or stabilise per strategy. Redis throughput varies 50-450% post-chaos; the asymmetry pattern is itself a placement fingerprint.</a:t>
+            </a:r>
+          </a:p>
+        </p:txBody>
+      </p:sp>
+      <p:sp>
+        <p:nvSpPr>
+          <p:cNvPr id="50" name="TextBox 49"/>
+          <p:cNvSpPr txBox="1"/>
+          <p:nvPr/>
+        </p:nvSpPr>
+        <p:spPr>
+          <a:xfrm>
+            <a:off x="548640" y="6446520"/>
+            <a:ext cx="11064240" cy="320040"/>
+          </a:xfrm>
+          <a:prstGeom prst="rect">
+            <a:avLst/>
+          </a:prstGeom>
+          <a:noFill/>
+        </p:spPr>
+        <p:txBody>
+          <a:bodyPr wrap="square">
+            <a:spAutoFit/>
+          </a:bodyPr>
+          <a:lstStyle/>
+          <a:p>
+            <a:pPr algn="ctr">
+              <a:defRPr sz="1000" b="0">
+                <a:solidFill>
+                  <a:srgbClr val="9090A0"/>
+                </a:solidFill>
+                <a:latin typeface="Calibri"/>
+              </a:defRPr>
+            </a:pPr>
+            <a:r>
+              <a:t>Each hypothesis is testable from ChaosProbe-collected metrics; the data column reports current evidence.</a:t>
             </a:r>
           </a:p>
         </p:txBody>
@@ -10400,11 +11743,11 @@
               </a:defRPr>
             </a:pPr>
             <a:r>
-              <a:t>• Sparrow (Ousterhout et al., 2013)</a:t>
+              <a:t>• DeathStarBench (Gan et al., 2019)</a:t>
             </a:r>
             <a:br/>
             <a:r>
-              <a:t>  Decentralized random scheduling</a:t>
+              <a:t>  Dependency-graph-aware placement</a:t>
             </a:r>
           </a:p>
           <a:p>
@@ -10423,11 +11766,11 @@
               </a:defRPr>
             </a:pPr>
             <a:r>
-              <a:t>• DeathStarBench (Gan et al., 2019)</a:t>
+              <a:t>• Mars (2011); Delimitrou (2014)</a:t>
             </a:r>
             <a:br/>
             <a:r>
-              <a:t>  Dependency-graph-aware placement</a:t>
+              <a:t>  Contention-aware co-scheduling</a:t>
             </a:r>
           </a:p>
           <a:p>
@@ -10446,11 +11789,11 @@
               </a:defRPr>
             </a:pPr>
             <a:r>
-              <a:t>• Mars (2011); Delimitrou (2014)</a:t>
+              <a:t>• Liu et al. (arXiv 2507.16109, 2025)</a:t>
             </a:r>
             <a:br/>
             <a:r>
-              <a:t>  Contention-aware co-scheduling</a:t>
+              <a:t>  Cloud-edge placement under churn</a:t>
             </a:r>
           </a:p>
         </p:txBody>
@@ -10642,11 +11985,11 @@
               </a:defRPr>
             </a:pPr>
             <a:r>
-              <a:t>• Gremlin — fault injection SaaS</a:t>
+              <a:t>• Mutiny! K8s churn injection</a:t>
             </a:r>
             <a:br/>
             <a:r>
-              <a:t>  Commercial chaos platform</a:t>
+              <a:t>  (DSN 2024) — closest peer</a:t>
             </a:r>
           </a:p>
           <a:p>
@@ -16109,7 +17452,7 @@
             </a:r>
             <a:br/>
             <a:r>
-              <a:t>2 GiB</a:t>
+              <a:t>4 GiB</a:t>
             </a:r>
           </a:p>
         </p:txBody>
@@ -16230,7 +17573,7 @@
             </a:r>
             <a:br/>
             <a:r>
-              <a:t>2 GiB</a:t>
+              <a:t>4 GiB</a:t>
             </a:r>
           </a:p>
         </p:txBody>
@@ -16508,7 +17851,7 @@
               </a:defRPr>
             </a:pPr>
             <a:r>
-              <a:t>K8s v1.28.6 • Calico CNI • containerd 1.7.11 • Total: 10 vCPU, 14 GiB</a:t>
+              <a:t>K8s v1.28.6 • Calico CNI • containerd 1.7.11 • Total: 10 vCPU, 18 GiB</a:t>
             </a:r>
           </a:p>
         </p:txBody>
@@ -22673,30 +24016,75 @@
           </a:p>
         </p:txBody>
       </p:sp>
-      <p:pic>
-        <p:nvPicPr>
-          <p:cNvPr id="4" name="Picture 3" descr="resilience_scores.png"/>
-          <p:cNvPicPr>
-            <a:picLocks noChangeAspect="1"/>
-          </p:cNvPicPr>
-          <p:nvPr/>
-        </p:nvPicPr>
-        <p:blipFill>
-          <a:blip r:embed="rId2"/>
-          <a:stretch>
-            <a:fillRect/>
-          </a:stretch>
-        </p:blipFill>
+      <p:sp>
+        <p:nvSpPr>
+          <p:cNvPr id="4" name="Rounded Rectangle 3"/>
+          <p:cNvSpPr/>
+          <p:nvPr/>
+        </p:nvSpPr>
         <p:spPr>
           <a:xfrm>
             <a:off x="457200" y="1280160"/>
             <a:ext cx="6858000" cy="4114800"/>
           </a:xfrm>
-          <a:prstGeom prst="rect">
-            <a:avLst/>
-          </a:prstGeom>
-        </p:spPr>
-      </p:pic>
+          <a:prstGeom prst="roundRect">
+            <a:avLst/>
+          </a:prstGeom>
+          <a:solidFill>
+            <a:srgbClr val="121222"/>
+          </a:solidFill>
+          <a:ln w="12700">
+            <a:solidFill>
+              <a:srgbClr val="9090A0"/>
+            </a:solidFill>
+          </a:ln>
+        </p:spPr>
+        <p:style>
+          <a:lnRef idx="1">
+            <a:schemeClr val="accent1"/>
+          </a:lnRef>
+          <a:fillRef idx="3">
+            <a:schemeClr val="accent1"/>
+          </a:fillRef>
+          <a:effectRef idx="2">
+            <a:schemeClr val="accent1"/>
+          </a:effectRef>
+          <a:fontRef idx="minor">
+            <a:schemeClr val="lt1"/>
+          </a:fontRef>
+        </p:style>
+        <p:txBody>
+          <a:bodyPr rtlCol="0" anchor="ctr" wrap="square" lIns="50800" rIns="50800" tIns="25400" bIns="25400"/>
+          <a:lstStyle/>
+          <a:p>
+            <a:pPr algn="ctr">
+              <a:defRPr sz="1100" b="0">
+                <a:solidFill>
+                  <a:srgbClr val="9090A0"/>
+                </a:solidFill>
+                <a:latin typeface="Calibri"/>
+              </a:defRPr>
+            </a:pPr>
+            <a:r>
+              <a:t>[Resilience Scores by Strategy]</a:t>
+            </a:r>
+            <a:br/>
+            <a:br/>
+            <a:r>
+              <a:t>Bar chart showing resilience score (0–100%)</a:t>
+            </a:r>
+            <a:br/>
+            <a:r>
+              <a:t>per placement strategy.</a:t>
+            </a:r>
+            <a:br/>
+            <a:br/>
+            <a:r>
+              <a:t>Generated by: chaosprobe visualize</a:t>
+            </a:r>
+          </a:p>
+        </p:txBody>
+      </p:sp>
       <p:sp>
         <p:nvSpPr>
           <p:cNvPr id="5" name="Rounded Rectangle 4"/>

--- a/ChaosProbe_Presentation.pptx
+++ b/ChaosProbe_Presentation.pptx
@@ -3406,75 +3406,30 @@
           </a:p>
         </p:txBody>
       </p:sp>
-      <p:sp>
-        <p:nvSpPr>
-          <p:cNvPr id="4" name="Rounded Rectangle 3"/>
-          <p:cNvSpPr/>
-          <p:nvPr/>
-        </p:nvSpPr>
+      <p:pic>
+        <p:nvPicPr>
+          <p:cNvPr id="4" name="Picture 3" descr="recovery_times.png"/>
+          <p:cNvPicPr>
+            <a:picLocks noChangeAspect="1"/>
+          </p:cNvPicPr>
+          <p:nvPr/>
+        </p:nvPicPr>
+        <p:blipFill>
+          <a:blip r:embed="rId2"/>
+          <a:stretch>
+            <a:fillRect/>
+          </a:stretch>
+        </p:blipFill>
         <p:spPr>
           <a:xfrm>
             <a:off x="274320" y="1280160"/>
             <a:ext cx="5669280" cy="3200400"/>
           </a:xfrm>
-          <a:prstGeom prst="roundRect">
-            <a:avLst/>
-          </a:prstGeom>
-          <a:solidFill>
-            <a:srgbClr val="121222"/>
-          </a:solidFill>
-          <a:ln w="12700">
-            <a:solidFill>
-              <a:srgbClr val="9090A0"/>
-            </a:solidFill>
-          </a:ln>
-        </p:spPr>
-        <p:style>
-          <a:lnRef idx="1">
-            <a:schemeClr val="accent1"/>
-          </a:lnRef>
-          <a:fillRef idx="3">
-            <a:schemeClr val="accent1"/>
-          </a:fillRef>
-          <a:effectRef idx="2">
-            <a:schemeClr val="accent1"/>
-          </a:effectRef>
-          <a:fontRef idx="minor">
-            <a:schemeClr val="lt1"/>
-          </a:fontRef>
-        </p:style>
-        <p:txBody>
-          <a:bodyPr rtlCol="0" anchor="ctr" wrap="square" lIns="50800" rIns="50800" tIns="25400" bIns="25400"/>
-          <a:lstStyle/>
-          <a:p>
-            <a:pPr algn="ctr">
-              <a:defRPr sz="1100" b="0">
-                <a:solidFill>
-                  <a:srgbClr val="9090A0"/>
-                </a:solidFill>
-                <a:latin typeface="Calibri"/>
-              </a:defRPr>
-            </a:pPr>
-            <a:r>
-              <a:t>[Recovery Times by Strategy]</a:t>
-            </a:r>
-            <a:br/>
-            <a:br/>
-            <a:r>
-              <a:t>Box plot: pod deletion → ready (ms)</a:t>
-            </a:r>
-            <a:br/>
-            <a:r>
-              <a:t>per placement strategy.</a:t>
-            </a:r>
-            <a:br/>
-            <a:br/>
-            <a:r>
-              <a:t>Generated by: chaosprobe visualize</a:t>
-            </a:r>
-          </a:p>
-        </p:txBody>
-      </p:sp>
+          <a:prstGeom prst="rect">
+            <a:avLst/>
+          </a:prstGeom>
+        </p:spPr>
+      </p:pic>
       <p:sp>
         <p:nvSpPr>
           <p:cNvPr id="5" name="TextBox 4"/>
@@ -3511,75 +3466,30 @@
           </a:p>
         </p:txBody>
       </p:sp>
-      <p:sp>
-        <p:nvSpPr>
-          <p:cNvPr id="6" name="Rounded Rectangle 5"/>
-          <p:cNvSpPr/>
-          <p:nvPr/>
-        </p:nvSpPr>
+      <p:pic>
+        <p:nvPicPr>
+          <p:cNvPr id="6" name="Picture 5" descr="latency_degradation.png"/>
+          <p:cNvPicPr>
+            <a:picLocks noChangeAspect="1"/>
+          </p:cNvPicPr>
+          <p:nvPr/>
+        </p:nvPicPr>
+        <p:blipFill>
+          <a:blip r:embed="rId3"/>
+          <a:stretch>
+            <a:fillRect/>
+          </a:stretch>
+        </p:blipFill>
         <p:spPr>
           <a:xfrm>
             <a:off x="6217920" y="1280160"/>
             <a:ext cx="5669280" cy="3200400"/>
           </a:xfrm>
-          <a:prstGeom prst="roundRect">
-            <a:avLst/>
-          </a:prstGeom>
-          <a:solidFill>
-            <a:srgbClr val="121222"/>
-          </a:solidFill>
-          <a:ln w="12700">
-            <a:solidFill>
-              <a:srgbClr val="9090A0"/>
-            </a:solidFill>
-          </a:ln>
-        </p:spPr>
-        <p:style>
-          <a:lnRef idx="1">
-            <a:schemeClr val="accent1"/>
-          </a:lnRef>
-          <a:fillRef idx="3">
-            <a:schemeClr val="accent1"/>
-          </a:fillRef>
-          <a:effectRef idx="2">
-            <a:schemeClr val="accent1"/>
-          </a:effectRef>
-          <a:fontRef idx="minor">
-            <a:schemeClr val="lt1"/>
-          </a:fontRef>
-        </p:style>
-        <p:txBody>
-          <a:bodyPr rtlCol="0" anchor="ctr" wrap="square" lIns="50800" rIns="50800" tIns="25400" bIns="25400"/>
-          <a:lstStyle/>
-          <a:p>
-            <a:pPr algn="ctr">
-              <a:defRPr sz="1100" b="0">
-                <a:solidFill>
-                  <a:srgbClr val="9090A0"/>
-                </a:solidFill>
-                <a:latin typeface="Calibri"/>
-              </a:defRPr>
-            </a:pPr>
-            <a:r>
-              <a:t>[Latency Degradation: Pre vs During Chaos]</a:t>
-            </a:r>
-            <a:br/>
-            <a:br/>
-            <a:r>
-              <a:t>Grouped bar chart: HTTP route latency</a:t>
-            </a:r>
-            <a:br/>
-            <a:r>
-              <a:t>pre-chaos vs during-chaos per strategy.</a:t>
-            </a:r>
-            <a:br/>
-            <a:br/>
-            <a:r>
-              <a:t>Generated by: chaosprobe visualize</a:t>
-            </a:r>
-          </a:p>
-        </p:txBody>
-      </p:sp>
+          <a:prstGeom prst="rect">
+            <a:avLst/>
+          </a:prstGeom>
+        </p:spPr>
+      </p:pic>
       <p:sp>
         <p:nvSpPr>
           <p:cNvPr id="7" name="TextBox 6"/>
@@ -4063,75 +3973,30 @@
           </a:p>
         </p:txBody>
       </p:sp>
-      <p:sp>
-        <p:nvSpPr>
-          <p:cNvPr id="4" name="Rounded Rectangle 3"/>
-          <p:cNvSpPr/>
-          <p:nvPr/>
-        </p:nvSpPr>
+      <p:pic>
+        <p:nvPicPr>
+          <p:cNvPr id="4" name="Picture 3" descr="resource_utilization.png"/>
+          <p:cNvPicPr>
+            <a:picLocks noChangeAspect="1"/>
+          </p:cNvPicPr>
+          <p:nvPr/>
+        </p:nvPicPr>
+        <p:blipFill>
+          <a:blip r:embed="rId2"/>
+          <a:stretch>
+            <a:fillRect/>
+          </a:stretch>
+        </p:blipFill>
         <p:spPr>
           <a:xfrm>
             <a:off x="274320" y="1280160"/>
             <a:ext cx="5669280" cy="3200400"/>
           </a:xfrm>
-          <a:prstGeom prst="roundRect">
-            <a:avLst/>
-          </a:prstGeom>
-          <a:solidFill>
-            <a:srgbClr val="121222"/>
-          </a:solidFill>
-          <a:ln w="12700">
-            <a:solidFill>
-              <a:srgbClr val="9090A0"/>
-            </a:solidFill>
-          </a:ln>
-        </p:spPr>
-        <p:style>
-          <a:lnRef idx="1">
-            <a:schemeClr val="accent1"/>
-          </a:lnRef>
-          <a:fillRef idx="3">
-            <a:schemeClr val="accent1"/>
-          </a:fillRef>
-          <a:effectRef idx="2">
-            <a:schemeClr val="accent1"/>
-          </a:effectRef>
-          <a:fontRef idx="minor">
-            <a:schemeClr val="lt1"/>
-          </a:fontRef>
-        </p:style>
-        <p:txBody>
-          <a:bodyPr rtlCol="0" anchor="ctr" wrap="square" lIns="50800" rIns="50800" tIns="25400" bIns="25400"/>
-          <a:lstStyle/>
-          <a:p>
-            <a:pPr algn="ctr">
-              <a:defRPr sz="1100" b="0">
-                <a:solidFill>
-                  <a:srgbClr val="9090A0"/>
-                </a:solidFill>
-                <a:latin typeface="Calibri"/>
-              </a:defRPr>
-            </a:pPr>
-            <a:r>
-              <a:t>[Resource Utilization (CPU/Memory)]</a:t>
-            </a:r>
-            <a:br/>
-            <a:br/>
-            <a:r>
-              <a:t>Per-strategy CPU and memory utilization</a:t>
-            </a:r>
-            <a:br/>
-            <a:r>
-              <a:t>across experiment phases.</a:t>
-            </a:r>
-            <a:br/>
-            <a:br/>
-            <a:r>
-              <a:t>Generated by: chaosprobe visualize</a:t>
-            </a:r>
-          </a:p>
-        </p:txBody>
-      </p:sp>
+          <a:prstGeom prst="rect">
+            <a:avLst/>
+          </a:prstGeom>
+        </p:spPr>
+      </p:pic>
       <p:sp>
         <p:nvSpPr>
           <p:cNvPr id="5" name="TextBox 4"/>
@@ -4168,75 +4033,30 @@
           </a:p>
         </p:txBody>
       </p:sp>
-      <p:sp>
-        <p:nvSpPr>
-          <p:cNvPr id="6" name="Rounded Rectangle 5"/>
-          <p:cNvSpPr/>
-          <p:nvPr/>
-        </p:nvSpPr>
+      <p:pic>
+        <p:nvPicPr>
+          <p:cNvPr id="6" name="Picture 5" descr="throughput_by_strategy.png"/>
+          <p:cNvPicPr>
+            <a:picLocks noChangeAspect="1"/>
+          </p:cNvPicPr>
+          <p:nvPr/>
+        </p:nvPicPr>
+        <p:blipFill>
+          <a:blip r:embed="rId3"/>
+          <a:stretch>
+            <a:fillRect/>
+          </a:stretch>
+        </p:blipFill>
         <p:spPr>
           <a:xfrm>
             <a:off x="6217920" y="1280160"/>
             <a:ext cx="5669280" cy="3200400"/>
           </a:xfrm>
-          <a:prstGeom prst="roundRect">
-            <a:avLst/>
-          </a:prstGeom>
-          <a:solidFill>
-            <a:srgbClr val="121222"/>
-          </a:solidFill>
-          <a:ln w="12700">
-            <a:solidFill>
-              <a:srgbClr val="9090A0"/>
-            </a:solidFill>
-          </a:ln>
-        </p:spPr>
-        <p:style>
-          <a:lnRef idx="1">
-            <a:schemeClr val="accent1"/>
-          </a:lnRef>
-          <a:fillRef idx="3">
-            <a:schemeClr val="accent1"/>
-          </a:fillRef>
-          <a:effectRef idx="2">
-            <a:schemeClr val="accent1"/>
-          </a:effectRef>
-          <a:fontRef idx="minor">
-            <a:schemeClr val="lt1"/>
-          </a:fontRef>
-        </p:style>
-        <p:txBody>
-          <a:bodyPr rtlCol="0" anchor="ctr" wrap="square" lIns="50800" rIns="50800" tIns="25400" bIns="25400"/>
-          <a:lstStyle/>
-          <a:p>
-            <a:pPr algn="ctr">
-              <a:defRPr sz="1100" b="0">
-                <a:solidFill>
-                  <a:srgbClr val="9090A0"/>
-                </a:solidFill>
-                <a:latin typeface="Calibri"/>
-              </a:defRPr>
-            </a:pPr>
-            <a:r>
-              <a:t>[I/O Throughput by Strategy]</a:t>
-            </a:r>
-            <a:br/>
-            <a:br/>
-            <a:r>
-              <a:t>Redis ops/s and disk R/W bytes/s</a:t>
-            </a:r>
-            <a:br/>
-            <a:r>
-              <a:t>per placement strategy.</a:t>
-            </a:r>
-            <a:br/>
-            <a:br/>
-            <a:r>
-              <a:t>Generated by: chaosprobe visualize</a:t>
-            </a:r>
-          </a:p>
-        </p:txBody>
-      </p:sp>
+          <a:prstGeom prst="rect">
+            <a:avLst/>
+          </a:prstGeom>
+        </p:spPr>
+      </p:pic>
       <p:sp>
         <p:nvSpPr>
           <p:cNvPr id="7" name="TextBox 6"/>
@@ -4716,75 +4536,30 @@
           </a:p>
         </p:txBody>
       </p:sp>
-      <p:sp>
-        <p:nvSpPr>
-          <p:cNvPr id="4" name="Rounded Rectangle 3"/>
-          <p:cNvSpPr/>
-          <p:nvPr/>
-        </p:nvSpPr>
+      <p:pic>
+        <p:nvPicPr>
+          <p:cNvPr id="4" name="Picture 3" descr="strategy_comparison_heatmap.png"/>
+          <p:cNvPicPr>
+            <a:picLocks noChangeAspect="1"/>
+          </p:cNvPicPr>
+          <p:nvPr/>
+        </p:nvPicPr>
+        <p:blipFill>
+          <a:blip r:embed="rId2"/>
+          <a:stretch>
+            <a:fillRect/>
+          </a:stretch>
+        </p:blipFill>
         <p:spPr>
           <a:xfrm>
             <a:off x="274320" y="1280160"/>
             <a:ext cx="5943600" cy="3200400"/>
           </a:xfrm>
-          <a:prstGeom prst="roundRect">
-            <a:avLst/>
-          </a:prstGeom>
-          <a:solidFill>
-            <a:srgbClr val="121222"/>
-          </a:solidFill>
-          <a:ln w="12700">
-            <a:solidFill>
-              <a:srgbClr val="9090A0"/>
-            </a:solidFill>
-          </a:ln>
-        </p:spPr>
-        <p:style>
-          <a:lnRef idx="1">
-            <a:schemeClr val="accent1"/>
-          </a:lnRef>
-          <a:fillRef idx="3">
-            <a:schemeClr val="accent1"/>
-          </a:fillRef>
-          <a:effectRef idx="2">
-            <a:schemeClr val="accent1"/>
-          </a:effectRef>
-          <a:fontRef idx="minor">
-            <a:schemeClr val="lt1"/>
-          </a:fontRef>
-        </p:style>
-        <p:txBody>
-          <a:bodyPr rtlCol="0" anchor="ctr" wrap="square" lIns="50800" rIns="50800" tIns="25400" bIns="25400"/>
-          <a:lstStyle/>
-          <a:p>
-            <a:pPr algn="ctr">
-              <a:defRPr sz="1100" b="0">
-                <a:solidFill>
-                  <a:srgbClr val="9090A0"/>
-                </a:solidFill>
-                <a:latin typeface="Calibri"/>
-              </a:defRPr>
-            </a:pPr>
-            <a:r>
-              <a:t>[Strategy Comparison Heatmap]</a:t>
-            </a:r>
-            <a:br/>
-            <a:br/>
-            <a:r>
-              <a:t>All thesis dimensions normalised to 0-1.</a:t>
-            </a:r>
-            <a:br/>
-            <a:r>
-              <a:t>Green = better, Red = worse.</a:t>
-            </a:r>
-            <a:br/>
-            <a:br/>
-            <a:r>
-              <a:t>Generated by: chaosprobe visualize</a:t>
-            </a:r>
-          </a:p>
-        </p:txBody>
-      </p:sp>
+          <a:prstGeom prst="rect">
+            <a:avLst/>
+          </a:prstGeom>
+        </p:spPr>
+      </p:pic>
       <p:sp>
         <p:nvSpPr>
           <p:cNvPr id="5" name="TextBox 4"/>
@@ -24016,75 +23791,30 @@
           </a:p>
         </p:txBody>
       </p:sp>
-      <p:sp>
-        <p:nvSpPr>
-          <p:cNvPr id="4" name="Rounded Rectangle 3"/>
-          <p:cNvSpPr/>
-          <p:nvPr/>
-        </p:nvSpPr>
+      <p:pic>
+        <p:nvPicPr>
+          <p:cNvPr id="4" name="Picture 3" descr="resilience_scores.png"/>
+          <p:cNvPicPr>
+            <a:picLocks noChangeAspect="1"/>
+          </p:cNvPicPr>
+          <p:nvPr/>
+        </p:nvPicPr>
+        <p:blipFill>
+          <a:blip r:embed="rId2"/>
+          <a:stretch>
+            <a:fillRect/>
+          </a:stretch>
+        </p:blipFill>
         <p:spPr>
           <a:xfrm>
             <a:off x="457200" y="1280160"/>
             <a:ext cx="6858000" cy="4114800"/>
           </a:xfrm>
-          <a:prstGeom prst="roundRect">
-            <a:avLst/>
-          </a:prstGeom>
-          <a:solidFill>
-            <a:srgbClr val="121222"/>
-          </a:solidFill>
-          <a:ln w="12700">
-            <a:solidFill>
-              <a:srgbClr val="9090A0"/>
-            </a:solidFill>
-          </a:ln>
-        </p:spPr>
-        <p:style>
-          <a:lnRef idx="1">
-            <a:schemeClr val="accent1"/>
-          </a:lnRef>
-          <a:fillRef idx="3">
-            <a:schemeClr val="accent1"/>
-          </a:fillRef>
-          <a:effectRef idx="2">
-            <a:schemeClr val="accent1"/>
-          </a:effectRef>
-          <a:fontRef idx="minor">
-            <a:schemeClr val="lt1"/>
-          </a:fontRef>
-        </p:style>
-        <p:txBody>
-          <a:bodyPr rtlCol="0" anchor="ctr" wrap="square" lIns="50800" rIns="50800" tIns="25400" bIns="25400"/>
-          <a:lstStyle/>
-          <a:p>
-            <a:pPr algn="ctr">
-              <a:defRPr sz="1100" b="0">
-                <a:solidFill>
-                  <a:srgbClr val="9090A0"/>
-                </a:solidFill>
-                <a:latin typeface="Calibri"/>
-              </a:defRPr>
-            </a:pPr>
-            <a:r>
-              <a:t>[Resilience Scores by Strategy]</a:t>
-            </a:r>
-            <a:br/>
-            <a:br/>
-            <a:r>
-              <a:t>Bar chart showing resilience score (0–100%)</a:t>
-            </a:r>
-            <a:br/>
-            <a:r>
-              <a:t>per placement strategy.</a:t>
-            </a:r>
-            <a:br/>
-            <a:br/>
-            <a:r>
-              <a:t>Generated by: chaosprobe visualize</a:t>
-            </a:r>
-          </a:p>
-        </p:txBody>
-      </p:sp>
+          <a:prstGeom prst="rect">
+            <a:avLst/>
+          </a:prstGeom>
+        </p:spPr>
+      </p:pic>
       <p:sp>
         <p:nvSpPr>
           <p:cNvPr id="5" name="Rounded Rectangle 4"/>

--- a/ChaosProbe_Presentation.pptx
+++ b/ChaosProbe_Presentation.pptx
@@ -3602,7 +3602,7 @@
               </a:defRPr>
             </a:pPr>
             <a:r>
-              <a:t>Recovery Time Analysis</a:t>
+              <a:t>Recovery is application-bound (H6)</a:t>
             </a:r>
           </a:p>
         </p:txBody>
@@ -3644,11 +3644,11 @@
               </a:defRPr>
             </a:pPr>
             <a:r>
-              <a:t>• Colocate: longest recovery — scheduler contention</a:t>
+              <a:t>• Recovery = deletion→scheduled + scheduled→ready;</a:t>
             </a:r>
             <a:br/>
             <a:r>
-              <a:t>  on the saturated node delays rescheduling</a:t>
+              <a:t>  the app-startup term is 84–96% of the total</a:t>
             </a:r>
           </a:p>
           <a:p>
@@ -3667,11 +3667,11 @@
               </a:defRPr>
             </a:pPr>
             <a:r>
-              <a:t>• Spread: fastest recovery — dedicated node resources</a:t>
+              <a:t>• Placement only touches the 4–16% scheduling term,</a:t>
             </a:r>
             <a:br/>
             <a:r>
-              <a:t>  allow immediate rescheduling</a:t>
+              <a:t>  so it has little leverage over recovery speed</a:t>
             </a:r>
           </a:p>
           <a:p>
@@ -3690,7 +3690,11 @@
               </a:defRPr>
             </a:pPr>
             <a:r>
-              <a:t>• Baseline: 0 recovery cycles (no pods deleted) — control</a:t>
+              <a:t>• Recovery-time rank is noise run-to-run — it does</a:t>
+            </a:r>
+            <a:br/>
+            <a:r>
+              <a:t>  not track the placement story (refutes L3)</a:t>
             </a:r>
           </a:p>
         </p:txBody>
@@ -3771,7 +3775,7 @@
               </a:defRPr>
             </a:pPr>
             <a:r>
-              <a:t>Latency Analysis</a:t>
+              <a:t>The fault signal is in the tail (H5)</a:t>
             </a:r>
           </a:p>
         </p:txBody>
@@ -3813,11 +3817,11 @@
               </a:defRPr>
             </a:pPr>
             <a:r>
-              <a:t>• Colocate: highest degradation — shared CPU, memory,</a:t>
+              <a:t>• Targeted route during chaos: mean 231 ms but</a:t>
             </a:r>
             <a:br/>
             <a:r>
-              <a:t>  and network stack amplify latency during fault</a:t>
+              <a:t>  p95 619 ms and max 3334 ms — tail is 14× the mean</a:t>
             </a:r>
           </a:p>
           <a:p>
@@ -3836,11 +3840,11 @@
               </a:defRPr>
             </a:pPr>
             <a:r>
-              <a:t>• Spread: minimal increase — fault isolation contains</a:t>
+              <a:t>• Routes not depending on the target stay flat at</a:t>
             </a:r>
             <a:br/>
             <a:r>
-              <a:t>  impact to the targeted service's node</a:t>
+              <a:t>  70–110 ms — impact is route-specific, not node-wide</a:t>
             </a:r>
           </a:p>
           <a:p>
@@ -3859,11 +3863,11 @@
               </a:defRPr>
             </a:pPr>
             <a:r>
-              <a:t>• Adversarial: high — resource-heavy hotspot node</a:t>
+              <a:t>• Mean-based SLOs would miss the fault entirely</a:t>
             </a:r>
             <a:br/>
             <a:r>
-              <a:t>  amplifies cross-service contention</a:t>
+              <a:t>  (Dean &amp; Barroso, Tail at Scale)</a:t>
             </a:r>
           </a:p>
         </p:txBody>
@@ -4169,7 +4173,7 @@
               </a:defRPr>
             </a:pPr>
             <a:r>
-              <a:t>Resource Analysis</a:t>
+              <a:t>Throttling inverts the model (H4)</a:t>
             </a:r>
           </a:p>
         </p:txBody>
@@ -4211,11 +4215,11 @@
               </a:defRPr>
             </a:pPr>
             <a:r>
-              <a:t>• Colocate: highest CPU throttling — all services</a:t>
+              <a:t>• Densest placement (colocate) throttles LEAST —</a:t>
             </a:r>
             <a:br/>
             <a:r>
-              <a:t>  compete for shared cores on a single node</a:t>
+              <a:t>  median 1.54 vs default 1.90, spread 1.94</a:t>
             </a:r>
           </a:p>
           <a:p>
@@ -4234,11 +4238,7 @@
               </a:defRPr>
             </a:pPr>
             <a:r>
-              <a:t>• Spread: most stable resource usage — dedicated</a:t>
-            </a:r>
-            <a:br/>
-            <a:r>
-              <a:t>  per-node capacity minimizes contention</a:t>
+              <a:t>• Holds in 11 of 13 runs — reproducible, unlike score</a:t>
             </a:r>
           </a:p>
           <a:p>
@@ -4257,7 +4257,11 @@
               </a:defRPr>
             </a:pPr>
             <a:r>
-              <a:t>• Memory pressure correlates with placement density</a:t>
+              <a:t>• Opposite of Bubble-Up's dense=more-contention; the</a:t>
+            </a:r>
+            <a:br/>
+            <a:r>
+              <a:t>  contention model does not fit a churn fault</a:t>
             </a:r>
           </a:p>
         </p:txBody>
@@ -4338,7 +4342,7 @@
               </a:defRPr>
             </a:pPr>
             <a:r>
-              <a:t>Throughput Analysis</a:t>
+              <a:t>Churn flushes conn-state (H3)</a:t>
             </a:r>
           </a:p>
         </p:txBody>
@@ -4380,11 +4384,11 @@
               </a:defRPr>
             </a:pPr>
             <a:r>
-              <a:t>• Disk I/O: colocate shows degraded throughput due</a:t>
+              <a:t>• Spread flushes 28–52% of node conntrack entries</a:t>
             </a:r>
             <a:br/>
             <a:r>
-              <a:t>  to shared disk bandwidth across all services</a:t>
+              <a:t>  during churn; colocate stays flat (−15% to +3%)</a:t>
             </a:r>
           </a:p>
           <a:p>
@@ -4403,11 +4407,7 @@
               </a:defRPr>
             </a:pPr>
             <a:r>
-              <a:t>• Redis: throughput varies with network locality —</a:t>
-            </a:r>
-            <a:br/>
-            <a:r>
-              <a:t>  co-located cart+redis may benefit from low latency</a:t>
+              <a:t>• Reproducible in all 12 runs measured</a:t>
             </a:r>
           </a:p>
           <a:p>
@@ -4426,7 +4426,11 @@
               </a:defRPr>
             </a:pPr>
             <a:r>
-              <a:t>• Spread: consistent throughput — isolated I/O paths</a:t>
+              <a:t>• Spreading maximises the cross-node flows pod churn</a:t>
+            </a:r>
+            <a:br/>
+            <a:r>
+              <a:t>  tears down — the mechanism behind the score noise</a:t>
             </a:r>
           </a:p>
         </p:txBody>
@@ -4611,6 +4615,468 @@
             <a:avLst/>
           </a:prstGeom>
           <a:solidFill>
+            <a:srgbClr val="F39C12"/>
+          </a:solidFill>
+          <a:ln>
+            <a:noFill/>
+          </a:ln>
+        </p:spPr>
+        <p:style>
+          <a:lnRef idx="1">
+            <a:schemeClr val="accent1"/>
+          </a:lnRef>
+          <a:fillRef idx="3">
+            <a:schemeClr val="accent1"/>
+          </a:fillRef>
+          <a:effectRef idx="2">
+            <a:schemeClr val="accent1"/>
+          </a:effectRef>
+          <a:fontRef idx="minor">
+            <a:schemeClr val="lt1"/>
+          </a:fontRef>
+        </p:style>
+        <p:txBody>
+          <a:bodyPr rtlCol="0" anchor="ctr" wrap="square" lIns="50800" rIns="50800" tIns="25400" bIns="25400"/>
+          <a:lstStyle/>
+          <a:p>
+            <a:pPr algn="ctr">
+              <a:defRPr sz="1400" b="1">
+                <a:solidFill>
+                  <a:srgbClr val="FFFFFF"/>
+                </a:solidFill>
+                <a:latin typeface="Calibri"/>
+              </a:defRPr>
+            </a:pPr>
+            <a:r>
+              <a:t>L1</a:t>
+            </a:r>
+          </a:p>
+        </p:txBody>
+      </p:sp>
+      <p:sp>
+        <p:nvSpPr>
+          <p:cNvPr id="7" name="Rounded Rectangle 6"/>
+          <p:cNvSpPr/>
+          <p:nvPr/>
+        </p:nvSpPr>
+        <p:spPr>
+          <a:xfrm>
+            <a:off x="7406640" y="1691640"/>
+            <a:ext cx="4206240" cy="731520"/>
+          </a:xfrm>
+          <a:prstGeom prst="roundRect">
+            <a:avLst/>
+          </a:prstGeom>
+          <a:solidFill>
+            <a:srgbClr val="121222"/>
+          </a:solidFill>
+          <a:ln w="25400">
+            <a:solidFill>
+              <a:srgbClr val="F39C12"/>
+            </a:solidFill>
+          </a:ln>
+        </p:spPr>
+        <p:style>
+          <a:lnRef idx="1">
+            <a:schemeClr val="accent1"/>
+          </a:lnRef>
+          <a:fillRef idx="3">
+            <a:schemeClr val="accent1"/>
+          </a:fillRef>
+          <a:effectRef idx="2">
+            <a:schemeClr val="accent1"/>
+          </a:effectRef>
+          <a:fontRef idx="minor">
+            <a:schemeClr val="lt1"/>
+          </a:fontRef>
+        </p:style>
+        <p:txBody>
+          <a:bodyPr rtlCol="0" anchor="ctr"/>
+          <a:lstStyle/>
+          <a:p>
+            <a:pPr algn="ctr"/>
+          </a:p>
+        </p:txBody>
+      </p:sp>
+      <p:sp>
+        <p:nvSpPr>
+          <p:cNvPr id="8" name="TextBox 7"/>
+          <p:cNvSpPr txBox="1"/>
+          <p:nvPr/>
+        </p:nvSpPr>
+        <p:spPr>
+          <a:xfrm>
+            <a:off x="7543800" y="1709928"/>
+            <a:ext cx="3017520" cy="228600"/>
+          </a:xfrm>
+          <a:prstGeom prst="rect">
+            <a:avLst/>
+          </a:prstGeom>
+          <a:noFill/>
+        </p:spPr>
+        <p:txBody>
+          <a:bodyPr wrap="square">
+            <a:spAutoFit/>
+          </a:bodyPr>
+          <a:lstStyle/>
+          <a:p>
+            <a:pPr algn="l">
+              <a:defRPr sz="1200" b="1">
+                <a:solidFill>
+                  <a:srgbClr val="F39C12"/>
+                </a:solidFill>
+                <a:latin typeface="Calibri"/>
+              </a:defRPr>
+            </a:pPr>
+            <a:r>
+              <a:t>Colocate = worst resilience</a:t>
+            </a:r>
+          </a:p>
+        </p:txBody>
+      </p:sp>
+      <p:sp>
+        <p:nvSpPr>
+          <p:cNvPr id="9" name="TextBox 8"/>
+          <p:cNvSpPr txBox="1"/>
+          <p:nvPr/>
+        </p:nvSpPr>
+        <p:spPr>
+          <a:xfrm>
+            <a:off x="7543800" y="1965960"/>
+            <a:ext cx="3017520" cy="411480"/>
+          </a:xfrm>
+          <a:prstGeom prst="rect">
+            <a:avLst/>
+          </a:prstGeom>
+          <a:noFill/>
+        </p:spPr>
+        <p:txBody>
+          <a:bodyPr wrap="square">
+            <a:spAutoFit/>
+          </a:bodyPr>
+          <a:lstStyle/>
+          <a:p>
+            <a:pPr algn="l">
+              <a:defRPr sz="1000" b="0">
+                <a:solidFill>
+                  <a:srgbClr val="BDBDBD"/>
+                </a:solidFill>
+                <a:latin typeface="Calibri"/>
+              </a:defRPr>
+            </a:pPr>
+            <a:r>
+              <a:t>Score can't adjudicate (colocate 49.7–83</a:t>
+            </a:r>
+            <a:br/>
+            <a:r>
+              <a:t>across runs). Mechanism: colocate throttles</a:t>
+            </a:r>
+            <a:br/>
+            <a:r>
+              <a:t>LEAST and flushes no conn-state — not worst.</a:t>
+            </a:r>
+          </a:p>
+        </p:txBody>
+      </p:sp>
+      <p:sp>
+        <p:nvSpPr>
+          <p:cNvPr id="10" name="Rounded Rectangle 9"/>
+          <p:cNvSpPr/>
+          <p:nvPr/>
+        </p:nvSpPr>
+        <p:spPr>
+          <a:xfrm>
+            <a:off x="10515600" y="1874520"/>
+            <a:ext cx="1005840" cy="320040"/>
+          </a:xfrm>
+          <a:prstGeom prst="roundRect">
+            <a:avLst/>
+          </a:prstGeom>
+          <a:solidFill>
+            <a:srgbClr val="F39C12"/>
+          </a:solidFill>
+          <a:ln>
+            <a:noFill/>
+          </a:ln>
+        </p:spPr>
+        <p:style>
+          <a:lnRef idx="1">
+            <a:schemeClr val="accent1"/>
+          </a:lnRef>
+          <a:fillRef idx="3">
+            <a:schemeClr val="accent1"/>
+          </a:fillRef>
+          <a:effectRef idx="2">
+            <a:schemeClr val="accent1"/>
+          </a:effectRef>
+          <a:fontRef idx="minor">
+            <a:schemeClr val="lt1"/>
+          </a:fontRef>
+        </p:style>
+        <p:txBody>
+          <a:bodyPr rtlCol="0" anchor="ctr" wrap="square" lIns="50800" rIns="50800" tIns="25400" bIns="25400"/>
+          <a:lstStyle/>
+          <a:p>
+            <a:pPr algn="ctr">
+              <a:defRPr sz="1000" b="1">
+                <a:solidFill>
+                  <a:srgbClr val="FFFFFF"/>
+                </a:solidFill>
+                <a:latin typeface="Calibri"/>
+              </a:defRPr>
+            </a:pPr>
+            <a:r>
+              <a:t>Mech.</a:t>
+            </a:r>
+          </a:p>
+        </p:txBody>
+      </p:sp>
+      <p:sp>
+        <p:nvSpPr>
+          <p:cNvPr id="11" name="Rounded Rectangle 10"/>
+          <p:cNvSpPr/>
+          <p:nvPr/>
+        </p:nvSpPr>
+        <p:spPr>
+          <a:xfrm>
+            <a:off x="6583680" y="2697480"/>
+            <a:ext cx="640080" cy="731520"/>
+          </a:xfrm>
+          <a:prstGeom prst="roundRect">
+            <a:avLst/>
+          </a:prstGeom>
+          <a:solidFill>
+            <a:srgbClr val="F39C12"/>
+          </a:solidFill>
+          <a:ln>
+            <a:noFill/>
+          </a:ln>
+        </p:spPr>
+        <p:style>
+          <a:lnRef idx="1">
+            <a:schemeClr val="accent1"/>
+          </a:lnRef>
+          <a:fillRef idx="3">
+            <a:schemeClr val="accent1"/>
+          </a:fillRef>
+          <a:effectRef idx="2">
+            <a:schemeClr val="accent1"/>
+          </a:effectRef>
+          <a:fontRef idx="minor">
+            <a:schemeClr val="lt1"/>
+          </a:fontRef>
+        </p:style>
+        <p:txBody>
+          <a:bodyPr rtlCol="0" anchor="ctr" wrap="square" lIns="50800" rIns="50800" tIns="25400" bIns="25400"/>
+          <a:lstStyle/>
+          <a:p>
+            <a:pPr algn="ctr">
+              <a:defRPr sz="1400" b="1">
+                <a:solidFill>
+                  <a:srgbClr val="FFFFFF"/>
+                </a:solidFill>
+                <a:latin typeface="Calibri"/>
+              </a:defRPr>
+            </a:pPr>
+            <a:r>
+              <a:t>L2</a:t>
+            </a:r>
+          </a:p>
+        </p:txBody>
+      </p:sp>
+      <p:sp>
+        <p:nvSpPr>
+          <p:cNvPr id="12" name="Rounded Rectangle 11"/>
+          <p:cNvSpPr/>
+          <p:nvPr/>
+        </p:nvSpPr>
+        <p:spPr>
+          <a:xfrm>
+            <a:off x="7406640" y="2697480"/>
+            <a:ext cx="4206240" cy="731520"/>
+          </a:xfrm>
+          <a:prstGeom prst="roundRect">
+            <a:avLst/>
+          </a:prstGeom>
+          <a:solidFill>
+            <a:srgbClr val="121222"/>
+          </a:solidFill>
+          <a:ln w="25400">
+            <a:solidFill>
+              <a:srgbClr val="F39C12"/>
+            </a:solidFill>
+          </a:ln>
+        </p:spPr>
+        <p:style>
+          <a:lnRef idx="1">
+            <a:schemeClr val="accent1"/>
+          </a:lnRef>
+          <a:fillRef idx="3">
+            <a:schemeClr val="accent1"/>
+          </a:fillRef>
+          <a:effectRef idx="2">
+            <a:schemeClr val="accent1"/>
+          </a:effectRef>
+          <a:fontRef idx="minor">
+            <a:schemeClr val="lt1"/>
+          </a:fontRef>
+        </p:style>
+        <p:txBody>
+          <a:bodyPr rtlCol="0" anchor="ctr"/>
+          <a:lstStyle/>
+          <a:p>
+            <a:pPr algn="ctr"/>
+          </a:p>
+        </p:txBody>
+      </p:sp>
+      <p:sp>
+        <p:nvSpPr>
+          <p:cNvPr id="13" name="TextBox 12"/>
+          <p:cNvSpPr txBox="1"/>
+          <p:nvPr/>
+        </p:nvSpPr>
+        <p:spPr>
+          <a:xfrm>
+            <a:off x="7543800" y="2715768"/>
+            <a:ext cx="3017520" cy="228600"/>
+          </a:xfrm>
+          <a:prstGeom prst="rect">
+            <a:avLst/>
+          </a:prstGeom>
+          <a:noFill/>
+        </p:spPr>
+        <p:txBody>
+          <a:bodyPr wrap="square">
+            <a:spAutoFit/>
+          </a:bodyPr>
+          <a:lstStyle/>
+          <a:p>
+            <a:pPr algn="l">
+              <a:defRPr sz="1200" b="1">
+                <a:solidFill>
+                  <a:srgbClr val="F39C12"/>
+                </a:solidFill>
+                <a:latin typeface="Calibri"/>
+              </a:defRPr>
+            </a:pPr>
+            <a:r>
+              <a:t>Spread = best fault isolation</a:t>
+            </a:r>
+          </a:p>
+        </p:txBody>
+      </p:sp>
+      <p:sp>
+        <p:nvSpPr>
+          <p:cNvPr id="14" name="TextBox 13"/>
+          <p:cNvSpPr txBox="1"/>
+          <p:nvPr/>
+        </p:nvSpPr>
+        <p:spPr>
+          <a:xfrm>
+            <a:off x="7543800" y="2971800"/>
+            <a:ext cx="3017520" cy="411480"/>
+          </a:xfrm>
+          <a:prstGeom prst="rect">
+            <a:avLst/>
+          </a:prstGeom>
+          <a:noFill/>
+        </p:spPr>
+        <p:txBody>
+          <a:bodyPr wrap="square">
+            <a:spAutoFit/>
+          </a:bodyPr>
+          <a:lstStyle/>
+          <a:p>
+            <a:pPr algn="l">
+              <a:defRPr sz="1000" b="0">
+                <a:solidFill>
+                  <a:srgbClr val="BDBDBD"/>
+                </a:solidFill>
+                <a:latin typeface="Calibri"/>
+              </a:defRPr>
+            </a:pPr>
+            <a:r>
+              <a:t>Score can't adjudicate (spread 33–88.7).</a:t>
+            </a:r>
+            <a:br/>
+            <a:r>
+              <a:t>Mechanism: spread flushes 28–52% of conntrack</a:t>
+            </a:r>
+            <a:br/>
+            <a:r>
+              <a:t>under churn — it amplifies, not isolates.</a:t>
+            </a:r>
+          </a:p>
+        </p:txBody>
+      </p:sp>
+      <p:sp>
+        <p:nvSpPr>
+          <p:cNvPr id="15" name="Rounded Rectangle 14"/>
+          <p:cNvSpPr/>
+          <p:nvPr/>
+        </p:nvSpPr>
+        <p:spPr>
+          <a:xfrm>
+            <a:off x="10515600" y="2880360"/>
+            <a:ext cx="1005840" cy="320040"/>
+          </a:xfrm>
+          <a:prstGeom prst="roundRect">
+            <a:avLst/>
+          </a:prstGeom>
+          <a:solidFill>
+            <a:srgbClr val="F39C12"/>
+          </a:solidFill>
+          <a:ln>
+            <a:noFill/>
+          </a:ln>
+        </p:spPr>
+        <p:style>
+          <a:lnRef idx="1">
+            <a:schemeClr val="accent1"/>
+          </a:lnRef>
+          <a:fillRef idx="3">
+            <a:schemeClr val="accent1"/>
+          </a:fillRef>
+          <a:effectRef idx="2">
+            <a:schemeClr val="accent1"/>
+          </a:effectRef>
+          <a:fontRef idx="minor">
+            <a:schemeClr val="lt1"/>
+          </a:fontRef>
+        </p:style>
+        <p:txBody>
+          <a:bodyPr rtlCol="0" anchor="ctr" wrap="square" lIns="50800" rIns="50800" tIns="25400" bIns="25400"/>
+          <a:lstStyle/>
+          <a:p>
+            <a:pPr algn="ctr">
+              <a:defRPr sz="1000" b="1">
+                <a:solidFill>
+                  <a:srgbClr val="FFFFFF"/>
+                </a:solidFill>
+                <a:latin typeface="Calibri"/>
+              </a:defRPr>
+            </a:pPr>
+            <a:r>
+              <a:t>Mech.</a:t>
+            </a:r>
+          </a:p>
+        </p:txBody>
+      </p:sp>
+      <p:sp>
+        <p:nvSpPr>
+          <p:cNvPr id="16" name="Rounded Rectangle 15"/>
+          <p:cNvSpPr/>
+          <p:nvPr/>
+        </p:nvSpPr>
+        <p:spPr>
+          <a:xfrm>
+            <a:off x="6583680" y="3703320"/>
+            <a:ext cx="640080" cy="731520"/>
+          </a:xfrm>
+          <a:prstGeom prst="roundRect">
+            <a:avLst/>
+          </a:prstGeom>
+          <a:solidFill>
             <a:srgbClr val="E74C3C"/>
           </a:solidFill>
           <a:ln>
@@ -4644,20 +5110,20 @@
               </a:defRPr>
             </a:pPr>
             <a:r>
-              <a:t>H1</a:t>
-            </a:r>
-          </a:p>
-        </p:txBody>
-      </p:sp>
-      <p:sp>
-        <p:nvSpPr>
-          <p:cNvPr id="7" name="Rounded Rectangle 6"/>
+              <a:t>L3</a:t>
+            </a:r>
+          </a:p>
+        </p:txBody>
+      </p:sp>
+      <p:sp>
+        <p:nvSpPr>
+          <p:cNvPr id="17" name="Rounded Rectangle 16"/>
           <p:cNvSpPr/>
           <p:nvPr/>
         </p:nvSpPr>
         <p:spPr>
           <a:xfrm>
-            <a:off x="7406640" y="1691640"/>
+            <a:off x="7406640" y="3703320"/>
             <a:ext cx="4206240" cy="731520"/>
           </a:xfrm>
           <a:prstGeom prst="roundRect">
@@ -4696,13 +5162,13 @@
       </p:sp>
       <p:sp>
         <p:nvSpPr>
-          <p:cNvPr id="8" name="TextBox 7"/>
+          <p:cNvPr id="18" name="TextBox 17"/>
           <p:cNvSpPr txBox="1"/>
           <p:nvPr/>
         </p:nvSpPr>
         <p:spPr>
           <a:xfrm>
-            <a:off x="7543800" y="1709928"/>
+            <a:off x="7543800" y="3721608"/>
             <a:ext cx="3017520" cy="228600"/>
           </a:xfrm>
           <a:prstGeom prst="rect">
@@ -4725,20 +5191,20 @@
               </a:defRPr>
             </a:pPr>
             <a:r>
-              <a:t>Colocate = worst resilience</a:t>
-            </a:r>
-          </a:p>
-        </p:txBody>
-      </p:sp>
-      <p:sp>
-        <p:nvSpPr>
-          <p:cNvPr id="9" name="TextBox 8"/>
+              <a:t>Recovery time predicts score</a:t>
+            </a:r>
+          </a:p>
+        </p:txBody>
+      </p:sp>
+      <p:sp>
+        <p:nvSpPr>
+          <p:cNvPr id="19" name="TextBox 18"/>
           <p:cNvSpPr txBox="1"/>
           <p:nvPr/>
         </p:nvSpPr>
         <p:spPr>
           <a:xfrm>
-            <a:off x="7543800" y="1965960"/>
+            <a:off x="7543800" y="3977640"/>
             <a:ext cx="3017520" cy="411480"/>
           </a:xfrm>
           <a:prstGeom prst="rect">
@@ -4761,477 +5227,15 @@
               </a:defRPr>
             </a:pPr>
             <a:r>
-              <a:t>Refuted: colocate tied for top non-baseline</a:t>
+              <a:t>Refuted structurally: recovery is 84–96%</a:t>
             </a:r>
             <a:br/>
             <a:r>
-              <a:t>score (83.0, stddev 0) with random, adversarial,</a:t>
+              <a:t>app-startup (placement-invariant); the score</a:t>
             </a:r>
             <a:br/>
             <a:r>
-              <a:t>dep-aware — the containment cluster.</a:t>
-            </a:r>
-          </a:p>
-        </p:txBody>
-      </p:sp>
-      <p:sp>
-        <p:nvSpPr>
-          <p:cNvPr id="10" name="Rounded Rectangle 9"/>
-          <p:cNvSpPr/>
-          <p:nvPr/>
-        </p:nvSpPr>
-        <p:spPr>
-          <a:xfrm>
-            <a:off x="10515600" y="1874520"/>
-            <a:ext cx="1005840" cy="320040"/>
-          </a:xfrm>
-          <a:prstGeom prst="roundRect">
-            <a:avLst/>
-          </a:prstGeom>
-          <a:solidFill>
-            <a:srgbClr val="E74C3C"/>
-          </a:solidFill>
-          <a:ln>
-            <a:noFill/>
-          </a:ln>
-        </p:spPr>
-        <p:style>
-          <a:lnRef idx="1">
-            <a:schemeClr val="accent1"/>
-          </a:lnRef>
-          <a:fillRef idx="3">
-            <a:schemeClr val="accent1"/>
-          </a:fillRef>
-          <a:effectRef idx="2">
-            <a:schemeClr val="accent1"/>
-          </a:effectRef>
-          <a:fontRef idx="minor">
-            <a:schemeClr val="lt1"/>
-          </a:fontRef>
-        </p:style>
-        <p:txBody>
-          <a:bodyPr rtlCol="0" anchor="ctr" wrap="square" lIns="50800" rIns="50800" tIns="25400" bIns="25400"/>
-          <a:lstStyle/>
-          <a:p>
-            <a:pPr algn="ctr">
-              <a:defRPr sz="1000" b="1">
-                <a:solidFill>
-                  <a:srgbClr val="FFFFFF"/>
-                </a:solidFill>
-                <a:latin typeface="Calibri"/>
-              </a:defRPr>
-            </a:pPr>
-            <a:r>
-              <a:t>Refuted</a:t>
-            </a:r>
-          </a:p>
-        </p:txBody>
-      </p:sp>
-      <p:sp>
-        <p:nvSpPr>
-          <p:cNvPr id="11" name="Rounded Rectangle 10"/>
-          <p:cNvSpPr/>
-          <p:nvPr/>
-        </p:nvSpPr>
-        <p:spPr>
-          <a:xfrm>
-            <a:off x="6583680" y="2697480"/>
-            <a:ext cx="640080" cy="731520"/>
-          </a:xfrm>
-          <a:prstGeom prst="roundRect">
-            <a:avLst/>
-          </a:prstGeom>
-          <a:solidFill>
-            <a:srgbClr val="E74C3C"/>
-          </a:solidFill>
-          <a:ln>
-            <a:noFill/>
-          </a:ln>
-        </p:spPr>
-        <p:style>
-          <a:lnRef idx="1">
-            <a:schemeClr val="accent1"/>
-          </a:lnRef>
-          <a:fillRef idx="3">
-            <a:schemeClr val="accent1"/>
-          </a:fillRef>
-          <a:effectRef idx="2">
-            <a:schemeClr val="accent1"/>
-          </a:effectRef>
-          <a:fontRef idx="minor">
-            <a:schemeClr val="lt1"/>
-          </a:fontRef>
-        </p:style>
-        <p:txBody>
-          <a:bodyPr rtlCol="0" anchor="ctr" wrap="square" lIns="50800" rIns="50800" tIns="25400" bIns="25400"/>
-          <a:lstStyle/>
-          <a:p>
-            <a:pPr algn="ctr">
-              <a:defRPr sz="1400" b="1">
-                <a:solidFill>
-                  <a:srgbClr val="FFFFFF"/>
-                </a:solidFill>
-                <a:latin typeface="Calibri"/>
-              </a:defRPr>
-            </a:pPr>
-            <a:r>
-              <a:t>H2</a:t>
-            </a:r>
-          </a:p>
-        </p:txBody>
-      </p:sp>
-      <p:sp>
-        <p:nvSpPr>
-          <p:cNvPr id="12" name="Rounded Rectangle 11"/>
-          <p:cNvSpPr/>
-          <p:nvPr/>
-        </p:nvSpPr>
-        <p:spPr>
-          <a:xfrm>
-            <a:off x="7406640" y="2697480"/>
-            <a:ext cx="4206240" cy="731520"/>
-          </a:xfrm>
-          <a:prstGeom prst="roundRect">
-            <a:avLst/>
-          </a:prstGeom>
-          <a:solidFill>
-            <a:srgbClr val="121222"/>
-          </a:solidFill>
-          <a:ln w="25400">
-            <a:solidFill>
-              <a:srgbClr val="E74C3C"/>
-            </a:solidFill>
-          </a:ln>
-        </p:spPr>
-        <p:style>
-          <a:lnRef idx="1">
-            <a:schemeClr val="accent1"/>
-          </a:lnRef>
-          <a:fillRef idx="3">
-            <a:schemeClr val="accent1"/>
-          </a:fillRef>
-          <a:effectRef idx="2">
-            <a:schemeClr val="accent1"/>
-          </a:effectRef>
-          <a:fontRef idx="minor">
-            <a:schemeClr val="lt1"/>
-          </a:fontRef>
-        </p:style>
-        <p:txBody>
-          <a:bodyPr rtlCol="0" anchor="ctr"/>
-          <a:lstStyle/>
-          <a:p>
-            <a:pPr algn="ctr"/>
-          </a:p>
-        </p:txBody>
-      </p:sp>
-      <p:sp>
-        <p:nvSpPr>
-          <p:cNvPr id="13" name="TextBox 12"/>
-          <p:cNvSpPr txBox="1"/>
-          <p:nvPr/>
-        </p:nvSpPr>
-        <p:spPr>
-          <a:xfrm>
-            <a:off x="7543800" y="2715768"/>
-            <a:ext cx="3017520" cy="228600"/>
-          </a:xfrm>
-          <a:prstGeom prst="rect">
-            <a:avLst/>
-          </a:prstGeom>
-          <a:noFill/>
-        </p:spPr>
-        <p:txBody>
-          <a:bodyPr wrap="square">
-            <a:spAutoFit/>
-          </a:bodyPr>
-          <a:lstStyle/>
-          <a:p>
-            <a:pPr algn="l">
-              <a:defRPr sz="1200" b="1">
-                <a:solidFill>
-                  <a:srgbClr val="E74C3C"/>
-                </a:solidFill>
-                <a:latin typeface="Calibri"/>
-              </a:defRPr>
-            </a:pPr>
-            <a:r>
-              <a:t>Spread = best fault isolation</a:t>
-            </a:r>
-          </a:p>
-        </p:txBody>
-      </p:sp>
-      <p:sp>
-        <p:nvSpPr>
-          <p:cNvPr id="14" name="TextBox 13"/>
-          <p:cNvSpPr txBox="1"/>
-          <p:nvPr/>
-        </p:nvSpPr>
-        <p:spPr>
-          <a:xfrm>
-            <a:off x="7543800" y="2971800"/>
-            <a:ext cx="3017520" cy="411480"/>
-          </a:xfrm>
-          <a:prstGeom prst="rect">
-            <a:avLst/>
-          </a:prstGeom>
-          <a:noFill/>
-        </p:spPr>
-        <p:txBody>
-          <a:bodyPr wrap="square">
-            <a:spAutoFit/>
-          </a:bodyPr>
-          <a:lstStyle/>
-          <a:p>
-            <a:pPr algn="l">
-              <a:defRPr sz="1000" b="0">
-                <a:solidFill>
-                  <a:srgbClr val="BDBDBD"/>
-                </a:solidFill>
-                <a:latin typeface="Calibri"/>
-              </a:defRPr>
-            </a:pPr>
-            <a:r>
-              <a:t>Refuted: spread sits in the leakage cluster</a:t>
-            </a:r>
-            <a:br/>
-            <a:r>
-              <a:t>(66.3, stddev 29), not the containment cluster.</a:t>
-            </a:r>
-            <a:br/>
-            <a:r>
-              <a:t>Default (49.7) is worst, not colocate.</a:t>
-            </a:r>
-          </a:p>
-        </p:txBody>
-      </p:sp>
-      <p:sp>
-        <p:nvSpPr>
-          <p:cNvPr id="15" name="Rounded Rectangle 14"/>
-          <p:cNvSpPr/>
-          <p:nvPr/>
-        </p:nvSpPr>
-        <p:spPr>
-          <a:xfrm>
-            <a:off x="10515600" y="2880360"/>
-            <a:ext cx="1005840" cy="320040"/>
-          </a:xfrm>
-          <a:prstGeom prst="roundRect">
-            <a:avLst/>
-          </a:prstGeom>
-          <a:solidFill>
-            <a:srgbClr val="E74C3C"/>
-          </a:solidFill>
-          <a:ln>
-            <a:noFill/>
-          </a:ln>
-        </p:spPr>
-        <p:style>
-          <a:lnRef idx="1">
-            <a:schemeClr val="accent1"/>
-          </a:lnRef>
-          <a:fillRef idx="3">
-            <a:schemeClr val="accent1"/>
-          </a:fillRef>
-          <a:effectRef idx="2">
-            <a:schemeClr val="accent1"/>
-          </a:effectRef>
-          <a:fontRef idx="minor">
-            <a:schemeClr val="lt1"/>
-          </a:fontRef>
-        </p:style>
-        <p:txBody>
-          <a:bodyPr rtlCol="0" anchor="ctr" wrap="square" lIns="50800" rIns="50800" tIns="25400" bIns="25400"/>
-          <a:lstStyle/>
-          <a:p>
-            <a:pPr algn="ctr">
-              <a:defRPr sz="1000" b="1">
-                <a:solidFill>
-                  <a:srgbClr val="FFFFFF"/>
-                </a:solidFill>
-                <a:latin typeface="Calibri"/>
-              </a:defRPr>
-            </a:pPr>
-            <a:r>
-              <a:t>Refuted</a:t>
-            </a:r>
-          </a:p>
-        </p:txBody>
-      </p:sp>
-      <p:sp>
-        <p:nvSpPr>
-          <p:cNvPr id="16" name="Rounded Rectangle 15"/>
-          <p:cNvSpPr/>
-          <p:nvPr/>
-        </p:nvSpPr>
-        <p:spPr>
-          <a:xfrm>
-            <a:off x="6583680" y="3703320"/>
-            <a:ext cx="640080" cy="731520"/>
-          </a:xfrm>
-          <a:prstGeom prst="roundRect">
-            <a:avLst/>
-          </a:prstGeom>
-          <a:solidFill>
-            <a:srgbClr val="E74C3C"/>
-          </a:solidFill>
-          <a:ln>
-            <a:noFill/>
-          </a:ln>
-        </p:spPr>
-        <p:style>
-          <a:lnRef idx="1">
-            <a:schemeClr val="accent1"/>
-          </a:lnRef>
-          <a:fillRef idx="3">
-            <a:schemeClr val="accent1"/>
-          </a:fillRef>
-          <a:effectRef idx="2">
-            <a:schemeClr val="accent1"/>
-          </a:effectRef>
-          <a:fontRef idx="minor">
-            <a:schemeClr val="lt1"/>
-          </a:fontRef>
-        </p:style>
-        <p:txBody>
-          <a:bodyPr rtlCol="0" anchor="ctr" wrap="square" lIns="50800" rIns="50800" tIns="25400" bIns="25400"/>
-          <a:lstStyle/>
-          <a:p>
-            <a:pPr algn="ctr">
-              <a:defRPr sz="1400" b="1">
-                <a:solidFill>
-                  <a:srgbClr val="FFFFFF"/>
-                </a:solidFill>
-                <a:latin typeface="Calibri"/>
-              </a:defRPr>
-            </a:pPr>
-            <a:r>
-              <a:t>H3</a:t>
-            </a:r>
-          </a:p>
-        </p:txBody>
-      </p:sp>
-      <p:sp>
-        <p:nvSpPr>
-          <p:cNvPr id="17" name="Rounded Rectangle 16"/>
-          <p:cNvSpPr/>
-          <p:nvPr/>
-        </p:nvSpPr>
-        <p:spPr>
-          <a:xfrm>
-            <a:off x="7406640" y="3703320"/>
-            <a:ext cx="4206240" cy="731520"/>
-          </a:xfrm>
-          <a:prstGeom prst="roundRect">
-            <a:avLst/>
-          </a:prstGeom>
-          <a:solidFill>
-            <a:srgbClr val="121222"/>
-          </a:solidFill>
-          <a:ln w="25400">
-            <a:solidFill>
-              <a:srgbClr val="E74C3C"/>
-            </a:solidFill>
-          </a:ln>
-        </p:spPr>
-        <p:style>
-          <a:lnRef idx="1">
-            <a:schemeClr val="accent1"/>
-          </a:lnRef>
-          <a:fillRef idx="3">
-            <a:schemeClr val="accent1"/>
-          </a:fillRef>
-          <a:effectRef idx="2">
-            <a:schemeClr val="accent1"/>
-          </a:effectRef>
-          <a:fontRef idx="minor">
-            <a:schemeClr val="lt1"/>
-          </a:fontRef>
-        </p:style>
-        <p:txBody>
-          <a:bodyPr rtlCol="0" anchor="ctr"/>
-          <a:lstStyle/>
-          <a:p>
-            <a:pPr algn="ctr"/>
-          </a:p>
-        </p:txBody>
-      </p:sp>
-      <p:sp>
-        <p:nvSpPr>
-          <p:cNvPr id="18" name="TextBox 17"/>
-          <p:cNvSpPr txBox="1"/>
-          <p:nvPr/>
-        </p:nvSpPr>
-        <p:spPr>
-          <a:xfrm>
-            <a:off x="7543800" y="3721608"/>
-            <a:ext cx="3017520" cy="228600"/>
-          </a:xfrm>
-          <a:prstGeom prst="rect">
-            <a:avLst/>
-          </a:prstGeom>
-          <a:noFill/>
-        </p:spPr>
-        <p:txBody>
-          <a:bodyPr wrap="square">
-            <a:spAutoFit/>
-          </a:bodyPr>
-          <a:lstStyle/>
-          <a:p>
-            <a:pPr algn="l">
-              <a:defRPr sz="1200" b="1">
-                <a:solidFill>
-                  <a:srgbClr val="E74C3C"/>
-                </a:solidFill>
-                <a:latin typeface="Calibri"/>
-              </a:defRPr>
-            </a:pPr>
-            <a:r>
-              <a:t>Recovery time predicts score</a:t>
-            </a:r>
-          </a:p>
-        </p:txBody>
-      </p:sp>
-      <p:sp>
-        <p:nvSpPr>
-          <p:cNvPr id="19" name="TextBox 18"/>
-          <p:cNvSpPr txBox="1"/>
-          <p:nvPr/>
-        </p:nvSpPr>
-        <p:spPr>
-          <a:xfrm>
-            <a:off x="7543800" y="3977640"/>
-            <a:ext cx="3017520" cy="411480"/>
-          </a:xfrm>
-          <a:prstGeom prst="rect">
-            <a:avLst/>
-          </a:prstGeom>
-          <a:noFill/>
-        </p:spPr>
-        <p:txBody>
-          <a:bodyPr wrap="square">
-            <a:spAutoFit/>
-          </a:bodyPr>
-          <a:lstStyle/>
-          <a:p>
-            <a:pPr algn="l">
-              <a:defRPr sz="1000" b="0">
-                <a:solidFill>
-                  <a:srgbClr val="BDBDBD"/>
-                </a:solidFill>
-                <a:latin typeface="Calibri"/>
-              </a:defRPr>
-            </a:pPr>
-            <a:r>
-              <a:t>Refuted: random has fastest recovery (1120ms)</a:t>
-            </a:r>
-            <a:br/>
-            <a:r>
-              <a:t>+ top score; spread slowest (1617ms) + leakage.</a:t>
-            </a:r>
-            <a:br/>
-            <a:r>
-              <a:t>Recovery and score uncorrelated.</a:t>
+              <a:t>is non-reproducible. No stable relationship.</a:t>
             </a:r>
           </a:p>
         </p:txBody>
@@ -5401,7 +5405,7 @@
               </a:defRPr>
             </a:pPr>
             <a:r>
-              <a:t>Bimodal, not monotonic</a:t>
+              <a:t>Score is the wrong instrument</a:t>
             </a:r>
           </a:p>
         </p:txBody>
@@ -5437,7 +5441,7 @@
               </a:defRPr>
             </a:pPr>
             <a:r>
-              <a:t>Strategies cluster into containment (83) and leakage (50–66) — not a density gradient. The literature's monotonic spread-better/colocate-worse model does not fit the data.</a:t>
+              <a:t>The aggregate resilience score is not reproducible: the same strategy spans 33–89 across 13 runs. It cannot rank placements — the binary-probe scoring discards the signal.</a:t>
             </a:r>
           </a:p>
         </p:txBody>
@@ -5518,7 +5522,7 @@
               </a:defRPr>
             </a:pPr>
             <a:r>
-              <a:t>Containment is the predictor</a:t>
+              <a:t>Mechanism layer reproduces</a:t>
             </a:r>
           </a:p>
         </p:txBody>
@@ -5554,7 +5558,7 @@
               </a:defRPr>
             </a:pPr>
             <a:r>
-              <a:t>What separates the two clusters is whether the chaos target's network path stays inside the placement domain. When it does, only the directly-targeted probes fail. When it doesn't, collateral damage leaks.</a:t>
+              <a:t>Where the score is noise, the kernel/network metrics are stable: conntrack flush (spread ≫ colocate, 12/12 runs) and CPU throttling (colocate &lt; default, 11/13). These carry the placement signal the score loses.</a:t>
             </a:r>
           </a:p>
         </p:txBody>
@@ -5671,7 +5675,7 @@
               </a:defRPr>
             </a:pPr>
             <a:r>
-              <a:t>Pod-delete creates kube-proxy / conntrack / CoreDNS reconvergence — the K8s SLO directly tracks this. Cross-node hops exposed to the kill cycle become failure surfaces; same-domain paths do not.</a:t>
+              <a:t>Pod-delete tears down cross-node conntrack state (measured directly). Cross-node hops exposed to the kill cycle become failure surfaces; co-located, same-node paths stay kernel-local and are spared.</a:t>
             </a:r>
           </a:p>
         </p:txBody>
@@ -6073,7 +6077,7 @@
               </a:defRPr>
             </a:pPr>
             <a:r>
-              <a:t>KVM/QEMU introduces virtualization overhead. Bare-metal clusters may show different performance characteristics, especially for I/O metrics.</a:t>
+              <a:t>Vagrant/libvirt (KVM/QEMU) introduces virtualization overhead. Bare-metal clusters may show different performance characteristics, especially for I/O metrics.</a:t>
             </a:r>
           </a:p>
         </p:txBody>
@@ -6226,7 +6230,7 @@
               </a:defRPr>
             </a:pPr>
             <a:r>
-              <a:t>5-node cluster (1 control plane + 4 uniform 4-GiB workers, 10 vCPU, 18 GiB). Larger clusters may show different placement effects.</a:t>
+              <a:t>5-node cluster (1 control plane @ 12 GiB + 4 uniform 4-GiB workers, 10 vCPU, 28 GiB). Larger clusters may show different placement effects.</a:t>
             </a:r>
           </a:p>
         </p:txBody>
@@ -6866,11 +6870,11 @@
               </a:defRPr>
             </a:pPr>
             <a:r>
-              <a:t>• All three literature-derived hypotheses</a:t>
+              <a:t>• Aggregate resilience score is NOT</a:t>
             </a:r>
             <a:br/>
             <a:r>
-              <a:t>  REFUTED — colocate 83 &gt; spread 52</a:t>
+              <a:t>  reproducible (strategy spans 33–89/13 runs)</a:t>
             </a:r>
           </a:p>
           <a:p>
@@ -6889,11 +6893,11 @@
               </a:defRPr>
             </a:pPr>
             <a:r>
-              <a:t>• Mechanism: pod-delete is churn-based,</a:t>
+              <a:t>• But the mechanism layer IS: conntrack flush</a:t>
             </a:r>
             <a:br/>
             <a:r>
-              <a:t>  not contention-based — locality wins</a:t>
+              <a:t>  (spread≫colocate, 12/12) + throttling (11/13)</a:t>
             </a:r>
           </a:p>
           <a:p>
@@ -6912,11 +6916,11 @@
               </a:defRPr>
             </a:pPr>
             <a:r>
-              <a:t>• Recovery time does not predict score —</a:t>
+              <a:t>• Mechanism: pod-delete is churn-based, not</a:t>
             </a:r>
             <a:br/>
             <a:r>
-              <a:t>  what matters is in-flight cross-node hops</a:t>
+              <a:t>  contention — co-location keeps paths local</a:t>
             </a:r>
           </a:p>
           <a:p>
@@ -6935,11 +6939,11 @@
               </a:defRPr>
             </a:pPr>
             <a:r>
-              <a:t>• Methodology control held: baseline = 100,</a:t>
+              <a:t>• Recovery is 84–96% app-startup — placement-</a:t>
             </a:r>
             <a:br/>
             <a:r>
-              <a:t>  stddev 0 — refutations are real, not noise</a:t>
+              <a:t>  invariant, so it can't predict the outcome</a:t>
             </a:r>
           </a:p>
         </p:txBody>
@@ -9377,8 +9381,8 @@
         </p:nvSpPr>
         <p:spPr>
           <a:xfrm>
-            <a:off x="182880" y="2057400"/>
-            <a:ext cx="4572000" cy="228600"/>
+            <a:off x="320040" y="2331720"/>
+            <a:ext cx="3657600" cy="228600"/>
           </a:xfrm>
           <a:prstGeom prst="rect">
             <a:avLst/>
@@ -9400,7 +9404,7 @@
               </a:defRPr>
             </a:pPr>
             <a:r>
-              <a:t>Instrument design</a:t>
+              <a:t>Framework</a:t>
             </a:r>
           </a:p>
         </p:txBody>
@@ -9413,8 +9417,8 @@
         </p:nvSpPr>
         <p:spPr>
           <a:xfrm>
-            <a:off x="7178040" y="2057400"/>
-            <a:ext cx="4572000" cy="228600"/>
+            <a:off x="4160520" y="2331720"/>
+            <a:ext cx="3657600" cy="228600"/>
           </a:xfrm>
           <a:prstGeom prst="rect">
             <a:avLst/>
@@ -9430,13 +9434,13 @@
             <a:pPr algn="l">
               <a:defRPr sz="1100" b="1">
                 <a:solidFill>
-                  <a:srgbClr val="F39C12"/>
-                </a:solidFill>
-                <a:latin typeface="Calibri"/>
-              </a:defRPr>
-            </a:pPr>
-            <a:r>
-              <a:t>Baseline &amp; tail</a:t>
+                  <a:srgbClr val="E74C3C"/>
+                </a:solidFill>
+                <a:latin typeface="Calibri"/>
+              </a:defRPr>
+            </a:pPr>
+            <a:r>
+              <a:t>Mechanism (reproducible)</a:t>
             </a:r>
           </a:p>
         </p:txBody>
@@ -9449,8 +9453,8 @@
         </p:nvSpPr>
         <p:spPr>
           <a:xfrm>
-            <a:off x="182880" y="4206240"/>
-            <a:ext cx="4572000" cy="228600"/>
+            <a:off x="8001000" y="2331720"/>
+            <a:ext cx="3657600" cy="228600"/>
           </a:xfrm>
           <a:prstGeom prst="rect">
             <a:avLst/>
@@ -9466,63 +9470,27 @@
             <a:pPr algn="l">
               <a:defRPr sz="1100" b="1">
                 <a:solidFill>
-                  <a:srgbClr val="E74C3C"/>
-                </a:solidFill>
-                <a:latin typeface="Calibri"/>
-              </a:defRPr>
-            </a:pPr>
-            <a:r>
-              <a:t>Mechanism</a:t>
-            </a:r>
-          </a:p>
-        </p:txBody>
-      </p:sp>
-      <p:sp>
-        <p:nvSpPr>
-          <p:cNvPr id="9" name="TextBox 8"/>
-          <p:cNvSpPr txBox="1"/>
-          <p:nvPr/>
-        </p:nvSpPr>
-        <p:spPr>
-          <a:xfrm>
-            <a:off x="7178040" y="4206240"/>
-            <a:ext cx="4572000" cy="228600"/>
-          </a:xfrm>
-          <a:prstGeom prst="rect">
-            <a:avLst/>
-          </a:prstGeom>
-          <a:noFill/>
-        </p:spPr>
-        <p:txBody>
-          <a:bodyPr wrap="square">
-            <a:spAutoFit/>
-          </a:bodyPr>
-          <a:lstStyle/>
-          <a:p>
-            <a:pPr algn="l">
-              <a:defRPr sz="1100" b="1">
-                <a:solidFill>
-                  <a:srgbClr val="9B59B6"/>
-                </a:solidFill>
-                <a:latin typeface="Calibri"/>
-              </a:defRPr>
-            </a:pPr>
-            <a:r>
-              <a:t>Recovery dynamics</a:t>
-            </a:r>
-          </a:p>
-        </p:txBody>
-      </p:sp>
-      <p:sp>
-        <p:nvSpPr>
-          <p:cNvPr id="10" name="Rounded Rectangle 9"/>
+                  <a:srgbClr val="F39C12"/>
+                </a:solidFill>
+                <a:latin typeface="Calibri"/>
+              </a:defRPr>
+            </a:pPr>
+            <a:r>
+              <a:t>Tail &amp; recovery</a:t>
+            </a:r>
+          </a:p>
+        </p:txBody>
+      </p:sp>
+      <p:sp>
+        <p:nvSpPr>
+          <p:cNvPr id="9" name="Rounded Rectangle 8"/>
           <p:cNvSpPr/>
           <p:nvPr/>
         </p:nvSpPr>
         <p:spPr>
           <a:xfrm>
-            <a:off x="182880" y="2331720"/>
-            <a:ext cx="2331720" cy="1874519"/>
+            <a:off x="320040" y="2651760"/>
+            <a:ext cx="1874519" cy="3383280"/>
           </a:xfrm>
           <a:prstGeom prst="roundRect">
             <a:avLst/>
@@ -9560,14 +9528,14 @@
       </p:sp>
       <p:sp>
         <p:nvSpPr>
-          <p:cNvPr id="11" name="Rounded Rectangle 10"/>
+          <p:cNvPr id="10" name="Rounded Rectangle 9"/>
           <p:cNvSpPr/>
           <p:nvPr/>
         </p:nvSpPr>
         <p:spPr>
           <a:xfrm>
-            <a:off x="182880" y="2331720"/>
-            <a:ext cx="2331720" cy="320040"/>
+            <a:off x="320040" y="2651760"/>
+            <a:ext cx="1874519" cy="320040"/>
           </a:xfrm>
           <a:prstGeom prst="roundRect">
             <a:avLst/>
@@ -9613,14 +9581,14 @@
       </p:sp>
       <p:sp>
         <p:nvSpPr>
-          <p:cNvPr id="12" name="TextBox 11"/>
+          <p:cNvPr id="11" name="TextBox 10"/>
           <p:cNvSpPr txBox="1"/>
           <p:nvPr/>
         </p:nvSpPr>
         <p:spPr>
           <a:xfrm>
-            <a:off x="274320" y="2697479"/>
-            <a:ext cx="2148839" cy="365760"/>
+            <a:off x="411479" y="3017520"/>
+            <a:ext cx="1691639" cy="365760"/>
           </a:xfrm>
           <a:prstGeom prst="rect">
             <a:avLst/>
@@ -9642,21 +9610,21 @@
               </a:defRPr>
             </a:pPr>
             <a:r>
-              <a:t>Metrics carry disjoint info</a:t>
-            </a:r>
-          </a:p>
-        </p:txBody>
-      </p:sp>
-      <p:sp>
-        <p:nvSpPr>
-          <p:cNvPr id="13" name="TextBox 12"/>
+              <a:t>Fault class gates placement effect</a:t>
+            </a:r>
+          </a:p>
+        </p:txBody>
+      </p:sp>
+      <p:sp>
+        <p:nvSpPr>
+          <p:cNvPr id="12" name="TextBox 11"/>
           <p:cNvSpPr txBox="1"/>
           <p:nvPr/>
         </p:nvSpPr>
         <p:spPr>
           <a:xfrm>
-            <a:off x="274320" y="3108960"/>
-            <a:ext cx="2148839" cy="1005839"/>
+            <a:off x="411479" y="3429000"/>
+            <a:ext cx="1691639" cy="2514600"/>
           </a:xfrm>
           <a:prstGeom prst="rect">
             <a:avLst/>
@@ -9678,21 +9646,21 @@
               </a:defRPr>
             </a:pPr>
             <a:r>
-              <a:t>No single metric captures full chaos response. Best-fit and spread tie on aggregate (66.3) but diverge on recovery (1452 vs 1617 ms) and latency (100 vs 150 ms during chaos).</a:t>
-            </a:r>
-          </a:p>
-        </p:txBody>
-      </p:sp>
-      <p:sp>
-        <p:nvSpPr>
-          <p:cNvPr id="14" name="Rounded Rectangle 13"/>
+              <a:t>Contention (cpu-hog) yields identical resilience across all strategies (100, σ0); churn (pod-delete) differentiates them. Whether placement matters is conditional on fault class.</a:t>
+            </a:r>
+          </a:p>
+        </p:txBody>
+      </p:sp>
+      <p:sp>
+        <p:nvSpPr>
+          <p:cNvPr id="13" name="Rounded Rectangle 12"/>
           <p:cNvSpPr/>
           <p:nvPr/>
         </p:nvSpPr>
         <p:spPr>
           <a:xfrm>
-            <a:off x="2560320" y="2331720"/>
-            <a:ext cx="2331720" cy="1874519"/>
+            <a:off x="2240279" y="2651760"/>
+            <a:ext cx="1874519" cy="3383280"/>
           </a:xfrm>
           <a:prstGeom prst="roundRect">
             <a:avLst/>
@@ -9730,14 +9698,14 @@
       </p:sp>
       <p:sp>
         <p:nvSpPr>
-          <p:cNvPr id="15" name="Rounded Rectangle 14"/>
+          <p:cNvPr id="14" name="Rounded Rectangle 13"/>
           <p:cNvSpPr/>
           <p:nvPr/>
         </p:nvSpPr>
         <p:spPr>
           <a:xfrm>
-            <a:off x="2560320" y="2331720"/>
-            <a:ext cx="2331720" cy="320040"/>
+            <a:off x="2240279" y="2651760"/>
+            <a:ext cx="1874519" cy="320040"/>
           </a:xfrm>
           <a:prstGeom prst="roundRect">
             <a:avLst/>
@@ -9783,14 +9751,14 @@
       </p:sp>
       <p:sp>
         <p:nvSpPr>
-          <p:cNvPr id="16" name="TextBox 15"/>
+          <p:cNvPr id="15" name="TextBox 14"/>
           <p:cNvSpPr txBox="1"/>
           <p:nvPr/>
         </p:nvSpPr>
         <p:spPr>
           <a:xfrm>
-            <a:off x="2651760" y="2697479"/>
-            <a:ext cx="2148839" cy="365760"/>
+            <a:off x="2331720" y="3017520"/>
+            <a:ext cx="1691639" cy="365760"/>
           </a:xfrm>
           <a:prstGeom prst="rect">
             <a:avLst/>
@@ -9812,21 +9780,21 @@
               </a:defRPr>
             </a:pPr>
             <a:r>
-              <a:t>Phase decomposition is necessary</a:t>
-            </a:r>
-          </a:p>
-        </p:txBody>
-      </p:sp>
-      <p:sp>
-        <p:nvSpPr>
-          <p:cNvPr id="17" name="TextBox 16"/>
+              <a:t>Aggregate score is too coarse</a:t>
+            </a:r>
+          </a:p>
+        </p:txBody>
+      </p:sp>
+      <p:sp>
+        <p:nvSpPr>
+          <p:cNvPr id="16" name="TextBox 15"/>
           <p:cNvSpPr txBox="1"/>
           <p:nvPr/>
         </p:nvSpPr>
         <p:spPr>
           <a:xfrm>
-            <a:off x="2651760" y="3108960"/>
-            <a:ext cx="2148839" cy="1005839"/>
+            <a:off x="2331720" y="3429000"/>
+            <a:ext cx="1691639" cy="2514600"/>
           </a:xfrm>
           <a:prstGeom prst="rect">
             <a:avLst/>
@@ -9848,21 +9816,21 @@
               </a:defRPr>
             </a:pPr>
             <a:r>
-              <a:t>Pre-chaos baselines vary by placement (spread 231 ms vs colocate 78 ms on /). During-chaos absolutes are uninterpretable without phase-aware normalisation.</a:t>
-            </a:r>
-          </a:p>
-        </p:txBody>
-      </p:sp>
-      <p:sp>
-        <p:nvSpPr>
-          <p:cNvPr id="18" name="Rounded Rectangle 17"/>
+              <a:t>The same strategy's resilience score ranges 33-89 across 13 runs (non-reproducible), while throttling and conntrack orderings stay stable. Mechanism metrics carry the signal.</a:t>
+            </a:r>
+          </a:p>
+        </p:txBody>
+      </p:sp>
+      <p:sp>
+        <p:nvSpPr>
+          <p:cNvPr id="17" name="Rounded Rectangle 16"/>
           <p:cNvSpPr/>
           <p:nvPr/>
         </p:nvSpPr>
         <p:spPr>
           <a:xfrm>
-            <a:off x="4937759" y="2331720"/>
-            <a:ext cx="2331720" cy="1874519"/>
+            <a:off x="4160519" y="2651760"/>
+            <a:ext cx="1874519" cy="3383280"/>
           </a:xfrm>
           <a:prstGeom prst="roundRect">
             <a:avLst/>
@@ -9872,7 +9840,7 @@
           </a:solidFill>
           <a:ln w="25400">
             <a:solidFill>
-              <a:srgbClr val="0096D6"/>
+              <a:srgbClr val="E74C3C"/>
             </a:solidFill>
           </a:ln>
         </p:spPr>
@@ -9900,20 +9868,20 @@
       </p:sp>
       <p:sp>
         <p:nvSpPr>
-          <p:cNvPr id="19" name="Rounded Rectangle 18"/>
+          <p:cNvPr id="18" name="Rounded Rectangle 17"/>
           <p:cNvSpPr/>
           <p:nvPr/>
         </p:nvSpPr>
         <p:spPr>
           <a:xfrm>
-            <a:off x="4937759" y="2331720"/>
-            <a:ext cx="2331720" cy="320040"/>
+            <a:off x="4160519" y="2651760"/>
+            <a:ext cx="1874519" cy="320040"/>
           </a:xfrm>
           <a:prstGeom prst="roundRect">
             <a:avLst/>
           </a:prstGeom>
           <a:solidFill>
-            <a:srgbClr val="0096D6"/>
+            <a:srgbClr val="E74C3C"/>
           </a:solidFill>
           <a:ln>
             <a:noFill/>
@@ -9953,14 +9921,14 @@
       </p:sp>
       <p:sp>
         <p:nvSpPr>
-          <p:cNvPr id="20" name="TextBox 19"/>
+          <p:cNvPr id="19" name="TextBox 18"/>
           <p:cNvSpPr txBox="1"/>
           <p:nvPr/>
         </p:nvSpPr>
         <p:spPr>
           <a:xfrm>
-            <a:off x="5029199" y="2697479"/>
-            <a:ext cx="2148839" cy="365760"/>
+            <a:off x="4251959" y="3017520"/>
+            <a:ext cx="1691639" cy="365760"/>
           </a:xfrm>
           <a:prstGeom prst="rect">
             <a:avLst/>
@@ -9976,27 +9944,27 @@
             <a:pPr algn="l">
               <a:defRPr sz="1100" b="1">
                 <a:solidFill>
-                  <a:srgbClr val="0096D6"/>
-                </a:solidFill>
-                <a:latin typeface="Calibri"/>
-              </a:defRPr>
-            </a:pPr>
-            <a:r>
-              <a:t>Per-pod granularity reveals heterogeneity</a:t>
-            </a:r>
-          </a:p>
-        </p:txBody>
-      </p:sp>
-      <p:sp>
-        <p:nvSpPr>
-          <p:cNvPr id="21" name="TextBox 20"/>
+                  <a:srgbClr val="E74C3C"/>
+                </a:solidFill>
+                <a:latin typeface="Calibri"/>
+              </a:defRPr>
+            </a:pPr>
+            <a:r>
+              <a:t>Churn flushes cross-node conn-state</a:t>
+            </a:r>
+          </a:p>
+        </p:txBody>
+      </p:sp>
+      <p:sp>
+        <p:nvSpPr>
+          <p:cNvPr id="20" name="TextBox 19"/>
           <p:cNvSpPr txBox="1"/>
           <p:nvPr/>
         </p:nvSpPr>
         <p:spPr>
           <a:xfrm>
-            <a:off x="5029199" y="3108960"/>
-            <a:ext cx="2148839" cy="1005839"/>
+            <a:off x="4251959" y="3429000"/>
+            <a:ext cx="1691639" cy="2514600"/>
           </a:xfrm>
           <a:prstGeom prst="rect">
             <a:avLst/>
@@ -10018,8 +9986,53 @@
               </a:defRPr>
             </a:pPr>
             <a:r>
-              <a:t>Cross-pod stddev within a single service is non-zero and placement-dependent. Aggregate cluster metrics miss it; per-pod LatencyProber sampling exposes it.</a:t>
-            </a:r>
+              <a:t>Spread flushes 28-52% of conntrack entries during churn; colocate stays flat (−15% to +3%). Reproducible in all 12 runs measured. Spreading maximises the flows churn disrupts.</a:t>
+            </a:r>
+          </a:p>
+        </p:txBody>
+      </p:sp>
+      <p:sp>
+        <p:nvSpPr>
+          <p:cNvPr id="21" name="Rounded Rectangle 20"/>
+          <p:cNvSpPr/>
+          <p:nvPr/>
+        </p:nvSpPr>
+        <p:spPr>
+          <a:xfrm>
+            <a:off x="6080759" y="2651760"/>
+            <a:ext cx="1874519" cy="3383280"/>
+          </a:xfrm>
+          <a:prstGeom prst="roundRect">
+            <a:avLst/>
+          </a:prstGeom>
+          <a:solidFill>
+            <a:srgbClr val="121222"/>
+          </a:solidFill>
+          <a:ln w="25400">
+            <a:solidFill>
+              <a:srgbClr val="E74C3C"/>
+            </a:solidFill>
+          </a:ln>
+        </p:spPr>
+        <p:style>
+          <a:lnRef idx="1">
+            <a:schemeClr val="accent1"/>
+          </a:lnRef>
+          <a:fillRef idx="3">
+            <a:schemeClr val="accent1"/>
+          </a:fillRef>
+          <a:effectRef idx="2">
+            <a:schemeClr val="accent1"/>
+          </a:effectRef>
+          <a:fontRef idx="minor">
+            <a:schemeClr val="lt1"/>
+          </a:fontRef>
+        </p:style>
+        <p:txBody>
+          <a:bodyPr rtlCol="0" anchor="ctr"/>
+          <a:lstStyle/>
+          <a:p>
+            <a:pPr algn="ctr"/>
           </a:p>
         </p:txBody>
       </p:sp>
@@ -10031,8 +10044,133 @@
         </p:nvSpPr>
         <p:spPr>
           <a:xfrm>
-            <a:off x="7315199" y="2331720"/>
-            <a:ext cx="2331720" cy="1874519"/>
+            <a:off x="6080759" y="2651760"/>
+            <a:ext cx="1874519" cy="320040"/>
+          </a:xfrm>
+          <a:prstGeom prst="roundRect">
+            <a:avLst/>
+          </a:prstGeom>
+          <a:solidFill>
+            <a:srgbClr val="E74C3C"/>
+          </a:solidFill>
+          <a:ln>
+            <a:noFill/>
+          </a:ln>
+        </p:spPr>
+        <p:style>
+          <a:lnRef idx="1">
+            <a:schemeClr val="accent1"/>
+          </a:lnRef>
+          <a:fillRef idx="3">
+            <a:schemeClr val="accent1"/>
+          </a:fillRef>
+          <a:effectRef idx="2">
+            <a:schemeClr val="accent1"/>
+          </a:effectRef>
+          <a:fontRef idx="minor">
+            <a:schemeClr val="lt1"/>
+          </a:fontRef>
+        </p:style>
+        <p:txBody>
+          <a:bodyPr rtlCol="0" anchor="ctr" wrap="square" lIns="50800" rIns="50800" tIns="25400" bIns="25400"/>
+          <a:lstStyle/>
+          <a:p>
+            <a:pPr algn="ctr">
+              <a:defRPr sz="1300" b="1">
+                <a:solidFill>
+                  <a:srgbClr val="FFFFFF"/>
+                </a:solidFill>
+                <a:latin typeface="Calibri"/>
+              </a:defRPr>
+            </a:pPr>
+            <a:r>
+              <a:t>H4</a:t>
+            </a:r>
+          </a:p>
+        </p:txBody>
+      </p:sp>
+      <p:sp>
+        <p:nvSpPr>
+          <p:cNvPr id="23" name="TextBox 22"/>
+          <p:cNvSpPr txBox="1"/>
+          <p:nvPr/>
+        </p:nvSpPr>
+        <p:spPr>
+          <a:xfrm>
+            <a:off x="6172199" y="3017520"/>
+            <a:ext cx="1691639" cy="365760"/>
+          </a:xfrm>
+          <a:prstGeom prst="rect">
+            <a:avLst/>
+          </a:prstGeom>
+          <a:noFill/>
+        </p:spPr>
+        <p:txBody>
+          <a:bodyPr wrap="square">
+            <a:spAutoFit/>
+          </a:bodyPr>
+          <a:lstStyle/>
+          <a:p>
+            <a:pPr algn="l">
+              <a:defRPr sz="1100" b="1">
+                <a:solidFill>
+                  <a:srgbClr val="E74C3C"/>
+                </a:solidFill>
+                <a:latin typeface="Calibri"/>
+              </a:defRPr>
+            </a:pPr>
+            <a:r>
+              <a:t>Throttling inverts contention model</a:t>
+            </a:r>
+          </a:p>
+        </p:txBody>
+      </p:sp>
+      <p:sp>
+        <p:nvSpPr>
+          <p:cNvPr id="24" name="TextBox 23"/>
+          <p:cNvSpPr txBox="1"/>
+          <p:nvPr/>
+        </p:nvSpPr>
+        <p:spPr>
+          <a:xfrm>
+            <a:off x="6172199" y="3429000"/>
+            <a:ext cx="1691639" cy="2514600"/>
+          </a:xfrm>
+          <a:prstGeom prst="rect">
+            <a:avLst/>
+          </a:prstGeom>
+          <a:noFill/>
+        </p:spPr>
+        <p:txBody>
+          <a:bodyPr wrap="square">
+            <a:spAutoFit/>
+          </a:bodyPr>
+          <a:lstStyle/>
+          <a:p>
+            <a:pPr algn="l">
+              <a:defRPr sz="900" b="0">
+                <a:solidFill>
+                  <a:srgbClr val="BDBDBD"/>
+                </a:solidFill>
+                <a:latin typeface="Calibri"/>
+              </a:defRPr>
+            </a:pPr>
+            <a:r>
+              <a:t>Densest packing (colocate, median 1.54) throttles less than default (1.90) and spread (1.94) under churn — holds in 11/13 runs. Inverts Bubble-Up's dense=more-contention prediction.</a:t>
+            </a:r>
+          </a:p>
+        </p:txBody>
+      </p:sp>
+      <p:sp>
+        <p:nvSpPr>
+          <p:cNvPr id="25" name="Rounded Rectangle 24"/>
+          <p:cNvSpPr/>
+          <p:nvPr/>
+        </p:nvSpPr>
+        <p:spPr>
+          <a:xfrm>
+            <a:off x="8000999" y="2651760"/>
+            <a:ext cx="1874519" cy="3383280"/>
           </a:xfrm>
           <a:prstGeom prst="roundRect">
             <a:avLst/>
@@ -10070,14 +10208,14 @@
       </p:sp>
       <p:sp>
         <p:nvSpPr>
-          <p:cNvPr id="23" name="Rounded Rectangle 22"/>
+          <p:cNvPr id="26" name="Rounded Rectangle 25"/>
           <p:cNvSpPr/>
           <p:nvPr/>
         </p:nvSpPr>
         <p:spPr>
           <a:xfrm>
-            <a:off x="7315199" y="2331720"/>
-            <a:ext cx="2331720" cy="320040"/>
+            <a:off x="8000999" y="2651760"/>
+            <a:ext cx="1874519" cy="320040"/>
           </a:xfrm>
           <a:prstGeom prst="roundRect">
             <a:avLst/>
@@ -10116,21 +10254,21 @@
               </a:defRPr>
             </a:pPr>
             <a:r>
-              <a:t>H4</a:t>
-            </a:r>
-          </a:p>
-        </p:txBody>
-      </p:sp>
-      <p:sp>
-        <p:nvSpPr>
-          <p:cNvPr id="24" name="TextBox 23"/>
+              <a:t>H5</a:t>
+            </a:r>
+          </a:p>
+        </p:txBody>
+      </p:sp>
+      <p:sp>
+        <p:nvSpPr>
+          <p:cNvPr id="27" name="TextBox 26"/>
           <p:cNvSpPr txBox="1"/>
           <p:nvPr/>
         </p:nvSpPr>
         <p:spPr>
           <a:xfrm>
-            <a:off x="7406640" y="2697479"/>
-            <a:ext cx="2148839" cy="365760"/>
+            <a:off x="8092439" y="3017520"/>
+            <a:ext cx="1691639" cy="365760"/>
           </a:xfrm>
           <a:prstGeom prst="rect">
             <a:avLst/>
@@ -10152,21 +10290,21 @@
               </a:defRPr>
             </a:pPr>
             <a:r>
-              <a:t>Baseline predicts resilience</a:t>
-            </a:r>
-          </a:p>
-        </p:txBody>
-      </p:sp>
-      <p:sp>
-        <p:nvSpPr>
-          <p:cNvPr id="25" name="TextBox 24"/>
+              <a:t>Fault signal is in the tail</a:t>
+            </a:r>
+          </a:p>
+        </p:txBody>
+      </p:sp>
+      <p:sp>
+        <p:nvSpPr>
+          <p:cNvPr id="28" name="TextBox 27"/>
           <p:cNvSpPr txBox="1"/>
           <p:nvPr/>
         </p:nvSpPr>
         <p:spPr>
           <a:xfrm>
-            <a:off x="7406640" y="3108960"/>
-            <a:ext cx="2148839" cy="1005839"/>
+            <a:off x="8092439" y="3429000"/>
+            <a:ext cx="1691639" cy="2514600"/>
           </a:xfrm>
           <a:prstGeom prst="rect">
             <a:avLst/>
@@ -10188,701 +10326,21 @@
               </a:defRPr>
             </a:pPr>
             <a:r>
-              <a:t>Strategies with lower pre-chaos latency variance score higher under chaos. The resting-state fingerprint predicts the failure response before any fault is injected.</a:t>
-            </a:r>
-          </a:p>
-        </p:txBody>
-      </p:sp>
-      <p:sp>
-        <p:nvSpPr>
-          <p:cNvPr id="26" name="Rounded Rectangle 25"/>
+              <a:t>Targeted route during chaos: mean 231 ms but p95 619 / max 3334 ms; unaffected routes stay flat at 70-110 ms. Mean-based SLOs miss the fault (Dean &amp; Barroso, CACM 2013).</a:t>
+            </a:r>
+          </a:p>
+        </p:txBody>
+      </p:sp>
+      <p:sp>
+        <p:nvSpPr>
+          <p:cNvPr id="29" name="Rounded Rectangle 28"/>
           <p:cNvSpPr/>
           <p:nvPr/>
         </p:nvSpPr>
         <p:spPr>
           <a:xfrm>
-            <a:off x="9692639" y="2331720"/>
-            <a:ext cx="2331720" cy="1874519"/>
-          </a:xfrm>
-          <a:prstGeom prst="roundRect">
-            <a:avLst/>
-          </a:prstGeom>
-          <a:solidFill>
-            <a:srgbClr val="121222"/>
-          </a:solidFill>
-          <a:ln w="25400">
-            <a:solidFill>
-              <a:srgbClr val="F39C12"/>
-            </a:solidFill>
-          </a:ln>
-        </p:spPr>
-        <p:style>
-          <a:lnRef idx="1">
-            <a:schemeClr val="accent1"/>
-          </a:lnRef>
-          <a:fillRef idx="3">
-            <a:schemeClr val="accent1"/>
-          </a:fillRef>
-          <a:effectRef idx="2">
-            <a:schemeClr val="accent1"/>
-          </a:effectRef>
-          <a:fontRef idx="minor">
-            <a:schemeClr val="lt1"/>
-          </a:fontRef>
-        </p:style>
-        <p:txBody>
-          <a:bodyPr rtlCol="0" anchor="ctr"/>
-          <a:lstStyle/>
-          <a:p>
-            <a:pPr algn="ctr"/>
-          </a:p>
-        </p:txBody>
-      </p:sp>
-      <p:sp>
-        <p:nvSpPr>
-          <p:cNvPr id="27" name="Rounded Rectangle 26"/>
-          <p:cNvSpPr/>
-          <p:nvPr/>
-        </p:nvSpPr>
-        <p:spPr>
-          <a:xfrm>
-            <a:off x="9692639" y="2331720"/>
-            <a:ext cx="2331720" cy="320040"/>
-          </a:xfrm>
-          <a:prstGeom prst="roundRect">
-            <a:avLst/>
-          </a:prstGeom>
-          <a:solidFill>
-            <a:srgbClr val="F39C12"/>
-          </a:solidFill>
-          <a:ln>
-            <a:noFill/>
-          </a:ln>
-        </p:spPr>
-        <p:style>
-          <a:lnRef idx="1">
-            <a:schemeClr val="accent1"/>
-          </a:lnRef>
-          <a:fillRef idx="3">
-            <a:schemeClr val="accent1"/>
-          </a:fillRef>
-          <a:effectRef idx="2">
-            <a:schemeClr val="accent1"/>
-          </a:effectRef>
-          <a:fontRef idx="minor">
-            <a:schemeClr val="lt1"/>
-          </a:fontRef>
-        </p:style>
-        <p:txBody>
-          <a:bodyPr rtlCol="0" anchor="ctr" wrap="square" lIns="50800" rIns="50800" tIns="25400" bIns="25400"/>
-          <a:lstStyle/>
-          <a:p>
-            <a:pPr algn="ctr">
-              <a:defRPr sz="1300" b="1">
-                <a:solidFill>
-                  <a:srgbClr val="FFFFFF"/>
-                </a:solidFill>
-                <a:latin typeface="Calibri"/>
-              </a:defRPr>
-            </a:pPr>
-            <a:r>
-              <a:t>H5</a:t>
-            </a:r>
-          </a:p>
-        </p:txBody>
-      </p:sp>
-      <p:sp>
-        <p:nvSpPr>
-          <p:cNvPr id="28" name="TextBox 27"/>
-          <p:cNvSpPr txBox="1"/>
-          <p:nvPr/>
-        </p:nvSpPr>
-        <p:spPr>
-          <a:xfrm>
-            <a:off x="9784079" y="2697479"/>
-            <a:ext cx="2148839" cy="365760"/>
-          </a:xfrm>
-          <a:prstGeom prst="rect">
-            <a:avLst/>
-          </a:prstGeom>
-          <a:noFill/>
-        </p:spPr>
-        <p:txBody>
-          <a:bodyPr wrap="square">
-            <a:spAutoFit/>
-          </a:bodyPr>
-          <a:lstStyle/>
-          <a:p>
-            <a:pPr algn="l">
-              <a:defRPr sz="1100" b="1">
-                <a:solidFill>
-                  <a:srgbClr val="F39C12"/>
-                </a:solidFill>
-                <a:latin typeface="Calibri"/>
-              </a:defRPr>
-            </a:pPr>
-            <a:r>
-              <a:t>Mean masks tail</a:t>
-            </a:r>
-          </a:p>
-        </p:txBody>
-      </p:sp>
-      <p:sp>
-        <p:nvSpPr>
-          <p:cNvPr id="29" name="TextBox 28"/>
-          <p:cNvSpPr txBox="1"/>
-          <p:nvPr/>
-        </p:nvSpPr>
-        <p:spPr>
-          <a:xfrm>
-            <a:off x="9784079" y="3108960"/>
-            <a:ext cx="2148839" cy="1005839"/>
-          </a:xfrm>
-          <a:prstGeom prst="rect">
-            <a:avLst/>
-          </a:prstGeom>
-          <a:noFill/>
-        </p:spPr>
-        <p:txBody>
-          <a:bodyPr wrap="square">
-            <a:spAutoFit/>
-          </a:bodyPr>
-          <a:lstStyle/>
-          <a:p>
-            <a:pPr algn="l">
-              <a:defRPr sz="900" b="0">
-                <a:solidFill>
-                  <a:srgbClr val="BDBDBD"/>
-                </a:solidFill>
-                <a:latin typeface="Calibri"/>
-              </a:defRPr>
-            </a:pPr>
-            <a:r>
-              <a:t>p95 latency ranking across strategies differs from mean ranking. Tail percentiles concentrate placement effects (Dean &amp; Barroso, CACM 2013).</a:t>
-            </a:r>
-          </a:p>
-        </p:txBody>
-      </p:sp>
-      <p:sp>
-        <p:nvSpPr>
-          <p:cNvPr id="30" name="Rounded Rectangle 29"/>
-          <p:cNvSpPr/>
-          <p:nvPr/>
-        </p:nvSpPr>
-        <p:spPr>
-          <a:xfrm>
-            <a:off x="182880" y="4480560"/>
-            <a:ext cx="2331720" cy="1874519"/>
-          </a:xfrm>
-          <a:prstGeom prst="roundRect">
-            <a:avLst/>
-          </a:prstGeom>
-          <a:solidFill>
-            <a:srgbClr val="121222"/>
-          </a:solidFill>
-          <a:ln w="25400">
-            <a:solidFill>
-              <a:srgbClr val="E74C3C"/>
-            </a:solidFill>
-          </a:ln>
-        </p:spPr>
-        <p:style>
-          <a:lnRef idx="1">
-            <a:schemeClr val="accent1"/>
-          </a:lnRef>
-          <a:fillRef idx="3">
-            <a:schemeClr val="accent1"/>
-          </a:fillRef>
-          <a:effectRef idx="2">
-            <a:schemeClr val="accent1"/>
-          </a:effectRef>
-          <a:fontRef idx="minor">
-            <a:schemeClr val="lt1"/>
-          </a:fontRef>
-        </p:style>
-        <p:txBody>
-          <a:bodyPr rtlCol="0" anchor="ctr"/>
-          <a:lstStyle/>
-          <a:p>
-            <a:pPr algn="ctr"/>
-          </a:p>
-        </p:txBody>
-      </p:sp>
-      <p:sp>
-        <p:nvSpPr>
-          <p:cNvPr id="31" name="Rounded Rectangle 30"/>
-          <p:cNvSpPr/>
-          <p:nvPr/>
-        </p:nvSpPr>
-        <p:spPr>
-          <a:xfrm>
-            <a:off x="182880" y="4480560"/>
-            <a:ext cx="2331720" cy="320040"/>
-          </a:xfrm>
-          <a:prstGeom prst="roundRect">
-            <a:avLst/>
-          </a:prstGeom>
-          <a:solidFill>
-            <a:srgbClr val="E74C3C"/>
-          </a:solidFill>
-          <a:ln>
-            <a:noFill/>
-          </a:ln>
-        </p:spPr>
-        <p:style>
-          <a:lnRef idx="1">
-            <a:schemeClr val="accent1"/>
-          </a:lnRef>
-          <a:fillRef idx="3">
-            <a:schemeClr val="accent1"/>
-          </a:fillRef>
-          <a:effectRef idx="2">
-            <a:schemeClr val="accent1"/>
-          </a:effectRef>
-          <a:fontRef idx="minor">
-            <a:schemeClr val="lt1"/>
-          </a:fontRef>
-        </p:style>
-        <p:txBody>
-          <a:bodyPr rtlCol="0" anchor="ctr" wrap="square" lIns="50800" rIns="50800" tIns="25400" bIns="25400"/>
-          <a:lstStyle/>
-          <a:p>
-            <a:pPr algn="ctr">
-              <a:defRPr sz="1300" b="1">
-                <a:solidFill>
-                  <a:srgbClr val="FFFFFF"/>
-                </a:solidFill>
-                <a:latin typeface="Calibri"/>
-              </a:defRPr>
-            </a:pPr>
-            <a:r>
-              <a:t>H6</a:t>
-            </a:r>
-          </a:p>
-        </p:txBody>
-      </p:sp>
-      <p:sp>
-        <p:nvSpPr>
-          <p:cNvPr id="32" name="TextBox 31"/>
-          <p:cNvSpPr txBox="1"/>
-          <p:nvPr/>
-        </p:nvSpPr>
-        <p:spPr>
-          <a:xfrm>
-            <a:off x="274320" y="4846320"/>
-            <a:ext cx="2148839" cy="365760"/>
-          </a:xfrm>
-          <a:prstGeom prst="rect">
-            <a:avLst/>
-          </a:prstGeom>
-          <a:noFill/>
-        </p:spPr>
-        <p:txBody>
-          <a:bodyPr wrap="square">
-            <a:spAutoFit/>
-          </a:bodyPr>
-          <a:lstStyle/>
-          <a:p>
-            <a:pPr algn="l">
-              <a:defRPr sz="1100" b="1">
-                <a:solidFill>
-                  <a:srgbClr val="E74C3C"/>
-                </a:solidFill>
-                <a:latin typeface="Calibri"/>
-              </a:defRPr>
-            </a:pPr>
-            <a:r>
-              <a:t>Cross-pod variance → leakage</a:t>
-            </a:r>
-          </a:p>
-        </p:txBody>
-      </p:sp>
-      <p:sp>
-        <p:nvSpPr>
-          <p:cNvPr id="33" name="TextBox 32"/>
-          <p:cNvSpPr txBox="1"/>
-          <p:nvPr/>
-        </p:nvSpPr>
-        <p:spPr>
-          <a:xfrm>
-            <a:off x="274320" y="5257800"/>
-            <a:ext cx="2148839" cy="1005839"/>
-          </a:xfrm>
-          <a:prstGeom prst="rect">
-            <a:avLst/>
-          </a:prstGeom>
-          <a:noFill/>
-        </p:spPr>
-        <p:txBody>
-          <a:bodyPr wrap="square">
-            <a:spAutoFit/>
-          </a:bodyPr>
-          <a:lstStyle/>
-          <a:p>
-            <a:pPr algn="l">
-              <a:defRPr sz="900" b="0">
-                <a:solidFill>
-                  <a:srgbClr val="BDBDBD"/>
-                </a:solidFill>
-                <a:latin typeface="Calibri"/>
-              </a:defRPr>
-            </a:pPr>
-            <a:r>
-              <a:t>Pre-chaos cross-node stddev predicts whether a strategy lands in the containment cluster (3-17% conntrack drop) or the leakage cluster (30-49% drop).</a:t>
-            </a:r>
-          </a:p>
-        </p:txBody>
-      </p:sp>
-      <p:sp>
-        <p:nvSpPr>
-          <p:cNvPr id="34" name="Rounded Rectangle 33"/>
-          <p:cNvSpPr/>
-          <p:nvPr/>
-        </p:nvSpPr>
-        <p:spPr>
-          <a:xfrm>
-            <a:off x="2560320" y="4480560"/>
-            <a:ext cx="2331720" cy="1874519"/>
-          </a:xfrm>
-          <a:prstGeom prst="roundRect">
-            <a:avLst/>
-          </a:prstGeom>
-          <a:solidFill>
-            <a:srgbClr val="121222"/>
-          </a:solidFill>
-          <a:ln w="25400">
-            <a:solidFill>
-              <a:srgbClr val="E74C3C"/>
-            </a:solidFill>
-          </a:ln>
-        </p:spPr>
-        <p:style>
-          <a:lnRef idx="1">
-            <a:schemeClr val="accent1"/>
-          </a:lnRef>
-          <a:fillRef idx="3">
-            <a:schemeClr val="accent1"/>
-          </a:fillRef>
-          <a:effectRef idx="2">
-            <a:schemeClr val="accent1"/>
-          </a:effectRef>
-          <a:fontRef idx="minor">
-            <a:schemeClr val="lt1"/>
-          </a:fontRef>
-        </p:style>
-        <p:txBody>
-          <a:bodyPr rtlCol="0" anchor="ctr"/>
-          <a:lstStyle/>
-          <a:p>
-            <a:pPr algn="ctr"/>
-          </a:p>
-        </p:txBody>
-      </p:sp>
-      <p:sp>
-        <p:nvSpPr>
-          <p:cNvPr id="35" name="Rounded Rectangle 34"/>
-          <p:cNvSpPr/>
-          <p:nvPr/>
-        </p:nvSpPr>
-        <p:spPr>
-          <a:xfrm>
-            <a:off x="2560320" y="4480560"/>
-            <a:ext cx="2331720" cy="320040"/>
-          </a:xfrm>
-          <a:prstGeom prst="roundRect">
-            <a:avLst/>
-          </a:prstGeom>
-          <a:solidFill>
-            <a:srgbClr val="E74C3C"/>
-          </a:solidFill>
-          <a:ln>
-            <a:noFill/>
-          </a:ln>
-        </p:spPr>
-        <p:style>
-          <a:lnRef idx="1">
-            <a:schemeClr val="accent1"/>
-          </a:lnRef>
-          <a:fillRef idx="3">
-            <a:schemeClr val="accent1"/>
-          </a:fillRef>
-          <a:effectRef idx="2">
-            <a:schemeClr val="accent1"/>
-          </a:effectRef>
-          <a:fontRef idx="minor">
-            <a:schemeClr val="lt1"/>
-          </a:fontRef>
-        </p:style>
-        <p:txBody>
-          <a:bodyPr rtlCol="0" anchor="ctr" wrap="square" lIns="50800" rIns="50800" tIns="25400" bIns="25400"/>
-          <a:lstStyle/>
-          <a:p>
-            <a:pPr algn="ctr">
-              <a:defRPr sz="1300" b="1">
-                <a:solidFill>
-                  <a:srgbClr val="FFFFFF"/>
-                </a:solidFill>
-                <a:latin typeface="Calibri"/>
-              </a:defRPr>
-            </a:pPr>
-            <a:r>
-              <a:t>H7</a:t>
-            </a:r>
-          </a:p>
-        </p:txBody>
-      </p:sp>
-      <p:sp>
-        <p:nvSpPr>
-          <p:cNvPr id="36" name="TextBox 35"/>
-          <p:cNvSpPr txBox="1"/>
-          <p:nvPr/>
-        </p:nvSpPr>
-        <p:spPr>
-          <a:xfrm>
-            <a:off x="2651760" y="4846320"/>
-            <a:ext cx="2148839" cy="365760"/>
-          </a:xfrm>
-          <a:prstGeom prst="rect">
-            <a:avLst/>
-          </a:prstGeom>
-          <a:noFill/>
-        </p:spPr>
-        <p:txBody>
-          <a:bodyPr wrap="square">
-            <a:spAutoFit/>
-          </a:bodyPr>
-          <a:lstStyle/>
-          <a:p>
-            <a:pPr algn="l">
-              <a:defRPr sz="1100" b="1">
-                <a:solidFill>
-                  <a:srgbClr val="E74C3C"/>
-                </a:solidFill>
-                <a:latin typeface="Calibri"/>
-              </a:defRPr>
-            </a:pPr>
-            <a:r>
-              <a:t>CPU throttling refutes contention model</a:t>
-            </a:r>
-          </a:p>
-        </p:txBody>
-      </p:sp>
-      <p:sp>
-        <p:nvSpPr>
-          <p:cNvPr id="37" name="TextBox 36"/>
-          <p:cNvSpPr txBox="1"/>
-          <p:nvPr/>
-        </p:nvSpPr>
-        <p:spPr>
-          <a:xfrm>
-            <a:off x="2651760" y="5257800"/>
-            <a:ext cx="2148839" cy="1005839"/>
-          </a:xfrm>
-          <a:prstGeom prst="rect">
-            <a:avLst/>
-          </a:prstGeom>
-          <a:noFill/>
-        </p:spPr>
-        <p:txBody>
-          <a:bodyPr wrap="square">
-            <a:spAutoFit/>
-          </a:bodyPr>
-          <a:lstStyle/>
-          <a:p>
-            <a:pPr algn="l">
-              <a:defRPr sz="900" b="0">
-                <a:solidFill>
-                  <a:srgbClr val="BDBDBD"/>
-                </a:solidFill>
-                <a:latin typeface="Calibri"/>
-              </a:defRPr>
-            </a:pPr>
-            <a:r>
-              <a:t>Under pod-delete, colocate throttles less (0.89) than spread (1.52) — opposite of Bubble-Up's contention prediction. Mars 2011 doesn't fit churn-based faults.</a:t>
-            </a:r>
-          </a:p>
-        </p:txBody>
-      </p:sp>
-      <p:sp>
-        <p:nvSpPr>
-          <p:cNvPr id="38" name="Rounded Rectangle 37"/>
-          <p:cNvSpPr/>
-          <p:nvPr/>
-        </p:nvSpPr>
-        <p:spPr>
-          <a:xfrm>
-            <a:off x="4937759" y="4480560"/>
-            <a:ext cx="2331720" cy="1874519"/>
-          </a:xfrm>
-          <a:prstGeom prst="roundRect">
-            <a:avLst/>
-          </a:prstGeom>
-          <a:solidFill>
-            <a:srgbClr val="121222"/>
-          </a:solidFill>
-          <a:ln w="25400">
-            <a:solidFill>
-              <a:srgbClr val="E74C3C"/>
-            </a:solidFill>
-          </a:ln>
-        </p:spPr>
-        <p:style>
-          <a:lnRef idx="1">
-            <a:schemeClr val="accent1"/>
-          </a:lnRef>
-          <a:fillRef idx="3">
-            <a:schemeClr val="accent1"/>
-          </a:fillRef>
-          <a:effectRef idx="2">
-            <a:schemeClr val="accent1"/>
-          </a:effectRef>
-          <a:fontRef idx="minor">
-            <a:schemeClr val="lt1"/>
-          </a:fontRef>
-        </p:style>
-        <p:txBody>
-          <a:bodyPr rtlCol="0" anchor="ctr"/>
-          <a:lstStyle/>
-          <a:p>
-            <a:pPr algn="ctr"/>
-          </a:p>
-        </p:txBody>
-      </p:sp>
-      <p:sp>
-        <p:nvSpPr>
-          <p:cNvPr id="39" name="Rounded Rectangle 38"/>
-          <p:cNvSpPr/>
-          <p:nvPr/>
-        </p:nvSpPr>
-        <p:spPr>
-          <a:xfrm>
-            <a:off x="4937759" y="4480560"/>
-            <a:ext cx="2331720" cy="320040"/>
-          </a:xfrm>
-          <a:prstGeom prst="roundRect">
-            <a:avLst/>
-          </a:prstGeom>
-          <a:solidFill>
-            <a:srgbClr val="E74C3C"/>
-          </a:solidFill>
-          <a:ln>
-            <a:noFill/>
-          </a:ln>
-        </p:spPr>
-        <p:style>
-          <a:lnRef idx="1">
-            <a:schemeClr val="accent1"/>
-          </a:lnRef>
-          <a:fillRef idx="3">
-            <a:schemeClr val="accent1"/>
-          </a:fillRef>
-          <a:effectRef idx="2">
-            <a:schemeClr val="accent1"/>
-          </a:effectRef>
-          <a:fontRef idx="minor">
-            <a:schemeClr val="lt1"/>
-          </a:fontRef>
-        </p:style>
-        <p:txBody>
-          <a:bodyPr rtlCol="0" anchor="ctr" wrap="square" lIns="50800" rIns="50800" tIns="25400" bIns="25400"/>
-          <a:lstStyle/>
-          <a:p>
-            <a:pPr algn="ctr">
-              <a:defRPr sz="1300" b="1">
-                <a:solidFill>
-                  <a:srgbClr val="FFFFFF"/>
-                </a:solidFill>
-                <a:latin typeface="Calibri"/>
-              </a:defRPr>
-            </a:pPr>
-            <a:r>
-              <a:t>H8</a:t>
-            </a:r>
-          </a:p>
-        </p:txBody>
-      </p:sp>
-      <p:sp>
-        <p:nvSpPr>
-          <p:cNvPr id="40" name="TextBox 39"/>
-          <p:cNvSpPr txBox="1"/>
-          <p:nvPr/>
-        </p:nvSpPr>
-        <p:spPr>
-          <a:xfrm>
-            <a:off x="5029199" y="4846320"/>
-            <a:ext cx="2148839" cy="365760"/>
-          </a:xfrm>
-          <a:prstGeom prst="rect">
-            <a:avLst/>
-          </a:prstGeom>
-          <a:noFill/>
-        </p:spPr>
-        <p:txBody>
-          <a:bodyPr wrap="square">
-            <a:spAutoFit/>
-          </a:bodyPr>
-          <a:lstStyle/>
-          <a:p>
-            <a:pPr algn="l">
-              <a:defRPr sz="1100" b="1">
-                <a:solidFill>
-                  <a:srgbClr val="E74C3C"/>
-                </a:solidFill>
-                <a:latin typeface="Calibri"/>
-              </a:defRPr>
-            </a:pPr>
-            <a:r>
-              <a:t>SLO + conntrack signals leakage</a:t>
-            </a:r>
-          </a:p>
-        </p:txBody>
-      </p:sp>
-      <p:sp>
-        <p:nvSpPr>
-          <p:cNvPr id="41" name="TextBox 40"/>
-          <p:cNvSpPr txBox="1"/>
-          <p:nvPr/>
-        </p:nvSpPr>
-        <p:spPr>
-          <a:xfrm>
-            <a:off x="5029199" y="5257800"/>
-            <a:ext cx="2148839" cy="1005839"/>
-          </a:xfrm>
-          <a:prstGeom prst="rect">
-            <a:avLst/>
-          </a:prstGeom>
-          <a:noFill/>
-        </p:spPr>
-        <p:txBody>
-          <a:bodyPr wrap="square">
-            <a:spAutoFit/>
-          </a:bodyPr>
-          <a:lstStyle/>
-          <a:p>
-            <a:pPr algn="l">
-              <a:defRPr sz="900" b="0">
-                <a:solidFill>
-                  <a:srgbClr val="BDBDBD"/>
-                </a:solidFill>
-                <a:latin typeface="Calibri"/>
-              </a:defRPr>
-            </a:pPr>
-            <a:r>
-              <a:t>Conntrack flushing during chaos correlates with leakage: spread 49%, dep-aware 3%. The K8s Network Programming Latency SLO measures the churn mechanism directly.</a:t>
-            </a:r>
-          </a:p>
-        </p:txBody>
-      </p:sp>
-      <p:sp>
-        <p:nvSpPr>
-          <p:cNvPr id="42" name="Rounded Rectangle 41"/>
-          <p:cNvSpPr/>
-          <p:nvPr/>
-        </p:nvSpPr>
-        <p:spPr>
-          <a:xfrm>
-            <a:off x="7315199" y="4480560"/>
-            <a:ext cx="2331720" cy="1874519"/>
+            <a:off x="9921239" y="2651760"/>
+            <a:ext cx="1874519" cy="3383280"/>
           </a:xfrm>
           <a:prstGeom prst="roundRect">
             <a:avLst/>
@@ -10920,14 +10378,14 @@
       </p:sp>
       <p:sp>
         <p:nvSpPr>
-          <p:cNvPr id="43" name="Rounded Rectangle 42"/>
+          <p:cNvPr id="30" name="Rounded Rectangle 29"/>
           <p:cNvSpPr/>
           <p:nvPr/>
         </p:nvSpPr>
         <p:spPr>
           <a:xfrm>
-            <a:off x="7315199" y="4480560"/>
-            <a:ext cx="2331720" cy="320040"/>
+            <a:off x="9921239" y="2651760"/>
+            <a:ext cx="1874519" cy="320040"/>
           </a:xfrm>
           <a:prstGeom prst="roundRect">
             <a:avLst/>
@@ -10966,21 +10424,21 @@
               </a:defRPr>
             </a:pPr>
             <a:r>
-              <a:t>H9</a:t>
-            </a:r>
-          </a:p>
-        </p:txBody>
-      </p:sp>
-      <p:sp>
-        <p:nvSpPr>
-          <p:cNvPr id="44" name="TextBox 43"/>
+              <a:t>H6</a:t>
+            </a:r>
+          </a:p>
+        </p:txBody>
+      </p:sp>
+      <p:sp>
+        <p:nvSpPr>
+          <p:cNvPr id="31" name="TextBox 30"/>
           <p:cNvSpPr txBox="1"/>
           <p:nvPr/>
         </p:nvSpPr>
         <p:spPr>
           <a:xfrm>
-            <a:off x="7406640" y="4846320"/>
-            <a:ext cx="2148839" cy="365760"/>
+            <a:off x="10012679" y="3017520"/>
+            <a:ext cx="1691639" cy="365760"/>
           </a:xfrm>
           <a:prstGeom prst="rect">
             <a:avLst/>
@@ -11002,21 +10460,21 @@
               </a:defRPr>
             </a:pPr>
             <a:r>
-              <a:t>Scheduling latency dominates recovery</a:t>
-            </a:r>
-          </a:p>
-        </p:txBody>
-      </p:sp>
-      <p:sp>
-        <p:nvSpPr>
-          <p:cNvPr id="45" name="TextBox 44"/>
+              <a:t>Recovery is application-bound</a:t>
+            </a:r>
+          </a:p>
+        </p:txBody>
+      </p:sp>
+      <p:sp>
+        <p:nvSpPr>
+          <p:cNvPr id="32" name="TextBox 31"/>
           <p:cNvSpPr txBox="1"/>
           <p:nvPr/>
         </p:nvSpPr>
         <p:spPr>
           <a:xfrm>
-            <a:off x="7406640" y="5257800"/>
-            <a:ext cx="2148839" cy="1005839"/>
+            <a:off x="10012679" y="3429000"/>
+            <a:ext cx="1691639" cy="2514600"/>
           </a:xfrm>
           <a:prstGeom prst="rect">
             <a:avLst/>
@@ -11038,184 +10496,14 @@
               </a:defRPr>
             </a:pPr>
             <a:r>
-              <a:t>Recovery time = (deletion→scheduled) + (scheduled→ready). Placement affects only the first term; the second is application-bound and ~constant across strategies.</a:t>
-            </a:r>
-          </a:p>
-        </p:txBody>
-      </p:sp>
-      <p:sp>
-        <p:nvSpPr>
-          <p:cNvPr id="46" name="Rounded Rectangle 45"/>
-          <p:cNvSpPr/>
-          <p:nvPr/>
-        </p:nvSpPr>
-        <p:spPr>
-          <a:xfrm>
-            <a:off x="9692639" y="4480560"/>
-            <a:ext cx="2331720" cy="1874519"/>
-          </a:xfrm>
-          <a:prstGeom prst="roundRect">
-            <a:avLst/>
-          </a:prstGeom>
-          <a:solidFill>
-            <a:srgbClr val="121222"/>
-          </a:solidFill>
-          <a:ln w="25400">
-            <a:solidFill>
-              <a:srgbClr val="9B59B6"/>
-            </a:solidFill>
-          </a:ln>
-        </p:spPr>
-        <p:style>
-          <a:lnRef idx="1">
-            <a:schemeClr val="accent1"/>
-          </a:lnRef>
-          <a:fillRef idx="3">
-            <a:schemeClr val="accent1"/>
-          </a:fillRef>
-          <a:effectRef idx="2">
-            <a:schemeClr val="accent1"/>
-          </a:effectRef>
-          <a:fontRef idx="minor">
-            <a:schemeClr val="lt1"/>
-          </a:fontRef>
-        </p:style>
-        <p:txBody>
-          <a:bodyPr rtlCol="0" anchor="ctr"/>
-          <a:lstStyle/>
-          <a:p>
-            <a:pPr algn="ctr"/>
-          </a:p>
-        </p:txBody>
-      </p:sp>
-      <p:sp>
-        <p:nvSpPr>
-          <p:cNvPr id="47" name="Rounded Rectangle 46"/>
-          <p:cNvSpPr/>
-          <p:nvPr/>
-        </p:nvSpPr>
-        <p:spPr>
-          <a:xfrm>
-            <a:off x="9692639" y="4480560"/>
-            <a:ext cx="2331720" cy="320040"/>
-          </a:xfrm>
-          <a:prstGeom prst="roundRect">
-            <a:avLst/>
-          </a:prstGeom>
-          <a:solidFill>
-            <a:srgbClr val="9B59B6"/>
-          </a:solidFill>
-          <a:ln>
-            <a:noFill/>
-          </a:ln>
-        </p:spPr>
-        <p:style>
-          <a:lnRef idx="1">
-            <a:schemeClr val="accent1"/>
-          </a:lnRef>
-          <a:fillRef idx="3">
-            <a:schemeClr val="accent1"/>
-          </a:fillRef>
-          <a:effectRef idx="2">
-            <a:schemeClr val="accent1"/>
-          </a:effectRef>
-          <a:fontRef idx="minor">
-            <a:schemeClr val="lt1"/>
-          </a:fontRef>
-        </p:style>
-        <p:txBody>
-          <a:bodyPr rtlCol="0" anchor="ctr" wrap="square" lIns="50800" rIns="50800" tIns="25400" bIns="25400"/>
-          <a:lstStyle/>
-          <a:p>
-            <a:pPr algn="ctr">
-              <a:defRPr sz="1300" b="1">
-                <a:solidFill>
-                  <a:srgbClr val="FFFFFF"/>
-                </a:solidFill>
-                <a:latin typeface="Calibri"/>
-              </a:defRPr>
-            </a:pPr>
-            <a:r>
-              <a:t>H10</a:t>
-            </a:r>
-          </a:p>
-        </p:txBody>
-      </p:sp>
-      <p:sp>
-        <p:nvSpPr>
-          <p:cNvPr id="48" name="TextBox 47"/>
-          <p:cNvSpPr txBox="1"/>
-          <p:nvPr/>
-        </p:nvSpPr>
-        <p:spPr>
-          <a:xfrm>
-            <a:off x="9784079" y="4846320"/>
-            <a:ext cx="2148839" cy="365760"/>
-          </a:xfrm>
-          <a:prstGeom prst="rect">
-            <a:avLst/>
-          </a:prstGeom>
-          <a:noFill/>
-        </p:spPr>
-        <p:txBody>
-          <a:bodyPr wrap="square">
-            <a:spAutoFit/>
-          </a:bodyPr>
-          <a:lstStyle/>
-          <a:p>
-            <a:pPr algn="l">
-              <a:defRPr sz="1100" b="1">
-                <a:solidFill>
-                  <a:srgbClr val="9B59B6"/>
-                </a:solidFill>
-                <a:latin typeface="Calibri"/>
-              </a:defRPr>
-            </a:pPr>
-            <a:r>
-              <a:t>Post-chaos asymmetry as fingerprint</a:t>
-            </a:r>
-          </a:p>
-        </p:txBody>
-      </p:sp>
-      <p:sp>
-        <p:nvSpPr>
-          <p:cNvPr id="49" name="TextBox 48"/>
-          <p:cNvSpPr txBox="1"/>
-          <p:nvPr/>
-        </p:nvSpPr>
-        <p:spPr>
-          <a:xfrm>
-            <a:off x="9784079" y="5257800"/>
-            <a:ext cx="2148839" cy="1005839"/>
-          </a:xfrm>
-          <a:prstGeom prst="rect">
-            <a:avLst/>
-          </a:prstGeom>
-          <a:noFill/>
-        </p:spPr>
-        <p:txBody>
-          <a:bodyPr wrap="square">
-            <a:spAutoFit/>
-          </a:bodyPr>
-          <a:lstStyle/>
-          <a:p>
-            <a:pPr algn="l">
-              <a:defRPr sz="900" b="0">
-                <a:solidFill>
-                  <a:srgbClr val="BDBDBD"/>
-                </a:solidFill>
-                <a:latin typeface="Calibri"/>
-              </a:defRPr>
-            </a:pPr>
-            <a:r>
-              <a:t>Post-chaos metrics overshoot, undershoot, or stabilise per strategy. Redis throughput varies 50-450% post-chaos; the asymmetry pattern is itself a placement fingerprint.</a:t>
-            </a:r>
-          </a:p>
-        </p:txBody>
-      </p:sp>
-      <p:sp>
-        <p:nvSpPr>
-          <p:cNvPr id="50" name="TextBox 49"/>
+              <a:t>scheduled→ready is 84-96% of recovery time; placement only touches the 4-16% deletion→scheduled term. Placement has little leverage over how fast a pod recovers.</a:t>
+            </a:r>
+          </a:p>
+        </p:txBody>
+      </p:sp>
+      <p:sp>
+        <p:nvSpPr>
+          <p:cNvPr id="33" name="TextBox 32"/>
           <p:cNvSpPr txBox="1"/>
           <p:nvPr/>
         </p:nvSpPr>
@@ -16985,7 +16273,7 @@
               </a:defRPr>
             </a:pPr>
             <a:r>
-              <a:t>Cluster Topology (Proxmox / KVM)</a:t>
+              <a:t>Cluster Topology (Vagrant / libvirt)</a:t>
             </a:r>
           </a:p>
         </p:txBody>
@@ -17106,7 +16394,7 @@
             </a:r>
             <a:br/>
             <a:r>
-              <a:t>2 GiB</a:t>
+              <a:t>12 GiB</a:t>
             </a:r>
           </a:p>
         </p:txBody>
@@ -17626,7 +16914,7 @@
               </a:defRPr>
             </a:pPr>
             <a:r>
-              <a:t>K8s v1.28.6 • Calico CNI • containerd 1.7.11 • Total: 10 vCPU, 18 GiB</a:t>
+              <a:t>K8s v1.28.6 • Calico CNI • containerd 1.7.11 • Total: 10 vCPU, 28 GiB</a:t>
             </a:r>
           </a:p>
         </p:txBody>
@@ -20206,11 +19494,11 @@
               </a:defRPr>
             </a:pPr>
             <a:r>
-              <a:t>Proxmox</a:t>
+              <a:t>Vagrant</a:t>
             </a:r>
             <a:br/>
             <a:r>
-              <a:t>(KVM/QEMU)</a:t>
+              <a:t>(libvirt/KVM)</a:t>
             </a:r>
           </a:p>
         </p:txBody>
@@ -20246,7 +19534,7 @@
               </a:defRPr>
             </a:pPr>
             <a:r>
-              <a:t>Virtualization host.</a:t>
+              <a:t>VM provisioning.</a:t>
             </a:r>
             <a:br/>
             <a:r>
@@ -23933,7 +23221,7 @@
               </a:defRPr>
             </a:pPr>
             <a:r>
-              <a:t>• Baseline: 100.0% (stddev 0) —</a:t>
+              <a:t>• Baseline: 100% (stddev 0) —</a:t>
             </a:r>
             <a:br/>
             <a:r>
@@ -23956,19 +23244,11 @@
               </a:defRPr>
             </a:pPr>
             <a:r>
-              <a:t>• CONTAINMENT cluster (83.0, stddev 0):</a:t>
+              <a:t>• The score does NOT reproduce across</a:t>
             </a:r>
             <a:br/>
             <a:r>
-              <a:t>  colocate, random, dep-aware, adversarial.</a:t>
-            </a:r>
-            <a:br/>
-            <a:r>
-              <a:t>  Only the 2 strict probes (directly</a:t>
-            </a:r>
-            <a:br/>
-            <a:r>
-              <a:t>  targeted) fail; everything else passes</a:t>
+              <a:t>  the 13 collected runs:</a:t>
             </a:r>
           </a:p>
           <a:p>
@@ -23987,15 +23267,15 @@
               </a:defRPr>
             </a:pPr>
             <a:r>
-              <a:t>• PARTIAL LEAKAGE (66.3, stddev 29):</a:t>
+              <a:t>    colocate 49.7–83  (mean 69.5)</a:t>
             </a:r>
             <a:br/>
             <a:r>
-              <a:t>  spread, best-fit — moderate/loose/cmd</a:t>
+              <a:t>    spread   33–88.7  (mean 70.5)</a:t>
             </a:r>
             <a:br/>
             <a:r>
-              <a:t>  probes fail in ~1/3 of iterations</a:t>
+              <a:t>    default  33–83    (mean 58.9)</a:t>
             </a:r>
           </a:p>
           <a:p>
@@ -24014,11 +23294,11 @@
               </a:defRPr>
             </a:pPr>
             <a:r>
-              <a:t>• FULL LEAKAGE (49.7, stddev 29):</a:t>
+              <a:t>• Within-strategy stddev (11–17) dwarfs</a:t>
             </a:r>
             <a:br/>
             <a:r>
-              <a:t>  default — collateral damage routine</a:t>
+              <a:t>  the colocate-vs-spread gap (~1 point)</a:t>
             </a:r>
           </a:p>
           <a:p>
@@ -24037,11 +23317,11 @@
               </a:defRPr>
             </a:pPr>
             <a:r>
-              <a:t>• Bifurcation, not monotonic density;</a:t>
+              <a:t>• So the aggregate score cannot rank</a:t>
             </a:r>
             <a:br/>
             <a:r>
-              <a:t>  contradicts both H1 and H2</a:t>
+              <a:t>  placements — the signal is elsewhere</a:t>
             </a:r>
           </a:p>
         </p:txBody>
@@ -24122,7 +23402,7 @@
               </a:defRPr>
             </a:pPr>
             <a:r>
-              <a:t>Hypothesis Validation</a:t>
+              <a:t>What the aggregate score can adjudicate</a:t>
             </a:r>
           </a:p>
         </p:txBody>
@@ -24152,13 +23432,13 @@
             <a:pPr algn="l">
               <a:defRPr sz="1200" b="1">
                 <a:solidFill>
-                  <a:srgbClr val="E74C3C"/>
-                </a:solidFill>
-                <a:latin typeface="Calibri"/>
-              </a:defRPr>
-            </a:pPr>
-            <a:r>
-              <a:t>H1 (colocate = worst): REFUTED</a:t>
+                  <a:srgbClr val="F39C12"/>
+                </a:solidFill>
+                <a:latin typeface="Calibri"/>
+              </a:defRPr>
+            </a:pPr>
+            <a:r>
+              <a:t>L1 (colocate = worst): N/A</a:t>
             </a:r>
           </a:p>
         </p:txBody>
@@ -24188,13 +23468,13 @@
             <a:pPr algn="l">
               <a:defRPr sz="1200" b="1">
                 <a:solidFill>
-                  <a:srgbClr val="E74C3C"/>
-                </a:solidFill>
-                <a:latin typeface="Calibri"/>
-              </a:defRPr>
-            </a:pPr>
-            <a:r>
-              <a:t>H2 (spread = best): REFUTED</a:t>
+                  <a:srgbClr val="F39C12"/>
+                </a:solidFill>
+                <a:latin typeface="Calibri"/>
+              </a:defRPr>
+            </a:pPr>
+            <a:r>
+              <a:t>L2 (spread = best): N/A</a:t>
             </a:r>
           </a:p>
         </p:txBody>
@@ -24224,13 +23504,13 @@
             <a:pPr algn="l">
               <a:defRPr sz="1200" b="1">
                 <a:solidFill>
-                  <a:srgbClr val="E74C3C"/>
-                </a:solidFill>
-                <a:latin typeface="Calibri"/>
-              </a:defRPr>
-            </a:pPr>
-            <a:r>
-              <a:t>H3 (recovery → score): REFUTED</a:t>
+                  <a:srgbClr val="F39C12"/>
+                </a:solidFill>
+                <a:latin typeface="Calibri"/>
+              </a:defRPr>
+            </a:pPr>
+            <a:r>
+              <a:t>L3 (recovery → score): N/A</a:t>
             </a:r>
           </a:p>
         </p:txBody>
@@ -24266,7 +23546,7 @@
               </a:defRPr>
             </a:pPr>
             <a:r>
-              <a:t>Random has the fastest recovery (1120ms) and is tied for the best score; spread has the slowest recovery (1617ms) and sits in the leakage cluster.</a:t>
+              <a:t>The aggregate score is not reproducible run-to-run, so it cannot adjudicate L1–L3. They are resolved instead at the mechanism layer (next slides), where the signal IS stable.</a:t>
             </a:r>
           </a:p>
         </p:txBody>

--- a/ChaosProbe_Presentation.pptx
+++ b/ChaosProbe_Presentation.pptx
@@ -3602,7 +3602,7 @@
               </a:defRPr>
             </a:pPr>
             <a:r>
-              <a:t>Recovery is application-bound (H6)</a:t>
+              <a:t>Recovery is application-bound (S2)</a:t>
             </a:r>
           </a:p>
         </p:txBody>
@@ -3775,7 +3775,7 @@
               </a:defRPr>
             </a:pPr>
             <a:r>
-              <a:t>The fault signal is in the tail (H5)</a:t>
+              <a:t>The fault signal is in the tail</a:t>
             </a:r>
           </a:p>
         </p:txBody>
@@ -3929,7 +3929,7 @@
               </a:defRPr>
             </a:pPr>
             <a:r>
-              <a:t>Results — Resources &amp; Throughput</a:t>
+              <a:t>Results — Primary Metrics: Conntrack &amp; CPU (M1, M2)</a:t>
             </a:r>
           </a:p>
         </p:txBody>
@@ -4173,7 +4173,7 @@
               </a:defRPr>
             </a:pPr>
             <a:r>
-              <a:t>Throttling inverts the model (H4)</a:t>
+              <a:t>M2 — co-location lowers CPU contention</a:t>
             </a:r>
           </a:p>
         </p:txBody>
@@ -4342,7 +4342,7 @@
               </a:defRPr>
             </a:pPr>
             <a:r>
-              <a:t>Churn flushes conn-state (H3)</a:t>
+              <a:t>M1 — spreading flushes conn-state</a:t>
             </a:r>
           </a:p>
         </p:txBody>
@@ -4384,11 +4384,11 @@
               </a:defRPr>
             </a:pPr>
             <a:r>
-              <a:t>• Spread flushes 28–52% of node conntrack entries</a:t>
+              <a:t>• Spread/default flush 36–39% of node conntrack</a:t>
             </a:r>
             <a:br/>
             <a:r>
-              <a:t>  during churn; colocate stays flat (−15% to +3%)</a:t>
+              <a:t>  entries during churn; colocate stays flat (−1.6%)</a:t>
             </a:r>
           </a:p>
           <a:p>
@@ -4407,7 +4407,11 @@
               </a:defRPr>
             </a:pPr>
             <a:r>
-              <a:t>• Reproducible in all 12 runs measured</a:t>
+              <a:t>• Reproducible in all 12 runs measured — the primary,</a:t>
+            </a:r>
+            <a:br/>
+            <a:r>
+              <a:t>  large-effect fault-response metric</a:t>
             </a:r>
           </a:p>
           <a:p>
@@ -4430,7 +4434,7 @@
             </a:r>
             <a:br/>
             <a:r>
-              <a:t>  tears down — the mechanism behind the score noise</a:t>
+              <a:t>  tears down — both metrics favour co-location (M3)</a:t>
             </a:r>
           </a:p>
         </p:txBody>
@@ -5405,7 +5409,7 @@
               </a:defRPr>
             </a:pPr>
             <a:r>
-              <a:t>Score is the wrong instrument</a:t>
+              <a:t>M4 — score is the wrong instrument</a:t>
             </a:r>
           </a:p>
         </p:txBody>
@@ -5522,7 +5526,7 @@
               </a:defRPr>
             </a:pPr>
             <a:r>
-              <a:t>Mechanism layer reproduces</a:t>
+              <a:t>M1/M2 — metrics reproduce</a:t>
             </a:r>
           </a:p>
         </p:txBody>
@@ -5639,7 +5643,7 @@
               </a:defRPr>
             </a:pPr>
             <a:r>
-              <a:t>Churn-driven, not contention</a:t>
+              <a:t>M3 — churn-driven, not contention</a:t>
             </a:r>
           </a:p>
         </p:txBody>
@@ -9398,13 +9402,13 @@
             <a:pPr algn="l">
               <a:defRPr sz="1100" b="1">
                 <a:solidFill>
-                  <a:srgbClr val="0096D6"/>
-                </a:solidFill>
-                <a:latin typeface="Calibri"/>
-              </a:defRPr>
-            </a:pPr>
-            <a:r>
-              <a:t>Framework</a:t>
+                  <a:srgbClr val="E74C3C"/>
+                </a:solidFill>
+                <a:latin typeface="Calibri"/>
+              </a:defRPr>
+            </a:pPr>
+            <a:r>
+              <a:t>Primary results — metrics</a:t>
             </a:r>
           </a:p>
         </p:txBody>
@@ -9417,7 +9421,7 @@
         </p:nvSpPr>
         <p:spPr>
           <a:xfrm>
-            <a:off x="4160520" y="2331720"/>
+            <a:off x="6080760" y="2331720"/>
             <a:ext cx="3657600" cy="228600"/>
           </a:xfrm>
           <a:prstGeom prst="rect">
@@ -9434,13 +9438,13 @@
             <a:pPr algn="l">
               <a:defRPr sz="1100" b="1">
                 <a:solidFill>
-                  <a:srgbClr val="E74C3C"/>
-                </a:solidFill>
-                <a:latin typeface="Calibri"/>
-              </a:defRPr>
-            </a:pPr>
-            <a:r>
-              <a:t>Mechanism (reproducible)</a:t>
+                  <a:srgbClr val="0096D6"/>
+                </a:solidFill>
+                <a:latin typeface="Calibri"/>
+              </a:defRPr>
+            </a:pPr>
+            <a:r>
+              <a:t>Methodology</a:t>
             </a:r>
           </a:p>
         </p:txBody>
@@ -9476,7 +9480,7 @@
               </a:defRPr>
             </a:pPr>
             <a:r>
-              <a:t>Tail &amp; recovery</a:t>
+              <a:t>Context &amp; support</a:t>
             </a:r>
           </a:p>
         </p:txBody>
@@ -9490,6 +9494,516 @@
         <p:spPr>
           <a:xfrm>
             <a:off x="320040" y="2651760"/>
+            <a:ext cx="1874519" cy="3383280"/>
+          </a:xfrm>
+          <a:prstGeom prst="roundRect">
+            <a:avLst/>
+          </a:prstGeom>
+          <a:solidFill>
+            <a:srgbClr val="121222"/>
+          </a:solidFill>
+          <a:ln w="25400">
+            <a:solidFill>
+              <a:srgbClr val="E74C3C"/>
+            </a:solidFill>
+          </a:ln>
+        </p:spPr>
+        <p:style>
+          <a:lnRef idx="1">
+            <a:schemeClr val="accent1"/>
+          </a:lnRef>
+          <a:fillRef idx="3">
+            <a:schemeClr val="accent1"/>
+          </a:fillRef>
+          <a:effectRef idx="2">
+            <a:schemeClr val="accent1"/>
+          </a:effectRef>
+          <a:fontRef idx="minor">
+            <a:schemeClr val="lt1"/>
+          </a:fontRef>
+        </p:style>
+        <p:txBody>
+          <a:bodyPr rtlCol="0" anchor="ctr"/>
+          <a:lstStyle/>
+          <a:p>
+            <a:pPr algn="ctr"/>
+          </a:p>
+        </p:txBody>
+      </p:sp>
+      <p:sp>
+        <p:nvSpPr>
+          <p:cNvPr id="10" name="Rounded Rectangle 9"/>
+          <p:cNvSpPr/>
+          <p:nvPr/>
+        </p:nvSpPr>
+        <p:spPr>
+          <a:xfrm>
+            <a:off x="320040" y="2651760"/>
+            <a:ext cx="1874519" cy="320040"/>
+          </a:xfrm>
+          <a:prstGeom prst="roundRect">
+            <a:avLst/>
+          </a:prstGeom>
+          <a:solidFill>
+            <a:srgbClr val="E74C3C"/>
+          </a:solidFill>
+          <a:ln>
+            <a:noFill/>
+          </a:ln>
+        </p:spPr>
+        <p:style>
+          <a:lnRef idx="1">
+            <a:schemeClr val="accent1"/>
+          </a:lnRef>
+          <a:fillRef idx="3">
+            <a:schemeClr val="accent1"/>
+          </a:fillRef>
+          <a:effectRef idx="2">
+            <a:schemeClr val="accent1"/>
+          </a:effectRef>
+          <a:fontRef idx="minor">
+            <a:schemeClr val="lt1"/>
+          </a:fontRef>
+        </p:style>
+        <p:txBody>
+          <a:bodyPr rtlCol="0" anchor="ctr" wrap="square" lIns="50800" rIns="50800" tIns="25400" bIns="25400"/>
+          <a:lstStyle/>
+          <a:p>
+            <a:pPr algn="ctr">
+              <a:defRPr sz="1300" b="1">
+                <a:solidFill>
+                  <a:srgbClr val="FFFFFF"/>
+                </a:solidFill>
+                <a:latin typeface="Calibri"/>
+              </a:defRPr>
+            </a:pPr>
+            <a:r>
+              <a:t>M1</a:t>
+            </a:r>
+          </a:p>
+        </p:txBody>
+      </p:sp>
+      <p:sp>
+        <p:nvSpPr>
+          <p:cNvPr id="11" name="TextBox 10"/>
+          <p:cNvSpPr txBox="1"/>
+          <p:nvPr/>
+        </p:nvSpPr>
+        <p:spPr>
+          <a:xfrm>
+            <a:off x="411479" y="3017520"/>
+            <a:ext cx="1691639" cy="365760"/>
+          </a:xfrm>
+          <a:prstGeom prst="rect">
+            <a:avLst/>
+          </a:prstGeom>
+          <a:noFill/>
+        </p:spPr>
+        <p:txBody>
+          <a:bodyPr wrap="square">
+            <a:spAutoFit/>
+          </a:bodyPr>
+          <a:lstStyle/>
+          <a:p>
+            <a:pPr algn="l">
+              <a:defRPr sz="1100" b="1">
+                <a:solidFill>
+                  <a:srgbClr val="E74C3C"/>
+                </a:solidFill>
+                <a:latin typeface="Calibri"/>
+              </a:defRPr>
+            </a:pPr>
+            <a:r>
+              <a:t>Spreading flushes conn-state</a:t>
+            </a:r>
+          </a:p>
+        </p:txBody>
+      </p:sp>
+      <p:sp>
+        <p:nvSpPr>
+          <p:cNvPr id="12" name="TextBox 11"/>
+          <p:cNvSpPr txBox="1"/>
+          <p:nvPr/>
+        </p:nvSpPr>
+        <p:spPr>
+          <a:xfrm>
+            <a:off x="411479" y="3429000"/>
+            <a:ext cx="1691639" cy="2514600"/>
+          </a:xfrm>
+          <a:prstGeom prst="rect">
+            <a:avLst/>
+          </a:prstGeom>
+          <a:noFill/>
+        </p:spPr>
+        <p:txBody>
+          <a:bodyPr wrap="square">
+            <a:spAutoFit/>
+          </a:bodyPr>
+          <a:lstStyle/>
+          <a:p>
+            <a:pPr algn="l">
+              <a:defRPr sz="900" b="0">
+                <a:solidFill>
+                  <a:srgbClr val="BDBDBD"/>
+                </a:solidFill>
+                <a:latin typeface="Calibri"/>
+              </a:defRPr>
+            </a:pPr>
+            <a:r>
+              <a:t>Primary metric. Under churn, spread/default flush 36-39% of node conntrack entries; colocate stays flat (−1.6%). 12/12 runs. The reproducible fault-response signal.</a:t>
+            </a:r>
+          </a:p>
+        </p:txBody>
+      </p:sp>
+      <p:sp>
+        <p:nvSpPr>
+          <p:cNvPr id="13" name="Rounded Rectangle 12"/>
+          <p:cNvSpPr/>
+          <p:nvPr/>
+        </p:nvSpPr>
+        <p:spPr>
+          <a:xfrm>
+            <a:off x="2240279" y="2651760"/>
+            <a:ext cx="1874519" cy="3383280"/>
+          </a:xfrm>
+          <a:prstGeom prst="roundRect">
+            <a:avLst/>
+          </a:prstGeom>
+          <a:solidFill>
+            <a:srgbClr val="121222"/>
+          </a:solidFill>
+          <a:ln w="25400">
+            <a:solidFill>
+              <a:srgbClr val="E74C3C"/>
+            </a:solidFill>
+          </a:ln>
+        </p:spPr>
+        <p:style>
+          <a:lnRef idx="1">
+            <a:schemeClr val="accent1"/>
+          </a:lnRef>
+          <a:fillRef idx="3">
+            <a:schemeClr val="accent1"/>
+          </a:fillRef>
+          <a:effectRef idx="2">
+            <a:schemeClr val="accent1"/>
+          </a:effectRef>
+          <a:fontRef idx="minor">
+            <a:schemeClr val="lt1"/>
+          </a:fontRef>
+        </p:style>
+        <p:txBody>
+          <a:bodyPr rtlCol="0" anchor="ctr"/>
+          <a:lstStyle/>
+          <a:p>
+            <a:pPr algn="ctr"/>
+          </a:p>
+        </p:txBody>
+      </p:sp>
+      <p:sp>
+        <p:nvSpPr>
+          <p:cNvPr id="14" name="Rounded Rectangle 13"/>
+          <p:cNvSpPr/>
+          <p:nvPr/>
+        </p:nvSpPr>
+        <p:spPr>
+          <a:xfrm>
+            <a:off x="2240279" y="2651760"/>
+            <a:ext cx="1874519" cy="320040"/>
+          </a:xfrm>
+          <a:prstGeom prst="roundRect">
+            <a:avLst/>
+          </a:prstGeom>
+          <a:solidFill>
+            <a:srgbClr val="E74C3C"/>
+          </a:solidFill>
+          <a:ln>
+            <a:noFill/>
+          </a:ln>
+        </p:spPr>
+        <p:style>
+          <a:lnRef idx="1">
+            <a:schemeClr val="accent1"/>
+          </a:lnRef>
+          <a:fillRef idx="3">
+            <a:schemeClr val="accent1"/>
+          </a:fillRef>
+          <a:effectRef idx="2">
+            <a:schemeClr val="accent1"/>
+          </a:effectRef>
+          <a:fontRef idx="minor">
+            <a:schemeClr val="lt1"/>
+          </a:fontRef>
+        </p:style>
+        <p:txBody>
+          <a:bodyPr rtlCol="0" anchor="ctr" wrap="square" lIns="50800" rIns="50800" tIns="25400" bIns="25400"/>
+          <a:lstStyle/>
+          <a:p>
+            <a:pPr algn="ctr">
+              <a:defRPr sz="1300" b="1">
+                <a:solidFill>
+                  <a:srgbClr val="FFFFFF"/>
+                </a:solidFill>
+                <a:latin typeface="Calibri"/>
+              </a:defRPr>
+            </a:pPr>
+            <a:r>
+              <a:t>M2</a:t>
+            </a:r>
+          </a:p>
+        </p:txBody>
+      </p:sp>
+      <p:sp>
+        <p:nvSpPr>
+          <p:cNvPr id="15" name="TextBox 14"/>
+          <p:cNvSpPr txBox="1"/>
+          <p:nvPr/>
+        </p:nvSpPr>
+        <p:spPr>
+          <a:xfrm>
+            <a:off x="2331720" y="3017520"/>
+            <a:ext cx="1691639" cy="365760"/>
+          </a:xfrm>
+          <a:prstGeom prst="rect">
+            <a:avLst/>
+          </a:prstGeom>
+          <a:noFill/>
+        </p:spPr>
+        <p:txBody>
+          <a:bodyPr wrap="square">
+            <a:spAutoFit/>
+          </a:bodyPr>
+          <a:lstStyle/>
+          <a:p>
+            <a:pPr algn="l">
+              <a:defRPr sz="1100" b="1">
+                <a:solidFill>
+                  <a:srgbClr val="E74C3C"/>
+                </a:solidFill>
+                <a:latin typeface="Calibri"/>
+              </a:defRPr>
+            </a:pPr>
+            <a:r>
+              <a:t>Co-location lowers CPU contention</a:t>
+            </a:r>
+          </a:p>
+        </p:txBody>
+      </p:sp>
+      <p:sp>
+        <p:nvSpPr>
+          <p:cNvPr id="16" name="TextBox 15"/>
+          <p:cNvSpPr txBox="1"/>
+          <p:nvPr/>
+        </p:nvSpPr>
+        <p:spPr>
+          <a:xfrm>
+            <a:off x="2331720" y="3429000"/>
+            <a:ext cx="1691639" cy="2514600"/>
+          </a:xfrm>
+          <a:prstGeom prst="rect">
+            <a:avLst/>
+          </a:prstGeom>
+          <a:noFill/>
+        </p:spPr>
+        <p:txBody>
+          <a:bodyPr wrap="square">
+            <a:spAutoFit/>
+          </a:bodyPr>
+          <a:lstStyle/>
+          <a:p>
+            <a:pPr algn="l">
+              <a:defRPr sz="900" b="0">
+                <a:solidFill>
+                  <a:srgbClr val="BDBDBD"/>
+                </a:solidFill>
+                <a:latin typeface="Calibri"/>
+              </a:defRPr>
+            </a:pPr>
+            <a:r>
+              <a:t>Colocate throttles LEAST (median 1.54 vs default 1.90, spread 1.94) and has the lowest CPU usage/pressure. 11/13 runs. Contention does not scale with density under churn.</a:t>
+            </a:r>
+          </a:p>
+        </p:txBody>
+      </p:sp>
+      <p:sp>
+        <p:nvSpPr>
+          <p:cNvPr id="17" name="Rounded Rectangle 16"/>
+          <p:cNvSpPr/>
+          <p:nvPr/>
+        </p:nvSpPr>
+        <p:spPr>
+          <a:xfrm>
+            <a:off x="4160519" y="2651760"/>
+            <a:ext cx="1874519" cy="3383280"/>
+          </a:xfrm>
+          <a:prstGeom prst="roundRect">
+            <a:avLst/>
+          </a:prstGeom>
+          <a:solidFill>
+            <a:srgbClr val="121222"/>
+          </a:solidFill>
+          <a:ln w="25400">
+            <a:solidFill>
+              <a:srgbClr val="E74C3C"/>
+            </a:solidFill>
+          </a:ln>
+        </p:spPr>
+        <p:style>
+          <a:lnRef idx="1">
+            <a:schemeClr val="accent1"/>
+          </a:lnRef>
+          <a:fillRef idx="3">
+            <a:schemeClr val="accent1"/>
+          </a:fillRef>
+          <a:effectRef idx="2">
+            <a:schemeClr val="accent1"/>
+          </a:effectRef>
+          <a:fontRef idx="minor">
+            <a:schemeClr val="lt1"/>
+          </a:fontRef>
+        </p:style>
+        <p:txBody>
+          <a:bodyPr rtlCol="0" anchor="ctr"/>
+          <a:lstStyle/>
+          <a:p>
+            <a:pPr algn="ctr"/>
+          </a:p>
+        </p:txBody>
+      </p:sp>
+      <p:sp>
+        <p:nvSpPr>
+          <p:cNvPr id="18" name="Rounded Rectangle 17"/>
+          <p:cNvSpPr/>
+          <p:nvPr/>
+        </p:nvSpPr>
+        <p:spPr>
+          <a:xfrm>
+            <a:off x="4160519" y="2651760"/>
+            <a:ext cx="1874519" cy="320040"/>
+          </a:xfrm>
+          <a:prstGeom prst="roundRect">
+            <a:avLst/>
+          </a:prstGeom>
+          <a:solidFill>
+            <a:srgbClr val="E74C3C"/>
+          </a:solidFill>
+          <a:ln>
+            <a:noFill/>
+          </a:ln>
+        </p:spPr>
+        <p:style>
+          <a:lnRef idx="1">
+            <a:schemeClr val="accent1"/>
+          </a:lnRef>
+          <a:fillRef idx="3">
+            <a:schemeClr val="accent1"/>
+          </a:fillRef>
+          <a:effectRef idx="2">
+            <a:schemeClr val="accent1"/>
+          </a:effectRef>
+          <a:fontRef idx="minor">
+            <a:schemeClr val="lt1"/>
+          </a:fontRef>
+        </p:style>
+        <p:txBody>
+          <a:bodyPr rtlCol="0" anchor="ctr" wrap="square" lIns="50800" rIns="50800" tIns="25400" bIns="25400"/>
+          <a:lstStyle/>
+          <a:p>
+            <a:pPr algn="ctr">
+              <a:defRPr sz="1300" b="1">
+                <a:solidFill>
+                  <a:srgbClr val="FFFFFF"/>
+                </a:solidFill>
+                <a:latin typeface="Calibri"/>
+              </a:defRPr>
+            </a:pPr>
+            <a:r>
+              <a:t>M3</a:t>
+            </a:r>
+          </a:p>
+        </p:txBody>
+      </p:sp>
+      <p:sp>
+        <p:nvSpPr>
+          <p:cNvPr id="19" name="TextBox 18"/>
+          <p:cNvSpPr txBox="1"/>
+          <p:nvPr/>
+        </p:nvSpPr>
+        <p:spPr>
+          <a:xfrm>
+            <a:off x="4251959" y="3017520"/>
+            <a:ext cx="1691639" cy="365760"/>
+          </a:xfrm>
+          <a:prstGeom prst="rect">
+            <a:avLst/>
+          </a:prstGeom>
+          <a:noFill/>
+        </p:spPr>
+        <p:txBody>
+          <a:bodyPr wrap="square">
+            <a:spAutoFit/>
+          </a:bodyPr>
+          <a:lstStyle/>
+          <a:p>
+            <a:pPr algn="l">
+              <a:defRPr sz="1100" b="1">
+                <a:solidFill>
+                  <a:srgbClr val="E74C3C"/>
+                </a:solidFill>
+                <a:latin typeface="Calibri"/>
+              </a:defRPr>
+            </a:pPr>
+            <a:r>
+              <a:t>'Spread is safer' is refuted</a:t>
+            </a:r>
+          </a:p>
+        </p:txBody>
+      </p:sp>
+      <p:sp>
+        <p:nvSpPr>
+          <p:cNvPr id="20" name="TextBox 19"/>
+          <p:cNvSpPr txBox="1"/>
+          <p:nvPr/>
+        </p:nvSpPr>
+        <p:spPr>
+          <a:xfrm>
+            <a:off x="4251959" y="3429000"/>
+            <a:ext cx="1691639" cy="2514600"/>
+          </a:xfrm>
+          <a:prstGeom prst="rect">
+            <a:avLst/>
+          </a:prstGeom>
+          <a:noFill/>
+        </p:spPr>
+        <p:txBody>
+          <a:bodyPr wrap="square">
+            <a:spAutoFit/>
+          </a:bodyPr>
+          <a:lstStyle/>
+          <a:p>
+            <a:pPr algn="l">
+              <a:defRPr sz="900" b="0">
+                <a:solidFill>
+                  <a:srgbClr val="BDBDBD"/>
+                </a:solidFill>
+                <a:latin typeface="Calibri"/>
+              </a:defRPr>
+            </a:pPr>
+            <a:r>
+              <a:t>Both reproducible metrics favour co-location under churn. The literature's spread-isolation prescription is refuted at the metric level — not merely unmeasurable on the score.</a:t>
+            </a:r>
+          </a:p>
+        </p:txBody>
+      </p:sp>
+      <p:sp>
+        <p:nvSpPr>
+          <p:cNvPr id="21" name="Rounded Rectangle 20"/>
+          <p:cNvSpPr/>
+          <p:nvPr/>
+        </p:nvSpPr>
+        <p:spPr>
+          <a:xfrm>
+            <a:off x="6080759" y="2651760"/>
             <a:ext cx="1874519" cy="3383280"/>
           </a:xfrm>
           <a:prstGeom prst="roundRect">
@@ -9528,13 +10042,13 @@
       </p:sp>
       <p:sp>
         <p:nvSpPr>
-          <p:cNvPr id="10" name="Rounded Rectangle 9"/>
+          <p:cNvPr id="22" name="Rounded Rectangle 21"/>
           <p:cNvSpPr/>
           <p:nvPr/>
         </p:nvSpPr>
         <p:spPr>
           <a:xfrm>
-            <a:off x="320040" y="2651760"/>
+            <a:off x="6080759" y="2651760"/>
             <a:ext cx="1874519" cy="320040"/>
           </a:xfrm>
           <a:prstGeom prst="roundRect">
@@ -9574,20 +10088,20 @@
               </a:defRPr>
             </a:pPr>
             <a:r>
-              <a:t>H1</a:t>
-            </a:r>
-          </a:p>
-        </p:txBody>
-      </p:sp>
-      <p:sp>
-        <p:nvSpPr>
-          <p:cNvPr id="11" name="TextBox 10"/>
+              <a:t>M4</a:t>
+            </a:r>
+          </a:p>
+        </p:txBody>
+      </p:sp>
+      <p:sp>
+        <p:nvSpPr>
+          <p:cNvPr id="23" name="TextBox 22"/>
           <p:cNvSpPr txBox="1"/>
           <p:nvPr/>
         </p:nvSpPr>
         <p:spPr>
           <a:xfrm>
-            <a:off x="411479" y="3017520"/>
+            <a:off x="6172199" y="3017520"/>
             <a:ext cx="1691639" cy="365760"/>
           </a:xfrm>
           <a:prstGeom prst="rect">
@@ -9610,20 +10124,20 @@
               </a:defRPr>
             </a:pPr>
             <a:r>
-              <a:t>Fault class gates placement effect</a:t>
-            </a:r>
-          </a:p>
-        </p:txBody>
-      </p:sp>
-      <p:sp>
-        <p:nvSpPr>
-          <p:cNvPr id="12" name="TextBox 11"/>
+              <a:t>Score decoupled from metrics</a:t>
+            </a:r>
+          </a:p>
+        </p:txBody>
+      </p:sp>
+      <p:sp>
+        <p:nvSpPr>
+          <p:cNvPr id="24" name="TextBox 23"/>
           <p:cNvSpPr txBox="1"/>
           <p:nvPr/>
         </p:nvSpPr>
         <p:spPr>
           <a:xfrm>
-            <a:off x="411479" y="3429000"/>
+            <a:off x="6172199" y="3429000"/>
             <a:ext cx="1691639" cy="2514600"/>
           </a:xfrm>
           <a:prstGeom prst="rect">
@@ -9646,517 +10160,7 @@
               </a:defRPr>
             </a:pPr>
             <a:r>
-              <a:t>Contention (cpu-hog) yields identical resilience across all strategies (100, σ0); churn (pod-delete) differentiates them. Whether placement matters is conditional on fault class.</a:t>
-            </a:r>
-          </a:p>
-        </p:txBody>
-      </p:sp>
-      <p:sp>
-        <p:nvSpPr>
-          <p:cNvPr id="13" name="Rounded Rectangle 12"/>
-          <p:cNvSpPr/>
-          <p:nvPr/>
-        </p:nvSpPr>
-        <p:spPr>
-          <a:xfrm>
-            <a:off x="2240279" y="2651760"/>
-            <a:ext cx="1874519" cy="3383280"/>
-          </a:xfrm>
-          <a:prstGeom prst="roundRect">
-            <a:avLst/>
-          </a:prstGeom>
-          <a:solidFill>
-            <a:srgbClr val="121222"/>
-          </a:solidFill>
-          <a:ln w="25400">
-            <a:solidFill>
-              <a:srgbClr val="0096D6"/>
-            </a:solidFill>
-          </a:ln>
-        </p:spPr>
-        <p:style>
-          <a:lnRef idx="1">
-            <a:schemeClr val="accent1"/>
-          </a:lnRef>
-          <a:fillRef idx="3">
-            <a:schemeClr val="accent1"/>
-          </a:fillRef>
-          <a:effectRef idx="2">
-            <a:schemeClr val="accent1"/>
-          </a:effectRef>
-          <a:fontRef idx="minor">
-            <a:schemeClr val="lt1"/>
-          </a:fontRef>
-        </p:style>
-        <p:txBody>
-          <a:bodyPr rtlCol="0" anchor="ctr"/>
-          <a:lstStyle/>
-          <a:p>
-            <a:pPr algn="ctr"/>
-          </a:p>
-        </p:txBody>
-      </p:sp>
-      <p:sp>
-        <p:nvSpPr>
-          <p:cNvPr id="14" name="Rounded Rectangle 13"/>
-          <p:cNvSpPr/>
-          <p:nvPr/>
-        </p:nvSpPr>
-        <p:spPr>
-          <a:xfrm>
-            <a:off x="2240279" y="2651760"/>
-            <a:ext cx="1874519" cy="320040"/>
-          </a:xfrm>
-          <a:prstGeom prst="roundRect">
-            <a:avLst/>
-          </a:prstGeom>
-          <a:solidFill>
-            <a:srgbClr val="0096D6"/>
-          </a:solidFill>
-          <a:ln>
-            <a:noFill/>
-          </a:ln>
-        </p:spPr>
-        <p:style>
-          <a:lnRef idx="1">
-            <a:schemeClr val="accent1"/>
-          </a:lnRef>
-          <a:fillRef idx="3">
-            <a:schemeClr val="accent1"/>
-          </a:fillRef>
-          <a:effectRef idx="2">
-            <a:schemeClr val="accent1"/>
-          </a:effectRef>
-          <a:fontRef idx="minor">
-            <a:schemeClr val="lt1"/>
-          </a:fontRef>
-        </p:style>
-        <p:txBody>
-          <a:bodyPr rtlCol="0" anchor="ctr" wrap="square" lIns="50800" rIns="50800" tIns="25400" bIns="25400"/>
-          <a:lstStyle/>
-          <a:p>
-            <a:pPr algn="ctr">
-              <a:defRPr sz="1300" b="1">
-                <a:solidFill>
-                  <a:srgbClr val="FFFFFF"/>
-                </a:solidFill>
-                <a:latin typeface="Calibri"/>
-              </a:defRPr>
-            </a:pPr>
-            <a:r>
-              <a:t>H2</a:t>
-            </a:r>
-          </a:p>
-        </p:txBody>
-      </p:sp>
-      <p:sp>
-        <p:nvSpPr>
-          <p:cNvPr id="15" name="TextBox 14"/>
-          <p:cNvSpPr txBox="1"/>
-          <p:nvPr/>
-        </p:nvSpPr>
-        <p:spPr>
-          <a:xfrm>
-            <a:off x="2331720" y="3017520"/>
-            <a:ext cx="1691639" cy="365760"/>
-          </a:xfrm>
-          <a:prstGeom prst="rect">
-            <a:avLst/>
-          </a:prstGeom>
-          <a:noFill/>
-        </p:spPr>
-        <p:txBody>
-          <a:bodyPr wrap="square">
-            <a:spAutoFit/>
-          </a:bodyPr>
-          <a:lstStyle/>
-          <a:p>
-            <a:pPr algn="l">
-              <a:defRPr sz="1100" b="1">
-                <a:solidFill>
-                  <a:srgbClr val="0096D6"/>
-                </a:solidFill>
-                <a:latin typeface="Calibri"/>
-              </a:defRPr>
-            </a:pPr>
-            <a:r>
-              <a:t>Aggregate score is too coarse</a:t>
-            </a:r>
-          </a:p>
-        </p:txBody>
-      </p:sp>
-      <p:sp>
-        <p:nvSpPr>
-          <p:cNvPr id="16" name="TextBox 15"/>
-          <p:cNvSpPr txBox="1"/>
-          <p:nvPr/>
-        </p:nvSpPr>
-        <p:spPr>
-          <a:xfrm>
-            <a:off x="2331720" y="3429000"/>
-            <a:ext cx="1691639" cy="2514600"/>
-          </a:xfrm>
-          <a:prstGeom prst="rect">
-            <a:avLst/>
-          </a:prstGeom>
-          <a:noFill/>
-        </p:spPr>
-        <p:txBody>
-          <a:bodyPr wrap="square">
-            <a:spAutoFit/>
-          </a:bodyPr>
-          <a:lstStyle/>
-          <a:p>
-            <a:pPr algn="l">
-              <a:defRPr sz="900" b="0">
-                <a:solidFill>
-                  <a:srgbClr val="BDBDBD"/>
-                </a:solidFill>
-                <a:latin typeface="Calibri"/>
-              </a:defRPr>
-            </a:pPr>
-            <a:r>
-              <a:t>The same strategy's resilience score ranges 33-89 across 13 runs (non-reproducible), while throttling and conntrack orderings stay stable. Mechanism metrics carry the signal.</a:t>
-            </a:r>
-          </a:p>
-        </p:txBody>
-      </p:sp>
-      <p:sp>
-        <p:nvSpPr>
-          <p:cNvPr id="17" name="Rounded Rectangle 16"/>
-          <p:cNvSpPr/>
-          <p:nvPr/>
-        </p:nvSpPr>
-        <p:spPr>
-          <a:xfrm>
-            <a:off x="4160519" y="2651760"/>
-            <a:ext cx="1874519" cy="3383280"/>
-          </a:xfrm>
-          <a:prstGeom prst="roundRect">
-            <a:avLst/>
-          </a:prstGeom>
-          <a:solidFill>
-            <a:srgbClr val="121222"/>
-          </a:solidFill>
-          <a:ln w="25400">
-            <a:solidFill>
-              <a:srgbClr val="E74C3C"/>
-            </a:solidFill>
-          </a:ln>
-        </p:spPr>
-        <p:style>
-          <a:lnRef idx="1">
-            <a:schemeClr val="accent1"/>
-          </a:lnRef>
-          <a:fillRef idx="3">
-            <a:schemeClr val="accent1"/>
-          </a:fillRef>
-          <a:effectRef idx="2">
-            <a:schemeClr val="accent1"/>
-          </a:effectRef>
-          <a:fontRef idx="minor">
-            <a:schemeClr val="lt1"/>
-          </a:fontRef>
-        </p:style>
-        <p:txBody>
-          <a:bodyPr rtlCol="0" anchor="ctr"/>
-          <a:lstStyle/>
-          <a:p>
-            <a:pPr algn="ctr"/>
-          </a:p>
-        </p:txBody>
-      </p:sp>
-      <p:sp>
-        <p:nvSpPr>
-          <p:cNvPr id="18" name="Rounded Rectangle 17"/>
-          <p:cNvSpPr/>
-          <p:nvPr/>
-        </p:nvSpPr>
-        <p:spPr>
-          <a:xfrm>
-            <a:off x="4160519" y="2651760"/>
-            <a:ext cx="1874519" cy="320040"/>
-          </a:xfrm>
-          <a:prstGeom prst="roundRect">
-            <a:avLst/>
-          </a:prstGeom>
-          <a:solidFill>
-            <a:srgbClr val="E74C3C"/>
-          </a:solidFill>
-          <a:ln>
-            <a:noFill/>
-          </a:ln>
-        </p:spPr>
-        <p:style>
-          <a:lnRef idx="1">
-            <a:schemeClr val="accent1"/>
-          </a:lnRef>
-          <a:fillRef idx="3">
-            <a:schemeClr val="accent1"/>
-          </a:fillRef>
-          <a:effectRef idx="2">
-            <a:schemeClr val="accent1"/>
-          </a:effectRef>
-          <a:fontRef idx="minor">
-            <a:schemeClr val="lt1"/>
-          </a:fontRef>
-        </p:style>
-        <p:txBody>
-          <a:bodyPr rtlCol="0" anchor="ctr" wrap="square" lIns="50800" rIns="50800" tIns="25400" bIns="25400"/>
-          <a:lstStyle/>
-          <a:p>
-            <a:pPr algn="ctr">
-              <a:defRPr sz="1300" b="1">
-                <a:solidFill>
-                  <a:srgbClr val="FFFFFF"/>
-                </a:solidFill>
-                <a:latin typeface="Calibri"/>
-              </a:defRPr>
-            </a:pPr>
-            <a:r>
-              <a:t>H3</a:t>
-            </a:r>
-          </a:p>
-        </p:txBody>
-      </p:sp>
-      <p:sp>
-        <p:nvSpPr>
-          <p:cNvPr id="19" name="TextBox 18"/>
-          <p:cNvSpPr txBox="1"/>
-          <p:nvPr/>
-        </p:nvSpPr>
-        <p:spPr>
-          <a:xfrm>
-            <a:off x="4251959" y="3017520"/>
-            <a:ext cx="1691639" cy="365760"/>
-          </a:xfrm>
-          <a:prstGeom prst="rect">
-            <a:avLst/>
-          </a:prstGeom>
-          <a:noFill/>
-        </p:spPr>
-        <p:txBody>
-          <a:bodyPr wrap="square">
-            <a:spAutoFit/>
-          </a:bodyPr>
-          <a:lstStyle/>
-          <a:p>
-            <a:pPr algn="l">
-              <a:defRPr sz="1100" b="1">
-                <a:solidFill>
-                  <a:srgbClr val="E74C3C"/>
-                </a:solidFill>
-                <a:latin typeface="Calibri"/>
-              </a:defRPr>
-            </a:pPr>
-            <a:r>
-              <a:t>Churn flushes cross-node conn-state</a:t>
-            </a:r>
-          </a:p>
-        </p:txBody>
-      </p:sp>
-      <p:sp>
-        <p:nvSpPr>
-          <p:cNvPr id="20" name="TextBox 19"/>
-          <p:cNvSpPr txBox="1"/>
-          <p:nvPr/>
-        </p:nvSpPr>
-        <p:spPr>
-          <a:xfrm>
-            <a:off x="4251959" y="3429000"/>
-            <a:ext cx="1691639" cy="2514600"/>
-          </a:xfrm>
-          <a:prstGeom prst="rect">
-            <a:avLst/>
-          </a:prstGeom>
-          <a:noFill/>
-        </p:spPr>
-        <p:txBody>
-          <a:bodyPr wrap="square">
-            <a:spAutoFit/>
-          </a:bodyPr>
-          <a:lstStyle/>
-          <a:p>
-            <a:pPr algn="l">
-              <a:defRPr sz="900" b="0">
-                <a:solidFill>
-                  <a:srgbClr val="BDBDBD"/>
-                </a:solidFill>
-                <a:latin typeface="Calibri"/>
-              </a:defRPr>
-            </a:pPr>
-            <a:r>
-              <a:t>Spread flushes 28-52% of conntrack entries during churn; colocate stays flat (−15% to +3%). Reproducible in all 12 runs measured. Spreading maximises the flows churn disrupts.</a:t>
-            </a:r>
-          </a:p>
-        </p:txBody>
-      </p:sp>
-      <p:sp>
-        <p:nvSpPr>
-          <p:cNvPr id="21" name="Rounded Rectangle 20"/>
-          <p:cNvSpPr/>
-          <p:nvPr/>
-        </p:nvSpPr>
-        <p:spPr>
-          <a:xfrm>
-            <a:off x="6080759" y="2651760"/>
-            <a:ext cx="1874519" cy="3383280"/>
-          </a:xfrm>
-          <a:prstGeom prst="roundRect">
-            <a:avLst/>
-          </a:prstGeom>
-          <a:solidFill>
-            <a:srgbClr val="121222"/>
-          </a:solidFill>
-          <a:ln w="25400">
-            <a:solidFill>
-              <a:srgbClr val="E74C3C"/>
-            </a:solidFill>
-          </a:ln>
-        </p:spPr>
-        <p:style>
-          <a:lnRef idx="1">
-            <a:schemeClr val="accent1"/>
-          </a:lnRef>
-          <a:fillRef idx="3">
-            <a:schemeClr val="accent1"/>
-          </a:fillRef>
-          <a:effectRef idx="2">
-            <a:schemeClr val="accent1"/>
-          </a:effectRef>
-          <a:fontRef idx="minor">
-            <a:schemeClr val="lt1"/>
-          </a:fontRef>
-        </p:style>
-        <p:txBody>
-          <a:bodyPr rtlCol="0" anchor="ctr"/>
-          <a:lstStyle/>
-          <a:p>
-            <a:pPr algn="ctr"/>
-          </a:p>
-        </p:txBody>
-      </p:sp>
-      <p:sp>
-        <p:nvSpPr>
-          <p:cNvPr id="22" name="Rounded Rectangle 21"/>
-          <p:cNvSpPr/>
-          <p:nvPr/>
-        </p:nvSpPr>
-        <p:spPr>
-          <a:xfrm>
-            <a:off x="6080759" y="2651760"/>
-            <a:ext cx="1874519" cy="320040"/>
-          </a:xfrm>
-          <a:prstGeom prst="roundRect">
-            <a:avLst/>
-          </a:prstGeom>
-          <a:solidFill>
-            <a:srgbClr val="E74C3C"/>
-          </a:solidFill>
-          <a:ln>
-            <a:noFill/>
-          </a:ln>
-        </p:spPr>
-        <p:style>
-          <a:lnRef idx="1">
-            <a:schemeClr val="accent1"/>
-          </a:lnRef>
-          <a:fillRef idx="3">
-            <a:schemeClr val="accent1"/>
-          </a:fillRef>
-          <a:effectRef idx="2">
-            <a:schemeClr val="accent1"/>
-          </a:effectRef>
-          <a:fontRef idx="minor">
-            <a:schemeClr val="lt1"/>
-          </a:fontRef>
-        </p:style>
-        <p:txBody>
-          <a:bodyPr rtlCol="0" anchor="ctr" wrap="square" lIns="50800" rIns="50800" tIns="25400" bIns="25400"/>
-          <a:lstStyle/>
-          <a:p>
-            <a:pPr algn="ctr">
-              <a:defRPr sz="1300" b="1">
-                <a:solidFill>
-                  <a:srgbClr val="FFFFFF"/>
-                </a:solidFill>
-                <a:latin typeface="Calibri"/>
-              </a:defRPr>
-            </a:pPr>
-            <a:r>
-              <a:t>H4</a:t>
-            </a:r>
-          </a:p>
-        </p:txBody>
-      </p:sp>
-      <p:sp>
-        <p:nvSpPr>
-          <p:cNvPr id="23" name="TextBox 22"/>
-          <p:cNvSpPr txBox="1"/>
-          <p:nvPr/>
-        </p:nvSpPr>
-        <p:spPr>
-          <a:xfrm>
-            <a:off x="6172199" y="3017520"/>
-            <a:ext cx="1691639" cy="365760"/>
-          </a:xfrm>
-          <a:prstGeom prst="rect">
-            <a:avLst/>
-          </a:prstGeom>
-          <a:noFill/>
-        </p:spPr>
-        <p:txBody>
-          <a:bodyPr wrap="square">
-            <a:spAutoFit/>
-          </a:bodyPr>
-          <a:lstStyle/>
-          <a:p>
-            <a:pPr algn="l">
-              <a:defRPr sz="1100" b="1">
-                <a:solidFill>
-                  <a:srgbClr val="E74C3C"/>
-                </a:solidFill>
-                <a:latin typeface="Calibri"/>
-              </a:defRPr>
-            </a:pPr>
-            <a:r>
-              <a:t>Throttling inverts contention model</a:t>
-            </a:r>
-          </a:p>
-        </p:txBody>
-      </p:sp>
-      <p:sp>
-        <p:nvSpPr>
-          <p:cNvPr id="24" name="TextBox 23"/>
-          <p:cNvSpPr txBox="1"/>
-          <p:nvPr/>
-        </p:nvSpPr>
-        <p:spPr>
-          <a:xfrm>
-            <a:off x="6172199" y="3429000"/>
-            <a:ext cx="1691639" cy="2514600"/>
-          </a:xfrm>
-          <a:prstGeom prst="rect">
-            <a:avLst/>
-          </a:prstGeom>
-          <a:noFill/>
-        </p:spPr>
-        <p:txBody>
-          <a:bodyPr wrap="square">
-            <a:spAutoFit/>
-          </a:bodyPr>
-          <a:lstStyle/>
-          <a:p>
-            <a:pPr algn="l">
-              <a:defRPr sz="900" b="0">
-                <a:solidFill>
-                  <a:srgbClr val="BDBDBD"/>
-                </a:solidFill>
-                <a:latin typeface="Calibri"/>
-              </a:defRPr>
-            </a:pPr>
-            <a:r>
-              <a:t>Densest packing (colocate, median 1.54) throttles less than default (1.90) and spread (1.94) under churn — holds in 11/13 runs. Inverts Bubble-Up's dense=more-contention prediction.</a:t>
+              <a:t>Where conntrack &amp; CPU reproduce (≥11/13), the resilience score does NOT (33-89 across runs). The binary-probe score is a lossy instrument; the metrics are the reliable outcome.</a:t>
             </a:r>
           </a:p>
         </p:txBody>
@@ -10254,7 +10258,7 @@
               </a:defRPr>
             </a:pPr>
             <a:r>
-              <a:t>H5</a:t>
+              <a:t>S1</a:t>
             </a:r>
           </a:p>
         </p:txBody>
@@ -10290,7 +10294,7 @@
               </a:defRPr>
             </a:pPr>
             <a:r>
-              <a:t>Fault signal is in the tail</a:t>
+              <a:t>Fault class gates the effect</a:t>
             </a:r>
           </a:p>
         </p:txBody>
@@ -10326,7 +10330,7 @@
               </a:defRPr>
             </a:pPr>
             <a:r>
-              <a:t>Targeted route during chaos: mean 231 ms but p95 619 / max 3334 ms; unaffected routes stay flat at 70-110 ms. Mean-based SLOs miss the fault (Dean &amp; Barroso, CACM 2013).</a:t>
+              <a:t>Contention (cpu-hog) yields identical resilience across all strategies (100, σ0); churn differentiates them. Whether placement matters is conditional on fault class.</a:t>
             </a:r>
           </a:p>
         </p:txBody>
@@ -10424,7 +10428,7 @@
               </a:defRPr>
             </a:pPr>
             <a:r>
-              <a:t>H6</a:t>
+              <a:t>S2</a:t>
             </a:r>
           </a:p>
         </p:txBody>
@@ -10496,7 +10500,7 @@
               </a:defRPr>
             </a:pPr>
             <a:r>
-              <a:t>scheduled→ready is 84-96% of recovery time; placement only touches the 4-16% deletion→scheduled term. Placement has little leverage over how fast a pod recovers.</a:t>
+              <a:t>scheduled→ready (app startup) is 84-96% of recovery; placement touches only the 4-16% scheduling term. Recovery is application-bound, not placement-bound.</a:t>
             </a:r>
           </a:p>
         </p:txBody>
@@ -23031,7 +23035,7 @@
               </a:defRPr>
             </a:pPr>
             <a:r>
-              <a:t>Results — Resilience Scores</a:t>
+              <a:t>Results — Why the Score Is Demoted (M4)</a:t>
             </a:r>
           </a:p>
         </p:txBody>
@@ -23402,7 +23406,7 @@
               </a:defRPr>
             </a:pPr>
             <a:r>
-              <a:t>What the aggregate score can adjudicate</a:t>
+              <a:t>M4 — the score is decoupled from the reproducible metrics</a:t>
             </a:r>
           </a:p>
         </p:txBody>

--- a/ChaosProbe_Presentation.pptx
+++ b/ChaosProbe_Presentation.pptx
@@ -3602,7 +3602,7 @@
               </a:defRPr>
             </a:pPr>
             <a:r>
-              <a:t>Recovery is application-bound (S2)</a:t>
+              <a:t>Recovery split is unstable (S2)</a:t>
             </a:r>
           </a:p>
         </p:txBody>
@@ -3648,7 +3648,7 @@
             </a:r>
             <a:br/>
             <a:r>
-              <a:t>  the app-startup term is 84–96% of the total</a:t>
+              <a:t>  their split is run-dependent</a:t>
             </a:r>
           </a:p>
           <a:p>
@@ -3667,11 +3667,11 @@
               </a:defRPr>
             </a:pPr>
             <a:r>
-              <a:t>• Placement only touches the 4–16% scheduling term,</a:t>
+              <a:t>• app-startup dominates in some runs (84–96%),</a:t>
             </a:r>
             <a:br/>
             <a:r>
-              <a:t>  so it has little leverage over recovery speed</a:t>
+              <a:t>  the scheduling term in others (up to ~78%)</a:t>
             </a:r>
           </a:p>
           <a:p>
@@ -3690,11 +3690,11 @@
               </a:defRPr>
             </a:pPr>
             <a:r>
-              <a:t>• Recovery-time rank is noise run-to-run — it does</a:t>
+              <a:t>• Either way recovery rank is noise run-to-run — it</a:t>
             </a:r>
             <a:br/>
             <a:r>
-              <a:t>  not track the placement story (refutes L3)</a:t>
+              <a:t>  does not track the placement story (refutes L3)</a:t>
             </a:r>
           </a:p>
         </p:txBody>
@@ -3979,7 +3979,7 @@
       </p:sp>
       <p:pic>
         <p:nvPicPr>
-          <p:cNvPr id="4" name="Picture 3" descr="resource_utilization.png"/>
+          <p:cNvPr id="4" name="Picture 3" descr="mechanism_distribution.png"/>
           <p:cNvPicPr>
             <a:picLocks noChangeAspect="1"/>
           </p:cNvPicPr>
@@ -4032,7 +4032,7 @@
               </a:defRPr>
             </a:pPr>
             <a:r>
-              <a:t>Resource Utilization (CPU &amp; Memory)</a:t>
+              <a:t>Conntrack Churn &amp; CPU Throttling (M1, M2)</a:t>
             </a:r>
           </a:p>
         </p:txBody>
@@ -4215,11 +4215,11 @@
               </a:defRPr>
             </a:pPr>
             <a:r>
-              <a:t>• Densest placement (colocate) throttles LEAST —</a:t>
+              <a:t>• Densest placement (colocate) throttles less than</a:t>
             </a:r>
             <a:br/>
             <a:r>
-              <a:t>  median 1.54 vs default 1.90, spread 1.94</a:t>
+              <a:t>  default/spread — during-chaos rate 1.54 vs 1.90, 1.94</a:t>
             </a:r>
           </a:p>
           <a:p>
@@ -4238,7 +4238,7 @@
               </a:defRPr>
             </a:pPr>
             <a:r>
-              <a:t>• Holds in 11 of 13 runs — reproducible, unlike score</a:t>
+              <a:t>• colocate &lt; default in 11 of 13 runs — reproducible</a:t>
             </a:r>
           </a:p>
           <a:p>
@@ -5231,15 +5231,15 @@
               </a:defRPr>
             </a:pPr>
             <a:r>
-              <a:t>Refuted structurally: recovery is 84–96%</a:t>
+              <a:t>Refuted structurally: the d2s/s2r split is</a:t>
             </a:r>
             <a:br/>
             <a:r>
-              <a:t>app-startup (placement-invariant); the score</a:t>
+              <a:t>unstable run-to-run and the score is</a:t>
             </a:r>
             <a:br/>
             <a:r>
-              <a:t>is non-reproducible. No stable relationship.</a:t>
+              <a:t>non-reproducible. No stable relationship.</a:t>
             </a:r>
           </a:p>
         </p:txBody>
@@ -6943,11 +6943,11 @@
               </a:defRPr>
             </a:pPr>
             <a:r>
-              <a:t>• Recovery is 84–96% app-startup — placement-</a:t>
+              <a:t>• Recovery's d2s/s2r split is unstable run-to-run,</a:t>
             </a:r>
             <a:br/>
             <a:r>
-              <a:t>  invariant, so it can't predict the outcome</a:t>
+              <a:t>  so it can't predict the outcome</a:t>
             </a:r>
           </a:p>
         </p:txBody>
@@ -7785,11 +7785,11 @@
               </a:defRPr>
             </a:pPr>
             <a:r>
-              <a:t>Hypotheses</a:t>
+              <a:t>Refuted at</a:t>
             </a:r>
             <a:br/>
             <a:r>
-              <a:t>Refuted</a:t>
+              <a:t>mechanism layer</a:t>
             </a:r>
           </a:p>
         </p:txBody>
@@ -9820,7 +9820,7 @@
               </a:defRPr>
             </a:pPr>
             <a:r>
-              <a:t>Colocate throttles LEAST (median 1.54 vs default 1.90, spread 1.94) and has the lowest CPU usage/pressure. 11/13 runs. Contention does not scale with density under churn.</a:t>
+              <a:t>Colocate throttles less than default/spread (during-chaos rate 1.54 vs 1.90, 1.94), with lower CPU usage/pressure. 11/13 runs. Contention does not scale with density under churn.</a:t>
             </a:r>
           </a:p>
         </p:txBody>
@@ -10294,7 +10294,7 @@
               </a:defRPr>
             </a:pPr>
             <a:r>
-              <a:t>Fault class gates the effect</a:t>
+              <a:t>Mechanism signal is churn-specific</a:t>
             </a:r>
           </a:p>
         </p:txBody>
@@ -10330,7 +10330,7 @@
               </a:defRPr>
             </a:pPr>
             <a:r>
-              <a:t>Contention (cpu-hog) yields identical resilience across all strategies (100, σ0); churn differentiates them. Whether placement matters is conditional on fault class.</a:t>
+              <a:t>cpu-hog (n=2) does not reproduce: one run scored ~100 across strategies, one saw many iterations fail (33-67, σ≈58). The score is noisy under both faults; the reproducible M1/M2 signal is churn-specific.</a:t>
             </a:r>
           </a:p>
         </p:txBody>
@@ -10464,7 +10464,7 @@
               </a:defRPr>
             </a:pPr>
             <a:r>
-              <a:t>Recovery is application-bound</a:t>
+              <a:t>Recovery split is unstable</a:t>
             </a:r>
           </a:p>
         </p:txBody>
@@ -10500,7 +10500,7 @@
               </a:defRPr>
             </a:pPr>
             <a:r>
-              <a:t>scheduled→ready (app startup) is 84-96% of recovery; placement touches only the 4-16% scheduling term. Recovery is application-bound, not placement-bound.</a:t>
+              <a:t>The d2s/s2r split is run-dependent: app-startup dominates in some runs (84-96%), the scheduling term in others (up to ~78%). Recovery decomposition is not a stable placement signal.</a:t>
             </a:r>
           </a:p>
         </p:txBody>
@@ -12904,7 +12904,7 @@
             </a:r>
             <a:br/>
             <a:r>
-              <a:t>via podAffinity</a:t>
+              <a:t>via nodeSelector (hostname)</a:t>
             </a:r>
             <a:br/>
             <a:r>
@@ -13309,7 +13309,7 @@
             </a:r>
             <a:br/>
             <a:r>
-              <a:t>via topologySpreadConstraints</a:t>
+              <a:t>via per-node nodeSelector</a:t>
             </a:r>
             <a:br/>
             <a:r>
@@ -15729,7 +15729,7 @@
         </p:nvSpPr>
         <p:spPr>
           <a:xfrm>
-            <a:off x="1554480" y="2926080"/>
+            <a:off x="4754880" y="2377440"/>
             <a:ext cx="1097280" cy="320040"/>
           </a:xfrm>
           <a:prstGeom prst="roundRect">
@@ -15769,7 +15769,7 @@
               </a:defRPr>
             </a:pPr>
             <a:r>
-              <a:t>checkout</a:t>
+              <a:t>recommend</a:t>
             </a:r>
           </a:p>
         </p:txBody>
@@ -15781,9 +15781,9 @@
           <p:nvPr/>
         </p:nvCxnSpPr>
         <p:spPr>
-          <a:xfrm flipH="1">
-            <a:off x="2103120" y="2194560"/>
-            <a:ext cx="1280160" cy="731520"/>
+          <a:xfrm>
+            <a:off x="3383280" y="2194560"/>
+            <a:ext cx="1920240" cy="182880"/>
           </a:xfrm>
           <a:prstGeom prst="line">
             <a:avLst/>
@@ -15817,6 +15817,94 @@
         </p:nvSpPr>
         <p:spPr>
           <a:xfrm>
+            <a:off x="1554480" y="2926080"/>
+            <a:ext cx="1097280" cy="320040"/>
+          </a:xfrm>
+          <a:prstGeom prst="roundRect">
+            <a:avLst/>
+          </a:prstGeom>
+          <a:solidFill>
+            <a:srgbClr val="1ABC9C"/>
+          </a:solidFill>
+          <a:ln>
+            <a:noFill/>
+          </a:ln>
+        </p:spPr>
+        <p:style>
+          <a:lnRef idx="1">
+            <a:schemeClr val="accent1"/>
+          </a:lnRef>
+          <a:fillRef idx="3">
+            <a:schemeClr val="accent1"/>
+          </a:fillRef>
+          <a:effectRef idx="2">
+            <a:schemeClr val="accent1"/>
+          </a:effectRef>
+          <a:fontRef idx="minor">
+            <a:schemeClr val="lt1"/>
+          </a:fontRef>
+        </p:style>
+        <p:txBody>
+          <a:bodyPr rtlCol="0" anchor="ctr" wrap="square" lIns="50800" rIns="50800" tIns="25400" bIns="25400"/>
+          <a:lstStyle/>
+          <a:p>
+            <a:pPr algn="ctr">
+              <a:defRPr sz="800" b="1">
+                <a:solidFill>
+                  <a:srgbClr val="FFFFFF"/>
+                </a:solidFill>
+                <a:latin typeface="Calibri"/>
+              </a:defRPr>
+            </a:pPr>
+            <a:r>
+              <a:t>checkout</a:t>
+            </a:r>
+          </a:p>
+        </p:txBody>
+      </p:sp>
+      <p:cxnSp>
+        <p:nvCxnSpPr>
+          <p:cNvPr id="16" name="Connector 15"/>
+          <p:cNvCxnSpPr/>
+          <p:nvPr/>
+        </p:nvCxnSpPr>
+        <p:spPr>
+          <a:xfrm flipH="1">
+            <a:off x="2103120" y="2194560"/>
+            <a:ext cx="1280160" cy="731520"/>
+          </a:xfrm>
+          <a:prstGeom prst="line">
+            <a:avLst/>
+          </a:prstGeom>
+          <a:ln w="12700">
+            <a:solidFill>
+              <a:srgbClr val="BDBDBD"/>
+            </a:solidFill>
+          </a:ln>
+        </p:spPr>
+        <p:style>
+          <a:lnRef idx="2">
+            <a:schemeClr val="accent1"/>
+          </a:lnRef>
+          <a:fillRef idx="0">
+            <a:schemeClr val="accent1"/>
+          </a:fillRef>
+          <a:effectRef idx="1">
+            <a:schemeClr val="accent1"/>
+          </a:effectRef>
+          <a:fontRef idx="minor">
+            <a:schemeClr val="tx1"/>
+          </a:fontRef>
+        </p:style>
+      </p:cxnSp>
+      <p:sp>
+        <p:nvSpPr>
+          <p:cNvPr id="17" name="Rounded Rectangle 16"/>
+          <p:cNvSpPr/>
+          <p:nvPr/>
+        </p:nvSpPr>
+        <p:spPr>
+          <a:xfrm>
             <a:off x="3200400" y="2926080"/>
             <a:ext cx="1097280" cy="320040"/>
           </a:xfrm>
@@ -15864,7 +15952,7 @@
       </p:sp>
       <p:cxnSp>
         <p:nvCxnSpPr>
-          <p:cNvPr id="16" name="Connector 15"/>
+          <p:cNvPr id="18" name="Connector 17"/>
           <p:cNvCxnSpPr/>
           <p:nvPr/>
         </p:nvCxnSpPr>
@@ -15899,7 +15987,7 @@
       </p:cxnSp>
       <p:sp>
         <p:nvSpPr>
-          <p:cNvPr id="17" name="Rounded Rectangle 16"/>
+          <p:cNvPr id="19" name="Rounded Rectangle 18"/>
           <p:cNvSpPr/>
           <p:nvPr/>
         </p:nvSpPr>
@@ -15952,7 +16040,7 @@
       </p:sp>
       <p:cxnSp>
         <p:nvCxnSpPr>
-          <p:cNvPr id="18" name="Connector 17"/>
+          <p:cNvPr id="20" name="Connector 19"/>
           <p:cNvCxnSpPr/>
           <p:nvPr/>
         </p:nvCxnSpPr>
@@ -15987,7 +16075,7 @@
       </p:cxnSp>
       <p:sp>
         <p:nvSpPr>
-          <p:cNvPr id="19" name="Rounded Rectangle 18"/>
+          <p:cNvPr id="21" name="Rounded Rectangle 20"/>
           <p:cNvSpPr/>
           <p:nvPr/>
         </p:nvSpPr>
@@ -16040,7 +16128,7 @@
       </p:sp>
       <p:cxnSp>
         <p:nvCxnSpPr>
-          <p:cNvPr id="20" name="Connector 19"/>
+          <p:cNvPr id="22" name="Connector 21"/>
           <p:cNvCxnSpPr/>
           <p:nvPr/>
         </p:nvCxnSpPr>
@@ -16075,7 +16163,7 @@
       </p:cxnSp>
       <p:sp>
         <p:nvSpPr>
-          <p:cNvPr id="21" name="Rounded Rectangle 20"/>
+          <p:cNvPr id="23" name="Rounded Rectangle 22"/>
           <p:cNvSpPr/>
           <p:nvPr/>
         </p:nvSpPr>
@@ -16128,7 +16216,7 @@
       </p:sp>
       <p:cxnSp>
         <p:nvCxnSpPr>
-          <p:cNvPr id="22" name="Connector 21"/>
+          <p:cNvPr id="24" name="Connector 23"/>
           <p:cNvCxnSpPr/>
           <p:nvPr/>
         </p:nvCxnSpPr>
@@ -16163,7 +16251,95 @@
       </p:cxnSp>
       <p:sp>
         <p:nvSpPr>
-          <p:cNvPr id="23" name="TextBox 22"/>
+          <p:cNvPr id="25" name="Rounded Rectangle 24"/>
+          <p:cNvSpPr/>
+          <p:nvPr/>
+        </p:nvSpPr>
+        <p:spPr>
+          <a:xfrm>
+            <a:off x="4754880" y="3474720"/>
+            <a:ext cx="1097280" cy="320040"/>
+          </a:xfrm>
+          <a:prstGeom prst="roundRect">
+            <a:avLst/>
+          </a:prstGeom>
+          <a:solidFill>
+            <a:srgbClr val="1ABC9C"/>
+          </a:solidFill>
+          <a:ln>
+            <a:noFill/>
+          </a:ln>
+        </p:spPr>
+        <p:style>
+          <a:lnRef idx="1">
+            <a:schemeClr val="accent1"/>
+          </a:lnRef>
+          <a:fillRef idx="3">
+            <a:schemeClr val="accent1"/>
+          </a:fillRef>
+          <a:effectRef idx="2">
+            <a:schemeClr val="accent1"/>
+          </a:effectRef>
+          <a:fontRef idx="minor">
+            <a:schemeClr val="lt1"/>
+          </a:fontRef>
+        </p:style>
+        <p:txBody>
+          <a:bodyPr rtlCol="0" anchor="ctr" wrap="square" lIns="50800" rIns="50800" tIns="25400" bIns="25400"/>
+          <a:lstStyle/>
+          <a:p>
+            <a:pPr algn="ctr">
+              <a:defRPr sz="800" b="1">
+                <a:solidFill>
+                  <a:srgbClr val="FFFFFF"/>
+                </a:solidFill>
+                <a:latin typeface="Calibri"/>
+              </a:defRPr>
+            </a:pPr>
+            <a:r>
+              <a:t>ad</a:t>
+            </a:r>
+          </a:p>
+        </p:txBody>
+      </p:sp>
+      <p:cxnSp>
+        <p:nvCxnSpPr>
+          <p:cNvPr id="26" name="Connector 25"/>
+          <p:cNvCxnSpPr/>
+          <p:nvPr/>
+        </p:nvCxnSpPr>
+        <p:spPr>
+          <a:xfrm>
+            <a:off x="3383280" y="2194560"/>
+            <a:ext cx="1920240" cy="1280160"/>
+          </a:xfrm>
+          <a:prstGeom prst="line">
+            <a:avLst/>
+          </a:prstGeom>
+          <a:ln w="12700">
+            <a:solidFill>
+              <a:srgbClr val="BDBDBD"/>
+            </a:solidFill>
+          </a:ln>
+        </p:spPr>
+        <p:style>
+          <a:lnRef idx="2">
+            <a:schemeClr val="accent1"/>
+          </a:lnRef>
+          <a:fillRef idx="0">
+            <a:schemeClr val="accent1"/>
+          </a:fillRef>
+          <a:effectRef idx="1">
+            <a:schemeClr val="accent1"/>
+          </a:effectRef>
+          <a:fontRef idx="minor">
+            <a:schemeClr val="tx1"/>
+          </a:fontRef>
+        </p:style>
+      </p:cxnSp>
+      <p:sp>
+        <p:nvSpPr>
+          <p:cNvPr id="27" name="TextBox 26"/>
           <p:cNvSpPr txBox="1"/>
           <p:nvPr/>
         </p:nvSpPr>
@@ -16203,7 +16379,7 @@
       </p:sp>
       <p:sp>
         <p:nvSpPr>
-          <p:cNvPr id="24" name="Rounded Rectangle 23"/>
+          <p:cNvPr id="28" name="Rounded Rectangle 27"/>
           <p:cNvSpPr/>
           <p:nvPr/>
         </p:nvSpPr>
@@ -16248,7 +16424,7 @@
       </p:sp>
       <p:sp>
         <p:nvSpPr>
-          <p:cNvPr id="25" name="TextBox 24"/>
+          <p:cNvPr id="29" name="TextBox 28"/>
           <p:cNvSpPr txBox="1"/>
           <p:nvPr/>
         </p:nvSpPr>
@@ -16284,7 +16460,7 @@
       </p:sp>
       <p:sp>
         <p:nvSpPr>
-          <p:cNvPr id="26" name="Rounded Rectangle 25"/>
+          <p:cNvPr id="30" name="Rounded Rectangle 29"/>
           <p:cNvSpPr/>
           <p:nvPr/>
         </p:nvSpPr>
@@ -16329,7 +16505,7 @@
       </p:sp>
       <p:sp>
         <p:nvSpPr>
-          <p:cNvPr id="27" name="TextBox 26"/>
+          <p:cNvPr id="31" name="TextBox 30"/>
           <p:cNvSpPr txBox="1"/>
           <p:nvPr/>
         </p:nvSpPr>
@@ -16365,7 +16541,7 @@
       </p:sp>
       <p:sp>
         <p:nvSpPr>
-          <p:cNvPr id="28" name="TextBox 27"/>
+          <p:cNvPr id="32" name="TextBox 31"/>
           <p:cNvSpPr txBox="1"/>
           <p:nvPr/>
         </p:nvSpPr>
@@ -16405,7 +16581,7 @@
       </p:sp>
       <p:sp>
         <p:nvSpPr>
-          <p:cNvPr id="29" name="Rounded Rectangle 28"/>
+          <p:cNvPr id="33" name="Rounded Rectangle 32"/>
           <p:cNvSpPr/>
           <p:nvPr/>
         </p:nvSpPr>
@@ -16450,7 +16626,7 @@
       </p:sp>
       <p:sp>
         <p:nvSpPr>
-          <p:cNvPr id="30" name="TextBox 29"/>
+          <p:cNvPr id="34" name="TextBox 33"/>
           <p:cNvSpPr txBox="1"/>
           <p:nvPr/>
         </p:nvSpPr>
@@ -16486,7 +16662,7 @@
       </p:sp>
       <p:sp>
         <p:nvSpPr>
-          <p:cNvPr id="31" name="TextBox 30"/>
+          <p:cNvPr id="35" name="TextBox 34"/>
           <p:cNvSpPr txBox="1"/>
           <p:nvPr/>
         </p:nvSpPr>
@@ -16526,7 +16702,7 @@
       </p:sp>
       <p:sp>
         <p:nvSpPr>
-          <p:cNvPr id="32" name="Rounded Rectangle 31"/>
+          <p:cNvPr id="36" name="Rounded Rectangle 35"/>
           <p:cNvSpPr/>
           <p:nvPr/>
         </p:nvSpPr>
@@ -16571,7 +16747,7 @@
       </p:sp>
       <p:sp>
         <p:nvSpPr>
-          <p:cNvPr id="33" name="TextBox 32"/>
+          <p:cNvPr id="37" name="TextBox 36"/>
           <p:cNvSpPr txBox="1"/>
           <p:nvPr/>
         </p:nvSpPr>
@@ -16607,7 +16783,7 @@
       </p:sp>
       <p:sp>
         <p:nvSpPr>
-          <p:cNvPr id="34" name="TextBox 33"/>
+          <p:cNvPr id="38" name="TextBox 37"/>
           <p:cNvSpPr txBox="1"/>
           <p:nvPr/>
         </p:nvSpPr>
@@ -16647,7 +16823,7 @@
       </p:sp>
       <p:sp>
         <p:nvSpPr>
-          <p:cNvPr id="35" name="Rounded Rectangle 34"/>
+          <p:cNvPr id="39" name="Rounded Rectangle 38"/>
           <p:cNvSpPr/>
           <p:nvPr/>
         </p:nvSpPr>
@@ -16692,7 +16868,7 @@
       </p:sp>
       <p:sp>
         <p:nvSpPr>
-          <p:cNvPr id="36" name="TextBox 35"/>
+          <p:cNvPr id="40" name="TextBox 39"/>
           <p:cNvSpPr txBox="1"/>
           <p:nvPr/>
         </p:nvSpPr>
@@ -16728,7 +16904,7 @@
       </p:sp>
       <p:sp>
         <p:nvSpPr>
-          <p:cNvPr id="37" name="TextBox 36"/>
+          <p:cNvPr id="41" name="TextBox 40"/>
           <p:cNvSpPr txBox="1"/>
           <p:nvPr/>
         </p:nvSpPr>
@@ -16768,7 +16944,7 @@
       </p:sp>
       <p:sp>
         <p:nvSpPr>
-          <p:cNvPr id="38" name="Rounded Rectangle 37"/>
+          <p:cNvPr id="42" name="Rounded Rectangle 41"/>
           <p:cNvSpPr/>
           <p:nvPr/>
         </p:nvSpPr>
@@ -16813,7 +16989,7 @@
       </p:sp>
       <p:sp>
         <p:nvSpPr>
-          <p:cNvPr id="39" name="TextBox 38"/>
+          <p:cNvPr id="43" name="TextBox 42"/>
           <p:cNvSpPr txBox="1"/>
           <p:nvPr/>
         </p:nvSpPr>
@@ -16849,7 +17025,7 @@
       </p:sp>
       <p:sp>
         <p:nvSpPr>
-          <p:cNvPr id="40" name="TextBox 39"/>
+          <p:cNvPr id="44" name="TextBox 43"/>
           <p:cNvSpPr txBox="1"/>
           <p:nvPr/>
         </p:nvSpPr>
@@ -16889,7 +17065,7 @@
       </p:sp>
       <p:sp>
         <p:nvSpPr>
-          <p:cNvPr id="41" name="TextBox 40"/>
+          <p:cNvPr id="45" name="TextBox 44"/>
           <p:cNvSpPr txBox="1"/>
           <p:nvPr/>
         </p:nvSpPr>
@@ -16925,7 +17101,7 @@
       </p:sp>
       <p:sp>
         <p:nvSpPr>
-          <p:cNvPr id="42" name="Rounded Rectangle 41"/>
+          <p:cNvPr id="46" name="Rounded Rectangle 45"/>
           <p:cNvSpPr/>
           <p:nvPr/>
         </p:nvSpPr>
@@ -16970,7 +17146,7 @@
       </p:sp>
       <p:sp>
         <p:nvSpPr>
-          <p:cNvPr id="43" name="TextBox 42"/>
+          <p:cNvPr id="47" name="TextBox 46"/>
           <p:cNvSpPr txBox="1"/>
           <p:nvPr/>
         </p:nvSpPr>
@@ -17006,7 +17182,7 @@
       </p:sp>
       <p:graphicFrame>
         <p:nvGraphicFramePr>
-          <p:cNvPr id="44" name="Table 43"/>
+          <p:cNvPr id="48" name="Table 47"/>
           <p:cNvGraphicFramePr>
             <a:graphicFrameLocks noGrp="1"/>
           </p:cNvGraphicFramePr>
@@ -17388,7 +17564,7 @@
       </p:graphicFrame>
       <p:sp>
         <p:nvSpPr>
-          <p:cNvPr id="45" name="Rounded Rectangle 44"/>
+          <p:cNvPr id="49" name="Rounded Rectangle 48"/>
           <p:cNvSpPr/>
           <p:nvPr/>
         </p:nvSpPr>
@@ -17433,7 +17609,7 @@
       </p:sp>
       <p:sp>
         <p:nvSpPr>
-          <p:cNvPr id="46" name="TextBox 45"/>
+          <p:cNvPr id="50" name="TextBox 49"/>
           <p:cNvSpPr txBox="1"/>
           <p:nvPr/>
         </p:nvSpPr>
@@ -17469,7 +17645,7 @@
       </p:sp>
       <p:sp>
         <p:nvSpPr>
-          <p:cNvPr id="47" name="TextBox 46"/>
+          <p:cNvPr id="51" name="TextBox 50"/>
           <p:cNvSpPr txBox="1"/>
           <p:nvPr/>
         </p:nvSpPr>
@@ -17513,7 +17689,7 @@
       </p:sp>
       <p:sp>
         <p:nvSpPr>
-          <p:cNvPr id="48" name="Rounded Rectangle 47"/>
+          <p:cNvPr id="52" name="Rounded Rectangle 51"/>
           <p:cNvSpPr/>
           <p:nvPr/>
         </p:nvSpPr>
@@ -17558,7 +17734,7 @@
       </p:sp>
       <p:sp>
         <p:nvSpPr>
-          <p:cNvPr id="49" name="TextBox 48"/>
+          <p:cNvPr id="53" name="TextBox 52"/>
           <p:cNvSpPr txBox="1"/>
           <p:nvPr/>
         </p:nvSpPr>
@@ -17594,7 +17770,7 @@
       </p:sp>
       <p:graphicFrame>
         <p:nvGraphicFramePr>
-          <p:cNvPr id="50" name="Table 49"/>
+          <p:cNvPr id="54" name="Table 53"/>
           <p:cNvGraphicFramePr>
             <a:graphicFrameLocks noGrp="1"/>
           </p:cNvGraphicFramePr>
@@ -18008,7 +18184,7 @@
         <p:spPr>
           <a:xfrm>
             <a:off x="274320" y="1645920"/>
-            <a:ext cx="2560320" cy="914400"/>
+            <a:ext cx="2560320" cy="1024128"/>
           </a:xfrm>
           <a:prstGeom prst="roundRect">
             <a:avLst/>
@@ -18093,7 +18269,7 @@
         <p:spPr>
           <a:xfrm>
             <a:off x="365760" y="2057400"/>
-            <a:ext cx="2377440" cy="457200"/>
+            <a:ext cx="2377440" cy="566928"/>
           </a:xfrm>
           <a:prstGeom prst="rect">
             <a:avLst/>
@@ -18107,7 +18283,7 @@
           <a:lstStyle/>
           <a:p>
             <a:pPr algn="l">
-              <a:defRPr sz="1000" b="0">
+              <a:defRPr sz="900" b="0">
                 <a:solidFill>
                   <a:srgbClr val="BDBDBD"/>
                 </a:solidFill>
@@ -18133,7 +18309,7 @@
         <p:spPr>
           <a:xfrm>
             <a:off x="274320" y="2743200"/>
-            <a:ext cx="2560320" cy="914400"/>
+            <a:ext cx="2560320" cy="1024128"/>
           </a:xfrm>
           <a:prstGeom prst="roundRect">
             <a:avLst/>
@@ -18218,7 +18394,7 @@
         <p:spPr>
           <a:xfrm>
             <a:off x="365760" y="3154680"/>
-            <a:ext cx="2377440" cy="457200"/>
+            <a:ext cx="2377440" cy="566928"/>
           </a:xfrm>
           <a:prstGeom prst="rect">
             <a:avLst/>
@@ -18232,7 +18408,7 @@
           <a:lstStyle/>
           <a:p>
             <a:pPr algn="l">
-              <a:defRPr sz="1000" b="0">
+              <a:defRPr sz="900" b="0">
                 <a:solidFill>
                   <a:srgbClr val="BDBDBD"/>
                 </a:solidFill>
@@ -18262,7 +18438,7 @@
         <p:spPr>
           <a:xfrm>
             <a:off x="274320" y="3840480"/>
-            <a:ext cx="2560320" cy="914400"/>
+            <a:ext cx="2560320" cy="1024128"/>
           </a:xfrm>
           <a:prstGeom prst="roundRect">
             <a:avLst/>
@@ -18347,7 +18523,7 @@
         <p:spPr>
           <a:xfrm>
             <a:off x="365760" y="4251960"/>
-            <a:ext cx="2377440" cy="457200"/>
+            <a:ext cx="2377440" cy="566928"/>
           </a:xfrm>
           <a:prstGeom prst="rect">
             <a:avLst/>
@@ -18361,7 +18537,7 @@
           <a:lstStyle/>
           <a:p>
             <a:pPr algn="l">
-              <a:defRPr sz="1000" b="0">
+              <a:defRPr sz="900" b="0">
                 <a:solidFill>
                   <a:srgbClr val="BDBDBD"/>
                 </a:solidFill>
@@ -18387,7 +18563,7 @@
         <p:spPr>
           <a:xfrm>
             <a:off x="3108960" y="1645920"/>
-            <a:ext cx="2560320" cy="914400"/>
+            <a:ext cx="2560320" cy="1024128"/>
           </a:xfrm>
           <a:prstGeom prst="roundRect">
             <a:avLst/>
@@ -18468,7 +18644,7 @@
         <p:spPr>
           <a:xfrm>
             <a:off x="3200400" y="2057400"/>
-            <a:ext cx="2377440" cy="457200"/>
+            <a:ext cx="2377440" cy="566928"/>
           </a:xfrm>
           <a:prstGeom prst="rect">
             <a:avLst/>
@@ -18482,7 +18658,7 @@
           <a:lstStyle/>
           <a:p>
             <a:pPr algn="l">
-              <a:defRPr sz="1000" b="0">
+              <a:defRPr sz="900" b="0">
                 <a:solidFill>
                   <a:srgbClr val="BDBDBD"/>
                 </a:solidFill>
@@ -18508,7 +18684,7 @@
         <p:spPr>
           <a:xfrm>
             <a:off x="3108960" y="2743200"/>
-            <a:ext cx="2560320" cy="914400"/>
+            <a:ext cx="2560320" cy="1024128"/>
           </a:xfrm>
           <a:prstGeom prst="roundRect">
             <a:avLst/>
@@ -18593,7 +18769,7 @@
         <p:spPr>
           <a:xfrm>
             <a:off x="3200400" y="3154680"/>
-            <a:ext cx="2377440" cy="457200"/>
+            <a:ext cx="2377440" cy="566928"/>
           </a:xfrm>
           <a:prstGeom prst="rect">
             <a:avLst/>
@@ -18607,7 +18783,7 @@
           <a:lstStyle/>
           <a:p>
             <a:pPr algn="l">
-              <a:defRPr sz="1000" b="0">
+              <a:defRPr sz="900" b="0">
                 <a:solidFill>
                   <a:srgbClr val="BDBDBD"/>
                 </a:solidFill>
@@ -18633,7 +18809,7 @@
         <p:spPr>
           <a:xfrm>
             <a:off x="3108960" y="3840480"/>
-            <a:ext cx="2560320" cy="914400"/>
+            <a:ext cx="2560320" cy="1024128"/>
           </a:xfrm>
           <a:prstGeom prst="roundRect">
             <a:avLst/>
@@ -18714,7 +18890,7 @@
         <p:spPr>
           <a:xfrm>
             <a:off x="3200400" y="4251960"/>
-            <a:ext cx="2377440" cy="457200"/>
+            <a:ext cx="2377440" cy="566928"/>
           </a:xfrm>
           <a:prstGeom prst="rect">
             <a:avLst/>
@@ -18728,7 +18904,7 @@
           <a:lstStyle/>
           <a:p>
             <a:pPr algn="l">
-              <a:defRPr sz="1000" b="0">
+              <a:defRPr sz="900" b="0">
                 <a:solidFill>
                   <a:srgbClr val="BDBDBD"/>
                 </a:solidFill>
@@ -18790,7 +18966,7 @@
         <p:spPr>
           <a:xfrm>
             <a:off x="6217920" y="1645920"/>
-            <a:ext cx="2560320" cy="914400"/>
+            <a:ext cx="2560320" cy="1024128"/>
           </a:xfrm>
           <a:prstGeom prst="roundRect">
             <a:avLst/>
@@ -18875,7 +19051,7 @@
         <p:spPr>
           <a:xfrm>
             <a:off x="6309359" y="2057400"/>
-            <a:ext cx="2377440" cy="457200"/>
+            <a:ext cx="2377440" cy="566928"/>
           </a:xfrm>
           <a:prstGeom prst="rect">
             <a:avLst/>
@@ -18889,7 +19065,7 @@
           <a:lstStyle/>
           <a:p>
             <a:pPr algn="l">
-              <a:defRPr sz="1000" b="0">
+              <a:defRPr sz="900" b="0">
                 <a:solidFill>
                   <a:srgbClr val="BDBDBD"/>
                 </a:solidFill>
@@ -18919,7 +19095,7 @@
         <p:spPr>
           <a:xfrm>
             <a:off x="6217920" y="2743200"/>
-            <a:ext cx="2560320" cy="914400"/>
+            <a:ext cx="2560320" cy="1024128"/>
           </a:xfrm>
           <a:prstGeom prst="roundRect">
             <a:avLst/>
@@ -19004,7 +19180,7 @@
         <p:spPr>
           <a:xfrm>
             <a:off x="6309359" y="3154680"/>
-            <a:ext cx="2377440" cy="457200"/>
+            <a:ext cx="2377440" cy="566928"/>
           </a:xfrm>
           <a:prstGeom prst="rect">
             <a:avLst/>
@@ -19018,7 +19194,7 @@
           <a:lstStyle/>
           <a:p>
             <a:pPr algn="l">
-              <a:defRPr sz="1000" b="0">
+              <a:defRPr sz="900" b="0">
                 <a:solidFill>
                   <a:srgbClr val="BDBDBD"/>
                 </a:solidFill>
@@ -19048,7 +19224,7 @@
         <p:spPr>
           <a:xfrm>
             <a:off x="6217920" y="3840480"/>
-            <a:ext cx="2560320" cy="914400"/>
+            <a:ext cx="2560320" cy="1024128"/>
           </a:xfrm>
           <a:prstGeom prst="roundRect">
             <a:avLst/>
@@ -19133,7 +19309,7 @@
         <p:spPr>
           <a:xfrm>
             <a:off x="6309359" y="4251960"/>
-            <a:ext cx="2377440" cy="457200"/>
+            <a:ext cx="2377440" cy="566928"/>
           </a:xfrm>
           <a:prstGeom prst="rect">
             <a:avLst/>
@@ -19147,7 +19323,7 @@
           <a:lstStyle/>
           <a:p>
             <a:pPr algn="l">
-              <a:defRPr sz="1000" b="0">
+              <a:defRPr sz="900" b="0">
                 <a:solidFill>
                   <a:srgbClr val="BDBDBD"/>
                 </a:solidFill>
@@ -19177,7 +19353,7 @@
         <p:spPr>
           <a:xfrm>
             <a:off x="9052560" y="1645920"/>
-            <a:ext cx="2560320" cy="914400"/>
+            <a:ext cx="2560320" cy="1024128"/>
           </a:xfrm>
           <a:prstGeom prst="roundRect">
             <a:avLst/>
@@ -19262,7 +19438,7 @@
         <p:spPr>
           <a:xfrm>
             <a:off x="9144000" y="2057400"/>
-            <a:ext cx="2377440" cy="457200"/>
+            <a:ext cx="2377440" cy="566928"/>
           </a:xfrm>
           <a:prstGeom prst="rect">
             <a:avLst/>
@@ -19276,7 +19452,7 @@
           <a:lstStyle/>
           <a:p>
             <a:pPr algn="l">
-              <a:defRPr sz="1000" b="0">
+              <a:defRPr sz="900" b="0">
                 <a:solidFill>
                   <a:srgbClr val="BDBDBD"/>
                 </a:solidFill>
@@ -19306,7 +19482,7 @@
         <p:spPr>
           <a:xfrm>
             <a:off x="9052560" y="2743200"/>
-            <a:ext cx="2560320" cy="914400"/>
+            <a:ext cx="2560320" cy="1024128"/>
           </a:xfrm>
           <a:prstGeom prst="roundRect">
             <a:avLst/>
@@ -19387,7 +19563,7 @@
         <p:spPr>
           <a:xfrm>
             <a:off x="9144000" y="3154680"/>
-            <a:ext cx="2377440" cy="457200"/>
+            <a:ext cx="2377440" cy="566928"/>
           </a:xfrm>
           <a:prstGeom prst="rect">
             <a:avLst/>
@@ -19401,7 +19577,7 @@
           <a:lstStyle/>
           <a:p>
             <a:pPr algn="l">
-              <a:defRPr sz="1000" b="0">
+              <a:defRPr sz="900" b="0">
                 <a:solidFill>
                   <a:srgbClr val="BDBDBD"/>
                 </a:solidFill>
@@ -19431,7 +19607,7 @@
         <p:spPr>
           <a:xfrm>
             <a:off x="9052560" y="3840480"/>
-            <a:ext cx="2560320" cy="914400"/>
+            <a:ext cx="2560320" cy="1024128"/>
           </a:xfrm>
           <a:prstGeom prst="roundRect">
             <a:avLst/>
@@ -19516,7 +19692,7 @@
         <p:spPr>
           <a:xfrm>
             <a:off x="9144000" y="4251960"/>
-            <a:ext cx="2377440" cy="457200"/>
+            <a:ext cx="2377440" cy="566928"/>
           </a:xfrm>
           <a:prstGeom prst="rect">
             <a:avLst/>
@@ -19530,7 +19706,7 @@
           <a:lstStyle/>
           <a:p>
             <a:pPr algn="l">
-              <a:defRPr sz="1000" b="0">
+              <a:defRPr sz="900" b="0">
                 <a:solidFill>
                   <a:srgbClr val="BDBDBD"/>
                 </a:solidFill>
@@ -23085,7 +23261,7 @@
       </p:sp>
       <p:pic>
         <p:nvPicPr>
-          <p:cNvPr id="4" name="Picture 3" descr="resilience_scores.png"/>
+          <p:cNvPr id="4" name="Picture 3" descr="score_distribution.png"/>
           <p:cNvPicPr>
             <a:picLocks noChangeAspect="1"/>
           </p:cNvPicPr>
@@ -23248,11 +23424,11 @@
               </a:defRPr>
             </a:pPr>
             <a:r>
-              <a:t>• The score does NOT reproduce across</a:t>
+              <a:t>• The score does NOT reproduce across the 13</a:t>
             </a:r>
             <a:br/>
             <a:r>
-              <a:t>  the 13 collected runs:</a:t>
+              <a:t>  churn runs (≥3 iters, post-fix, baseline=100):</a:t>
             </a:r>
           </a:p>
           <a:p>

--- a/ChaosProbe_Presentation.pptx
+++ b/ChaosProbe_Presentation.pptx
@@ -3977,30 +3977,79 @@
           </a:p>
         </p:txBody>
       </p:sp>
-      <p:pic>
-        <p:nvPicPr>
-          <p:cNvPr id="4" name="Picture 3" descr="mechanism_distribution.png"/>
-          <p:cNvPicPr>
-            <a:picLocks noChangeAspect="1"/>
-          </p:cNvPicPr>
-          <p:nvPr/>
-        </p:nvPicPr>
-        <p:blipFill>
-          <a:blip r:embed="rId2"/>
-          <a:stretch>
-            <a:fillRect/>
-          </a:stretch>
-        </p:blipFill>
+      <p:sp>
+        <p:nvSpPr>
+          <p:cNvPr id="4" name="Rounded Rectangle 3"/>
+          <p:cNvSpPr/>
+          <p:nvPr/>
+        </p:nvSpPr>
         <p:spPr>
           <a:xfrm>
             <a:off x="274320" y="1280160"/>
             <a:ext cx="5669280" cy="3200400"/>
           </a:xfrm>
-          <a:prstGeom prst="rect">
-            <a:avLst/>
-          </a:prstGeom>
-        </p:spPr>
-      </p:pic>
+          <a:prstGeom prst="roundRect">
+            <a:avLst/>
+          </a:prstGeom>
+          <a:solidFill>
+            <a:srgbClr val="121222"/>
+          </a:solidFill>
+          <a:ln w="12700">
+            <a:solidFill>
+              <a:srgbClr val="9090A0"/>
+            </a:solidFill>
+          </a:ln>
+        </p:spPr>
+        <p:style>
+          <a:lnRef idx="1">
+            <a:schemeClr val="accent1"/>
+          </a:lnRef>
+          <a:fillRef idx="3">
+            <a:schemeClr val="accent1"/>
+          </a:fillRef>
+          <a:effectRef idx="2">
+            <a:schemeClr val="accent1"/>
+          </a:effectRef>
+          <a:fontRef idx="minor">
+            <a:schemeClr val="lt1"/>
+          </a:fontRef>
+        </p:style>
+        <p:txBody>
+          <a:bodyPr rtlCol="0" anchor="ctr" wrap="square" lIns="50800" rIns="50800" tIns="25400" bIns="25400"/>
+          <a:lstStyle/>
+          <a:p>
+            <a:pPr algn="ctr">
+              <a:defRPr sz="1100" b="0">
+                <a:solidFill>
+                  <a:srgbClr val="9090A0"/>
+                </a:solidFill>
+                <a:latin typeface="Calibri"/>
+              </a:defRPr>
+            </a:pPr>
+            <a:r>
+              <a:t>[Conntrack flush &amp; CPU throttle distributions]</a:t>
+            </a:r>
+            <a:br/>
+            <a:br/>
+            <a:r>
+              <a:t>Box plots per strategy across churn runs:</a:t>
+            </a:r>
+            <a:br/>
+            <a:r>
+              <a:t>conntrack flush % (M1) and during-chaos</a:t>
+            </a:r>
+            <a:br/>
+            <a:r>
+              <a:t>throttle rate (M2) — tight, reproducible.</a:t>
+            </a:r>
+            <a:br/>
+            <a:br/>
+            <a:r>
+              <a:t>Generated by: scripts/distribution_charts.py</a:t>
+            </a:r>
+          </a:p>
+        </p:txBody>
+      </p:sp>
       <p:sp>
         <p:nvSpPr>
           <p:cNvPr id="5" name="TextBox 4"/>
@@ -4046,7 +4095,7 @@
           <p:nvPr/>
         </p:nvPicPr>
         <p:blipFill>
-          <a:blip r:embed="rId3"/>
+          <a:blip r:embed="rId2"/>
           <a:stretch>
             <a:fillRect/>
           </a:stretch>
@@ -5915,7 +5964,7 @@
         <p:spPr>
           <a:xfrm>
             <a:off x="640080" y="2240280"/>
-            <a:ext cx="5120640" cy="914400"/>
+            <a:ext cx="5120640" cy="777240"/>
           </a:xfrm>
           <a:prstGeom prst="rect">
             <a:avLst/>
@@ -5950,7 +5999,7 @@
         </p:nvSpPr>
         <p:spPr>
           <a:xfrm>
-            <a:off x="640080" y="3383280"/>
+            <a:off x="640080" y="3108960"/>
             <a:ext cx="5120640" cy="274320"/>
           </a:xfrm>
           <a:prstGeom prst="rect">
@@ -5986,8 +6035,8 @@
         </p:nvSpPr>
         <p:spPr>
           <a:xfrm>
-            <a:off x="640080" y="3703320"/>
-            <a:ext cx="5120640" cy="914400"/>
+            <a:off x="640080" y="3429000"/>
+            <a:ext cx="5120640" cy="777240"/>
           </a:xfrm>
           <a:prstGeom prst="rect">
             <a:avLst/>
@@ -6022,7 +6071,7 @@
         </p:nvSpPr>
         <p:spPr>
           <a:xfrm>
-            <a:off x="640080" y="4846320"/>
+            <a:off x="640080" y="4297680"/>
             <a:ext cx="5120640" cy="274320"/>
           </a:xfrm>
           <a:prstGeom prst="rect">
@@ -6058,8 +6107,8 @@
         </p:nvSpPr>
         <p:spPr>
           <a:xfrm>
-            <a:off x="640080" y="5166360"/>
-            <a:ext cx="5120640" cy="914400"/>
+            <a:off x="640080" y="4617720"/>
+            <a:ext cx="5120640" cy="777240"/>
           </a:xfrm>
           <a:prstGeom prst="rect">
             <a:avLst/>
@@ -6088,7 +6137,79 @@
       </p:sp>
       <p:sp>
         <p:nvSpPr>
-          <p:cNvPr id="12" name="Rounded Rectangle 11"/>
+          <p:cNvPr id="12" name="TextBox 11"/>
+          <p:cNvSpPr txBox="1"/>
+          <p:nvPr/>
+        </p:nvSpPr>
+        <p:spPr>
+          <a:xfrm>
+            <a:off x="640080" y="5486400"/>
+            <a:ext cx="5120640" cy="274320"/>
+          </a:xfrm>
+          <a:prstGeom prst="rect">
+            <a:avLst/>
+          </a:prstGeom>
+          <a:noFill/>
+        </p:spPr>
+        <p:txBody>
+          <a:bodyPr wrap="square">
+            <a:spAutoFit/>
+          </a:bodyPr>
+          <a:lstStyle/>
+          <a:p>
+            <a:pPr algn="l">
+              <a:defRPr sz="1300" b="1">
+                <a:solidFill>
+                  <a:srgbClr val="FFFFFF"/>
+                </a:solidFill>
+                <a:latin typeface="Calibri"/>
+              </a:defRPr>
+            </a:pPr>
+            <a:r>
+              <a:t>Uneven strategy coverage</a:t>
+            </a:r>
+          </a:p>
+        </p:txBody>
+      </p:sp>
+      <p:sp>
+        <p:nvSpPr>
+          <p:cNvPr id="13" name="TextBox 12"/>
+          <p:cNvSpPr txBox="1"/>
+          <p:nvPr/>
+        </p:nvSpPr>
+        <p:spPr>
+          <a:xfrm>
+            <a:off x="640080" y="5806440"/>
+            <a:ext cx="5120640" cy="777240"/>
+          </a:xfrm>
+          <a:prstGeom prst="rect">
+            <a:avLst/>
+          </a:prstGeom>
+          <a:noFill/>
+        </p:spPr>
+        <p:txBody>
+          <a:bodyPr wrap="square">
+            <a:spAutoFit/>
+          </a:bodyPr>
+          <a:lstStyle/>
+          <a:p>
+            <a:pPr algn="l">
+              <a:defRPr sz="1100" b="0">
+                <a:solidFill>
+                  <a:srgbClr val="BDBDBD"/>
+                </a:solidFill>
+                <a:latin typeface="Calibri"/>
+              </a:defRPr>
+            </a:pPr>
+            <a:r>
+              <a:t>Reproducible findings rest on 3 configs (colocate, spread, default). The 4 contention strategies (random, adversarial, best-fit, dependency-aware) appear in half the runs and no reproducible finding — a generality check, not validated signals, pending more cpu-hog runs.</a:t>
+            </a:r>
+          </a:p>
+        </p:txBody>
+      </p:sp>
+      <p:sp>
+        <p:nvSpPr>
+          <p:cNvPr id="14" name="Rounded Rectangle 13"/>
           <p:cNvSpPr/>
           <p:nvPr/>
         </p:nvSpPr>
@@ -6133,7 +6254,7 @@
       </p:sp>
       <p:sp>
         <p:nvSpPr>
-          <p:cNvPr id="13" name="TextBox 12"/>
+          <p:cNvPr id="15" name="TextBox 14"/>
           <p:cNvSpPr txBox="1"/>
           <p:nvPr/>
         </p:nvSpPr>
@@ -6169,7 +6290,7 @@
       </p:sp>
       <p:sp>
         <p:nvSpPr>
-          <p:cNvPr id="14" name="TextBox 13"/>
+          <p:cNvPr id="16" name="TextBox 15"/>
           <p:cNvSpPr txBox="1"/>
           <p:nvPr/>
         </p:nvSpPr>
@@ -6205,7 +6326,7 @@
       </p:sp>
       <p:sp>
         <p:nvSpPr>
-          <p:cNvPr id="15" name="TextBox 14"/>
+          <p:cNvPr id="17" name="TextBox 16"/>
           <p:cNvSpPr txBox="1"/>
           <p:nvPr/>
         </p:nvSpPr>
@@ -6241,7 +6362,7 @@
       </p:sp>
       <p:sp>
         <p:nvSpPr>
-          <p:cNvPr id="16" name="TextBox 15"/>
+          <p:cNvPr id="18" name="TextBox 17"/>
           <p:cNvSpPr txBox="1"/>
           <p:nvPr/>
         </p:nvSpPr>
@@ -6277,7 +6398,7 @@
       </p:sp>
       <p:sp>
         <p:nvSpPr>
-          <p:cNvPr id="17" name="TextBox 16"/>
+          <p:cNvPr id="19" name="TextBox 18"/>
           <p:cNvSpPr txBox="1"/>
           <p:nvPr/>
         </p:nvSpPr>
@@ -6313,7 +6434,7 @@
       </p:sp>
       <p:sp>
         <p:nvSpPr>
-          <p:cNvPr id="18" name="TextBox 17"/>
+          <p:cNvPr id="20" name="TextBox 19"/>
           <p:cNvSpPr txBox="1"/>
           <p:nvPr/>
         </p:nvSpPr>
@@ -6349,7 +6470,7 @@
       </p:sp>
       <p:sp>
         <p:nvSpPr>
-          <p:cNvPr id="19" name="TextBox 18"/>
+          <p:cNvPr id="21" name="TextBox 20"/>
           <p:cNvSpPr txBox="1"/>
           <p:nvPr/>
         </p:nvSpPr>
@@ -6385,7 +6506,7 @@
       </p:sp>
       <p:sp>
         <p:nvSpPr>
-          <p:cNvPr id="20" name="TextBox 19"/>
+          <p:cNvPr id="22" name="TextBox 21"/>
           <p:cNvSpPr txBox="1"/>
           <p:nvPr/>
         </p:nvSpPr>
@@ -6421,7 +6542,7 @@
       </p:sp>
       <p:sp>
         <p:nvSpPr>
-          <p:cNvPr id="21" name="TextBox 20"/>
+          <p:cNvPr id="23" name="TextBox 22"/>
           <p:cNvSpPr txBox="1"/>
           <p:nvPr/>
         </p:nvSpPr>
@@ -15214,6 +15335,42 @@
             </a:pPr>
             <a:r>
               <a:t>DeathStarBench (Gan ASPLOS 2019)</a:t>
+            </a:r>
+          </a:p>
+        </p:txBody>
+      </p:sp>
+      <p:sp>
+        <p:nvSpPr>
+          <p:cNvPr id="85" name="TextBox 84"/>
+          <p:cNvSpPr txBox="1"/>
+          <p:nvPr/>
+        </p:nvSpPr>
+        <p:spPr>
+          <a:xfrm>
+            <a:off x="228600" y="6355080"/>
+            <a:ext cx="11750040" cy="457200"/>
+          </a:xfrm>
+          <a:prstGeom prst="rect">
+            <a:avLst/>
+          </a:prstGeom>
+          <a:noFill/>
+        </p:spPr>
+        <p:txBody>
+          <a:bodyPr wrap="square">
+            <a:spAutoFit/>
+          </a:bodyPr>
+          <a:lstStyle/>
+          <a:p>
+            <a:pPr algn="l">
+              <a:defRPr sz="800" b="0">
+                <a:solidFill>
+                  <a:srgbClr val="9090A0"/>
+                </a:solidFill>
+                <a:latin typeface="Calibri"/>
+              </a:defRPr>
+            </a:pPr>
+            <a:r>
+              <a:t>Analytic weight: the reproducible findings (M1 conntrack flush, M2 CPU throttling) rest on the colocate vs. spread/default locality contrast. Random, adversarial, best-fit &amp; dependency-aware are a generality check — designed for the contention hypothesis, present in only half the run set, they widen the placements the noisy score still can't rank (M4) and await the cpu-hog contention matrix.</a:t>
             </a:r>
           </a:p>
         </p:txBody>
@@ -23259,30 +23416,79 @@
           </a:p>
         </p:txBody>
       </p:sp>
-      <p:pic>
-        <p:nvPicPr>
-          <p:cNvPr id="4" name="Picture 3" descr="score_distribution.png"/>
-          <p:cNvPicPr>
-            <a:picLocks noChangeAspect="1"/>
-          </p:cNvPicPr>
-          <p:nvPr/>
-        </p:nvPicPr>
-        <p:blipFill>
-          <a:blip r:embed="rId2"/>
-          <a:stretch>
-            <a:fillRect/>
-          </a:stretch>
-        </p:blipFill>
+      <p:sp>
+        <p:nvSpPr>
+          <p:cNvPr id="4" name="Rounded Rectangle 3"/>
+          <p:cNvSpPr/>
+          <p:nvPr/>
+        </p:nvSpPr>
         <p:spPr>
           <a:xfrm>
             <a:off x="457200" y="1280160"/>
             <a:ext cx="6858000" cy="4114800"/>
           </a:xfrm>
-          <a:prstGeom prst="rect">
-            <a:avLst/>
-          </a:prstGeom>
-        </p:spPr>
-      </p:pic>
+          <a:prstGeom prst="roundRect">
+            <a:avLst/>
+          </a:prstGeom>
+          <a:solidFill>
+            <a:srgbClr val="121222"/>
+          </a:solidFill>
+          <a:ln w="12700">
+            <a:solidFill>
+              <a:srgbClr val="9090A0"/>
+            </a:solidFill>
+          </a:ln>
+        </p:spPr>
+        <p:style>
+          <a:lnRef idx="1">
+            <a:schemeClr val="accent1"/>
+          </a:lnRef>
+          <a:fillRef idx="3">
+            <a:schemeClr val="accent1"/>
+          </a:fillRef>
+          <a:effectRef idx="2">
+            <a:schemeClr val="accent1"/>
+          </a:effectRef>
+          <a:fontRef idx="minor">
+            <a:schemeClr val="lt1"/>
+          </a:fontRef>
+        </p:style>
+        <p:txBody>
+          <a:bodyPr rtlCol="0" anchor="ctr" wrap="square" lIns="50800" rIns="50800" tIns="25400" bIns="25400"/>
+          <a:lstStyle/>
+          <a:p>
+            <a:pPr algn="ctr">
+              <a:defRPr sz="1100" b="0">
+                <a:solidFill>
+                  <a:srgbClr val="9090A0"/>
+                </a:solidFill>
+                <a:latin typeface="Calibri"/>
+              </a:defRPr>
+            </a:pPr>
+            <a:r>
+              <a:t>[Resilience Score Distribution Across Runs]</a:t>
+            </a:r>
+            <a:br/>
+            <a:br/>
+            <a:r>
+              <a:t>Box plot of resilience score (0–100%) per</a:t>
+            </a:r>
+            <a:br/>
+            <a:r>
+              <a:t>strategy across all churn runs — the boxes</a:t>
+            </a:r>
+            <a:br/>
+            <a:r>
+              <a:t>overlap, so the score cannot rank placements.</a:t>
+            </a:r>
+            <a:br/>
+            <a:br/>
+            <a:r>
+              <a:t>Generated by: scripts/distribution_charts.py</a:t>
+            </a:r>
+          </a:p>
+        </p:txBody>
+      </p:sp>
       <p:sp>
         <p:nvSpPr>
           <p:cNvPr id="5" name="Rounded Rectangle 4"/>

--- a/ChaosProbe_Presentation.pptx
+++ b/ChaosProbe_Presentation.pptx
@@ -3406,30 +3406,75 @@
           </a:p>
         </p:txBody>
       </p:sp>
-      <p:pic>
-        <p:nvPicPr>
-          <p:cNvPr id="4" name="Picture 3" descr="recovery_times.png"/>
-          <p:cNvPicPr>
-            <a:picLocks noChangeAspect="1"/>
-          </p:cNvPicPr>
-          <p:nvPr/>
-        </p:nvPicPr>
-        <p:blipFill>
-          <a:blip r:embed="rId2"/>
-          <a:stretch>
-            <a:fillRect/>
-          </a:stretch>
-        </p:blipFill>
+      <p:sp>
+        <p:nvSpPr>
+          <p:cNvPr id="4" name="Rounded Rectangle 3"/>
+          <p:cNvSpPr/>
+          <p:nvPr/>
+        </p:nvSpPr>
         <p:spPr>
           <a:xfrm>
             <a:off x="274320" y="1280160"/>
             <a:ext cx="5669280" cy="3200400"/>
           </a:xfrm>
-          <a:prstGeom prst="rect">
-            <a:avLst/>
-          </a:prstGeom>
-        </p:spPr>
-      </p:pic>
+          <a:prstGeom prst="roundRect">
+            <a:avLst/>
+          </a:prstGeom>
+          <a:solidFill>
+            <a:srgbClr val="121222"/>
+          </a:solidFill>
+          <a:ln w="12700">
+            <a:solidFill>
+              <a:srgbClr val="9090A0"/>
+            </a:solidFill>
+          </a:ln>
+        </p:spPr>
+        <p:style>
+          <a:lnRef idx="1">
+            <a:schemeClr val="accent1"/>
+          </a:lnRef>
+          <a:fillRef idx="3">
+            <a:schemeClr val="accent1"/>
+          </a:fillRef>
+          <a:effectRef idx="2">
+            <a:schemeClr val="accent1"/>
+          </a:effectRef>
+          <a:fontRef idx="minor">
+            <a:schemeClr val="lt1"/>
+          </a:fontRef>
+        </p:style>
+        <p:txBody>
+          <a:bodyPr rtlCol="0" anchor="ctr" wrap="square" lIns="50800" rIns="50800" tIns="25400" bIns="25400"/>
+          <a:lstStyle/>
+          <a:p>
+            <a:pPr algn="ctr">
+              <a:defRPr sz="1100" b="0">
+                <a:solidFill>
+                  <a:srgbClr val="9090A0"/>
+                </a:solidFill>
+                <a:latin typeface="Calibri"/>
+              </a:defRPr>
+            </a:pPr>
+            <a:r>
+              <a:t>[Recovery Times by Strategy]</a:t>
+            </a:r>
+            <a:br/>
+            <a:br/>
+            <a:r>
+              <a:t>Box plot: pod deletion → ready (ms)</a:t>
+            </a:r>
+            <a:br/>
+            <a:r>
+              <a:t>per placement strategy.</a:t>
+            </a:r>
+            <a:br/>
+            <a:br/>
+            <a:r>
+              <a:t>Generated by: chaosprobe visualize</a:t>
+            </a:r>
+          </a:p>
+        </p:txBody>
+      </p:sp>
       <p:sp>
         <p:nvSpPr>
           <p:cNvPr id="5" name="TextBox 4"/>
@@ -3475,7 +3520,7 @@
           <p:nvPr/>
         </p:nvPicPr>
         <p:blipFill>
-          <a:blip r:embed="rId3"/>
+          <a:blip r:embed="rId2"/>
           <a:stretch>
             <a:fillRect/>
           </a:stretch>

--- a/ChaosProbe_Presentation.pptx
+++ b/ChaosProbe_Presentation.pptx
@@ -3739,7 +3739,7 @@
             </a:r>
             <a:br/>
             <a:r>
-              <a:t>  does not track the placement story (refutes L3)</a:t>
+              <a:t>  does not track the placement story (L3 inapplicable)</a:t>
             </a:r>
           </a:p>
         </p:txBody>
@@ -5325,11 +5325,11 @@
               </a:defRPr>
             </a:pPr>
             <a:r>
-              <a:t>Refuted structurally: the d2s/s2r split is</a:t>
+              <a:t>Inapplicable on its own terms: the d2s/s2r split</a:t>
             </a:r>
             <a:br/>
             <a:r>
-              <a:t>unstable run-to-run and the score is</a:t>
+              <a:t>is unstable run-to-run and the score is</a:t>
             </a:r>
             <a:br/>
             <a:r>
@@ -5386,7 +5386,7 @@
               </a:defRPr>
             </a:pPr>
             <a:r>
-              <a:t>Refuted</a:t>
+              <a:t>Inapplic.</a:t>
             </a:r>
           </a:p>
         </p:txBody>
@@ -7951,11 +7951,11 @@
               </a:defRPr>
             </a:pPr>
             <a:r>
-              <a:t>Refuted at</a:t>
+              <a:t>Inapplicable</a:t>
             </a:r>
             <a:br/>
             <a:r>
-              <a:t>mechanism layer</a:t>
+              <a:t>under churn</a:t>
             </a:r>
           </a:p>
         </p:txBody>
@@ -10120,7 +10120,7 @@
               </a:defRPr>
             </a:pPr>
             <a:r>
-              <a:t>'Spread is safer' is refuted</a:t>
+              <a:t>'Spread is safer' doesn't transfer to churn</a:t>
             </a:r>
           </a:p>
         </p:txBody>
@@ -10156,7 +10156,7 @@
               </a:defRPr>
             </a:pPr>
             <a:r>
-              <a:t>Both reproducible metrics favour co-location under churn. The literature's spread-isolation prescription is refuted at the metric level — not merely unmeasurable on the score.</a:t>
+              <a:t>Both reproducible metrics favour co-location under churn. The literature's spread-isolation prescription is inapplicable at the mechanism layer — and does NOT reach the user (decoupling).</a:t>
             </a:r>
           </a:p>
         </p:txBody>

--- a/ChaosProbe_Presentation.pptx
+++ b/ChaosProbe_Presentation.pptx
@@ -3406,75 +3406,30 @@
           </a:p>
         </p:txBody>
       </p:sp>
-      <p:sp>
-        <p:nvSpPr>
-          <p:cNvPr id="4" name="Rounded Rectangle 3"/>
-          <p:cNvSpPr/>
-          <p:nvPr/>
-        </p:nvSpPr>
+      <p:pic>
+        <p:nvPicPr>
+          <p:cNvPr id="4" name="Picture 3" descr="recovery_times.png"/>
+          <p:cNvPicPr>
+            <a:picLocks noChangeAspect="1"/>
+          </p:cNvPicPr>
+          <p:nvPr/>
+        </p:nvPicPr>
+        <p:blipFill>
+          <a:blip r:embed="rId2"/>
+          <a:stretch>
+            <a:fillRect/>
+          </a:stretch>
+        </p:blipFill>
         <p:spPr>
           <a:xfrm>
             <a:off x="274320" y="1280160"/>
             <a:ext cx="5669280" cy="3200400"/>
           </a:xfrm>
-          <a:prstGeom prst="roundRect">
-            <a:avLst/>
-          </a:prstGeom>
-          <a:solidFill>
-            <a:srgbClr val="121222"/>
-          </a:solidFill>
-          <a:ln w="12700">
-            <a:solidFill>
-              <a:srgbClr val="9090A0"/>
-            </a:solidFill>
-          </a:ln>
-        </p:spPr>
-        <p:style>
-          <a:lnRef idx="1">
-            <a:schemeClr val="accent1"/>
-          </a:lnRef>
-          <a:fillRef idx="3">
-            <a:schemeClr val="accent1"/>
-          </a:fillRef>
-          <a:effectRef idx="2">
-            <a:schemeClr val="accent1"/>
-          </a:effectRef>
-          <a:fontRef idx="minor">
-            <a:schemeClr val="lt1"/>
-          </a:fontRef>
-        </p:style>
-        <p:txBody>
-          <a:bodyPr rtlCol="0" anchor="ctr" wrap="square" lIns="50800" rIns="50800" tIns="25400" bIns="25400"/>
-          <a:lstStyle/>
-          <a:p>
-            <a:pPr algn="ctr">
-              <a:defRPr sz="1100" b="0">
-                <a:solidFill>
-                  <a:srgbClr val="9090A0"/>
-                </a:solidFill>
-                <a:latin typeface="Calibri"/>
-              </a:defRPr>
-            </a:pPr>
-            <a:r>
-              <a:t>[Recovery Times by Strategy]</a:t>
-            </a:r>
-            <a:br/>
-            <a:br/>
-            <a:r>
-              <a:t>Box plot: pod deletion → ready (ms)</a:t>
-            </a:r>
-            <a:br/>
-            <a:r>
-              <a:t>per placement strategy.</a:t>
-            </a:r>
-            <a:br/>
-            <a:br/>
-            <a:r>
-              <a:t>Generated by: chaosprobe visualize</a:t>
-            </a:r>
-          </a:p>
-        </p:txBody>
-      </p:sp>
+          <a:prstGeom prst="rect">
+            <a:avLst/>
+          </a:prstGeom>
+        </p:spPr>
+      </p:pic>
       <p:sp>
         <p:nvSpPr>
           <p:cNvPr id="5" name="TextBox 4"/>
@@ -3520,7 +3475,7 @@
           <p:nvPr/>
         </p:nvPicPr>
         <p:blipFill>
-          <a:blip r:embed="rId2"/>
+          <a:blip r:embed="rId3"/>
           <a:stretch>
             <a:fillRect/>
           </a:stretch>

--- a/ChaosProbe_Presentation.pptx
+++ b/ChaosProbe_Presentation.pptx
@@ -20,6 +20,8 @@
     <p:sldId id="268" r:id="rId19"/>
     <p:sldId id="269" r:id="rId20"/>
     <p:sldId id="270" r:id="rId21"/>
+    <p:sldId id="271" r:id="rId22"/>
+    <p:sldId id="272" r:id="rId23"/>
   </p:sldIdLst>
   <p:sldSz cx="12191695" cy="6858000" type="screen4x3"/>
   <p:notesSz cx="6858000" cy="9144000"/>
@@ -3358,7 +3360,7 @@
               </a:defRPr>
             </a:pPr>
             <a:r>
-              <a:t>Results — Recovery Time &amp; Latency</a:t>
+              <a:t>Results — H2: A Kernel Reconvergence Signature Moves</a:t>
             </a:r>
           </a:p>
         </p:txBody>
@@ -3408,7 +3410,7 @@
       </p:sp>
       <p:pic>
         <p:nvPicPr>
-          <p:cNvPr id="4" name="Picture 3" descr="recovery_times.png"/>
+          <p:cNvPr id="4" name="Picture 3" descr="mechanism_distribution.png"/>
           <p:cNvPicPr>
             <a:picLocks noChangeAspect="1"/>
           </p:cNvPicPr>
@@ -3422,8 +3424,8 @@
         </p:blipFill>
         <p:spPr>
           <a:xfrm>
-            <a:off x="274320" y="1280160"/>
-            <a:ext cx="5669280" cy="3200400"/>
+            <a:off x="457200" y="1280160"/>
+            <a:ext cx="6858000" cy="4114800"/>
           </a:xfrm>
           <a:prstGeom prst="rect">
             <a:avLst/>
@@ -3432,110 +3434,14 @@
       </p:pic>
       <p:sp>
         <p:nvSpPr>
-          <p:cNvPr id="5" name="TextBox 4"/>
-          <p:cNvSpPr txBox="1"/>
-          <p:nvPr/>
-        </p:nvSpPr>
-        <p:spPr>
-          <a:xfrm>
-            <a:off x="274320" y="4526280"/>
-            <a:ext cx="5669280" cy="274320"/>
-          </a:xfrm>
-          <a:prstGeom prst="rect">
-            <a:avLst/>
-          </a:prstGeom>
-          <a:noFill/>
-        </p:spPr>
-        <p:txBody>
-          <a:bodyPr wrap="square">
-            <a:spAutoFit/>
-          </a:bodyPr>
-          <a:lstStyle/>
-          <a:p>
-            <a:pPr algn="ctr">
-              <a:defRPr sz="1200" b="1">
-                <a:solidFill>
-                  <a:srgbClr val="0096D6"/>
-                </a:solidFill>
-                <a:latin typeface="Calibri"/>
-              </a:defRPr>
-            </a:pPr>
-            <a:r>
-              <a:t>Recovery Time (pod deletion → ready)</a:t>
-            </a:r>
-          </a:p>
-        </p:txBody>
-      </p:sp>
-      <p:pic>
-        <p:nvPicPr>
-          <p:cNvPr id="6" name="Picture 5" descr="latency_degradation.png"/>
-          <p:cNvPicPr>
-            <a:picLocks noChangeAspect="1"/>
-          </p:cNvPicPr>
-          <p:nvPr/>
-        </p:nvPicPr>
-        <p:blipFill>
-          <a:blip r:embed="rId3"/>
-          <a:stretch>
-            <a:fillRect/>
-          </a:stretch>
-        </p:blipFill>
-        <p:spPr>
-          <a:xfrm>
-            <a:off x="6217920" y="1280160"/>
-            <a:ext cx="5669280" cy="3200400"/>
-          </a:xfrm>
-          <a:prstGeom prst="rect">
-            <a:avLst/>
-          </a:prstGeom>
-        </p:spPr>
-      </p:pic>
-      <p:sp>
-        <p:nvSpPr>
-          <p:cNvPr id="7" name="TextBox 6"/>
-          <p:cNvSpPr txBox="1"/>
-          <p:nvPr/>
-        </p:nvSpPr>
-        <p:spPr>
-          <a:xfrm>
-            <a:off x="6217920" y="4526280"/>
-            <a:ext cx="5669280" cy="274320"/>
-          </a:xfrm>
-          <a:prstGeom prst="rect">
-            <a:avLst/>
-          </a:prstGeom>
-          <a:noFill/>
-        </p:spPr>
-        <p:txBody>
-          <a:bodyPr wrap="square">
-            <a:spAutoFit/>
-          </a:bodyPr>
-          <a:lstStyle/>
-          <a:p>
-            <a:pPr algn="ctr">
-              <a:defRPr sz="1200" b="1">
-                <a:solidFill>
-                  <a:srgbClr val="0096D6"/>
-                </a:solidFill>
-                <a:latin typeface="Calibri"/>
-              </a:defRPr>
-            </a:pPr>
-            <a:r>
-              <a:t>Latency Degradation (Pre-Chaos vs During-Chaos)</a:t>
-            </a:r>
-          </a:p>
-        </p:txBody>
-      </p:sp>
-      <p:sp>
-        <p:nvSpPr>
-          <p:cNvPr id="8" name="Rounded Rectangle 7"/>
+          <p:cNvPr id="5" name="Rounded Rectangle 4"/>
           <p:cNvSpPr/>
           <p:nvPr/>
         </p:nvSpPr>
         <p:spPr>
           <a:xfrm>
-            <a:off x="274320" y="5029200"/>
-            <a:ext cx="5669280" cy="1645920"/>
+            <a:off x="7772400" y="1280160"/>
+            <a:ext cx="3931920" cy="4114800"/>
           </a:xfrm>
           <a:prstGeom prst="roundRect">
             <a:avLst/>
@@ -3543,9 +3449,9 @@
           <a:solidFill>
             <a:srgbClr val="121222"/>
           </a:solidFill>
-          <a:ln w="12700">
+          <a:ln w="25400">
             <a:solidFill>
-              <a:srgbClr val="E74C3C"/>
+              <a:srgbClr val="F39C12"/>
             </a:solidFill>
           </a:ln>
         </p:spPr>
@@ -3573,14 +3479,14 @@
       </p:sp>
       <p:sp>
         <p:nvSpPr>
-          <p:cNvPr id="9" name="TextBox 8"/>
+          <p:cNvPr id="6" name="TextBox 5"/>
           <p:cNvSpPr txBox="1"/>
           <p:nvPr/>
         </p:nvSpPr>
         <p:spPr>
           <a:xfrm>
-            <a:off x="457200" y="5029200"/>
-            <a:ext cx="5303520" cy="274320"/>
+            <a:off x="7955279" y="1325880"/>
+            <a:ext cx="3566160" cy="274320"/>
           </a:xfrm>
           <a:prstGeom prst="rect">
             <a:avLst/>
@@ -3594,29 +3500,29 @@
           <a:lstStyle/>
           <a:p>
             <a:pPr algn="l">
-              <a:defRPr sz="1400" b="1">
-                <a:solidFill>
-                  <a:srgbClr val="E74C3C"/>
-                </a:solidFill>
-                <a:latin typeface="Calibri"/>
-              </a:defRPr>
-            </a:pPr>
-            <a:r>
-              <a:t>Recovery split is unstable (S2)</a:t>
-            </a:r>
-          </a:p>
-        </p:txBody>
-      </p:sp>
-      <p:sp>
-        <p:nvSpPr>
-          <p:cNvPr id="10" name="TextBox 9"/>
+              <a:defRPr sz="1500" b="1">
+                <a:solidFill>
+                  <a:srgbClr val="F39C12"/>
+                </a:solidFill>
+                <a:latin typeface="Calibri"/>
+              </a:defRPr>
+            </a:pPr>
+            <a:r>
+              <a:t>Conntrack Flush (per session)</a:t>
+            </a:r>
+          </a:p>
+        </p:txBody>
+      </p:sp>
+      <p:sp>
+        <p:nvSpPr>
+          <p:cNvPr id="7" name="TextBox 6"/>
           <p:cNvSpPr txBox="1"/>
           <p:nvPr/>
         </p:nvSpPr>
         <p:spPr>
           <a:xfrm>
-            <a:off x="457200" y="5349240"/>
-            <a:ext cx="5303520" cy="1188720"/>
+            <a:off x="7955279" y="1691640"/>
+            <a:ext cx="3566160" cy="3474720"/>
           </a:xfrm>
           <a:prstGeom prst="rect">
             <a:avLst/>
@@ -3636,7 +3542,7 @@
               <a:spcAft>
                 <a:spcPts val="200"/>
               </a:spcAft>
-              <a:defRPr sz="1100">
+              <a:defRPr sz="1000">
                 <a:solidFill>
                   <a:srgbClr val="BDBDBD"/>
                 </a:solidFill>
@@ -3644,11 +3550,11 @@
               </a:defRPr>
             </a:pPr>
             <a:r>
-              <a:t>• Recovery = deletion→scheduled + scheduled→ready;</a:t>
+              <a:t>• Median flush during the kill cycle:</a:t>
             </a:r>
             <a:br/>
             <a:r>
-              <a:t>  their split is run-dependent</a:t>
+              <a:t>  spread 38.5% vs colocate 2.7%</a:t>
             </a:r>
           </a:p>
           <a:p>
@@ -3659,7 +3565,7 @@
               <a:spcAft>
                 <a:spcPts val="200"/>
               </a:spcAft>
-              <a:defRPr sz="1100">
+              <a:defRPr sz="1000">
                 <a:solidFill>
                   <a:srgbClr val="BDBDBD"/>
                 </a:solidFill>
@@ -3667,11 +3573,7 @@
               </a:defRPr>
             </a:pPr>
             <a:r>
-              <a:t>• app-startup dominates in some runs (84–96%),</a:t>
-            </a:r>
-            <a:br/>
-            <a:r>
-              <a:t>  the scheduling term in others (up to ~78%)</a:t>
+              <a:t>• spread &gt; colocate in 7 / 7 sessions</a:t>
             </a:r>
           </a:p>
           <a:p>
@@ -3682,7 +3584,7 @@
               <a:spcAft>
                 <a:spcPts val="200"/>
               </a:spcAft>
-              <a:defRPr sz="1100">
+              <a:defRPr sz="1000">
                 <a:solidFill>
                   <a:srgbClr val="BDBDBD"/>
                 </a:solidFill>
@@ -3690,117 +3592,13 @@
               </a:defRPr>
             </a:pPr>
             <a:r>
-              <a:t>• Either way recovery rank is noise run-to-run — it</a:t>
+              <a:t>• Sign test p = 0.0156;</a:t>
             </a:r>
             <a:br/>
             <a:r>
-              <a:t>  does not track the placement story (L3 inapplicable)</a:t>
-            </a:r>
-          </a:p>
-        </p:txBody>
-      </p:sp>
-      <p:sp>
-        <p:nvSpPr>
-          <p:cNvPr id="11" name="Rounded Rectangle 10"/>
-          <p:cNvSpPr/>
-          <p:nvPr/>
-        </p:nvSpPr>
-        <p:spPr>
-          <a:xfrm>
-            <a:off x="6217920" y="5029200"/>
-            <a:ext cx="5669280" cy="1645920"/>
-          </a:xfrm>
-          <a:prstGeom prst="roundRect">
-            <a:avLst/>
-          </a:prstGeom>
-          <a:solidFill>
-            <a:srgbClr val="121222"/>
-          </a:solidFill>
-          <a:ln w="12700">
-            <a:solidFill>
-              <a:srgbClr val="F39C12"/>
-            </a:solidFill>
-          </a:ln>
-        </p:spPr>
-        <p:style>
-          <a:lnRef idx="1">
-            <a:schemeClr val="accent1"/>
-          </a:lnRef>
-          <a:fillRef idx="3">
-            <a:schemeClr val="accent1"/>
-          </a:fillRef>
-          <a:effectRef idx="2">
-            <a:schemeClr val="accent1"/>
-          </a:effectRef>
-          <a:fontRef idx="minor">
-            <a:schemeClr val="lt1"/>
-          </a:fontRef>
-        </p:style>
-        <p:txBody>
-          <a:bodyPr rtlCol="0" anchor="ctr"/>
-          <a:lstStyle/>
-          <a:p>
-            <a:pPr algn="ctr"/>
-          </a:p>
-        </p:txBody>
-      </p:sp>
-      <p:sp>
-        <p:nvSpPr>
-          <p:cNvPr id="12" name="TextBox 11"/>
-          <p:cNvSpPr txBox="1"/>
-          <p:nvPr/>
-        </p:nvSpPr>
-        <p:spPr>
-          <a:xfrm>
-            <a:off x="6400800" y="5029200"/>
-            <a:ext cx="5303520" cy="274320"/>
-          </a:xfrm>
-          <a:prstGeom prst="rect">
-            <a:avLst/>
-          </a:prstGeom>
-          <a:noFill/>
-        </p:spPr>
-        <p:txBody>
-          <a:bodyPr wrap="square">
-            <a:spAutoFit/>
-          </a:bodyPr>
-          <a:lstStyle/>
-          <a:p>
-            <a:pPr algn="l">
-              <a:defRPr sz="1400" b="1">
-                <a:solidFill>
-                  <a:srgbClr val="F39C12"/>
-                </a:solidFill>
-                <a:latin typeface="Calibri"/>
-              </a:defRPr>
-            </a:pPr>
-            <a:r>
-              <a:t>The fault signal is in the tail</a:t>
-            </a:r>
-          </a:p>
-        </p:txBody>
-      </p:sp>
-      <p:sp>
-        <p:nvSpPr>
-          <p:cNvPr id="13" name="TextBox 12"/>
-          <p:cNvSpPr txBox="1"/>
-          <p:nvPr/>
-        </p:nvSpPr>
-        <p:spPr>
-          <a:xfrm>
-            <a:off x="6400800" y="5349240"/>
-            <a:ext cx="5303520" cy="1188720"/>
-          </a:xfrm>
-          <a:prstGeom prst="rect">
-            <a:avLst/>
-          </a:prstGeom>
-          <a:noFill/>
-        </p:spPr>
-        <p:txBody>
-          <a:bodyPr wrap="square">
-            <a:spAutoFit/>
-          </a:bodyPr>
-          <a:lstStyle/>
+              <a:t>  Wilcoxon signed-rank p = 0.0225</a:t>
+            </a:r>
+          </a:p>
           <a:p>
             <a:pPr>
               <a:spcBef>
@@ -3809,7 +3607,7 @@
               <a:spcAft>
                 <a:spcPts val="200"/>
               </a:spcAft>
-              <a:defRPr sz="1100">
+              <a:defRPr sz="1000">
                 <a:solidFill>
                   <a:srgbClr val="BDBDBD"/>
                 </a:solidFill>
@@ -3817,11 +3615,15 @@
               </a:defRPr>
             </a:pPr>
             <a:r>
-              <a:t>• Targeted route during chaos: mean 231 ms but</a:t>
+              <a:t>• Mechanistic reading: churn tears down</a:t>
             </a:r>
             <a:br/>
             <a:r>
-              <a:t>  p95 619 ms and max 3334 ms — tail is 14× the mean</a:t>
+              <a:t>  cross-node flows that must reconverge;</a:t>
+            </a:r>
+            <a:br/>
+            <a:r>
+              <a:t>  node-local paths are spared</a:t>
             </a:r>
           </a:p>
           <a:p>
@@ -3832,7 +3634,7 @@
               <a:spcAft>
                 <a:spcPts val="200"/>
               </a:spcAft>
-              <a:defRPr sz="1100">
+              <a:defRPr sz="1000">
                 <a:solidFill>
                   <a:srgbClr val="BDBDBD"/>
                 </a:solidFill>
@@ -3840,22 +3642,124 @@
               </a:defRPr>
             </a:pPr>
             <a:r>
-              <a:t>• Routes not depending on the target stay flat at</a:t>
+              <a:t>• Corroborating only: CPU throttling —</a:t>
             </a:r>
             <a:br/>
             <a:r>
-              <a:t>  70–110 ms — impact is route-specific, not node-wide</a:t>
-            </a:r>
-          </a:p>
-          <a:p>
-            <a:pPr>
-              <a:spcBef>
-                <a:spcPts val="200"/>
-              </a:spcBef>
-              <a:spcAft>
-                <a:spcPts val="200"/>
-              </a:spcAft>
-              <a:defRPr sz="1100">
+              <a:t>  colocate lowest in 6 / 7 sessions</a:t>
+            </a:r>
+            <a:br/>
+            <a:r>
+              <a:t>  (weaker; lead with conntrack)</a:t>
+            </a:r>
+          </a:p>
+        </p:txBody>
+      </p:sp>
+      <p:sp>
+        <p:nvSpPr>
+          <p:cNvPr id="8" name="Rounded Rectangle 7"/>
+          <p:cNvSpPr/>
+          <p:nvPr/>
+        </p:nvSpPr>
+        <p:spPr>
+          <a:xfrm>
+            <a:off x="457200" y="5669280"/>
+            <a:ext cx="11247120" cy="914400"/>
+          </a:xfrm>
+          <a:prstGeom prst="roundRect">
+            <a:avLst/>
+          </a:prstGeom>
+          <a:solidFill>
+            <a:srgbClr val="121222"/>
+          </a:solidFill>
+          <a:ln w="25400">
+            <a:solidFill>
+              <a:srgbClr val="F39C12"/>
+            </a:solidFill>
+          </a:ln>
+        </p:spPr>
+        <p:style>
+          <a:lnRef idx="1">
+            <a:schemeClr val="accent1"/>
+          </a:lnRef>
+          <a:fillRef idx="3">
+            <a:schemeClr val="accent1"/>
+          </a:fillRef>
+          <a:effectRef idx="2">
+            <a:schemeClr val="accent1"/>
+          </a:effectRef>
+          <a:fontRef idx="minor">
+            <a:schemeClr val="lt1"/>
+          </a:fontRef>
+        </p:style>
+        <p:txBody>
+          <a:bodyPr rtlCol="0" anchor="ctr"/>
+          <a:lstStyle/>
+          <a:p>
+            <a:pPr algn="ctr"/>
+          </a:p>
+        </p:txBody>
+      </p:sp>
+      <p:sp>
+        <p:nvSpPr>
+          <p:cNvPr id="9" name="TextBox 8"/>
+          <p:cNvSpPr txBox="1"/>
+          <p:nvPr/>
+        </p:nvSpPr>
+        <p:spPr>
+          <a:xfrm>
+            <a:off x="640080" y="5669280"/>
+            <a:ext cx="10881360" cy="274320"/>
+          </a:xfrm>
+          <a:prstGeom prst="rect">
+            <a:avLst/>
+          </a:prstGeom>
+          <a:noFill/>
+        </p:spPr>
+        <p:txBody>
+          <a:bodyPr wrap="square">
+            <a:spAutoFit/>
+          </a:bodyPr>
+          <a:lstStyle/>
+          <a:p>
+            <a:pPr algn="l">
+              <a:defRPr sz="1400" b="1">
+                <a:solidFill>
+                  <a:srgbClr val="F39C12"/>
+                </a:solidFill>
+                <a:latin typeface="Calibri"/>
+              </a:defRPr>
+            </a:pPr>
+            <a:r>
+              <a:t>H2 — a reconvergence signature, deliberately not attributed to a specific code path</a:t>
+            </a:r>
+          </a:p>
+        </p:txBody>
+      </p:sp>
+      <p:sp>
+        <p:nvSpPr>
+          <p:cNvPr id="10" name="TextBox 9"/>
+          <p:cNvSpPr txBox="1"/>
+          <p:nvPr/>
+        </p:nvSpPr>
+        <p:spPr>
+          <a:xfrm>
+            <a:off x="640080" y="5989320"/>
+            <a:ext cx="10881360" cy="548640"/>
+          </a:xfrm>
+          <a:prstGeom prst="rect">
+            <a:avLst/>
+          </a:prstGeom>
+          <a:noFill/>
+        </p:spPr>
+        <p:txBody>
+          <a:bodyPr wrap="square">
+            <a:spAutoFit/>
+          </a:bodyPr>
+          <a:lstStyle/>
+          <a:p>
+            <a:pPr algn="l">
+              <a:defRPr sz="1000" b="0">
                 <a:solidFill>
                   <a:srgbClr val="BDBDBD"/>
                 </a:solidFill>
@@ -3863,11 +3767,7 @@
               </a:defRPr>
             </a:pPr>
             <a:r>
-              <a:t>• Mean-based SLOs would miss the fault entirely</a:t>
-            </a:r>
-            <a:br/>
-            <a:r>
-              <a:t>  (Dean &amp; Barroso, Tail at Scale)</a:t>
+              <a:t>The flush is reported as a measured kernel/network reconvergence signature of the kill cycle. It is not attributed to kube-proxy's active conntrack-flush path: upstream that path is UDP-only, while this workload is TCP/gRPC — re-attribution of the exact mechanism is pending.</a:t>
             </a:r>
           </a:p>
         </p:txBody>
@@ -3929,7 +3829,7 @@
               </a:defRPr>
             </a:pPr>
             <a:r>
-              <a:t>Results — Primary Metrics: Conntrack &amp; CPU (M1, M2)</a:t>
+              <a:t>Results — H3: The Mechanism Does Not Reach the User</a:t>
             </a:r>
           </a:p>
         </p:txBody>
@@ -3977,118 +3877,9 @@
           </a:p>
         </p:txBody>
       </p:sp>
-      <p:sp>
-        <p:nvSpPr>
-          <p:cNvPr id="4" name="Rounded Rectangle 3"/>
-          <p:cNvSpPr/>
-          <p:nvPr/>
-        </p:nvSpPr>
-        <p:spPr>
-          <a:xfrm>
-            <a:off x="274320" y="1280160"/>
-            <a:ext cx="5669280" cy="3200400"/>
-          </a:xfrm>
-          <a:prstGeom prst="roundRect">
-            <a:avLst/>
-          </a:prstGeom>
-          <a:solidFill>
-            <a:srgbClr val="121222"/>
-          </a:solidFill>
-          <a:ln w="12700">
-            <a:solidFill>
-              <a:srgbClr val="9090A0"/>
-            </a:solidFill>
-          </a:ln>
-        </p:spPr>
-        <p:style>
-          <a:lnRef idx="1">
-            <a:schemeClr val="accent1"/>
-          </a:lnRef>
-          <a:fillRef idx="3">
-            <a:schemeClr val="accent1"/>
-          </a:fillRef>
-          <a:effectRef idx="2">
-            <a:schemeClr val="accent1"/>
-          </a:effectRef>
-          <a:fontRef idx="minor">
-            <a:schemeClr val="lt1"/>
-          </a:fontRef>
-        </p:style>
-        <p:txBody>
-          <a:bodyPr rtlCol="0" anchor="ctr" wrap="square" lIns="50800" rIns="50800" tIns="25400" bIns="25400"/>
-          <a:lstStyle/>
-          <a:p>
-            <a:pPr algn="ctr">
-              <a:defRPr sz="1100" b="0">
-                <a:solidFill>
-                  <a:srgbClr val="9090A0"/>
-                </a:solidFill>
-                <a:latin typeface="Calibri"/>
-              </a:defRPr>
-            </a:pPr>
-            <a:r>
-              <a:t>[Conntrack flush &amp; CPU throttle distributions]</a:t>
-            </a:r>
-            <a:br/>
-            <a:br/>
-            <a:r>
-              <a:t>Box plots per strategy across churn runs:</a:t>
-            </a:r>
-            <a:br/>
-            <a:r>
-              <a:t>conntrack flush % (M1) and during-chaos</a:t>
-            </a:r>
-            <a:br/>
-            <a:r>
-              <a:t>throttle rate (M2) — tight, reproducible.</a:t>
-            </a:r>
-            <a:br/>
-            <a:br/>
-            <a:r>
-              <a:t>Generated by: scripts/distribution_charts.py</a:t>
-            </a:r>
-          </a:p>
-        </p:txBody>
-      </p:sp>
-      <p:sp>
-        <p:nvSpPr>
-          <p:cNvPr id="5" name="TextBox 4"/>
-          <p:cNvSpPr txBox="1"/>
-          <p:nvPr/>
-        </p:nvSpPr>
-        <p:spPr>
-          <a:xfrm>
-            <a:off x="274320" y="4526280"/>
-            <a:ext cx="5669280" cy="274320"/>
-          </a:xfrm>
-          <a:prstGeom prst="rect">
-            <a:avLst/>
-          </a:prstGeom>
-          <a:noFill/>
-        </p:spPr>
-        <p:txBody>
-          <a:bodyPr wrap="square">
-            <a:spAutoFit/>
-          </a:bodyPr>
-          <a:lstStyle/>
-          <a:p>
-            <a:pPr algn="ctr">
-              <a:defRPr sz="1200" b="1">
-                <a:solidFill>
-                  <a:srgbClr val="0096D6"/>
-                </a:solidFill>
-                <a:latin typeface="Calibri"/>
-              </a:defRPr>
-            </a:pPr>
-            <a:r>
-              <a:t>Conntrack Churn &amp; CPU Throttling (M1, M2)</a:t>
-            </a:r>
-          </a:p>
-        </p:txBody>
-      </p:sp>
       <p:pic>
         <p:nvPicPr>
-          <p:cNvPr id="6" name="Picture 5" descr="throughput_by_strategy.png"/>
+          <p:cNvPr id="4" name="Picture 3" descr="latency_degradation.png"/>
           <p:cNvPicPr>
             <a:picLocks noChangeAspect="1"/>
           </p:cNvPicPr>
@@ -4102,8 +3893,8 @@
         </p:blipFill>
         <p:spPr>
           <a:xfrm>
-            <a:off x="6217920" y="1280160"/>
-            <a:ext cx="5669280" cy="3200400"/>
+            <a:off x="457200" y="1280160"/>
+            <a:ext cx="6858000" cy="4114800"/>
           </a:xfrm>
           <a:prstGeom prst="rect">
             <a:avLst/>
@@ -4112,50 +3903,14 @@
       </p:pic>
       <p:sp>
         <p:nvSpPr>
-          <p:cNvPr id="7" name="TextBox 6"/>
-          <p:cNvSpPr txBox="1"/>
-          <p:nvPr/>
-        </p:nvSpPr>
-        <p:spPr>
-          <a:xfrm>
-            <a:off x="6217920" y="4526280"/>
-            <a:ext cx="5669280" cy="274320"/>
-          </a:xfrm>
-          <a:prstGeom prst="rect">
-            <a:avLst/>
-          </a:prstGeom>
-          <a:noFill/>
-        </p:spPr>
-        <p:txBody>
-          <a:bodyPr wrap="square">
-            <a:spAutoFit/>
-          </a:bodyPr>
-          <a:lstStyle/>
-          <a:p>
-            <a:pPr algn="ctr">
-              <a:defRPr sz="1200" b="1">
-                <a:solidFill>
-                  <a:srgbClr val="0096D6"/>
-                </a:solidFill>
-                <a:latin typeface="Calibri"/>
-              </a:defRPr>
-            </a:pPr>
-            <a:r>
-              <a:t>I/O Throughput (Redis ops/s, Disk bytes/s)</a:t>
-            </a:r>
-          </a:p>
-        </p:txBody>
-      </p:sp>
-      <p:sp>
-        <p:nvSpPr>
-          <p:cNvPr id="8" name="Rounded Rectangle 7"/>
+          <p:cNvPr id="5" name="Rounded Rectangle 4"/>
           <p:cNvSpPr/>
           <p:nvPr/>
         </p:nvSpPr>
         <p:spPr>
           <a:xfrm>
-            <a:off x="274320" y="5029200"/>
-            <a:ext cx="5669280" cy="1645920"/>
+            <a:off x="7772400" y="1280160"/>
+            <a:ext cx="3931920" cy="4114800"/>
           </a:xfrm>
           <a:prstGeom prst="roundRect">
             <a:avLst/>
@@ -4163,7 +3918,7 @@
           <a:solidFill>
             <a:srgbClr val="121222"/>
           </a:solidFill>
-          <a:ln w="12700">
+          <a:ln w="25400">
             <a:solidFill>
               <a:srgbClr val="2ECC71"/>
             </a:solidFill>
@@ -4193,14 +3948,14 @@
       </p:sp>
       <p:sp>
         <p:nvSpPr>
-          <p:cNvPr id="9" name="TextBox 8"/>
+          <p:cNvPr id="6" name="TextBox 5"/>
           <p:cNvSpPr txBox="1"/>
           <p:nvPr/>
         </p:nvSpPr>
         <p:spPr>
           <a:xfrm>
-            <a:off x="457200" y="5029200"/>
-            <a:ext cx="5303520" cy="274320"/>
+            <a:off x="7955279" y="1325880"/>
+            <a:ext cx="3566160" cy="274320"/>
           </a:xfrm>
           <a:prstGeom prst="rect">
             <a:avLst/>
@@ -4214,7 +3969,7 @@
           <a:lstStyle/>
           <a:p>
             <a:pPr algn="l">
-              <a:defRPr sz="1400" b="1">
+              <a:defRPr sz="1600" b="1">
                 <a:solidFill>
                   <a:srgbClr val="2ECC71"/>
                 </a:solidFill>
@@ -4222,21 +3977,21 @@
               </a:defRPr>
             </a:pPr>
             <a:r>
-              <a:t>M2 — co-location lowers CPU contention</a:t>
-            </a:r>
-          </a:p>
-        </p:txBody>
-      </p:sp>
-      <p:sp>
-        <p:nvSpPr>
-          <p:cNvPr id="10" name="TextBox 9"/>
+              <a:t>Decoupling Evidence</a:t>
+            </a:r>
+          </a:p>
+        </p:txBody>
+      </p:sp>
+      <p:sp>
+        <p:nvSpPr>
+          <p:cNvPr id="7" name="TextBox 6"/>
           <p:cNvSpPr txBox="1"/>
           <p:nvPr/>
         </p:nvSpPr>
         <p:spPr>
           <a:xfrm>
-            <a:off x="457200" y="5349240"/>
-            <a:ext cx="5303520" cy="1188720"/>
+            <a:off x="7955279" y="1691640"/>
+            <a:ext cx="3566160" cy="3474720"/>
           </a:xfrm>
           <a:prstGeom prst="rect">
             <a:avLst/>
@@ -4256,7 +4011,7 @@
               <a:spcAft>
                 <a:spcPts val="200"/>
               </a:spcAft>
-              <a:defRPr sz="1100">
+              <a:defRPr sz="1000">
                 <a:solidFill>
                   <a:srgbClr val="BDBDBD"/>
                 </a:solidFill>
@@ -4264,11 +4019,15 @@
               </a:defRPr>
             </a:pPr>
             <a:r>
-              <a:t>• Densest placement (colocate) throttles less than</a:t>
+              <a:t>• Conntrack flush → dependent-route p95:</a:t>
             </a:r>
             <a:br/>
             <a:r>
-              <a:t>  default/spread — during-chaos rate 1.54 vs 1.90, 1.94</a:t>
+              <a:t>  ρ = 0.07 (n.s.) — and TOST declares it</a:t>
+            </a:r>
+            <a:br/>
+            <a:r>
+              <a:t>  statistically equivalent to zero</a:t>
             </a:r>
           </a:p>
           <a:p>
@@ -4279,7 +4038,7 @@
               <a:spcAft>
                 <a:spcPts val="200"/>
               </a:spcAft>
-              <a:defRPr sz="1100">
+              <a:defRPr sz="1000">
                 <a:solidFill>
                   <a:srgbClr val="BDBDBD"/>
                 </a:solidFill>
@@ -4287,7 +4046,15 @@
               </a:defRPr>
             </a:pPr>
             <a:r>
-              <a:t>• colocate &lt; default in 11 of 13 runs — reproducible</a:t>
+              <a:t>• Control route (does NOT depend on the</a:t>
+            </a:r>
+            <a:br/>
+            <a:r>
+              <a:t>  target): ρ = 0.29* — the correlation is</a:t>
+            </a:r>
+            <a:br/>
+            <a:r>
+              <a:t>  stronger where it shouldn't exist</a:t>
             </a:r>
           </a:p>
           <a:p>
@@ -4298,7 +4065,7 @@
               <a:spcAft>
                 <a:spcPts val="200"/>
               </a:spcAft>
-              <a:defRPr sz="1100">
+              <a:defRPr sz="1000">
                 <a:solidFill>
                   <a:srgbClr val="BDBDBD"/>
                 </a:solidFill>
@@ -4306,11 +4073,151 @@
               </a:defRPr>
             </a:pPr>
             <a:r>
-              <a:t>• Opposite of Bubble-Up's dense=more-contention; the</a:t>
+              <a:t>• That pattern is the signature of a</a:t>
             </a:r>
             <a:br/>
             <a:r>
-              <a:t>  contention model does not fit a churn fault</a:t>
+              <a:t>  run-level confound, not causation</a:t>
+            </a:r>
+          </a:p>
+          <a:p>
+            <a:pPr>
+              <a:spcBef>
+                <a:spcPts val="200"/>
+              </a:spcBef>
+              <a:spcAft>
+                <a:spcPts val="200"/>
+              </a:spcAft>
+              <a:defRPr sz="1000">
+                <a:solidFill>
+                  <a:srgbClr val="BDBDBD"/>
+                </a:solidFill>
+                <a:latin typeface="Calibri"/>
+              </a:defRPr>
+            </a:pPr>
+            <a:r>
+              <a:t>• No dependency-specific propagation of</a:t>
+            </a:r>
+            <a:br/>
+            <a:r>
+              <a:t>  the mechanism to the user layer</a:t>
+            </a:r>
+          </a:p>
+        </p:txBody>
+      </p:sp>
+      <p:sp>
+        <p:nvSpPr>
+          <p:cNvPr id="8" name="Rounded Rectangle 7"/>
+          <p:cNvSpPr/>
+          <p:nvPr/>
+        </p:nvSpPr>
+        <p:spPr>
+          <a:xfrm>
+            <a:off x="274320" y="5669280"/>
+            <a:ext cx="5669280" cy="1005840"/>
+          </a:xfrm>
+          <a:prstGeom prst="roundRect">
+            <a:avLst/>
+          </a:prstGeom>
+          <a:solidFill>
+            <a:srgbClr val="121222"/>
+          </a:solidFill>
+          <a:ln w="12700">
+            <a:solidFill>
+              <a:srgbClr val="0096D6"/>
+            </a:solidFill>
+          </a:ln>
+        </p:spPr>
+        <p:style>
+          <a:lnRef idx="1">
+            <a:schemeClr val="accent1"/>
+          </a:lnRef>
+          <a:fillRef idx="3">
+            <a:schemeClr val="accent1"/>
+          </a:fillRef>
+          <a:effectRef idx="2">
+            <a:schemeClr val="accent1"/>
+          </a:effectRef>
+          <a:fontRef idx="minor">
+            <a:schemeClr val="lt1"/>
+          </a:fontRef>
+        </p:style>
+        <p:txBody>
+          <a:bodyPr rtlCol="0" anchor="ctr"/>
+          <a:lstStyle/>
+          <a:p>
+            <a:pPr algn="ctr"/>
+          </a:p>
+        </p:txBody>
+      </p:sp>
+      <p:sp>
+        <p:nvSpPr>
+          <p:cNvPr id="9" name="TextBox 8"/>
+          <p:cNvSpPr txBox="1"/>
+          <p:nvPr/>
+        </p:nvSpPr>
+        <p:spPr>
+          <a:xfrm>
+            <a:off x="457200" y="5669280"/>
+            <a:ext cx="5303520" cy="274320"/>
+          </a:xfrm>
+          <a:prstGeom prst="rect">
+            <a:avLst/>
+          </a:prstGeom>
+          <a:noFill/>
+        </p:spPr>
+        <p:txBody>
+          <a:bodyPr wrap="square">
+            <a:spAutoFit/>
+          </a:bodyPr>
+          <a:lstStyle/>
+          <a:p>
+            <a:pPr algn="l">
+              <a:defRPr sz="1400" b="1">
+                <a:solidFill>
+                  <a:srgbClr val="0096D6"/>
+                </a:solidFill>
+                <a:latin typeface="Calibri"/>
+              </a:defRPr>
+            </a:pPr>
+            <a:r>
+              <a:t>The layered churn story (H1–H3)</a:t>
+            </a:r>
+          </a:p>
+        </p:txBody>
+      </p:sp>
+      <p:sp>
+        <p:nvSpPr>
+          <p:cNvPr id="10" name="TextBox 9"/>
+          <p:cNvSpPr txBox="1"/>
+          <p:nvPr/>
+        </p:nvSpPr>
+        <p:spPr>
+          <a:xfrm>
+            <a:off x="457200" y="5989320"/>
+            <a:ext cx="5303520" cy="548640"/>
+          </a:xfrm>
+          <a:prstGeom prst="rect">
+            <a:avLst/>
+          </a:prstGeom>
+          <a:noFill/>
+        </p:spPr>
+        <p:txBody>
+          <a:bodyPr wrap="square">
+            <a:spAutoFit/>
+          </a:bodyPr>
+          <a:lstStyle/>
+          <a:p>
+            <a:pPr algn="l">
+              <a:defRPr sz="1000" b="0">
+                <a:solidFill>
+                  <a:srgbClr val="BDBDBD"/>
+                </a:solidFill>
+                <a:latin typeface="Calibri"/>
+              </a:defRPr>
+            </a:pPr>
+            <a:r>
+              <a:t>The score is blind (H1); the kernel layer moves with placement (H2); the user layer does not follow (H3). Three layers, three different answers.</a:t>
             </a:r>
           </a:p>
         </p:txBody>
@@ -4323,8 +4230,8 @@
         </p:nvSpPr>
         <p:spPr>
           <a:xfrm>
-            <a:off x="6217920" y="5029200"/>
-            <a:ext cx="5669280" cy="1645920"/>
+            <a:off x="6217920" y="5669280"/>
+            <a:ext cx="5669280" cy="1005840"/>
           </a:xfrm>
           <a:prstGeom prst="roundRect">
             <a:avLst/>
@@ -4368,7 +4275,7 @@
         </p:nvSpPr>
         <p:spPr>
           <a:xfrm>
-            <a:off x="6400800" y="5029200"/>
+            <a:off x="6400800" y="5669280"/>
             <a:ext cx="5303520" cy="274320"/>
           </a:xfrm>
           <a:prstGeom prst="rect">
@@ -4391,7 +4298,7 @@
               </a:defRPr>
             </a:pPr>
             <a:r>
-              <a:t>M1 — spreading flushes conn-state</a:t>
+              <a:t>Operator reading (bounded)</a:t>
             </a:r>
           </a:p>
         </p:txBody>
@@ -4404,8 +4311,8 @@
         </p:nvSpPr>
         <p:spPr>
           <a:xfrm>
-            <a:off x="6400800" y="5349240"/>
-            <a:ext cx="5303520" cy="1188720"/>
+            <a:off x="6400800" y="5989320"/>
+            <a:ext cx="5303520" cy="548640"/>
           </a:xfrm>
           <a:prstGeom prst="rect">
             <a:avLst/>
@@ -4418,14 +4325,8 @@
           </a:bodyPr>
           <a:lstStyle/>
           <a:p>
-            <a:pPr>
-              <a:spcBef>
-                <a:spcPts val="200"/>
-              </a:spcBef>
-              <a:spcAft>
-                <a:spcPts val="200"/>
-              </a:spcAft>
-              <a:defRPr sz="1100">
+            <a:pPr algn="l">
+              <a:defRPr sz="1000" b="0">
                 <a:solidFill>
                   <a:srgbClr val="BDBDBD"/>
                 </a:solidFill>
@@ -4433,57 +4334,7 @@
               </a:defRPr>
             </a:pPr>
             <a:r>
-              <a:t>• Spread/default flush 36–39% of node conntrack</a:t>
-            </a:r>
-            <a:br/>
-            <a:r>
-              <a:t>  entries during churn; colocate stays flat (−1.6%)</a:t>
-            </a:r>
-          </a:p>
-          <a:p>
-            <a:pPr>
-              <a:spcBef>
-                <a:spcPts val="200"/>
-              </a:spcBef>
-              <a:spcAft>
-                <a:spcPts val="200"/>
-              </a:spcAft>
-              <a:defRPr sz="1100">
-                <a:solidFill>
-                  <a:srgbClr val="BDBDBD"/>
-                </a:solidFill>
-                <a:latin typeface="Calibri"/>
-              </a:defRPr>
-            </a:pPr>
-            <a:r>
-              <a:t>• Reproducible in all 12 runs measured — the primary,</a:t>
-            </a:r>
-            <a:br/>
-            <a:r>
-              <a:t>  large-effect fault-response metric</a:t>
-            </a:r>
-          </a:p>
-          <a:p>
-            <a:pPr>
-              <a:spcBef>
-                <a:spcPts val="200"/>
-              </a:spcBef>
-              <a:spcAft>
-                <a:spcPts val="200"/>
-              </a:spcAft>
-              <a:defRPr sz="1100">
-                <a:solidFill>
-                  <a:srgbClr val="BDBDBD"/>
-                </a:solidFill>
-                <a:latin typeface="Calibri"/>
-              </a:defRPr>
-            </a:pPr>
-            <a:r>
-              <a:t>• Spreading maximises the cross-node flows pod churn</a:t>
-            </a:r>
-            <a:br/>
-            <a:r>
-              <a:t>  tears down — both metrics favour co-location (M3)</a:t>
+              <a:t>For churn faults on single-replica services in this setup, pod placement is not a user-visible resilience lever — the killed pod is simply gone.</a:t>
             </a:r>
           </a:p>
         </p:txBody>
@@ -4545,7 +4396,7 @@
               </a:defRPr>
             </a:pPr>
             <a:r>
-              <a:t>Discussion</a:t>
+              <a:t>Results — H4 &amp; H5: Load Contention and a Graph Predictor</a:t>
             </a:r>
           </a:p>
         </p:txBody>
@@ -4593,129 +4444,16 @@
           </a:p>
         </p:txBody>
       </p:sp>
-      <p:pic>
-        <p:nvPicPr>
-          <p:cNvPr id="4" name="Picture 3" descr="strategy_comparison_heatmap.png"/>
-          <p:cNvPicPr>
-            <a:picLocks noChangeAspect="1"/>
-          </p:cNvPicPr>
-          <p:nvPr/>
-        </p:nvPicPr>
-        <p:blipFill>
-          <a:blip r:embed="rId2"/>
-          <a:stretch>
-            <a:fillRect/>
-          </a:stretch>
-        </p:blipFill>
-        <p:spPr>
-          <a:xfrm>
-            <a:off x="274320" y="1280160"/>
-            <a:ext cx="5943600" cy="3200400"/>
-          </a:xfrm>
-          <a:prstGeom prst="rect">
-            <a:avLst/>
-          </a:prstGeom>
-        </p:spPr>
-      </p:pic>
-      <p:sp>
-        <p:nvSpPr>
-          <p:cNvPr id="5" name="TextBox 4"/>
-          <p:cNvSpPr txBox="1"/>
-          <p:nvPr/>
-        </p:nvSpPr>
-        <p:spPr>
-          <a:xfrm>
-            <a:off x="6583680" y="1280160"/>
-            <a:ext cx="5029200" cy="274320"/>
-          </a:xfrm>
-          <a:prstGeom prst="rect">
-            <a:avLst/>
-          </a:prstGeom>
-          <a:noFill/>
-        </p:spPr>
-        <p:txBody>
-          <a:bodyPr wrap="square">
-            <a:spAutoFit/>
-          </a:bodyPr>
-          <a:lstStyle/>
-          <a:p>
-            <a:pPr algn="l">
-              <a:defRPr sz="1600" b="1">
-                <a:solidFill>
-                  <a:srgbClr val="0096D6"/>
-                </a:solidFill>
-                <a:latin typeface="Calibri"/>
-              </a:defRPr>
-            </a:pPr>
-            <a:r>
-              <a:t>Hypothesis Evaluation</a:t>
-            </a:r>
-          </a:p>
-        </p:txBody>
-      </p:sp>
-      <p:sp>
-        <p:nvSpPr>
-          <p:cNvPr id="6" name="Rounded Rectangle 5"/>
+      <p:sp>
+        <p:nvSpPr>
+          <p:cNvPr id="4" name="Rounded Rectangle 3"/>
           <p:cNvSpPr/>
           <p:nvPr/>
         </p:nvSpPr>
         <p:spPr>
           <a:xfrm>
-            <a:off x="6583680" y="1691640"/>
-            <a:ext cx="640080" cy="731520"/>
-          </a:xfrm>
-          <a:prstGeom prst="roundRect">
-            <a:avLst/>
-          </a:prstGeom>
-          <a:solidFill>
-            <a:srgbClr val="F39C12"/>
-          </a:solidFill>
-          <a:ln>
-            <a:noFill/>
-          </a:ln>
-        </p:spPr>
-        <p:style>
-          <a:lnRef idx="1">
-            <a:schemeClr val="accent1"/>
-          </a:lnRef>
-          <a:fillRef idx="3">
-            <a:schemeClr val="accent1"/>
-          </a:fillRef>
-          <a:effectRef idx="2">
-            <a:schemeClr val="accent1"/>
-          </a:effectRef>
-          <a:fontRef idx="minor">
-            <a:schemeClr val="lt1"/>
-          </a:fontRef>
-        </p:style>
-        <p:txBody>
-          <a:bodyPr rtlCol="0" anchor="ctr" wrap="square" lIns="50800" rIns="50800" tIns="25400" bIns="25400"/>
-          <a:lstStyle/>
-          <a:p>
-            <a:pPr algn="ctr">
-              <a:defRPr sz="1400" b="1">
-                <a:solidFill>
-                  <a:srgbClr val="FFFFFF"/>
-                </a:solidFill>
-                <a:latin typeface="Calibri"/>
-              </a:defRPr>
-            </a:pPr>
-            <a:r>
-              <a:t>L1</a:t>
-            </a:r>
-          </a:p>
-        </p:txBody>
-      </p:sp>
-      <p:sp>
-        <p:nvSpPr>
-          <p:cNvPr id="7" name="Rounded Rectangle 6"/>
-          <p:cNvSpPr/>
-          <p:nvPr/>
-        </p:nvSpPr>
-        <p:spPr>
-          <a:xfrm>
-            <a:off x="7406640" y="1691640"/>
-            <a:ext cx="4206240" cy="731520"/>
+            <a:off x="457200" y="1280160"/>
+            <a:ext cx="5486400" cy="4023360"/>
           </a:xfrm>
           <a:prstGeom prst="roundRect">
             <a:avLst/>
@@ -4753,14 +4491,14 @@
       </p:sp>
       <p:sp>
         <p:nvSpPr>
-          <p:cNvPr id="8" name="TextBox 7"/>
+          <p:cNvPr id="5" name="TextBox 4"/>
           <p:cNvSpPr txBox="1"/>
           <p:nvPr/>
         </p:nvSpPr>
         <p:spPr>
           <a:xfrm>
-            <a:off x="7543800" y="1709928"/>
-            <a:ext cx="3017520" cy="228600"/>
+            <a:off x="640080" y="1325880"/>
+            <a:ext cx="5120640" cy="274320"/>
           </a:xfrm>
           <a:prstGeom prst="rect">
             <a:avLst/>
@@ -4774,7 +4512,7 @@
           <a:lstStyle/>
           <a:p>
             <a:pPr algn="l">
-              <a:defRPr sz="1200" b="1">
+              <a:defRPr sz="1400" b="1">
                 <a:solidFill>
                   <a:srgbClr val="F39C12"/>
                 </a:solidFill>
@@ -4782,21 +4520,21 @@
               </a:defRPr>
             </a:pPr>
             <a:r>
-              <a:t>Colocate = worst resilience</a:t>
-            </a:r>
-          </a:p>
-        </p:txBody>
-      </p:sp>
-      <p:sp>
-        <p:nvSpPr>
-          <p:cNvPr id="9" name="TextBox 8"/>
+              <a:t>H4 — the mechanism replicates; the user layer does not</a:t>
+            </a:r>
+          </a:p>
+        </p:txBody>
+      </p:sp>
+      <p:sp>
+        <p:nvSpPr>
+          <p:cNvPr id="6" name="TextBox 5"/>
           <p:cNvSpPr txBox="1"/>
           <p:nvPr/>
         </p:nvSpPr>
         <p:spPr>
           <a:xfrm>
-            <a:off x="7543800" y="1965960"/>
-            <a:ext cx="3017520" cy="411480"/>
+            <a:off x="640080" y="1691640"/>
+            <a:ext cx="5120640" cy="3474720"/>
           </a:xfrm>
           <a:prstGeom prst="rect">
             <a:avLst/>
@@ -4809,8 +4547,14 @@
           </a:bodyPr>
           <a:lstStyle/>
           <a:p>
-            <a:pPr algn="l">
-              <a:defRPr sz="1000" b="0">
+            <a:pPr>
+              <a:spcBef>
+                <a:spcPts val="200"/>
+              </a:spcBef>
+              <a:spcAft>
+                <a:spcPts val="200"/>
+              </a:spcAft>
+              <a:defRPr sz="1000">
                 <a:solidFill>
                   <a:srgbClr val="BDBDBD"/>
                 </a:solidFill>
@@ -4818,38 +4562,140 @@
               </a:defRPr>
             </a:pPr>
             <a:r>
-              <a:t>Score can't adjudicate (colocate 49.7–83</a:t>
+              <a:t>• 200-user Locust spike: the app is genuinely</a:t>
             </a:r>
             <a:br/>
             <a:r>
-              <a:t>across runs). Mechanism: colocate throttles</a:t>
+              <a:t>  resource-bound (hog faults never get there)</a:t>
+            </a:r>
+          </a:p>
+          <a:p>
+            <a:pPr>
+              <a:spcBef>
+                <a:spcPts val="200"/>
+              </a:spcBef>
+              <a:spcAft>
+                <a:spcPts val="200"/>
+              </a:spcAft>
+              <a:defRPr sz="1000">
+                <a:solidFill>
+                  <a:srgbClr val="BDBDBD"/>
+                </a:solidFill>
+                <a:latin typeface="Calibri"/>
+              </a:defRPr>
+            </a:pPr>
+            <a:r>
+              <a:t>• East-west inter-service p95: colocate ~1.3–1.4×</a:t>
             </a:r>
             <a:br/>
             <a:r>
-              <a:t>LEAST and flushes no conn-state — not worst.</a:t>
-            </a:r>
-          </a:p>
-        </p:txBody>
-      </p:sp>
-      <p:sp>
-        <p:nvSpPr>
-          <p:cNvPr id="10" name="Rounded Rectangle 9"/>
+              <a:t>  lower than spread, in both i = 4 batches</a:t>
+            </a:r>
+            <a:br/>
+            <a:r>
+              <a:t>  (median ratio 1.39× and 1.36×)</a:t>
+            </a:r>
+          </a:p>
+          <a:p>
+            <a:pPr>
+              <a:spcBef>
+                <a:spcPts val="200"/>
+              </a:spcBef>
+              <a:spcAft>
+                <a:spcPts val="200"/>
+              </a:spcAft>
+              <a:defRPr sz="1000">
+                <a:solidFill>
+                  <a:srgbClr val="BDBDBD"/>
+                </a:solidFill>
+                <a:latin typeface="Calibri"/>
+              </a:defRPr>
+            </a:pPr>
+            <a:r>
+              <a:t>• Co-location keeps inter-service calls node-local;</a:t>
+            </a:r>
+            <a:br/>
+            <a:r>
+              <a:t>  spread routes every call across the network —</a:t>
+            </a:r>
+            <a:br/>
+            <a:r>
+              <a:t>  the bottleneck under load</a:t>
+            </a:r>
+          </a:p>
+          <a:p>
+            <a:pPr>
+              <a:spcBef>
+                <a:spcPts val="200"/>
+              </a:spcBef>
+              <a:spcAft>
+                <a:spcPts val="200"/>
+              </a:spcAft>
+              <a:defRPr sz="1000">
+                <a:solidFill>
+                  <a:srgbClr val="BDBDBD"/>
+                </a:solidFill>
+                <a:latin typeface="Calibri"/>
+              </a:defRPr>
+            </a:pPr>
+            <a:r>
+              <a:t>• User-facing routes: a ~2× reading in batch A</a:t>
+            </a:r>
+            <a:br/>
+            <a:r>
+              <a:t>  collapsed to ~1.1× in the clean batch, with no</a:t>
+            </a:r>
+            <a:br/>
+            <a:r>
+              <a:t>  dependency specificity</a:t>
+            </a:r>
+          </a:p>
+          <a:p>
+            <a:pPr>
+              <a:spcBef>
+                <a:spcPts val="200"/>
+              </a:spcBef>
+              <a:spcAft>
+                <a:spcPts val="200"/>
+              </a:spcAft>
+              <a:defRPr sz="1000">
+                <a:solidFill>
+                  <a:srgbClr val="BDBDBD"/>
+                </a:solidFill>
+                <a:latin typeface="Calibri"/>
+              </a:defRPr>
+            </a:pPr>
+            <a:r>
+              <a:t>• So: no user-visible placement effect is claimed</a:t>
+            </a:r>
+            <a:br/>
+            <a:r>
+              <a:t>  under load — the mechanism effect is the finding</a:t>
+            </a:r>
+          </a:p>
+        </p:txBody>
+      </p:sp>
+      <p:sp>
+        <p:nvSpPr>
+          <p:cNvPr id="7" name="Rounded Rectangle 6"/>
           <p:cNvSpPr/>
           <p:nvPr/>
         </p:nvSpPr>
         <p:spPr>
           <a:xfrm>
-            <a:off x="10515600" y="1874520"/>
-            <a:ext cx="1005840" cy="320040"/>
+            <a:off x="6217920" y="1280160"/>
+            <a:ext cx="5486400" cy="4023360"/>
           </a:xfrm>
           <a:prstGeom prst="roundRect">
             <a:avLst/>
           </a:prstGeom>
           <a:solidFill>
-            <a:srgbClr val="F39C12"/>
+            <a:srgbClr val="121222"/>
           </a:solidFill>
-          <a:ln>
-            <a:noFill/>
+          <a:ln w="25400">
+            <a:solidFill>
+              <a:srgbClr val="2ECC71"/>
+            </a:solidFill>
           </a:ln>
         </p:spPr>
         <p:style>
@@ -4867,19 +4713,638 @@
           </a:fontRef>
         </p:style>
         <p:txBody>
-          <a:bodyPr rtlCol="0" anchor="ctr" wrap="square" lIns="50800" rIns="50800" tIns="25400" bIns="25400"/>
-          <a:lstStyle/>
-          <a:p>
-            <a:pPr algn="ctr">
-              <a:defRPr sz="1000" b="1">
-                <a:solidFill>
-                  <a:srgbClr val="FFFFFF"/>
-                </a:solidFill>
-                <a:latin typeface="Calibri"/>
-              </a:defRPr>
-            </a:pPr>
-            <a:r>
-              <a:t>Mech.</a:t>
+          <a:bodyPr rtlCol="0" anchor="ctr"/>
+          <a:lstStyle/>
+          <a:p>
+            <a:pPr algn="ctr"/>
+          </a:p>
+        </p:txBody>
+      </p:sp>
+      <p:sp>
+        <p:nvSpPr>
+          <p:cNvPr id="8" name="TextBox 7"/>
+          <p:cNvSpPr txBox="1"/>
+          <p:nvPr/>
+        </p:nvSpPr>
+        <p:spPr>
+          <a:xfrm>
+            <a:off x="6400800" y="1325880"/>
+            <a:ext cx="5120640" cy="274320"/>
+          </a:xfrm>
+          <a:prstGeom prst="rect">
+            <a:avLst/>
+          </a:prstGeom>
+          <a:noFill/>
+        </p:spPr>
+        <p:txBody>
+          <a:bodyPr wrap="square">
+            <a:spAutoFit/>
+          </a:bodyPr>
+          <a:lstStyle/>
+          <a:p>
+            <a:pPr algn="l">
+              <a:defRPr sz="1400" b="1">
+                <a:solidFill>
+                  <a:srgbClr val="2ECC71"/>
+                </a:solidFill>
+                <a:latin typeface="Calibri"/>
+              </a:defRPr>
+            </a:pPr>
+            <a:r>
+              <a:t>H5 — cross-node call fraction predicts the east-west tail</a:t>
+            </a:r>
+          </a:p>
+        </p:txBody>
+      </p:sp>
+      <p:graphicFrame>
+        <p:nvGraphicFramePr>
+          <p:cNvPr id="9" name="Table 8"/>
+          <p:cNvGraphicFramePr>
+            <a:graphicFrameLocks noGrp="1"/>
+          </p:cNvGraphicFramePr>
+          <p:nvPr/>
+        </p:nvGraphicFramePr>
+        <p:xfrm>
+          <a:off x="6400800" y="1691640"/>
+          <a:ext cx="5120640" cy="2285997"/>
+        </p:xfrm>
+        <a:graphic>
+          <a:graphicData uri="http://schemas.openxmlformats.org/drawingml/2006/table">
+            <a:tbl>
+              <a:tblPr firstRow="1" bandRow="1">
+                <a:tableStyleId>{5C22544A-7EE6-4342-B048-85BDC9FD1C3A}</a:tableStyleId>
+              </a:tblPr>
+              <a:tblGrid>
+                <a:gridCol w="1706880"/>
+                <a:gridCol w="1706880"/>
+                <a:gridCol w="1706880"/>
+              </a:tblGrid>
+              <a:tr h="326571">
+                <a:tc>
+                  <a:txBody>
+                    <a:bodyPr wrap="square"/>
+                    <a:lstStyle/>
+                    <a:p>
+                      <a:pPr algn="l"/>
+                      <a:r>
+                        <a:rPr sz="900" b="1">
+                          <a:solidFill>
+                            <a:srgbClr val="FFFFFF"/>
+                          </a:solidFill>
+                          <a:latin typeface="Calibri"/>
+                        </a:rPr>
+                        <a:t>Strategy</a:t>
+                      </a:r>
+                    </a:p>
+                  </a:txBody>
+                  <a:tcPr marL="76200" marR="76200" marT="38100" marB="38100">
+                    <a:solidFill>
+                      <a:srgbClr val="2ECC71"/>
+                    </a:solidFill>
+                  </a:tcPr>
+                </a:tc>
+                <a:tc>
+                  <a:txBody>
+                    <a:bodyPr wrap="square"/>
+                    <a:lstStyle/>
+                    <a:p>
+                      <a:pPr algn="l"/>
+                      <a:r>
+                        <a:rPr sz="900" b="1">
+                          <a:solidFill>
+                            <a:srgbClr val="FFFFFF"/>
+                          </a:solidFill>
+                          <a:latin typeface="Calibri"/>
+                        </a:rPr>
+                        <a:t>Cross-node fraction</a:t>
+                      </a:r>
+                    </a:p>
+                  </a:txBody>
+                  <a:tcPr marL="76200" marR="76200" marT="38100" marB="38100">
+                    <a:solidFill>
+                      <a:srgbClr val="2ECC71"/>
+                    </a:solidFill>
+                  </a:tcPr>
+                </a:tc>
+                <a:tc>
+                  <a:txBody>
+                    <a:bodyPr wrap="square"/>
+                    <a:lstStyle/>
+                    <a:p>
+                      <a:pPr algn="l"/>
+                      <a:r>
+                        <a:rPr sz="900" b="1">
+                          <a:solidFill>
+                            <a:srgbClr val="FFFFFF"/>
+                          </a:solidFill>
+                          <a:latin typeface="Calibri"/>
+                        </a:rPr>
+                        <a:t>East-west p95 (ms)</a:t>
+                      </a:r>
+                    </a:p>
+                  </a:txBody>
+                  <a:tcPr marL="76200" marR="76200" marT="38100" marB="38100">
+                    <a:solidFill>
+                      <a:srgbClr val="2ECC71"/>
+                    </a:solidFill>
+                  </a:tcPr>
+                </a:tc>
+              </a:tr>
+              <a:tr h="326571">
+                <a:tc>
+                  <a:txBody>
+                    <a:bodyPr wrap="square"/>
+                    <a:lstStyle/>
+                    <a:p>
+                      <a:pPr algn="l"/>
+                      <a:r>
+                        <a:rPr sz="900" b="0">
+                          <a:solidFill>
+                            <a:srgbClr val="FFFFFF"/>
+                          </a:solidFill>
+                          <a:latin typeface="Calibri"/>
+                        </a:rPr>
+                        <a:t>colocate</a:t>
+                      </a:r>
+                    </a:p>
+                  </a:txBody>
+                  <a:tcPr marL="76200" marR="76200" marT="38100" marB="38100">
+                    <a:solidFill>
+                      <a:srgbClr val="2A2A3E"/>
+                    </a:solidFill>
+                  </a:tcPr>
+                </a:tc>
+                <a:tc>
+                  <a:txBody>
+                    <a:bodyPr wrap="square"/>
+                    <a:lstStyle/>
+                    <a:p>
+                      <a:pPr algn="l"/>
+                      <a:r>
+                        <a:rPr sz="900" b="0">
+                          <a:solidFill>
+                            <a:srgbClr val="FFFFFF"/>
+                          </a:solidFill>
+                          <a:latin typeface="Calibri"/>
+                        </a:rPr>
+                        <a:t>0.00</a:t>
+                      </a:r>
+                    </a:p>
+                  </a:txBody>
+                  <a:tcPr marL="76200" marR="76200" marT="38100" marB="38100">
+                    <a:solidFill>
+                      <a:srgbClr val="2A2A3E"/>
+                    </a:solidFill>
+                  </a:tcPr>
+                </a:tc>
+                <a:tc>
+                  <a:txBody>
+                    <a:bodyPr wrap="square"/>
+                    <a:lstStyle/>
+                    <a:p>
+                      <a:pPr algn="l"/>
+                      <a:r>
+                        <a:rPr sz="900" b="0">
+                          <a:solidFill>
+                            <a:srgbClr val="FFFFFF"/>
+                          </a:solidFill>
+                          <a:latin typeface="Calibri"/>
+                        </a:rPr>
+                        <a:t>33.9</a:t>
+                      </a:r>
+                    </a:p>
+                  </a:txBody>
+                  <a:tcPr marL="76200" marR="76200" marT="38100" marB="38100">
+                    <a:solidFill>
+                      <a:srgbClr val="2A2A3E"/>
+                    </a:solidFill>
+                  </a:tcPr>
+                </a:tc>
+              </a:tr>
+              <a:tr h="326571">
+                <a:tc>
+                  <a:txBody>
+                    <a:bodyPr wrap="square"/>
+                    <a:lstStyle/>
+                    <a:p>
+                      <a:pPr algn="l"/>
+                      <a:r>
+                        <a:rPr sz="900" b="0">
+                          <a:solidFill>
+                            <a:srgbClr val="FFFFFF"/>
+                          </a:solidFill>
+                          <a:latin typeface="Calibri"/>
+                        </a:rPr>
+                        <a:t>best-fit</a:t>
+                      </a:r>
+                    </a:p>
+                  </a:txBody>
+                  <a:tcPr marL="76200" marR="76200" marT="38100" marB="38100">
+                    <a:solidFill>
+                      <a:srgbClr val="2A2A3E"/>
+                    </a:solidFill>
+                  </a:tcPr>
+                </a:tc>
+                <a:tc>
+                  <a:txBody>
+                    <a:bodyPr wrap="square"/>
+                    <a:lstStyle/>
+                    <a:p>
+                      <a:pPr algn="l"/>
+                      <a:r>
+                        <a:rPr sz="900" b="0">
+                          <a:solidFill>
+                            <a:srgbClr val="FFFFFF"/>
+                          </a:solidFill>
+                          <a:latin typeface="Calibri"/>
+                        </a:rPr>
+                        <a:t>0.13</a:t>
+                      </a:r>
+                    </a:p>
+                  </a:txBody>
+                  <a:tcPr marL="76200" marR="76200" marT="38100" marB="38100">
+                    <a:solidFill>
+                      <a:srgbClr val="2A2A3E"/>
+                    </a:solidFill>
+                  </a:tcPr>
+                </a:tc>
+                <a:tc>
+                  <a:txBody>
+                    <a:bodyPr wrap="square"/>
+                    <a:lstStyle/>
+                    <a:p>
+                      <a:pPr algn="l"/>
+                      <a:r>
+                        <a:rPr sz="900" b="0">
+                          <a:solidFill>
+                            <a:srgbClr val="FFFFFF"/>
+                          </a:solidFill>
+                          <a:latin typeface="Calibri"/>
+                        </a:rPr>
+                        <a:t>35.3</a:t>
+                      </a:r>
+                    </a:p>
+                  </a:txBody>
+                  <a:tcPr marL="76200" marR="76200" marT="38100" marB="38100">
+                    <a:solidFill>
+                      <a:srgbClr val="2A2A3E"/>
+                    </a:solidFill>
+                  </a:tcPr>
+                </a:tc>
+              </a:tr>
+              <a:tr h="326571">
+                <a:tc>
+                  <a:txBody>
+                    <a:bodyPr wrap="square"/>
+                    <a:lstStyle/>
+                    <a:p>
+                      <a:pPr algn="l"/>
+                      <a:r>
+                        <a:rPr sz="900" b="0">
+                          <a:solidFill>
+                            <a:srgbClr val="FFFFFF"/>
+                          </a:solidFill>
+                          <a:latin typeface="Calibri"/>
+                        </a:rPr>
+                        <a:t>dependency-aware</a:t>
+                      </a:r>
+                    </a:p>
+                  </a:txBody>
+                  <a:tcPr marL="76200" marR="76200" marT="38100" marB="38100">
+                    <a:solidFill>
+                      <a:srgbClr val="2A2A3E"/>
+                    </a:solidFill>
+                  </a:tcPr>
+                </a:tc>
+                <a:tc>
+                  <a:txBody>
+                    <a:bodyPr wrap="square"/>
+                    <a:lstStyle/>
+                    <a:p>
+                      <a:pPr algn="l"/>
+                      <a:r>
+                        <a:rPr sz="900" b="0">
+                          <a:solidFill>
+                            <a:srgbClr val="FFFFFF"/>
+                          </a:solidFill>
+                          <a:latin typeface="Calibri"/>
+                        </a:rPr>
+                        <a:t>0.73</a:t>
+                      </a:r>
+                    </a:p>
+                  </a:txBody>
+                  <a:tcPr marL="76200" marR="76200" marT="38100" marB="38100">
+                    <a:solidFill>
+                      <a:srgbClr val="2A2A3E"/>
+                    </a:solidFill>
+                  </a:tcPr>
+                </a:tc>
+                <a:tc>
+                  <a:txBody>
+                    <a:bodyPr wrap="square"/>
+                    <a:lstStyle/>
+                    <a:p>
+                      <a:pPr algn="l"/>
+                      <a:r>
+                        <a:rPr sz="900" b="0">
+                          <a:solidFill>
+                            <a:srgbClr val="FFFFFF"/>
+                          </a:solidFill>
+                          <a:latin typeface="Calibri"/>
+                        </a:rPr>
+                        <a:t>42.6</a:t>
+                      </a:r>
+                    </a:p>
+                  </a:txBody>
+                  <a:tcPr marL="76200" marR="76200" marT="38100" marB="38100">
+                    <a:solidFill>
+                      <a:srgbClr val="2A2A3E"/>
+                    </a:solidFill>
+                  </a:tcPr>
+                </a:tc>
+              </a:tr>
+              <a:tr h="326571">
+                <a:tc>
+                  <a:txBody>
+                    <a:bodyPr wrap="square"/>
+                    <a:lstStyle/>
+                    <a:p>
+                      <a:pPr algn="l"/>
+                      <a:r>
+                        <a:rPr sz="900" b="0">
+                          <a:solidFill>
+                            <a:srgbClr val="FFFFFF"/>
+                          </a:solidFill>
+                          <a:latin typeface="Calibri"/>
+                        </a:rPr>
+                        <a:t>spread</a:t>
+                      </a:r>
+                    </a:p>
+                  </a:txBody>
+                  <a:tcPr marL="76200" marR="76200" marT="38100" marB="38100">
+                    <a:solidFill>
+                      <a:srgbClr val="2A2A3E"/>
+                    </a:solidFill>
+                  </a:tcPr>
+                </a:tc>
+                <a:tc>
+                  <a:txBody>
+                    <a:bodyPr wrap="square"/>
+                    <a:lstStyle/>
+                    <a:p>
+                      <a:pPr algn="l"/>
+                      <a:r>
+                        <a:rPr sz="900" b="0">
+                          <a:solidFill>
+                            <a:srgbClr val="FFFFFF"/>
+                          </a:solidFill>
+                          <a:latin typeface="Calibri"/>
+                        </a:rPr>
+                        <a:t>0.73</a:t>
+                      </a:r>
+                    </a:p>
+                  </a:txBody>
+                  <a:tcPr marL="76200" marR="76200" marT="38100" marB="38100">
+                    <a:solidFill>
+                      <a:srgbClr val="2A2A3E"/>
+                    </a:solidFill>
+                  </a:tcPr>
+                </a:tc>
+                <a:tc>
+                  <a:txBody>
+                    <a:bodyPr wrap="square"/>
+                    <a:lstStyle/>
+                    <a:p>
+                      <a:pPr algn="l"/>
+                      <a:r>
+                        <a:rPr sz="900" b="0">
+                          <a:solidFill>
+                            <a:srgbClr val="FFFFFF"/>
+                          </a:solidFill>
+                          <a:latin typeface="Calibri"/>
+                        </a:rPr>
+                        <a:t>43.5</a:t>
+                      </a:r>
+                    </a:p>
+                  </a:txBody>
+                  <a:tcPr marL="76200" marR="76200" marT="38100" marB="38100">
+                    <a:solidFill>
+                      <a:srgbClr val="2A2A3E"/>
+                    </a:solidFill>
+                  </a:tcPr>
+                </a:tc>
+              </a:tr>
+              <a:tr h="326571">
+                <a:tc>
+                  <a:txBody>
+                    <a:bodyPr wrap="square"/>
+                    <a:lstStyle/>
+                    <a:p>
+                      <a:pPr algn="l"/>
+                      <a:r>
+                        <a:rPr sz="900" b="0">
+                          <a:solidFill>
+                            <a:srgbClr val="FFFFFF"/>
+                          </a:solidFill>
+                          <a:latin typeface="Calibri"/>
+                        </a:rPr>
+                        <a:t>random</a:t>
+                      </a:r>
+                    </a:p>
+                  </a:txBody>
+                  <a:tcPr marL="76200" marR="76200" marT="38100" marB="38100">
+                    <a:solidFill>
+                      <a:srgbClr val="2A2A3E"/>
+                    </a:solidFill>
+                  </a:tcPr>
+                </a:tc>
+                <a:tc>
+                  <a:txBody>
+                    <a:bodyPr wrap="square"/>
+                    <a:lstStyle/>
+                    <a:p>
+                      <a:pPr algn="l"/>
+                      <a:r>
+                        <a:rPr sz="900" b="0">
+                          <a:solidFill>
+                            <a:srgbClr val="FFFFFF"/>
+                          </a:solidFill>
+                          <a:latin typeface="Calibri"/>
+                        </a:rPr>
+                        <a:t>0.80</a:t>
+                      </a:r>
+                    </a:p>
+                  </a:txBody>
+                  <a:tcPr marL="76200" marR="76200" marT="38100" marB="38100">
+                    <a:solidFill>
+                      <a:srgbClr val="2A2A3E"/>
+                    </a:solidFill>
+                  </a:tcPr>
+                </a:tc>
+                <a:tc>
+                  <a:txBody>
+                    <a:bodyPr wrap="square"/>
+                    <a:lstStyle/>
+                    <a:p>
+                      <a:pPr algn="l"/>
+                      <a:r>
+                        <a:rPr sz="900" b="0">
+                          <a:solidFill>
+                            <a:srgbClr val="FFFFFF"/>
+                          </a:solidFill>
+                          <a:latin typeface="Calibri"/>
+                        </a:rPr>
+                        <a:t>43.9</a:t>
+                      </a:r>
+                    </a:p>
+                  </a:txBody>
+                  <a:tcPr marL="76200" marR="76200" marT="38100" marB="38100">
+                    <a:solidFill>
+                      <a:srgbClr val="2A2A3E"/>
+                    </a:solidFill>
+                  </a:tcPr>
+                </a:tc>
+              </a:tr>
+              <a:tr h="326571">
+                <a:tc>
+                  <a:txBody>
+                    <a:bodyPr wrap="square"/>
+                    <a:lstStyle/>
+                    <a:p>
+                      <a:pPr algn="l"/>
+                      <a:r>
+                        <a:rPr sz="900" b="0">
+                          <a:solidFill>
+                            <a:srgbClr val="FFFFFF"/>
+                          </a:solidFill>
+                          <a:latin typeface="Calibri"/>
+                        </a:rPr>
+                        <a:t>default</a:t>
+                      </a:r>
+                    </a:p>
+                  </a:txBody>
+                  <a:tcPr marL="76200" marR="76200" marT="38100" marB="38100">
+                    <a:solidFill>
+                      <a:srgbClr val="2A2A3E"/>
+                    </a:solidFill>
+                  </a:tcPr>
+                </a:tc>
+                <a:tc>
+                  <a:txBody>
+                    <a:bodyPr wrap="square"/>
+                    <a:lstStyle/>
+                    <a:p>
+                      <a:pPr algn="l"/>
+                      <a:r>
+                        <a:rPr sz="900" b="0">
+                          <a:solidFill>
+                            <a:srgbClr val="FFFFFF"/>
+                          </a:solidFill>
+                          <a:latin typeface="Calibri"/>
+                        </a:rPr>
+                        <a:t>0.78</a:t>
+                      </a:r>
+                    </a:p>
+                  </a:txBody>
+                  <a:tcPr marL="76200" marR="76200" marT="38100" marB="38100">
+                    <a:solidFill>
+                      <a:srgbClr val="2A2A3E"/>
+                    </a:solidFill>
+                  </a:tcPr>
+                </a:tc>
+                <a:tc>
+                  <a:txBody>
+                    <a:bodyPr wrap="square"/>
+                    <a:lstStyle/>
+                    <a:p>
+                      <a:pPr algn="l"/>
+                      <a:r>
+                        <a:rPr sz="900" b="0">
+                          <a:solidFill>
+                            <a:srgbClr val="FFFFFF"/>
+                          </a:solidFill>
+                          <a:latin typeface="Calibri"/>
+                        </a:rPr>
+                        <a:t>45.5</a:t>
+                      </a:r>
+                    </a:p>
+                  </a:txBody>
+                  <a:tcPr marL="76200" marR="76200" marT="38100" marB="38100">
+                    <a:solidFill>
+                      <a:srgbClr val="2A2A3E"/>
+                    </a:solidFill>
+                  </a:tcPr>
+                </a:tc>
+              </a:tr>
+            </a:tbl>
+          </a:graphicData>
+        </a:graphic>
+      </p:graphicFrame>
+      <p:sp>
+        <p:nvSpPr>
+          <p:cNvPr id="10" name="TextBox 9"/>
+          <p:cNvSpPr txBox="1"/>
+          <p:nvPr/>
+        </p:nvSpPr>
+        <p:spPr>
+          <a:xfrm>
+            <a:off x="6400800" y="4069080"/>
+            <a:ext cx="5120640" cy="1188720"/>
+          </a:xfrm>
+          <a:prstGeom prst="rect">
+            <a:avLst/>
+          </a:prstGeom>
+          <a:noFill/>
+        </p:spPr>
+        <p:txBody>
+          <a:bodyPr wrap="square">
+            <a:spAutoFit/>
+          </a:bodyPr>
+          <a:lstStyle/>
+          <a:p>
+            <a:pPr>
+              <a:spcBef>
+                <a:spcPts val="200"/>
+              </a:spcBef>
+              <a:spcAft>
+                <a:spcPts val="200"/>
+              </a:spcAft>
+              <a:defRPr sz="1000">
+                <a:solidFill>
+                  <a:srgbClr val="BDBDBD"/>
+                </a:solidFill>
+                <a:latin typeface="Calibri"/>
+              </a:defRPr>
+            </a:pPr>
+            <a:r>
+              <a:t>• Spearman ρ = 0.79 (n = 8 strategies, p &lt; 0.05)</a:t>
+            </a:r>
+          </a:p>
+          <a:p>
+            <a:pPr>
+              <a:spcBef>
+                <a:spcPts val="200"/>
+              </a:spcBef>
+              <a:spcAft>
+                <a:spcPts val="200"/>
+              </a:spcAft>
+              <a:defRPr sz="1000">
+                <a:solidFill>
+                  <a:srgbClr val="BDBDBD"/>
+                </a:solidFill>
+                <a:latin typeface="Calibri"/>
+              </a:defRPr>
+            </a:pPr>
+            <a:r>
+              <a:t>• Computable from the dependency graph + placement</a:t>
+            </a:r>
+            <a:br/>
+            <a:r>
+              <a:t>  before any chaos — the Neo4j graph becomes</a:t>
+            </a:r>
+            <a:br/>
+            <a:r>
+              <a:t>  analytically load-bearing, not mere storage</a:t>
             </a:r>
           </a:p>
         </p:txBody>
@@ -4892,17 +5357,19 @@
         </p:nvSpPr>
         <p:spPr>
           <a:xfrm>
-            <a:off x="6583680" y="2697480"/>
-            <a:ext cx="640080" cy="731520"/>
+            <a:off x="457200" y="5486400"/>
+            <a:ext cx="11247120" cy="1097280"/>
           </a:xfrm>
           <a:prstGeom prst="roundRect">
             <a:avLst/>
           </a:prstGeom>
           <a:solidFill>
-            <a:srgbClr val="F39C12"/>
+            <a:srgbClr val="121222"/>
           </a:solidFill>
-          <a:ln>
-            <a:noFill/>
+          <a:ln w="25400">
+            <a:solidFill>
+              <a:srgbClr val="0096D6"/>
+            </a:solidFill>
           </a:ln>
         </p:spPr>
         <p:style>
@@ -4920,61 +5387,6 @@
           </a:fontRef>
         </p:style>
         <p:txBody>
-          <a:bodyPr rtlCol="0" anchor="ctr" wrap="square" lIns="50800" rIns="50800" tIns="25400" bIns="25400"/>
-          <a:lstStyle/>
-          <a:p>
-            <a:pPr algn="ctr">
-              <a:defRPr sz="1400" b="1">
-                <a:solidFill>
-                  <a:srgbClr val="FFFFFF"/>
-                </a:solidFill>
-                <a:latin typeface="Calibri"/>
-              </a:defRPr>
-            </a:pPr>
-            <a:r>
-              <a:t>L2</a:t>
-            </a:r>
-          </a:p>
-        </p:txBody>
-      </p:sp>
-      <p:sp>
-        <p:nvSpPr>
-          <p:cNvPr id="12" name="Rounded Rectangle 11"/>
-          <p:cNvSpPr/>
-          <p:nvPr/>
-        </p:nvSpPr>
-        <p:spPr>
-          <a:xfrm>
-            <a:off x="7406640" y="2697480"/>
-            <a:ext cx="4206240" cy="731520"/>
-          </a:xfrm>
-          <a:prstGeom prst="roundRect">
-            <a:avLst/>
-          </a:prstGeom>
-          <a:solidFill>
-            <a:srgbClr val="121222"/>
-          </a:solidFill>
-          <a:ln w="25400">
-            <a:solidFill>
-              <a:srgbClr val="F39C12"/>
-            </a:solidFill>
-          </a:ln>
-        </p:spPr>
-        <p:style>
-          <a:lnRef idx="1">
-            <a:schemeClr val="accent1"/>
-          </a:lnRef>
-          <a:fillRef idx="3">
-            <a:schemeClr val="accent1"/>
-          </a:fillRef>
-          <a:effectRef idx="2">
-            <a:schemeClr val="accent1"/>
-          </a:effectRef>
-          <a:fontRef idx="minor">
-            <a:schemeClr val="lt1"/>
-          </a:fontRef>
-        </p:style>
-        <p:txBody>
           <a:bodyPr rtlCol="0" anchor="ctr"/>
           <a:lstStyle/>
           <a:p>
@@ -4984,14 +5396,14 @@
       </p:sp>
       <p:sp>
         <p:nvSpPr>
-          <p:cNvPr id="13" name="TextBox 12"/>
+          <p:cNvPr id="12" name="TextBox 11"/>
           <p:cNvSpPr txBox="1"/>
           <p:nvPr/>
         </p:nvSpPr>
         <p:spPr>
           <a:xfrm>
-            <a:off x="7543800" y="2715768"/>
-            <a:ext cx="3017520" cy="228600"/>
+            <a:off x="640080" y="5486400"/>
+            <a:ext cx="10881360" cy="274320"/>
           </a:xfrm>
           <a:prstGeom prst="rect">
             <a:avLst/>
@@ -5005,29 +5417,29 @@
           <a:lstStyle/>
           <a:p>
             <a:pPr algn="l">
-              <a:defRPr sz="1200" b="1">
-                <a:solidFill>
-                  <a:srgbClr val="F39C12"/>
-                </a:solidFill>
-                <a:latin typeface="Calibri"/>
-              </a:defRPr>
-            </a:pPr>
-            <a:r>
-              <a:t>Spread = best fault isolation</a:t>
-            </a:r>
-          </a:p>
-        </p:txBody>
-      </p:sp>
-      <p:sp>
-        <p:nvSpPr>
-          <p:cNvPr id="14" name="TextBox 13"/>
+              <a:defRPr sz="1300" b="1">
+                <a:solidFill>
+                  <a:srgbClr val="0096D6"/>
+                </a:solidFill>
+                <a:latin typeface="Calibri"/>
+              </a:defRPr>
+            </a:pPr>
+            <a:r>
+              <a:t>Framing: empirical validation of a static pre-chaos predictor — and a coarse one</a:t>
+            </a:r>
+          </a:p>
+        </p:txBody>
+      </p:sp>
+      <p:sp>
+        <p:nvSpPr>
+          <p:cNvPr id="13" name="TextBox 12"/>
           <p:cNvSpPr txBox="1"/>
           <p:nvPr/>
         </p:nvSpPr>
         <p:spPr>
           <a:xfrm>
-            <a:off x="7543800" y="2971800"/>
-            <a:ext cx="3017520" cy="411480"/>
+            <a:off x="640080" y="5806440"/>
+            <a:ext cx="10881360" cy="731520"/>
           </a:xfrm>
           <a:prstGeom prst="rect">
             <a:avLst/>
@@ -5049,686 +5461,7 @@
               </a:defRPr>
             </a:pPr>
             <a:r>
-              <a:t>Score can't adjudicate (spread 33–88.7).</a:t>
-            </a:r>
-            <a:br/>
-            <a:r>
-              <a:t>Mechanism: spread flushes 28–52% of conntrack</a:t>
-            </a:r>
-            <a:br/>
-            <a:r>
-              <a:t>under churn — it amplifies, not isolates.</a:t>
-            </a:r>
-          </a:p>
-        </p:txBody>
-      </p:sp>
-      <p:sp>
-        <p:nvSpPr>
-          <p:cNvPr id="15" name="Rounded Rectangle 14"/>
-          <p:cNvSpPr/>
-          <p:nvPr/>
-        </p:nvSpPr>
-        <p:spPr>
-          <a:xfrm>
-            <a:off x="10515600" y="2880360"/>
-            <a:ext cx="1005840" cy="320040"/>
-          </a:xfrm>
-          <a:prstGeom prst="roundRect">
-            <a:avLst/>
-          </a:prstGeom>
-          <a:solidFill>
-            <a:srgbClr val="F39C12"/>
-          </a:solidFill>
-          <a:ln>
-            <a:noFill/>
-          </a:ln>
-        </p:spPr>
-        <p:style>
-          <a:lnRef idx="1">
-            <a:schemeClr val="accent1"/>
-          </a:lnRef>
-          <a:fillRef idx="3">
-            <a:schemeClr val="accent1"/>
-          </a:fillRef>
-          <a:effectRef idx="2">
-            <a:schemeClr val="accent1"/>
-          </a:effectRef>
-          <a:fontRef idx="minor">
-            <a:schemeClr val="lt1"/>
-          </a:fontRef>
-        </p:style>
-        <p:txBody>
-          <a:bodyPr rtlCol="0" anchor="ctr" wrap="square" lIns="50800" rIns="50800" tIns="25400" bIns="25400"/>
-          <a:lstStyle/>
-          <a:p>
-            <a:pPr algn="ctr">
-              <a:defRPr sz="1000" b="1">
-                <a:solidFill>
-                  <a:srgbClr val="FFFFFF"/>
-                </a:solidFill>
-                <a:latin typeface="Calibri"/>
-              </a:defRPr>
-            </a:pPr>
-            <a:r>
-              <a:t>Mech.</a:t>
-            </a:r>
-          </a:p>
-        </p:txBody>
-      </p:sp>
-      <p:sp>
-        <p:nvSpPr>
-          <p:cNvPr id="16" name="Rounded Rectangle 15"/>
-          <p:cNvSpPr/>
-          <p:nvPr/>
-        </p:nvSpPr>
-        <p:spPr>
-          <a:xfrm>
-            <a:off x="6583680" y="3703320"/>
-            <a:ext cx="640080" cy="731520"/>
-          </a:xfrm>
-          <a:prstGeom prst="roundRect">
-            <a:avLst/>
-          </a:prstGeom>
-          <a:solidFill>
-            <a:srgbClr val="E74C3C"/>
-          </a:solidFill>
-          <a:ln>
-            <a:noFill/>
-          </a:ln>
-        </p:spPr>
-        <p:style>
-          <a:lnRef idx="1">
-            <a:schemeClr val="accent1"/>
-          </a:lnRef>
-          <a:fillRef idx="3">
-            <a:schemeClr val="accent1"/>
-          </a:fillRef>
-          <a:effectRef idx="2">
-            <a:schemeClr val="accent1"/>
-          </a:effectRef>
-          <a:fontRef idx="minor">
-            <a:schemeClr val="lt1"/>
-          </a:fontRef>
-        </p:style>
-        <p:txBody>
-          <a:bodyPr rtlCol="0" anchor="ctr" wrap="square" lIns="50800" rIns="50800" tIns="25400" bIns="25400"/>
-          <a:lstStyle/>
-          <a:p>
-            <a:pPr algn="ctr">
-              <a:defRPr sz="1400" b="1">
-                <a:solidFill>
-                  <a:srgbClr val="FFFFFF"/>
-                </a:solidFill>
-                <a:latin typeface="Calibri"/>
-              </a:defRPr>
-            </a:pPr>
-            <a:r>
-              <a:t>L3</a:t>
-            </a:r>
-          </a:p>
-        </p:txBody>
-      </p:sp>
-      <p:sp>
-        <p:nvSpPr>
-          <p:cNvPr id="17" name="Rounded Rectangle 16"/>
-          <p:cNvSpPr/>
-          <p:nvPr/>
-        </p:nvSpPr>
-        <p:spPr>
-          <a:xfrm>
-            <a:off x="7406640" y="3703320"/>
-            <a:ext cx="4206240" cy="731520"/>
-          </a:xfrm>
-          <a:prstGeom prst="roundRect">
-            <a:avLst/>
-          </a:prstGeom>
-          <a:solidFill>
-            <a:srgbClr val="121222"/>
-          </a:solidFill>
-          <a:ln w="25400">
-            <a:solidFill>
-              <a:srgbClr val="E74C3C"/>
-            </a:solidFill>
-          </a:ln>
-        </p:spPr>
-        <p:style>
-          <a:lnRef idx="1">
-            <a:schemeClr val="accent1"/>
-          </a:lnRef>
-          <a:fillRef idx="3">
-            <a:schemeClr val="accent1"/>
-          </a:fillRef>
-          <a:effectRef idx="2">
-            <a:schemeClr val="accent1"/>
-          </a:effectRef>
-          <a:fontRef idx="minor">
-            <a:schemeClr val="lt1"/>
-          </a:fontRef>
-        </p:style>
-        <p:txBody>
-          <a:bodyPr rtlCol="0" anchor="ctr"/>
-          <a:lstStyle/>
-          <a:p>
-            <a:pPr algn="ctr"/>
-          </a:p>
-        </p:txBody>
-      </p:sp>
-      <p:sp>
-        <p:nvSpPr>
-          <p:cNvPr id="18" name="TextBox 17"/>
-          <p:cNvSpPr txBox="1"/>
-          <p:nvPr/>
-        </p:nvSpPr>
-        <p:spPr>
-          <a:xfrm>
-            <a:off x="7543800" y="3721608"/>
-            <a:ext cx="3017520" cy="228600"/>
-          </a:xfrm>
-          <a:prstGeom prst="rect">
-            <a:avLst/>
-          </a:prstGeom>
-          <a:noFill/>
-        </p:spPr>
-        <p:txBody>
-          <a:bodyPr wrap="square">
-            <a:spAutoFit/>
-          </a:bodyPr>
-          <a:lstStyle/>
-          <a:p>
-            <a:pPr algn="l">
-              <a:defRPr sz="1200" b="1">
-                <a:solidFill>
-                  <a:srgbClr val="E74C3C"/>
-                </a:solidFill>
-                <a:latin typeface="Calibri"/>
-              </a:defRPr>
-            </a:pPr>
-            <a:r>
-              <a:t>Recovery time predicts score</a:t>
-            </a:r>
-          </a:p>
-        </p:txBody>
-      </p:sp>
-      <p:sp>
-        <p:nvSpPr>
-          <p:cNvPr id="19" name="TextBox 18"/>
-          <p:cNvSpPr txBox="1"/>
-          <p:nvPr/>
-        </p:nvSpPr>
-        <p:spPr>
-          <a:xfrm>
-            <a:off x="7543800" y="3977640"/>
-            <a:ext cx="3017520" cy="411480"/>
-          </a:xfrm>
-          <a:prstGeom prst="rect">
-            <a:avLst/>
-          </a:prstGeom>
-          <a:noFill/>
-        </p:spPr>
-        <p:txBody>
-          <a:bodyPr wrap="square">
-            <a:spAutoFit/>
-          </a:bodyPr>
-          <a:lstStyle/>
-          <a:p>
-            <a:pPr algn="l">
-              <a:defRPr sz="1000" b="0">
-                <a:solidFill>
-                  <a:srgbClr val="BDBDBD"/>
-                </a:solidFill>
-                <a:latin typeface="Calibri"/>
-              </a:defRPr>
-            </a:pPr>
-            <a:r>
-              <a:t>Inapplicable on its own terms: the d2s/s2r split</a:t>
-            </a:r>
-            <a:br/>
-            <a:r>
-              <a:t>is unstable run-to-run and the score is</a:t>
-            </a:r>
-            <a:br/>
-            <a:r>
-              <a:t>non-reproducible. No stable relationship.</a:t>
-            </a:r>
-          </a:p>
-        </p:txBody>
-      </p:sp>
-      <p:sp>
-        <p:nvSpPr>
-          <p:cNvPr id="20" name="Rounded Rectangle 19"/>
-          <p:cNvSpPr/>
-          <p:nvPr/>
-        </p:nvSpPr>
-        <p:spPr>
-          <a:xfrm>
-            <a:off x="10515600" y="3886200"/>
-            <a:ext cx="1005840" cy="320040"/>
-          </a:xfrm>
-          <a:prstGeom prst="roundRect">
-            <a:avLst/>
-          </a:prstGeom>
-          <a:solidFill>
-            <a:srgbClr val="E74C3C"/>
-          </a:solidFill>
-          <a:ln>
-            <a:noFill/>
-          </a:ln>
-        </p:spPr>
-        <p:style>
-          <a:lnRef idx="1">
-            <a:schemeClr val="accent1"/>
-          </a:lnRef>
-          <a:fillRef idx="3">
-            <a:schemeClr val="accent1"/>
-          </a:fillRef>
-          <a:effectRef idx="2">
-            <a:schemeClr val="accent1"/>
-          </a:effectRef>
-          <a:fontRef idx="minor">
-            <a:schemeClr val="lt1"/>
-          </a:fontRef>
-        </p:style>
-        <p:txBody>
-          <a:bodyPr rtlCol="0" anchor="ctr" wrap="square" lIns="50800" rIns="50800" tIns="25400" bIns="25400"/>
-          <a:lstStyle/>
-          <a:p>
-            <a:pPr algn="ctr">
-              <a:defRPr sz="1000" b="1">
-                <a:solidFill>
-                  <a:srgbClr val="FFFFFF"/>
-                </a:solidFill>
-                <a:latin typeface="Calibri"/>
-              </a:defRPr>
-            </a:pPr>
-            <a:r>
-              <a:t>Inapplic.</a:t>
-            </a:r>
-          </a:p>
-        </p:txBody>
-      </p:sp>
-      <p:sp>
-        <p:nvSpPr>
-          <p:cNvPr id="21" name="TextBox 20"/>
-          <p:cNvSpPr txBox="1"/>
-          <p:nvPr/>
-        </p:nvSpPr>
-        <p:spPr>
-          <a:xfrm>
-            <a:off x="457200" y="5120640"/>
-            <a:ext cx="10972800" cy="274320"/>
-          </a:xfrm>
-          <a:prstGeom prst="rect">
-            <a:avLst/>
-          </a:prstGeom>
-          <a:noFill/>
-        </p:spPr>
-        <p:txBody>
-          <a:bodyPr wrap="square">
-            <a:spAutoFit/>
-          </a:bodyPr>
-          <a:lstStyle/>
-          <a:p>
-            <a:pPr algn="l">
-              <a:defRPr sz="1800" b="1">
-                <a:solidFill>
-                  <a:srgbClr val="F39C12"/>
-                </a:solidFill>
-                <a:latin typeface="Calibri"/>
-              </a:defRPr>
-            </a:pPr>
-            <a:r>
-              <a:t>Key Insights</a:t>
-            </a:r>
-          </a:p>
-        </p:txBody>
-      </p:sp>
-      <p:sp>
-        <p:nvSpPr>
-          <p:cNvPr id="22" name="Rounded Rectangle 21"/>
-          <p:cNvSpPr/>
-          <p:nvPr/>
-        </p:nvSpPr>
-        <p:spPr>
-          <a:xfrm>
-            <a:off x="457200" y="5486400"/>
-            <a:ext cx="3566160" cy="1097280"/>
-          </a:xfrm>
-          <a:prstGeom prst="roundRect">
-            <a:avLst/>
-          </a:prstGeom>
-          <a:solidFill>
-            <a:srgbClr val="121222"/>
-          </a:solidFill>
-          <a:ln w="12700">
-            <a:solidFill>
-              <a:srgbClr val="E74C3C"/>
-            </a:solidFill>
-          </a:ln>
-        </p:spPr>
-        <p:style>
-          <a:lnRef idx="1">
-            <a:schemeClr val="accent1"/>
-          </a:lnRef>
-          <a:fillRef idx="3">
-            <a:schemeClr val="accent1"/>
-          </a:fillRef>
-          <a:effectRef idx="2">
-            <a:schemeClr val="accent1"/>
-          </a:effectRef>
-          <a:fontRef idx="minor">
-            <a:schemeClr val="lt1"/>
-          </a:fontRef>
-        </p:style>
-        <p:txBody>
-          <a:bodyPr rtlCol="0" anchor="ctr"/>
-          <a:lstStyle/>
-          <a:p>
-            <a:pPr algn="ctr"/>
-          </a:p>
-        </p:txBody>
-      </p:sp>
-      <p:sp>
-        <p:nvSpPr>
-          <p:cNvPr id="23" name="TextBox 22"/>
-          <p:cNvSpPr txBox="1"/>
-          <p:nvPr/>
-        </p:nvSpPr>
-        <p:spPr>
-          <a:xfrm>
-            <a:off x="640080" y="5486400"/>
-            <a:ext cx="3200400" cy="274320"/>
-          </a:xfrm>
-          <a:prstGeom prst="rect">
-            <a:avLst/>
-          </a:prstGeom>
-          <a:noFill/>
-        </p:spPr>
-        <p:txBody>
-          <a:bodyPr wrap="square">
-            <a:spAutoFit/>
-          </a:bodyPr>
-          <a:lstStyle/>
-          <a:p>
-            <a:pPr algn="l">
-              <a:defRPr sz="1300" b="1">
-                <a:solidFill>
-                  <a:srgbClr val="E74C3C"/>
-                </a:solidFill>
-                <a:latin typeface="Calibri"/>
-              </a:defRPr>
-            </a:pPr>
-            <a:r>
-              <a:t>M4 — score is the wrong instrument</a:t>
-            </a:r>
-          </a:p>
-        </p:txBody>
-      </p:sp>
-      <p:sp>
-        <p:nvSpPr>
-          <p:cNvPr id="24" name="TextBox 23"/>
-          <p:cNvSpPr txBox="1"/>
-          <p:nvPr/>
-        </p:nvSpPr>
-        <p:spPr>
-          <a:xfrm>
-            <a:off x="640080" y="5760720"/>
-            <a:ext cx="3200400" cy="731520"/>
-          </a:xfrm>
-          <a:prstGeom prst="rect">
-            <a:avLst/>
-          </a:prstGeom>
-          <a:noFill/>
-        </p:spPr>
-        <p:txBody>
-          <a:bodyPr wrap="square">
-            <a:spAutoFit/>
-          </a:bodyPr>
-          <a:lstStyle/>
-          <a:p>
-            <a:pPr algn="l">
-              <a:defRPr sz="1000" b="0">
-                <a:solidFill>
-                  <a:srgbClr val="BDBDBD"/>
-                </a:solidFill>
-                <a:latin typeface="Calibri"/>
-              </a:defRPr>
-            </a:pPr>
-            <a:r>
-              <a:t>The aggregate resilience score is not reproducible: the same strategy spans 33–89 across 13 runs. It cannot rank placements — the binary-probe scoring discards the signal.</a:t>
-            </a:r>
-          </a:p>
-        </p:txBody>
-      </p:sp>
-      <p:sp>
-        <p:nvSpPr>
-          <p:cNvPr id="25" name="Rounded Rectangle 24"/>
-          <p:cNvSpPr/>
-          <p:nvPr/>
-        </p:nvSpPr>
-        <p:spPr>
-          <a:xfrm>
-            <a:off x="4297680" y="5486400"/>
-            <a:ext cx="3566160" cy="1097280"/>
-          </a:xfrm>
-          <a:prstGeom prst="roundRect">
-            <a:avLst/>
-          </a:prstGeom>
-          <a:solidFill>
-            <a:srgbClr val="121222"/>
-          </a:solidFill>
-          <a:ln w="12700">
-            <a:solidFill>
-              <a:srgbClr val="0096D6"/>
-            </a:solidFill>
-          </a:ln>
-        </p:spPr>
-        <p:style>
-          <a:lnRef idx="1">
-            <a:schemeClr val="accent1"/>
-          </a:lnRef>
-          <a:fillRef idx="3">
-            <a:schemeClr val="accent1"/>
-          </a:fillRef>
-          <a:effectRef idx="2">
-            <a:schemeClr val="accent1"/>
-          </a:effectRef>
-          <a:fontRef idx="minor">
-            <a:schemeClr val="lt1"/>
-          </a:fontRef>
-        </p:style>
-        <p:txBody>
-          <a:bodyPr rtlCol="0" anchor="ctr"/>
-          <a:lstStyle/>
-          <a:p>
-            <a:pPr algn="ctr"/>
-          </a:p>
-        </p:txBody>
-      </p:sp>
-      <p:sp>
-        <p:nvSpPr>
-          <p:cNvPr id="26" name="TextBox 25"/>
-          <p:cNvSpPr txBox="1"/>
-          <p:nvPr/>
-        </p:nvSpPr>
-        <p:spPr>
-          <a:xfrm>
-            <a:off x="4480560" y="5486400"/>
-            <a:ext cx="3200400" cy="274320"/>
-          </a:xfrm>
-          <a:prstGeom prst="rect">
-            <a:avLst/>
-          </a:prstGeom>
-          <a:noFill/>
-        </p:spPr>
-        <p:txBody>
-          <a:bodyPr wrap="square">
-            <a:spAutoFit/>
-          </a:bodyPr>
-          <a:lstStyle/>
-          <a:p>
-            <a:pPr algn="l">
-              <a:defRPr sz="1300" b="1">
-                <a:solidFill>
-                  <a:srgbClr val="0096D6"/>
-                </a:solidFill>
-                <a:latin typeface="Calibri"/>
-              </a:defRPr>
-            </a:pPr>
-            <a:r>
-              <a:t>M1/M2 — metrics reproduce</a:t>
-            </a:r>
-          </a:p>
-        </p:txBody>
-      </p:sp>
-      <p:sp>
-        <p:nvSpPr>
-          <p:cNvPr id="27" name="TextBox 26"/>
-          <p:cNvSpPr txBox="1"/>
-          <p:nvPr/>
-        </p:nvSpPr>
-        <p:spPr>
-          <a:xfrm>
-            <a:off x="4480560" y="5760720"/>
-            <a:ext cx="3200400" cy="731520"/>
-          </a:xfrm>
-          <a:prstGeom prst="rect">
-            <a:avLst/>
-          </a:prstGeom>
-          <a:noFill/>
-        </p:spPr>
-        <p:txBody>
-          <a:bodyPr wrap="square">
-            <a:spAutoFit/>
-          </a:bodyPr>
-          <a:lstStyle/>
-          <a:p>
-            <a:pPr algn="l">
-              <a:defRPr sz="1000" b="0">
-                <a:solidFill>
-                  <a:srgbClr val="BDBDBD"/>
-                </a:solidFill>
-                <a:latin typeface="Calibri"/>
-              </a:defRPr>
-            </a:pPr>
-            <a:r>
-              <a:t>Where the score is noise, the kernel/network metrics are stable: conntrack flush (spread ≫ colocate, 12/12 runs) and CPU throttling (colocate &lt; default, 11/13). These carry the placement signal the score loses.</a:t>
-            </a:r>
-          </a:p>
-        </p:txBody>
-      </p:sp>
-      <p:sp>
-        <p:nvSpPr>
-          <p:cNvPr id="28" name="Rounded Rectangle 27"/>
-          <p:cNvSpPr/>
-          <p:nvPr/>
-        </p:nvSpPr>
-        <p:spPr>
-          <a:xfrm>
-            <a:off x="8138160" y="5486400"/>
-            <a:ext cx="3566160" cy="1097280"/>
-          </a:xfrm>
-          <a:prstGeom prst="roundRect">
-            <a:avLst/>
-          </a:prstGeom>
-          <a:solidFill>
-            <a:srgbClr val="121222"/>
-          </a:solidFill>
-          <a:ln w="12700">
-            <a:solidFill>
-              <a:srgbClr val="2ECC71"/>
-            </a:solidFill>
-          </a:ln>
-        </p:spPr>
-        <p:style>
-          <a:lnRef idx="1">
-            <a:schemeClr val="accent1"/>
-          </a:lnRef>
-          <a:fillRef idx="3">
-            <a:schemeClr val="accent1"/>
-          </a:fillRef>
-          <a:effectRef idx="2">
-            <a:schemeClr val="accent1"/>
-          </a:effectRef>
-          <a:fontRef idx="minor">
-            <a:schemeClr val="lt1"/>
-          </a:fontRef>
-        </p:style>
-        <p:txBody>
-          <a:bodyPr rtlCol="0" anchor="ctr"/>
-          <a:lstStyle/>
-          <a:p>
-            <a:pPr algn="ctr"/>
-          </a:p>
-        </p:txBody>
-      </p:sp>
-      <p:sp>
-        <p:nvSpPr>
-          <p:cNvPr id="29" name="TextBox 28"/>
-          <p:cNvSpPr txBox="1"/>
-          <p:nvPr/>
-        </p:nvSpPr>
-        <p:spPr>
-          <a:xfrm>
-            <a:off x="8321040" y="5486400"/>
-            <a:ext cx="3200400" cy="274320"/>
-          </a:xfrm>
-          <a:prstGeom prst="rect">
-            <a:avLst/>
-          </a:prstGeom>
-          <a:noFill/>
-        </p:spPr>
-        <p:txBody>
-          <a:bodyPr wrap="square">
-            <a:spAutoFit/>
-          </a:bodyPr>
-          <a:lstStyle/>
-          <a:p>
-            <a:pPr algn="l">
-              <a:defRPr sz="1300" b="1">
-                <a:solidFill>
-                  <a:srgbClr val="2ECC71"/>
-                </a:solidFill>
-                <a:latin typeface="Calibri"/>
-              </a:defRPr>
-            </a:pPr>
-            <a:r>
-              <a:t>M3 — churn-driven, not contention</a:t>
-            </a:r>
-          </a:p>
-        </p:txBody>
-      </p:sp>
-      <p:sp>
-        <p:nvSpPr>
-          <p:cNvPr id="30" name="TextBox 29"/>
-          <p:cNvSpPr txBox="1"/>
-          <p:nvPr/>
-        </p:nvSpPr>
-        <p:spPr>
-          <a:xfrm>
-            <a:off x="8321040" y="5760720"/>
-            <a:ext cx="3200400" cy="731520"/>
-          </a:xfrm>
-          <a:prstGeom prst="rect">
-            <a:avLst/>
-          </a:prstGeom>
-          <a:noFill/>
-        </p:spPr>
-        <p:txBody>
-          <a:bodyPr wrap="square">
-            <a:spAutoFit/>
-          </a:bodyPr>
-          <a:lstStyle/>
-          <a:p>
-            <a:pPr algn="l">
-              <a:defRPr sz="1000" b="0">
-                <a:solidFill>
-                  <a:srgbClr val="BDBDBD"/>
-                </a:solidFill>
-                <a:latin typeface="Calibri"/>
-              </a:defRPr>
-            </a:pPr>
-            <a:r>
-              <a:t>Pod-delete tears down cross-node conntrack state (measured directly). Cross-node hops exposed to the kill cycle become failure surfaces; co-located, same-node paths stay kernel-local and are spared.</a:t>
+              <a:t>Locality-as-objective already belongs to the literature (NetMARKS, graph-partitioning schedulers); the contribution here is validating the graph-derived fraction against measured during-load tails. The correlation is coarse — it separates the two node-local placements (colocate, best-fit) from the six spreading ones, which cluster at 0.70–0.80 — and single-batch. Note dependency-aware's partition did not co-locate as intended (0.73, spread-like).</a:t>
             </a:r>
           </a:p>
         </p:txBody>
@@ -5790,7 +5523,7 @@
               </a:defRPr>
             </a:pPr>
             <a:r>
-              <a:t>Threats to Validity</a:t>
+              <a:t>Results — H6: The Latency/Availability Trade-Off</a:t>
             </a:r>
           </a:p>
         </p:txBody>
@@ -5846,8 +5579,8 @@
         </p:nvSpPr>
         <p:spPr>
           <a:xfrm>
-            <a:off x="457200" y="1371600"/>
-            <a:ext cx="5486400" cy="5029200"/>
+            <a:off x="457200" y="1280160"/>
+            <a:ext cx="5943600" cy="4023360"/>
           </a:xfrm>
           <a:prstGeom prst="roundRect">
             <a:avLst/>
@@ -5891,8 +5624,8 @@
         </p:nvSpPr>
         <p:spPr>
           <a:xfrm>
-            <a:off x="640080" y="1417320"/>
-            <a:ext cx="5120640" cy="320040"/>
+            <a:off x="640080" y="1325880"/>
+            <a:ext cx="5577840" cy="274320"/>
           </a:xfrm>
           <a:prstGeom prst="rect">
             <a:avLst/>
@@ -5906,7 +5639,7 @@
           <a:lstStyle/>
           <a:p>
             <a:pPr algn="l">
-              <a:defRPr sz="1600" b="1">
+              <a:defRPr sz="1400" b="1">
                 <a:solidFill>
                   <a:srgbClr val="E74C3C"/>
                 </a:solidFill>
@@ -5914,21 +5647,331 @@
               </a:defRPr>
             </a:pPr>
             <a:r>
-              <a:t>Internal Validity</a:t>
-            </a:r>
-          </a:p>
-        </p:txBody>
-      </p:sp>
-      <p:sp>
-        <p:nvSpPr>
-          <p:cNvPr id="6" name="TextBox 5"/>
+              <a:t>Node drain on the target's node (third fault class)</a:t>
+            </a:r>
+          </a:p>
+        </p:txBody>
+      </p:sp>
+      <p:graphicFrame>
+        <p:nvGraphicFramePr>
+          <p:cNvPr id="6" name="Table 5"/>
+          <p:cNvGraphicFramePr>
+            <a:graphicFrameLocks noGrp="1"/>
+          </p:cNvGraphicFramePr>
+          <p:nvPr/>
+        </p:nvGraphicFramePr>
+        <p:xfrm>
+          <a:off x="640080" y="1691640"/>
+          <a:ext cx="5577840" cy="1188720"/>
+        </p:xfrm>
+        <a:graphic>
+          <a:graphicData uri="http://schemas.openxmlformats.org/drawingml/2006/table">
+            <a:tbl>
+              <a:tblPr firstRow="1" bandRow="1">
+                <a:tableStyleId>{5C22544A-7EE6-4342-B048-85BDC9FD1C3A}</a:tableStyleId>
+              </a:tblPr>
+              <a:tblGrid>
+                <a:gridCol w="1394460"/>
+                <a:gridCol w="1394460"/>
+                <a:gridCol w="1394460"/>
+                <a:gridCol w="1394460"/>
+              </a:tblGrid>
+              <a:tr h="396240">
+                <a:tc>
+                  <a:txBody>
+                    <a:bodyPr wrap="square"/>
+                    <a:lstStyle/>
+                    <a:p>
+                      <a:pPr algn="l"/>
+                      <a:r>
+                        <a:rPr sz="900" b="1">
+                          <a:solidFill>
+                            <a:srgbClr val="FFFFFF"/>
+                          </a:solidFill>
+                          <a:latin typeface="Calibri"/>
+                        </a:rPr>
+                        <a:t>Placement</a:t>
+                      </a:r>
+                    </a:p>
+                  </a:txBody>
+                  <a:tcPr marL="76200" marR="76200" marT="38100" marB="38100">
+                    <a:solidFill>
+                      <a:srgbClr val="E74C3C"/>
+                    </a:solidFill>
+                  </a:tcPr>
+                </a:tc>
+                <a:tc>
+                  <a:txBody>
+                    <a:bodyPr wrap="square"/>
+                    <a:lstStyle/>
+                    <a:p>
+                      <a:pPr algn="l"/>
+                      <a:r>
+                        <a:rPr sz="900" b="1">
+                          <a:solidFill>
+                            <a:srgbClr val="FFFFFF"/>
+                          </a:solidFill>
+                          <a:latin typeface="Calibri"/>
+                        </a:rPr>
+                        <a:t>On drained node</a:t>
+                      </a:r>
+                    </a:p>
+                  </a:txBody>
+                  <a:tcPr marL="76200" marR="76200" marT="38100" marB="38100">
+                    <a:solidFill>
+                      <a:srgbClr val="E74C3C"/>
+                    </a:solidFill>
+                  </a:tcPr>
+                </a:tc>
+                <a:tc>
+                  <a:txBody>
+                    <a:bodyPr wrap="square"/>
+                    <a:lstStyle/>
+                    <a:p>
+                      <a:pPr algn="l"/>
+                      <a:r>
+                        <a:rPr sz="900" b="1">
+                          <a:solidFill>
+                            <a:srgbClr val="FFFFFF"/>
+                          </a:solidFill>
+                          <a:latin typeface="Calibri"/>
+                        </a:rPr>
+                        <a:t>Blast radius</a:t>
+                      </a:r>
+                    </a:p>
+                  </a:txBody>
+                  <a:tcPr marL="76200" marR="76200" marT="38100" marB="38100">
+                    <a:solidFill>
+                      <a:srgbClr val="E74C3C"/>
+                    </a:solidFill>
+                  </a:tcPr>
+                </a:tc>
+                <a:tc>
+                  <a:txBody>
+                    <a:bodyPr wrap="square"/>
+                    <a:lstStyle/>
+                    <a:p>
+                      <a:pPr algn="l"/>
+                      <a:r>
+                        <a:rPr sz="900" b="1">
+                          <a:solidFill>
+                            <a:srgbClr val="FFFFFF"/>
+                          </a:solidFill>
+                          <a:latin typeface="Calibri"/>
+                        </a:rPr>
+                        <a:t>Target recovery</a:t>
+                      </a:r>
+                    </a:p>
+                  </a:txBody>
+                  <a:tcPr marL="76200" marR="76200" marT="38100" marB="38100">
+                    <a:solidFill>
+                      <a:srgbClr val="E74C3C"/>
+                    </a:solidFill>
+                  </a:tcPr>
+                </a:tc>
+              </a:tr>
+              <a:tr h="396240">
+                <a:tc>
+                  <a:txBody>
+                    <a:bodyPr wrap="square"/>
+                    <a:lstStyle/>
+                    <a:p>
+                      <a:pPr algn="l"/>
+                      <a:r>
+                        <a:rPr sz="900" b="0">
+                          <a:solidFill>
+                            <a:srgbClr val="FFFFFF"/>
+                          </a:solidFill>
+                          <a:latin typeface="Calibri"/>
+                        </a:rPr>
+                        <a:t>colocate</a:t>
+                      </a:r>
+                    </a:p>
+                  </a:txBody>
+                  <a:tcPr marL="76200" marR="76200" marT="38100" marB="38100">
+                    <a:solidFill>
+                      <a:srgbClr val="2A2A3E"/>
+                    </a:solidFill>
+                  </a:tcPr>
+                </a:tc>
+                <a:tc>
+                  <a:txBody>
+                    <a:bodyPr wrap="square"/>
+                    <a:lstStyle/>
+                    <a:p>
+                      <a:pPr algn="l"/>
+                      <a:r>
+                        <a:rPr sz="900" b="0">
+                          <a:solidFill>
+                            <a:srgbClr val="FFFFFF"/>
+                          </a:solidFill>
+                          <a:latin typeface="Calibri"/>
+                        </a:rPr>
+                        <a:t>11 / 11 services</a:t>
+                      </a:r>
+                    </a:p>
+                  </a:txBody>
+                  <a:tcPr marL="76200" marR="76200" marT="38100" marB="38100">
+                    <a:solidFill>
+                      <a:srgbClr val="2A2A3E"/>
+                    </a:solidFill>
+                  </a:tcPr>
+                </a:tc>
+                <a:tc>
+                  <a:txBody>
+                    <a:bodyPr wrap="square"/>
+                    <a:lstStyle/>
+                    <a:p>
+                      <a:pPr algn="l"/>
+                      <a:r>
+                        <a:rPr sz="900" b="0">
+                          <a:solidFill>
+                            <a:srgbClr val="FFFFFF"/>
+                          </a:solidFill>
+                          <a:latin typeface="Calibri"/>
+                        </a:rPr>
+                        <a:t>11 — whole app offline (100%)</a:t>
+                      </a:r>
+                    </a:p>
+                  </a:txBody>
+                  <a:tcPr marL="76200" marR="76200" marT="38100" marB="38100">
+                    <a:solidFill>
+                      <a:srgbClr val="2A2A3E"/>
+                    </a:solidFill>
+                  </a:tcPr>
+                </a:tc>
+                <a:tc>
+                  <a:txBody>
+                    <a:bodyPr wrap="square"/>
+                    <a:lstStyle/>
+                    <a:p>
+                      <a:pPr algn="l"/>
+                      <a:r>
+                        <a:rPr sz="900" b="0">
+                          <a:solidFill>
+                            <a:srgbClr val="FFFFFF"/>
+                          </a:solidFill>
+                          <a:latin typeface="Calibri"/>
+                        </a:rPr>
+                        <a:t>~10.3 s</a:t>
+                      </a:r>
+                    </a:p>
+                  </a:txBody>
+                  <a:tcPr marL="76200" marR="76200" marT="38100" marB="38100">
+                    <a:solidFill>
+                      <a:srgbClr val="2A2A3E"/>
+                    </a:solidFill>
+                  </a:tcPr>
+                </a:tc>
+              </a:tr>
+              <a:tr h="396240">
+                <a:tc>
+                  <a:txBody>
+                    <a:bodyPr wrap="square"/>
+                    <a:lstStyle/>
+                    <a:p>
+                      <a:pPr algn="l"/>
+                      <a:r>
+                        <a:rPr sz="900" b="0">
+                          <a:solidFill>
+                            <a:srgbClr val="FFFFFF"/>
+                          </a:solidFill>
+                          <a:latin typeface="Calibri"/>
+                        </a:rPr>
+                        <a:t>spread</a:t>
+                      </a:r>
+                    </a:p>
+                  </a:txBody>
+                  <a:tcPr marL="76200" marR="76200" marT="38100" marB="38100">
+                    <a:solidFill>
+                      <a:srgbClr val="2A2A3E"/>
+                    </a:solidFill>
+                  </a:tcPr>
+                </a:tc>
+                <a:tc>
+                  <a:txBody>
+                    <a:bodyPr wrap="square"/>
+                    <a:lstStyle/>
+                    <a:p>
+                      <a:pPr algn="l"/>
+                      <a:r>
+                        <a:rPr sz="900" b="0">
+                          <a:solidFill>
+                            <a:srgbClr val="FFFFFF"/>
+                          </a:solidFill>
+                          <a:latin typeface="Calibri"/>
+                        </a:rPr>
+                        <a:t>2 / 11 services</a:t>
+                      </a:r>
+                    </a:p>
+                  </a:txBody>
+                  <a:tcPr marL="76200" marR="76200" marT="38100" marB="38100">
+                    <a:solidFill>
+                      <a:srgbClr val="2A2A3E"/>
+                    </a:solidFill>
+                  </a:tcPr>
+                </a:tc>
+                <a:tc>
+                  <a:txBody>
+                    <a:bodyPr wrap="square"/>
+                    <a:lstStyle/>
+                    <a:p>
+                      <a:pPr algn="l"/>
+                      <a:r>
+                        <a:rPr sz="900" b="0">
+                          <a:solidFill>
+                            <a:srgbClr val="FFFFFF"/>
+                          </a:solidFill>
+                          <a:latin typeface="Calibri"/>
+                        </a:rPr>
+                        <a:t>2 services (18%)</a:t>
+                      </a:r>
+                    </a:p>
+                  </a:txBody>
+                  <a:tcPr marL="76200" marR="76200" marT="38100" marB="38100">
+                    <a:solidFill>
+                      <a:srgbClr val="2A2A3E"/>
+                    </a:solidFill>
+                  </a:tcPr>
+                </a:tc>
+                <a:tc>
+                  <a:txBody>
+                    <a:bodyPr wrap="square"/>
+                    <a:lstStyle/>
+                    <a:p>
+                      <a:pPr algn="l"/>
+                      <a:r>
+                        <a:rPr sz="900" b="0">
+                          <a:solidFill>
+                            <a:srgbClr val="FFFFFF"/>
+                          </a:solidFill>
+                          <a:latin typeface="Calibri"/>
+                        </a:rPr>
+                        <a:t>~2.6 s</a:t>
+                      </a:r>
+                    </a:p>
+                  </a:txBody>
+                  <a:tcPr marL="76200" marR="76200" marT="38100" marB="38100">
+                    <a:solidFill>
+                      <a:srgbClr val="2A2A3E"/>
+                    </a:solidFill>
+                  </a:tcPr>
+                </a:tc>
+              </a:tr>
+            </a:tbl>
+          </a:graphicData>
+        </a:graphic>
+      </p:graphicFrame>
+      <p:sp>
+        <p:nvSpPr>
+          <p:cNvPr id="7" name="TextBox 6"/>
           <p:cNvSpPr txBox="1"/>
           <p:nvPr/>
         </p:nvSpPr>
         <p:spPr>
           <a:xfrm>
-            <a:off x="640080" y="1920240"/>
-            <a:ext cx="5120640" cy="274320"/>
+            <a:off x="640080" y="3063240"/>
+            <a:ext cx="5577840" cy="2194560"/>
           </a:xfrm>
           <a:prstGeom prst="rect">
             <a:avLst/>
@@ -5941,44 +5984,14 @@
           </a:bodyPr>
           <a:lstStyle/>
           <a:p>
-            <a:pPr algn="l">
-              <a:defRPr sz="1300" b="1">
-                <a:solidFill>
-                  <a:srgbClr val="FFFFFF"/>
-                </a:solidFill>
-                <a:latin typeface="Calibri"/>
-              </a:defRPr>
-            </a:pPr>
-            <a:r>
-              <a:t>Single application</a:t>
-            </a:r>
-          </a:p>
-        </p:txBody>
-      </p:sp>
-      <p:sp>
-        <p:nvSpPr>
-          <p:cNvPr id="7" name="TextBox 6"/>
-          <p:cNvSpPr txBox="1"/>
-          <p:nvPr/>
-        </p:nvSpPr>
-        <p:spPr>
-          <a:xfrm>
-            <a:off x="640080" y="2240280"/>
-            <a:ext cx="5120640" cy="777240"/>
-          </a:xfrm>
-          <a:prstGeom prst="rect">
-            <a:avLst/>
-          </a:prstGeom>
-          <a:noFill/>
-        </p:spPr>
-        <p:txBody>
-          <a:bodyPr wrap="square">
-            <a:spAutoFit/>
-          </a:bodyPr>
-          <a:lstStyle/>
-          <a:p>
-            <a:pPr algn="l">
-              <a:defRPr sz="1100" b="0">
+            <a:pPr>
+              <a:spcBef>
+                <a:spcPts val="200"/>
+              </a:spcBef>
+              <a:spcAft>
+                <a:spcPts val="200"/>
+              </a:spcAft>
+              <a:defRPr sz="1000">
                 <a:solidFill>
                   <a:srgbClr val="BDBDBD"/>
                 </a:solidFill>
@@ -5986,71 +5999,26 @@
               </a:defRPr>
             </a:pPr>
             <a:r>
-              <a:t>Results based on Google Online Boutique — a representative but single microservice benchmark. Other application topologies may yield different results.</a:t>
-            </a:r>
-          </a:p>
-        </p:txBody>
-      </p:sp>
-      <p:sp>
-        <p:nvSpPr>
-          <p:cNvPr id="8" name="TextBox 7"/>
-          <p:cNvSpPr txBox="1"/>
-          <p:nvPr/>
-        </p:nvSpPr>
-        <p:spPr>
-          <a:xfrm>
-            <a:off x="640080" y="3108960"/>
-            <a:ext cx="5120640" cy="274320"/>
-          </a:xfrm>
-          <a:prstGeom prst="rect">
-            <a:avLst/>
-          </a:prstGeom>
-          <a:noFill/>
-        </p:spPr>
-        <p:txBody>
-          <a:bodyPr wrap="square">
-            <a:spAutoFit/>
-          </a:bodyPr>
-          <a:lstStyle/>
-          <a:p>
-            <a:pPr algn="l">
-              <a:defRPr sz="1300" b="1">
-                <a:solidFill>
-                  <a:srgbClr val="FFFFFF"/>
-                </a:solidFill>
-                <a:latin typeface="Calibri"/>
-              </a:defRPr>
-            </a:pPr>
-            <a:r>
-              <a:t>Single replica per service</a:t>
-            </a:r>
-          </a:p>
-        </p:txBody>
-      </p:sp>
-      <p:sp>
-        <p:nvSpPr>
-          <p:cNvPr id="9" name="TextBox 8"/>
-          <p:cNvSpPr txBox="1"/>
-          <p:nvPr/>
-        </p:nvSpPr>
-        <p:spPr>
-          <a:xfrm>
-            <a:off x="640080" y="3429000"/>
-            <a:ext cx="5120640" cy="777240"/>
-          </a:xfrm>
-          <a:prstGeom prst="rect">
-            <a:avLst/>
-          </a:prstGeom>
-          <a:noFill/>
-        </p:spPr>
-        <p:txBody>
-          <a:bodyPr wrap="square">
-            <a:spAutoFit/>
-          </a:bodyPr>
-          <a:lstStyle/>
-          <a:p>
-            <a:pPr algn="l">
-              <a:defRPr sz="1100" b="0">
+              <a:t>• Blast radius = services at 0 ready endpoints at the</a:t>
+            </a:r>
+            <a:br/>
+            <a:r>
+              <a:t>  outage trough, read from EndpointSlice snapshots —</a:t>
+            </a:r>
+            <a:br/>
+            <a:r>
+              <a:t>  not the score (a drain leaves every probe Unknown; H1)</a:t>
+            </a:r>
+          </a:p>
+          <a:p>
+            <a:pPr>
+              <a:spcBef>
+                <a:spcPts val="200"/>
+              </a:spcBef>
+              <a:spcAft>
+                <a:spcPts val="200"/>
+              </a:spcAft>
+              <a:defRPr sz="1000">
                 <a:solidFill>
                   <a:srgbClr val="BDBDBD"/>
                 </a:solidFill>
@@ -6058,71 +6026,22 @@
               </a:defRPr>
             </a:pPr>
             <a:r>
-              <a:t>100% pod-delete guarantees unavailability, but production systems typically run multiple replicas. Results represent worst-case single-replica scenarios.</a:t>
-            </a:r>
-          </a:p>
-        </p:txBody>
-      </p:sp>
-      <p:sp>
-        <p:nvSpPr>
-          <p:cNvPr id="10" name="TextBox 9"/>
-          <p:cNvSpPr txBox="1"/>
-          <p:nvPr/>
-        </p:nvSpPr>
-        <p:spPr>
-          <a:xfrm>
-            <a:off x="640080" y="4297680"/>
-            <a:ext cx="5120640" cy="274320"/>
-          </a:xfrm>
-          <a:prstGeom prst="rect">
-            <a:avLst/>
-          </a:prstGeom>
-          <a:noFill/>
-        </p:spPr>
-        <p:txBody>
-          <a:bodyPr wrap="square">
-            <a:spAutoFit/>
-          </a:bodyPr>
-          <a:lstStyle/>
-          <a:p>
-            <a:pPr algn="l">
-              <a:defRPr sz="1300" b="1">
-                <a:solidFill>
-                  <a:srgbClr val="FFFFFF"/>
-                </a:solidFill>
-                <a:latin typeface="Calibri"/>
-              </a:defRPr>
-            </a:pPr>
-            <a:r>
-              <a:t>Virtualized environment</a:t>
-            </a:r>
-          </a:p>
-        </p:txBody>
-      </p:sp>
-      <p:sp>
-        <p:nvSpPr>
-          <p:cNvPr id="11" name="TextBox 10"/>
-          <p:cNvSpPr txBox="1"/>
-          <p:nvPr/>
-        </p:nvSpPr>
-        <p:spPr>
-          <a:xfrm>
-            <a:off x="640080" y="4617720"/>
-            <a:ext cx="5120640" cy="777240"/>
-          </a:xfrm>
-          <a:prstGeom prst="rect">
-            <a:avLst/>
-          </a:prstGeom>
-          <a:noFill/>
-        </p:spPr>
-        <p:txBody>
-          <a:bodyPr wrap="square">
-            <a:spAutoFit/>
-          </a:bodyPr>
-          <a:lstStyle/>
-          <a:p>
-            <a:pPr algn="l">
-              <a:defRPr sz="1100" b="0">
+              <a:t>• Observed blast equals the placement-predicted blast</a:t>
+            </a:r>
+            <a:br/>
+            <a:r>
+              <a:t>  in every iteration, across two doctor-clean batches</a:t>
+            </a:r>
+          </a:p>
+          <a:p>
+            <a:pPr>
+              <a:spcBef>
+                <a:spcPts val="200"/>
+              </a:spcBef>
+              <a:spcAft>
+                <a:spcPts val="200"/>
+              </a:spcAft>
+              <a:defRPr sz="1000">
                 <a:solidFill>
                   <a:srgbClr val="BDBDBD"/>
                 </a:solidFill>
@@ -6130,93 +6049,25 @@
               </a:defRPr>
             </a:pPr>
             <a:r>
-              <a:t>Vagrant/libvirt (KVM/QEMU) introduces virtualization overhead. Bare-metal clusters may show different performance characteristics, especially for I/O metrics.</a:t>
-            </a:r>
-          </a:p>
-        </p:txBody>
-      </p:sp>
-      <p:sp>
-        <p:nvSpPr>
-          <p:cNvPr id="12" name="TextBox 11"/>
-          <p:cNvSpPr txBox="1"/>
-          <p:nvPr/>
-        </p:nvSpPr>
-        <p:spPr>
-          <a:xfrm>
-            <a:off x="640080" y="5486400"/>
-            <a:ext cx="5120640" cy="274320"/>
-          </a:xfrm>
-          <a:prstGeom prst="rect">
-            <a:avLst/>
-          </a:prstGeom>
-          <a:noFill/>
-        </p:spPr>
-        <p:txBody>
-          <a:bodyPr wrap="square">
-            <a:spAutoFit/>
-          </a:bodyPr>
-          <a:lstStyle/>
-          <a:p>
-            <a:pPr algn="l">
-              <a:defRPr sz="1300" b="1">
-                <a:solidFill>
-                  <a:srgbClr val="FFFFFF"/>
-                </a:solidFill>
-                <a:latin typeface="Calibri"/>
-              </a:defRPr>
-            </a:pPr>
-            <a:r>
-              <a:t>Uneven strategy coverage</a:t>
-            </a:r>
-          </a:p>
-        </p:txBody>
-      </p:sp>
-      <p:sp>
-        <p:nvSpPr>
-          <p:cNvPr id="13" name="TextBox 12"/>
-          <p:cNvSpPr txBox="1"/>
-          <p:nvPr/>
-        </p:nvSpPr>
-        <p:spPr>
-          <a:xfrm>
-            <a:off x="640080" y="5806440"/>
-            <a:ext cx="5120640" cy="777240"/>
-          </a:xfrm>
-          <a:prstGeom prst="rect">
-            <a:avLst/>
-          </a:prstGeom>
-          <a:noFill/>
-        </p:spPr>
-        <p:txBody>
-          <a:bodyPr wrap="square">
-            <a:spAutoFit/>
-          </a:bodyPr>
-          <a:lstStyle/>
-          <a:p>
-            <a:pPr algn="l">
-              <a:defRPr sz="1100" b="0">
-                <a:solidFill>
-                  <a:srgbClr val="BDBDBD"/>
-                </a:solidFill>
-                <a:latin typeface="Calibri"/>
-              </a:defRPr>
-            </a:pPr>
-            <a:r>
-              <a:t>Reproducible findings rest on 3 configs (colocate, spread, default). The 4 contention strategies (random, adversarial, best-fit, dependency-aware) appear in half the runs and no reproducible finding — a generality check, not validated signals, pending more cpu-hog runs.</a:t>
-            </a:r>
-          </a:p>
-        </p:txBody>
-      </p:sp>
-      <p:sp>
-        <p:nvSpPr>
-          <p:cNvPr id="14" name="Rounded Rectangle 13"/>
+              <a:t>• Recovery scales with concentration too: 11 evicted</a:t>
+            </a:r>
+            <a:br/>
+            <a:r>
+              <a:t>  pods reschedule at once vs 2 — ~4× slower</a:t>
+            </a:r>
+          </a:p>
+        </p:txBody>
+      </p:sp>
+      <p:sp>
+        <p:nvSpPr>
+          <p:cNvPr id="8" name="Rounded Rectangle 7"/>
           <p:cNvSpPr/>
           <p:nvPr/>
         </p:nvSpPr>
         <p:spPr>
           <a:xfrm>
-            <a:off x="6309360" y="1371600"/>
-            <a:ext cx="5486400" cy="5029200"/>
+            <a:off x="6675120" y="1280160"/>
+            <a:ext cx="5029200" cy="4023360"/>
           </a:xfrm>
           <a:prstGeom prst="roundRect">
             <a:avLst/>
@@ -6226,7 +6077,7 @@
           </a:solidFill>
           <a:ln w="25400">
             <a:solidFill>
-              <a:srgbClr val="F39C12"/>
+              <a:srgbClr val="9B59B6"/>
             </a:solidFill>
           </a:ln>
         </p:spPr>
@@ -6254,14 +6105,14 @@
       </p:sp>
       <p:sp>
         <p:nvSpPr>
-          <p:cNvPr id="15" name="TextBox 14"/>
+          <p:cNvPr id="9" name="TextBox 8"/>
           <p:cNvSpPr txBox="1"/>
           <p:nvPr/>
         </p:nvSpPr>
         <p:spPr>
           <a:xfrm>
-            <a:off x="6492240" y="1417320"/>
-            <a:ext cx="5120640" cy="320040"/>
+            <a:off x="6858000" y="1325880"/>
+            <a:ext cx="4663440" cy="274320"/>
           </a:xfrm>
           <a:prstGeom prst="rect">
             <a:avLst/>
@@ -6275,29 +6126,29 @@
           <a:lstStyle/>
           <a:p>
             <a:pPr algn="l">
-              <a:defRPr sz="1600" b="1">
-                <a:solidFill>
-                  <a:srgbClr val="F39C12"/>
-                </a:solidFill>
-                <a:latin typeface="Calibri"/>
-              </a:defRPr>
-            </a:pPr>
-            <a:r>
-              <a:t>External Validity</a:t>
-            </a:r>
-          </a:p>
-        </p:txBody>
-      </p:sp>
-      <p:sp>
-        <p:nvSpPr>
-          <p:cNvPr id="16" name="TextBox 15"/>
+              <a:defRPr sz="1400" b="1">
+                <a:solidFill>
+                  <a:srgbClr val="9B59B6"/>
+                </a:solidFill>
+                <a:latin typeface="Calibri"/>
+              </a:defRPr>
+            </a:pPr>
+            <a:r>
+              <a:t>One placement property, two opposing consequences</a:t>
+            </a:r>
+          </a:p>
+        </p:txBody>
+      </p:sp>
+      <p:sp>
+        <p:nvSpPr>
+          <p:cNvPr id="10" name="TextBox 9"/>
           <p:cNvSpPr txBox="1"/>
           <p:nvPr/>
         </p:nvSpPr>
         <p:spPr>
           <a:xfrm>
-            <a:off x="6492240" y="1920240"/>
-            <a:ext cx="5120640" cy="274320"/>
+            <a:off x="6858000" y="1691640"/>
+            <a:ext cx="4663440" cy="3474720"/>
           </a:xfrm>
           <a:prstGeom prst="rect">
             <a:avLst/>
@@ -6310,30 +6161,189 @@
           </a:bodyPr>
           <a:lstStyle/>
           <a:p>
-            <a:pPr algn="l">
-              <a:defRPr sz="1300" b="1">
-                <a:solidFill>
-                  <a:srgbClr val="FFFFFF"/>
-                </a:solidFill>
-                <a:latin typeface="Calibri"/>
-              </a:defRPr>
-            </a:pPr>
-            <a:r>
-              <a:t>Cluster scale</a:t>
-            </a:r>
-          </a:p>
-        </p:txBody>
-      </p:sp>
-      <p:sp>
-        <p:nvSpPr>
-          <p:cNvPr id="17" name="TextBox 16"/>
+            <a:pPr>
+              <a:spcBef>
+                <a:spcPts val="200"/>
+              </a:spcBef>
+              <a:spcAft>
+                <a:spcPts val="200"/>
+              </a:spcAft>
+              <a:defRPr sz="1000">
+                <a:solidFill>
+                  <a:srgbClr val="BDBDBD"/>
+                </a:solidFill>
+                <a:latin typeface="Calibri"/>
+              </a:defRPr>
+            </a:pPr>
+            <a:r>
+              <a:t>• colocate: best east-west tail (H5: 33.9 ms,</a:t>
+            </a:r>
+            <a:br/>
+            <a:r>
+              <a:t>  lowest) AND worst node-failure blast</a:t>
+            </a:r>
+            <a:br/>
+            <a:r>
+              <a:t>  (100% outage) — spread is the mirror</a:t>
+            </a:r>
+          </a:p>
+          <a:p>
+            <a:pPr>
+              <a:spcBef>
+                <a:spcPts val="200"/>
+              </a:spcBef>
+              <a:spcAft>
+                <a:spcPts val="200"/>
+              </a:spcAft>
+              <a:defRPr sz="1000">
+                <a:solidFill>
+                  <a:srgbClr val="BDBDBD"/>
+                </a:solidFill>
+                <a:latin typeface="Calibri"/>
+              </a:defRPr>
+            </a:pPr>
+            <a:r>
+              <a:t>• H5 is the latency face, H6 the availability</a:t>
+            </a:r>
+            <a:br/>
+            <a:r>
+              <a:t>  face of the same co-location metric</a:t>
+            </a:r>
+          </a:p>
+          <a:p>
+            <a:pPr>
+              <a:spcBef>
+                <a:spcPts val="200"/>
+              </a:spcBef>
+              <a:spcAft>
+                <a:spcPts val="200"/>
+              </a:spcAft>
+              <a:defRPr sz="1000">
+                <a:solidFill>
+                  <a:srgbClr val="BDBDBD"/>
+                </a:solidFill>
+                <a:latin typeface="Calibri"/>
+              </a:defRPr>
+            </a:pPr>
+            <a:r>
+              <a:t>• Where placement DOES bite users in this</a:t>
+            </a:r>
+            <a:br/>
+            <a:r>
+              <a:t>  study is availability under node failure —</a:t>
+            </a:r>
+            <a:br/>
+            <a:r>
+              <a:t>  and it is predictable from the placement</a:t>
+            </a:r>
+          </a:p>
+          <a:p>
+            <a:pPr>
+              <a:spcBef>
+                <a:spcPts val="200"/>
+              </a:spcBef>
+              <a:spcAft>
+                <a:spcPts val="200"/>
+              </a:spcAft>
+              <a:defRPr sz="1000">
+                <a:solidFill>
+                  <a:srgbClr val="BDBDBD"/>
+                </a:solidFill>
+                <a:latin typeface="Calibri"/>
+              </a:defRPr>
+            </a:pPr>
+            <a:r>
+              <a:t>• Quantification of a known qualitative</a:t>
+            </a:r>
+            <a:br/>
+            <a:r>
+              <a:t>  trade-off (cell-based architectures), not</a:t>
+            </a:r>
+            <a:br/>
+            <a:r>
+              <a:t>  a discovery</a:t>
+            </a:r>
+          </a:p>
+          <a:p>
+            <a:pPr>
+              <a:spcBef>
+                <a:spcPts val="200"/>
+              </a:spcBef>
+              <a:spcAft>
+                <a:spcPts val="200"/>
+              </a:spcAft>
+              <a:defRPr sz="1000">
+                <a:solidFill>
+                  <a:srgbClr val="BDBDBD"/>
+                </a:solidFill>
+                <a:latin typeface="Calibri"/>
+              </a:defRPr>
+            </a:pPr>
+            <a:r>
+              <a:t>• Two-point contrast (the extremes); a</a:t>
+            </a:r>
+            <a:br/>
+            <a:r>
+              <a:t>  6-strategy gradient run extends this</a:t>
+            </a:r>
+          </a:p>
+        </p:txBody>
+      </p:sp>
+      <p:sp>
+        <p:nvSpPr>
+          <p:cNvPr id="11" name="Rounded Rectangle 10"/>
+          <p:cNvSpPr/>
+          <p:nvPr/>
+        </p:nvSpPr>
+        <p:spPr>
+          <a:xfrm>
+            <a:off x="457200" y="5486400"/>
+            <a:ext cx="11247120" cy="1097280"/>
+          </a:xfrm>
+          <a:prstGeom prst="roundRect">
+            <a:avLst/>
+          </a:prstGeom>
+          <a:solidFill>
+            <a:srgbClr val="121222"/>
+          </a:solidFill>
+          <a:ln w="38100">
+            <a:solidFill>
+              <a:srgbClr val="0096D6"/>
+            </a:solidFill>
+          </a:ln>
+        </p:spPr>
+        <p:style>
+          <a:lnRef idx="1">
+            <a:schemeClr val="accent1"/>
+          </a:lnRef>
+          <a:fillRef idx="3">
+            <a:schemeClr val="accent1"/>
+          </a:fillRef>
+          <a:effectRef idx="2">
+            <a:schemeClr val="accent1"/>
+          </a:effectRef>
+          <a:fontRef idx="minor">
+            <a:schemeClr val="lt1"/>
+          </a:fontRef>
+        </p:style>
+        <p:txBody>
+          <a:bodyPr rtlCol="0" anchor="ctr"/>
+          <a:lstStyle/>
+          <a:p>
+            <a:pPr algn="ctr"/>
+          </a:p>
+        </p:txBody>
+      </p:sp>
+      <p:sp>
+        <p:nvSpPr>
+          <p:cNvPr id="12" name="TextBox 11"/>
           <p:cNvSpPr txBox="1"/>
           <p:nvPr/>
         </p:nvSpPr>
         <p:spPr>
           <a:xfrm>
-            <a:off x="6492240" y="2240280"/>
-            <a:ext cx="5120640" cy="777240"/>
+            <a:off x="640080" y="5623560"/>
+            <a:ext cx="10881360" cy="822960"/>
           </a:xfrm>
           <a:prstGeom prst="rect">
             <a:avLst/>
@@ -6346,44 +6356,8 @@
           </a:bodyPr>
           <a:lstStyle/>
           <a:p>
-            <a:pPr algn="l">
-              <a:defRPr sz="1100" b="0">
-                <a:solidFill>
-                  <a:srgbClr val="BDBDBD"/>
-                </a:solidFill>
-                <a:latin typeface="Calibri"/>
-              </a:defRPr>
-            </a:pPr>
-            <a:r>
-              <a:t>5-node cluster (1 control plane @ 12 GiB + 4 uniform 4-GiB workers, 10 vCPU, 28 GiB). Larger clusters may show different placement effects.</a:t>
-            </a:r>
-          </a:p>
-        </p:txBody>
-      </p:sp>
-      <p:sp>
-        <p:nvSpPr>
-          <p:cNvPr id="18" name="TextBox 17"/>
-          <p:cNvSpPr txBox="1"/>
-          <p:nvPr/>
-        </p:nvSpPr>
-        <p:spPr>
-          <a:xfrm>
-            <a:off x="6492240" y="3108960"/>
-            <a:ext cx="5120640" cy="274320"/>
-          </a:xfrm>
-          <a:prstGeom prst="rect">
-            <a:avLst/>
-          </a:prstGeom>
-          <a:noFill/>
-        </p:spPr>
-        <p:txBody>
-          <a:bodyPr wrap="square">
-            <a:spAutoFit/>
-          </a:bodyPr>
-          <a:lstStyle/>
-          <a:p>
-            <a:pPr algn="l">
-              <a:defRPr sz="1300" b="1">
+            <a:pPr algn="ctr">
+              <a:defRPr sz="1200" b="1">
                 <a:solidFill>
                   <a:srgbClr val="FFFFFF"/>
                 </a:solidFill>
@@ -6391,187 +6365,7 @@
               </a:defRPr>
             </a:pPr>
             <a:r>
-              <a:t>Fault types</a:t>
-            </a:r>
-          </a:p>
-        </p:txBody>
-      </p:sp>
-      <p:sp>
-        <p:nvSpPr>
-          <p:cNvPr id="19" name="TextBox 18"/>
-          <p:cNvSpPr txBox="1"/>
-          <p:nvPr/>
-        </p:nvSpPr>
-        <p:spPr>
-          <a:xfrm>
-            <a:off x="6492240" y="3429000"/>
-            <a:ext cx="5120640" cy="777240"/>
-          </a:xfrm>
-          <a:prstGeom prst="rect">
-            <a:avLst/>
-          </a:prstGeom>
-          <a:noFill/>
-        </p:spPr>
-        <p:txBody>
-          <a:bodyPr wrap="square">
-            <a:spAutoFit/>
-          </a:bodyPr>
-          <a:lstStyle/>
-          <a:p>
-            <a:pPr algn="l">
-              <a:defRPr sz="1100" b="0">
-                <a:solidFill>
-                  <a:srgbClr val="BDBDBD"/>
-                </a:solidFill>
-                <a:latin typeface="Calibri"/>
-              </a:defRPr>
-            </a:pPr>
-            <a:r>
-              <a:t>Only pod-delete and pod-cpu-hog tested. Network partitions, disk faults, and memory pressure may reveal different strategy rankings.</a:t>
-            </a:r>
-          </a:p>
-        </p:txBody>
-      </p:sp>
-      <p:sp>
-        <p:nvSpPr>
-          <p:cNvPr id="20" name="TextBox 19"/>
-          <p:cNvSpPr txBox="1"/>
-          <p:nvPr/>
-        </p:nvSpPr>
-        <p:spPr>
-          <a:xfrm>
-            <a:off x="6492240" y="4297680"/>
-            <a:ext cx="5120640" cy="274320"/>
-          </a:xfrm>
-          <a:prstGeom prst="rect">
-            <a:avLst/>
-          </a:prstGeom>
-          <a:noFill/>
-        </p:spPr>
-        <p:txBody>
-          <a:bodyPr wrap="square">
-            <a:spAutoFit/>
-          </a:bodyPr>
-          <a:lstStyle/>
-          <a:p>
-            <a:pPr algn="l">
-              <a:defRPr sz="1300" b="1">
-                <a:solidFill>
-                  <a:srgbClr val="FFFFFF"/>
-                </a:solidFill>
-                <a:latin typeface="Calibri"/>
-              </a:defRPr>
-            </a:pPr>
-            <a:r>
-              <a:t>Traffic pattern</a:t>
-            </a:r>
-          </a:p>
-        </p:txBody>
-      </p:sp>
-      <p:sp>
-        <p:nvSpPr>
-          <p:cNvPr id="21" name="TextBox 20"/>
-          <p:cNvSpPr txBox="1"/>
-          <p:nvPr/>
-        </p:nvSpPr>
-        <p:spPr>
-          <a:xfrm>
-            <a:off x="6492240" y="4617720"/>
-            <a:ext cx="5120640" cy="777240"/>
-          </a:xfrm>
-          <a:prstGeom prst="rect">
-            <a:avLst/>
-          </a:prstGeom>
-          <a:noFill/>
-        </p:spPr>
-        <p:txBody>
-          <a:bodyPr wrap="square">
-            <a:spAutoFit/>
-          </a:bodyPr>
-          <a:lstStyle/>
-          <a:p>
-            <a:pPr algn="l">
-              <a:defRPr sz="1100" b="0">
-                <a:solidFill>
-                  <a:srgbClr val="BDBDBD"/>
-                </a:solidFill>
-                <a:latin typeface="Calibri"/>
-              </a:defRPr>
-            </a:pPr>
-            <a:r>
-              <a:t>Steady-state load (50 users, 10/s). Bursty, ramping, or production-like traffic patterns may affect results differently.</a:t>
-            </a:r>
-          </a:p>
-        </p:txBody>
-      </p:sp>
-      <p:sp>
-        <p:nvSpPr>
-          <p:cNvPr id="22" name="TextBox 21"/>
-          <p:cNvSpPr txBox="1"/>
-          <p:nvPr/>
-        </p:nvSpPr>
-        <p:spPr>
-          <a:xfrm>
-            <a:off x="6492240" y="5486400"/>
-            <a:ext cx="5120640" cy="274320"/>
-          </a:xfrm>
-          <a:prstGeom prst="rect">
-            <a:avLst/>
-          </a:prstGeom>
-          <a:noFill/>
-        </p:spPr>
-        <p:txBody>
-          <a:bodyPr wrap="square">
-            <a:spAutoFit/>
-          </a:bodyPr>
-          <a:lstStyle/>
-          <a:p>
-            <a:pPr algn="l">
-              <a:defRPr sz="1300" b="1">
-                <a:solidFill>
-                  <a:srgbClr val="FFFFFF"/>
-                </a:solidFill>
-                <a:latin typeface="Calibri"/>
-              </a:defRPr>
-            </a:pPr>
-            <a:r>
-              <a:t>Metric portability</a:t>
-            </a:r>
-          </a:p>
-        </p:txBody>
-      </p:sp>
-      <p:sp>
-        <p:nvSpPr>
-          <p:cNvPr id="23" name="TextBox 22"/>
-          <p:cNvSpPr txBox="1"/>
-          <p:nvPr/>
-        </p:nvSpPr>
-        <p:spPr>
-          <a:xfrm>
-            <a:off x="6492240" y="5806440"/>
-            <a:ext cx="5120640" cy="777240"/>
-          </a:xfrm>
-          <a:prstGeom prst="rect">
-            <a:avLst/>
-          </a:prstGeom>
-          <a:noFill/>
-        </p:spPr>
-        <p:txBody>
-          <a:bodyPr wrap="square">
-            <a:spAutoFit/>
-          </a:bodyPr>
-          <a:lstStyle/>
-          <a:p>
-            <a:pPr algn="l">
-              <a:defRPr sz="1100" b="0">
-                <a:solidFill>
-                  <a:srgbClr val="BDBDBD"/>
-                </a:solidFill>
-                <a:latin typeface="Calibri"/>
-              </a:defRPr>
-            </a:pPr>
-            <a:r>
-              <a:t>PSI requires cgroup-v2, Felix requires Calico, etcd_debugging_* is K8s-version-fragile. metricAvailability surfaces which metrics were collected per run.</a:t>
+              <a:t>The same co-location that wins H5's latency loses H6's availability. Placement is not 'good' or 'bad' — it trades a measured east-west latency benefit against a measured node-failure blast radius, and both faces are computable from the dependency graph before any chaos.</a:t>
             </a:r>
           </a:p>
         </p:txBody>
@@ -6633,7 +6427,7 @@
               </a:defRPr>
             </a:pPr>
             <a:r>
-              <a:t>Conclusion &amp; Future Work</a:t>
+              <a:t>Negative Findings — Why the Obvious Experiments Are Wrong</a:t>
             </a:r>
           </a:p>
         </p:txBody>
@@ -6689,8 +6483,8 @@
         </p:nvSpPr>
         <p:spPr>
           <a:xfrm>
-            <a:off x="457200" y="1371600"/>
-            <a:ext cx="5303520" cy="2926080"/>
+            <a:off x="457200" y="1280160"/>
+            <a:ext cx="5486400" cy="2377440"/>
           </a:xfrm>
           <a:prstGeom prst="roundRect">
             <a:avLst/>
@@ -6698,9 +6492,9 @@
           <a:solidFill>
             <a:srgbClr val="121222"/>
           </a:solidFill>
-          <a:ln w="12700">
+          <a:ln w="25400">
             <a:solidFill>
-              <a:srgbClr val="2ECC71"/>
+              <a:srgbClr val="E74C3C"/>
             </a:solidFill>
           </a:ln>
         </p:spPr>
@@ -6734,8 +6528,8 @@
         </p:nvSpPr>
         <p:spPr>
           <a:xfrm>
-            <a:off x="640080" y="1371600"/>
-            <a:ext cx="4937760" cy="320040"/>
+            <a:off x="640080" y="1325880"/>
+            <a:ext cx="5120640" cy="274320"/>
           </a:xfrm>
           <a:prstGeom prst="rect">
             <a:avLst/>
@@ -6749,15 +6543,15 @@
           <a:lstStyle/>
           <a:p>
             <a:pPr algn="l">
-              <a:defRPr sz="1800" b="1">
-                <a:solidFill>
-                  <a:srgbClr val="2ECC71"/>
-                </a:solidFill>
-                <a:latin typeface="Calibri"/>
-              </a:defRPr>
-            </a:pPr>
-            <a:r>
-              <a:t>Contributions</a:t>
+              <a:defRPr sz="1400" b="1">
+                <a:solidFill>
+                  <a:srgbClr val="E74C3C"/>
+                </a:solidFill>
+                <a:latin typeface="Calibri"/>
+              </a:defRPr>
+            </a:pPr>
+            <a:r>
+              <a:t>Hog faults are absorbed, not felt</a:t>
             </a:r>
           </a:p>
         </p:txBody>
@@ -6770,8 +6564,8 @@
         </p:nvSpPr>
         <p:spPr>
           <a:xfrm>
-            <a:off x="640080" y="1783080"/>
-            <a:ext cx="4937760" cy="2377440"/>
+            <a:off x="640080" y="1691640"/>
+            <a:ext cx="5120640" cy="1828800"/>
           </a:xfrm>
           <a:prstGeom prst="rect">
             <a:avLst/>
@@ -6791,7 +6585,7 @@
               <a:spcAft>
                 <a:spcPts val="200"/>
               </a:spcAft>
-              <a:defRPr sz="1200">
+              <a:defRPr sz="1000">
                 <a:solidFill>
                   <a:srgbClr val="BDBDBD"/>
                 </a:solidFill>
@@ -6799,11 +6593,11 @@
               </a:defRPr>
             </a:pPr>
             <a:r>
-              <a:t>• ChaosProbe framework: automated placement-</a:t>
+              <a:t>• pod-cpu-hog: CFS-capped at the 200m container</a:t>
             </a:r>
             <a:br/>
             <a:r>
-              <a:t>  aware chaos testing for Kubernetes</a:t>
+              <a:t>  limit — the hog throttles itself, not the app</a:t>
             </a:r>
           </a:p>
           <a:p>
@@ -6814,7 +6608,7 @@
               <a:spcAft>
                 <a:spcPts val="200"/>
               </a:spcAft>
-              <a:defRPr sz="1200">
+              <a:defRPr sz="1000">
                 <a:solidFill>
                   <a:srgbClr val="BDBDBD"/>
                 </a:solidFill>
@@ -6822,11 +6616,11 @@
               </a:defRPr>
             </a:pPr>
             <a:r>
-              <a:t>• Systematic evaluation of 6 placement strategies</a:t>
+              <a:t>• node-cpu-hog: loads the node, but CPU requests</a:t>
             </a:r>
             <a:br/>
             <a:r>
-              <a:t>  under 2 fault types across 4 metric dimensions</a:t>
+              <a:t>  keep the light app pods responsive</a:t>
             </a:r>
           </a:p>
           <a:p>
@@ -6837,7 +6631,7 @@
               <a:spcAft>
                 <a:spcPts val="200"/>
               </a:spcAft>
-              <a:defRPr sz="1200">
+              <a:defRPr sz="1000">
                 <a:solidFill>
                   <a:srgbClr val="BDBDBD"/>
                 </a:solidFill>
@@ -6845,11 +6639,11 @@
               </a:defRPr>
             </a:pPr>
             <a:r>
-              <a:t>• Neo4j graph storage preserving causal</a:t>
+              <a:t>• Both scored 100 with the app fully up — the</a:t>
             </a:r>
             <a:br/>
             <a:r>
-              <a:t>  relationships for topology-aware analysis</a:t>
+              <a:t>  'obvious' contention experiments measure nothing</a:t>
             </a:r>
           </a:p>
           <a:p>
@@ -6860,7 +6654,7 @@
               <a:spcAft>
                 <a:spcPts val="200"/>
               </a:spcAft>
-              <a:defRPr sz="1200">
+              <a:defRPr sz="1000">
                 <a:solidFill>
                   <a:srgbClr val="BDBDBD"/>
                 </a:solidFill>
@@ -6868,11 +6662,11 @@
               </a:defRPr>
             </a:pPr>
             <a:r>
-              <a:t>• Reproducible methodology: seeded randomness,</a:t>
+              <a:t>• Contention only bites when the app is genuinely</a:t>
             </a:r>
             <a:br/>
             <a:r>
-              <a:t>  exact configs, automated comparison pipeline</a:t>
+              <a:t>  resource-bound — i.e. under load (H4)</a:t>
             </a:r>
           </a:p>
         </p:txBody>
@@ -6885,8 +6679,8 @@
         </p:nvSpPr>
         <p:spPr>
           <a:xfrm>
-            <a:off x="6217920" y="1371600"/>
-            <a:ext cx="5303520" cy="2926080"/>
+            <a:off x="6217920" y="1280160"/>
+            <a:ext cx="5486400" cy="2377440"/>
           </a:xfrm>
           <a:prstGeom prst="roundRect">
             <a:avLst/>
@@ -6894,9 +6688,9 @@
           <a:solidFill>
             <a:srgbClr val="121222"/>
           </a:solidFill>
-          <a:ln w="12700">
+          <a:ln w="25400">
             <a:solidFill>
-              <a:srgbClr val="0096D6"/>
+              <a:srgbClr val="F39C12"/>
             </a:solidFill>
           </a:ln>
         </p:spPr>
@@ -6930,8 +6724,8 @@
         </p:nvSpPr>
         <p:spPr>
           <a:xfrm>
-            <a:off x="6400800" y="1371600"/>
-            <a:ext cx="4937760" cy="320040"/>
+            <a:off x="6400800" y="1325880"/>
+            <a:ext cx="5120640" cy="274320"/>
           </a:xfrm>
           <a:prstGeom prst="rect">
             <a:avLst/>
@@ -6945,15 +6739,15 @@
           <a:lstStyle/>
           <a:p>
             <a:pPr algn="l">
-              <a:defRPr sz="1800" b="1">
-                <a:solidFill>
-                  <a:srgbClr val="0096D6"/>
-                </a:solidFill>
-                <a:latin typeface="Calibri"/>
-              </a:defRPr>
-            </a:pPr>
-            <a:r>
-              <a:t>Key Findings</a:t>
+              <a:defRPr sz="1400" b="1">
+                <a:solidFill>
+                  <a:srgbClr val="F39C12"/>
+                </a:solidFill>
+                <a:latin typeface="Calibri"/>
+              </a:defRPr>
+            </a:pPr>
+            <a:r>
+              <a:t>node-memory-hog evicts itself first</a:t>
             </a:r>
           </a:p>
         </p:txBody>
@@ -6966,8 +6760,8 @@
         </p:nvSpPr>
         <p:spPr>
           <a:xfrm>
-            <a:off x="6400800" y="1783080"/>
-            <a:ext cx="4937760" cy="2377440"/>
+            <a:off x="6400800" y="1691640"/>
+            <a:ext cx="5120640" cy="1828800"/>
           </a:xfrm>
           <a:prstGeom prst="rect">
             <a:avLst/>
@@ -6987,7 +6781,7 @@
               <a:spcAft>
                 <a:spcPts val="200"/>
               </a:spcAft>
-              <a:defRPr sz="1200">
+              <a:defRPr sz="1000">
                 <a:solidFill>
                   <a:srgbClr val="BDBDBD"/>
                 </a:solidFill>
@@ -6995,11 +6789,15 @@
               </a:defRPr>
             </a:pPr>
             <a:r>
-              <a:t>• Aggregate resilience score is NOT</a:t>
+              <a:t>• On 4 GiB workers, the kubelet evicts the</a:t>
             </a:r>
             <a:br/>
             <a:r>
-              <a:t>  reproducible (strategy spans 33–89/13 runs)</a:t>
+              <a:t>  LitmusChaos helper pod before any app pod</a:t>
+            </a:r>
+            <a:br/>
+            <a:r>
+              <a:t>  feels memory pressure</a:t>
             </a:r>
           </a:p>
           <a:p>
@@ -7010,7 +6808,7 @@
               <a:spcAft>
                 <a:spcPts val="200"/>
               </a:spcAft>
-              <a:defRPr sz="1200">
+              <a:defRPr sz="1000">
                 <a:solidFill>
                   <a:srgbClr val="BDBDBD"/>
                 </a:solidFill>
@@ -7018,11 +6816,11 @@
               </a:defRPr>
             </a:pPr>
             <a:r>
-              <a:t>• But the mechanism layer IS: conntrack flush</a:t>
+              <a:t>• The experiment kills its own instrument, not</a:t>
             </a:r>
             <a:br/>
             <a:r>
-              <a:t>  (spread≫colocate, 12/12) + throttling (11/13)</a:t>
+              <a:t>  the application (LitmusChaos issue #3397)</a:t>
             </a:r>
           </a:p>
           <a:p>
@@ -7033,7 +6831,7 @@
               <a:spcAft>
                 <a:spcPts val="200"/>
               </a:spcAft>
-              <a:defRPr sz="1200">
+              <a:defRPr sz="1000">
                 <a:solidFill>
                   <a:srgbClr val="BDBDBD"/>
                 </a:solidFill>
@@ -7041,34 +6839,15 @@
               </a:defRPr>
             </a:pPr>
             <a:r>
-              <a:t>• Mechanism: pod-delete is churn-based, not</a:t>
+              <a:t>• Negative findings like these bound the fault</a:t>
             </a:r>
             <a:br/>
             <a:r>
-              <a:t>  contention — co-location keeps paths local</a:t>
-            </a:r>
-          </a:p>
-          <a:p>
-            <a:pPr>
-              <a:spcBef>
-                <a:spcPts val="200"/>
-              </a:spcBef>
-              <a:spcAft>
-                <a:spcPts val="200"/>
-              </a:spcAft>
-              <a:defRPr sz="1200">
-                <a:solidFill>
-                  <a:srgbClr val="BDBDBD"/>
-                </a:solidFill>
-                <a:latin typeface="Calibri"/>
-              </a:defRPr>
-            </a:pPr>
-            <a:r>
-              <a:t>• Recovery's d2s/s2r split is unstable run-to-run,</a:t>
+              <a:t>  taxonomy: they tell you which experiments</a:t>
             </a:r>
             <a:br/>
             <a:r>
-              <a:t>  so it can't predict the outcome</a:t>
+              <a:t>  measure the app and which measure the harness</a:t>
             </a:r>
           </a:p>
         </p:txBody>
@@ -7081,8 +6860,8 @@
         </p:nvSpPr>
         <p:spPr>
           <a:xfrm>
-            <a:off x="457200" y="4480560"/>
-            <a:ext cx="11064240" cy="1463040"/>
+            <a:off x="457200" y="3931920"/>
+            <a:ext cx="11247120" cy="2651760"/>
           </a:xfrm>
           <a:prstGeom prst="roundRect">
             <a:avLst/>
@@ -7090,9 +6869,9 @@
           <a:solidFill>
             <a:srgbClr val="121222"/>
           </a:solidFill>
-          <a:ln w="12700">
+          <a:ln w="25400">
             <a:solidFill>
-              <a:srgbClr val="F39C12"/>
+              <a:srgbClr val="0096D6"/>
             </a:solidFill>
           </a:ln>
         </p:spPr>
@@ -7126,8 +6905,8 @@
         </p:nvSpPr>
         <p:spPr>
           <a:xfrm>
-            <a:off x="640080" y="4480560"/>
-            <a:ext cx="10698480" cy="320040"/>
+            <a:off x="640080" y="3977639"/>
+            <a:ext cx="10881360" cy="274320"/>
           </a:xfrm>
           <a:prstGeom prst="rect">
             <a:avLst/>
@@ -7141,216 +6920,38 @@
           <a:lstStyle/>
           <a:p>
             <a:pPr algn="l">
-              <a:defRPr sz="1600" b="1">
-                <a:solidFill>
-                  <a:srgbClr val="F39C12"/>
-                </a:solidFill>
-                <a:latin typeface="Calibri"/>
-              </a:defRPr>
-            </a:pPr>
-            <a:r>
-              <a:t>Future Work</a:t>
-            </a:r>
-          </a:p>
-        </p:txBody>
-      </p:sp>
-      <p:sp>
-        <p:nvSpPr>
-          <p:cNvPr id="12" name="TextBox 11"/>
-          <p:cNvSpPr txBox="1"/>
-          <p:nvPr/>
-        </p:nvSpPr>
-        <p:spPr>
-          <a:xfrm>
-            <a:off x="640080" y="4846320"/>
-            <a:ext cx="5120640" cy="1051560"/>
-          </a:xfrm>
-          <a:prstGeom prst="rect">
-            <a:avLst/>
-          </a:prstGeom>
-          <a:noFill/>
-        </p:spPr>
-        <p:txBody>
-          <a:bodyPr wrap="square">
-            <a:spAutoFit/>
-          </a:bodyPr>
-          <a:lstStyle/>
-          <a:p>
-            <a:pPr>
-              <a:spcBef>
-                <a:spcPts val="200"/>
-              </a:spcBef>
-              <a:spcAft>
-                <a:spcPts val="200"/>
-              </a:spcAft>
-              <a:defRPr sz="1100">
-                <a:solidFill>
-                  <a:srgbClr val="BDBDBD"/>
-                </a:solidFill>
-                <a:latin typeface="Calibri"/>
-              </a:defRPr>
-            </a:pPr>
-            <a:r>
-              <a:t>• Multi-replica services — does locality still win</a:t>
-            </a:r>
-            <a:br/>
-            <a:r>
-              <a:t>  when restart can happen on a peer pod?</a:t>
-            </a:r>
-          </a:p>
-          <a:p>
-            <a:pPr>
-              <a:spcBef>
-                <a:spcPts val="200"/>
-              </a:spcBef>
-              <a:spcAft>
-                <a:spcPts val="200"/>
-              </a:spcAft>
-              <a:defRPr sz="1100">
-                <a:solidFill>
-                  <a:srgbClr val="BDBDBD"/>
-                </a:solidFill>
-                <a:latin typeface="Calibri"/>
-              </a:defRPr>
-            </a:pPr>
-            <a:r>
-              <a:t>• Larger cluster (20+ nodes), production-like traffic</a:t>
-            </a:r>
-            <a:br/>
-            <a:r>
-              <a:t>  &amp; service-mesh instrumentation (Istio/Linkerd)</a:t>
-            </a:r>
-          </a:p>
-          <a:p>
-            <a:pPr>
-              <a:spcBef>
-                <a:spcPts val="200"/>
-              </a:spcBef>
-              <a:spcAft>
-                <a:spcPts val="200"/>
-              </a:spcAft>
-              <a:defRPr sz="1100">
-                <a:solidFill>
-                  <a:srgbClr val="BDBDBD"/>
-                </a:solidFill>
-                <a:latin typeface="Calibri"/>
-              </a:defRPr>
-            </a:pPr>
-            <a:r>
-              <a:t>• Memory- and network-fault classes beyond CPU</a:t>
-            </a:r>
-          </a:p>
-        </p:txBody>
-      </p:sp>
-      <p:sp>
-        <p:nvSpPr>
-          <p:cNvPr id="13" name="TextBox 12"/>
-          <p:cNvSpPr txBox="1"/>
-          <p:nvPr/>
-        </p:nvSpPr>
-        <p:spPr>
-          <a:xfrm>
-            <a:off x="6126480" y="4846320"/>
-            <a:ext cx="5212080" cy="1051560"/>
-          </a:xfrm>
-          <a:prstGeom prst="rect">
-            <a:avLst/>
-          </a:prstGeom>
-          <a:noFill/>
-        </p:spPr>
-        <p:txBody>
-          <a:bodyPr wrap="square">
-            <a:spAutoFit/>
-          </a:bodyPr>
-          <a:lstStyle/>
-          <a:p>
-            <a:pPr>
-              <a:spcBef>
-                <a:spcPts val="200"/>
-              </a:spcBef>
-              <a:spcAft>
-                <a:spcPts val="200"/>
-              </a:spcAft>
-              <a:defRPr sz="1100">
-                <a:solidFill>
-                  <a:srgbClr val="BDBDBD"/>
-                </a:solidFill>
-                <a:latin typeface="Calibri"/>
-              </a:defRPr>
-            </a:pPr>
-            <a:r>
-              <a:t>• Per-fault-class placement guidance — choose strategy</a:t>
-            </a:r>
-            <a:br/>
-            <a:r>
-              <a:t>  by expected fault type, not by general 'best practice'</a:t>
-            </a:r>
-          </a:p>
-          <a:p>
-            <a:pPr>
-              <a:spcBef>
-                <a:spcPts val="200"/>
-              </a:spcBef>
-              <a:spcAft>
-                <a:spcPts val="200"/>
-              </a:spcAft>
-              <a:defRPr sz="1100">
-                <a:solidFill>
-                  <a:srgbClr val="BDBDBD"/>
-                </a:solidFill>
-                <a:latin typeface="Calibri"/>
-              </a:defRPr>
-            </a:pPr>
-            <a:r>
-              <a:t>• ML-based anomaly detection on collected dataset</a:t>
-            </a:r>
-            <a:br/>
-            <a:r>
-              <a:t>  (the Neo4j store is already structured for it)</a:t>
-            </a:r>
-          </a:p>
-          <a:p>
-            <a:pPr>
-              <a:spcBef>
-                <a:spcPts val="200"/>
-              </a:spcBef>
-              <a:spcAft>
-                <a:spcPts val="200"/>
-              </a:spcAft>
-              <a:defRPr sz="1100">
-                <a:solidFill>
-                  <a:srgbClr val="BDBDBD"/>
-                </a:solidFill>
-                <a:latin typeface="Calibri"/>
-              </a:defRPr>
-            </a:pPr>
-            <a:r>
-              <a:t>• Per-fault-class extensions to Borg / Medea schedulers</a:t>
-            </a:r>
-          </a:p>
-        </p:txBody>
-      </p:sp>
-      <p:sp>
-        <p:nvSpPr>
-          <p:cNvPr id="14" name="Rounded Rectangle 13"/>
+              <a:defRPr sz="1400" b="1">
+                <a:solidFill>
+                  <a:srgbClr val="0096D6"/>
+                </a:solidFill>
+                <a:latin typeface="Calibri"/>
+              </a:defRPr>
+            </a:pPr>
+            <a:r>
+              <a:t>Literature predictions L1–L3 — inapplicable in this regime, not refuted</a:t>
+            </a:r>
+          </a:p>
+        </p:txBody>
+      </p:sp>
+      <p:sp>
+        <p:nvSpPr>
+          <p:cNvPr id="12" name="Rounded Rectangle 11"/>
           <p:cNvSpPr/>
           <p:nvPr/>
         </p:nvSpPr>
         <p:spPr>
           <a:xfrm>
-            <a:off x="457200" y="6126480"/>
-            <a:ext cx="11064240" cy="640080"/>
+            <a:off x="640080" y="4343400"/>
+            <a:ext cx="502920" cy="411480"/>
           </a:xfrm>
           <a:prstGeom prst="roundRect">
             <a:avLst/>
           </a:prstGeom>
           <a:solidFill>
-            <a:srgbClr val="121222"/>
+            <a:srgbClr val="0096D6"/>
           </a:solidFill>
-          <a:ln w="38100">
-            <a:solidFill>
-              <a:srgbClr val="0096D6"/>
-            </a:solidFill>
+          <a:ln>
+            <a:noFill/>
           </a:ln>
         </p:spPr>
         <p:style>
@@ -7368,23 +6969,33 @@
           </a:fontRef>
         </p:style>
         <p:txBody>
-          <a:bodyPr rtlCol="0" anchor="ctr"/>
-          <a:lstStyle/>
-          <a:p>
-            <a:pPr algn="ctr"/>
-          </a:p>
-        </p:txBody>
-      </p:sp>
-      <p:sp>
-        <p:nvSpPr>
-          <p:cNvPr id="15" name="TextBox 14"/>
+          <a:bodyPr rtlCol="0" anchor="ctr" wrap="square" lIns="50800" rIns="50800" tIns="25400" bIns="25400"/>
+          <a:lstStyle/>
+          <a:p>
+            <a:pPr algn="ctr">
+              <a:defRPr sz="1200" b="1">
+                <a:solidFill>
+                  <a:srgbClr val="FFFFFF"/>
+                </a:solidFill>
+                <a:latin typeface="Calibri"/>
+              </a:defRPr>
+            </a:pPr>
+            <a:r>
+              <a:t>L1</a:t>
+            </a:r>
+          </a:p>
+        </p:txBody>
+      </p:sp>
+      <p:sp>
+        <p:nvSpPr>
+          <p:cNvPr id="13" name="TextBox 12"/>
           <p:cNvSpPr txBox="1"/>
           <p:nvPr/>
         </p:nvSpPr>
         <p:spPr>
           <a:xfrm>
-            <a:off x="640080" y="6172200"/>
-            <a:ext cx="10698480" cy="548640"/>
+            <a:off x="1234440" y="4343400"/>
+            <a:ext cx="3017520" cy="457200"/>
           </a:xfrm>
           <a:prstGeom prst="rect">
             <a:avLst/>
@@ -7397,8 +7008,105 @@
           </a:bodyPr>
           <a:lstStyle/>
           <a:p>
+            <a:pPr algn="l">
+              <a:defRPr sz="1100" b="1">
+                <a:solidFill>
+                  <a:srgbClr val="FFFFFF"/>
+                </a:solidFill>
+                <a:latin typeface="Calibri"/>
+              </a:defRPr>
+            </a:pPr>
+            <a:r>
+              <a:t>Colocate is the worst placement</a:t>
+            </a:r>
+          </a:p>
+        </p:txBody>
+      </p:sp>
+      <p:sp>
+        <p:nvSpPr>
+          <p:cNvPr id="14" name="TextBox 13"/>
+          <p:cNvSpPr txBox="1"/>
+          <p:nvPr/>
+        </p:nvSpPr>
+        <p:spPr>
+          <a:xfrm>
+            <a:off x="640080" y="4892040"/>
+            <a:ext cx="3520440" cy="1188720"/>
+          </a:xfrm>
+          <a:prstGeom prst="rect">
+            <a:avLst/>
+          </a:prstGeom>
+          <a:noFill/>
+        </p:spPr>
+        <p:txBody>
+          <a:bodyPr wrap="square">
+            <a:spAutoFit/>
+          </a:bodyPr>
+          <a:lstStyle/>
+          <a:p>
+            <a:pPr algn="l">
+              <a:defRPr sz="1000" b="0">
+                <a:solidFill>
+                  <a:srgbClr val="BDBDBD"/>
+                </a:solidFill>
+                <a:latin typeface="Calibri"/>
+              </a:defRPr>
+            </a:pPr>
+            <a:r>
+              <a:t>The score cannot adjudicate it (H1), and the churn</a:t>
+            </a:r>
+            <a:br/>
+            <a:r>
+              <a:t>mechanism points the other way: colocate flushes</a:t>
+            </a:r>
+            <a:br/>
+            <a:r>
+              <a:t>the least conntrack state and throttles least.</a:t>
+            </a:r>
+          </a:p>
+        </p:txBody>
+      </p:sp>
+      <p:sp>
+        <p:nvSpPr>
+          <p:cNvPr id="15" name="Rounded Rectangle 14"/>
+          <p:cNvSpPr/>
+          <p:nvPr/>
+        </p:nvSpPr>
+        <p:spPr>
+          <a:xfrm>
+            <a:off x="4343400" y="4343400"/>
+            <a:ext cx="502920" cy="411480"/>
+          </a:xfrm>
+          <a:prstGeom prst="roundRect">
+            <a:avLst/>
+          </a:prstGeom>
+          <a:solidFill>
+            <a:srgbClr val="0096D6"/>
+          </a:solidFill>
+          <a:ln>
+            <a:noFill/>
+          </a:ln>
+        </p:spPr>
+        <p:style>
+          <a:lnRef idx="1">
+            <a:schemeClr val="accent1"/>
+          </a:lnRef>
+          <a:fillRef idx="3">
+            <a:schemeClr val="accent1"/>
+          </a:fillRef>
+          <a:effectRef idx="2">
+            <a:schemeClr val="accent1"/>
+          </a:effectRef>
+          <a:fontRef idx="minor">
+            <a:schemeClr val="lt1"/>
+          </a:fontRef>
+        </p:style>
+        <p:txBody>
+          <a:bodyPr rtlCol="0" anchor="ctr" wrap="square" lIns="50800" rIns="50800" tIns="25400" bIns="25400"/>
+          <a:lstStyle/>
+          <a:p>
             <a:pPr algn="ctr">
-              <a:defRPr sz="1400" b="1">
+              <a:defRPr sz="1200" b="1">
                 <a:solidFill>
                   <a:srgbClr val="FFFFFF"/>
                 </a:solidFill>
@@ -7406,7 +7114,256 @@
               </a:defRPr>
             </a:pPr>
             <a:r>
-              <a:t>Placement-vs-resilience intuition from the literature is fault-class-specific. Under churn-based faults (pod-delete), co-location wins because it minimises cross-node disruption during the kill cycle.</a:t>
+              <a:t>L2</a:t>
+            </a:r>
+          </a:p>
+        </p:txBody>
+      </p:sp>
+      <p:sp>
+        <p:nvSpPr>
+          <p:cNvPr id="16" name="TextBox 15"/>
+          <p:cNvSpPr txBox="1"/>
+          <p:nvPr/>
+        </p:nvSpPr>
+        <p:spPr>
+          <a:xfrm>
+            <a:off x="4937760" y="4343400"/>
+            <a:ext cx="3017520" cy="457200"/>
+          </a:xfrm>
+          <a:prstGeom prst="rect">
+            <a:avLst/>
+          </a:prstGeom>
+          <a:noFill/>
+        </p:spPr>
+        <p:txBody>
+          <a:bodyPr wrap="square">
+            <a:spAutoFit/>
+          </a:bodyPr>
+          <a:lstStyle/>
+          <a:p>
+            <a:pPr algn="l">
+              <a:defRPr sz="1100" b="1">
+                <a:solidFill>
+                  <a:srgbClr val="FFFFFF"/>
+                </a:solidFill>
+                <a:latin typeface="Calibri"/>
+              </a:defRPr>
+            </a:pPr>
+            <a:r>
+              <a:t>Spread isolates faults best</a:t>
+            </a:r>
+          </a:p>
+        </p:txBody>
+      </p:sp>
+      <p:sp>
+        <p:nvSpPr>
+          <p:cNvPr id="17" name="TextBox 16"/>
+          <p:cNvSpPr txBox="1"/>
+          <p:nvPr/>
+        </p:nvSpPr>
+        <p:spPr>
+          <a:xfrm>
+            <a:off x="4343400" y="4892040"/>
+            <a:ext cx="3520440" cy="1188720"/>
+          </a:xfrm>
+          <a:prstGeom prst="rect">
+            <a:avLst/>
+          </a:prstGeom>
+          <a:noFill/>
+        </p:spPr>
+        <p:txBody>
+          <a:bodyPr wrap="square">
+            <a:spAutoFit/>
+          </a:bodyPr>
+          <a:lstStyle/>
+          <a:p>
+            <a:pPr algn="l">
+              <a:defRPr sz="1000" b="0">
+                <a:solidFill>
+                  <a:srgbClr val="BDBDBD"/>
+                </a:solidFill>
+                <a:latin typeface="Calibri"/>
+              </a:defRPr>
+            </a:pPr>
+            <a:r>
+              <a:t>Under churn, spreading maximises the cross-node</a:t>
+            </a:r>
+            <a:br/>
+            <a:r>
+              <a:t>flows the kill cycle tears down (H2) — and under</a:t>
+            </a:r>
+            <a:br/>
+            <a:r>
+              <a:t>node drain spread does win availability (H6).</a:t>
+            </a:r>
+          </a:p>
+        </p:txBody>
+      </p:sp>
+      <p:sp>
+        <p:nvSpPr>
+          <p:cNvPr id="18" name="Rounded Rectangle 17"/>
+          <p:cNvSpPr/>
+          <p:nvPr/>
+        </p:nvSpPr>
+        <p:spPr>
+          <a:xfrm>
+            <a:off x="8046719" y="4343400"/>
+            <a:ext cx="502920" cy="411480"/>
+          </a:xfrm>
+          <a:prstGeom prst="roundRect">
+            <a:avLst/>
+          </a:prstGeom>
+          <a:solidFill>
+            <a:srgbClr val="0096D6"/>
+          </a:solidFill>
+          <a:ln>
+            <a:noFill/>
+          </a:ln>
+        </p:spPr>
+        <p:style>
+          <a:lnRef idx="1">
+            <a:schemeClr val="accent1"/>
+          </a:lnRef>
+          <a:fillRef idx="3">
+            <a:schemeClr val="accent1"/>
+          </a:fillRef>
+          <a:effectRef idx="2">
+            <a:schemeClr val="accent1"/>
+          </a:effectRef>
+          <a:fontRef idx="minor">
+            <a:schemeClr val="lt1"/>
+          </a:fontRef>
+        </p:style>
+        <p:txBody>
+          <a:bodyPr rtlCol="0" anchor="ctr" wrap="square" lIns="50800" rIns="50800" tIns="25400" bIns="25400"/>
+          <a:lstStyle/>
+          <a:p>
+            <a:pPr algn="ctr">
+              <a:defRPr sz="1200" b="1">
+                <a:solidFill>
+                  <a:srgbClr val="FFFFFF"/>
+                </a:solidFill>
+                <a:latin typeface="Calibri"/>
+              </a:defRPr>
+            </a:pPr>
+            <a:r>
+              <a:t>L3</a:t>
+            </a:r>
+          </a:p>
+        </p:txBody>
+      </p:sp>
+      <p:sp>
+        <p:nvSpPr>
+          <p:cNvPr id="19" name="TextBox 18"/>
+          <p:cNvSpPr txBox="1"/>
+          <p:nvPr/>
+        </p:nvSpPr>
+        <p:spPr>
+          <a:xfrm>
+            <a:off x="8641080" y="4343400"/>
+            <a:ext cx="3017520" cy="457200"/>
+          </a:xfrm>
+          <a:prstGeom prst="rect">
+            <a:avLst/>
+          </a:prstGeom>
+          <a:noFill/>
+        </p:spPr>
+        <p:txBody>
+          <a:bodyPr wrap="square">
+            <a:spAutoFit/>
+          </a:bodyPr>
+          <a:lstStyle/>
+          <a:p>
+            <a:pPr algn="l">
+              <a:defRPr sz="1100" b="1">
+                <a:solidFill>
+                  <a:srgbClr val="FFFFFF"/>
+                </a:solidFill>
+                <a:latin typeface="Calibri"/>
+              </a:defRPr>
+            </a:pPr>
+            <a:r>
+              <a:t>Recovery time predicts resilience</a:t>
+            </a:r>
+          </a:p>
+        </p:txBody>
+      </p:sp>
+      <p:sp>
+        <p:nvSpPr>
+          <p:cNvPr id="20" name="TextBox 19"/>
+          <p:cNvSpPr txBox="1"/>
+          <p:nvPr/>
+        </p:nvSpPr>
+        <p:spPr>
+          <a:xfrm>
+            <a:off x="8046719" y="4892040"/>
+            <a:ext cx="3520440" cy="1188720"/>
+          </a:xfrm>
+          <a:prstGeom prst="rect">
+            <a:avLst/>
+          </a:prstGeom>
+          <a:noFill/>
+        </p:spPr>
+        <p:txBody>
+          <a:bodyPr wrap="square">
+            <a:spAutoFit/>
+          </a:bodyPr>
+          <a:lstStyle/>
+          <a:p>
+            <a:pPr algn="l">
+              <a:defRPr sz="1000" b="0">
+                <a:solidFill>
+                  <a:srgbClr val="BDBDBD"/>
+                </a:solidFill>
+                <a:latin typeface="Calibri"/>
+              </a:defRPr>
+            </a:pPr>
+            <a:r>
+              <a:t>The recovery decomposition (d2s/s2r) is unstable</a:t>
+            </a:r>
+            <a:br/>
+            <a:r>
+              <a:t>run-to-run and the score is too noisy to predict —</a:t>
+            </a:r>
+            <a:br/>
+            <a:r>
+              <a:t>no stable relationship on either side.</a:t>
+            </a:r>
+          </a:p>
+        </p:txBody>
+      </p:sp>
+      <p:sp>
+        <p:nvSpPr>
+          <p:cNvPr id="21" name="TextBox 20"/>
+          <p:cNvSpPr txBox="1"/>
+          <p:nvPr/>
+        </p:nvSpPr>
+        <p:spPr>
+          <a:xfrm>
+            <a:off x="640080" y="6172200"/>
+            <a:ext cx="10881360" cy="365760"/>
+          </a:xfrm>
+          <a:prstGeom prst="rect">
+            <a:avLst/>
+          </a:prstGeom>
+          <a:noFill/>
+        </p:spPr>
+        <p:txBody>
+          <a:bodyPr wrap="square">
+            <a:spAutoFit/>
+          </a:bodyPr>
+          <a:lstStyle/>
+          <a:p>
+            <a:pPr algn="l">
+              <a:defRPr sz="1000" b="0">
+                <a:solidFill>
+                  <a:srgbClr val="9090A0"/>
+                </a:solidFill>
+                <a:latin typeface="Calibri"/>
+              </a:defRPr>
+            </a:pPr>
+            <a:r>
+              <a:t>These predictions come from contention regimes the churn fault class never enters — they are inapplicable here, which is itself a fault-class-specific result, not a refutation of the literature.</a:t>
             </a:r>
           </a:p>
         </p:txBody>
@@ -7445,6 +7402,1704 @@
         </p:nvSpPr>
         <p:spPr>
           <a:xfrm>
+            <a:off x="548640" y="274320"/>
+            <a:ext cx="10972800" cy="640080"/>
+          </a:xfrm>
+          <a:prstGeom prst="rect">
+            <a:avLst/>
+          </a:prstGeom>
+          <a:noFill/>
+        </p:spPr>
+        <p:txBody>
+          <a:bodyPr wrap="square">
+            <a:spAutoFit/>
+          </a:bodyPr>
+          <a:lstStyle/>
+          <a:p>
+            <a:pPr algn="l">
+              <a:defRPr sz="3200" b="1">
+                <a:solidFill>
+                  <a:srgbClr val="FFFFFF"/>
+                </a:solidFill>
+                <a:latin typeface="Calibri"/>
+              </a:defRPr>
+            </a:pPr>
+            <a:r>
+              <a:t>Threats to Validity</a:t>
+            </a:r>
+          </a:p>
+        </p:txBody>
+      </p:sp>
+      <p:sp>
+        <p:nvSpPr>
+          <p:cNvPr id="3" name="Rectangle 2"/>
+          <p:cNvSpPr/>
+          <p:nvPr/>
+        </p:nvSpPr>
+        <p:spPr>
+          <a:xfrm>
+            <a:off x="548640" y="868680"/>
+            <a:ext cx="2743200" cy="38100"/>
+          </a:xfrm>
+          <a:prstGeom prst="rect">
+            <a:avLst/>
+          </a:prstGeom>
+          <a:solidFill>
+            <a:srgbClr val="0096D6"/>
+          </a:solidFill>
+          <a:ln>
+            <a:noFill/>
+          </a:ln>
+        </p:spPr>
+        <p:style>
+          <a:lnRef idx="1">
+            <a:schemeClr val="accent1"/>
+          </a:lnRef>
+          <a:fillRef idx="3">
+            <a:schemeClr val="accent1"/>
+          </a:fillRef>
+          <a:effectRef idx="2">
+            <a:schemeClr val="accent1"/>
+          </a:effectRef>
+          <a:fontRef idx="minor">
+            <a:schemeClr val="lt1"/>
+          </a:fontRef>
+        </p:style>
+        <p:txBody>
+          <a:bodyPr rtlCol="0" anchor="ctr"/>
+          <a:lstStyle/>
+          <a:p>
+            <a:pPr algn="ctr"/>
+          </a:p>
+        </p:txBody>
+      </p:sp>
+      <p:sp>
+        <p:nvSpPr>
+          <p:cNvPr id="4" name="Rounded Rectangle 3"/>
+          <p:cNvSpPr/>
+          <p:nvPr/>
+        </p:nvSpPr>
+        <p:spPr>
+          <a:xfrm>
+            <a:off x="457200" y="1371600"/>
+            <a:ext cx="5486400" cy="5029200"/>
+          </a:xfrm>
+          <a:prstGeom prst="roundRect">
+            <a:avLst/>
+          </a:prstGeom>
+          <a:solidFill>
+            <a:srgbClr val="121222"/>
+          </a:solidFill>
+          <a:ln w="25400">
+            <a:solidFill>
+              <a:srgbClr val="E74C3C"/>
+            </a:solidFill>
+          </a:ln>
+        </p:spPr>
+        <p:style>
+          <a:lnRef idx="1">
+            <a:schemeClr val="accent1"/>
+          </a:lnRef>
+          <a:fillRef idx="3">
+            <a:schemeClr val="accent1"/>
+          </a:fillRef>
+          <a:effectRef idx="2">
+            <a:schemeClr val="accent1"/>
+          </a:effectRef>
+          <a:fontRef idx="minor">
+            <a:schemeClr val="lt1"/>
+          </a:fontRef>
+        </p:style>
+        <p:txBody>
+          <a:bodyPr rtlCol="0" anchor="ctr"/>
+          <a:lstStyle/>
+          <a:p>
+            <a:pPr algn="ctr"/>
+          </a:p>
+        </p:txBody>
+      </p:sp>
+      <p:sp>
+        <p:nvSpPr>
+          <p:cNvPr id="5" name="TextBox 4"/>
+          <p:cNvSpPr txBox="1"/>
+          <p:nvPr/>
+        </p:nvSpPr>
+        <p:spPr>
+          <a:xfrm>
+            <a:off x="640080" y="1417320"/>
+            <a:ext cx="5120640" cy="320040"/>
+          </a:xfrm>
+          <a:prstGeom prst="rect">
+            <a:avLst/>
+          </a:prstGeom>
+          <a:noFill/>
+        </p:spPr>
+        <p:txBody>
+          <a:bodyPr wrap="square">
+            <a:spAutoFit/>
+          </a:bodyPr>
+          <a:lstStyle/>
+          <a:p>
+            <a:pPr algn="l">
+              <a:defRPr sz="1600" b="1">
+                <a:solidFill>
+                  <a:srgbClr val="E74C3C"/>
+                </a:solidFill>
+                <a:latin typeface="Calibri"/>
+              </a:defRPr>
+            </a:pPr>
+            <a:r>
+              <a:t>Internal Validity</a:t>
+            </a:r>
+          </a:p>
+        </p:txBody>
+      </p:sp>
+      <p:sp>
+        <p:nvSpPr>
+          <p:cNvPr id="6" name="TextBox 5"/>
+          <p:cNvSpPr txBox="1"/>
+          <p:nvPr/>
+        </p:nvSpPr>
+        <p:spPr>
+          <a:xfrm>
+            <a:off x="640080" y="1920240"/>
+            <a:ext cx="5120640" cy="274320"/>
+          </a:xfrm>
+          <a:prstGeom prst="rect">
+            <a:avLst/>
+          </a:prstGeom>
+          <a:noFill/>
+        </p:spPr>
+        <p:txBody>
+          <a:bodyPr wrap="square">
+            <a:spAutoFit/>
+          </a:bodyPr>
+          <a:lstStyle/>
+          <a:p>
+            <a:pPr algn="l">
+              <a:defRPr sz="1300" b="1">
+                <a:solidFill>
+                  <a:srgbClr val="FFFFFF"/>
+                </a:solidFill>
+                <a:latin typeface="Calibri"/>
+              </a:defRPr>
+            </a:pPr>
+            <a:r>
+              <a:t>Single application</a:t>
+            </a:r>
+          </a:p>
+        </p:txBody>
+      </p:sp>
+      <p:sp>
+        <p:nvSpPr>
+          <p:cNvPr id="7" name="TextBox 6"/>
+          <p:cNvSpPr txBox="1"/>
+          <p:nvPr/>
+        </p:nvSpPr>
+        <p:spPr>
+          <a:xfrm>
+            <a:off x="640080" y="2240280"/>
+            <a:ext cx="5120640" cy="777240"/>
+          </a:xfrm>
+          <a:prstGeom prst="rect">
+            <a:avLst/>
+          </a:prstGeom>
+          <a:noFill/>
+        </p:spPr>
+        <p:txBody>
+          <a:bodyPr wrap="square">
+            <a:spAutoFit/>
+          </a:bodyPr>
+          <a:lstStyle/>
+          <a:p>
+            <a:pPr algn="l">
+              <a:defRPr sz="1100" b="0">
+                <a:solidFill>
+                  <a:srgbClr val="BDBDBD"/>
+                </a:solidFill>
+                <a:latin typeface="Calibri"/>
+              </a:defRPr>
+            </a:pPr>
+            <a:r>
+              <a:t>Results based on Google Online Boutique — a representative but single microservice benchmark. Other application topologies may yield different results.</a:t>
+            </a:r>
+          </a:p>
+        </p:txBody>
+      </p:sp>
+      <p:sp>
+        <p:nvSpPr>
+          <p:cNvPr id="8" name="TextBox 7"/>
+          <p:cNvSpPr txBox="1"/>
+          <p:nvPr/>
+        </p:nvSpPr>
+        <p:spPr>
+          <a:xfrm>
+            <a:off x="640080" y="3108960"/>
+            <a:ext cx="5120640" cy="274320"/>
+          </a:xfrm>
+          <a:prstGeom prst="rect">
+            <a:avLst/>
+          </a:prstGeom>
+          <a:noFill/>
+        </p:spPr>
+        <p:txBody>
+          <a:bodyPr wrap="square">
+            <a:spAutoFit/>
+          </a:bodyPr>
+          <a:lstStyle/>
+          <a:p>
+            <a:pPr algn="l">
+              <a:defRPr sz="1300" b="1">
+                <a:solidFill>
+                  <a:srgbClr val="FFFFFF"/>
+                </a:solidFill>
+                <a:latin typeface="Calibri"/>
+              </a:defRPr>
+            </a:pPr>
+            <a:r>
+              <a:t>Single replica per service</a:t>
+            </a:r>
+          </a:p>
+        </p:txBody>
+      </p:sp>
+      <p:sp>
+        <p:nvSpPr>
+          <p:cNvPr id="9" name="TextBox 8"/>
+          <p:cNvSpPr txBox="1"/>
+          <p:nvPr/>
+        </p:nvSpPr>
+        <p:spPr>
+          <a:xfrm>
+            <a:off x="640080" y="3429000"/>
+            <a:ext cx="5120640" cy="777240"/>
+          </a:xfrm>
+          <a:prstGeom prst="rect">
+            <a:avLst/>
+          </a:prstGeom>
+          <a:noFill/>
+        </p:spPr>
+        <p:txBody>
+          <a:bodyPr wrap="square">
+            <a:spAutoFit/>
+          </a:bodyPr>
+          <a:lstStyle/>
+          <a:p>
+            <a:pPr algn="l">
+              <a:defRPr sz="1100" b="0">
+                <a:solidFill>
+                  <a:srgbClr val="BDBDBD"/>
+                </a:solidFill>
+                <a:latin typeface="Calibri"/>
+              </a:defRPr>
+            </a:pPr>
+            <a:r>
+              <a:t>100% pod-delete guarantees unavailability, but production systems typically run multiple replicas. Results represent worst-case single-replica scenarios.</a:t>
+            </a:r>
+          </a:p>
+        </p:txBody>
+      </p:sp>
+      <p:sp>
+        <p:nvSpPr>
+          <p:cNvPr id="10" name="TextBox 9"/>
+          <p:cNvSpPr txBox="1"/>
+          <p:nvPr/>
+        </p:nvSpPr>
+        <p:spPr>
+          <a:xfrm>
+            <a:off x="640080" y="4297680"/>
+            <a:ext cx="5120640" cy="274320"/>
+          </a:xfrm>
+          <a:prstGeom prst="rect">
+            <a:avLst/>
+          </a:prstGeom>
+          <a:noFill/>
+        </p:spPr>
+        <p:txBody>
+          <a:bodyPr wrap="square">
+            <a:spAutoFit/>
+          </a:bodyPr>
+          <a:lstStyle/>
+          <a:p>
+            <a:pPr algn="l">
+              <a:defRPr sz="1300" b="1">
+                <a:solidFill>
+                  <a:srgbClr val="FFFFFF"/>
+                </a:solidFill>
+                <a:latin typeface="Calibri"/>
+              </a:defRPr>
+            </a:pPr>
+            <a:r>
+              <a:t>Virtualized environment</a:t>
+            </a:r>
+          </a:p>
+        </p:txBody>
+      </p:sp>
+      <p:sp>
+        <p:nvSpPr>
+          <p:cNvPr id="11" name="TextBox 10"/>
+          <p:cNvSpPr txBox="1"/>
+          <p:nvPr/>
+        </p:nvSpPr>
+        <p:spPr>
+          <a:xfrm>
+            <a:off x="640080" y="4617720"/>
+            <a:ext cx="5120640" cy="777240"/>
+          </a:xfrm>
+          <a:prstGeom prst="rect">
+            <a:avLst/>
+          </a:prstGeom>
+          <a:noFill/>
+        </p:spPr>
+        <p:txBody>
+          <a:bodyPr wrap="square">
+            <a:spAutoFit/>
+          </a:bodyPr>
+          <a:lstStyle/>
+          <a:p>
+            <a:pPr algn="l">
+              <a:defRPr sz="1100" b="0">
+                <a:solidFill>
+                  <a:srgbClr val="BDBDBD"/>
+                </a:solidFill>
+                <a:latin typeface="Calibri"/>
+              </a:defRPr>
+            </a:pPr>
+            <a:r>
+              <a:t>Vagrant/libvirt (KVM/QEMU) introduces virtualization overhead. Bare-metal clusters may show different performance characteristics, especially for I/O metrics.</a:t>
+            </a:r>
+          </a:p>
+        </p:txBody>
+      </p:sp>
+      <p:sp>
+        <p:nvSpPr>
+          <p:cNvPr id="12" name="TextBox 11"/>
+          <p:cNvSpPr txBox="1"/>
+          <p:nvPr/>
+        </p:nvSpPr>
+        <p:spPr>
+          <a:xfrm>
+            <a:off x="640080" y="5486400"/>
+            <a:ext cx="5120640" cy="274320"/>
+          </a:xfrm>
+          <a:prstGeom prst="rect">
+            <a:avLst/>
+          </a:prstGeom>
+          <a:noFill/>
+        </p:spPr>
+        <p:txBody>
+          <a:bodyPr wrap="square">
+            <a:spAutoFit/>
+          </a:bodyPr>
+          <a:lstStyle/>
+          <a:p>
+            <a:pPr algn="l">
+              <a:defRPr sz="1300" b="1">
+                <a:solidFill>
+                  <a:srgbClr val="FFFFFF"/>
+                </a:solidFill>
+                <a:latin typeface="Calibri"/>
+              </a:defRPr>
+            </a:pPr>
+            <a:r>
+              <a:t>Uneven contrast coverage</a:t>
+            </a:r>
+          </a:p>
+        </p:txBody>
+      </p:sp>
+      <p:sp>
+        <p:nvSpPr>
+          <p:cNvPr id="13" name="TextBox 12"/>
+          <p:cNvSpPr txBox="1"/>
+          <p:nvPr/>
+        </p:nvSpPr>
+        <p:spPr>
+          <a:xfrm>
+            <a:off x="640080" y="5806440"/>
+            <a:ext cx="5120640" cy="777240"/>
+          </a:xfrm>
+          <a:prstGeom prst="rect">
+            <a:avLst/>
+          </a:prstGeom>
+          <a:noFill/>
+        </p:spPr>
+        <p:txBody>
+          <a:bodyPr wrap="square">
+            <a:spAutoFit/>
+          </a:bodyPr>
+          <a:lstStyle/>
+          <a:p>
+            <a:pPr algn="l">
+              <a:defRPr sz="1100" b="0">
+                <a:solidFill>
+                  <a:srgbClr val="BDBDBD"/>
+                </a:solidFill>
+                <a:latin typeface="Calibri"/>
+              </a:defRPr>
+            </a:pPr>
+            <a:r>
+              <a:t>The churn findings (H2, H3) rest on the colocate-vs-spread locality contrast; H5 covers all 8 placements but is single-batch; H6 is a two-point contrast of the extremes — a 6-strategy gradient run extends it. Intermediate placements are not yet validated per-hypothesis.</a:t>
+            </a:r>
+          </a:p>
+        </p:txBody>
+      </p:sp>
+      <p:sp>
+        <p:nvSpPr>
+          <p:cNvPr id="14" name="Rounded Rectangle 13"/>
+          <p:cNvSpPr/>
+          <p:nvPr/>
+        </p:nvSpPr>
+        <p:spPr>
+          <a:xfrm>
+            <a:off x="6309360" y="1371600"/>
+            <a:ext cx="5486400" cy="5029200"/>
+          </a:xfrm>
+          <a:prstGeom prst="roundRect">
+            <a:avLst/>
+          </a:prstGeom>
+          <a:solidFill>
+            <a:srgbClr val="121222"/>
+          </a:solidFill>
+          <a:ln w="25400">
+            <a:solidFill>
+              <a:srgbClr val="F39C12"/>
+            </a:solidFill>
+          </a:ln>
+        </p:spPr>
+        <p:style>
+          <a:lnRef idx="1">
+            <a:schemeClr val="accent1"/>
+          </a:lnRef>
+          <a:fillRef idx="3">
+            <a:schemeClr val="accent1"/>
+          </a:fillRef>
+          <a:effectRef idx="2">
+            <a:schemeClr val="accent1"/>
+          </a:effectRef>
+          <a:fontRef idx="minor">
+            <a:schemeClr val="lt1"/>
+          </a:fontRef>
+        </p:style>
+        <p:txBody>
+          <a:bodyPr rtlCol="0" anchor="ctr"/>
+          <a:lstStyle/>
+          <a:p>
+            <a:pPr algn="ctr"/>
+          </a:p>
+        </p:txBody>
+      </p:sp>
+      <p:sp>
+        <p:nvSpPr>
+          <p:cNvPr id="15" name="TextBox 14"/>
+          <p:cNvSpPr txBox="1"/>
+          <p:nvPr/>
+        </p:nvSpPr>
+        <p:spPr>
+          <a:xfrm>
+            <a:off x="6492240" y="1417320"/>
+            <a:ext cx="5120640" cy="320040"/>
+          </a:xfrm>
+          <a:prstGeom prst="rect">
+            <a:avLst/>
+          </a:prstGeom>
+          <a:noFill/>
+        </p:spPr>
+        <p:txBody>
+          <a:bodyPr wrap="square">
+            <a:spAutoFit/>
+          </a:bodyPr>
+          <a:lstStyle/>
+          <a:p>
+            <a:pPr algn="l">
+              <a:defRPr sz="1600" b="1">
+                <a:solidFill>
+                  <a:srgbClr val="F39C12"/>
+                </a:solidFill>
+                <a:latin typeface="Calibri"/>
+              </a:defRPr>
+            </a:pPr>
+            <a:r>
+              <a:t>External Validity</a:t>
+            </a:r>
+          </a:p>
+        </p:txBody>
+      </p:sp>
+      <p:sp>
+        <p:nvSpPr>
+          <p:cNvPr id="16" name="TextBox 15"/>
+          <p:cNvSpPr txBox="1"/>
+          <p:nvPr/>
+        </p:nvSpPr>
+        <p:spPr>
+          <a:xfrm>
+            <a:off x="6492240" y="1920240"/>
+            <a:ext cx="5120640" cy="274320"/>
+          </a:xfrm>
+          <a:prstGeom prst="rect">
+            <a:avLst/>
+          </a:prstGeom>
+          <a:noFill/>
+        </p:spPr>
+        <p:txBody>
+          <a:bodyPr wrap="square">
+            <a:spAutoFit/>
+          </a:bodyPr>
+          <a:lstStyle/>
+          <a:p>
+            <a:pPr algn="l">
+              <a:defRPr sz="1300" b="1">
+                <a:solidFill>
+                  <a:srgbClr val="FFFFFF"/>
+                </a:solidFill>
+                <a:latin typeface="Calibri"/>
+              </a:defRPr>
+            </a:pPr>
+            <a:r>
+              <a:t>Cluster scale</a:t>
+            </a:r>
+          </a:p>
+        </p:txBody>
+      </p:sp>
+      <p:sp>
+        <p:nvSpPr>
+          <p:cNvPr id="17" name="TextBox 16"/>
+          <p:cNvSpPr txBox="1"/>
+          <p:nvPr/>
+        </p:nvSpPr>
+        <p:spPr>
+          <a:xfrm>
+            <a:off x="6492240" y="2240280"/>
+            <a:ext cx="5120640" cy="777240"/>
+          </a:xfrm>
+          <a:prstGeom prst="rect">
+            <a:avLst/>
+          </a:prstGeom>
+          <a:noFill/>
+        </p:spPr>
+        <p:txBody>
+          <a:bodyPr wrap="square">
+            <a:spAutoFit/>
+          </a:bodyPr>
+          <a:lstStyle/>
+          <a:p>
+            <a:pPr algn="l">
+              <a:defRPr sz="1100" b="0">
+                <a:solidFill>
+                  <a:srgbClr val="BDBDBD"/>
+                </a:solidFill>
+                <a:latin typeface="Calibri"/>
+              </a:defRPr>
+            </a:pPr>
+            <a:r>
+              <a:t>5-node cluster (1 control plane @ 12 GiB + 4 uniform 4-GiB workers, 10 vCPU, 28 GiB). Larger clusters may show different placement effects.</a:t>
+            </a:r>
+          </a:p>
+        </p:txBody>
+      </p:sp>
+      <p:sp>
+        <p:nvSpPr>
+          <p:cNvPr id="18" name="TextBox 17"/>
+          <p:cNvSpPr txBox="1"/>
+          <p:nvPr/>
+        </p:nvSpPr>
+        <p:spPr>
+          <a:xfrm>
+            <a:off x="6492240" y="3108960"/>
+            <a:ext cx="5120640" cy="274320"/>
+          </a:xfrm>
+          <a:prstGeom prst="rect">
+            <a:avLst/>
+          </a:prstGeom>
+          <a:noFill/>
+        </p:spPr>
+        <p:txBody>
+          <a:bodyPr wrap="square">
+            <a:spAutoFit/>
+          </a:bodyPr>
+          <a:lstStyle/>
+          <a:p>
+            <a:pPr algn="l">
+              <a:defRPr sz="1300" b="1">
+                <a:solidFill>
+                  <a:srgbClr val="FFFFFF"/>
+                </a:solidFill>
+                <a:latin typeface="Calibri"/>
+              </a:defRPr>
+            </a:pPr>
+            <a:r>
+              <a:t>Fault classes</a:t>
+            </a:r>
+          </a:p>
+        </p:txBody>
+      </p:sp>
+      <p:sp>
+        <p:nvSpPr>
+          <p:cNvPr id="19" name="TextBox 18"/>
+          <p:cNvSpPr txBox="1"/>
+          <p:nvPr/>
+        </p:nvSpPr>
+        <p:spPr>
+          <a:xfrm>
+            <a:off x="6492240" y="3429000"/>
+            <a:ext cx="5120640" cy="777240"/>
+          </a:xfrm>
+          <a:prstGeom prst="rect">
+            <a:avLst/>
+          </a:prstGeom>
+          <a:noFill/>
+        </p:spPr>
+        <p:txBody>
+          <a:bodyPr wrap="square">
+            <a:spAutoFit/>
+          </a:bodyPr>
+          <a:lstStyle/>
+          <a:p>
+            <a:pPr algn="l">
+              <a:defRPr sz="1100" b="0">
+                <a:solidFill>
+                  <a:srgbClr val="BDBDBD"/>
+                </a:solidFill>
+                <a:latin typeface="Calibri"/>
+              </a:defRPr>
+            </a:pPr>
+            <a:r>
+              <a:t>Three classes tested: churn (pod-delete), load contention (Locust spike), node failure (drain). Hog faults are absorbed by cgroup limits (negative finding); network partitions and disk faults remain untested and may behave differently.</a:t>
+            </a:r>
+          </a:p>
+        </p:txBody>
+      </p:sp>
+      <p:sp>
+        <p:nvSpPr>
+          <p:cNvPr id="20" name="TextBox 19"/>
+          <p:cNvSpPr txBox="1"/>
+          <p:nvPr/>
+        </p:nvSpPr>
+        <p:spPr>
+          <a:xfrm>
+            <a:off x="6492240" y="4297680"/>
+            <a:ext cx="5120640" cy="274320"/>
+          </a:xfrm>
+          <a:prstGeom prst="rect">
+            <a:avLst/>
+          </a:prstGeom>
+          <a:noFill/>
+        </p:spPr>
+        <p:txBody>
+          <a:bodyPr wrap="square">
+            <a:spAutoFit/>
+          </a:bodyPr>
+          <a:lstStyle/>
+          <a:p>
+            <a:pPr algn="l">
+              <a:defRPr sz="1300" b="1">
+                <a:solidFill>
+                  <a:srgbClr val="FFFFFF"/>
+                </a:solidFill>
+                <a:latin typeface="Calibri"/>
+              </a:defRPr>
+            </a:pPr>
+            <a:r>
+              <a:t>Traffic pattern</a:t>
+            </a:r>
+          </a:p>
+        </p:txBody>
+      </p:sp>
+      <p:sp>
+        <p:nvSpPr>
+          <p:cNvPr id="21" name="TextBox 20"/>
+          <p:cNvSpPr txBox="1"/>
+          <p:nvPr/>
+        </p:nvSpPr>
+        <p:spPr>
+          <a:xfrm>
+            <a:off x="6492240" y="4617720"/>
+            <a:ext cx="5120640" cy="777240"/>
+          </a:xfrm>
+          <a:prstGeom prst="rect">
+            <a:avLst/>
+          </a:prstGeom>
+          <a:noFill/>
+        </p:spPr>
+        <p:txBody>
+          <a:bodyPr wrap="square">
+            <a:spAutoFit/>
+          </a:bodyPr>
+          <a:lstStyle/>
+          <a:p>
+            <a:pPr algn="l">
+              <a:defRPr sz="1100" b="0">
+                <a:solidFill>
+                  <a:srgbClr val="BDBDBD"/>
+                </a:solidFill>
+                <a:latin typeface="Calibri"/>
+              </a:defRPr>
+            </a:pPr>
+            <a:r>
+              <a:t>Steady-state load (50 users, 10/s) for churn; a 200-user spike for the load regime. Production-like traffic patterns may affect results differently.</a:t>
+            </a:r>
+          </a:p>
+        </p:txBody>
+      </p:sp>
+      <p:sp>
+        <p:nvSpPr>
+          <p:cNvPr id="22" name="TextBox 21"/>
+          <p:cNvSpPr txBox="1"/>
+          <p:nvPr/>
+        </p:nvSpPr>
+        <p:spPr>
+          <a:xfrm>
+            <a:off x="6492240" y="5486400"/>
+            <a:ext cx="5120640" cy="274320"/>
+          </a:xfrm>
+          <a:prstGeom prst="rect">
+            <a:avLst/>
+          </a:prstGeom>
+          <a:noFill/>
+        </p:spPr>
+        <p:txBody>
+          <a:bodyPr wrap="square">
+            <a:spAutoFit/>
+          </a:bodyPr>
+          <a:lstStyle/>
+          <a:p>
+            <a:pPr algn="l">
+              <a:defRPr sz="1300" b="1">
+                <a:solidFill>
+                  <a:srgbClr val="FFFFFF"/>
+                </a:solidFill>
+                <a:latin typeface="Calibri"/>
+              </a:defRPr>
+            </a:pPr>
+            <a:r>
+              <a:t>Metric portability</a:t>
+            </a:r>
+          </a:p>
+        </p:txBody>
+      </p:sp>
+      <p:sp>
+        <p:nvSpPr>
+          <p:cNvPr id="23" name="TextBox 22"/>
+          <p:cNvSpPr txBox="1"/>
+          <p:nvPr/>
+        </p:nvSpPr>
+        <p:spPr>
+          <a:xfrm>
+            <a:off x="6492240" y="5806440"/>
+            <a:ext cx="5120640" cy="777240"/>
+          </a:xfrm>
+          <a:prstGeom prst="rect">
+            <a:avLst/>
+          </a:prstGeom>
+          <a:noFill/>
+        </p:spPr>
+        <p:txBody>
+          <a:bodyPr wrap="square">
+            <a:spAutoFit/>
+          </a:bodyPr>
+          <a:lstStyle/>
+          <a:p>
+            <a:pPr algn="l">
+              <a:defRPr sz="1100" b="0">
+                <a:solidFill>
+                  <a:srgbClr val="BDBDBD"/>
+                </a:solidFill>
+                <a:latin typeface="Calibri"/>
+              </a:defRPr>
+            </a:pPr>
+            <a:r>
+              <a:t>PSI requires cgroup-v2, Felix requires Calico, etcd_debugging_* is K8s-version-fragile. metricAvailability surfaces which metrics were collected per run.</a:t>
+            </a:r>
+          </a:p>
+        </p:txBody>
+      </p:sp>
+    </p:spTree>
+  </p:cSld>
+  <p:clrMapOvr>
+    <a:masterClrMapping/>
+  </p:clrMapOvr>
+</p:sld>
+</file>
+
+<file path=ppt/slides/slide16.xml><?xml version="1.0" encoding="utf-8"?>
+<p:sld xmlns:a="http://schemas.openxmlformats.org/drawingml/2006/main" xmlns:p="http://schemas.openxmlformats.org/presentationml/2006/main" xmlns:r="http://schemas.openxmlformats.org/officeDocument/2006/relationships">
+  <p:cSld>
+    <p:bg>
+      <p:bgPr>
+        <a:solidFill>
+          <a:srgbClr val="1B1B2F"/>
+        </a:solidFill>
+        <a:effectLst/>
+      </p:bgPr>
+    </p:bg>
+    <p:spTree>
+      <p:nvGrpSpPr>
+        <p:cNvPr id="1" name=""/>
+        <p:cNvGrpSpPr/>
+        <p:nvPr/>
+      </p:nvGrpSpPr>
+      <p:grpSpPr/>
+      <p:sp>
+        <p:nvSpPr>
+          <p:cNvPr id="2" name="TextBox 1"/>
+          <p:cNvSpPr txBox="1"/>
+          <p:nvPr/>
+        </p:nvSpPr>
+        <p:spPr>
+          <a:xfrm>
+            <a:off x="548640" y="274320"/>
+            <a:ext cx="10972800" cy="640080"/>
+          </a:xfrm>
+          <a:prstGeom prst="rect">
+            <a:avLst/>
+          </a:prstGeom>
+          <a:noFill/>
+        </p:spPr>
+        <p:txBody>
+          <a:bodyPr wrap="square">
+            <a:spAutoFit/>
+          </a:bodyPr>
+          <a:lstStyle/>
+          <a:p>
+            <a:pPr algn="l">
+              <a:defRPr sz="3200" b="1">
+                <a:solidFill>
+                  <a:srgbClr val="FFFFFF"/>
+                </a:solidFill>
+                <a:latin typeface="Calibri"/>
+              </a:defRPr>
+            </a:pPr>
+            <a:r>
+              <a:t>Conclusion &amp; Future Work</a:t>
+            </a:r>
+          </a:p>
+        </p:txBody>
+      </p:sp>
+      <p:sp>
+        <p:nvSpPr>
+          <p:cNvPr id="3" name="Rectangle 2"/>
+          <p:cNvSpPr/>
+          <p:nvPr/>
+        </p:nvSpPr>
+        <p:spPr>
+          <a:xfrm>
+            <a:off x="548640" y="868680"/>
+            <a:ext cx="2743200" cy="38100"/>
+          </a:xfrm>
+          <a:prstGeom prst="rect">
+            <a:avLst/>
+          </a:prstGeom>
+          <a:solidFill>
+            <a:srgbClr val="0096D6"/>
+          </a:solidFill>
+          <a:ln>
+            <a:noFill/>
+          </a:ln>
+        </p:spPr>
+        <p:style>
+          <a:lnRef idx="1">
+            <a:schemeClr val="accent1"/>
+          </a:lnRef>
+          <a:fillRef idx="3">
+            <a:schemeClr val="accent1"/>
+          </a:fillRef>
+          <a:effectRef idx="2">
+            <a:schemeClr val="accent1"/>
+          </a:effectRef>
+          <a:fontRef idx="minor">
+            <a:schemeClr val="lt1"/>
+          </a:fontRef>
+        </p:style>
+        <p:txBody>
+          <a:bodyPr rtlCol="0" anchor="ctr"/>
+          <a:lstStyle/>
+          <a:p>
+            <a:pPr algn="ctr"/>
+          </a:p>
+        </p:txBody>
+      </p:sp>
+      <p:sp>
+        <p:nvSpPr>
+          <p:cNvPr id="4" name="Rounded Rectangle 3"/>
+          <p:cNvSpPr/>
+          <p:nvPr/>
+        </p:nvSpPr>
+        <p:spPr>
+          <a:xfrm>
+            <a:off x="457200" y="1371600"/>
+            <a:ext cx="5303520" cy="2926080"/>
+          </a:xfrm>
+          <a:prstGeom prst="roundRect">
+            <a:avLst/>
+          </a:prstGeom>
+          <a:solidFill>
+            <a:srgbClr val="121222"/>
+          </a:solidFill>
+          <a:ln w="12700">
+            <a:solidFill>
+              <a:srgbClr val="2ECC71"/>
+            </a:solidFill>
+          </a:ln>
+        </p:spPr>
+        <p:style>
+          <a:lnRef idx="1">
+            <a:schemeClr val="accent1"/>
+          </a:lnRef>
+          <a:fillRef idx="3">
+            <a:schemeClr val="accent1"/>
+          </a:fillRef>
+          <a:effectRef idx="2">
+            <a:schemeClr val="accent1"/>
+          </a:effectRef>
+          <a:fontRef idx="minor">
+            <a:schemeClr val="lt1"/>
+          </a:fontRef>
+        </p:style>
+        <p:txBody>
+          <a:bodyPr rtlCol="0" anchor="ctr"/>
+          <a:lstStyle/>
+          <a:p>
+            <a:pPr algn="ctr"/>
+          </a:p>
+        </p:txBody>
+      </p:sp>
+      <p:sp>
+        <p:nvSpPr>
+          <p:cNvPr id="5" name="TextBox 4"/>
+          <p:cNvSpPr txBox="1"/>
+          <p:nvPr/>
+        </p:nvSpPr>
+        <p:spPr>
+          <a:xfrm>
+            <a:off x="640080" y="1371600"/>
+            <a:ext cx="4937760" cy="320040"/>
+          </a:xfrm>
+          <a:prstGeom prst="rect">
+            <a:avLst/>
+          </a:prstGeom>
+          <a:noFill/>
+        </p:spPr>
+        <p:txBody>
+          <a:bodyPr wrap="square">
+            <a:spAutoFit/>
+          </a:bodyPr>
+          <a:lstStyle/>
+          <a:p>
+            <a:pPr algn="l">
+              <a:defRPr sz="1800" b="1">
+                <a:solidFill>
+                  <a:srgbClr val="2ECC71"/>
+                </a:solidFill>
+                <a:latin typeface="Calibri"/>
+              </a:defRPr>
+            </a:pPr>
+            <a:r>
+              <a:t>Contributions</a:t>
+            </a:r>
+          </a:p>
+        </p:txBody>
+      </p:sp>
+      <p:sp>
+        <p:nvSpPr>
+          <p:cNvPr id="6" name="TextBox 5"/>
+          <p:cNvSpPr txBox="1"/>
+          <p:nvPr/>
+        </p:nvSpPr>
+        <p:spPr>
+          <a:xfrm>
+            <a:off x="640080" y="1783080"/>
+            <a:ext cx="4937760" cy="2377440"/>
+          </a:xfrm>
+          <a:prstGeom prst="rect">
+            <a:avLst/>
+          </a:prstGeom>
+          <a:noFill/>
+        </p:spPr>
+        <p:txBody>
+          <a:bodyPr wrap="square">
+            <a:spAutoFit/>
+          </a:bodyPr>
+          <a:lstStyle/>
+          <a:p>
+            <a:pPr>
+              <a:spcBef>
+                <a:spcPts val="200"/>
+              </a:spcBef>
+              <a:spcAft>
+                <a:spcPts val="200"/>
+              </a:spcAft>
+              <a:defRPr sz="1200">
+                <a:solidFill>
+                  <a:srgbClr val="BDBDBD"/>
+                </a:solidFill>
+                <a:latin typeface="Calibri"/>
+              </a:defRPr>
+            </a:pPr>
+            <a:r>
+              <a:t>• ChaosProbe framework: automated placement-</a:t>
+            </a:r>
+            <a:br/>
+            <a:r>
+              <a:t>  aware chaos evaluation for Kubernetes</a:t>
+            </a:r>
+          </a:p>
+          <a:p>
+            <a:pPr>
+              <a:spcBef>
+                <a:spcPts val="200"/>
+              </a:spcBef>
+              <a:spcAft>
+                <a:spcPts val="200"/>
+              </a:spcAft>
+              <a:defRPr sz="1200">
+                <a:solidFill>
+                  <a:srgbClr val="BDBDBD"/>
+                </a:solidFill>
+                <a:latin typeface="Calibri"/>
+              </a:defRPr>
+            </a:pPr>
+            <a:r>
+              <a:t>• A fault-class × measurement-layer study:</a:t>
+            </a:r>
+            <a:br/>
+            <a:r>
+              <a:t>  churn, load contention, node failure across</a:t>
+            </a:r>
+            <a:br/>
+            <a:r>
+              <a:t>  score, mechanism, and user layers (H1–H6)</a:t>
+            </a:r>
+          </a:p>
+          <a:p>
+            <a:pPr>
+              <a:spcBef>
+                <a:spcPts val="200"/>
+              </a:spcBef>
+              <a:spcAft>
+                <a:spcPts val="200"/>
+              </a:spcAft>
+              <a:defRPr sz="1200">
+                <a:solidFill>
+                  <a:srgbClr val="BDBDBD"/>
+                </a:solidFill>
+                <a:latin typeface="Calibri"/>
+              </a:defRPr>
+            </a:pPr>
+            <a:r>
+              <a:t>• The Neo4j dependency graph made analytically</a:t>
+            </a:r>
+            <a:br/>
+            <a:r>
+              <a:t>  load-bearing: a pre-chaos placement predictor (H5)</a:t>
+            </a:r>
+          </a:p>
+          <a:p>
+            <a:pPr>
+              <a:spcBef>
+                <a:spcPts val="200"/>
+              </a:spcBef>
+              <a:spcAft>
+                <a:spcPts val="200"/>
+              </a:spcAft>
+              <a:defRPr sz="1200">
+                <a:solidFill>
+                  <a:srgbClr val="BDBDBD"/>
+                </a:solidFill>
+                <a:latin typeface="Calibri"/>
+              </a:defRPr>
+            </a:pPr>
+            <a:r>
+              <a:t>• Statistical &amp; provenance discipline: ICC variance</a:t>
+            </a:r>
+            <a:br/>
+            <a:r>
+              <a:t>  partition, TOST, power analysis, doctor-gated runs</a:t>
+            </a:r>
+          </a:p>
+        </p:txBody>
+      </p:sp>
+      <p:sp>
+        <p:nvSpPr>
+          <p:cNvPr id="7" name="Rounded Rectangle 6"/>
+          <p:cNvSpPr/>
+          <p:nvPr/>
+        </p:nvSpPr>
+        <p:spPr>
+          <a:xfrm>
+            <a:off x="6217920" y="1371600"/>
+            <a:ext cx="5303520" cy="2926080"/>
+          </a:xfrm>
+          <a:prstGeom prst="roundRect">
+            <a:avLst/>
+          </a:prstGeom>
+          <a:solidFill>
+            <a:srgbClr val="121222"/>
+          </a:solidFill>
+          <a:ln w="12700">
+            <a:solidFill>
+              <a:srgbClr val="0096D6"/>
+            </a:solidFill>
+          </a:ln>
+        </p:spPr>
+        <p:style>
+          <a:lnRef idx="1">
+            <a:schemeClr val="accent1"/>
+          </a:lnRef>
+          <a:fillRef idx="3">
+            <a:schemeClr val="accent1"/>
+          </a:fillRef>
+          <a:effectRef idx="2">
+            <a:schemeClr val="accent1"/>
+          </a:effectRef>
+          <a:fontRef idx="minor">
+            <a:schemeClr val="lt1"/>
+          </a:fontRef>
+        </p:style>
+        <p:txBody>
+          <a:bodyPr rtlCol="0" anchor="ctr"/>
+          <a:lstStyle/>
+          <a:p>
+            <a:pPr algn="ctr"/>
+          </a:p>
+        </p:txBody>
+      </p:sp>
+      <p:sp>
+        <p:nvSpPr>
+          <p:cNvPr id="8" name="TextBox 7"/>
+          <p:cNvSpPr txBox="1"/>
+          <p:nvPr/>
+        </p:nvSpPr>
+        <p:spPr>
+          <a:xfrm>
+            <a:off x="6400800" y="1371600"/>
+            <a:ext cx="4937760" cy="320040"/>
+          </a:xfrm>
+          <a:prstGeom prst="rect">
+            <a:avLst/>
+          </a:prstGeom>
+          <a:noFill/>
+        </p:spPr>
+        <p:txBody>
+          <a:bodyPr wrap="square">
+            <a:spAutoFit/>
+          </a:bodyPr>
+          <a:lstStyle/>
+          <a:p>
+            <a:pPr algn="l">
+              <a:defRPr sz="1800" b="1">
+                <a:solidFill>
+                  <a:srgbClr val="0096D6"/>
+                </a:solidFill>
+                <a:latin typeface="Calibri"/>
+              </a:defRPr>
+            </a:pPr>
+            <a:r>
+              <a:t>Key Findings</a:t>
+            </a:r>
+          </a:p>
+        </p:txBody>
+      </p:sp>
+      <p:sp>
+        <p:nvSpPr>
+          <p:cNvPr id="9" name="TextBox 8"/>
+          <p:cNvSpPr txBox="1"/>
+          <p:nvPr/>
+        </p:nvSpPr>
+        <p:spPr>
+          <a:xfrm>
+            <a:off x="6400800" y="1783080"/>
+            <a:ext cx="4937760" cy="2377440"/>
+          </a:xfrm>
+          <a:prstGeom prst="rect">
+            <a:avLst/>
+          </a:prstGeom>
+          <a:noFill/>
+        </p:spPr>
+        <p:txBody>
+          <a:bodyPr wrap="square">
+            <a:spAutoFit/>
+          </a:bodyPr>
+          <a:lstStyle/>
+          <a:p>
+            <a:pPr>
+              <a:spcBef>
+                <a:spcPts val="200"/>
+              </a:spcBef>
+              <a:spcAft>
+                <a:spcPts val="200"/>
+              </a:spcAft>
+              <a:defRPr sz="1200">
+                <a:solidFill>
+                  <a:srgbClr val="BDBDBD"/>
+                </a:solidFill>
+                <a:latin typeface="Calibri"/>
+              </a:defRPr>
+            </a:pPr>
+            <a:r>
+              <a:t>• H1: the aggregate score cannot rank placements</a:t>
+            </a:r>
+            <a:br/>
+            <a:r>
+              <a:t>  (3.3% between-strategy variance)</a:t>
+            </a:r>
+          </a:p>
+          <a:p>
+            <a:pPr>
+              <a:spcBef>
+                <a:spcPts val="200"/>
+              </a:spcBef>
+              <a:spcAft>
+                <a:spcPts val="200"/>
+              </a:spcAft>
+              <a:defRPr sz="1200">
+                <a:solidFill>
+                  <a:srgbClr val="BDBDBD"/>
+                </a:solidFill>
+                <a:latin typeface="Calibri"/>
+              </a:defRPr>
+            </a:pPr>
+            <a:r>
+              <a:t>• H2 + H4: placement moves mechanism-layer</a:t>
+            </a:r>
+            <a:br/>
+            <a:r>
+              <a:t>  signals in both churn and load regimes</a:t>
+            </a:r>
+          </a:p>
+          <a:p>
+            <a:pPr>
+              <a:spcBef>
+                <a:spcPts val="200"/>
+              </a:spcBef>
+              <a:spcAft>
+                <a:spcPts val="200"/>
+              </a:spcAft>
+              <a:defRPr sz="1200">
+                <a:solidFill>
+                  <a:srgbClr val="BDBDBD"/>
+                </a:solidFill>
+                <a:latin typeface="Calibri"/>
+              </a:defRPr>
+            </a:pPr>
+            <a:r>
+              <a:t>• H3: those mechanisms do not reach the user</a:t>
+            </a:r>
+            <a:br/>
+            <a:r>
+              <a:t>  (TOST-decoupled; control-route confound)</a:t>
+            </a:r>
+          </a:p>
+          <a:p>
+            <a:pPr>
+              <a:spcBef>
+                <a:spcPts val="200"/>
+              </a:spcBef>
+              <a:spcAft>
+                <a:spcPts val="200"/>
+              </a:spcAft>
+              <a:defRPr sz="1200">
+                <a:solidFill>
+                  <a:srgbClr val="BDBDBD"/>
+                </a:solidFill>
+                <a:latin typeface="Calibri"/>
+              </a:defRPr>
+            </a:pPr>
+            <a:r>
+              <a:t>• H5 + H6: placement bites users at the availability</a:t>
+            </a:r>
+            <a:br/>
+            <a:r>
+              <a:t>  layer — and both faces of the trade-off are</a:t>
+            </a:r>
+            <a:br/>
+            <a:r>
+              <a:t>  predictable from the dependency graph</a:t>
+            </a:r>
+          </a:p>
+        </p:txBody>
+      </p:sp>
+      <p:sp>
+        <p:nvSpPr>
+          <p:cNvPr id="10" name="Rounded Rectangle 9"/>
+          <p:cNvSpPr/>
+          <p:nvPr/>
+        </p:nvSpPr>
+        <p:spPr>
+          <a:xfrm>
+            <a:off x="457200" y="4480560"/>
+            <a:ext cx="11064240" cy="1463040"/>
+          </a:xfrm>
+          <a:prstGeom prst="roundRect">
+            <a:avLst/>
+          </a:prstGeom>
+          <a:solidFill>
+            <a:srgbClr val="121222"/>
+          </a:solidFill>
+          <a:ln w="12700">
+            <a:solidFill>
+              <a:srgbClr val="F39C12"/>
+            </a:solidFill>
+          </a:ln>
+        </p:spPr>
+        <p:style>
+          <a:lnRef idx="1">
+            <a:schemeClr val="accent1"/>
+          </a:lnRef>
+          <a:fillRef idx="3">
+            <a:schemeClr val="accent1"/>
+          </a:fillRef>
+          <a:effectRef idx="2">
+            <a:schemeClr val="accent1"/>
+          </a:effectRef>
+          <a:fontRef idx="minor">
+            <a:schemeClr val="lt1"/>
+          </a:fontRef>
+        </p:style>
+        <p:txBody>
+          <a:bodyPr rtlCol="0" anchor="ctr"/>
+          <a:lstStyle/>
+          <a:p>
+            <a:pPr algn="ctr"/>
+          </a:p>
+        </p:txBody>
+      </p:sp>
+      <p:sp>
+        <p:nvSpPr>
+          <p:cNvPr id="11" name="TextBox 10"/>
+          <p:cNvSpPr txBox="1"/>
+          <p:nvPr/>
+        </p:nvSpPr>
+        <p:spPr>
+          <a:xfrm>
+            <a:off x="640080" y="4480560"/>
+            <a:ext cx="10698480" cy="320040"/>
+          </a:xfrm>
+          <a:prstGeom prst="rect">
+            <a:avLst/>
+          </a:prstGeom>
+          <a:noFill/>
+        </p:spPr>
+        <p:txBody>
+          <a:bodyPr wrap="square">
+            <a:spAutoFit/>
+          </a:bodyPr>
+          <a:lstStyle/>
+          <a:p>
+            <a:pPr algn="l">
+              <a:defRPr sz="1600" b="1">
+                <a:solidFill>
+                  <a:srgbClr val="F39C12"/>
+                </a:solidFill>
+                <a:latin typeface="Calibri"/>
+              </a:defRPr>
+            </a:pPr>
+            <a:r>
+              <a:t>Future Work</a:t>
+            </a:r>
+          </a:p>
+        </p:txBody>
+      </p:sp>
+      <p:sp>
+        <p:nvSpPr>
+          <p:cNvPr id="12" name="TextBox 11"/>
+          <p:cNvSpPr txBox="1"/>
+          <p:nvPr/>
+        </p:nvSpPr>
+        <p:spPr>
+          <a:xfrm>
+            <a:off x="640080" y="4846320"/>
+            <a:ext cx="5120640" cy="1051560"/>
+          </a:xfrm>
+          <a:prstGeom prst="rect">
+            <a:avLst/>
+          </a:prstGeom>
+          <a:noFill/>
+        </p:spPr>
+        <p:txBody>
+          <a:bodyPr wrap="square">
+            <a:spAutoFit/>
+          </a:bodyPr>
+          <a:lstStyle/>
+          <a:p>
+            <a:pPr>
+              <a:spcBef>
+                <a:spcPts val="200"/>
+              </a:spcBef>
+              <a:spcAft>
+                <a:spcPts val="200"/>
+              </a:spcAft>
+              <a:defRPr sz="1100">
+                <a:solidFill>
+                  <a:srgbClr val="BDBDBD"/>
+                </a:solidFill>
+                <a:latin typeface="Calibri"/>
+              </a:defRPr>
+            </a:pPr>
+            <a:r>
+              <a:t>• Multi-replica anti-affinity — the production question</a:t>
+            </a:r>
+            <a:br/>
+            <a:r>
+              <a:t>  this single-replica design structurally excludes</a:t>
+            </a:r>
+          </a:p>
+          <a:p>
+            <a:pPr>
+              <a:spcBef>
+                <a:spcPts val="200"/>
+              </a:spcBef>
+              <a:spcAft>
+                <a:spcPts val="200"/>
+              </a:spcAft>
+              <a:defRPr sz="1100">
+                <a:solidFill>
+                  <a:srgbClr val="BDBDBD"/>
+                </a:solidFill>
+                <a:latin typeface="Calibri"/>
+              </a:defRPr>
+            </a:pPr>
+            <a:r>
+              <a:t>• H6 gradient: intermediate placements between the</a:t>
+            </a:r>
+            <a:br/>
+            <a:r>
+              <a:t>  extremes (6-strategy gradient run in flight)</a:t>
+            </a:r>
+          </a:p>
+          <a:p>
+            <a:pPr>
+              <a:spcBef>
+                <a:spcPts val="200"/>
+              </a:spcBef>
+              <a:spcAft>
+                <a:spcPts val="200"/>
+              </a:spcAft>
+              <a:defRPr sz="1100">
+                <a:solidFill>
+                  <a:srgbClr val="BDBDBD"/>
+                </a:solidFill>
+                <a:latin typeface="Calibri"/>
+              </a:defRPr>
+            </a:pPr>
+            <a:r>
+              <a:t>• Larger clusters, other CNIs / kube-proxy modes,</a:t>
+            </a:r>
+            <a:br/>
+            <a:r>
+              <a:t>  production-like traffic</a:t>
+            </a:r>
+          </a:p>
+        </p:txBody>
+      </p:sp>
+      <p:sp>
+        <p:nvSpPr>
+          <p:cNvPr id="13" name="TextBox 12"/>
+          <p:cNvSpPr txBox="1"/>
+          <p:nvPr/>
+        </p:nvSpPr>
+        <p:spPr>
+          <a:xfrm>
+            <a:off x="6126480" y="4846320"/>
+            <a:ext cx="5212080" cy="1051560"/>
+          </a:xfrm>
+          <a:prstGeom prst="rect">
+            <a:avLst/>
+          </a:prstGeom>
+          <a:noFill/>
+        </p:spPr>
+        <p:txBody>
+          <a:bodyPr wrap="square">
+            <a:spAutoFit/>
+          </a:bodyPr>
+          <a:lstStyle/>
+          <a:p>
+            <a:pPr>
+              <a:spcBef>
+                <a:spcPts val="200"/>
+              </a:spcBef>
+              <a:spcAft>
+                <a:spcPts val="200"/>
+              </a:spcAft>
+              <a:defRPr sz="1100">
+                <a:solidFill>
+                  <a:srgbClr val="BDBDBD"/>
+                </a:solidFill>
+                <a:latin typeface="Calibri"/>
+              </a:defRPr>
+            </a:pPr>
+            <a:r>
+              <a:t>• Re-attribute the conntrack flush to its exact code</a:t>
+            </a:r>
+            <a:br/>
+            <a:r>
+              <a:t>  path (upstream active flush is UDP-only; this</a:t>
+            </a:r>
+            <a:br/>
+            <a:r>
+              <a:t>  workload is TCP/gRPC)</a:t>
+            </a:r>
+          </a:p>
+          <a:p>
+            <a:pPr>
+              <a:spcBef>
+                <a:spcPts val="200"/>
+              </a:spcBef>
+              <a:spcAft>
+                <a:spcPts val="200"/>
+              </a:spcAft>
+              <a:defRPr sz="1100">
+                <a:solidFill>
+                  <a:srgbClr val="BDBDBD"/>
+                </a:solidFill>
+                <a:latin typeface="Calibri"/>
+              </a:defRPr>
+            </a:pPr>
+            <a:r>
+              <a:t>• More load batches — does any user-layer effect</a:t>
+            </a:r>
+            <a:br/>
+            <a:r>
+              <a:t>  survive replication?</a:t>
+            </a:r>
+          </a:p>
+          <a:p>
+            <a:pPr>
+              <a:spcBef>
+                <a:spcPts val="200"/>
+              </a:spcBef>
+              <a:spcAft>
+                <a:spcPts val="200"/>
+              </a:spcAft>
+              <a:defRPr sz="1100">
+                <a:solidFill>
+                  <a:srgbClr val="BDBDBD"/>
+                </a:solidFill>
+                <a:latin typeface="Calibri"/>
+              </a:defRPr>
+            </a:pPr>
+            <a:r>
+              <a:t>• Scheduler integration of the cross-node-fraction</a:t>
+            </a:r>
+            <a:br/>
+            <a:r>
+              <a:t>  predictor (H5)</a:t>
+            </a:r>
+          </a:p>
+        </p:txBody>
+      </p:sp>
+      <p:sp>
+        <p:nvSpPr>
+          <p:cNvPr id="14" name="Rounded Rectangle 13"/>
+          <p:cNvSpPr/>
+          <p:nvPr/>
+        </p:nvSpPr>
+        <p:spPr>
+          <a:xfrm>
+            <a:off x="457200" y="6126480"/>
+            <a:ext cx="11064240" cy="640080"/>
+          </a:xfrm>
+          <a:prstGeom prst="roundRect">
+            <a:avLst/>
+          </a:prstGeom>
+          <a:solidFill>
+            <a:srgbClr val="121222"/>
+          </a:solidFill>
+          <a:ln w="38100">
+            <a:solidFill>
+              <a:srgbClr val="0096D6"/>
+            </a:solidFill>
+          </a:ln>
+        </p:spPr>
+        <p:style>
+          <a:lnRef idx="1">
+            <a:schemeClr val="accent1"/>
+          </a:lnRef>
+          <a:fillRef idx="3">
+            <a:schemeClr val="accent1"/>
+          </a:fillRef>
+          <a:effectRef idx="2">
+            <a:schemeClr val="accent1"/>
+          </a:effectRef>
+          <a:fontRef idx="minor">
+            <a:schemeClr val="lt1"/>
+          </a:fontRef>
+        </p:style>
+        <p:txBody>
+          <a:bodyPr rtlCol="0" anchor="ctr"/>
+          <a:lstStyle/>
+          <a:p>
+            <a:pPr algn="ctr"/>
+          </a:p>
+        </p:txBody>
+      </p:sp>
+      <p:sp>
+        <p:nvSpPr>
+          <p:cNvPr id="15" name="TextBox 14"/>
+          <p:cNvSpPr txBox="1"/>
+          <p:nvPr/>
+        </p:nvSpPr>
+        <p:spPr>
+          <a:xfrm>
+            <a:off x="640080" y="6172200"/>
+            <a:ext cx="10698480" cy="548640"/>
+          </a:xfrm>
+          <a:prstGeom prst="rect">
+            <a:avLst/>
+          </a:prstGeom>
+          <a:noFill/>
+        </p:spPr>
+        <p:txBody>
+          <a:bodyPr wrap="square">
+            <a:spAutoFit/>
+          </a:bodyPr>
+          <a:lstStyle/>
+          <a:p>
+            <a:pPr algn="ctr">
+              <a:defRPr sz="1300" b="1">
+                <a:solidFill>
+                  <a:srgbClr val="FFFFFF"/>
+                </a:solidFill>
+                <a:latin typeface="Calibri"/>
+              </a:defRPr>
+            </a:pPr>
+            <a:r>
+              <a:t>A single score is blind to placement (H1). Placement acts at the mechanism layer (H2, H4) without reaching the user (H3); where it does reach users is availability under node failure — predictably (H5 + H6).</a:t>
+            </a:r>
+          </a:p>
+        </p:txBody>
+      </p:sp>
+    </p:spTree>
+  </p:cSld>
+  <p:clrMapOvr>
+    <a:masterClrMapping/>
+  </p:clrMapOvr>
+</p:sld>
+</file>
+
+<file path=ppt/slides/slide17.xml><?xml version="1.0" encoding="utf-8"?>
+<p:sld xmlns:a="http://schemas.openxmlformats.org/drawingml/2006/main" xmlns:p="http://schemas.openxmlformats.org/presentationml/2006/main" xmlns:r="http://schemas.openxmlformats.org/officeDocument/2006/relationships">
+  <p:cSld>
+    <p:bg>
+      <p:bgPr>
+        <a:solidFill>
+          <a:srgbClr val="1B1B2F"/>
+        </a:solidFill>
+        <a:effectLst/>
+      </p:bgPr>
+    </p:bg>
+    <p:spTree>
+      <p:nvGrpSpPr>
+        <p:cNvPr id="1" name=""/>
+        <p:cNvGrpSpPr/>
+        <p:nvPr/>
+      </p:nvGrpSpPr>
+      <p:grpSpPr/>
+      <p:sp>
+        <p:nvSpPr>
+          <p:cNvPr id="2" name="TextBox 1"/>
+          <p:cNvSpPr txBox="1"/>
+          <p:nvPr/>
+        </p:nvSpPr>
+        <p:spPr>
+          <a:xfrm>
             <a:off x="1371600" y="1828800"/>
             <a:ext cx="9418320" cy="1097280"/>
           </a:xfrm>
@@ -7628,7 +9283,7 @@
               </a:defRPr>
             </a:pPr>
             <a:r>
-              <a:t>6</a:t>
+              <a:t>8</a:t>
             </a:r>
           </a:p>
         </p:txBody>
@@ -7749,7 +9404,7 @@
               </a:defRPr>
             </a:pPr>
             <a:r>
-              <a:t>4</a:t>
+              <a:t>3</a:t>
             </a:r>
           </a:p>
         </p:txBody>
@@ -7785,11 +9440,11 @@
               </a:defRPr>
             </a:pPr>
             <a:r>
-              <a:t>Metric</a:t>
+              <a:t>Fault</a:t>
             </a:r>
             <a:br/>
             <a:r>
-              <a:t>Dimensions</a:t>
+              <a:t>Classes</a:t>
             </a:r>
           </a:p>
         </p:txBody>
@@ -7803,127 +9458,6 @@
         <p:spPr>
           <a:xfrm>
             <a:off x="6492240" y="4754880"/>
-            <a:ext cx="1645920" cy="914400"/>
-          </a:xfrm>
-          <a:prstGeom prst="roundRect">
-            <a:avLst/>
-          </a:prstGeom>
-          <a:solidFill>
-            <a:srgbClr val="121222"/>
-          </a:solidFill>
-          <a:ln w="12700">
-            <a:solidFill>
-              <a:srgbClr val="E74C3C"/>
-            </a:solidFill>
-          </a:ln>
-        </p:spPr>
-        <p:style>
-          <a:lnRef idx="1">
-            <a:schemeClr val="accent1"/>
-          </a:lnRef>
-          <a:fillRef idx="3">
-            <a:schemeClr val="accent1"/>
-          </a:fillRef>
-          <a:effectRef idx="2">
-            <a:schemeClr val="accent1"/>
-          </a:effectRef>
-          <a:fontRef idx="minor">
-            <a:schemeClr val="lt1"/>
-          </a:fontRef>
-        </p:style>
-        <p:txBody>
-          <a:bodyPr rtlCol="0" anchor="ctr"/>
-          <a:lstStyle/>
-          <a:p>
-            <a:pPr algn="ctr"/>
-          </a:p>
-        </p:txBody>
-      </p:sp>
-      <p:sp>
-        <p:nvSpPr>
-          <p:cNvPr id="12" name="TextBox 11"/>
-          <p:cNvSpPr txBox="1"/>
-          <p:nvPr/>
-        </p:nvSpPr>
-        <p:spPr>
-          <a:xfrm>
-            <a:off x="6492240" y="4754880"/>
-            <a:ext cx="1645920" cy="457200"/>
-          </a:xfrm>
-          <a:prstGeom prst="rect">
-            <a:avLst/>
-          </a:prstGeom>
-          <a:noFill/>
-        </p:spPr>
-        <p:txBody>
-          <a:bodyPr wrap="square">
-            <a:spAutoFit/>
-          </a:bodyPr>
-          <a:lstStyle/>
-          <a:p>
-            <a:pPr algn="ctr">
-              <a:defRPr sz="2400" b="1">
-                <a:solidFill>
-                  <a:srgbClr val="E74C3C"/>
-                </a:solidFill>
-                <a:latin typeface="Calibri"/>
-              </a:defRPr>
-            </a:pPr>
-            <a:r>
-              <a:t>3/3</a:t>
-            </a:r>
-          </a:p>
-        </p:txBody>
-      </p:sp>
-      <p:sp>
-        <p:nvSpPr>
-          <p:cNvPr id="13" name="TextBox 12"/>
-          <p:cNvSpPr txBox="1"/>
-          <p:nvPr/>
-        </p:nvSpPr>
-        <p:spPr>
-          <a:xfrm>
-            <a:off x="6492240" y="5166360"/>
-            <a:ext cx="1645920" cy="457200"/>
-          </a:xfrm>
-          <a:prstGeom prst="rect">
-            <a:avLst/>
-          </a:prstGeom>
-          <a:noFill/>
-        </p:spPr>
-        <p:txBody>
-          <a:bodyPr wrap="square">
-            <a:spAutoFit/>
-          </a:bodyPr>
-          <a:lstStyle/>
-          <a:p>
-            <a:pPr algn="ctr">
-              <a:defRPr sz="1100" b="0">
-                <a:solidFill>
-                  <a:srgbClr val="BDBDBD"/>
-                </a:solidFill>
-                <a:latin typeface="Calibri"/>
-              </a:defRPr>
-            </a:pPr>
-            <a:r>
-              <a:t>Inapplicable</a:t>
-            </a:r>
-            <a:br/>
-            <a:r>
-              <a:t>under churn</a:t>
-            </a:r>
-          </a:p>
-        </p:txBody>
-      </p:sp>
-      <p:sp>
-        <p:nvSpPr>
-          <p:cNvPr id="14" name="Rounded Rectangle 13"/>
-          <p:cNvSpPr/>
-          <p:nvPr/>
-        </p:nvSpPr>
-        <p:spPr>
-          <a:xfrm>
-            <a:off x="8595359" y="4754880"/>
             <a:ext cx="1645920" cy="914400"/>
           </a:xfrm>
           <a:prstGeom prst="roundRect">
@@ -7962,13 +9496,13 @@
       </p:sp>
       <p:sp>
         <p:nvSpPr>
-          <p:cNvPr id="15" name="TextBox 14"/>
+          <p:cNvPr id="12" name="TextBox 11"/>
           <p:cNvSpPr txBox="1"/>
           <p:nvPr/>
         </p:nvSpPr>
         <p:spPr>
           <a:xfrm>
-            <a:off x="8595359" y="4754880"/>
+            <a:off x="6492240" y="4754880"/>
             <a:ext cx="1645920" cy="457200"/>
           </a:xfrm>
           <a:prstGeom prst="rect">
@@ -7991,20 +9525,20 @@
               </a:defRPr>
             </a:pPr>
             <a:r>
-              <a:t>1</a:t>
-            </a:r>
-          </a:p>
-        </p:txBody>
-      </p:sp>
-      <p:sp>
-        <p:nvSpPr>
-          <p:cNvPr id="16" name="TextBox 15"/>
+              <a:t>H1–H6</a:t>
+            </a:r>
+          </a:p>
+        </p:txBody>
+      </p:sp>
+      <p:sp>
+        <p:nvSpPr>
+          <p:cNvPr id="13" name="TextBox 12"/>
           <p:cNvSpPr txBox="1"/>
           <p:nvPr/>
         </p:nvSpPr>
         <p:spPr>
           <a:xfrm>
-            <a:off x="8595359" y="5166360"/>
+            <a:off x="6492240" y="5166360"/>
             <a:ext cx="1645920" cy="457200"/>
           </a:xfrm>
           <a:prstGeom prst="rect">
@@ -8027,11 +9561,132 @@
               </a:defRPr>
             </a:pPr>
             <a:r>
-              <a:t>Unified</a:t>
+              <a:t>Hypotheses</a:t>
             </a:r>
             <a:br/>
             <a:r>
-              <a:t>Mechanism</a:t>
+              <a:t>Tested</a:t>
+            </a:r>
+          </a:p>
+        </p:txBody>
+      </p:sp>
+      <p:sp>
+        <p:nvSpPr>
+          <p:cNvPr id="14" name="Rounded Rectangle 13"/>
+          <p:cNvSpPr/>
+          <p:nvPr/>
+        </p:nvSpPr>
+        <p:spPr>
+          <a:xfrm>
+            <a:off x="8595359" y="4754880"/>
+            <a:ext cx="1645920" cy="914400"/>
+          </a:xfrm>
+          <a:prstGeom prst="roundRect">
+            <a:avLst/>
+          </a:prstGeom>
+          <a:solidFill>
+            <a:srgbClr val="121222"/>
+          </a:solidFill>
+          <a:ln w="12700">
+            <a:solidFill>
+              <a:srgbClr val="2ECC71"/>
+            </a:solidFill>
+          </a:ln>
+        </p:spPr>
+        <p:style>
+          <a:lnRef idx="1">
+            <a:schemeClr val="accent1"/>
+          </a:lnRef>
+          <a:fillRef idx="3">
+            <a:schemeClr val="accent1"/>
+          </a:fillRef>
+          <a:effectRef idx="2">
+            <a:schemeClr val="accent1"/>
+          </a:effectRef>
+          <a:fontRef idx="minor">
+            <a:schemeClr val="lt1"/>
+          </a:fontRef>
+        </p:style>
+        <p:txBody>
+          <a:bodyPr rtlCol="0" anchor="ctr"/>
+          <a:lstStyle/>
+          <a:p>
+            <a:pPr algn="ctr"/>
+          </a:p>
+        </p:txBody>
+      </p:sp>
+      <p:sp>
+        <p:nvSpPr>
+          <p:cNvPr id="15" name="TextBox 14"/>
+          <p:cNvSpPr txBox="1"/>
+          <p:nvPr/>
+        </p:nvSpPr>
+        <p:spPr>
+          <a:xfrm>
+            <a:off x="8595359" y="4754880"/>
+            <a:ext cx="1645920" cy="457200"/>
+          </a:xfrm>
+          <a:prstGeom prst="rect">
+            <a:avLst/>
+          </a:prstGeom>
+          <a:noFill/>
+        </p:spPr>
+        <p:txBody>
+          <a:bodyPr wrap="square">
+            <a:spAutoFit/>
+          </a:bodyPr>
+          <a:lstStyle/>
+          <a:p>
+            <a:pPr algn="ctr">
+              <a:defRPr sz="2400" b="1">
+                <a:solidFill>
+                  <a:srgbClr val="2ECC71"/>
+                </a:solidFill>
+                <a:latin typeface="Calibri"/>
+              </a:defRPr>
+            </a:pPr>
+            <a:r>
+              <a:t>ρ = 0.79</a:t>
+            </a:r>
+          </a:p>
+        </p:txBody>
+      </p:sp>
+      <p:sp>
+        <p:nvSpPr>
+          <p:cNvPr id="16" name="TextBox 15"/>
+          <p:cNvSpPr txBox="1"/>
+          <p:nvPr/>
+        </p:nvSpPr>
+        <p:spPr>
+          <a:xfrm>
+            <a:off x="8595359" y="5166360"/>
+            <a:ext cx="1645920" cy="457200"/>
+          </a:xfrm>
+          <a:prstGeom prst="rect">
+            <a:avLst/>
+          </a:prstGeom>
+          <a:noFill/>
+        </p:spPr>
+        <p:txBody>
+          <a:bodyPr wrap="square">
+            <a:spAutoFit/>
+          </a:bodyPr>
+          <a:lstStyle/>
+          <a:p>
+            <a:pPr algn="ctr">
+              <a:defRPr sz="1100" b="0">
+                <a:solidFill>
+                  <a:srgbClr val="BDBDBD"/>
+                </a:solidFill>
+                <a:latin typeface="Calibri"/>
+              </a:defRPr>
+            </a:pPr>
+            <a:r>
+              <a:t>Graph</a:t>
+            </a:r>
+            <a:br/>
+            <a:r>
+              <a:t>Predictor</a:t>
             </a:r>
           </a:p>
         </p:txBody>
@@ -8902,7 +10557,7 @@
               </a:defRPr>
             </a:pPr>
             <a:r>
-              <a:t>ChaosProbe: an automated framework that systematically varies pod placement strategies, injects faults via LitmusChaos, and measures recovery time, inter-service latency, resource utilization, and I/O throughput to quantify placement's impact on resilience.</a:t>
+              <a:t>ChaosProbe: an automated framework that systematically varies pod placement strategies, injects faults via LitmusChaos, and measures the response at three layers — aggregate score, kernel/network mechanism, and user-visible outcome — to establish at which layer placement effects appear under each fault class.</a:t>
             </a:r>
           </a:p>
         </p:txBody>
@@ -9485,7 +11140,7 @@
           <a:lstStyle/>
           <a:p>
             <a:pPr algn="ctr">
-              <a:defRPr sz="1600" b="1">
+              <a:defRPr sz="1500" b="1">
                 <a:solidFill>
                   <a:srgbClr val="FFFFFF"/>
                 </a:solidFill>
@@ -9493,7 +11148,7 @@
               </a:defRPr>
             </a:pPr>
             <a:r>
-              <a:t>How do multi-dimensional metrics decompose chaos response across pod-placement strategies in Kubernetes?</a:t>
+              <a:t>Under which fault classes does pod placement measurably affect mechanism-level behaviour and user-visible outcomes — and when do aggregate resilience scores obscure those effects?</a:t>
             </a:r>
           </a:p>
         </p:txBody>
@@ -9529,7 +11184,7 @@
               </a:defRPr>
             </a:pPr>
             <a:r>
-              <a:t>Primary results — metrics</a:t>
+              <a:t>Churn (pod-delete)</a:t>
             </a:r>
           </a:p>
         </p:txBody>
@@ -9559,13 +11214,13 @@
             <a:pPr algn="l">
               <a:defRPr sz="1100" b="1">
                 <a:solidFill>
-                  <a:srgbClr val="0096D6"/>
-                </a:solidFill>
-                <a:latin typeface="Calibri"/>
-              </a:defRPr>
-            </a:pPr>
-            <a:r>
-              <a:t>Methodology</a:t>
+                  <a:srgbClr val="F39C12"/>
+                </a:solidFill>
+                <a:latin typeface="Calibri"/>
+              </a:defRPr>
+            </a:pPr>
+            <a:r>
+              <a:t>Load contention</a:t>
             </a:r>
           </a:p>
         </p:txBody>
@@ -9578,7 +11233,7 @@
         </p:nvSpPr>
         <p:spPr>
           <a:xfrm>
-            <a:off x="8001000" y="2331720"/>
+            <a:off x="9921240" y="2331720"/>
             <a:ext cx="3657600" cy="228600"/>
           </a:xfrm>
           <a:prstGeom prst="rect">
@@ -9595,13 +11250,13 @@
             <a:pPr algn="l">
               <a:defRPr sz="1100" b="1">
                 <a:solidFill>
-                  <a:srgbClr val="F39C12"/>
-                </a:solidFill>
-                <a:latin typeface="Calibri"/>
-              </a:defRPr>
-            </a:pPr>
-            <a:r>
-              <a:t>Context &amp; support</a:t>
+                  <a:srgbClr val="9B59B6"/>
+                </a:solidFill>
+                <a:latin typeface="Calibri"/>
+              </a:defRPr>
+            </a:pPr>
+            <a:r>
+              <a:t>Node failure</a:t>
             </a:r>
           </a:p>
         </p:txBody>
@@ -9699,7 +11354,7 @@
               </a:defRPr>
             </a:pPr>
             <a:r>
-              <a:t>M1</a:t>
+              <a:t>H1</a:t>
             </a:r>
           </a:p>
         </p:txBody>
@@ -9735,7 +11390,7 @@
               </a:defRPr>
             </a:pPr>
             <a:r>
-              <a:t>Spreading flushes conn-state</a:t>
+              <a:t>The score cannot rank placements</a:t>
             </a:r>
           </a:p>
         </p:txBody>
@@ -9771,7 +11426,7 @@
               </a:defRPr>
             </a:pPr>
             <a:r>
-              <a:t>Primary metric. Under churn, spread/default flush 36-39% of node conntrack entries; colocate stays flat (−1.6%). 12/12 runs. The reproducible fault-response signal.</a:t>
+              <a:t>ICC_strategy = 0.033 (CI 0.014-0.178): only 3.3% of score variance is between-strategy (7 sessions, 147 iterations). Focal colocate 64.0 vs spread 74.3 (d = 0.46) needs 73 iters/strategy for 80% power; MDE at n=3 is ~51 points.</a:t>
             </a:r>
           </a:p>
         </p:txBody>
@@ -9869,7 +11524,7 @@
               </a:defRPr>
             </a:pPr>
             <a:r>
-              <a:t>M2</a:t>
+              <a:t>H2</a:t>
             </a:r>
           </a:p>
         </p:txBody>
@@ -9905,7 +11560,7 @@
               </a:defRPr>
             </a:pPr>
             <a:r>
-              <a:t>Co-location lowers CPU contention</a:t>
+              <a:t>Placement moves a reconvergence signature</a:t>
             </a:r>
           </a:p>
         </p:txBody>
@@ -9941,7 +11596,7 @@
               </a:defRPr>
             </a:pPr>
             <a:r>
-              <a:t>Colocate throttles less than default/spread (during-chaos rate 1.54 vs 1.90, 1.94), with lower CPU usage/pressure. 11/13 runs. Contention does not scale with density under churn.</a:t>
+              <a:t>Churn flushes conntrack state: spread 38.5% vs colocate 2.7% median; spread &gt; colocate in 7/7 sessions (sign p = .016, Wilcoxon p = .023). CPU throttling corroborates (colocate lowest, 6/7).</a:t>
             </a:r>
           </a:p>
         </p:txBody>
@@ -10039,7 +11694,7 @@
               </a:defRPr>
             </a:pPr>
             <a:r>
-              <a:t>M3</a:t>
+              <a:t>H3</a:t>
             </a:r>
           </a:p>
         </p:txBody>
@@ -10075,7 +11730,7 @@
               </a:defRPr>
             </a:pPr>
             <a:r>
-              <a:t>'Spread is safer' doesn't transfer to churn</a:t>
+              <a:t>The mechanism is decoupled from the user</a:t>
             </a:r>
           </a:p>
         </p:txBody>
@@ -10111,7 +11766,7 @@
               </a:defRPr>
             </a:pPr>
             <a:r>
-              <a:t>Both reproducible metrics favour co-location under churn. The literature's spread-isolation prescription is inapplicable at the mechanism layer — and does NOT reach the user (decoupling).</a:t>
+              <a:t>Flush vs dependent-route p95: ρ = 0.07 (n.s., TOST-decoupled) while the control route shows ρ = 0.29* — a run-level-confound signature, not dependency-specific user impact.</a:t>
             </a:r>
           </a:p>
         </p:txBody>
@@ -10125,176 +11780,6 @@
         <p:spPr>
           <a:xfrm>
             <a:off x="6080759" y="2651760"/>
-            <a:ext cx="1874519" cy="3383280"/>
-          </a:xfrm>
-          <a:prstGeom prst="roundRect">
-            <a:avLst/>
-          </a:prstGeom>
-          <a:solidFill>
-            <a:srgbClr val="121222"/>
-          </a:solidFill>
-          <a:ln w="25400">
-            <a:solidFill>
-              <a:srgbClr val="0096D6"/>
-            </a:solidFill>
-          </a:ln>
-        </p:spPr>
-        <p:style>
-          <a:lnRef idx="1">
-            <a:schemeClr val="accent1"/>
-          </a:lnRef>
-          <a:fillRef idx="3">
-            <a:schemeClr val="accent1"/>
-          </a:fillRef>
-          <a:effectRef idx="2">
-            <a:schemeClr val="accent1"/>
-          </a:effectRef>
-          <a:fontRef idx="minor">
-            <a:schemeClr val="lt1"/>
-          </a:fontRef>
-        </p:style>
-        <p:txBody>
-          <a:bodyPr rtlCol="0" anchor="ctr"/>
-          <a:lstStyle/>
-          <a:p>
-            <a:pPr algn="ctr"/>
-          </a:p>
-        </p:txBody>
-      </p:sp>
-      <p:sp>
-        <p:nvSpPr>
-          <p:cNvPr id="22" name="Rounded Rectangle 21"/>
-          <p:cNvSpPr/>
-          <p:nvPr/>
-        </p:nvSpPr>
-        <p:spPr>
-          <a:xfrm>
-            <a:off x="6080759" y="2651760"/>
-            <a:ext cx="1874519" cy="320040"/>
-          </a:xfrm>
-          <a:prstGeom prst="roundRect">
-            <a:avLst/>
-          </a:prstGeom>
-          <a:solidFill>
-            <a:srgbClr val="0096D6"/>
-          </a:solidFill>
-          <a:ln>
-            <a:noFill/>
-          </a:ln>
-        </p:spPr>
-        <p:style>
-          <a:lnRef idx="1">
-            <a:schemeClr val="accent1"/>
-          </a:lnRef>
-          <a:fillRef idx="3">
-            <a:schemeClr val="accent1"/>
-          </a:fillRef>
-          <a:effectRef idx="2">
-            <a:schemeClr val="accent1"/>
-          </a:effectRef>
-          <a:fontRef idx="minor">
-            <a:schemeClr val="lt1"/>
-          </a:fontRef>
-        </p:style>
-        <p:txBody>
-          <a:bodyPr rtlCol="0" anchor="ctr" wrap="square" lIns="50800" rIns="50800" tIns="25400" bIns="25400"/>
-          <a:lstStyle/>
-          <a:p>
-            <a:pPr algn="ctr">
-              <a:defRPr sz="1300" b="1">
-                <a:solidFill>
-                  <a:srgbClr val="FFFFFF"/>
-                </a:solidFill>
-                <a:latin typeface="Calibri"/>
-              </a:defRPr>
-            </a:pPr>
-            <a:r>
-              <a:t>M4</a:t>
-            </a:r>
-          </a:p>
-        </p:txBody>
-      </p:sp>
-      <p:sp>
-        <p:nvSpPr>
-          <p:cNvPr id="23" name="TextBox 22"/>
-          <p:cNvSpPr txBox="1"/>
-          <p:nvPr/>
-        </p:nvSpPr>
-        <p:spPr>
-          <a:xfrm>
-            <a:off x="6172199" y="3017520"/>
-            <a:ext cx="1691639" cy="365760"/>
-          </a:xfrm>
-          <a:prstGeom prst="rect">
-            <a:avLst/>
-          </a:prstGeom>
-          <a:noFill/>
-        </p:spPr>
-        <p:txBody>
-          <a:bodyPr wrap="square">
-            <a:spAutoFit/>
-          </a:bodyPr>
-          <a:lstStyle/>
-          <a:p>
-            <a:pPr algn="l">
-              <a:defRPr sz="1100" b="1">
-                <a:solidFill>
-                  <a:srgbClr val="0096D6"/>
-                </a:solidFill>
-                <a:latin typeface="Calibri"/>
-              </a:defRPr>
-            </a:pPr>
-            <a:r>
-              <a:t>Score decoupled from metrics</a:t>
-            </a:r>
-          </a:p>
-        </p:txBody>
-      </p:sp>
-      <p:sp>
-        <p:nvSpPr>
-          <p:cNvPr id="24" name="TextBox 23"/>
-          <p:cNvSpPr txBox="1"/>
-          <p:nvPr/>
-        </p:nvSpPr>
-        <p:spPr>
-          <a:xfrm>
-            <a:off x="6172199" y="3429000"/>
-            <a:ext cx="1691639" cy="2514600"/>
-          </a:xfrm>
-          <a:prstGeom prst="rect">
-            <a:avLst/>
-          </a:prstGeom>
-          <a:noFill/>
-        </p:spPr>
-        <p:txBody>
-          <a:bodyPr wrap="square">
-            <a:spAutoFit/>
-          </a:bodyPr>
-          <a:lstStyle/>
-          <a:p>
-            <a:pPr algn="l">
-              <a:defRPr sz="900" b="0">
-                <a:solidFill>
-                  <a:srgbClr val="BDBDBD"/>
-                </a:solidFill>
-                <a:latin typeface="Calibri"/>
-              </a:defRPr>
-            </a:pPr>
-            <a:r>
-              <a:t>Where conntrack &amp; CPU reproduce (≥11/13), the resilience score does NOT (33-89 across runs). The binary-probe score is a lossy instrument; the metrics are the reliable outcome.</a:t>
-            </a:r>
-          </a:p>
-        </p:txBody>
-      </p:sp>
-      <p:sp>
-        <p:nvSpPr>
-          <p:cNvPr id="25" name="Rounded Rectangle 24"/>
-          <p:cNvSpPr/>
-          <p:nvPr/>
-        </p:nvSpPr>
-        <p:spPr>
-          <a:xfrm>
-            <a:off x="8000999" y="2651760"/>
             <a:ext cx="1874519" cy="3383280"/>
           </a:xfrm>
           <a:prstGeom prst="roundRect">
@@ -10333,13 +11818,13 @@
       </p:sp>
       <p:sp>
         <p:nvSpPr>
-          <p:cNvPr id="26" name="Rounded Rectangle 25"/>
+          <p:cNvPr id="22" name="Rounded Rectangle 21"/>
           <p:cNvSpPr/>
           <p:nvPr/>
         </p:nvSpPr>
         <p:spPr>
           <a:xfrm>
-            <a:off x="8000999" y="2651760"/>
+            <a:off x="6080759" y="2651760"/>
             <a:ext cx="1874519" cy="320040"/>
           </a:xfrm>
           <a:prstGeom prst="roundRect">
@@ -10379,20 +11864,20 @@
               </a:defRPr>
             </a:pPr>
             <a:r>
-              <a:t>S1</a:t>
-            </a:r>
-          </a:p>
-        </p:txBody>
-      </p:sp>
-      <p:sp>
-        <p:nvSpPr>
-          <p:cNvPr id="27" name="TextBox 26"/>
+              <a:t>H4</a:t>
+            </a:r>
+          </a:p>
+        </p:txBody>
+      </p:sp>
+      <p:sp>
+        <p:nvSpPr>
+          <p:cNvPr id="23" name="TextBox 22"/>
           <p:cNvSpPr txBox="1"/>
           <p:nvPr/>
         </p:nvSpPr>
         <p:spPr>
           <a:xfrm>
-            <a:off x="8092439" y="3017520"/>
+            <a:off x="6172199" y="3017520"/>
             <a:ext cx="1691639" cy="365760"/>
           </a:xfrm>
           <a:prstGeom prst="rect">
@@ -10415,20 +11900,20 @@
               </a:defRPr>
             </a:pPr>
             <a:r>
-              <a:t>Mechanism signal is churn-specific</a:t>
-            </a:r>
-          </a:p>
-        </p:txBody>
-      </p:sp>
-      <p:sp>
-        <p:nvSpPr>
-          <p:cNvPr id="28" name="TextBox 27"/>
+              <a:t>Under load, mechanism only</a:t>
+            </a:r>
+          </a:p>
+        </p:txBody>
+      </p:sp>
+      <p:sp>
+        <p:nvSpPr>
+          <p:cNvPr id="24" name="TextBox 23"/>
           <p:cNvSpPr txBox="1"/>
           <p:nvPr/>
         </p:nvSpPr>
         <p:spPr>
           <a:xfrm>
-            <a:off x="8092439" y="3429000"/>
+            <a:off x="6172199" y="3429000"/>
             <a:ext cx="1691639" cy="2514600"/>
           </a:xfrm>
           <a:prstGeom prst="rect">
@@ -10451,7 +11936,177 @@
               </a:defRPr>
             </a:pPr>
             <a:r>
-              <a:t>cpu-hog (n=2) does not reproduce: one run scored ~100 across strategies, one saw many iterations fail (33-67, σ≈58). The score is noisy under both faults; the reproducible M1/M2 signal is churn-specific.</a:t>
+              <a:t>East-west effect replicates: colocate ~1.3-1.4x lower inter-service p95 than spread (two i=4 batches). The user-layer effect did not survive replication — no user-visible placement claim under load.</a:t>
+            </a:r>
+          </a:p>
+        </p:txBody>
+      </p:sp>
+      <p:sp>
+        <p:nvSpPr>
+          <p:cNvPr id="25" name="Rounded Rectangle 24"/>
+          <p:cNvSpPr/>
+          <p:nvPr/>
+        </p:nvSpPr>
+        <p:spPr>
+          <a:xfrm>
+            <a:off x="8000999" y="2651760"/>
+            <a:ext cx="1874519" cy="3383280"/>
+          </a:xfrm>
+          <a:prstGeom prst="roundRect">
+            <a:avLst/>
+          </a:prstGeom>
+          <a:solidFill>
+            <a:srgbClr val="121222"/>
+          </a:solidFill>
+          <a:ln w="25400">
+            <a:solidFill>
+              <a:srgbClr val="F39C12"/>
+            </a:solidFill>
+          </a:ln>
+        </p:spPr>
+        <p:style>
+          <a:lnRef idx="1">
+            <a:schemeClr val="accent1"/>
+          </a:lnRef>
+          <a:fillRef idx="3">
+            <a:schemeClr val="accent1"/>
+          </a:fillRef>
+          <a:effectRef idx="2">
+            <a:schemeClr val="accent1"/>
+          </a:effectRef>
+          <a:fontRef idx="minor">
+            <a:schemeClr val="lt1"/>
+          </a:fontRef>
+        </p:style>
+        <p:txBody>
+          <a:bodyPr rtlCol="0" anchor="ctr"/>
+          <a:lstStyle/>
+          <a:p>
+            <a:pPr algn="ctr"/>
+          </a:p>
+        </p:txBody>
+      </p:sp>
+      <p:sp>
+        <p:nvSpPr>
+          <p:cNvPr id="26" name="Rounded Rectangle 25"/>
+          <p:cNvSpPr/>
+          <p:nvPr/>
+        </p:nvSpPr>
+        <p:spPr>
+          <a:xfrm>
+            <a:off x="8000999" y="2651760"/>
+            <a:ext cx="1874519" cy="320040"/>
+          </a:xfrm>
+          <a:prstGeom prst="roundRect">
+            <a:avLst/>
+          </a:prstGeom>
+          <a:solidFill>
+            <a:srgbClr val="F39C12"/>
+          </a:solidFill>
+          <a:ln>
+            <a:noFill/>
+          </a:ln>
+        </p:spPr>
+        <p:style>
+          <a:lnRef idx="1">
+            <a:schemeClr val="accent1"/>
+          </a:lnRef>
+          <a:fillRef idx="3">
+            <a:schemeClr val="accent1"/>
+          </a:fillRef>
+          <a:effectRef idx="2">
+            <a:schemeClr val="accent1"/>
+          </a:effectRef>
+          <a:fontRef idx="minor">
+            <a:schemeClr val="lt1"/>
+          </a:fontRef>
+        </p:style>
+        <p:txBody>
+          <a:bodyPr rtlCol="0" anchor="ctr" wrap="square" lIns="50800" rIns="50800" tIns="25400" bIns="25400"/>
+          <a:lstStyle/>
+          <a:p>
+            <a:pPr algn="ctr">
+              <a:defRPr sz="1300" b="1">
+                <a:solidFill>
+                  <a:srgbClr val="FFFFFF"/>
+                </a:solidFill>
+                <a:latin typeface="Calibri"/>
+              </a:defRPr>
+            </a:pPr>
+            <a:r>
+              <a:t>H5</a:t>
+            </a:r>
+          </a:p>
+        </p:txBody>
+      </p:sp>
+      <p:sp>
+        <p:nvSpPr>
+          <p:cNvPr id="27" name="TextBox 26"/>
+          <p:cNvSpPr txBox="1"/>
+          <p:nvPr/>
+        </p:nvSpPr>
+        <p:spPr>
+          <a:xfrm>
+            <a:off x="8092439" y="3017520"/>
+            <a:ext cx="1691639" cy="365760"/>
+          </a:xfrm>
+          <a:prstGeom prst="rect">
+            <a:avLst/>
+          </a:prstGeom>
+          <a:noFill/>
+        </p:spPr>
+        <p:txBody>
+          <a:bodyPr wrap="square">
+            <a:spAutoFit/>
+          </a:bodyPr>
+          <a:lstStyle/>
+          <a:p>
+            <a:pPr algn="l">
+              <a:defRPr sz="1100" b="1">
+                <a:solidFill>
+                  <a:srgbClr val="F39C12"/>
+                </a:solidFill>
+                <a:latin typeface="Calibri"/>
+              </a:defRPr>
+            </a:pPr>
+            <a:r>
+              <a:t>A graph metric predicts the east-west tail</a:t>
+            </a:r>
+          </a:p>
+        </p:txBody>
+      </p:sp>
+      <p:sp>
+        <p:nvSpPr>
+          <p:cNvPr id="28" name="TextBox 27"/>
+          <p:cNvSpPr txBox="1"/>
+          <p:nvPr/>
+        </p:nvSpPr>
+        <p:spPr>
+          <a:xfrm>
+            <a:off x="8092439" y="3429000"/>
+            <a:ext cx="1691639" cy="2514600"/>
+          </a:xfrm>
+          <a:prstGeom prst="rect">
+            <a:avLst/>
+          </a:prstGeom>
+          <a:noFill/>
+        </p:spPr>
+        <p:txBody>
+          <a:bodyPr wrap="square">
+            <a:spAutoFit/>
+          </a:bodyPr>
+          <a:lstStyle/>
+          <a:p>
+            <a:pPr algn="l">
+              <a:defRPr sz="900" b="0">
+                <a:solidFill>
+                  <a:srgbClr val="BDBDBD"/>
+                </a:solidFill>
+                <a:latin typeface="Calibri"/>
+              </a:defRPr>
+            </a:pPr>
+            <a:r>
+              <a:t>Cross-node call fraction (dependency graph + placement, pre-chaos) vs east-west p95: ρ = 0.79 (n = 8, p &lt; .05). Coarse — separates node-local from spreading placements — but makes the Neo4j graph analytically load-bearing.</a:t>
             </a:r>
           </a:p>
         </p:txBody>
@@ -10549,7 +12204,7 @@
               </a:defRPr>
             </a:pPr>
             <a:r>
-              <a:t>S2</a:t>
+              <a:t>H6</a:t>
             </a:r>
           </a:p>
         </p:txBody>
@@ -10585,7 +12240,7 @@
               </a:defRPr>
             </a:pPr>
             <a:r>
-              <a:t>Recovery split is unstable</a:t>
+              <a:t>Latency vs availability trade-off</a:t>
             </a:r>
           </a:p>
         </p:txBody>
@@ -10621,7 +12276,7 @@
               </a:defRPr>
             </a:pPr>
             <a:r>
-              <a:t>The d2s/s2r split is run-dependent: app-startup dominates in some runs (84-96%), the scheduling term in others (up to ~78%). Recovery decomposition is not a stable placement signal.</a:t>
+              <a:t>Node drain: colocate loses 11/11 services (100% blast, ~10.3 s recovery) vs spread 2/11 (18%, ~2.6 s); two doctor-clean batches. The co-location that wins H5's latency loses H6's availability.</a:t>
             </a:r>
           </a:p>
         </p:txBody>
@@ -10657,7 +12312,7 @@
               </a:defRPr>
             </a:pPr>
             <a:r>
-              <a:t>Each hypothesis is testable from ChaosProbe-collected metrics; the data column reports current evidence.</a:t>
+              <a:t>Each hypothesis is falsifiable from ChaosProbe-collected data. The literature predictions L1-L3 are kept as context: inapplicable in this regime, not refuted.</a:t>
             </a:r>
           </a:p>
         </p:txBody>
@@ -11396,7 +13051,11 @@
             </a:r>
             <a:br/>
             <a:r>
-              <a:t>  6 strategies × 2 faults × 4 metrics</a:t>
+              <a:t>  8 placements × 3 fault classes,</a:t>
+            </a:r>
+            <a:br/>
+            <a:r>
+              <a:t>  layered metrics</a:t>
             </a:r>
           </a:p>
           <a:p>
@@ -11455,7 +13114,7 @@
               </a:defRPr>
             </a:pPr>
             <a:r>
-              <a:t>Expected Contention by Placement (Literature-Informed Hypotheses)</a:t>
+              <a:t>Expected Contention by Placement (Literature Predictions L1–L3 — tested as context)</a:t>
             </a:r>
           </a:p>
         </p:txBody>
@@ -15370,7 +17029,7 @@
               </a:defRPr>
             </a:pPr>
             <a:r>
-              <a:t>Analytic weight: the reproducible findings (M1 conntrack flush, M2 CPU throttling) rest on the colocate vs. spread/default locality contrast. Random, adversarial, best-fit &amp; dependency-aware are a generality check — designed for the contention hypothesis, present in only half the run set, they widen the placements the noisy score still can't rank (M4) and await the cpu-hog contention matrix.</a:t>
+              <a:t>Analytic weight: the churn findings (H2 conntrack reconvergence, H3 decoupling) rest on the colocate vs. spread locality contrast. All 8 placements enter the load matrix — H5's cross-node fraction is computed per strategy (n = 8) — and H6 contrasts the two extremes (colocate vs. spread) under node drain; a gradient run over the intermediate placements extends that two-point contrast.</a:t>
             </a:r>
           </a:p>
         </p:txBody>
@@ -17332,7 +18991,7 @@
               </a:defRPr>
             </a:pPr>
             <a:r>
-              <a:t>Multi-Fault Placement Matrix</a:t>
+              <a:t>Three Fault Classes × Placement</a:t>
             </a:r>
           </a:p>
         </p:txBody>
@@ -17356,9 +19015,10 @@
                 <a:tableStyleId>{5C22544A-7EE6-4342-B048-85BDC9FD1C3A}</a:tableStyleId>
               </a:tblPr>
               <a:tblGrid>
-                <a:gridCol w="1706880"/>
-                <a:gridCol w="1706880"/>
-                <a:gridCol w="1706880"/>
+                <a:gridCol w="1280160"/>
+                <a:gridCol w="1280160"/>
+                <a:gridCol w="1280160"/>
+                <a:gridCol w="1280160"/>
               </a:tblGrid>
               <a:tr h="292608">
                 <a:tc>
@@ -17368,7 +19028,7 @@
                     <a:p>
                       <a:pPr algn="l"/>
                       <a:r>
-                        <a:rPr sz="900" b="1">
+                        <a:rPr sz="800" b="1">
                           <a:solidFill>
                             <a:srgbClr val="FFFFFF"/>
                           </a:solidFill>
@@ -17391,7 +19051,7 @@
                     <a:p>
                       <a:pPr algn="l"/>
                       <a:r>
-                        <a:rPr sz="900" b="1">
+                        <a:rPr sz="800" b="1">
                           <a:solidFill>
                             <a:srgbClr val="FFFFFF"/>
                           </a:solidFill>
@@ -17414,13 +19074,36 @@
                     <a:p>
                       <a:pPr algn="l"/>
                       <a:r>
-                        <a:rPr sz="900" b="1">
+                        <a:rPr sz="800" b="1">
                           <a:solidFill>
                             <a:srgbClr val="FFFFFF"/>
                           </a:solidFill>
                           <a:latin typeface="Calibri"/>
                         </a:rPr>
-                        <a:t>Contention (pod-cpu-hog)</a:t>
+                        <a:t>Load (Locust spike)</a:t>
+                      </a:r>
+                    </a:p>
+                  </a:txBody>
+                  <a:tcPr marL="76200" marR="76200" marT="38100" marB="38100">
+                    <a:solidFill>
+                      <a:srgbClr val="E74C3C"/>
+                    </a:solidFill>
+                  </a:tcPr>
+                </a:tc>
+                <a:tc>
+                  <a:txBody>
+                    <a:bodyPr wrap="square"/>
+                    <a:lstStyle/>
+                    <a:p>
+                      <a:pPr algn="l"/>
+                      <a:r>
+                        <a:rPr sz="800" b="1">
+                          <a:solidFill>
+                            <a:srgbClr val="FFFFFF"/>
+                          </a:solidFill>
+                          <a:latin typeface="Calibri"/>
+                        </a:rPr>
+                        <a:t>Node failure (drain)</a:t>
                       </a:r>
                     </a:p>
                   </a:txBody>
@@ -17439,7 +19122,101 @@
                     <a:p>
                       <a:pPr algn="l"/>
                       <a:r>
-                        <a:rPr sz="900" b="0">
+                        <a:rPr sz="800" b="0">
+                          <a:solidFill>
+                            <a:srgbClr val="FFFFFF"/>
+                          </a:solidFill>
+                          <a:latin typeface="Calibri"/>
+                        </a:rPr>
+                        <a:t>Stressor</a:t>
+                      </a:r>
+                    </a:p>
+                  </a:txBody>
+                  <a:tcPr marL="76200" marR="76200" marT="38100" marB="38100">
+                    <a:solidFill>
+                      <a:srgbClr val="2A2A3E"/>
+                    </a:solidFill>
+                  </a:tcPr>
+                </a:tc>
+                <a:tc>
+                  <a:txBody>
+                    <a:bodyPr wrap="square"/>
+                    <a:lstStyle/>
+                    <a:p>
+                      <a:pPr algn="l"/>
+                      <a:r>
+                        <a:rPr sz="800" b="0">
+                          <a:solidFill>
+                            <a:srgbClr val="FFFFFF"/>
+                          </a:solidFill>
+                          <a:latin typeface="Calibri"/>
+                        </a:rPr>
+                        <a:t>Kill target every 15s, 120s</a:t>
+                      </a:r>
+                    </a:p>
+                  </a:txBody>
+                  <a:tcPr marL="76200" marR="76200" marT="38100" marB="38100">
+                    <a:solidFill>
+                      <a:srgbClr val="2A2A3E"/>
+                    </a:solidFill>
+                  </a:tcPr>
+                </a:tc>
+                <a:tc>
+                  <a:txBody>
+                    <a:bodyPr wrap="square"/>
+                    <a:lstStyle/>
+                    <a:p>
+                      <a:pPr algn="l"/>
+                      <a:r>
+                        <a:rPr sz="800" b="0">
+                          <a:solidFill>
+                            <a:srgbClr val="FFFFFF"/>
+                          </a:solidFill>
+                          <a:latin typeface="Calibri"/>
+                        </a:rPr>
+                        <a:t>200-user sustained spike</a:t>
+                      </a:r>
+                    </a:p>
+                  </a:txBody>
+                  <a:tcPr marL="76200" marR="76200" marT="38100" marB="38100">
+                    <a:solidFill>
+                      <a:srgbClr val="2A2A3E"/>
+                    </a:solidFill>
+                  </a:tcPr>
+                </a:tc>
+                <a:tc>
+                  <a:txBody>
+                    <a:bodyPr wrap="square"/>
+                    <a:lstStyle/>
+                    <a:p>
+                      <a:pPr algn="l"/>
+                      <a:r>
+                        <a:rPr sz="800" b="0">
+                          <a:solidFill>
+                            <a:srgbClr val="FFFFFF"/>
+                          </a:solidFill>
+                          <a:latin typeface="Calibri"/>
+                        </a:rPr>
+                        <a:t>Drain the target's node</a:t>
+                      </a:r>
+                    </a:p>
+                  </a:txBody>
+                  <a:tcPr marL="76200" marR="76200" marT="38100" marB="38100">
+                    <a:solidFill>
+                      <a:srgbClr val="2A2A3E"/>
+                    </a:solidFill>
+                  </a:tcPr>
+                </a:tc>
+              </a:tr>
+              <a:tr h="292608">
+                <a:tc>
+                  <a:txBody>
+                    <a:bodyPr wrap="square"/>
+                    <a:lstStyle/>
+                    <a:p>
+                      <a:pPr algn="l"/>
+                      <a:r>
+                        <a:rPr sz="800" b="0">
                           <a:solidFill>
                             <a:srgbClr val="FFFFFF"/>
                           </a:solidFill>
@@ -17462,7 +19239,7 @@
                     <a:p>
                       <a:pPr algn="l"/>
                       <a:r>
-                        <a:rPr sz="900" b="0">
+                        <a:rPr sz="800" b="0">
                           <a:solidFill>
                             <a:srgbClr val="FFFFFF"/>
                           </a:solidFill>
@@ -17485,13 +19262,36 @@
                     <a:p>
                       <a:pPr algn="l"/>
                       <a:r>
-                        <a:rPr sz="900" b="0">
+                        <a:rPr sz="800" b="0">
                           <a:solidFill>
                             <a:srgbClr val="FFFFFF"/>
                           </a:solidFill>
                           <a:latin typeface="Calibri"/>
                         </a:rPr>
-                        <a:t>productcatalogservice</a:t>
+                        <a:t>whole app under load</a:t>
+                      </a:r>
+                    </a:p>
+                  </a:txBody>
+                  <a:tcPr marL="76200" marR="76200" marT="38100" marB="38100">
+                    <a:solidFill>
+                      <a:srgbClr val="2A2A3E"/>
+                    </a:solidFill>
+                  </a:tcPr>
+                </a:tc>
+                <a:tc>
+                  <a:txBody>
+                    <a:bodyPr wrap="square"/>
+                    <a:lstStyle/>
+                    <a:p>
+                      <a:pPr algn="l"/>
+                      <a:r>
+                        <a:rPr sz="800" b="0">
+                          <a:solidFill>
+                            <a:srgbClr val="FFFFFF"/>
+                          </a:solidFill>
+                          <a:latin typeface="Calibri"/>
+                        </a:rPr>
+                        <a:t>node hosting the target</a:t>
                       </a:r>
                     </a:p>
                   </a:txBody>
@@ -17510,13 +19310,13 @@
                     <a:p>
                       <a:pPr algn="l"/>
                       <a:r>
-                        <a:rPr sz="900" b="0">
+                        <a:rPr sz="800" b="0">
                           <a:solidFill>
                             <a:srgbClr val="FFFFFF"/>
                           </a:solidFill>
                           <a:latin typeface="Calibri"/>
                         </a:rPr>
-                        <a:t>Duration</a:t>
+                        <a:t>Layer read</a:t>
                       </a:r>
                     </a:p>
                   </a:txBody>
@@ -17533,13 +19333,13 @@
                     <a:p>
                       <a:pPr algn="l"/>
                       <a:r>
-                        <a:rPr sz="900" b="0">
+                        <a:rPr sz="800" b="0">
                           <a:solidFill>
                             <a:srgbClr val="FFFFFF"/>
                           </a:solidFill>
                           <a:latin typeface="Calibri"/>
                         </a:rPr>
-                        <a:t>120s (CHAOS_INTERVAL=15s)</a:t>
+                        <a:t>Score + mechanism + user</a:t>
                       </a:r>
                     </a:p>
                   </a:txBody>
@@ -17556,13 +19356,36 @@
                     <a:p>
                       <a:pPr algn="l"/>
                       <a:r>
-                        <a:rPr sz="900" b="0">
+                        <a:rPr sz="800" b="0">
                           <a:solidFill>
                             <a:srgbClr val="FFFFFF"/>
                           </a:solidFill>
                           <a:latin typeface="Calibri"/>
                         </a:rPr>
-                        <a:t>120s (1 core, 100% load)</a:t>
+                        <a:t>East-west + user routes</a:t>
+                      </a:r>
+                    </a:p>
+                  </a:txBody>
+                  <a:tcPr marL="76200" marR="76200" marT="38100" marB="38100">
+                    <a:solidFill>
+                      <a:srgbClr val="2A2A3E"/>
+                    </a:solidFill>
+                  </a:tcPr>
+                </a:tc>
+                <a:tc>
+                  <a:txBody>
+                    <a:bodyPr wrap="square"/>
+                    <a:lstStyle/>
+                    <a:p>
+                      <a:pPr algn="l"/>
+                      <a:r>
+                        <a:rPr sz="800" b="0">
+                          <a:solidFill>
+                            <a:srgbClr val="FFFFFF"/>
+                          </a:solidFill>
+                          <a:latin typeface="Calibri"/>
+                        </a:rPr>
+                        <a:t>Blast radius + recovery</a:t>
                       </a:r>
                     </a:p>
                   </a:txBody>
@@ -17581,13 +19404,13 @@
                     <a:p>
                       <a:pPr algn="l"/>
                       <a:r>
-                        <a:rPr sz="900" b="0">
+                        <a:rPr sz="800" b="0">
                           <a:solidFill>
                             <a:srgbClr val="FFFFFF"/>
                           </a:solidFill>
                           <a:latin typeface="Calibri"/>
                         </a:rPr>
-                        <a:t>Probes</a:t>
+                        <a:t>Hypotheses</a:t>
                       </a:r>
                     </a:p>
                   </a:txBody>
@@ -17604,13 +19427,13 @@
                     <a:p>
                       <a:pPr algn="l"/>
                       <a:r>
-                        <a:rPr sz="900" b="0">
+                        <a:rPr sz="800" b="0">
                           <a:solidFill>
                             <a:srgbClr val="FFFFFF"/>
                           </a:solidFill>
                           <a:latin typeface="Calibri"/>
                         </a:rPr>
-                        <a:t>7 httpProbes + 5 cmdProbes</a:t>
+                        <a:t>H1–H3</a:t>
                       </a:r>
                     </a:p>
                   </a:txBody>
@@ -17627,38 +19450,13 @@
                     <a:p>
                       <a:pPr algn="l"/>
                       <a:r>
-                        <a:rPr sz="900" b="0">
+                        <a:rPr sz="800" b="0">
                           <a:solidFill>
                             <a:srgbClr val="FFFFFF"/>
                           </a:solidFill>
                           <a:latin typeface="Calibri"/>
                         </a:rPr>
-                        <a:t>Same probe set</a:t>
-                      </a:r>
-                    </a:p>
-                  </a:txBody>
-                  <a:tcPr marL="76200" marR="76200" marT="38100" marB="38100">
-                    <a:solidFill>
-                      <a:srgbClr val="2A2A3E"/>
-                    </a:solidFill>
-                  </a:tcPr>
-                </a:tc>
-              </a:tr>
-              <a:tr h="292608">
-                <a:tc>
-                  <a:txBody>
-                    <a:bodyPr wrap="square"/>
-                    <a:lstStyle/>
-                    <a:p>
-                      <a:pPr algn="l"/>
-                      <a:r>
-                        <a:rPr sz="900" b="0">
-                          <a:solidFill>
-                            <a:srgbClr val="FFFFFF"/>
-                          </a:solidFill>
-                          <a:latin typeface="Calibri"/>
-                        </a:rPr>
-                        <a:t>Role</a:t>
+                        <a:t>H4–H5</a:t>
                       </a:r>
                     </a:p>
                   </a:txBody>
@@ -17675,36 +19473,13 @@
                     <a:p>
                       <a:pPr algn="l"/>
                       <a:r>
-                        <a:rPr sz="900" b="0">
+                        <a:rPr sz="800" b="0">
                           <a:solidFill>
                             <a:srgbClr val="FFFFFF"/>
                           </a:solidFill>
                           <a:latin typeface="Calibri"/>
                         </a:rPr>
-                        <a:t>Tests churn-class story</a:t>
-                      </a:r>
-                    </a:p>
-                  </a:txBody>
-                  <a:tcPr marL="76200" marR="76200" marT="38100" marB="38100">
-                    <a:solidFill>
-                      <a:srgbClr val="2A2A3E"/>
-                    </a:solidFill>
-                  </a:tcPr>
-                </a:tc>
-                <a:tc>
-                  <a:txBody>
-                    <a:bodyPr wrap="square"/>
-                    <a:lstStyle/>
-                    <a:p>
-                      <a:pPr algn="l"/>
-                      <a:r>
-                        <a:rPr sz="900" b="0">
-                          <a:solidFill>
-                            <a:srgbClr val="FFFFFF"/>
-                          </a:solidFill>
-                          <a:latin typeface="Calibri"/>
-                        </a:rPr>
-                        <a:t>Tests if literature returns</a:t>
+                        <a:t>H6</a:t>
                       </a:r>
                     </a:p>
                   </a:txBody>
@@ -23368,7 +25143,7 @@
               </a:defRPr>
             </a:pPr>
             <a:r>
-              <a:t>Results — Why the Score Is Demoted (M4)</a:t>
+              <a:t>Results — H1: The Score Cannot Rank Placements</a:t>
             </a:r>
           </a:p>
         </p:txBody>
@@ -23416,79 +25191,30 @@
           </a:p>
         </p:txBody>
       </p:sp>
-      <p:sp>
-        <p:nvSpPr>
-          <p:cNvPr id="4" name="Rounded Rectangle 3"/>
-          <p:cNvSpPr/>
-          <p:nvPr/>
-        </p:nvSpPr>
+      <p:pic>
+        <p:nvPicPr>
+          <p:cNvPr id="4" name="Picture 3" descr="score_distribution.png"/>
+          <p:cNvPicPr>
+            <a:picLocks noChangeAspect="1"/>
+          </p:cNvPicPr>
+          <p:nvPr/>
+        </p:nvPicPr>
+        <p:blipFill>
+          <a:blip r:embed="rId2"/>
+          <a:stretch>
+            <a:fillRect/>
+          </a:stretch>
+        </p:blipFill>
         <p:spPr>
           <a:xfrm>
             <a:off x="457200" y="1280160"/>
             <a:ext cx="6858000" cy="4114800"/>
           </a:xfrm>
-          <a:prstGeom prst="roundRect">
-            <a:avLst/>
-          </a:prstGeom>
-          <a:solidFill>
-            <a:srgbClr val="121222"/>
-          </a:solidFill>
-          <a:ln w="12700">
-            <a:solidFill>
-              <a:srgbClr val="9090A0"/>
-            </a:solidFill>
-          </a:ln>
-        </p:spPr>
-        <p:style>
-          <a:lnRef idx="1">
-            <a:schemeClr val="accent1"/>
-          </a:lnRef>
-          <a:fillRef idx="3">
-            <a:schemeClr val="accent1"/>
-          </a:fillRef>
-          <a:effectRef idx="2">
-            <a:schemeClr val="accent1"/>
-          </a:effectRef>
-          <a:fontRef idx="minor">
-            <a:schemeClr val="lt1"/>
-          </a:fontRef>
-        </p:style>
-        <p:txBody>
-          <a:bodyPr rtlCol="0" anchor="ctr" wrap="square" lIns="50800" rIns="50800" tIns="25400" bIns="25400"/>
-          <a:lstStyle/>
-          <a:p>
-            <a:pPr algn="ctr">
-              <a:defRPr sz="1100" b="0">
-                <a:solidFill>
-                  <a:srgbClr val="9090A0"/>
-                </a:solidFill>
-                <a:latin typeface="Calibri"/>
-              </a:defRPr>
-            </a:pPr>
-            <a:r>
-              <a:t>[Resilience Score Distribution Across Runs]</a:t>
-            </a:r>
-            <a:br/>
-            <a:br/>
-            <a:r>
-              <a:t>Box plot of resilience score (0–100%) per</a:t>
-            </a:r>
-            <a:br/>
-            <a:r>
-              <a:t>strategy across all churn runs — the boxes</a:t>
-            </a:r>
-            <a:br/>
-            <a:r>
-              <a:t>overlap, so the score cannot rank placements.</a:t>
-            </a:r>
-            <a:br/>
-            <a:br/>
-            <a:r>
-              <a:t>Generated by: scripts/distribution_charts.py</a:t>
-            </a:r>
-          </a:p>
-        </p:txBody>
-      </p:sp>
+          <a:prstGeom prst="rect">
+            <a:avLst/>
+          </a:prstGeom>
+        </p:spPr>
+      </p:pic>
       <p:sp>
         <p:nvSpPr>
           <p:cNvPr id="5" name="Rounded Rectangle 4"/>
@@ -23630,11 +25356,15 @@
               </a:defRPr>
             </a:pPr>
             <a:r>
-              <a:t>• The score does NOT reproduce across the 13</a:t>
+              <a:t>• ICC_strategy = 0.033, 95% CI [0.014, 0.178]:</a:t>
             </a:r>
             <a:br/>
             <a:r>
-              <a:t>  churn runs (≥3 iters, post-fix, baseline=100):</a:t>
+              <a:t>  only 3.3% of score variance is</a:t>
+            </a:r>
+            <a:br/>
+            <a:r>
+              <a:t>  between-strategy</a:t>
             </a:r>
           </a:p>
           <a:p>
@@ -23653,15 +25383,11 @@
               </a:defRPr>
             </a:pPr>
             <a:r>
-              <a:t>    colocate 49.7–83  (mean 69.5)</a:t>
+              <a:t>• Evidence base: 7 independent sessions,</a:t>
             </a:r>
             <a:br/>
             <a:r>
-              <a:t>    spread   33–88.7  (mean 70.5)</a:t>
-            </a:r>
-            <a:br/>
-            <a:r>
-              <a:t>    default  33–83    (mean 58.9)</a:t>
+              <a:t>  147 churn iterations</a:t>
             </a:r>
           </a:p>
           <a:p>
@@ -23680,11 +25406,15 @@
               </a:defRPr>
             </a:pPr>
             <a:r>
-              <a:t>• Within-strategy stddev (11–17) dwarfs</a:t>
+              <a:t>• Focal contrast colocate 64.0 vs spread 74.3</a:t>
             </a:r>
             <a:br/>
             <a:r>
-              <a:t>  the colocate-vs-spread gap (~1 point)</a:t>
+              <a:t>  (d = 0.46) → 73 iterations/strategy</a:t>
+            </a:r>
+            <a:br/>
+            <a:r>
+              <a:t>  needed for 80% power</a:t>
             </a:r>
           </a:p>
           <a:p>
@@ -23703,6 +25433,29 @@
               </a:defRPr>
             </a:pPr>
             <a:r>
+              <a:t>• At the n = 3 actually run, the minimum</a:t>
+            </a:r>
+            <a:br/>
+            <a:r>
+              <a:t>  detectable effect is ≈ 51 score points</a:t>
+            </a:r>
+          </a:p>
+          <a:p>
+            <a:pPr>
+              <a:spcBef>
+                <a:spcPts val="200"/>
+              </a:spcBef>
+              <a:spcAft>
+                <a:spcPts val="200"/>
+              </a:spcAft>
+              <a:defRPr sz="1000">
+                <a:solidFill>
+                  <a:srgbClr val="BDBDBD"/>
+                </a:solidFill>
+                <a:latin typeface="Calibri"/>
+              </a:defRPr>
+            </a:pPr>
+            <a:r>
               <a:t>• So the aggregate score cannot rank</a:t>
             </a:r>
             <a:br/>
@@ -23788,7 +25541,7 @@
               </a:defRPr>
             </a:pPr>
             <a:r>
-              <a:t>M4 — the score is decoupled from the reproducible metrics</a:t>
+              <a:t>H1 — the aggregate score cannot rank placement strategies</a:t>
             </a:r>
           </a:p>
         </p:txBody>
@@ -23932,7 +25685,7 @@
               </a:defRPr>
             </a:pPr>
             <a:r>
-              <a:t>The aggregate score is not reproducible run-to-run, so it cannot adjudicate L1–L3. They are resolved instead at the mechanism layer (next slides), where the signal IS stable.</a:t>
+              <a:t>The score's between-strategy variance is too small a fraction to adjudicate L1–L3 — they are inapplicable in this regime, not refuted. The signal lives at the mechanism layer (next slides).</a:t>
             </a:r>
           </a:p>
         </p:txBody>

--- a/ChaosProbe_Presentation.pptx
+++ b/ChaosProbe_Presentation.pptx
@@ -3615,15 +3615,19 @@
               </a:defRPr>
             </a:pPr>
             <a:r>
-              <a:t>• Mechanistic reading: churn tears down</a:t>
+              <a:t>• Protocol probe: TCP dominates the table</a:t>
             </a:r>
             <a:br/>
             <a:r>
-              <a:t>  cross-node flows that must reconverge;</a:t>
+              <a:t>  and DROPS at the kill cycles under BOTH</a:t>
             </a:r>
             <a:br/>
             <a:r>
-              <a:t>  node-local paths are spared</a:t>
+              <a:t>  placements (−28% / −21%) — kernel-side</a:t>
+            </a:r>
+            <a:br/>
+            <a:r>
+              <a:t>  teardown; kube-proxy never flushes TCP</a:t>
             </a:r>
           </a:p>
           <a:p>
@@ -3642,6 +3646,33 @@
               </a:defRPr>
             </a:pPr>
             <a:r>
+              <a:t>• The placement-dependent component is</a:t>
+            </a:r>
+            <a:br/>
+            <a:r>
+              <a:t>  the UDP/DNS pool: ~4× larger under</a:t>
+            </a:r>
+            <a:br/>
+            <a:r>
+              <a:t>  spread (chaos-window medians 910 vs 224)</a:t>
+            </a:r>
+          </a:p>
+          <a:p>
+            <a:pPr>
+              <a:spcBef>
+                <a:spcPts val="200"/>
+              </a:spcBef>
+              <a:spcAft>
+                <a:spcPts val="200"/>
+              </a:spcAft>
+              <a:defRPr sz="1000">
+                <a:solidFill>
+                  <a:srgbClr val="BDBDBD"/>
+                </a:solidFill>
+                <a:latin typeface="Calibri"/>
+              </a:defRPr>
+            </a:pPr>
+            <a:r>
               <a:t>• Corroborating only: CPU throttling —</a:t>
             </a:r>
             <a:br/>
@@ -3731,7 +3762,7 @@
               </a:defRPr>
             </a:pPr>
             <a:r>
-              <a:t>H2 — a reconvergence signature, deliberately not attributed to a specific code path</a:t>
+              <a:t>H2 — attribution protocol-scoped by a dedicated conntrack-composition probe</a:t>
             </a:r>
           </a:p>
         </p:txBody>
@@ -3767,7 +3798,7 @@
               </a:defRPr>
             </a:pPr>
             <a:r>
-              <a:t>The flush is reported as a measured kernel/network reconvergence signature of the kill cycle. It is not attributed to kube-proxy's active conntrack-flush path: upstream that path is UDP-only, while this workload is TCP/gRPC — re-attribution of the exact mechanism is pending.</a:t>
+              <a:t>Both paths are visible: kernel TCP teardown (kube-proxy never flushes TCP) and kube-proxy's documented UDP-only cleanup, with more to clean under spread. The campaign's flush percentages (38.5% vs 2.7%, 7/7 sessions) remain statistically primary and are not apportioned between the two paths (probe: i = 1).</a:t>
             </a:r>
           </a:p>
         </p:txBody>
@@ -4751,7 +4782,7 @@
               </a:defRPr>
             </a:pPr>
             <a:r>
-              <a:t>H5 — cross-node call fraction predicts the east-west tail</a:t>
+              <a:t>H5 — cross-node fraction separates node-local from spreading</a:t>
             </a:r>
           </a:p>
         </p:txBody>
@@ -4766,7 +4797,7 @@
         </p:nvGraphicFramePr>
         <p:xfrm>
           <a:off x="6400800" y="1691640"/>
-          <a:ext cx="5120640" cy="2285997"/>
+          <a:ext cx="5120640" cy="2468880"/>
         </p:xfrm>
         <a:graphic>
           <a:graphicData uri="http://schemas.openxmlformats.org/drawingml/2006/table">
@@ -4775,11 +4806,13 @@
                 <a:tableStyleId>{5C22544A-7EE6-4342-B048-85BDC9FD1C3A}</a:tableStyleId>
               </a:tblPr>
               <a:tblGrid>
-                <a:gridCol w="1706880"/>
-                <a:gridCol w="1706880"/>
-                <a:gridCol w="1706880"/>
+                <a:gridCol w="1024128"/>
+                <a:gridCol w="1024128"/>
+                <a:gridCol w="1024128"/>
+                <a:gridCol w="1024128"/>
+                <a:gridCol w="1024128"/>
               </a:tblGrid>
-              <a:tr h="326571">
+              <a:tr h="274320">
                 <a:tc>
                   <a:txBody>
                     <a:bodyPr wrap="square"/>
@@ -4787,7 +4820,7 @@
                     <a:p>
                       <a:pPr algn="l"/>
                       <a:r>
-                        <a:rPr sz="900" b="1">
+                        <a:rPr sz="800" b="1">
                           <a:solidFill>
                             <a:srgbClr val="FFFFFF"/>
                           </a:solidFill>
@@ -4810,13 +4843,13 @@
                     <a:p>
                       <a:pPr algn="l"/>
                       <a:r>
-                        <a:rPr sz="900" b="1">
+                        <a:rPr sz="800" b="1">
                           <a:solidFill>
                             <a:srgbClr val="FFFFFF"/>
                           </a:solidFill>
                           <a:latin typeface="Calibri"/>
                         </a:rPr>
-                        <a:t>Cross-node fraction</a:t>
+                        <a:t>frac (B1)</a:t>
                       </a:r>
                     </a:p>
                   </a:txBody>
@@ -4833,13 +4866,59 @@
                     <a:p>
                       <a:pPr algn="l"/>
                       <a:r>
-                        <a:rPr sz="900" b="1">
+                        <a:rPr sz="800" b="1">
                           <a:solidFill>
                             <a:srgbClr val="FFFFFF"/>
                           </a:solidFill>
                           <a:latin typeface="Calibri"/>
                         </a:rPr>
-                        <a:t>East-west p95 (ms)</a:t>
+                        <a:t>EW p95 (B1)</a:t>
+                      </a:r>
+                    </a:p>
+                  </a:txBody>
+                  <a:tcPr marL="76200" marR="76200" marT="38100" marB="38100">
+                    <a:solidFill>
+                      <a:srgbClr val="2ECC71"/>
+                    </a:solidFill>
+                  </a:tcPr>
+                </a:tc>
+                <a:tc>
+                  <a:txBody>
+                    <a:bodyPr wrap="square"/>
+                    <a:lstStyle/>
+                    <a:p>
+                      <a:pPr algn="l"/>
+                      <a:r>
+                        <a:rPr sz="800" b="1">
+                          <a:solidFill>
+                            <a:srgbClr val="FFFFFF"/>
+                          </a:solidFill>
+                          <a:latin typeface="Calibri"/>
+                        </a:rPr>
+                        <a:t>frac (B2)</a:t>
+                      </a:r>
+                    </a:p>
+                  </a:txBody>
+                  <a:tcPr marL="76200" marR="76200" marT="38100" marB="38100">
+                    <a:solidFill>
+                      <a:srgbClr val="2ECC71"/>
+                    </a:solidFill>
+                  </a:tcPr>
+                </a:tc>
+                <a:tc>
+                  <a:txBody>
+                    <a:bodyPr wrap="square"/>
+                    <a:lstStyle/>
+                    <a:p>
+                      <a:pPr algn="l"/>
+                      <a:r>
+                        <a:rPr sz="800" b="1">
+                          <a:solidFill>
+                            <a:srgbClr val="FFFFFF"/>
+                          </a:solidFill>
+                          <a:latin typeface="Calibri"/>
+                        </a:rPr>
+                        <a:t>EW p95 (B2)</a:t>
                       </a:r>
                     </a:p>
                   </a:txBody>
@@ -4850,7 +4929,7 @@
                   </a:tcPr>
                 </a:tc>
               </a:tr>
-              <a:tr h="326571">
+              <a:tr h="274320">
                 <a:tc>
                   <a:txBody>
                     <a:bodyPr wrap="square"/>
@@ -4858,7 +4937,7 @@
                     <a:p>
                       <a:pPr algn="l"/>
                       <a:r>
-                        <a:rPr sz="900" b="0">
+                        <a:rPr sz="800" b="0">
                           <a:solidFill>
                             <a:srgbClr val="FFFFFF"/>
                           </a:solidFill>
@@ -4881,7 +4960,7 @@
                     <a:p>
                       <a:pPr algn="l"/>
                       <a:r>
-                        <a:rPr sz="900" b="0">
+                        <a:rPr sz="800" b="0">
                           <a:solidFill>
                             <a:srgbClr val="FFFFFF"/>
                           </a:solidFill>
@@ -4904,7 +4983,7 @@
                     <a:p>
                       <a:pPr algn="l"/>
                       <a:r>
-                        <a:rPr sz="900" b="0">
+                        <a:rPr sz="800" b="0">
                           <a:solidFill>
                             <a:srgbClr val="FFFFFF"/>
                           </a:solidFill>
@@ -4920,8 +4999,6 @@
                     </a:solidFill>
                   </a:tcPr>
                 </a:tc>
-              </a:tr>
-              <a:tr h="326571">
                 <a:tc>
                   <a:txBody>
                     <a:bodyPr wrap="square"/>
@@ -4929,7 +5006,55 @@
                     <a:p>
                       <a:pPr algn="l"/>
                       <a:r>
-                        <a:rPr sz="900" b="0">
+                        <a:rPr sz="800" b="0">
+                          <a:solidFill>
+                            <a:srgbClr val="FFFFFF"/>
+                          </a:solidFill>
+                          <a:latin typeface="Calibri"/>
+                        </a:rPr>
+                        <a:t>0.00</a:t>
+                      </a:r>
+                    </a:p>
+                  </a:txBody>
+                  <a:tcPr marL="76200" marR="76200" marT="38100" marB="38100">
+                    <a:solidFill>
+                      <a:srgbClr val="2A2A3E"/>
+                    </a:solidFill>
+                  </a:tcPr>
+                </a:tc>
+                <a:tc>
+                  <a:txBody>
+                    <a:bodyPr wrap="square"/>
+                    <a:lstStyle/>
+                    <a:p>
+                      <a:pPr algn="l"/>
+                      <a:r>
+                        <a:rPr sz="800" b="0">
+                          <a:solidFill>
+                            <a:srgbClr val="FFFFFF"/>
+                          </a:solidFill>
+                          <a:latin typeface="Calibri"/>
+                        </a:rPr>
+                        <a:t>33.2</a:t>
+                      </a:r>
+                    </a:p>
+                  </a:txBody>
+                  <a:tcPr marL="76200" marR="76200" marT="38100" marB="38100">
+                    <a:solidFill>
+                      <a:srgbClr val="2A2A3E"/>
+                    </a:solidFill>
+                  </a:tcPr>
+                </a:tc>
+              </a:tr>
+              <a:tr h="274320">
+                <a:tc>
+                  <a:txBody>
+                    <a:bodyPr wrap="square"/>
+                    <a:lstStyle/>
+                    <a:p>
+                      <a:pPr algn="l"/>
+                      <a:r>
+                        <a:rPr sz="800" b="0">
                           <a:solidFill>
                             <a:srgbClr val="FFFFFF"/>
                           </a:solidFill>
@@ -4952,7 +5077,7 @@
                     <a:p>
                       <a:pPr algn="l"/>
                       <a:r>
-                        <a:rPr sz="900" b="0">
+                        <a:rPr sz="800" b="0">
                           <a:solidFill>
                             <a:srgbClr val="FFFFFF"/>
                           </a:solidFill>
@@ -4975,7 +5100,7 @@
                     <a:p>
                       <a:pPr algn="l"/>
                       <a:r>
-                        <a:rPr sz="900" b="0">
+                        <a:rPr sz="800" b="0">
                           <a:solidFill>
                             <a:srgbClr val="FFFFFF"/>
                           </a:solidFill>
@@ -4991,8 +5116,6 @@
                     </a:solidFill>
                   </a:tcPr>
                 </a:tc>
-              </a:tr>
-              <a:tr h="326571">
                 <a:tc>
                   <a:txBody>
                     <a:bodyPr wrap="square"/>
@@ -5000,7 +5123,55 @@
                     <a:p>
                       <a:pPr algn="l"/>
                       <a:r>
-                        <a:rPr sz="900" b="0">
+                        <a:rPr sz="800" b="0">
+                          <a:solidFill>
+                            <a:srgbClr val="FFFFFF"/>
+                          </a:solidFill>
+                          <a:latin typeface="Calibri"/>
+                        </a:rPr>
+                        <a:t>0.00</a:t>
+                      </a:r>
+                    </a:p>
+                  </a:txBody>
+                  <a:tcPr marL="76200" marR="76200" marT="38100" marB="38100">
+                    <a:solidFill>
+                      <a:srgbClr val="2A2A3E"/>
+                    </a:solidFill>
+                  </a:tcPr>
+                </a:tc>
+                <a:tc>
+                  <a:txBody>
+                    <a:bodyPr wrap="square"/>
+                    <a:lstStyle/>
+                    <a:p>
+                      <a:pPr algn="l"/>
+                      <a:r>
+                        <a:rPr sz="800" b="0">
+                          <a:solidFill>
+                            <a:srgbClr val="FFFFFF"/>
+                          </a:solidFill>
+                          <a:latin typeface="Calibri"/>
+                        </a:rPr>
+                        <a:t>35.7</a:t>
+                      </a:r>
+                    </a:p>
+                  </a:txBody>
+                  <a:tcPr marL="76200" marR="76200" marT="38100" marB="38100">
+                    <a:solidFill>
+                      <a:srgbClr val="2A2A3E"/>
+                    </a:solidFill>
+                  </a:tcPr>
+                </a:tc>
+              </a:tr>
+              <a:tr h="274320">
+                <a:tc>
+                  <a:txBody>
+                    <a:bodyPr wrap="square"/>
+                    <a:lstStyle/>
+                    <a:p>
+                      <a:pPr algn="l"/>
+                      <a:r>
+                        <a:rPr sz="800" b="0">
                           <a:solidFill>
                             <a:srgbClr val="FFFFFF"/>
                           </a:solidFill>
@@ -5023,7 +5194,7 @@
                     <a:p>
                       <a:pPr algn="l"/>
                       <a:r>
-                        <a:rPr sz="900" b="0">
+                        <a:rPr sz="800" b="0">
                           <a:solidFill>
                             <a:srgbClr val="FFFFFF"/>
                           </a:solidFill>
@@ -5046,7 +5217,7 @@
                     <a:p>
                       <a:pPr algn="l"/>
                       <a:r>
-                        <a:rPr sz="900" b="0">
+                        <a:rPr sz="800" b="0">
                           <a:solidFill>
                             <a:srgbClr val="FFFFFF"/>
                           </a:solidFill>
@@ -5062,8 +5233,6 @@
                     </a:solidFill>
                   </a:tcPr>
                 </a:tc>
-              </a:tr>
-              <a:tr h="326571">
                 <a:tc>
                   <a:txBody>
                     <a:bodyPr wrap="square"/>
@@ -5071,7 +5240,55 @@
                     <a:p>
                       <a:pPr algn="l"/>
                       <a:r>
-                        <a:rPr sz="900" b="0">
+                        <a:rPr sz="800" b="0">
+                          <a:solidFill>
+                            <a:srgbClr val="FFFFFF"/>
+                          </a:solidFill>
+                          <a:latin typeface="Calibri"/>
+                        </a:rPr>
+                        <a:t>0.73</a:t>
+                      </a:r>
+                    </a:p>
+                  </a:txBody>
+                  <a:tcPr marL="76200" marR="76200" marT="38100" marB="38100">
+                    <a:solidFill>
+                      <a:srgbClr val="2A2A3E"/>
+                    </a:solidFill>
+                  </a:tcPr>
+                </a:tc>
+                <a:tc>
+                  <a:txBody>
+                    <a:bodyPr wrap="square"/>
+                    <a:lstStyle/>
+                    <a:p>
+                      <a:pPr algn="l"/>
+                      <a:r>
+                        <a:rPr sz="800" b="0">
+                          <a:solidFill>
+                            <a:srgbClr val="FFFFFF"/>
+                          </a:solidFill>
+                          <a:latin typeface="Calibri"/>
+                        </a:rPr>
+                        <a:t>43.8</a:t>
+                      </a:r>
+                    </a:p>
+                  </a:txBody>
+                  <a:tcPr marL="76200" marR="76200" marT="38100" marB="38100">
+                    <a:solidFill>
+                      <a:srgbClr val="2A2A3E"/>
+                    </a:solidFill>
+                  </a:tcPr>
+                </a:tc>
+              </a:tr>
+              <a:tr h="274320">
+                <a:tc>
+                  <a:txBody>
+                    <a:bodyPr wrap="square"/>
+                    <a:lstStyle/>
+                    <a:p>
+                      <a:pPr algn="l"/>
+                      <a:r>
+                        <a:rPr sz="800" b="0">
                           <a:solidFill>
                             <a:srgbClr val="FFFFFF"/>
                           </a:solidFill>
@@ -5094,7 +5311,7 @@
                     <a:p>
                       <a:pPr algn="l"/>
                       <a:r>
-                        <a:rPr sz="900" b="0">
+                        <a:rPr sz="800" b="0">
                           <a:solidFill>
                             <a:srgbClr val="FFFFFF"/>
                           </a:solidFill>
@@ -5117,7 +5334,7 @@
                     <a:p>
                       <a:pPr algn="l"/>
                       <a:r>
-                        <a:rPr sz="900" b="0">
+                        <a:rPr sz="800" b="0">
                           <a:solidFill>
                             <a:srgbClr val="FFFFFF"/>
                           </a:solidFill>
@@ -5133,8 +5350,6 @@
                     </a:solidFill>
                   </a:tcPr>
                 </a:tc>
-              </a:tr>
-              <a:tr h="326571">
                 <a:tc>
                   <a:txBody>
                     <a:bodyPr wrap="square"/>
@@ -5142,7 +5357,406 @@
                     <a:p>
                       <a:pPr algn="l"/>
                       <a:r>
-                        <a:rPr sz="900" b="0">
+                        <a:rPr sz="800" b="0">
+                          <a:solidFill>
+                            <a:srgbClr val="FFFFFF"/>
+                          </a:solidFill>
+                          <a:latin typeface="Calibri"/>
+                        </a:rPr>
+                        <a:t>0.73</a:t>
+                      </a:r>
+                    </a:p>
+                  </a:txBody>
+                  <a:tcPr marL="76200" marR="76200" marT="38100" marB="38100">
+                    <a:solidFill>
+                      <a:srgbClr val="2A2A3E"/>
+                    </a:solidFill>
+                  </a:tcPr>
+                </a:tc>
+                <a:tc>
+                  <a:txBody>
+                    <a:bodyPr wrap="square"/>
+                    <a:lstStyle/>
+                    <a:p>
+                      <a:pPr algn="l"/>
+                      <a:r>
+                        <a:rPr sz="800" b="0">
+                          <a:solidFill>
+                            <a:srgbClr val="FFFFFF"/>
+                          </a:solidFill>
+                          <a:latin typeface="Calibri"/>
+                        </a:rPr>
+                        <a:t>44.2</a:t>
+                      </a:r>
+                    </a:p>
+                  </a:txBody>
+                  <a:tcPr marL="76200" marR="76200" marT="38100" marB="38100">
+                    <a:solidFill>
+                      <a:srgbClr val="2A2A3E"/>
+                    </a:solidFill>
+                  </a:tcPr>
+                </a:tc>
+              </a:tr>
+              <a:tr h="274320">
+                <a:tc>
+                  <a:txBody>
+                    <a:bodyPr wrap="square"/>
+                    <a:lstStyle/>
+                    <a:p>
+                      <a:pPr algn="l"/>
+                      <a:r>
+                        <a:rPr sz="800" b="0">
+                          <a:solidFill>
+                            <a:srgbClr val="FFFFFF"/>
+                          </a:solidFill>
+                          <a:latin typeface="Calibri"/>
+                        </a:rPr>
+                        <a:t>baseline</a:t>
+                      </a:r>
+                    </a:p>
+                  </a:txBody>
+                  <a:tcPr marL="76200" marR="76200" marT="38100" marB="38100">
+                    <a:solidFill>
+                      <a:srgbClr val="2A2A3E"/>
+                    </a:solidFill>
+                  </a:tcPr>
+                </a:tc>
+                <a:tc>
+                  <a:txBody>
+                    <a:bodyPr wrap="square"/>
+                    <a:lstStyle/>
+                    <a:p>
+                      <a:pPr algn="l"/>
+                      <a:r>
+                        <a:rPr sz="800" b="0">
+                          <a:solidFill>
+                            <a:srgbClr val="FFFFFF"/>
+                          </a:solidFill>
+                          <a:latin typeface="Calibri"/>
+                        </a:rPr>
+                        <a:t>0.70</a:t>
+                      </a:r>
+                    </a:p>
+                  </a:txBody>
+                  <a:tcPr marL="76200" marR="76200" marT="38100" marB="38100">
+                    <a:solidFill>
+                      <a:srgbClr val="2A2A3E"/>
+                    </a:solidFill>
+                  </a:tcPr>
+                </a:tc>
+                <a:tc>
+                  <a:txBody>
+                    <a:bodyPr wrap="square"/>
+                    <a:lstStyle/>
+                    <a:p>
+                      <a:pPr algn="l"/>
+                      <a:r>
+                        <a:rPr sz="800" b="0">
+                          <a:solidFill>
+                            <a:srgbClr val="FFFFFF"/>
+                          </a:solidFill>
+                          <a:latin typeface="Calibri"/>
+                        </a:rPr>
+                        <a:t>43.5</a:t>
+                      </a:r>
+                    </a:p>
+                  </a:txBody>
+                  <a:tcPr marL="76200" marR="76200" marT="38100" marB="38100">
+                    <a:solidFill>
+                      <a:srgbClr val="2A2A3E"/>
+                    </a:solidFill>
+                  </a:tcPr>
+                </a:tc>
+                <a:tc>
+                  <a:txBody>
+                    <a:bodyPr wrap="square"/>
+                    <a:lstStyle/>
+                    <a:p>
+                      <a:pPr algn="l"/>
+                      <a:r>
+                        <a:rPr sz="800" b="0">
+                          <a:solidFill>
+                            <a:srgbClr val="FFFFFF"/>
+                          </a:solidFill>
+                          <a:latin typeface="Calibri"/>
+                        </a:rPr>
+                        <a:t>0.78</a:t>
+                      </a:r>
+                    </a:p>
+                  </a:txBody>
+                  <a:tcPr marL="76200" marR="76200" marT="38100" marB="38100">
+                    <a:solidFill>
+                      <a:srgbClr val="2A2A3E"/>
+                    </a:solidFill>
+                  </a:tcPr>
+                </a:tc>
+                <a:tc>
+                  <a:txBody>
+                    <a:bodyPr wrap="square"/>
+                    <a:lstStyle/>
+                    <a:p>
+                      <a:pPr algn="l"/>
+                      <a:r>
+                        <a:rPr sz="800" b="0">
+                          <a:solidFill>
+                            <a:srgbClr val="FFFFFF"/>
+                          </a:solidFill>
+                          <a:latin typeface="Calibri"/>
+                        </a:rPr>
+                        <a:t>41.7</a:t>
+                      </a:r>
+                    </a:p>
+                  </a:txBody>
+                  <a:tcPr marL="76200" marR="76200" marT="38100" marB="38100">
+                    <a:solidFill>
+                      <a:srgbClr val="2A2A3E"/>
+                    </a:solidFill>
+                  </a:tcPr>
+                </a:tc>
+              </a:tr>
+              <a:tr h="274320">
+                <a:tc>
+                  <a:txBody>
+                    <a:bodyPr wrap="square"/>
+                    <a:lstStyle/>
+                    <a:p>
+                      <a:pPr algn="l"/>
+                      <a:r>
+                        <a:rPr sz="800" b="0">
+                          <a:solidFill>
+                            <a:srgbClr val="FFFFFF"/>
+                          </a:solidFill>
+                          <a:latin typeface="Calibri"/>
+                        </a:rPr>
+                        <a:t>adversarial</a:t>
+                      </a:r>
+                    </a:p>
+                  </a:txBody>
+                  <a:tcPr marL="76200" marR="76200" marT="38100" marB="38100">
+                    <a:solidFill>
+                      <a:srgbClr val="2A2A3E"/>
+                    </a:solidFill>
+                  </a:tcPr>
+                </a:tc>
+                <a:tc>
+                  <a:txBody>
+                    <a:bodyPr wrap="square"/>
+                    <a:lstStyle/>
+                    <a:p>
+                      <a:pPr algn="l"/>
+                      <a:r>
+                        <a:rPr sz="800" b="0">
+                          <a:solidFill>
+                            <a:srgbClr val="FFFFFF"/>
+                          </a:solidFill>
+                          <a:latin typeface="Calibri"/>
+                        </a:rPr>
+                        <a:t>0.80</a:t>
+                      </a:r>
+                    </a:p>
+                  </a:txBody>
+                  <a:tcPr marL="76200" marR="76200" marT="38100" marB="38100">
+                    <a:solidFill>
+                      <a:srgbClr val="2A2A3E"/>
+                    </a:solidFill>
+                  </a:tcPr>
+                </a:tc>
+                <a:tc>
+                  <a:txBody>
+                    <a:bodyPr wrap="square"/>
+                    <a:lstStyle/>
+                    <a:p>
+                      <a:pPr algn="l"/>
+                      <a:r>
+                        <a:rPr sz="800" b="0">
+                          <a:solidFill>
+                            <a:srgbClr val="FFFFFF"/>
+                          </a:solidFill>
+                          <a:latin typeface="Calibri"/>
+                        </a:rPr>
+                        <a:t>43.5</a:t>
+                      </a:r>
+                    </a:p>
+                  </a:txBody>
+                  <a:tcPr marL="76200" marR="76200" marT="38100" marB="38100">
+                    <a:solidFill>
+                      <a:srgbClr val="2A2A3E"/>
+                    </a:solidFill>
+                  </a:tcPr>
+                </a:tc>
+                <a:tc>
+                  <a:txBody>
+                    <a:bodyPr wrap="square"/>
+                    <a:lstStyle/>
+                    <a:p>
+                      <a:pPr algn="l"/>
+                      <a:r>
+                        <a:rPr sz="800" b="0">
+                          <a:solidFill>
+                            <a:srgbClr val="FFFFFF"/>
+                          </a:solidFill>
+                          <a:latin typeface="Calibri"/>
+                        </a:rPr>
+                        <a:t>0.80</a:t>
+                      </a:r>
+                    </a:p>
+                  </a:txBody>
+                  <a:tcPr marL="76200" marR="76200" marT="38100" marB="38100">
+                    <a:solidFill>
+                      <a:srgbClr val="2A2A3E"/>
+                    </a:solidFill>
+                  </a:tcPr>
+                </a:tc>
+                <a:tc>
+                  <a:txBody>
+                    <a:bodyPr wrap="square"/>
+                    <a:lstStyle/>
+                    <a:p>
+                      <a:pPr algn="l"/>
+                      <a:r>
+                        <a:rPr sz="800" b="0">
+                          <a:solidFill>
+                            <a:srgbClr val="FFFFFF"/>
+                          </a:solidFill>
+                          <a:latin typeface="Calibri"/>
+                        </a:rPr>
+                        <a:t>42.0</a:t>
+                      </a:r>
+                    </a:p>
+                  </a:txBody>
+                  <a:tcPr marL="76200" marR="76200" marT="38100" marB="38100">
+                    <a:solidFill>
+                      <a:srgbClr val="2A2A3E"/>
+                    </a:solidFill>
+                  </a:tcPr>
+                </a:tc>
+              </a:tr>
+              <a:tr h="274320">
+                <a:tc>
+                  <a:txBody>
+                    <a:bodyPr wrap="square"/>
+                    <a:lstStyle/>
+                    <a:p>
+                      <a:pPr algn="l"/>
+                      <a:r>
+                        <a:rPr sz="800" b="0">
+                          <a:solidFill>
+                            <a:srgbClr val="FFFFFF"/>
+                          </a:solidFill>
+                          <a:latin typeface="Calibri"/>
+                        </a:rPr>
+                        <a:t>default</a:t>
+                      </a:r>
+                    </a:p>
+                  </a:txBody>
+                  <a:tcPr marL="76200" marR="76200" marT="38100" marB="38100">
+                    <a:solidFill>
+                      <a:srgbClr val="2A2A3E"/>
+                    </a:solidFill>
+                  </a:tcPr>
+                </a:tc>
+                <a:tc>
+                  <a:txBody>
+                    <a:bodyPr wrap="square"/>
+                    <a:lstStyle/>
+                    <a:p>
+                      <a:pPr algn="l"/>
+                      <a:r>
+                        <a:rPr sz="800" b="0">
+                          <a:solidFill>
+                            <a:srgbClr val="FFFFFF"/>
+                          </a:solidFill>
+                          <a:latin typeface="Calibri"/>
+                        </a:rPr>
+                        <a:t>0.78</a:t>
+                      </a:r>
+                    </a:p>
+                  </a:txBody>
+                  <a:tcPr marL="76200" marR="76200" marT="38100" marB="38100">
+                    <a:solidFill>
+                      <a:srgbClr val="2A2A3E"/>
+                    </a:solidFill>
+                  </a:tcPr>
+                </a:tc>
+                <a:tc>
+                  <a:txBody>
+                    <a:bodyPr wrap="square"/>
+                    <a:lstStyle/>
+                    <a:p>
+                      <a:pPr algn="l"/>
+                      <a:r>
+                        <a:rPr sz="800" b="0">
+                          <a:solidFill>
+                            <a:srgbClr val="FFFFFF"/>
+                          </a:solidFill>
+                          <a:latin typeface="Calibri"/>
+                        </a:rPr>
+                        <a:t>45.5</a:t>
+                      </a:r>
+                    </a:p>
+                  </a:txBody>
+                  <a:tcPr marL="76200" marR="76200" marT="38100" marB="38100">
+                    <a:solidFill>
+                      <a:srgbClr val="2A2A3E"/>
+                    </a:solidFill>
+                  </a:tcPr>
+                </a:tc>
+                <a:tc>
+                  <a:txBody>
+                    <a:bodyPr wrap="square"/>
+                    <a:lstStyle/>
+                    <a:p>
+                      <a:pPr algn="l"/>
+                      <a:r>
+                        <a:rPr sz="800" b="0">
+                          <a:solidFill>
+                            <a:srgbClr val="FFFFFF"/>
+                          </a:solidFill>
+                          <a:latin typeface="Calibri"/>
+                        </a:rPr>
+                        <a:t>0.82</a:t>
+                      </a:r>
+                    </a:p>
+                  </a:txBody>
+                  <a:tcPr marL="76200" marR="76200" marT="38100" marB="38100">
+                    <a:solidFill>
+                      <a:srgbClr val="2A2A3E"/>
+                    </a:solidFill>
+                  </a:tcPr>
+                </a:tc>
+                <a:tc>
+                  <a:txBody>
+                    <a:bodyPr wrap="square"/>
+                    <a:lstStyle/>
+                    <a:p>
+                      <a:pPr algn="l"/>
+                      <a:r>
+                        <a:rPr sz="800" b="0">
+                          <a:solidFill>
+                            <a:srgbClr val="FFFFFF"/>
+                          </a:solidFill>
+                          <a:latin typeface="Calibri"/>
+                        </a:rPr>
+                        <a:t>41.6</a:t>
+                      </a:r>
+                    </a:p>
+                  </a:txBody>
+                  <a:tcPr marL="76200" marR="76200" marT="38100" marB="38100">
+                    <a:solidFill>
+                      <a:srgbClr val="2A2A3E"/>
+                    </a:solidFill>
+                  </a:tcPr>
+                </a:tc>
+              </a:tr>
+              <a:tr h="274320">
+                <a:tc>
+                  <a:txBody>
+                    <a:bodyPr wrap="square"/>
+                    <a:lstStyle/>
+                    <a:p>
+                      <a:pPr algn="l"/>
+                      <a:r>
+                        <a:rPr sz="800" b="0">
                           <a:solidFill>
                             <a:srgbClr val="FFFFFF"/>
                           </a:solidFill>
@@ -5165,7 +5779,7 @@
                     <a:p>
                       <a:pPr algn="l"/>
                       <a:r>
-                        <a:rPr sz="900" b="0">
+                        <a:rPr sz="800" b="0">
                           <a:solidFill>
                             <a:srgbClr val="FFFFFF"/>
                           </a:solidFill>
@@ -5188,38 +5802,13 @@
                     <a:p>
                       <a:pPr algn="l"/>
                       <a:r>
-                        <a:rPr sz="900" b="0">
+                        <a:rPr sz="800" b="0">
                           <a:solidFill>
                             <a:srgbClr val="FFFFFF"/>
                           </a:solidFill>
                           <a:latin typeface="Calibri"/>
                         </a:rPr>
                         <a:t>43.9</a:t>
-                      </a:r>
-                    </a:p>
-                  </a:txBody>
-                  <a:tcPr marL="76200" marR="76200" marT="38100" marB="38100">
-                    <a:solidFill>
-                      <a:srgbClr val="2A2A3E"/>
-                    </a:solidFill>
-                  </a:tcPr>
-                </a:tc>
-              </a:tr>
-              <a:tr h="326571">
-                <a:tc>
-                  <a:txBody>
-                    <a:bodyPr wrap="square"/>
-                    <a:lstStyle/>
-                    <a:p>
-                      <a:pPr algn="l"/>
-                      <a:r>
-                        <a:rPr sz="900" b="0">
-                          <a:solidFill>
-                            <a:srgbClr val="FFFFFF"/>
-                          </a:solidFill>
-                          <a:latin typeface="Calibri"/>
-                        </a:rPr>
-                        <a:t>default</a:t>
                       </a:r>
                     </a:p>
                   </a:txBody>
@@ -5236,13 +5825,13 @@
                     <a:p>
                       <a:pPr algn="l"/>
                       <a:r>
-                        <a:rPr sz="900" b="0">
+                        <a:rPr sz="800" b="0">
                           <a:solidFill>
                             <a:srgbClr val="FFFFFF"/>
                           </a:solidFill>
                           <a:latin typeface="Calibri"/>
                         </a:rPr>
-                        <a:t>0.78</a:t>
+                        <a:t>0.80</a:t>
                       </a:r>
                     </a:p>
                   </a:txBody>
@@ -5259,13 +5848,13 @@
                     <a:p>
                       <a:pPr algn="l"/>
                       <a:r>
-                        <a:rPr sz="900" b="0">
+                        <a:rPr sz="800" b="0">
                           <a:solidFill>
                             <a:srgbClr val="FFFFFF"/>
                           </a:solidFill>
                           <a:latin typeface="Calibri"/>
                         </a:rPr>
-                        <a:t>45.5</a:t>
+                        <a:t>42.8</a:t>
                       </a:r>
                     </a:p>
                   </a:txBody>
@@ -5288,8 +5877,8 @@
         </p:nvSpPr>
         <p:spPr>
           <a:xfrm>
-            <a:off x="6400800" y="4069080"/>
-            <a:ext cx="5120640" cy="1188720"/>
+            <a:off x="6400800" y="4206240"/>
+            <a:ext cx="5120640" cy="1051560"/>
           </a:xfrm>
           <a:prstGeom prst="rect">
             <a:avLst/>
@@ -5317,7 +5906,11 @@
               </a:defRPr>
             </a:pPr>
             <a:r>
-              <a:t>• Spearman ρ = 0.79 (n = 8 strategies, p &lt; 0.05)</a:t>
+              <a:t>• Node-local pair = the 2 lowest tails of 8 in BOTH</a:t>
+            </a:r>
+            <a:br/>
+            <a:r>
+              <a:t>  batches (joint null ≈ 0.0013) — ~1.25× below the rest</a:t>
             </a:r>
           </a:p>
           <a:p>
@@ -5336,15 +5929,11 @@
               </a:defRPr>
             </a:pPr>
             <a:r>
-              <a:t>• Computable from the dependency graph + placement</a:t>
+              <a:t>• Continuous ρ = 0.79 (batch 1) → 0.25 n.s. (batch 2):</a:t>
             </a:r>
             <a:br/>
             <a:r>
-              <a:t>  before any chaos — the Neo4j graph becomes</a:t>
-            </a:r>
-            <a:br/>
-            <a:r>
-              <a:t>  analytically load-bearing, not mere storage</a:t>
+              <a:t>  a replicated two-regime separator, not a smooth law</a:t>
             </a:r>
           </a:p>
         </p:txBody>
@@ -5425,7 +6014,7 @@
               </a:defRPr>
             </a:pPr>
             <a:r>
-              <a:t>Framing: empirical validation of a static pre-chaos predictor — and a coarse one</a:t>
+              <a:t>Framing: a replicated two-regime separator — not a validated smooth predictor</a:t>
             </a:r>
           </a:p>
         </p:txBody>
@@ -5461,7 +6050,7 @@
               </a:defRPr>
             </a:pPr>
             <a:r>
-              <a:t>Locality-as-objective already belongs to the literature (NetMARKS, graph-partitioning schedulers); the contribution here is validating the graph-derived fraction against measured during-load tails. The correlation is coarse — it separates the two node-local placements (colocate, best-fit) from the six spreading ones, which cluster at 0.70–0.80 — and single-batch. Note dependency-aware's partition did not co-locate as intended (0.73, spread-like).</a:t>
+              <a:t>Locality-as-objective already belongs to the literature (NetMARKS, graph-partitioning schedulers); the contribution is validating the graph-derived fraction (Neo4j graph + podPlacements, pre-chaos) against measured during-load tails in two independent batches. The continuous law is not claimed: batch 1's ρ = 0.79 was carried by best-fit's intermediate 0.13 point and collapsed to ρ = 0.25 (n.s.) when best-fit packed fully in batch 2. Note dependency-aware's partition did not co-locate as intended (0.73, spread-like, both batches).</a:t>
             </a:r>
           </a:p>
         </p:txBody>
@@ -5662,7 +6251,7 @@
         </p:nvGraphicFramePr>
         <p:xfrm>
           <a:off x="640080" y="1691640"/>
-          <a:ext cx="5577840" cy="1188720"/>
+          <a:ext cx="5577840" cy="2011674"/>
         </p:xfrm>
         <a:graphic>
           <a:graphicData uri="http://schemas.openxmlformats.org/drawingml/2006/table">
@@ -5676,7 +6265,7 @@
                 <a:gridCol w="1394460"/>
                 <a:gridCol w="1394460"/>
               </a:tblGrid>
-              <a:tr h="396240">
+              <a:tr h="287382">
                 <a:tc>
                   <a:txBody>
                     <a:bodyPr wrap="square"/>
@@ -5690,7 +6279,7 @@
                           </a:solidFill>
                           <a:latin typeface="Calibri"/>
                         </a:rPr>
-                        <a:t>Placement</a:t>
+                        <a:t>Strategy</a:t>
                       </a:r>
                     </a:p>
                   </a:txBody>
@@ -5736,7 +6325,7 @@
                           </a:solidFill>
                           <a:latin typeface="Calibri"/>
                         </a:rPr>
-                        <a:t>Blast radius</a:t>
+                        <a:t>Blast (observed)</a:t>
                       </a:r>
                     </a:p>
                   </a:txBody>
@@ -5759,7 +6348,7 @@
                           </a:solidFill>
                           <a:latin typeface="Calibri"/>
                         </a:rPr>
-                        <a:t>Target recovery</a:t>
+                        <a:t>Recovery (mean)</a:t>
                       </a:r>
                     </a:p>
                   </a:txBody>
@@ -5770,7 +6359,7 @@
                   </a:tcPr>
                 </a:tc>
               </a:tr>
-              <a:tr h="396240">
+              <a:tr h="287382">
                 <a:tc>
                   <a:txBody>
                     <a:bodyPr wrap="square"/>
@@ -5853,7 +6442,7 @@
                           </a:solidFill>
                           <a:latin typeface="Calibri"/>
                         </a:rPr>
-                        <a:t>~10.3 s</a:t>
+                        <a:t>10.8 s</a:t>
                       </a:r>
                     </a:p>
                   </a:txBody>
@@ -5864,7 +6453,289 @@
                   </a:tcPr>
                 </a:tc>
               </a:tr>
-              <a:tr h="396240">
+              <a:tr h="287382">
+                <a:tc>
+                  <a:txBody>
+                    <a:bodyPr wrap="square"/>
+                    <a:lstStyle/>
+                    <a:p>
+                      <a:pPr algn="l"/>
+                      <a:r>
+                        <a:rPr sz="900" b="0">
+                          <a:solidFill>
+                            <a:srgbClr val="FFFFFF"/>
+                          </a:solidFill>
+                          <a:latin typeface="Calibri"/>
+                        </a:rPr>
+                        <a:t>random</a:t>
+                      </a:r>
+                    </a:p>
+                  </a:txBody>
+                  <a:tcPr marL="76200" marR="76200" marT="38100" marB="38100">
+                    <a:solidFill>
+                      <a:srgbClr val="2A2A3E"/>
+                    </a:solidFill>
+                  </a:tcPr>
+                </a:tc>
+                <a:tc>
+                  <a:txBody>
+                    <a:bodyPr wrap="square"/>
+                    <a:lstStyle/>
+                    <a:p>
+                      <a:pPr algn="l"/>
+                      <a:r>
+                        <a:rPr sz="900" b="0">
+                          <a:solidFill>
+                            <a:srgbClr val="FFFFFF"/>
+                          </a:solidFill>
+                          <a:latin typeface="Calibri"/>
+                        </a:rPr>
+                        <a:t>4 / 11 services</a:t>
+                      </a:r>
+                    </a:p>
+                  </a:txBody>
+                  <a:tcPr marL="76200" marR="76200" marT="38100" marB="38100">
+                    <a:solidFill>
+                      <a:srgbClr val="2A2A3E"/>
+                    </a:solidFill>
+                  </a:tcPr>
+                </a:tc>
+                <a:tc>
+                  <a:txBody>
+                    <a:bodyPr wrap="square"/>
+                    <a:lstStyle/>
+                    <a:p>
+                      <a:pPr algn="l"/>
+                      <a:r>
+                        <a:rPr sz="900" b="0">
+                          <a:solidFill>
+                            <a:srgbClr val="FFFFFF"/>
+                          </a:solidFill>
+                          <a:latin typeface="Calibri"/>
+                        </a:rPr>
+                        <a:t>4</a:t>
+                      </a:r>
+                    </a:p>
+                  </a:txBody>
+                  <a:tcPr marL="76200" marR="76200" marT="38100" marB="38100">
+                    <a:solidFill>
+                      <a:srgbClr val="2A2A3E"/>
+                    </a:solidFill>
+                  </a:tcPr>
+                </a:tc>
+                <a:tc>
+                  <a:txBody>
+                    <a:bodyPr wrap="square"/>
+                    <a:lstStyle/>
+                    <a:p>
+                      <a:pPr algn="l"/>
+                      <a:r>
+                        <a:rPr sz="900" b="0">
+                          <a:solidFill>
+                            <a:srgbClr val="FFFFFF"/>
+                          </a:solidFill>
+                          <a:latin typeface="Calibri"/>
+                        </a:rPr>
+                        <a:t>4.6 s</a:t>
+                      </a:r>
+                    </a:p>
+                  </a:txBody>
+                  <a:tcPr marL="76200" marR="76200" marT="38100" marB="38100">
+                    <a:solidFill>
+                      <a:srgbClr val="2A2A3E"/>
+                    </a:solidFill>
+                  </a:tcPr>
+                </a:tc>
+              </a:tr>
+              <a:tr h="287382">
+                <a:tc>
+                  <a:txBody>
+                    <a:bodyPr wrap="square"/>
+                    <a:lstStyle/>
+                    <a:p>
+                      <a:pPr algn="l"/>
+                      <a:r>
+                        <a:rPr sz="900" b="0">
+                          <a:solidFill>
+                            <a:srgbClr val="FFFFFF"/>
+                          </a:solidFill>
+                          <a:latin typeface="Calibri"/>
+                        </a:rPr>
+                        <a:t>dependency-aware</a:t>
+                      </a:r>
+                    </a:p>
+                  </a:txBody>
+                  <a:tcPr marL="76200" marR="76200" marT="38100" marB="38100">
+                    <a:solidFill>
+                      <a:srgbClr val="2A2A3E"/>
+                    </a:solidFill>
+                  </a:tcPr>
+                </a:tc>
+                <a:tc>
+                  <a:txBody>
+                    <a:bodyPr wrap="square"/>
+                    <a:lstStyle/>
+                    <a:p>
+                      <a:pPr algn="l"/>
+                      <a:r>
+                        <a:rPr sz="900" b="0">
+                          <a:solidFill>
+                            <a:srgbClr val="FFFFFF"/>
+                          </a:solidFill>
+                          <a:latin typeface="Calibri"/>
+                        </a:rPr>
+                        <a:t>3 / 11 services</a:t>
+                      </a:r>
+                    </a:p>
+                  </a:txBody>
+                  <a:tcPr marL="76200" marR="76200" marT="38100" marB="38100">
+                    <a:solidFill>
+                      <a:srgbClr val="2A2A3E"/>
+                    </a:solidFill>
+                  </a:tcPr>
+                </a:tc>
+                <a:tc>
+                  <a:txBody>
+                    <a:bodyPr wrap="square"/>
+                    <a:lstStyle/>
+                    <a:p>
+                      <a:pPr algn="l"/>
+                      <a:r>
+                        <a:rPr sz="900" b="0">
+                          <a:solidFill>
+                            <a:srgbClr val="FFFFFF"/>
+                          </a:solidFill>
+                          <a:latin typeface="Calibri"/>
+                        </a:rPr>
+                        <a:t>3</a:t>
+                      </a:r>
+                    </a:p>
+                  </a:txBody>
+                  <a:tcPr marL="76200" marR="76200" marT="38100" marB="38100">
+                    <a:solidFill>
+                      <a:srgbClr val="2A2A3E"/>
+                    </a:solidFill>
+                  </a:tcPr>
+                </a:tc>
+                <a:tc>
+                  <a:txBody>
+                    <a:bodyPr wrap="square"/>
+                    <a:lstStyle/>
+                    <a:p>
+                      <a:pPr algn="l"/>
+                      <a:r>
+                        <a:rPr sz="900" b="0">
+                          <a:solidFill>
+                            <a:srgbClr val="FFFFFF"/>
+                          </a:solidFill>
+                          <a:latin typeface="Calibri"/>
+                        </a:rPr>
+                        <a:t>33.3 s</a:t>
+                      </a:r>
+                    </a:p>
+                  </a:txBody>
+                  <a:tcPr marL="76200" marR="76200" marT="38100" marB="38100">
+                    <a:solidFill>
+                      <a:srgbClr val="2A2A3E"/>
+                    </a:solidFill>
+                  </a:tcPr>
+                </a:tc>
+              </a:tr>
+              <a:tr h="287382">
+                <a:tc>
+                  <a:txBody>
+                    <a:bodyPr wrap="square"/>
+                    <a:lstStyle/>
+                    <a:p>
+                      <a:pPr algn="l"/>
+                      <a:r>
+                        <a:rPr sz="900" b="0">
+                          <a:solidFill>
+                            <a:srgbClr val="FFFFFF"/>
+                          </a:solidFill>
+                          <a:latin typeface="Calibri"/>
+                        </a:rPr>
+                        <a:t>best-fit</a:t>
+                      </a:r>
+                    </a:p>
+                  </a:txBody>
+                  <a:tcPr marL="76200" marR="76200" marT="38100" marB="38100">
+                    <a:solidFill>
+                      <a:srgbClr val="2A2A3E"/>
+                    </a:solidFill>
+                  </a:tcPr>
+                </a:tc>
+                <a:tc>
+                  <a:txBody>
+                    <a:bodyPr wrap="square"/>
+                    <a:lstStyle/>
+                    <a:p>
+                      <a:pPr algn="l"/>
+                      <a:r>
+                        <a:rPr sz="900" b="0">
+                          <a:solidFill>
+                            <a:srgbClr val="FFFFFF"/>
+                          </a:solidFill>
+                          <a:latin typeface="Calibri"/>
+                        </a:rPr>
+                        <a:t>3 / 11 services</a:t>
+                      </a:r>
+                    </a:p>
+                  </a:txBody>
+                  <a:tcPr marL="76200" marR="76200" marT="38100" marB="38100">
+                    <a:solidFill>
+                      <a:srgbClr val="2A2A3E"/>
+                    </a:solidFill>
+                  </a:tcPr>
+                </a:tc>
+                <a:tc>
+                  <a:txBody>
+                    <a:bodyPr wrap="square"/>
+                    <a:lstStyle/>
+                    <a:p>
+                      <a:pPr algn="l"/>
+                      <a:r>
+                        <a:rPr sz="900" b="0">
+                          <a:solidFill>
+                            <a:srgbClr val="FFFFFF"/>
+                          </a:solidFill>
+                          <a:latin typeface="Calibri"/>
+                        </a:rPr>
+                        <a:t>3</a:t>
+                      </a:r>
+                    </a:p>
+                  </a:txBody>
+                  <a:tcPr marL="76200" marR="76200" marT="38100" marB="38100">
+                    <a:solidFill>
+                      <a:srgbClr val="2A2A3E"/>
+                    </a:solidFill>
+                  </a:tcPr>
+                </a:tc>
+                <a:tc>
+                  <a:txBody>
+                    <a:bodyPr wrap="square"/>
+                    <a:lstStyle/>
+                    <a:p>
+                      <a:pPr algn="l"/>
+                      <a:r>
+                        <a:rPr sz="900" b="0">
+                          <a:solidFill>
+                            <a:srgbClr val="FFFFFF"/>
+                          </a:solidFill>
+                          <a:latin typeface="Calibri"/>
+                        </a:rPr>
+                        <a:t>9.7 s</a:t>
+                      </a:r>
+                    </a:p>
+                  </a:txBody>
+                  <a:tcPr marL="76200" marR="76200" marT="38100" marB="38100">
+                    <a:solidFill>
+                      <a:srgbClr val="2A2A3E"/>
+                    </a:solidFill>
+                  </a:tcPr>
+                </a:tc>
+              </a:tr>
+              <a:tr h="287382">
                 <a:tc>
                   <a:txBody>
                     <a:bodyPr wrap="square"/>
@@ -5924,7 +6795,7 @@
                           </a:solidFill>
                           <a:latin typeface="Calibri"/>
                         </a:rPr>
-                        <a:t>2 services (18%)</a:t>
+                        <a:t>2 (18%)</a:t>
                       </a:r>
                     </a:p>
                   </a:txBody>
@@ -5947,7 +6818,101 @@
                           </a:solidFill>
                           <a:latin typeface="Calibri"/>
                         </a:rPr>
-                        <a:t>~2.6 s</a:t>
+                        <a:t>2.6 s</a:t>
+                      </a:r>
+                    </a:p>
+                  </a:txBody>
+                  <a:tcPr marL="76200" marR="76200" marT="38100" marB="38100">
+                    <a:solidFill>
+                      <a:srgbClr val="2A2A3E"/>
+                    </a:solidFill>
+                  </a:tcPr>
+                </a:tc>
+              </a:tr>
+              <a:tr h="287382">
+                <a:tc>
+                  <a:txBody>
+                    <a:bodyPr wrap="square"/>
+                    <a:lstStyle/>
+                    <a:p>
+                      <a:pPr algn="l"/>
+                      <a:r>
+                        <a:rPr sz="900" b="0">
+                          <a:solidFill>
+                            <a:srgbClr val="FFFFFF"/>
+                          </a:solidFill>
+                          <a:latin typeface="Calibri"/>
+                        </a:rPr>
+                        <a:t>adversarial</a:t>
+                      </a:r>
+                    </a:p>
+                  </a:txBody>
+                  <a:tcPr marL="76200" marR="76200" marT="38100" marB="38100">
+                    <a:solidFill>
+                      <a:srgbClr val="2A2A3E"/>
+                    </a:solidFill>
+                  </a:tcPr>
+                </a:tc>
+                <a:tc>
+                  <a:txBody>
+                    <a:bodyPr wrap="square"/>
+                    <a:lstStyle/>
+                    <a:p>
+                      <a:pPr algn="l"/>
+                      <a:r>
+                        <a:rPr sz="900" b="0">
+                          <a:solidFill>
+                            <a:srgbClr val="FFFFFF"/>
+                          </a:solidFill>
+                          <a:latin typeface="Calibri"/>
+                        </a:rPr>
+                        <a:t>2 / 11 services</a:t>
+                      </a:r>
+                    </a:p>
+                  </a:txBody>
+                  <a:tcPr marL="76200" marR="76200" marT="38100" marB="38100">
+                    <a:solidFill>
+                      <a:srgbClr val="2A2A3E"/>
+                    </a:solidFill>
+                  </a:tcPr>
+                </a:tc>
+                <a:tc>
+                  <a:txBody>
+                    <a:bodyPr wrap="square"/>
+                    <a:lstStyle/>
+                    <a:p>
+                      <a:pPr algn="l"/>
+                      <a:r>
+                        <a:rPr sz="900" b="0">
+                          <a:solidFill>
+                            <a:srgbClr val="FFFFFF"/>
+                          </a:solidFill>
+                          <a:latin typeface="Calibri"/>
+                        </a:rPr>
+                        <a:t>2</a:t>
+                      </a:r>
+                    </a:p>
+                  </a:txBody>
+                  <a:tcPr marL="76200" marR="76200" marT="38100" marB="38100">
+                    <a:solidFill>
+                      <a:srgbClr val="2A2A3E"/>
+                    </a:solidFill>
+                  </a:tcPr>
+                </a:tc>
+                <a:tc>
+                  <a:txBody>
+                    <a:bodyPr wrap="square"/>
+                    <a:lstStyle/>
+                    <a:p>
+                      <a:pPr algn="l"/>
+                      <a:r>
+                        <a:rPr sz="900" b="0">
+                          <a:solidFill>
+                            <a:srgbClr val="FFFFFF"/>
+                          </a:solidFill>
+                          <a:latin typeface="Calibri"/>
+                        </a:rPr>
+                        <a:t>33.1 s</a:t>
                       </a:r>
                     </a:p>
                   </a:txBody>
@@ -5970,8 +6935,8 @@
         </p:nvSpPr>
         <p:spPr>
           <a:xfrm>
-            <a:off x="640080" y="3063240"/>
-            <a:ext cx="5577840" cy="2194560"/>
+            <a:off x="640080" y="3840480"/>
+            <a:ext cx="5577840" cy="1417320"/>
           </a:xfrm>
           <a:prstGeom prst="rect">
             <a:avLst/>
@@ -5999,15 +6964,15 @@
               </a:defRPr>
             </a:pPr>
             <a:r>
-              <a:t>• Blast radius = services at 0 ready endpoints at the</a:t>
+              <a:t>• Observed blast = placement-predicted blast for ALL 6</a:t>
             </a:r>
             <a:br/>
             <a:r>
-              <a:t>  outage trough, read from EndpointSlice snapshots —</a:t>
+              <a:t>  placing strategies — Spearman ρ = 1.0 (n = 6); read from</a:t>
             </a:r>
             <a:br/>
             <a:r>
-              <a:t>  not the score (a drain leaves every probe Unknown; H1)</a:t>
+              <a:t>  EndpointSlice troughs, not the score (probes Unknown; H1)</a:t>
             </a:r>
           </a:p>
           <a:p>
@@ -6026,13 +6991,121 @@
               </a:defRPr>
             </a:pPr>
             <a:r>
-              <a:t>• Observed blast equals the placement-predicted blast</a:t>
+              <a:t>• Recovery is NOT monotone in blast (4.6 s and 33.3 s both</a:t>
             </a:r>
             <a:br/>
             <a:r>
-              <a:t>  in every iteration, across two doctor-clean batches</a:t>
-            </a:r>
-          </a:p>
+              <a:t>  at intermediate blast) — the ~4× contrast (10.3 s vs 2.6 s)</a:t>
+            </a:r>
+            <a:br/>
+            <a:r>
+              <a:t>  is claimed only at the colocate-vs-spread extremes</a:t>
+            </a:r>
+          </a:p>
+        </p:txBody>
+      </p:sp>
+      <p:sp>
+        <p:nvSpPr>
+          <p:cNvPr id="8" name="Rounded Rectangle 7"/>
+          <p:cNvSpPr/>
+          <p:nvPr/>
+        </p:nvSpPr>
+        <p:spPr>
+          <a:xfrm>
+            <a:off x="6675120" y="1280160"/>
+            <a:ext cx="5029200" cy="4023360"/>
+          </a:xfrm>
+          <a:prstGeom prst="roundRect">
+            <a:avLst/>
+          </a:prstGeom>
+          <a:solidFill>
+            <a:srgbClr val="121222"/>
+          </a:solidFill>
+          <a:ln w="25400">
+            <a:solidFill>
+              <a:srgbClr val="9B59B6"/>
+            </a:solidFill>
+          </a:ln>
+        </p:spPr>
+        <p:style>
+          <a:lnRef idx="1">
+            <a:schemeClr val="accent1"/>
+          </a:lnRef>
+          <a:fillRef idx="3">
+            <a:schemeClr val="accent1"/>
+          </a:fillRef>
+          <a:effectRef idx="2">
+            <a:schemeClr val="accent1"/>
+          </a:effectRef>
+          <a:fontRef idx="minor">
+            <a:schemeClr val="lt1"/>
+          </a:fontRef>
+        </p:style>
+        <p:txBody>
+          <a:bodyPr rtlCol="0" anchor="ctr"/>
+          <a:lstStyle/>
+          <a:p>
+            <a:pPr algn="ctr"/>
+          </a:p>
+        </p:txBody>
+      </p:sp>
+      <p:sp>
+        <p:nvSpPr>
+          <p:cNvPr id="9" name="TextBox 8"/>
+          <p:cNvSpPr txBox="1"/>
+          <p:nvPr/>
+        </p:nvSpPr>
+        <p:spPr>
+          <a:xfrm>
+            <a:off x="6858000" y="1325880"/>
+            <a:ext cx="4663440" cy="274320"/>
+          </a:xfrm>
+          <a:prstGeom prst="rect">
+            <a:avLst/>
+          </a:prstGeom>
+          <a:noFill/>
+        </p:spPr>
+        <p:txBody>
+          <a:bodyPr wrap="square">
+            <a:spAutoFit/>
+          </a:bodyPr>
+          <a:lstStyle/>
+          <a:p>
+            <a:pPr algn="l">
+              <a:defRPr sz="1400" b="1">
+                <a:solidFill>
+                  <a:srgbClr val="9B59B6"/>
+                </a:solidFill>
+                <a:latin typeface="Calibri"/>
+              </a:defRPr>
+            </a:pPr>
+            <a:r>
+              <a:t>One placement property, two opposing consequences</a:t>
+            </a:r>
+          </a:p>
+        </p:txBody>
+      </p:sp>
+      <p:sp>
+        <p:nvSpPr>
+          <p:cNvPr id="10" name="TextBox 9"/>
+          <p:cNvSpPr txBox="1"/>
+          <p:nvPr/>
+        </p:nvSpPr>
+        <p:spPr>
+          <a:xfrm>
+            <a:off x="6858000" y="1691640"/>
+            <a:ext cx="4663440" cy="3474720"/>
+          </a:xfrm>
+          <a:prstGeom prst="rect">
+            <a:avLst/>
+          </a:prstGeom>
+          <a:noFill/>
+        </p:spPr>
+        <p:txBody>
+          <a:bodyPr wrap="square">
+            <a:spAutoFit/>
+          </a:bodyPr>
+          <a:lstStyle/>
           <a:p>
             <a:pPr>
               <a:spcBef>
@@ -6049,117 +7122,17 @@
               </a:defRPr>
             </a:pPr>
             <a:r>
-              <a:t>• Recovery scales with concentration too: 11 evicted</a:t>
+              <a:t>• colocate: best east-west tail (H5: ~33–34 ms</a:t>
             </a:r>
             <a:br/>
             <a:r>
-              <a:t>  pods reschedule at once vs 2 — ~4× slower</a:t>
-            </a:r>
-          </a:p>
-        </p:txBody>
-      </p:sp>
-      <p:sp>
-        <p:nvSpPr>
-          <p:cNvPr id="8" name="Rounded Rectangle 7"/>
-          <p:cNvSpPr/>
-          <p:nvPr/>
-        </p:nvSpPr>
-        <p:spPr>
-          <a:xfrm>
-            <a:off x="6675120" y="1280160"/>
-            <a:ext cx="5029200" cy="4023360"/>
-          </a:xfrm>
-          <a:prstGeom prst="roundRect">
-            <a:avLst/>
-          </a:prstGeom>
-          <a:solidFill>
-            <a:srgbClr val="121222"/>
-          </a:solidFill>
-          <a:ln w="25400">
-            <a:solidFill>
-              <a:srgbClr val="9B59B6"/>
-            </a:solidFill>
-          </a:ln>
-        </p:spPr>
-        <p:style>
-          <a:lnRef idx="1">
-            <a:schemeClr val="accent1"/>
-          </a:lnRef>
-          <a:fillRef idx="3">
-            <a:schemeClr val="accent1"/>
-          </a:fillRef>
-          <a:effectRef idx="2">
-            <a:schemeClr val="accent1"/>
-          </a:effectRef>
-          <a:fontRef idx="minor">
-            <a:schemeClr val="lt1"/>
-          </a:fontRef>
-        </p:style>
-        <p:txBody>
-          <a:bodyPr rtlCol="0" anchor="ctr"/>
-          <a:lstStyle/>
-          <a:p>
-            <a:pPr algn="ctr"/>
-          </a:p>
-        </p:txBody>
-      </p:sp>
-      <p:sp>
-        <p:nvSpPr>
-          <p:cNvPr id="9" name="TextBox 8"/>
-          <p:cNvSpPr txBox="1"/>
-          <p:nvPr/>
-        </p:nvSpPr>
-        <p:spPr>
-          <a:xfrm>
-            <a:off x="6858000" y="1325880"/>
-            <a:ext cx="4663440" cy="274320"/>
-          </a:xfrm>
-          <a:prstGeom prst="rect">
-            <a:avLst/>
-          </a:prstGeom>
-          <a:noFill/>
-        </p:spPr>
-        <p:txBody>
-          <a:bodyPr wrap="square">
-            <a:spAutoFit/>
-          </a:bodyPr>
-          <a:lstStyle/>
-          <a:p>
-            <a:pPr algn="l">
-              <a:defRPr sz="1400" b="1">
-                <a:solidFill>
-                  <a:srgbClr val="9B59B6"/>
-                </a:solidFill>
-                <a:latin typeface="Calibri"/>
-              </a:defRPr>
-            </a:pPr>
-            <a:r>
-              <a:t>One placement property, two opposing consequences</a:t>
-            </a:r>
-          </a:p>
-        </p:txBody>
-      </p:sp>
-      <p:sp>
-        <p:nvSpPr>
-          <p:cNvPr id="10" name="TextBox 9"/>
-          <p:cNvSpPr txBox="1"/>
-          <p:nvPr/>
-        </p:nvSpPr>
-        <p:spPr>
-          <a:xfrm>
-            <a:off x="6858000" y="1691640"/>
-            <a:ext cx="4663440" cy="3474720"/>
-          </a:xfrm>
-          <a:prstGeom prst="rect">
-            <a:avLst/>
-          </a:prstGeom>
-          <a:noFill/>
-        </p:spPr>
-        <p:txBody>
-          <a:bodyPr wrap="square">
-            <a:spAutoFit/>
-          </a:bodyPr>
-          <a:lstStyle/>
+              <a:t>  in both batches) AND worst node-failure</a:t>
+            </a:r>
+            <a:br/>
+            <a:r>
+              <a:t>  blast (100% outage) — spread is the mirror</a:t>
+            </a:r>
+          </a:p>
           <a:p>
             <a:pPr>
               <a:spcBef>
@@ -6176,15 +7149,11 @@
               </a:defRPr>
             </a:pPr>
             <a:r>
-              <a:t>• colocate: best east-west tail (H5: 33.9 ms,</a:t>
+              <a:t>• H5 is the latency face, H6 the availability</a:t>
             </a:r>
             <a:br/>
             <a:r>
-              <a:t>  lowest) AND worst node-failure blast</a:t>
-            </a:r>
-            <a:br/>
-            <a:r>
-              <a:t>  (100% outage) — spread is the mirror</a:t>
+              <a:t>  face of the same co-location metric</a:t>
             </a:r>
           </a:p>
           <a:p>
@@ -6203,11 +7172,15 @@
               </a:defRPr>
             </a:pPr>
             <a:r>
-              <a:t>• H5 is the latency face, H6 the availability</a:t>
+              <a:t>• Where placement DOES bite users in this</a:t>
             </a:r>
             <a:br/>
             <a:r>
-              <a:t>  face of the same co-location metric</a:t>
+              <a:t>  study is availability under node failure —</a:t>
+            </a:r>
+            <a:br/>
+            <a:r>
+              <a:t>  and it is predictable from the placement</a:t>
             </a:r>
           </a:p>
           <a:p>
@@ -6226,15 +7199,15 @@
               </a:defRPr>
             </a:pPr>
             <a:r>
-              <a:t>• Where placement DOES bite users in this</a:t>
+              <a:t>• Quantification of a known qualitative</a:t>
             </a:r>
             <a:br/>
             <a:r>
-              <a:t>  study is availability under node failure —</a:t>
+              <a:t>  trade-off (cell-based architectures), not</a:t>
             </a:r>
             <a:br/>
             <a:r>
-              <a:t>  and it is predictable from the placement</a:t>
+              <a:t>  a discovery</a:t>
             </a:r>
           </a:p>
           <a:p>
@@ -6253,38 +7226,11 @@
               </a:defRPr>
             </a:pPr>
             <a:r>
-              <a:t>• Quantification of a known qualitative</a:t>
+              <a:t>• Reproduced: two doctor-clean two-point</a:t>
             </a:r>
             <a:br/>
             <a:r>
-              <a:t>  trade-off (cell-based architectures), not</a:t>
-            </a:r>
-            <a:br/>
-            <a:r>
-              <a:t>  a discovery</a:t>
-            </a:r>
-          </a:p>
-          <a:p>
-            <a:pPr>
-              <a:spcBef>
-                <a:spcPts val="200"/>
-              </a:spcBef>
-              <a:spcAft>
-                <a:spcPts val="200"/>
-              </a:spcAft>
-              <a:defRPr sz="1000">
-                <a:solidFill>
-                  <a:srgbClr val="BDBDBD"/>
-                </a:solidFill>
-                <a:latin typeface="Calibri"/>
-              </a:defRPr>
-            </a:pPr>
-            <a:r>
-              <a:t>• Two-point contrast (the extremes); a</a:t>
-            </a:r>
-            <a:br/>
-            <a:r>
-              <a:t>  6-strategy gradient run extends this</a:t>
+              <a:t>  batches + a completed 6-strategy gradient</a:t>
             </a:r>
           </a:p>
         </p:txBody>
@@ -7837,7 +8783,7 @@
               </a:defRPr>
             </a:pPr>
             <a:r>
-              <a:t>The churn findings (H2, H3) rest on the colocate-vs-spread locality contrast; H5 covers all 8 placements but is single-batch; H6 is a two-point contrast of the extremes — a 6-strategy gradient run extends it. Intermediate placements are not yet validated per-hypothesis.</a:t>
+              <a:t>The churn findings (H2, H3) rest on the colocate-vs-spread locality contrast; H5 covers all 8 placements across two independent batches; H6's extremes contrast is extended by a completed 6-strategy gradient (blast ρ = 1.0) — but recovery is validated only at the extremes.</a:t>
             </a:r>
           </a:p>
         </p:txBody>
@@ -8488,7 +9434,11 @@
             </a:r>
             <a:br/>
             <a:r>
-              <a:t>  load-bearing: a pre-chaos placement predictor (H5)</a:t>
+              <a:t>  load-bearing: a replicated pre-chaos placement</a:t>
+            </a:r>
+            <a:br/>
+            <a:r>
+              <a:t>  separator (H5)</a:t>
             </a:r>
           </a:p>
           <a:p>
@@ -8857,11 +9807,15 @@
               </a:defRPr>
             </a:pPr>
             <a:r>
-              <a:t>• H6 gradient: intermediate placements between the</a:t>
+              <a:t>• Recovery dynamics across the H6 gradient — why</a:t>
             </a:r>
             <a:br/>
             <a:r>
-              <a:t>  extremes (6-strategy gradient run in flight)</a:t>
+              <a:t>  intermediate-blast placements recover</a:t>
+            </a:r>
+            <a:br/>
+            <a:r>
+              <a:t>  non-monotonically</a:t>
             </a:r>
           </a:p>
           <a:p>
@@ -8926,15 +9880,15 @@
               </a:defRPr>
             </a:pPr>
             <a:r>
-              <a:t>• Re-attribute the conntrack flush to its exact code</a:t>
+              <a:t>• Apportion the H2 flush between kernel TCP teardown</a:t>
             </a:r>
             <a:br/>
             <a:r>
-              <a:t>  path (upstream active flush is UDP-only; this</a:t>
+              <a:t>  and kube-proxy's UDP-only cleanup (steady-state,</a:t>
             </a:r>
             <a:br/>
             <a:r>
-              <a:t>  workload is TCP/gRPC)</a:t>
+              <a:t>  multi-iteration probe)</a:t>
             </a:r>
           </a:p>
           <a:p>
@@ -9646,7 +10600,7 @@
               </a:defRPr>
             </a:pPr>
             <a:r>
-              <a:t>ρ = 0.79</a:t>
+              <a:t>ρ = 1.0</a:t>
             </a:r>
           </a:p>
         </p:txBody>
@@ -9682,11 +10636,11 @@
               </a:defRPr>
             </a:pPr>
             <a:r>
-              <a:t>Graph</a:t>
+              <a:t>Blast Radius</a:t>
             </a:r>
             <a:br/>
             <a:r>
-              <a:t>Predictor</a:t>
+              <a:t>Predicted</a:t>
             </a:r>
           </a:p>
         </p:txBody>
@@ -12070,7 +13024,7 @@
               </a:defRPr>
             </a:pPr>
             <a:r>
-              <a:t>A graph metric predicts the east-west tail</a:t>
+              <a:t>A graph metric separates the placement regimes</a:t>
             </a:r>
           </a:p>
         </p:txBody>
@@ -12106,7 +13060,7 @@
               </a:defRPr>
             </a:pPr>
             <a:r>
-              <a:t>Cross-node call fraction (dependency graph + placement, pre-chaos) vs east-west p95: ρ = 0.79 (n = 8, p &lt; .05). Coarse — separates node-local from spreading placements — but makes the Neo4j graph analytically load-bearing.</a:t>
+              <a:t>Cross-node call fraction (dependency graph + placement, pre-chaos): the node-local pair (colocate, best-fit; fraction ≈ 0) takes the two lowest east-west tails of 8 in BOTH load batches (joint null ≈ 0.0013), ~1.25× below the spreading cluster. Continuous ρ = 0.79 (batch 1) did not replicate (0.25 n.s.) — a separator, not a smooth law.</a:t>
             </a:r>
           </a:p>
         </p:txBody>
@@ -12276,7 +13230,7 @@
               </a:defRPr>
             </a:pPr>
             <a:r>
-              <a:t>Node drain: colocate loses 11/11 services (100% blast, ~10.3 s recovery) vs spread 2/11 (18%, ~2.6 s); two doctor-clean batches. The co-location that wins H5's latency loses H6's availability.</a:t>
+              <a:t>Node drain: colocate loses 11/11 services (100% blast) vs spread 2/11 (18%). 6-strategy gradient: observed blast = placement-predicted blast (11, 4, 3, 3, 2, 2; ρ = 1.0, n = 6). Recovery is NOT monotone in blast — ~4× (10.3 s vs 2.6 s) only at the colocate-vs-spread extremes.</a:t>
             </a:r>
           </a:p>
         </p:txBody>
@@ -17029,7 +17983,7 @@
               </a:defRPr>
             </a:pPr>
             <a:r>
-              <a:t>Analytic weight: the churn findings (H2 conntrack reconvergence, H3 decoupling) rest on the colocate vs. spread locality contrast. All 8 placements enter the load matrix — H5's cross-node fraction is computed per strategy (n = 8) — and H6 contrasts the two extremes (colocate vs. spread) under node drain; a gradient run over the intermediate placements extends that two-point contrast.</a:t>
+              <a:t>Analytic weight: the churn findings (H2 conntrack reconvergence, H3 decoupling) rest on the colocate vs. spread locality contrast. All 8 placements enter the load matrix — H5's cross-node fraction is computed per strategy (n = 8, two independent batches) — and H6 spans the full 6-strategy gradient under node drain (observed blast = predicted for every strategy), with the recovery contrast scoped to the extremes.</a:t>
             </a:r>
           </a:p>
         </p:txBody>

--- a/ChaosProbe_Presentation.pptx
+++ b/ChaosProbe_Presentation.pptx
@@ -7766,7 +7766,11 @@
             </a:r>
             <a:br/>
             <a:r>
-              <a:t>  the application (LitmusChaos issue #3397)</a:t>
+              <a:t>  the application (litmus-go: % of node capacity,</a:t>
+            </a:r>
+            <a:br/>
+            <a:r>
+              <a:t>  clamped to allocatable)</a:t>
             </a:r>
           </a:p>
           <a:p>
